--- a/media/figstudio/fig01_evidence_map/fig01_evidence_synthesis_map_editable.pptx
+++ b/media/figstudio/fig01_evidence_map/fig01_evidence_synthesis_map_editable.pptx
@@ -7,7 +7,7 @@
   <p:sldIdLst>
     <p:sldId id="256" r:id="rId7"/>
   </p:sldIdLst>
-  <p:sldSz cx="12191999" cy="8127999" type="screen4x3"/>
+  <p:sldSz cx="12191999" cy="6095999" type="screen4x3"/>
   <p:notesSz cx="6858000" cy="9144000"/>
   <p:defaultTextStyle>
     <a:defPPr>
@@ -502,7 +502,7 @@
           <a:lstStyle/>
           <a:p>
             <a:r>
-              <a:t>图 1 不同文献对目标化合物合成研究的适用范围（super_teaser 第二轮 F03 → super_img2ppt 重建）</a:t>
+              <a:t>图 1 不同文献对目标化合物合成研究的适用范围（super_teaser 第三轮 R01 → super_img2ppt 重建）</a:t>
             </a:r>
           </a:p>
         </p:txBody>
@@ -3518,28 +3518,27 @@
       <p:grpSpPr/>
       <p:sp>
         <p:nvSpPr>
-          <p:cNvPr id="2" name="ring0" descr="Editable shape; source id ring0"/>
+          <p:cNvPr id="2" name="zA" descr="Editable shape; source id zA"/>
           <p:cNvSpPr/>
           <p:nvPr/>
         </p:nvSpPr>
         <p:spPr>
           <a:xfrm>
-            <a:off x="206374" y="1389062"/>
-            <a:ext cx="4397374" cy="4397374"/>
-          </a:xfrm>
-          <a:prstGeom prst="ellipse">
-            <a:avLst/>
+            <a:off x="192432" y="247413"/>
+            <a:ext cx="4618389" cy="5601172"/>
+          </a:xfrm>
+          <a:prstGeom prst="roundRect">
+            <a:avLst>
+              <a:gd name="adj" fmla="val 2380"/>
+            </a:avLst>
           </a:prstGeom>
           <a:solidFill>
-            <a:srgbClr val="FFFFFF"/>
+            <a:srgbClr val="EEF2F7"/>
           </a:solidFill>
-          <a:ln w="19843">
+          <a:ln w="10308">
             <a:solidFill>
-              <a:srgbClr val="8A9199"/>
+              <a:srgbClr val="5B7592"/>
             </a:solidFill>
-            <a:custDash>
-              <a:ds d="560000" sp="360000"/>
-            </a:custDash>
           </a:ln>
           <a:effectLst/>
         </p:spPr>
@@ -3567,198 +3566,14 @@
       </p:sp>
       <p:sp>
         <p:nvSpPr>
-          <p:cNvPr id="3" name="ring1" descr="Editable shape; source id ring1"/>
-          <p:cNvSpPr/>
-          <p:nvPr/>
-        </p:nvSpPr>
-        <p:spPr>
-          <a:xfrm>
-            <a:off x="714374" y="1897062"/>
-            <a:ext cx="3381374" cy="3381374"/>
-          </a:xfrm>
-          <a:prstGeom prst="ellipse">
-            <a:avLst/>
-          </a:prstGeom>
-          <a:solidFill>
-            <a:srgbClr val="F3F5F6"/>
-          </a:solidFill>
-          <a:ln w="19843">
-            <a:solidFill>
-              <a:srgbClr val="B5BDC4"/>
-            </a:solidFill>
-          </a:ln>
-          <a:effectLst/>
-        </p:spPr>
-        <p:style>
-          <a:lnRef idx="1">
-            <a:schemeClr val="accent1"/>
-          </a:lnRef>
-          <a:fillRef idx="3">
-            <a:schemeClr val="accent1"/>
-          </a:fillRef>
-          <a:effectRef idx="0">
-            <a:schemeClr val="accent1"/>
-          </a:effectRef>
-          <a:fontRef idx="minor">
-            <a:schemeClr val="lt1"/>
-          </a:fontRef>
-        </p:style>
-        <p:txBody>
-          <a:bodyPr rtlCol="0" anchor="ctr"/>
-          <a:lstStyle/>
-          <a:p>
-            <a:pPr algn="ctr"/>
-          </a:p>
-        </p:txBody>
-      </p:sp>
-      <p:sp>
-        <p:nvSpPr>
-          <p:cNvPr id="4" name="ring2" descr="Editable shape; source id ring2"/>
-          <p:cNvSpPr/>
-          <p:nvPr/>
-        </p:nvSpPr>
-        <p:spPr>
-          <a:xfrm>
-            <a:off x="1182687" y="2365374"/>
-            <a:ext cx="2444749" cy="2444749"/>
-          </a:xfrm>
-          <a:prstGeom prst="ellipse">
-            <a:avLst/>
-          </a:prstGeom>
-          <a:solidFill>
-            <a:srgbClr val="FFFFFF"/>
-          </a:solidFill>
-          <a:ln w="19843">
-            <a:solidFill>
-              <a:srgbClr val="B5BDC4"/>
-            </a:solidFill>
-          </a:ln>
-          <a:effectLst/>
-        </p:spPr>
-        <p:style>
-          <a:lnRef idx="1">
-            <a:schemeClr val="accent1"/>
-          </a:lnRef>
-          <a:fillRef idx="3">
-            <a:schemeClr val="accent1"/>
-          </a:fillRef>
-          <a:effectRef idx="0">
-            <a:schemeClr val="accent1"/>
-          </a:effectRef>
-          <a:fontRef idx="minor">
-            <a:schemeClr val="lt1"/>
-          </a:fontRef>
-        </p:style>
-        <p:txBody>
-          <a:bodyPr rtlCol="0" anchor="ctr"/>
-          <a:lstStyle/>
-          <a:p>
-            <a:pPr algn="ctr"/>
-          </a:p>
-        </p:txBody>
-      </p:sp>
-      <p:sp>
-        <p:nvSpPr>
-          <p:cNvPr id="5" name="ring3" descr="Editable shape; source id ring3"/>
-          <p:cNvSpPr/>
-          <p:nvPr/>
-        </p:nvSpPr>
-        <p:spPr>
-          <a:xfrm>
-            <a:off x="1579562" y="2762249"/>
-            <a:ext cx="1650999" cy="1650999"/>
-          </a:xfrm>
-          <a:prstGeom prst="ellipse">
-            <a:avLst/>
-          </a:prstGeom>
-          <a:solidFill>
-            <a:srgbClr val="F3F5F6"/>
-          </a:solidFill>
-          <a:ln w="19843">
-            <a:solidFill>
-              <a:srgbClr val="B5BDC4"/>
-            </a:solidFill>
-          </a:ln>
-          <a:effectLst/>
-        </p:spPr>
-        <p:style>
-          <a:lnRef idx="1">
-            <a:schemeClr val="accent1"/>
-          </a:lnRef>
-          <a:fillRef idx="3">
-            <a:schemeClr val="accent1"/>
-          </a:fillRef>
-          <a:effectRef idx="0">
-            <a:schemeClr val="accent1"/>
-          </a:effectRef>
-          <a:fontRef idx="minor">
-            <a:schemeClr val="lt1"/>
-          </a:fontRef>
-        </p:style>
-        <p:txBody>
-          <a:bodyPr rtlCol="0" anchor="ctr"/>
-          <a:lstStyle/>
-          <a:p>
-            <a:pPr algn="ctr"/>
-          </a:p>
-        </p:txBody>
-      </p:sp>
-      <p:sp>
-        <p:nvSpPr>
-          <p:cNvPr id="6" name="ring4" descr="Editable shape; source id ring4"/>
-          <p:cNvSpPr/>
-          <p:nvPr/>
-        </p:nvSpPr>
-        <p:spPr>
-          <a:xfrm>
-            <a:off x="1984374" y="3167062"/>
-            <a:ext cx="841374" cy="841374"/>
-          </a:xfrm>
-          <a:prstGeom prst="ellipse">
-            <a:avLst/>
-          </a:prstGeom>
-          <a:solidFill>
-            <a:srgbClr val="E3E7EA"/>
-          </a:solidFill>
-          <a:ln w="19843">
-            <a:solidFill>
-              <a:srgbClr val="B5BDC4"/>
-            </a:solidFill>
-          </a:ln>
-          <a:effectLst/>
-        </p:spPr>
-        <p:style>
-          <a:lnRef idx="1">
-            <a:schemeClr val="accent1"/>
-          </a:lnRef>
-          <a:fillRef idx="3">
-            <a:schemeClr val="accent1"/>
-          </a:fillRef>
-          <a:effectRef idx="0">
-            <a:schemeClr val="accent1"/>
-          </a:effectRef>
-          <a:fontRef idx="minor">
-            <a:schemeClr val="lt1"/>
-          </a:fontRef>
-        </p:style>
-        <p:txBody>
-          <a:bodyPr rtlCol="0" anchor="ctr"/>
-          <a:lstStyle/>
-          <a:p>
-            <a:pPr algn="ctr"/>
-          </a:p>
-        </p:txBody>
-      </p:sp>
-      <p:sp>
-        <p:nvSpPr>
-          <p:cNvPr id="7" name="ring0_t" descr="Editable text; source id ring0_t"/>
+          <p:cNvPr id="3" name="zA_l" descr="Editable text; source id zA_l"/>
           <p:cNvSpPr txBox="1"/>
           <p:nvPr/>
         </p:nvSpPr>
         <p:spPr>
           <a:xfrm>
-            <a:off x="1873249" y="1500187"/>
-            <a:ext cx="1063624" cy="285749"/>
+            <a:off x="316139" y="329884"/>
+            <a:ext cx="687260" cy="226795"/>
           </a:xfrm>
           <a:prstGeom prst="rect">
             <a:avLst/>
@@ -3772,9 +3587,9 @@
           </a:bodyPr>
           <a:lstStyle/>
           <a:p>
-            <a:pPr algn="ctr" fontAlgn="base">
+            <a:pPr algn="l" fontAlgn="base">
               <a:lnSpc>
-                <a:spcPts val="2187"/>
+                <a:spcPts val="1745"/>
               </a:lnSpc>
               <a:spcBef>
                 <a:spcPts val="0"/>
@@ -3782,9 +3597,9 @@
               <a:spcAft>
                 <a:spcPts val="0"/>
               </a:spcAft>
-              <a:defRPr sz="1499" b="1" i="0" lang="zh-CN" dirty="0">
+              <a:defRPr sz="1190" b="1" i="0" lang="zh-CN" dirty="0">
                 <a:solidFill>
-                  <a:srgbClr val="2B2F33"/>
+                  <a:srgbClr val="2B3E57"/>
                 </a:solidFill>
                 <a:latin typeface="Noto Sans CJK SC"/>
                 <a:ea typeface="Noto Sans CJK SC"/>
@@ -3792,29 +3607,77 @@
               </a:defRPr>
             </a:pPr>
             <a:r>
-              <a:rPr sz="1499" b="1" i="0" lang="zh-CN" dirty="0">
+              <a:rPr sz="1190" b="1" i="0" lang="zh-CN" dirty="0">
                 <a:solidFill>
-                  <a:srgbClr val="2B2F33"/>
+                  <a:srgbClr val="2B3E57"/>
                 </a:solidFill>
                 <a:latin typeface="Noto Sans CJK SC"/>
                 <a:ea typeface="Noto Sans CJK SC"/>
                 <a:cs typeface="Noto Sans CJK SC"/>
               </a:rPr>
-              <a:t>非相关资料</a:t>
-            </a:r>
-          </a:p>
-        </p:txBody>
-      </p:sp>
-      <p:sp>
-        <p:nvSpPr>
-          <p:cNvPr id="8" name="ring1_t" descr="Editable text; source id ring1_t"/>
+              <a:t>文献证据</a:t>
+            </a:r>
+          </a:p>
+        </p:txBody>
+      </p:sp>
+      <p:sp>
+        <p:nvSpPr>
+          <p:cNvPr id="4" name="zB" descr="Editable shape; source id zB"/>
+          <p:cNvSpPr/>
+          <p:nvPr/>
+        </p:nvSpPr>
+        <p:spPr>
+          <a:xfrm>
+            <a:off x="4948274" y="247413"/>
+            <a:ext cx="3230123" cy="5601172"/>
+          </a:xfrm>
+          <a:prstGeom prst="roundRect">
+            <a:avLst>
+              <a:gd name="adj" fmla="val 3404"/>
+            </a:avLst>
+          </a:prstGeom>
+          <a:solidFill>
+            <a:srgbClr val="E6F2F3"/>
+          </a:solidFill>
+          <a:ln w="10308">
+            <a:solidFill>
+              <a:srgbClr val="1F7F8C"/>
+            </a:solidFill>
+          </a:ln>
+          <a:effectLst/>
+        </p:spPr>
+        <p:style>
+          <a:lnRef idx="1">
+            <a:schemeClr val="accent1"/>
+          </a:lnRef>
+          <a:fillRef idx="3">
+            <a:schemeClr val="accent1"/>
+          </a:fillRef>
+          <a:effectRef idx="0">
+            <a:schemeClr val="accent1"/>
+          </a:effectRef>
+          <a:fontRef idx="minor">
+            <a:schemeClr val="lt1"/>
+          </a:fontRef>
+        </p:style>
+        <p:txBody>
+          <a:bodyPr rtlCol="0" anchor="ctr"/>
+          <a:lstStyle/>
+          <a:p>
+            <a:pPr algn="ctr"/>
+          </a:p>
+        </p:txBody>
+      </p:sp>
+      <p:sp>
+        <p:nvSpPr>
+          <p:cNvPr id="5" name="zB_l" descr="Editable text; source id zB_l"/>
           <p:cNvSpPr txBox="1"/>
           <p:nvPr/>
         </p:nvSpPr>
         <p:spPr>
           <a:xfrm>
-            <a:off x="1777999" y="1992312"/>
-            <a:ext cx="1254124" cy="285749"/>
+            <a:off x="5071981" y="329884"/>
+            <a:ext cx="687260" cy="226795"/>
           </a:xfrm>
           <a:prstGeom prst="rect">
             <a:avLst/>
@@ -3828,9 +3691,9 @@
           </a:bodyPr>
           <a:lstStyle/>
           <a:p>
-            <a:pPr algn="ctr" fontAlgn="base">
+            <a:pPr algn="l" fontAlgn="base">
               <a:lnSpc>
-                <a:spcPts val="2187"/>
+                <a:spcPts val="1745"/>
               </a:lnSpc>
               <a:spcBef>
                 <a:spcPts val="0"/>
@@ -3838,9 +3701,9 @@
               <a:spcAft>
                 <a:spcPts val="0"/>
               </a:spcAft>
-              <a:defRPr sz="1499" b="1" i="0" lang="zh-CN" dirty="0">
+              <a:defRPr sz="1190" b="1" i="0" lang="zh-CN" dirty="0">
                 <a:solidFill>
-                  <a:srgbClr val="2B2F33"/>
+                  <a:srgbClr val="0F4F58"/>
                 </a:solidFill>
                 <a:latin typeface="Noto Sans CJK SC"/>
                 <a:ea typeface="Noto Sans CJK SC"/>
@@ -3848,29 +3711,196 @@
               </a:defRPr>
             </a:pPr>
             <a:r>
-              <a:rPr sz="1499" b="1" i="0" lang="zh-CN" dirty="0">
+              <a:rPr sz="1190" b="1" i="0" lang="zh-CN" dirty="0">
                 <a:solidFill>
-                  <a:srgbClr val="2B2F33"/>
+                  <a:srgbClr val="0F4F58"/>
                 </a:solidFill>
                 <a:latin typeface="Noto Sans CJK SC"/>
                 <a:ea typeface="Noto Sans CJK SC"/>
                 <a:cs typeface="Noto Sans CJK SC"/>
               </a:rPr>
-              <a:t>工艺参照研究</a:t>
-            </a:r>
-          </a:p>
-        </p:txBody>
-      </p:sp>
-      <p:sp>
-        <p:nvSpPr>
-          <p:cNvPr id="9" name="ring2_t" descr="Editable text; source id ring2_t"/>
+              <a:t>实验方法</a:t>
+            </a:r>
+          </a:p>
+        </p:txBody>
+      </p:sp>
+      <p:sp>
+        <p:nvSpPr>
+          <p:cNvPr id="6" name="zC" descr="Editable shape; source id zC"/>
+          <p:cNvSpPr/>
+          <p:nvPr/>
+        </p:nvSpPr>
+        <p:spPr>
+          <a:xfrm>
+            <a:off x="8522029" y="247413"/>
+            <a:ext cx="3477537" cy="5601172"/>
+          </a:xfrm>
+          <a:prstGeom prst="roundRect">
+            <a:avLst>
+              <a:gd name="adj" fmla="val 3162"/>
+            </a:avLst>
+          </a:prstGeom>
+          <a:solidFill>
+            <a:srgbClr val="EEF2F7"/>
+          </a:solidFill>
+          <a:ln w="10308">
+            <a:solidFill>
+              <a:srgbClr val="5B7592"/>
+            </a:solidFill>
+          </a:ln>
+          <a:effectLst/>
+        </p:spPr>
+        <p:style>
+          <a:lnRef idx="1">
+            <a:schemeClr val="accent1"/>
+          </a:lnRef>
+          <a:fillRef idx="3">
+            <a:schemeClr val="accent1"/>
+          </a:fillRef>
+          <a:effectRef idx="0">
+            <a:schemeClr val="accent1"/>
+          </a:effectRef>
+          <a:fontRef idx="minor">
+            <a:schemeClr val="lt1"/>
+          </a:fontRef>
+        </p:style>
+        <p:txBody>
+          <a:bodyPr rtlCol="0" anchor="ctr"/>
+          <a:lstStyle/>
+          <a:p>
+            <a:pPr algn="ctr"/>
+          </a:p>
+        </p:txBody>
+      </p:sp>
+      <p:sp>
+        <p:nvSpPr>
+          <p:cNvPr id="7" name="a1" descr="Editable shape; source id a1"/>
+          <p:cNvSpPr/>
+          <p:nvPr/>
+        </p:nvSpPr>
+        <p:spPr>
+          <a:xfrm>
+            <a:off x="687260" y="810967"/>
+            <a:ext cx="2542863" cy="755986"/>
+          </a:xfrm>
+          <a:prstGeom prst="roundRect">
+            <a:avLst>
+              <a:gd name="adj" fmla="val 9090"/>
+            </a:avLst>
+          </a:prstGeom>
+          <a:solidFill>
+            <a:srgbClr val="FFFFFF"/>
+          </a:solidFill>
+          <a:ln w="10308">
+            <a:solidFill>
+              <a:srgbClr val="5B7592"/>
+            </a:solidFill>
+          </a:ln>
+          <a:effectLst/>
+        </p:spPr>
+        <p:style>
+          <a:lnRef idx="1">
+            <a:schemeClr val="accent1"/>
+          </a:lnRef>
+          <a:fillRef idx="3">
+            <a:schemeClr val="accent1"/>
+          </a:fillRef>
+          <a:effectRef idx="0">
+            <a:schemeClr val="accent1"/>
+          </a:effectRef>
+          <a:fontRef idx="minor">
+            <a:schemeClr val="lt1"/>
+          </a:fontRef>
+        </p:style>
+        <p:txBody>
+          <a:bodyPr rtlCol="0" anchor="ctr"/>
+          <a:lstStyle/>
+          <a:p>
+            <a:pPr algn="ctr"/>
+          </a:p>
+        </p:txBody>
+      </p:sp>
+      <p:sp>
+        <p:nvSpPr>
+          <p:cNvPr id="8" name="a1_s" descr="Editable shape; source id a1_s"/>
+          <p:cNvSpPr/>
+          <p:nvPr/>
+        </p:nvSpPr>
+        <p:spPr>
+          <a:xfrm>
+            <a:off x="687260" y="810967"/>
+            <a:ext cx="2542863" cy="54980"/>
+          </a:xfrm>
+          <a:prstGeom prst="roundRect">
+            <a:avLst>
+              <a:gd name="adj" fmla="val 50000"/>
+            </a:avLst>
+          </a:prstGeom>
+          <a:solidFill>
+            <a:srgbClr val="5B7592"/>
+          </a:solidFill>
+          <a:ln>
+            <a:noFill/>
+          </a:ln>
+          <a:effectLst/>
+        </p:spPr>
+        <p:style>
+          <a:lnRef idx="1">
+            <a:schemeClr val="accent1"/>
+          </a:lnRef>
+          <a:fillRef idx="3">
+            <a:schemeClr val="accent1"/>
+          </a:fillRef>
+          <a:effectRef idx="0">
+            <a:schemeClr val="accent1"/>
+          </a:effectRef>
+          <a:fontRef idx="minor">
+            <a:schemeClr val="lt1"/>
+          </a:fontRef>
+        </p:style>
+        <p:txBody>
+          <a:bodyPr rtlCol="0" anchor="ctr"/>
+          <a:lstStyle/>
+          <a:p>
+            <a:pPr algn="ctr"/>
+          </a:p>
+        </p:txBody>
+      </p:sp>
+      <p:pic>
+        <p:nvPicPr>
+          <p:cNvPr id="9" name="a1_i" descr="exact crop of the generated raster (line motif)"/>
+          <p:cNvPicPr>
+            <a:picLocks noChangeAspect="1"/>
+          </p:cNvPicPr>
+          <p:nvPr/>
+        </p:nvPicPr>
+        <p:blipFill>
+          <a:blip r:embed="rId2"/>
+          <a:stretch>
+            <a:fillRect/>
+          </a:stretch>
+        </p:blipFill>
+        <p:spPr>
+          <a:xfrm>
+            <a:off x="896660" y="1030890"/>
+            <a:ext cx="240970" cy="302394"/>
+          </a:xfrm>
+          <a:prstGeom prst="rect">
+            <a:avLst/>
+          </a:prstGeom>
+          <a:effectLst/>
+        </p:spPr>
+      </p:pic>
+      <p:sp>
+        <p:nvSpPr>
+          <p:cNvPr id="10" name="a1_t" descr="Editable text; source id a1_t"/>
           <p:cNvSpPr txBox="1"/>
           <p:nvPr/>
         </p:nvSpPr>
         <p:spPr>
           <a:xfrm>
-            <a:off x="1682749" y="2428874"/>
-            <a:ext cx="1444624" cy="285749"/>
+            <a:off x="1250813" y="1044635"/>
+            <a:ext cx="1800622" cy="268031"/>
           </a:xfrm>
           <a:prstGeom prst="rect">
             <a:avLst/>
@@ -3884,9 +3914,9 @@
           </a:bodyPr>
           <a:lstStyle/>
           <a:p>
-            <a:pPr algn="ctr" fontAlgn="base">
+            <a:pPr algn="l" fontAlgn="base">
               <a:lnSpc>
-                <a:spcPts val="2187"/>
+                <a:spcPts val="2002"/>
               </a:lnSpc>
               <a:spcBef>
                 <a:spcPts val="0"/>
@@ -3894,9 +3924,9 @@
               <a:spcAft>
                 <a:spcPts val="0"/>
               </a:spcAft>
-              <a:defRPr sz="1499" b="1" i="0" lang="zh-CN" dirty="0">
+              <a:defRPr sz="1366" b="1" i="0" lang="zh-CN" dirty="0">
                 <a:solidFill>
-                  <a:srgbClr val="2B2F33"/>
+                  <a:srgbClr val="2B3E57"/>
                 </a:solidFill>
                 <a:latin typeface="Noto Sans CJK SC"/>
                 <a:ea typeface="Noto Sans CJK SC"/>
@@ -3904,38 +3934,42 @@
               </a:defRPr>
             </a:pPr>
             <a:r>
-              <a:rPr sz="1499" b="1" i="0" lang="zh-CN" dirty="0">
+              <a:rPr sz="1366" b="1" i="0" lang="zh-CN" dirty="0">
                 <a:solidFill>
-                  <a:srgbClr val="2B2F33"/>
+                  <a:srgbClr val="2B3E57"/>
                 </a:solidFill>
                 <a:latin typeface="Noto Sans CJK SC"/>
                 <a:ea typeface="Noto Sans CJK SC"/>
                 <a:cs typeface="Noto Sans CJK SC"/>
               </a:rPr>
-              <a:t>结构相关化合物</a:t>
-            </a:r>
-          </a:p>
-        </p:txBody>
-      </p:sp>
-      <p:sp>
-        <p:nvSpPr>
-          <p:cNvPr id="10" name="disc" descr="Editable shape; source id disc"/>
+              <a:t>目标化合物直接报道</a:t>
+            </a:r>
+          </a:p>
+        </p:txBody>
+      </p:sp>
+      <p:sp>
+        <p:nvSpPr>
+          <p:cNvPr id="11" name="a2" descr="Editable shape; source id a2"/>
           <p:cNvSpPr/>
           <p:nvPr/>
         </p:nvSpPr>
         <p:spPr>
           <a:xfrm>
-            <a:off x="2190749" y="3373437"/>
-            <a:ext cx="428624" cy="428624"/>
-          </a:xfrm>
-          <a:prstGeom prst="ellipse">
-            <a:avLst/>
+            <a:off x="687260" y="1690660"/>
+            <a:ext cx="2542863" cy="755986"/>
+          </a:xfrm>
+          <a:prstGeom prst="roundRect">
+            <a:avLst>
+              <a:gd name="adj" fmla="val 9090"/>
+            </a:avLst>
           </a:prstGeom>
           <a:solidFill>
-            <a:srgbClr val="3A4046"/>
+            <a:srgbClr val="FFFFFF"/>
           </a:solidFill>
-          <a:ln>
-            <a:noFill/>
+          <a:ln w="10308">
+            <a:solidFill>
+              <a:srgbClr val="5B7592"/>
+            </a:solidFill>
           </a:ln>
           <a:effectLst/>
         </p:spPr>
@@ -3963,14 +3997,85 @@
       </p:sp>
       <p:sp>
         <p:nvSpPr>
-          <p:cNvPr id="11" name="lab_direct" descr="Editable text; source id lab_direct"/>
+          <p:cNvPr id="12" name="a2_s" descr="Editable shape; source id a2_s"/>
+          <p:cNvSpPr/>
+          <p:nvPr/>
+        </p:nvSpPr>
+        <p:spPr>
+          <a:xfrm>
+            <a:off x="687260" y="1690660"/>
+            <a:ext cx="2542863" cy="54980"/>
+          </a:xfrm>
+          <a:prstGeom prst="roundRect">
+            <a:avLst>
+              <a:gd name="adj" fmla="val 50000"/>
+            </a:avLst>
+          </a:prstGeom>
+          <a:solidFill>
+            <a:srgbClr val="5B7592"/>
+          </a:solidFill>
+          <a:ln>
+            <a:noFill/>
+          </a:ln>
+          <a:effectLst/>
+        </p:spPr>
+        <p:style>
+          <a:lnRef idx="1">
+            <a:schemeClr val="accent1"/>
+          </a:lnRef>
+          <a:fillRef idx="3">
+            <a:schemeClr val="accent1"/>
+          </a:fillRef>
+          <a:effectRef idx="0">
+            <a:schemeClr val="accent1"/>
+          </a:effectRef>
+          <a:fontRef idx="minor">
+            <a:schemeClr val="lt1"/>
+          </a:fontRef>
+        </p:style>
+        <p:txBody>
+          <a:bodyPr rtlCol="0" anchor="ctr"/>
+          <a:lstStyle/>
+          <a:p>
+            <a:pPr algn="ctr"/>
+          </a:p>
+        </p:txBody>
+      </p:sp>
+      <p:pic>
+        <p:nvPicPr>
+          <p:cNvPr id="13" name="a2_i" descr="exact crop of the generated raster (line motif)"/>
+          <p:cNvPicPr>
+            <a:picLocks noChangeAspect="1"/>
+          </p:cNvPicPr>
+          <p:nvPr/>
+        </p:nvPicPr>
+        <p:blipFill>
+          <a:blip r:embed="rId3"/>
+          <a:stretch>
+            <a:fillRect/>
+          </a:stretch>
+        </p:blipFill>
+        <p:spPr>
+          <a:xfrm>
+            <a:off x="891147" y="1910583"/>
+            <a:ext cx="251995" cy="302394"/>
+          </a:xfrm>
+          <a:prstGeom prst="rect">
+            <a:avLst/>
+          </a:prstGeom>
+          <a:effectLst/>
+        </p:spPr>
+      </p:pic>
+      <p:sp>
+        <p:nvSpPr>
+          <p:cNvPr id="14" name="a2_t" descr="Editable text; source id a2_t"/>
           <p:cNvSpPr txBox="1"/>
           <p:nvPr/>
         </p:nvSpPr>
         <p:spPr>
           <a:xfrm>
-            <a:off x="2619374" y="3857624"/>
-            <a:ext cx="1841499" cy="285749"/>
+            <a:off x="1250813" y="1924329"/>
+            <a:ext cx="1800622" cy="268031"/>
           </a:xfrm>
           <a:prstGeom prst="rect">
             <a:avLst/>
@@ -3984,9 +4089,9 @@
           </a:bodyPr>
           <a:lstStyle/>
           <a:p>
-            <a:pPr algn="ctr" fontAlgn="base">
+            <a:pPr algn="l" fontAlgn="base">
               <a:lnSpc>
-                <a:spcPts val="2187"/>
+                <a:spcPts val="2002"/>
               </a:lnSpc>
               <a:spcBef>
                 <a:spcPts val="0"/>
@@ -3994,9 +4099,9 @@
               <a:spcAft>
                 <a:spcPts val="0"/>
               </a:spcAft>
-              <a:defRPr sz="1499" b="1" i="0" lang="zh-CN" dirty="0">
+              <a:defRPr sz="1366" b="1" i="0" lang="zh-CN" dirty="0">
                 <a:solidFill>
-                  <a:srgbClr val="2B2F33"/>
+                  <a:srgbClr val="2B3E57"/>
                 </a:solidFill>
                 <a:latin typeface="Noto Sans CJK SC"/>
                 <a:ea typeface="Noto Sans CJK SC"/>
@@ -4004,29 +4109,170 @@
               </a:defRPr>
             </a:pPr>
             <a:r>
-              <a:rPr sz="1499" b="1" i="0" lang="zh-CN" dirty="0">
+              <a:rPr sz="1366" b="1" i="0" lang="zh-CN" dirty="0">
                 <a:solidFill>
-                  <a:srgbClr val="2B2F33"/>
+                  <a:srgbClr val="2B3E57"/>
                 </a:solidFill>
                 <a:latin typeface="Noto Sans CJK SC"/>
                 <a:ea typeface="Noto Sans CJK SC"/>
                 <a:cs typeface="Noto Sans CJK SC"/>
               </a:rPr>
-              <a:t>目标化合物直接报道</a:t>
-            </a:r>
-          </a:p>
-        </p:txBody>
-      </p:sp>
-      <p:sp>
-        <p:nvSpPr>
-          <p:cNvPr id="12" name="lab_lineage" descr="Editable text; source id lab_lineage"/>
+              <a:t>同类</a:t>
+            </a:r>
+            <a:r>
+              <a:rPr sz="1366" b="1" i="0" lang="zh-CN" dirty="0">
+                <a:solidFill>
+                  <a:srgbClr val="2B3E57"/>
+                </a:solidFill>
+                <a:latin typeface="DejaVu Sans"/>
+                <a:ea typeface="DejaVu Sans"/>
+                <a:cs typeface="DejaVu Sans"/>
+              </a:rPr>
+              <a:t> Ba–Y </a:t>
+            </a:r>
+            <a:r>
+              <a:rPr sz="1366" b="1" i="0" lang="zh-CN" dirty="0">
+                <a:solidFill>
+                  <a:srgbClr val="2B3E57"/>
+                </a:solidFill>
+                <a:latin typeface="Noto Sans CJK SC"/>
+                <a:ea typeface="Noto Sans CJK SC"/>
+                <a:cs typeface="Noto Sans CJK SC"/>
+              </a:rPr>
+              <a:t>四方硅酸盐</a:t>
+            </a:r>
+          </a:p>
+        </p:txBody>
+      </p:sp>
+      <p:sp>
+        <p:nvSpPr>
+          <p:cNvPr id="15" name="a3" descr="Editable shape; source id a3"/>
+          <p:cNvSpPr/>
+          <p:nvPr/>
+        </p:nvSpPr>
+        <p:spPr>
+          <a:xfrm>
+            <a:off x="687260" y="2570353"/>
+            <a:ext cx="2542863" cy="755986"/>
+          </a:xfrm>
+          <a:prstGeom prst="roundRect">
+            <a:avLst>
+              <a:gd name="adj" fmla="val 9090"/>
+            </a:avLst>
+          </a:prstGeom>
+          <a:solidFill>
+            <a:srgbClr val="FFFFFF"/>
+          </a:solidFill>
+          <a:ln w="10308">
+            <a:solidFill>
+              <a:srgbClr val="5B7592"/>
+            </a:solidFill>
+          </a:ln>
+          <a:effectLst/>
+        </p:spPr>
+        <p:style>
+          <a:lnRef idx="1">
+            <a:schemeClr val="accent1"/>
+          </a:lnRef>
+          <a:fillRef idx="3">
+            <a:schemeClr val="accent1"/>
+          </a:fillRef>
+          <a:effectRef idx="0">
+            <a:schemeClr val="accent1"/>
+          </a:effectRef>
+          <a:fontRef idx="minor">
+            <a:schemeClr val="lt1"/>
+          </a:fontRef>
+        </p:style>
+        <p:txBody>
+          <a:bodyPr rtlCol="0" anchor="ctr"/>
+          <a:lstStyle/>
+          <a:p>
+            <a:pPr algn="ctr"/>
+          </a:p>
+        </p:txBody>
+      </p:sp>
+      <p:sp>
+        <p:nvSpPr>
+          <p:cNvPr id="16" name="a3_s" descr="Editable shape; source id a3_s"/>
+          <p:cNvSpPr/>
+          <p:nvPr/>
+        </p:nvSpPr>
+        <p:spPr>
+          <a:xfrm>
+            <a:off x="687260" y="2570353"/>
+            <a:ext cx="2542863" cy="54980"/>
+          </a:xfrm>
+          <a:prstGeom prst="roundRect">
+            <a:avLst>
+              <a:gd name="adj" fmla="val 50000"/>
+            </a:avLst>
+          </a:prstGeom>
+          <a:solidFill>
+            <a:srgbClr val="5B7592"/>
+          </a:solidFill>
+          <a:ln>
+            <a:noFill/>
+          </a:ln>
+          <a:effectLst/>
+        </p:spPr>
+        <p:style>
+          <a:lnRef idx="1">
+            <a:schemeClr val="accent1"/>
+          </a:lnRef>
+          <a:fillRef idx="3">
+            <a:schemeClr val="accent1"/>
+          </a:fillRef>
+          <a:effectRef idx="0">
+            <a:schemeClr val="accent1"/>
+          </a:effectRef>
+          <a:fontRef idx="minor">
+            <a:schemeClr val="lt1"/>
+          </a:fontRef>
+        </p:style>
+        <p:txBody>
+          <a:bodyPr rtlCol="0" anchor="ctr"/>
+          <a:lstStyle/>
+          <a:p>
+            <a:pPr algn="ctr"/>
+          </a:p>
+        </p:txBody>
+      </p:sp>
+      <p:pic>
+        <p:nvPicPr>
+          <p:cNvPr id="17" name="a3_i" descr="exact crop of the generated raster (line motif)"/>
+          <p:cNvPicPr>
+            <a:picLocks noChangeAspect="1"/>
+          </p:cNvPicPr>
+          <p:nvPr/>
+        </p:nvPicPr>
+        <p:blipFill>
+          <a:blip r:embed="rId4"/>
+          <a:stretch>
+            <a:fillRect/>
+          </a:stretch>
+        </p:blipFill>
+        <p:spPr>
+          <a:xfrm>
+            <a:off x="892407" y="2790277"/>
+            <a:ext cx="249475" cy="302394"/>
+          </a:xfrm>
+          <a:prstGeom prst="rect">
+            <a:avLst/>
+          </a:prstGeom>
+          <a:effectLst/>
+        </p:spPr>
+      </p:pic>
+      <p:sp>
+        <p:nvSpPr>
+          <p:cNvPr id="18" name="a3_t" descr="Editable text; source id a3_t"/>
           <p:cNvSpPr txBox="1"/>
           <p:nvPr/>
         </p:nvSpPr>
         <p:spPr>
           <a:xfrm>
-            <a:off x="1309687" y="4619624"/>
-            <a:ext cx="2190749" cy="285749"/>
+            <a:off x="1250813" y="2804022"/>
+            <a:ext cx="1800622" cy="268031"/>
           </a:xfrm>
           <a:prstGeom prst="rect">
             <a:avLst/>
@@ -4040,9 +4286,9 @@
           </a:bodyPr>
           <a:lstStyle/>
           <a:p>
-            <a:pPr algn="ctr" fontAlgn="base">
+            <a:pPr algn="l" fontAlgn="base">
               <a:lnSpc>
-                <a:spcPts val="2187"/>
+                <a:spcPts val="2002"/>
               </a:lnSpc>
               <a:spcBef>
                 <a:spcPts val="0"/>
@@ -4050,9 +4296,9 @@
               <a:spcAft>
                 <a:spcPts val="0"/>
               </a:spcAft>
-              <a:defRPr sz="1499" b="1" i="0" lang="zh-CN" dirty="0">
+              <a:defRPr sz="1366" b="1" i="0" lang="zh-CN" dirty="0">
                 <a:solidFill>
-                  <a:srgbClr val="2B2F33"/>
+                  <a:srgbClr val="2B3E57"/>
                 </a:solidFill>
                 <a:latin typeface="Noto Sans CJK SC"/>
                 <a:ea typeface="Noto Sans CJK SC"/>
@@ -4060,51 +4306,336 @@
               </a:defRPr>
             </a:pPr>
             <a:r>
-              <a:rPr sz="1499" b="1" i="0" lang="zh-CN" dirty="0">
+              <a:rPr sz="1366" b="1" i="0" lang="zh-CN" dirty="0">
                 <a:solidFill>
-                  <a:srgbClr val="2B2F33"/>
+                  <a:srgbClr val="2B3E57"/>
                 </a:solidFill>
                 <a:latin typeface="Noto Sans CJK SC"/>
                 <a:ea typeface="Noto Sans CJK SC"/>
                 <a:cs typeface="Noto Sans CJK SC"/>
               </a:rPr>
-              <a:t>同类</a:t>
-            </a:r>
-            <a:r>
-              <a:rPr sz="1499" b="1" i="0" lang="zh-CN" dirty="0">
+              <a:t>结构相关化合物</a:t>
+            </a:r>
+          </a:p>
+        </p:txBody>
+      </p:sp>
+      <p:sp>
+        <p:nvSpPr>
+          <p:cNvPr id="19" name="a4" descr="Editable shape; source id a4"/>
+          <p:cNvSpPr/>
+          <p:nvPr/>
+        </p:nvSpPr>
+        <p:spPr>
+          <a:xfrm>
+            <a:off x="687260" y="3450047"/>
+            <a:ext cx="2542863" cy="755986"/>
+          </a:xfrm>
+          <a:prstGeom prst="roundRect">
+            <a:avLst>
+              <a:gd name="adj" fmla="val 9090"/>
+            </a:avLst>
+          </a:prstGeom>
+          <a:solidFill>
+            <a:srgbClr val="FFFFFF"/>
+          </a:solidFill>
+          <a:ln w="10308">
+            <a:solidFill>
+              <a:srgbClr val="5B7592"/>
+            </a:solidFill>
+          </a:ln>
+          <a:effectLst/>
+        </p:spPr>
+        <p:style>
+          <a:lnRef idx="1">
+            <a:schemeClr val="accent1"/>
+          </a:lnRef>
+          <a:fillRef idx="3">
+            <a:schemeClr val="accent1"/>
+          </a:fillRef>
+          <a:effectRef idx="0">
+            <a:schemeClr val="accent1"/>
+          </a:effectRef>
+          <a:fontRef idx="minor">
+            <a:schemeClr val="lt1"/>
+          </a:fontRef>
+        </p:style>
+        <p:txBody>
+          <a:bodyPr rtlCol="0" anchor="ctr"/>
+          <a:lstStyle/>
+          <a:p>
+            <a:pPr algn="ctr"/>
+          </a:p>
+        </p:txBody>
+      </p:sp>
+      <p:sp>
+        <p:nvSpPr>
+          <p:cNvPr id="20" name="a4_s" descr="Editable shape; source id a4_s"/>
+          <p:cNvSpPr/>
+          <p:nvPr/>
+        </p:nvSpPr>
+        <p:spPr>
+          <a:xfrm>
+            <a:off x="687260" y="3450047"/>
+            <a:ext cx="2542863" cy="54980"/>
+          </a:xfrm>
+          <a:prstGeom prst="roundRect">
+            <a:avLst>
+              <a:gd name="adj" fmla="val 50000"/>
+            </a:avLst>
+          </a:prstGeom>
+          <a:solidFill>
+            <a:srgbClr val="5B7592"/>
+          </a:solidFill>
+          <a:ln>
+            <a:noFill/>
+          </a:ln>
+          <a:effectLst/>
+        </p:spPr>
+        <p:style>
+          <a:lnRef idx="1">
+            <a:schemeClr val="accent1"/>
+          </a:lnRef>
+          <a:fillRef idx="3">
+            <a:schemeClr val="accent1"/>
+          </a:fillRef>
+          <a:effectRef idx="0">
+            <a:schemeClr val="accent1"/>
+          </a:effectRef>
+          <a:fontRef idx="minor">
+            <a:schemeClr val="lt1"/>
+          </a:fontRef>
+        </p:style>
+        <p:txBody>
+          <a:bodyPr rtlCol="0" anchor="ctr"/>
+          <a:lstStyle/>
+          <a:p>
+            <a:pPr algn="ctr"/>
+          </a:p>
+        </p:txBody>
+      </p:sp>
+      <p:pic>
+        <p:nvPicPr>
+          <p:cNvPr id="21" name="a4_i" descr="exact crop of the generated raster (line motif)"/>
+          <p:cNvPicPr>
+            <a:picLocks noChangeAspect="1"/>
+          </p:cNvPicPr>
+          <p:nvPr/>
+        </p:nvPicPr>
+        <p:blipFill>
+          <a:blip r:embed="rId5"/>
+          <a:stretch>
+            <a:fillRect/>
+          </a:stretch>
+        </p:blipFill>
+        <p:spPr>
+          <a:xfrm>
+            <a:off x="872077" y="3669970"/>
+            <a:ext cx="290135" cy="302394"/>
+          </a:xfrm>
+          <a:prstGeom prst="rect">
+            <a:avLst/>
+          </a:prstGeom>
+          <a:effectLst/>
+        </p:spPr>
+      </p:pic>
+      <p:sp>
+        <p:nvSpPr>
+          <p:cNvPr id="22" name="a4_t" descr="Editable text; source id a4_t"/>
+          <p:cNvSpPr txBox="1"/>
+          <p:nvPr/>
+        </p:nvSpPr>
+        <p:spPr>
+          <a:xfrm>
+            <a:off x="1250813" y="3683715"/>
+            <a:ext cx="1800622" cy="268031"/>
+          </a:xfrm>
+          <a:prstGeom prst="rect">
+            <a:avLst/>
+          </a:prstGeom>
+          <a:noFill/>
+          <a:effectLst/>
+        </p:spPr>
+        <p:txBody>
+          <a:bodyPr wrap="none" anchor="ctr" tIns="0" rIns="0" bIns="0" lIns="0" anchorCtr="0" vertOverflow="overflow">
+            <a:noAutofit/>
+          </a:bodyPr>
+          <a:lstStyle/>
+          <a:p>
+            <a:pPr algn="l" fontAlgn="base">
+              <a:lnSpc>
+                <a:spcPts val="2002"/>
+              </a:lnSpc>
+              <a:spcBef>
+                <a:spcPts val="0"/>
+              </a:spcBef>
+              <a:spcAft>
+                <a:spcPts val="0"/>
+              </a:spcAft>
+              <a:defRPr sz="1366" b="1" i="0" lang="zh-CN" dirty="0">
                 <a:solidFill>
-                  <a:srgbClr val="2B2F33"/>
+                  <a:srgbClr val="2B3E57"/>
                 </a:solidFill>
-                <a:latin typeface="DejaVu Sans"/>
-                <a:ea typeface="DejaVu Sans"/>
-                <a:cs typeface="DejaVu Sans"/>
-              </a:rPr>
-              <a:t> Ba–Y </a:t>
-            </a:r>
-            <a:r>
-              <a:rPr sz="1499" b="1" i="0" lang="zh-CN" dirty="0">
+                <a:latin typeface="Noto Sans CJK SC"/>
+                <a:ea typeface="Noto Sans CJK SC"/>
+                <a:cs typeface="Noto Sans CJK SC"/>
+              </a:defRPr>
+            </a:pPr>
+            <a:r>
+              <a:rPr sz="1366" b="1" i="0" lang="zh-CN" dirty="0">
                 <a:solidFill>
-                  <a:srgbClr val="2B2F33"/>
+                  <a:srgbClr val="2B3E57"/>
                 </a:solidFill>
                 <a:latin typeface="Noto Sans CJK SC"/>
                 <a:ea typeface="Noto Sans CJK SC"/>
                 <a:cs typeface="Noto Sans CJK SC"/>
               </a:rPr>
-              <a:t>四方硅酸盐</a:t>
-            </a:r>
-          </a:p>
-        </p:txBody>
-      </p:sp>
-      <p:sp>
-        <p:nvSpPr>
-          <p:cNvPr id="13" name="axis" descr="Editable line; source id axis"/>
+              <a:t>工艺参照研究</a:t>
+            </a:r>
+          </a:p>
+        </p:txBody>
+      </p:sp>
+      <p:sp>
+        <p:nvSpPr>
+          <p:cNvPr id="23" name="a5" descr="Editable shape; source id a5"/>
           <p:cNvSpPr/>
           <p:nvPr/>
         </p:nvSpPr>
         <p:spPr>
           <a:xfrm>
-            <a:off x="2573115" y="1905000"/>
-            <a:ext cx="1713135" cy="1515562"/>
+            <a:off x="687260" y="4535918"/>
+            <a:ext cx="2542863" cy="755986"/>
+          </a:xfrm>
+          <a:prstGeom prst="roundRect">
+            <a:avLst>
+              <a:gd name="adj" fmla="val 9090"/>
+            </a:avLst>
+          </a:prstGeom>
+          <a:solidFill>
+            <a:srgbClr val="FFFFFF"/>
+          </a:solidFill>
+          <a:ln w="10308">
+            <a:solidFill>
+              <a:srgbClr val="9AA3AB"/>
+            </a:solidFill>
+            <a:custDash>
+              <a:ds d="866667" sp="533333"/>
+            </a:custDash>
+          </a:ln>
+          <a:effectLst/>
+        </p:spPr>
+        <p:style>
+          <a:lnRef idx="1">
+            <a:schemeClr val="accent1"/>
+          </a:lnRef>
+          <a:fillRef idx="3">
+            <a:schemeClr val="accent1"/>
+          </a:fillRef>
+          <a:effectRef idx="0">
+            <a:schemeClr val="accent1"/>
+          </a:effectRef>
+          <a:fontRef idx="minor">
+            <a:schemeClr val="lt1"/>
+          </a:fontRef>
+        </p:style>
+        <p:txBody>
+          <a:bodyPr rtlCol="0" anchor="ctr"/>
+          <a:lstStyle/>
+          <a:p>
+            <a:pPr algn="ctr"/>
+          </a:p>
+        </p:txBody>
+      </p:sp>
+      <p:pic>
+        <p:nvPicPr>
+          <p:cNvPr id="24" name="a5_i" descr="exact crop of the generated raster (line motif)"/>
+          <p:cNvPicPr>
+            <a:picLocks noChangeAspect="1"/>
+          </p:cNvPicPr>
+          <p:nvPr/>
+        </p:nvPicPr>
+        <p:blipFill>
+          <a:blip r:embed="rId6"/>
+          <a:stretch>
+            <a:fillRect/>
+          </a:stretch>
+        </p:blipFill>
+        <p:spPr>
+          <a:xfrm>
+            <a:off x="871479" y="4700861"/>
+            <a:ext cx="291331" cy="302394"/>
+          </a:xfrm>
+          <a:prstGeom prst="rect">
+            <a:avLst/>
+          </a:prstGeom>
+          <a:effectLst/>
+        </p:spPr>
+      </p:pic>
+      <p:sp>
+        <p:nvSpPr>
+          <p:cNvPr id="25" name="a5_t" descr="Editable text; source id a5_t"/>
+          <p:cNvSpPr txBox="1"/>
+          <p:nvPr/>
+        </p:nvSpPr>
+        <p:spPr>
+          <a:xfrm>
+            <a:off x="1250813" y="4714606"/>
+            <a:ext cx="1800622" cy="268031"/>
+          </a:xfrm>
+          <a:prstGeom prst="rect">
+            <a:avLst/>
+          </a:prstGeom>
+          <a:noFill/>
+          <a:effectLst/>
+        </p:spPr>
+        <p:txBody>
+          <a:bodyPr wrap="none" anchor="ctr" tIns="0" rIns="0" bIns="0" lIns="0" anchorCtr="0" vertOverflow="overflow">
+            <a:noAutofit/>
+          </a:bodyPr>
+          <a:lstStyle/>
+          <a:p>
+            <a:pPr algn="l" fontAlgn="base">
+              <a:lnSpc>
+                <a:spcPts val="2002"/>
+              </a:lnSpc>
+              <a:spcBef>
+                <a:spcPts val="0"/>
+              </a:spcBef>
+              <a:spcAft>
+                <a:spcPts val="0"/>
+              </a:spcAft>
+              <a:defRPr sz="1366" b="1" i="0" lang="zh-CN" dirty="0">
+                <a:solidFill>
+                  <a:srgbClr val="5B6570"/>
+                </a:solidFill>
+                <a:latin typeface="Noto Sans CJK SC"/>
+                <a:ea typeface="Noto Sans CJK SC"/>
+                <a:cs typeface="Noto Sans CJK SC"/>
+              </a:defRPr>
+            </a:pPr>
+            <a:r>
+              <a:rPr sz="1366" b="1" i="0" lang="zh-CN" dirty="0">
+                <a:solidFill>
+                  <a:srgbClr val="5B6570"/>
+                </a:solidFill>
+                <a:latin typeface="Noto Sans CJK SC"/>
+                <a:ea typeface="Noto Sans CJK SC"/>
+                <a:cs typeface="Noto Sans CJK SC"/>
+              </a:rPr>
+              <a:t>非相关资料</a:t>
+            </a:r>
+          </a:p>
+        </p:txBody>
+      </p:sp>
+      <p:sp>
+        <p:nvSpPr>
+          <p:cNvPr id="26" name="ax_u" descr="Editable line; source id ax_u"/>
+          <p:cNvSpPr/>
+          <p:nvPr/>
+        </p:nvSpPr>
+        <p:spPr>
+          <a:xfrm>
+            <a:off x="487955" y="989655"/>
+            <a:ext cx="68726" cy="1759387"/>
           </a:xfrm>
           <a:custGeom>
             <a:avLst/>
@@ -4113,34 +4644,34 @@
             <a:cxnLst/>
             <a:rect l="l" t="t" r="r" b="b"/>
             <a:pathLst>
-              <a:path w="215828" h="190937">
+              <a:path w="10000" h="256000">
                 <a:moveTo>
-                  <a:pt x="0" y="189063"/>
+                  <a:pt x="4000" y="256000"/>
                 </a:moveTo>
                 <a:lnTo>
-                  <a:pt x="203011" y="9659"/>
+                  <a:pt x="4000" y="12000"/>
                 </a:lnTo>
                 <a:lnTo>
-                  <a:pt x="199534" y="5725"/>
+                  <a:pt x="0" y="12000"/>
                 </a:lnTo>
                 <a:lnTo>
-                  <a:pt x="215828" y="0"/>
+                  <a:pt x="5000" y="0"/>
                 </a:lnTo>
                 <a:lnTo>
-                  <a:pt x="208143" y="15466"/>
+                  <a:pt x="10000" y="12000"/>
                 </a:lnTo>
                 <a:lnTo>
-                  <a:pt x="204666" y="11532"/>
+                  <a:pt x="6000" y="12000"/>
                 </a:lnTo>
                 <a:lnTo>
-                  <a:pt x="1656" y="190937"/>
+                  <a:pt x="6000" y="256000"/>
                 </a:lnTo>
                 <a:close/>
               </a:path>
             </a:pathLst>
           </a:custGeom>
           <a:solidFill>
-            <a:srgbClr val="2B2F33"/>
+            <a:srgbClr val="3F4854"/>
           </a:solidFill>
           <a:ln>
             <a:noFill/>
@@ -4171,14 +4702,88 @@
       </p:sp>
       <p:sp>
         <p:nvSpPr>
-          <p:cNvPr id="14" name="axis_near" descr="Editable text; source id axis_near"/>
+          <p:cNvPr id="27" name="ax_d" descr="Editable line; source id ax_d"/>
+          <p:cNvSpPr/>
+          <p:nvPr/>
+        </p:nvSpPr>
+        <p:spPr>
+          <a:xfrm>
+            <a:off x="487955" y="3353831"/>
+            <a:ext cx="68726" cy="1759387"/>
+          </a:xfrm>
+          <a:custGeom>
+            <a:avLst/>
+            <a:gdLst/>
+            <a:ahLst/>
+            <a:cxnLst/>
+            <a:rect l="l" t="t" r="r" b="b"/>
+            <a:pathLst>
+              <a:path w="10000" h="256000">
+                <a:moveTo>
+                  <a:pt x="6000" y="0"/>
+                </a:moveTo>
+                <a:lnTo>
+                  <a:pt x="6000" y="244000"/>
+                </a:lnTo>
+                <a:lnTo>
+                  <a:pt x="10000" y="244000"/>
+                </a:lnTo>
+                <a:lnTo>
+                  <a:pt x="5000" y="256000"/>
+                </a:lnTo>
+                <a:lnTo>
+                  <a:pt x="0" y="244000"/>
+                </a:lnTo>
+                <a:lnTo>
+                  <a:pt x="4000" y="244000"/>
+                </a:lnTo>
+                <a:lnTo>
+                  <a:pt x="4000" y="0"/>
+                </a:lnTo>
+                <a:close/>
+              </a:path>
+            </a:pathLst>
+          </a:custGeom>
+          <a:solidFill>
+            <a:srgbClr val="3F4854"/>
+          </a:solidFill>
+          <a:ln>
+            <a:noFill/>
+          </a:ln>
+          <a:effectLst/>
+        </p:spPr>
+        <p:style>
+          <a:lnRef idx="1">
+            <a:schemeClr val="accent1"/>
+          </a:lnRef>
+          <a:fillRef idx="3">
+            <a:schemeClr val="accent1"/>
+          </a:fillRef>
+          <a:effectRef idx="0">
+            <a:schemeClr val="accent1"/>
+          </a:effectRef>
+          <a:fontRef idx="minor">
+            <a:schemeClr val="lt1"/>
+          </a:fontRef>
+        </p:style>
+        <p:txBody>
+          <a:bodyPr rtlCol="0" anchor="ctr"/>
+          <a:lstStyle/>
+          <a:p>
+            <a:pPr algn="ctr"/>
+          </a:p>
+        </p:txBody>
+      </p:sp>
+      <p:sp>
+        <p:nvSpPr>
+          <p:cNvPr id="28" name="ax_n" descr="Editable text; source id ax_n"/>
           <p:cNvSpPr txBox="1"/>
           <p:nvPr/>
         </p:nvSpPr>
         <p:spPr>
           <a:xfrm>
-            <a:off x="2857499" y="3317874"/>
-            <a:ext cx="317499" cy="269874"/>
+            <a:off x="357375" y="769731"/>
+            <a:ext cx="329884" cy="206178"/>
           </a:xfrm>
           <a:prstGeom prst="rect">
             <a:avLst/>
@@ -4194,7 +4799,7 @@
           <a:p>
             <a:pPr algn="ctr" fontAlgn="base">
               <a:lnSpc>
-                <a:spcPts val="2015"/>
+                <a:spcPts val="1582"/>
               </a:lnSpc>
               <a:spcBef>
                 <a:spcPts val="0"/>
@@ -4202,9 +4807,9 @@
               <a:spcAft>
                 <a:spcPts val="0"/>
               </a:spcAft>
-              <a:defRPr sz="1374" b="1" i="0" lang="zh-CN" dirty="0">
+              <a:defRPr sz="1082" b="1" i="0" lang="zh-CN" dirty="0">
                 <a:solidFill>
-                  <a:srgbClr val="2B2F33"/>
+                  <a:srgbClr val="3F4854"/>
                 </a:solidFill>
                 <a:latin typeface="Noto Sans CJK SC"/>
                 <a:ea typeface="Noto Sans CJK SC"/>
@@ -4212,9 +4817,9 @@
               </a:defRPr>
             </a:pPr>
             <a:r>
-              <a:rPr sz="1374" b="1" i="0" lang="zh-CN" dirty="0">
+              <a:rPr sz="1082" b="1" i="0" lang="zh-CN" dirty="0">
                 <a:solidFill>
-                  <a:srgbClr val="2B2F33"/>
+                  <a:srgbClr val="3F4854"/>
                 </a:solidFill>
                 <a:latin typeface="Noto Sans CJK SC"/>
                 <a:ea typeface="Noto Sans CJK SC"/>
@@ -4227,14 +4832,14 @@
       </p:sp>
       <p:sp>
         <p:nvSpPr>
-          <p:cNvPr id="15" name="axis_far" descr="Editable text; source id axis_far"/>
+          <p:cNvPr id="29" name="ax_f" descr="Editable text; source id ax_f"/>
           <p:cNvSpPr txBox="1"/>
           <p:nvPr/>
         </p:nvSpPr>
         <p:spPr>
           <a:xfrm>
-            <a:off x="4349749" y="1762124"/>
-            <a:ext cx="317499" cy="269874"/>
+            <a:off x="357375" y="5126962"/>
+            <a:ext cx="329884" cy="206178"/>
           </a:xfrm>
           <a:prstGeom prst="rect">
             <a:avLst/>
@@ -4250,7 +4855,7 @@
           <a:p>
             <a:pPr algn="ctr" fontAlgn="base">
               <a:lnSpc>
-                <a:spcPts val="2015"/>
+                <a:spcPts val="1582"/>
               </a:lnSpc>
               <a:spcBef>
                 <a:spcPts val="0"/>
@@ -4258,9 +4863,9 @@
               <a:spcAft>
                 <a:spcPts val="0"/>
               </a:spcAft>
-              <a:defRPr sz="1374" b="1" i="0" lang="zh-CN" dirty="0">
+              <a:defRPr sz="1082" b="1" i="0" lang="zh-CN" dirty="0">
                 <a:solidFill>
-                  <a:srgbClr val="2B2F33"/>
+                  <a:srgbClr val="3F4854"/>
                 </a:solidFill>
                 <a:latin typeface="Noto Sans CJK SC"/>
                 <a:ea typeface="Noto Sans CJK SC"/>
@@ -4268,9 +4873,9 @@
               </a:defRPr>
             </a:pPr>
             <a:r>
-              <a:rPr sz="1374" b="1" i="0" lang="zh-CN" dirty="0">
+              <a:rPr sz="1082" b="1" i="0" lang="zh-CN" dirty="0">
                 <a:solidFill>
-                  <a:srgbClr val="2B2F33"/>
+                  <a:srgbClr val="3F4854"/>
                 </a:solidFill>
                 <a:latin typeface="Noto Sans CJK SC"/>
                 <a:ea typeface="Noto Sans CJK SC"/>
@@ -4283,14 +4888,14 @@
       </p:sp>
       <p:sp>
         <p:nvSpPr>
-          <p:cNvPr id="16" name="axis_lab" descr="Editable text; source id axis_lab"/>
+          <p:cNvPr id="30" name="ax_l" descr="Editable text; source id ax_l"/>
           <p:cNvSpPr txBox="1"/>
           <p:nvPr/>
         </p:nvSpPr>
         <p:spPr>
-          <a:xfrm>
-            <a:off x="3730624" y="2635249"/>
-            <a:ext cx="1127124" cy="238124"/>
+          <a:xfrm rot="16200000">
+            <a:off x="-233668" y="2948347"/>
+            <a:ext cx="1072126" cy="206178"/>
           </a:xfrm>
           <a:prstGeom prst="rect">
             <a:avLst/>
@@ -4306,7 +4911,7 @@
           <a:p>
             <a:pPr algn="ctr" fontAlgn="base">
               <a:lnSpc>
-                <a:spcPts val="1734"/>
+                <a:spcPts val="1582"/>
               </a:lnSpc>
               <a:spcBef>
                 <a:spcPts val="0"/>
@@ -4314,9 +4919,9 @@
               <a:spcAft>
                 <a:spcPts val="0"/>
               </a:spcAft>
-              <a:defRPr sz="1187" b="0" i="0" lang="zh-CN" dirty="0">
+              <a:defRPr sz="1082" b="0" i="0" lang="zh-CN" dirty="0">
                 <a:solidFill>
-                  <a:srgbClr val="3A4046"/>
+                  <a:srgbClr val="3F4854"/>
                 </a:solidFill>
                 <a:latin typeface="Noto Sans CJK SC"/>
                 <a:ea typeface="Noto Sans CJK SC"/>
@@ -4324,9 +4929,9 @@
               </a:defRPr>
             </a:pPr>
             <a:r>
-              <a:rPr sz="1187" b="0" i="0" lang="zh-CN" dirty="0">
+              <a:rPr sz="1082" b="0" i="0" lang="zh-CN" dirty="0">
                 <a:solidFill>
-                  <a:srgbClr val="3A4046"/>
+                  <a:srgbClr val="3F4854"/>
                 </a:solidFill>
                 <a:latin typeface="Noto Sans CJK SC"/>
                 <a:ea typeface="Noto Sans CJK SC"/>
@@ -4337,64 +4942,28 @@
           </a:p>
         </p:txBody>
       </p:sp>
-      <p:cxnSp>
-        <p:nvCxnSpPr>
-          <p:cNvPr id="17" name="bundle_a" descr="Editable line; source id bundle_a"/>
-          <p:cNvCxnSpPr/>
-          <p:nvPr/>
-        </p:nvCxnSpPr>
-        <p:spPr>
-          <a:xfrm>
-            <a:off x="2651124" y="3587749"/>
-            <a:ext cx="1706563" cy="0"/>
-          </a:xfrm>
-          <a:prstGeom prst="line">
-            <a:avLst/>
-          </a:prstGeom>
-          <a:ln w="47624">
-            <a:solidFill>
-              <a:srgbClr val="1F6F78"/>
-            </a:solidFill>
-          </a:ln>
-          <a:effectLst/>
-        </p:spPr>
-        <p:style>
-          <a:lnRef idx="2">
-            <a:schemeClr val="accent1"/>
-          </a:lnRef>
-          <a:fillRef idx="0">
-            <a:schemeClr val="accent1"/>
-          </a:fillRef>
-          <a:effectRef idx="0">
-            <a:schemeClr val="accent1"/>
-          </a:effectRef>
-          <a:fontRef idx="minor">
-            <a:schemeClr val="tx1"/>
-          </a:fontRef>
-        </p:style>
-      </p:cxnSp>
-      <p:sp>
-        <p:nvSpPr>
-          <p:cNvPr id="18" name="tag" descr="Editable shape; source id tag"/>
+      <p:sp>
+        <p:nvSpPr>
+          <p:cNvPr id="31" name="led" descr="Editable shape; source id led"/>
           <p:cNvSpPr/>
           <p:nvPr/>
         </p:nvSpPr>
         <p:spPr>
           <a:xfrm>
-            <a:off x="4381499" y="3301999"/>
-            <a:ext cx="1992312" cy="404812"/>
+            <a:off x="5498083" y="1030890"/>
+            <a:ext cx="2529118" cy="3848658"/>
           </a:xfrm>
           <a:prstGeom prst="roundRect">
             <a:avLst>
-              <a:gd name="adj" fmla="val 15686"/>
+              <a:gd name="adj" fmla="val 2717"/>
             </a:avLst>
           </a:prstGeom>
           <a:solidFill>
             <a:srgbClr val="FFFFFF"/>
           </a:solidFill>
-          <a:ln w="19843">
+          <a:ln w="10308">
             <a:solidFill>
-              <a:srgbClr val="B8862B"/>
+              <a:srgbClr val="1F7F8C"/>
             </a:solidFill>
           </a:ln>
           <a:effectLst/>
@@ -4423,14 +4992,85 @@
       </p:sp>
       <p:sp>
         <p:nvSpPr>
-          <p:cNvPr id="19" name="tag_t" descr="Editable text; source id tag_t"/>
+          <p:cNvPr id="32" name="led_s" descr="Editable shape; source id led_s"/>
+          <p:cNvSpPr/>
+          <p:nvPr/>
+        </p:nvSpPr>
+        <p:spPr>
+          <a:xfrm>
+            <a:off x="5498083" y="1030890"/>
+            <a:ext cx="2529118" cy="54980"/>
+          </a:xfrm>
+          <a:prstGeom prst="roundRect">
+            <a:avLst>
+              <a:gd name="adj" fmla="val 50000"/>
+            </a:avLst>
+          </a:prstGeom>
+          <a:solidFill>
+            <a:srgbClr val="1F7F8C"/>
+          </a:solidFill>
+          <a:ln>
+            <a:noFill/>
+          </a:ln>
+          <a:effectLst/>
+        </p:spPr>
+        <p:style>
+          <a:lnRef idx="1">
+            <a:schemeClr val="accent1"/>
+          </a:lnRef>
+          <a:fillRef idx="3">
+            <a:schemeClr val="accent1"/>
+          </a:fillRef>
+          <a:effectRef idx="0">
+            <a:schemeClr val="accent1"/>
+          </a:effectRef>
+          <a:fontRef idx="minor">
+            <a:schemeClr val="lt1"/>
+          </a:fontRef>
+        </p:style>
+        <p:txBody>
+          <a:bodyPr rtlCol="0" anchor="ctr"/>
+          <a:lstStyle/>
+          <a:p>
+            <a:pPr algn="ctr"/>
+          </a:p>
+        </p:txBody>
+      </p:sp>
+      <p:pic>
+        <p:nvPicPr>
+          <p:cNvPr id="33" name="led_i" descr="exact crop of the generated raster (line motif)"/>
+          <p:cNvPicPr>
+            <a:picLocks noChangeAspect="1"/>
+          </p:cNvPicPr>
+          <p:nvPr/>
+        </p:nvPicPr>
+        <p:blipFill>
+          <a:blip r:embed="rId7"/>
+          <a:stretch>
+            <a:fillRect/>
+          </a:stretch>
+        </p:blipFill>
+        <p:spPr>
+          <a:xfrm>
+            <a:off x="5639917" y="1216450"/>
+            <a:ext cx="293629" cy="302394"/>
+          </a:xfrm>
+          <a:prstGeom prst="rect">
+            <a:avLst/>
+          </a:prstGeom>
+          <a:effectLst/>
+        </p:spPr>
+      </p:pic>
+      <p:sp>
+        <p:nvSpPr>
+          <p:cNvPr id="34" name="led_t" descr="Editable text; source id led_t"/>
           <p:cNvSpPr txBox="1"/>
           <p:nvPr/>
         </p:nvSpPr>
         <p:spPr>
           <a:xfrm>
-            <a:off x="4444999" y="3341687"/>
-            <a:ext cx="1865312" cy="325437"/>
+            <a:off x="6020401" y="1223323"/>
+            <a:ext cx="1869348" cy="288649"/>
           </a:xfrm>
           <a:prstGeom prst="rect">
             <a:avLst/>
@@ -4444,9 +5084,9 @@
           </a:bodyPr>
           <a:lstStyle/>
           <a:p>
-            <a:pPr algn="ctr" fontAlgn="base">
+            <a:pPr algn="l" fontAlgn="base">
               <a:lnSpc>
-                <a:spcPts val="2015"/>
+                <a:spcPts val="2151"/>
               </a:lnSpc>
               <a:spcBef>
                 <a:spcPts val="0"/>
@@ -4454,9 +5094,9 @@
               <a:spcAft>
                 <a:spcPts val="0"/>
               </a:spcAft>
-              <a:defRPr sz="1374" b="1" i="0" lang="zh-CN" dirty="0">
+              <a:defRPr sz="1471" b="1" i="0" lang="zh-CN" dirty="0">
                 <a:solidFill>
-                  <a:srgbClr val="7A5A1C"/>
+                  <a:srgbClr val="0F4F58"/>
                 </a:solidFill>
                 <a:latin typeface="Noto Sans CJK SC"/>
                 <a:ea typeface="Noto Sans CJK SC"/>
@@ -4464,173 +5104,29 @@
               </a:defRPr>
             </a:pPr>
             <a:r>
-              <a:rPr sz="1374" b="1" i="0" lang="zh-CN" dirty="0">
+              <a:rPr sz="1471" b="1" i="0" lang="zh-CN" dirty="0">
                 <a:solidFill>
-                  <a:srgbClr val="7A5A1C"/>
+                  <a:srgbClr val="0F4F58"/>
                 </a:solidFill>
                 <a:latin typeface="Noto Sans CJK SC"/>
                 <a:ea typeface="Noto Sans CJK SC"/>
                 <a:cs typeface="Noto Sans CJK SC"/>
               </a:rPr>
-              <a:t>近邻条件</a:t>
-            </a:r>
-            <a:r>
-              <a:rPr sz="1374" b="1" i="0" lang="zh-CN" dirty="0">
-                <a:solidFill>
-                  <a:srgbClr val="7A5A1C"/>
-                </a:solidFill>
-                <a:latin typeface="DejaVu Sans"/>
-                <a:ea typeface="DejaVu Sans"/>
-                <a:cs typeface="DejaVu Sans"/>
-              </a:rPr>
-              <a:t> ≠ </a:t>
-            </a:r>
-            <a:r>
-              <a:rPr sz="1374" b="1" i="0" lang="zh-CN" dirty="0">
-                <a:solidFill>
-                  <a:srgbClr val="7A5A1C"/>
-                </a:solidFill>
-                <a:latin typeface="Noto Sans CJK SC"/>
-                <a:ea typeface="Noto Sans CJK SC"/>
-                <a:cs typeface="Noto Sans CJK SC"/>
-              </a:rPr>
-              <a:t>已验证配方</a:t>
-            </a:r>
-          </a:p>
-        </p:txBody>
-      </p:sp>
-      <p:sp>
-        <p:nvSpPr>
-          <p:cNvPr id="20" name="bundle_b" descr="Editable line; source id bundle_b"/>
-          <p:cNvSpPr/>
-          <p:nvPr/>
-        </p:nvSpPr>
-        <p:spPr>
-          <a:xfrm>
-            <a:off x="6389687" y="3516312"/>
-            <a:ext cx="206375" cy="142875"/>
-          </a:xfrm>
-          <a:custGeom>
-            <a:avLst/>
-            <a:gdLst/>
-            <a:ahLst/>
-            <a:cxnLst/>
-            <a:rect l="l" t="t" r="r" b="b"/>
-            <a:pathLst>
-              <a:path w="26000" h="18000">
-                <a:moveTo>
-                  <a:pt x="0" y="6000"/>
-                </a:moveTo>
-                <a:lnTo>
-                  <a:pt x="6000" y="6000"/>
-                </a:lnTo>
-                <a:lnTo>
-                  <a:pt x="6000" y="0"/>
-                </a:lnTo>
-                <a:lnTo>
-                  <a:pt x="26000" y="9000"/>
-                </a:lnTo>
-                <a:lnTo>
-                  <a:pt x="6000" y="18000"/>
-                </a:lnTo>
-                <a:lnTo>
-                  <a:pt x="6000" y="12000"/>
-                </a:lnTo>
-                <a:lnTo>
-                  <a:pt x="0" y="12000"/>
-                </a:lnTo>
-                <a:close/>
-              </a:path>
-            </a:pathLst>
-          </a:custGeom>
-          <a:solidFill>
-            <a:srgbClr val="1F6F78"/>
-          </a:solidFill>
-          <a:ln>
-            <a:noFill/>
-          </a:ln>
-          <a:effectLst/>
-        </p:spPr>
-        <p:style>
-          <a:lnRef idx="1">
-            <a:schemeClr val="accent1"/>
-          </a:lnRef>
-          <a:fillRef idx="3">
-            <a:schemeClr val="accent1"/>
-          </a:fillRef>
-          <a:effectRef idx="0">
-            <a:schemeClr val="accent1"/>
-          </a:effectRef>
-          <a:fontRef idx="minor">
-            <a:schemeClr val="lt1"/>
-          </a:fontRef>
-        </p:style>
-        <p:txBody>
-          <a:bodyPr rtlCol="0" anchor="ctr"/>
-          <a:lstStyle/>
-          <a:p>
-            <a:pPr algn="ctr"/>
-          </a:p>
-        </p:txBody>
-      </p:sp>
-      <p:sp>
-        <p:nvSpPr>
-          <p:cNvPr id="21" name="ledger" descr="Editable shape; source id ledger"/>
-          <p:cNvSpPr/>
-          <p:nvPr/>
-        </p:nvSpPr>
-        <p:spPr>
-          <a:xfrm>
-            <a:off x="6611937" y="1476374"/>
-            <a:ext cx="2555874" cy="4008437"/>
-          </a:xfrm>
-          <a:prstGeom prst="roundRect">
-            <a:avLst>
-              <a:gd name="adj" fmla="val 4347"/>
-            </a:avLst>
-          </a:prstGeom>
-          <a:solidFill>
-            <a:srgbClr val="FFFFFF"/>
-          </a:solidFill>
-          <a:ln w="19843">
-            <a:solidFill>
-              <a:srgbClr val="4A5158"/>
-            </a:solidFill>
-          </a:ln>
-          <a:effectLst/>
-        </p:spPr>
-        <p:style>
-          <a:lnRef idx="1">
-            <a:schemeClr val="accent1"/>
-          </a:lnRef>
-          <a:fillRef idx="3">
-            <a:schemeClr val="accent1"/>
-          </a:fillRef>
-          <a:effectRef idx="0">
-            <a:schemeClr val="accent1"/>
-          </a:effectRef>
-          <a:fontRef idx="minor">
-            <a:schemeClr val="lt1"/>
-          </a:fontRef>
-        </p:style>
-        <p:txBody>
-          <a:bodyPr rtlCol="0" anchor="ctr"/>
-          <a:lstStyle/>
-          <a:p>
-            <a:pPr algn="ctr"/>
-          </a:p>
-        </p:txBody>
-      </p:sp>
-      <p:sp>
-        <p:nvSpPr>
-          <p:cNvPr id="22" name="ledger_t" descr="Editable text; source id ledger_t"/>
+              <a:t>相同实验项目下比较</a:t>
+            </a:r>
+          </a:p>
+        </p:txBody>
+      </p:sp>
+      <p:sp>
+        <p:nvSpPr>
+          <p:cNvPr id="35" name="led_k0" descr="Editable text; source id led_k0"/>
           <p:cNvSpPr txBox="1"/>
           <p:nvPr/>
         </p:nvSpPr>
         <p:spPr>
           <a:xfrm>
-            <a:off x="6707187" y="1587499"/>
-            <a:ext cx="2365374" cy="380999"/>
+            <a:off x="5635535" y="1566953"/>
+            <a:ext cx="2254214" cy="233668"/>
           </a:xfrm>
           <a:prstGeom prst="rect">
             <a:avLst/>
@@ -4644,9 +5140,9 @@
           </a:bodyPr>
           <a:lstStyle/>
           <a:p>
-            <a:pPr algn="ctr" fontAlgn="base">
+            <a:pPr algn="l" fontAlgn="base">
               <a:lnSpc>
-                <a:spcPts val="2734"/>
+                <a:spcPts val="1745"/>
               </a:lnSpc>
               <a:spcBef>
                 <a:spcPts val="0"/>
@@ -4654,9 +5150,9 @@
               <a:spcAft>
                 <a:spcPts val="0"/>
               </a:spcAft>
-              <a:defRPr sz="1874" b="1" i="0" lang="zh-CN" dirty="0">
+              <a:defRPr sz="1190" b="0" i="0" lang="zh-CN" dirty="0">
                 <a:solidFill>
-                  <a:srgbClr val="1F2326"/>
+                  <a:srgbClr val="3F4854"/>
                 </a:solidFill>
                 <a:latin typeface="Noto Sans CJK SC"/>
                 <a:ea typeface="Noto Sans CJK SC"/>
@@ -4664,77 +5160,65 @@
               </a:defRPr>
             </a:pPr>
             <a:r>
-              <a:rPr sz="1874" b="1" i="0" lang="zh-CN" dirty="0">
+              <a:rPr sz="1190" b="0" i="0" lang="zh-CN" dirty="0">
                 <a:solidFill>
-                  <a:srgbClr val="1F2326"/>
+                  <a:srgbClr val="3F4854"/>
                 </a:solidFill>
                 <a:latin typeface="Noto Sans CJK SC"/>
                 <a:ea typeface="Noto Sans CJK SC"/>
                 <a:cs typeface="Noto Sans CJK SC"/>
               </a:rPr>
-              <a:t>相同实验项目下比较</a:t>
-            </a:r>
-          </a:p>
-        </p:txBody>
-      </p:sp>
-      <p:sp>
-        <p:nvSpPr>
-          <p:cNvPr id="23" name="row0" descr="Editable shape; source id row0"/>
-          <p:cNvSpPr/>
-          <p:nvPr/>
-        </p:nvSpPr>
-        <p:spPr>
-          <a:xfrm>
-            <a:off x="6754812" y="2079624"/>
-            <a:ext cx="2278062" cy="476249"/>
-          </a:xfrm>
-          <a:prstGeom prst="roundRect">
-            <a:avLst>
-              <a:gd name="adj" fmla="val 13333"/>
-            </a:avLst>
-          </a:prstGeom>
-          <a:solidFill>
-            <a:srgbClr val="FFFFFF"/>
-          </a:solidFill>
-          <a:ln w="11906">
+              <a:t>原料与配比</a:t>
+            </a:r>
+          </a:p>
+        </p:txBody>
+      </p:sp>
+      <p:cxnSp>
+        <p:nvCxnSpPr>
+          <p:cNvPr id="36" name="led_r1" descr="Editable line; source id led_r1"/>
+          <p:cNvCxnSpPr/>
+          <p:nvPr/>
+        </p:nvCxnSpPr>
+        <p:spPr>
+          <a:xfrm>
+            <a:off x="5635535" y="2048036"/>
+            <a:ext cx="2254214" cy="0"/>
+          </a:xfrm>
+          <a:prstGeom prst="line">
+            <a:avLst/>
+          </a:prstGeom>
+          <a:ln w="6872">
             <a:solidFill>
-              <a:srgbClr val="C9CFD4"/>
+              <a:srgbClr val="DCE2E8"/>
             </a:solidFill>
           </a:ln>
           <a:effectLst/>
         </p:spPr>
         <p:style>
-          <a:lnRef idx="1">
+          <a:lnRef idx="2">
             <a:schemeClr val="accent1"/>
           </a:lnRef>
-          <a:fillRef idx="3">
+          <a:fillRef idx="0">
             <a:schemeClr val="accent1"/>
           </a:fillRef>
           <a:effectRef idx="0">
             <a:schemeClr val="accent1"/>
           </a:effectRef>
           <a:fontRef idx="minor">
-            <a:schemeClr val="lt1"/>
+            <a:schemeClr val="tx1"/>
           </a:fontRef>
         </p:style>
-        <p:txBody>
-          <a:bodyPr rtlCol="0" anchor="ctr"/>
-          <a:lstStyle/>
-          <a:p>
-            <a:pPr algn="ctr"/>
-          </a:p>
-        </p:txBody>
-      </p:sp>
-      <p:sp>
-        <p:nvSpPr>
-          <p:cNvPr id="24" name="row0_t" descr="Editable text; source id row0_t"/>
+      </p:cxnSp>
+      <p:sp>
+        <p:nvSpPr>
+          <p:cNvPr id="37" name="led_k1" descr="Editable text; source id led_k1"/>
           <p:cNvSpPr txBox="1"/>
           <p:nvPr/>
         </p:nvSpPr>
         <p:spPr>
           <a:xfrm>
-            <a:off x="6818312" y="2158999"/>
-            <a:ext cx="2151062" cy="317499"/>
+            <a:off x="5635535" y="2075526"/>
+            <a:ext cx="2254214" cy="233668"/>
           </a:xfrm>
           <a:prstGeom prst="rect">
             <a:avLst/>
@@ -4748,9 +5232,9 @@
           </a:bodyPr>
           <a:lstStyle/>
           <a:p>
-            <a:pPr algn="ctr" fontAlgn="base">
+            <a:pPr algn="l" fontAlgn="base">
               <a:lnSpc>
-                <a:spcPts val="2359"/>
+                <a:spcPts val="1745"/>
               </a:lnSpc>
               <a:spcBef>
                 <a:spcPts val="0"/>
@@ -4758,9 +5242,9 @@
               <a:spcAft>
                 <a:spcPts val="0"/>
               </a:spcAft>
-              <a:defRPr sz="1624" b="1" i="0" lang="zh-CN" dirty="0">
+              <a:defRPr sz="1190" b="0" i="0" lang="zh-CN" dirty="0">
                 <a:solidFill>
-                  <a:srgbClr val="3A4046"/>
+                  <a:srgbClr val="3F4854"/>
                 </a:solidFill>
                 <a:latin typeface="Noto Sans CJK SC"/>
                 <a:ea typeface="Noto Sans CJK SC"/>
@@ -4768,77 +5252,65 @@
               </a:defRPr>
             </a:pPr>
             <a:r>
-              <a:rPr sz="1624" b="1" i="0" lang="zh-CN" dirty="0">
+              <a:rPr sz="1190" b="0" i="0" lang="zh-CN" dirty="0">
                 <a:solidFill>
-                  <a:srgbClr val="3A4046"/>
+                  <a:srgbClr val="3F4854"/>
                 </a:solidFill>
                 <a:latin typeface="Noto Sans CJK SC"/>
                 <a:ea typeface="Noto Sans CJK SC"/>
                 <a:cs typeface="Noto Sans CJK SC"/>
               </a:rPr>
-              <a:t>原料与配比</a:t>
-            </a:r>
-          </a:p>
-        </p:txBody>
-      </p:sp>
-      <p:sp>
-        <p:nvSpPr>
-          <p:cNvPr id="25" name="row1" descr="Editable shape; source id row1"/>
-          <p:cNvSpPr/>
-          <p:nvPr/>
-        </p:nvSpPr>
-        <p:spPr>
-          <a:xfrm>
-            <a:off x="6754812" y="2627312"/>
-            <a:ext cx="2278062" cy="476249"/>
-          </a:xfrm>
-          <a:prstGeom prst="roundRect">
-            <a:avLst>
-              <a:gd name="adj" fmla="val 13333"/>
-            </a:avLst>
-          </a:prstGeom>
-          <a:solidFill>
-            <a:srgbClr val="FFFFFF"/>
-          </a:solidFill>
-          <a:ln w="11906">
+              <a:t>热史</a:t>
+            </a:r>
+          </a:p>
+        </p:txBody>
+      </p:sp>
+      <p:cxnSp>
+        <p:nvCxnSpPr>
+          <p:cNvPr id="38" name="led_r2" descr="Editable line; source id led_r2"/>
+          <p:cNvCxnSpPr/>
+          <p:nvPr/>
+        </p:nvCxnSpPr>
+        <p:spPr>
+          <a:xfrm>
+            <a:off x="5635535" y="2556608"/>
+            <a:ext cx="2254214" cy="0"/>
+          </a:xfrm>
+          <a:prstGeom prst="line">
+            <a:avLst/>
+          </a:prstGeom>
+          <a:ln w="6872">
             <a:solidFill>
-              <a:srgbClr val="C9CFD4"/>
+              <a:srgbClr val="DCE2E8"/>
             </a:solidFill>
           </a:ln>
           <a:effectLst/>
         </p:spPr>
         <p:style>
-          <a:lnRef idx="1">
+          <a:lnRef idx="2">
             <a:schemeClr val="accent1"/>
           </a:lnRef>
-          <a:fillRef idx="3">
+          <a:fillRef idx="0">
             <a:schemeClr val="accent1"/>
           </a:fillRef>
           <a:effectRef idx="0">
             <a:schemeClr val="accent1"/>
           </a:effectRef>
           <a:fontRef idx="minor">
-            <a:schemeClr val="lt1"/>
+            <a:schemeClr val="tx1"/>
           </a:fontRef>
         </p:style>
-        <p:txBody>
-          <a:bodyPr rtlCol="0" anchor="ctr"/>
-          <a:lstStyle/>
-          <a:p>
-            <a:pPr algn="ctr"/>
-          </a:p>
-        </p:txBody>
-      </p:sp>
-      <p:sp>
-        <p:nvSpPr>
-          <p:cNvPr id="26" name="row1_t" descr="Editable text; source id row1_t"/>
+      </p:cxnSp>
+      <p:sp>
+        <p:nvSpPr>
+          <p:cNvPr id="39" name="led_k2" descr="Editable text; source id led_k2"/>
           <p:cNvSpPr txBox="1"/>
           <p:nvPr/>
         </p:nvSpPr>
         <p:spPr>
           <a:xfrm>
-            <a:off x="6818312" y="2706687"/>
-            <a:ext cx="2151062" cy="317499"/>
+            <a:off x="5635535" y="2584099"/>
+            <a:ext cx="2254214" cy="233668"/>
           </a:xfrm>
           <a:prstGeom prst="rect">
             <a:avLst/>
@@ -4852,9 +5324,9 @@
           </a:bodyPr>
           <a:lstStyle/>
           <a:p>
-            <a:pPr algn="ctr" fontAlgn="base">
+            <a:pPr algn="l" fontAlgn="base">
               <a:lnSpc>
-                <a:spcPts val="2359"/>
+                <a:spcPts val="1745"/>
               </a:lnSpc>
               <a:spcBef>
                 <a:spcPts val="0"/>
@@ -4862,9 +5334,9 @@
               <a:spcAft>
                 <a:spcPts val="0"/>
               </a:spcAft>
-              <a:defRPr sz="1624" b="1" i="0" lang="zh-CN" dirty="0">
+              <a:defRPr sz="1190" b="0" i="0" lang="zh-CN" dirty="0">
                 <a:solidFill>
-                  <a:srgbClr val="3A4046"/>
+                  <a:srgbClr val="3F4854"/>
                 </a:solidFill>
                 <a:latin typeface="Noto Sans CJK SC"/>
                 <a:ea typeface="Noto Sans CJK SC"/>
@@ -4872,77 +5344,65 @@
               </a:defRPr>
             </a:pPr>
             <a:r>
-              <a:rPr sz="1624" b="1" i="0" lang="zh-CN" dirty="0">
+              <a:rPr sz="1190" b="0" i="0" lang="zh-CN" dirty="0">
                 <a:solidFill>
-                  <a:srgbClr val="3A4046"/>
+                  <a:srgbClr val="3F4854"/>
                 </a:solidFill>
                 <a:latin typeface="Noto Sans CJK SC"/>
                 <a:ea typeface="Noto Sans CJK SC"/>
                 <a:cs typeface="Noto Sans CJK SC"/>
               </a:rPr>
-              <a:t>热史</a:t>
-            </a:r>
-          </a:p>
-        </p:txBody>
-      </p:sp>
-      <p:sp>
-        <p:nvSpPr>
-          <p:cNvPr id="27" name="row2" descr="Editable shape; source id row2"/>
-          <p:cNvSpPr/>
-          <p:nvPr/>
-        </p:nvSpPr>
-        <p:spPr>
-          <a:xfrm>
-            <a:off x="6754812" y="3174999"/>
-            <a:ext cx="2278062" cy="476249"/>
-          </a:xfrm>
-          <a:prstGeom prst="roundRect">
-            <a:avLst>
-              <a:gd name="adj" fmla="val 13333"/>
-            </a:avLst>
-          </a:prstGeom>
-          <a:solidFill>
-            <a:srgbClr val="FFFFFF"/>
-          </a:solidFill>
-          <a:ln w="11906">
+              <a:t>气氛</a:t>
+            </a:r>
+          </a:p>
+        </p:txBody>
+      </p:sp>
+      <p:cxnSp>
+        <p:nvCxnSpPr>
+          <p:cNvPr id="40" name="led_r3" descr="Editable line; source id led_r3"/>
+          <p:cNvCxnSpPr/>
+          <p:nvPr/>
+        </p:nvCxnSpPr>
+        <p:spPr>
+          <a:xfrm>
+            <a:off x="5635535" y="3065181"/>
+            <a:ext cx="2254214" cy="0"/>
+          </a:xfrm>
+          <a:prstGeom prst="line">
+            <a:avLst/>
+          </a:prstGeom>
+          <a:ln w="6872">
             <a:solidFill>
-              <a:srgbClr val="C9CFD4"/>
+              <a:srgbClr val="DCE2E8"/>
             </a:solidFill>
           </a:ln>
           <a:effectLst/>
         </p:spPr>
         <p:style>
-          <a:lnRef idx="1">
+          <a:lnRef idx="2">
             <a:schemeClr val="accent1"/>
           </a:lnRef>
-          <a:fillRef idx="3">
+          <a:fillRef idx="0">
             <a:schemeClr val="accent1"/>
           </a:fillRef>
           <a:effectRef idx="0">
             <a:schemeClr val="accent1"/>
           </a:effectRef>
           <a:fontRef idx="minor">
-            <a:schemeClr val="lt1"/>
+            <a:schemeClr val="tx1"/>
           </a:fontRef>
         </p:style>
-        <p:txBody>
-          <a:bodyPr rtlCol="0" anchor="ctr"/>
-          <a:lstStyle/>
-          <a:p>
-            <a:pPr algn="ctr"/>
-          </a:p>
-        </p:txBody>
-      </p:sp>
-      <p:sp>
-        <p:nvSpPr>
-          <p:cNvPr id="28" name="row2_t" descr="Editable text; source id row2_t"/>
+      </p:cxnSp>
+      <p:sp>
+        <p:nvSpPr>
+          <p:cNvPr id="41" name="led_k3" descr="Editable text; source id led_k3"/>
           <p:cNvSpPr txBox="1"/>
           <p:nvPr/>
         </p:nvSpPr>
         <p:spPr>
           <a:xfrm>
-            <a:off x="6818312" y="3254374"/>
-            <a:ext cx="2151062" cy="317499"/>
+            <a:off x="5635535" y="3092671"/>
+            <a:ext cx="2254214" cy="233668"/>
           </a:xfrm>
           <a:prstGeom prst="rect">
             <a:avLst/>
@@ -4956,9 +5416,9 @@
           </a:bodyPr>
           <a:lstStyle/>
           <a:p>
-            <a:pPr algn="ctr" fontAlgn="base">
+            <a:pPr algn="l" fontAlgn="base">
               <a:lnSpc>
-                <a:spcPts val="2359"/>
+                <a:spcPts val="1745"/>
               </a:lnSpc>
               <a:spcBef>
                 <a:spcPts val="0"/>
@@ -4966,9 +5426,9 @@
               <a:spcAft>
                 <a:spcPts val="0"/>
               </a:spcAft>
-              <a:defRPr sz="1624" b="1" i="0" lang="zh-CN" dirty="0">
+              <a:defRPr sz="1190" b="0" i="0" lang="zh-CN" dirty="0">
                 <a:solidFill>
-                  <a:srgbClr val="3A4046"/>
+                  <a:srgbClr val="3F4854"/>
                 </a:solidFill>
                 <a:latin typeface="Noto Sans CJK SC"/>
                 <a:ea typeface="Noto Sans CJK SC"/>
@@ -4976,77 +5436,65 @@
               </a:defRPr>
             </a:pPr>
             <a:r>
-              <a:rPr sz="1624" b="1" i="0" lang="zh-CN" dirty="0">
+              <a:rPr sz="1190" b="0" i="0" lang="zh-CN" dirty="0">
                 <a:solidFill>
-                  <a:srgbClr val="3A4046"/>
+                  <a:srgbClr val="3F4854"/>
                 </a:solidFill>
                 <a:latin typeface="Noto Sans CJK SC"/>
                 <a:ea typeface="Noto Sans CJK SC"/>
                 <a:cs typeface="Noto Sans CJK SC"/>
               </a:rPr>
-              <a:t>气氛</a:t>
-            </a:r>
-          </a:p>
-        </p:txBody>
-      </p:sp>
-      <p:sp>
-        <p:nvSpPr>
-          <p:cNvPr id="29" name="row3" descr="Editable shape; source id row3"/>
-          <p:cNvSpPr/>
-          <p:nvPr/>
-        </p:nvSpPr>
-        <p:spPr>
-          <a:xfrm>
-            <a:off x="6754812" y="3730624"/>
-            <a:ext cx="2278062" cy="476249"/>
-          </a:xfrm>
-          <a:prstGeom prst="roundRect">
-            <a:avLst>
-              <a:gd name="adj" fmla="val 13333"/>
-            </a:avLst>
-          </a:prstGeom>
-          <a:solidFill>
-            <a:srgbClr val="FFFFFF"/>
-          </a:solidFill>
-          <a:ln w="11906">
+              <a:t>容器与助熔剂</a:t>
+            </a:r>
+          </a:p>
+        </p:txBody>
+      </p:sp>
+      <p:cxnSp>
+        <p:nvCxnSpPr>
+          <p:cNvPr id="42" name="led_r4" descr="Editable line; source id led_r4"/>
+          <p:cNvCxnSpPr/>
+          <p:nvPr/>
+        </p:nvCxnSpPr>
+        <p:spPr>
+          <a:xfrm>
+            <a:off x="5635535" y="3573754"/>
+            <a:ext cx="2254214" cy="0"/>
+          </a:xfrm>
+          <a:prstGeom prst="line">
+            <a:avLst/>
+          </a:prstGeom>
+          <a:ln w="6872">
             <a:solidFill>
-              <a:srgbClr val="C9CFD4"/>
+              <a:srgbClr val="DCE2E8"/>
             </a:solidFill>
           </a:ln>
           <a:effectLst/>
         </p:spPr>
         <p:style>
-          <a:lnRef idx="1">
+          <a:lnRef idx="2">
             <a:schemeClr val="accent1"/>
           </a:lnRef>
-          <a:fillRef idx="3">
+          <a:fillRef idx="0">
             <a:schemeClr val="accent1"/>
           </a:fillRef>
           <a:effectRef idx="0">
             <a:schemeClr val="accent1"/>
           </a:effectRef>
           <a:fontRef idx="minor">
-            <a:schemeClr val="lt1"/>
+            <a:schemeClr val="tx1"/>
           </a:fontRef>
         </p:style>
-        <p:txBody>
-          <a:bodyPr rtlCol="0" anchor="ctr"/>
-          <a:lstStyle/>
-          <a:p>
-            <a:pPr algn="ctr"/>
-          </a:p>
-        </p:txBody>
-      </p:sp>
-      <p:sp>
-        <p:nvSpPr>
-          <p:cNvPr id="30" name="row3_t" descr="Editable text; source id row3_t"/>
+      </p:cxnSp>
+      <p:sp>
+        <p:nvSpPr>
+          <p:cNvPr id="43" name="led_k4" descr="Editable text; source id led_k4"/>
           <p:cNvSpPr txBox="1"/>
           <p:nvPr/>
         </p:nvSpPr>
         <p:spPr>
           <a:xfrm>
-            <a:off x="6818312" y="3809999"/>
-            <a:ext cx="2151062" cy="317499"/>
+            <a:off x="5635535" y="3601244"/>
+            <a:ext cx="2254214" cy="233668"/>
           </a:xfrm>
           <a:prstGeom prst="rect">
             <a:avLst/>
@@ -5060,9 +5508,9 @@
           </a:bodyPr>
           <a:lstStyle/>
           <a:p>
-            <a:pPr algn="ctr" fontAlgn="base">
+            <a:pPr algn="l" fontAlgn="base">
               <a:lnSpc>
-                <a:spcPts val="2359"/>
+                <a:spcPts val="1745"/>
               </a:lnSpc>
               <a:spcBef>
                 <a:spcPts val="0"/>
@@ -5070,9 +5518,9 @@
               <a:spcAft>
                 <a:spcPts val="0"/>
               </a:spcAft>
-              <a:defRPr sz="1624" b="1" i="0" lang="zh-CN" dirty="0">
+              <a:defRPr sz="1190" b="0" i="0" lang="zh-CN" dirty="0">
                 <a:solidFill>
-                  <a:srgbClr val="3A4046"/>
+                  <a:srgbClr val="3F4854"/>
                 </a:solidFill>
                 <a:latin typeface="Noto Sans CJK SC"/>
                 <a:ea typeface="Noto Sans CJK SC"/>
@@ -5080,77 +5528,65 @@
               </a:defRPr>
             </a:pPr>
             <a:r>
-              <a:rPr sz="1624" b="1" i="0" lang="zh-CN" dirty="0">
+              <a:rPr sz="1190" b="0" i="0" lang="zh-CN" dirty="0">
                 <a:solidFill>
-                  <a:srgbClr val="3A4046"/>
+                  <a:srgbClr val="3F4854"/>
                 </a:solidFill>
                 <a:latin typeface="Noto Sans CJK SC"/>
                 <a:ea typeface="Noto Sans CJK SC"/>
                 <a:cs typeface="Noto Sans CJK SC"/>
               </a:rPr>
-              <a:t>容器与助熔剂</a:t>
-            </a:r>
-          </a:p>
-        </p:txBody>
-      </p:sp>
-      <p:sp>
-        <p:nvSpPr>
-          <p:cNvPr id="31" name="row4" descr="Editable shape; source id row4"/>
-          <p:cNvSpPr/>
-          <p:nvPr/>
-        </p:nvSpPr>
-        <p:spPr>
-          <a:xfrm>
-            <a:off x="6754812" y="4286249"/>
-            <a:ext cx="2278062" cy="476249"/>
-          </a:xfrm>
-          <a:prstGeom prst="roundRect">
-            <a:avLst>
-              <a:gd name="adj" fmla="val 13333"/>
-            </a:avLst>
-          </a:prstGeom>
-          <a:solidFill>
-            <a:srgbClr val="FFFFFF"/>
-          </a:solidFill>
-          <a:ln w="11906">
+              <a:t>冷却与分离</a:t>
+            </a:r>
+          </a:p>
+        </p:txBody>
+      </p:sp>
+      <p:cxnSp>
+        <p:nvCxnSpPr>
+          <p:cNvPr id="44" name="led_r5" descr="Editable line; source id led_r5"/>
+          <p:cNvCxnSpPr/>
+          <p:nvPr/>
+        </p:nvCxnSpPr>
+        <p:spPr>
+          <a:xfrm>
+            <a:off x="5635535" y="4082326"/>
+            <a:ext cx="2254214" cy="0"/>
+          </a:xfrm>
+          <a:prstGeom prst="line">
+            <a:avLst/>
+          </a:prstGeom>
+          <a:ln w="6872">
             <a:solidFill>
-              <a:srgbClr val="C9CFD4"/>
+              <a:srgbClr val="DCE2E8"/>
             </a:solidFill>
           </a:ln>
           <a:effectLst/>
         </p:spPr>
         <p:style>
-          <a:lnRef idx="1">
+          <a:lnRef idx="2">
             <a:schemeClr val="accent1"/>
           </a:lnRef>
-          <a:fillRef idx="3">
+          <a:fillRef idx="0">
             <a:schemeClr val="accent1"/>
           </a:fillRef>
           <a:effectRef idx="0">
             <a:schemeClr val="accent1"/>
           </a:effectRef>
           <a:fontRef idx="minor">
-            <a:schemeClr val="lt1"/>
+            <a:schemeClr val="tx1"/>
           </a:fontRef>
         </p:style>
-        <p:txBody>
-          <a:bodyPr rtlCol="0" anchor="ctr"/>
-          <a:lstStyle/>
-          <a:p>
-            <a:pPr algn="ctr"/>
-          </a:p>
-        </p:txBody>
-      </p:sp>
-      <p:sp>
-        <p:nvSpPr>
-          <p:cNvPr id="32" name="row4_t" descr="Editable text; source id row4_t"/>
+      </p:cxnSp>
+      <p:sp>
+        <p:nvSpPr>
+          <p:cNvPr id="45" name="led_k5" descr="Editable text; source id led_k5"/>
           <p:cNvSpPr txBox="1"/>
           <p:nvPr/>
         </p:nvSpPr>
         <p:spPr>
           <a:xfrm>
-            <a:off x="6818312" y="4365624"/>
-            <a:ext cx="2151062" cy="317499"/>
+            <a:off x="5635535" y="4109817"/>
+            <a:ext cx="2254214" cy="233668"/>
           </a:xfrm>
           <a:prstGeom prst="rect">
             <a:avLst/>
@@ -5164,9 +5600,9 @@
           </a:bodyPr>
           <a:lstStyle/>
           <a:p>
-            <a:pPr algn="ctr" fontAlgn="base">
+            <a:pPr algn="l" fontAlgn="base">
               <a:lnSpc>
-                <a:spcPts val="2359"/>
+                <a:spcPts val="1745"/>
               </a:lnSpc>
               <a:spcBef>
                 <a:spcPts val="0"/>
@@ -5174,9 +5610,9 @@
               <a:spcAft>
                 <a:spcPts val="0"/>
               </a:spcAft>
-              <a:defRPr sz="1624" b="1" i="0" lang="zh-CN" dirty="0">
+              <a:defRPr sz="1190" b="0" i="0" lang="zh-CN" dirty="0">
                 <a:solidFill>
-                  <a:srgbClr val="3A4046"/>
+                  <a:srgbClr val="3F4854"/>
                 </a:solidFill>
                 <a:latin typeface="Noto Sans CJK SC"/>
                 <a:ea typeface="Noto Sans CJK SC"/>
@@ -5184,113 +5620,9 @@
               </a:defRPr>
             </a:pPr>
             <a:r>
-              <a:rPr sz="1624" b="1" i="0" lang="zh-CN" dirty="0">
+              <a:rPr sz="1190" b="0" i="0" lang="zh-CN" dirty="0">
                 <a:solidFill>
-                  <a:srgbClr val="3A4046"/>
-                </a:solidFill>
-                <a:latin typeface="Noto Sans CJK SC"/>
-                <a:ea typeface="Noto Sans CJK SC"/>
-                <a:cs typeface="Noto Sans CJK SC"/>
-              </a:rPr>
-              <a:t>冷却与分离</a:t>
-            </a:r>
-          </a:p>
-        </p:txBody>
-      </p:sp>
-      <p:sp>
-        <p:nvSpPr>
-          <p:cNvPr id="33" name="row5" descr="Editable shape; source id row5"/>
-          <p:cNvSpPr/>
-          <p:nvPr/>
-        </p:nvSpPr>
-        <p:spPr>
-          <a:xfrm>
-            <a:off x="6754812" y="4833937"/>
-            <a:ext cx="2278062" cy="476249"/>
-          </a:xfrm>
-          <a:prstGeom prst="roundRect">
-            <a:avLst>
-              <a:gd name="adj" fmla="val 13333"/>
-            </a:avLst>
-          </a:prstGeom>
-          <a:solidFill>
-            <a:srgbClr val="FFFFFF"/>
-          </a:solidFill>
-          <a:ln w="11906">
-            <a:solidFill>
-              <a:srgbClr val="C9CFD4"/>
-            </a:solidFill>
-          </a:ln>
-          <a:effectLst/>
-        </p:spPr>
-        <p:style>
-          <a:lnRef idx="1">
-            <a:schemeClr val="accent1"/>
-          </a:lnRef>
-          <a:fillRef idx="3">
-            <a:schemeClr val="accent1"/>
-          </a:fillRef>
-          <a:effectRef idx="0">
-            <a:schemeClr val="accent1"/>
-          </a:effectRef>
-          <a:fontRef idx="minor">
-            <a:schemeClr val="lt1"/>
-          </a:fontRef>
-        </p:style>
-        <p:txBody>
-          <a:bodyPr rtlCol="0" anchor="ctr"/>
-          <a:lstStyle/>
-          <a:p>
-            <a:pPr algn="ctr"/>
-          </a:p>
-        </p:txBody>
-      </p:sp>
-      <p:sp>
-        <p:nvSpPr>
-          <p:cNvPr id="34" name="row5_t" descr="Editable text; source id row5_t"/>
-          <p:cNvSpPr txBox="1"/>
-          <p:nvPr/>
-        </p:nvSpPr>
-        <p:spPr>
-          <a:xfrm>
-            <a:off x="6818312" y="4913312"/>
-            <a:ext cx="2151062" cy="317499"/>
-          </a:xfrm>
-          <a:prstGeom prst="rect">
-            <a:avLst/>
-          </a:prstGeom>
-          <a:noFill/>
-          <a:effectLst/>
-        </p:spPr>
-        <p:txBody>
-          <a:bodyPr wrap="none" anchor="ctr" tIns="0" rIns="0" bIns="0" lIns="0" anchorCtr="0" vertOverflow="overflow">
-            <a:noAutofit/>
-          </a:bodyPr>
-          <a:lstStyle/>
-          <a:p>
-            <a:pPr algn="ctr" fontAlgn="base">
-              <a:lnSpc>
-                <a:spcPts val="2359"/>
-              </a:lnSpc>
-              <a:spcBef>
-                <a:spcPts val="0"/>
-              </a:spcBef>
-              <a:spcAft>
-                <a:spcPts val="0"/>
-              </a:spcAft>
-              <a:defRPr sz="1624" b="1" i="0" lang="zh-CN" dirty="0">
-                <a:solidFill>
-                  <a:srgbClr val="3A4046"/>
-                </a:solidFill>
-                <a:latin typeface="Noto Sans CJK SC"/>
-                <a:ea typeface="Noto Sans CJK SC"/>
-                <a:cs typeface="Noto Sans CJK SC"/>
-              </a:defRPr>
-            </a:pPr>
-            <a:r>
-              <a:rPr sz="1624" b="1" i="0" lang="zh-CN" dirty="0">
-                <a:solidFill>
-                  <a:srgbClr val="3A4046"/>
+                  <a:srgbClr val="3F4854"/>
                 </a:solidFill>
                 <a:latin typeface="Noto Sans CJK SC"/>
                 <a:ea typeface="Noto Sans CJK SC"/>
@@ -5303,21 +5635,21 @@
       </p:sp>
       <p:cxnSp>
         <p:nvCxnSpPr>
-          <p:cNvPr id="35" name="fan_trunk" descr="Editable line; source id fan_trunk"/>
+          <p:cNvPr id="46" name="br0_0" descr="Editable line; source id br0_0"/>
           <p:cNvCxnSpPr/>
           <p:nvPr/>
         </p:nvCxnSpPr>
         <p:spPr>
           <a:xfrm>
-            <a:off x="9183687" y="3587749"/>
-            <a:ext cx="460375" cy="0"/>
+            <a:off x="3230123" y="1188960"/>
+            <a:ext cx="288650" cy="0"/>
           </a:xfrm>
           <a:prstGeom prst="line">
             <a:avLst/>
           </a:prstGeom>
-          <a:ln w="47624">
+          <a:ln w="13745">
             <a:solidFill>
-              <a:srgbClr val="1F6F78"/>
+              <a:srgbClr val="4B5563"/>
             </a:solidFill>
           </a:ln>
           <a:effectLst/>
@@ -5339,627 +5671,22 @@
       </p:cxnSp>
       <p:cxnSp>
         <p:nvCxnSpPr>
-          <p:cNvPr id="36" name="fan_v" descr="Editable line; source id fan_v"/>
+          <p:cNvPr id="47" name="br1_0" descr="Editable line; source id br1_0"/>
           <p:cNvCxnSpPr/>
           <p:nvPr/>
         </p:nvCxnSpPr>
         <p:spPr>
           <a:xfrm>
-            <a:off x="9644062" y="2278062"/>
-            <a:ext cx="0" cy="2563812"/>
+            <a:off x="3230123" y="2068653"/>
+            <a:ext cx="288650" cy="0"/>
           </a:xfrm>
           <a:prstGeom prst="line">
             <a:avLst/>
           </a:prstGeom>
-          <a:ln w="47624">
+          <a:ln w="13745">
             <a:solidFill>
-              <a:srgbClr val="1F6F78"/>
+              <a:srgbClr val="4B5563"/>
             </a:solidFill>
-          </a:ln>
-          <a:effectLst/>
-        </p:spPr>
-        <p:style>
-          <a:lnRef idx="2">
-            <a:schemeClr val="accent1"/>
-          </a:lnRef>
-          <a:fillRef idx="0">
-            <a:schemeClr val="accent1"/>
-          </a:fillRef>
-          <a:effectRef idx="0">
-            <a:schemeClr val="accent1"/>
-          </a:effectRef>
-          <a:fontRef idx="minor">
-            <a:schemeClr val="tx1"/>
-          </a:fontRef>
-        </p:style>
-      </p:cxnSp>
-      <p:sp>
-        <p:nvSpPr>
-          <p:cNvPr id="37" name="u1_a" descr="Editable line; source id u1_a"/>
-          <p:cNvSpPr/>
-          <p:nvPr/>
-        </p:nvSpPr>
-        <p:spPr>
-          <a:xfrm>
-            <a:off x="9644062" y="2206625"/>
-            <a:ext cx="444500" cy="142875"/>
-          </a:xfrm>
-          <a:custGeom>
-            <a:avLst/>
-            <a:gdLst/>
-            <a:ahLst/>
-            <a:cxnLst/>
-            <a:rect l="l" t="t" r="r" b="b"/>
-            <a:pathLst>
-              <a:path w="56000" h="18000">
-                <a:moveTo>
-                  <a:pt x="0" y="6000"/>
-                </a:moveTo>
-                <a:lnTo>
-                  <a:pt x="36000" y="6000"/>
-                </a:lnTo>
-                <a:lnTo>
-                  <a:pt x="36000" y="0"/>
-                </a:lnTo>
-                <a:lnTo>
-                  <a:pt x="56000" y="9000"/>
-                </a:lnTo>
-                <a:lnTo>
-                  <a:pt x="36000" y="18000"/>
-                </a:lnTo>
-                <a:lnTo>
-                  <a:pt x="36000" y="12000"/>
-                </a:lnTo>
-                <a:lnTo>
-                  <a:pt x="0" y="12000"/>
-                </a:lnTo>
-                <a:close/>
-              </a:path>
-            </a:pathLst>
-          </a:custGeom>
-          <a:solidFill>
-            <a:srgbClr val="1F6F78"/>
-          </a:solidFill>
-          <a:ln>
-            <a:noFill/>
-          </a:ln>
-          <a:effectLst/>
-        </p:spPr>
-        <p:style>
-          <a:lnRef idx="1">
-            <a:schemeClr val="accent1"/>
-          </a:lnRef>
-          <a:fillRef idx="3">
-            <a:schemeClr val="accent1"/>
-          </a:fillRef>
-          <a:effectRef idx="0">
-            <a:schemeClr val="accent1"/>
-          </a:effectRef>
-          <a:fontRef idx="minor">
-            <a:schemeClr val="lt1"/>
-          </a:fontRef>
-        </p:style>
-        <p:txBody>
-          <a:bodyPr rtlCol="0" anchor="ctr"/>
-          <a:lstStyle/>
-          <a:p>
-            <a:pPr algn="ctr"/>
-          </a:p>
-        </p:txBody>
-      </p:sp>
-      <p:sp>
-        <p:nvSpPr>
-          <p:cNvPr id="38" name="u1" descr="Editable shape; source id u1"/>
-          <p:cNvSpPr/>
-          <p:nvPr/>
-        </p:nvSpPr>
-        <p:spPr>
-          <a:xfrm>
-            <a:off x="10104437" y="1873249"/>
-            <a:ext cx="1881187" cy="809624"/>
-          </a:xfrm>
-          <a:prstGeom prst="roundRect">
-            <a:avLst>
-              <a:gd name="adj" fmla="val 13725"/>
-            </a:avLst>
-          </a:prstGeom>
-          <a:solidFill>
-            <a:srgbClr val="FFFFFF"/>
-          </a:solidFill>
-          <a:ln w="19843">
-            <a:solidFill>
-              <a:srgbClr val="4A5158"/>
-            </a:solidFill>
-          </a:ln>
-          <a:effectLst/>
-        </p:spPr>
-        <p:style>
-          <a:lnRef idx="1">
-            <a:schemeClr val="accent1"/>
-          </a:lnRef>
-          <a:fillRef idx="3">
-            <a:schemeClr val="accent1"/>
-          </a:fillRef>
-          <a:effectRef idx="0">
-            <a:schemeClr val="accent1"/>
-          </a:effectRef>
-          <a:fontRef idx="minor">
-            <a:schemeClr val="lt1"/>
-          </a:fontRef>
-        </p:style>
-        <p:txBody>
-          <a:bodyPr rtlCol="0" anchor="ctr"/>
-          <a:lstStyle/>
-          <a:p>
-            <a:pPr algn="ctr"/>
-          </a:p>
-        </p:txBody>
-      </p:sp>
-      <p:sp>
-        <p:nvSpPr>
-          <p:cNvPr id="39" name="u1_t" descr="Editable text; source id u1_t"/>
-          <p:cNvSpPr txBox="1"/>
-          <p:nvPr/>
-        </p:nvSpPr>
-        <p:spPr>
-          <a:xfrm>
-            <a:off x="10183812" y="1952624"/>
-            <a:ext cx="1722437" cy="650874"/>
-          </a:xfrm>
-          <a:prstGeom prst="rect">
-            <a:avLst/>
-          </a:prstGeom>
-          <a:noFill/>
-          <a:effectLst/>
-        </p:spPr>
-        <p:txBody>
-          <a:bodyPr wrap="none" anchor="ctr" tIns="0" rIns="0" bIns="0" lIns="0" anchorCtr="0" vertOverflow="overflow">
-            <a:noAutofit/>
-          </a:bodyPr>
-          <a:lstStyle/>
-          <a:p>
-            <a:pPr algn="ctr" fontAlgn="base">
-              <a:lnSpc>
-                <a:spcPts val="2359"/>
-              </a:lnSpc>
-              <a:spcBef>
-                <a:spcPts val="0"/>
-              </a:spcBef>
-              <a:spcAft>
-                <a:spcPts val="0"/>
-              </a:spcAft>
-              <a:defRPr sz="1624" b="1" i="0" lang="zh-CN" dirty="0">
-                <a:solidFill>
-                  <a:srgbClr val="1F2326"/>
-                </a:solidFill>
-                <a:latin typeface="Noto Sans CJK SC"/>
-                <a:ea typeface="Noto Sans CJK SC"/>
-                <a:cs typeface="Noto Sans CJK SC"/>
-              </a:defRPr>
-            </a:pPr>
-            <a:r>
-              <a:rPr sz="1624" b="1" i="0" lang="zh-CN" dirty="0">
-                <a:solidFill>
-                  <a:srgbClr val="1F2326"/>
-                </a:solidFill>
-                <a:latin typeface="Noto Sans CJK SC"/>
-                <a:ea typeface="Noto Sans CJK SC"/>
-                <a:cs typeface="Noto Sans CJK SC"/>
-              </a:rPr>
-              <a:t>直接条件复现</a:t>
-            </a:r>
-          </a:p>
-        </p:txBody>
-      </p:sp>
-      <p:sp>
-        <p:nvSpPr>
-          <p:cNvPr id="40" name="u2_a" descr="Editable line; source id u2_a"/>
-          <p:cNvSpPr/>
-          <p:nvPr/>
-        </p:nvSpPr>
-        <p:spPr>
-          <a:xfrm>
-            <a:off x="9644062" y="3516312"/>
-            <a:ext cx="452437" cy="142875"/>
-          </a:xfrm>
-          <a:custGeom>
-            <a:avLst/>
-            <a:gdLst/>
-            <a:ahLst/>
-            <a:cxnLst/>
-            <a:rect l="l" t="t" r="r" b="b"/>
-            <a:pathLst>
-              <a:path w="57000" h="18000">
-                <a:moveTo>
-                  <a:pt x="0" y="6000"/>
-                </a:moveTo>
-                <a:lnTo>
-                  <a:pt x="37000" y="6000"/>
-                </a:lnTo>
-                <a:lnTo>
-                  <a:pt x="37000" y="0"/>
-                </a:lnTo>
-                <a:lnTo>
-                  <a:pt x="57000" y="9000"/>
-                </a:lnTo>
-                <a:lnTo>
-                  <a:pt x="37000" y="18000"/>
-                </a:lnTo>
-                <a:lnTo>
-                  <a:pt x="37000" y="12000"/>
-                </a:lnTo>
-                <a:lnTo>
-                  <a:pt x="0" y="12000"/>
-                </a:lnTo>
-                <a:close/>
-              </a:path>
-            </a:pathLst>
-          </a:custGeom>
-          <a:solidFill>
-            <a:srgbClr val="1F6F78"/>
-          </a:solidFill>
-          <a:ln>
-            <a:noFill/>
-          </a:ln>
-          <a:effectLst/>
-        </p:spPr>
-        <p:style>
-          <a:lnRef idx="1">
-            <a:schemeClr val="accent1"/>
-          </a:lnRef>
-          <a:fillRef idx="3">
-            <a:schemeClr val="accent1"/>
-          </a:fillRef>
-          <a:effectRef idx="0">
-            <a:schemeClr val="accent1"/>
-          </a:effectRef>
-          <a:fontRef idx="minor">
-            <a:schemeClr val="lt1"/>
-          </a:fontRef>
-        </p:style>
-        <p:txBody>
-          <a:bodyPr rtlCol="0" anchor="ctr"/>
-          <a:lstStyle/>
-          <a:p>
-            <a:pPr algn="ctr"/>
-          </a:p>
-        </p:txBody>
-      </p:sp>
-      <p:sp>
-        <p:nvSpPr>
-          <p:cNvPr id="41" name="u2" descr="Editable shape; source id u2"/>
-          <p:cNvSpPr/>
-          <p:nvPr/>
-        </p:nvSpPr>
-        <p:spPr>
-          <a:xfrm>
-            <a:off x="10112374" y="3167062"/>
-            <a:ext cx="1881187" cy="833437"/>
-          </a:xfrm>
-          <a:prstGeom prst="roundRect">
-            <a:avLst>
-              <a:gd name="adj" fmla="val 13333"/>
-            </a:avLst>
-          </a:prstGeom>
-          <a:solidFill>
-            <a:srgbClr val="FFFFFF"/>
-          </a:solidFill>
-          <a:ln w="19843">
-            <a:solidFill>
-              <a:srgbClr val="4A5158"/>
-            </a:solidFill>
-          </a:ln>
-          <a:effectLst/>
-        </p:spPr>
-        <p:style>
-          <a:lnRef idx="1">
-            <a:schemeClr val="accent1"/>
-          </a:lnRef>
-          <a:fillRef idx="3">
-            <a:schemeClr val="accent1"/>
-          </a:fillRef>
-          <a:effectRef idx="0">
-            <a:schemeClr val="accent1"/>
-          </a:effectRef>
-          <a:fontRef idx="minor">
-            <a:schemeClr val="lt1"/>
-          </a:fontRef>
-        </p:style>
-        <p:txBody>
-          <a:bodyPr rtlCol="0" anchor="ctr"/>
-          <a:lstStyle/>
-          <a:p>
-            <a:pPr algn="ctr"/>
-          </a:p>
-        </p:txBody>
-      </p:sp>
-      <p:sp>
-        <p:nvSpPr>
-          <p:cNvPr id="42" name="u2_t" descr="Editable text; source id u2_t"/>
-          <p:cNvSpPr txBox="1"/>
-          <p:nvPr/>
-        </p:nvSpPr>
-        <p:spPr>
-          <a:xfrm>
-            <a:off x="10191749" y="3246437"/>
-            <a:ext cx="1722437" cy="674687"/>
-          </a:xfrm>
-          <a:prstGeom prst="rect">
-            <a:avLst/>
-          </a:prstGeom>
-          <a:noFill/>
-          <a:effectLst/>
-        </p:spPr>
-        <p:txBody>
-          <a:bodyPr wrap="none" anchor="ctr" tIns="0" rIns="0" bIns="0" lIns="0" anchorCtr="0" vertOverflow="overflow">
-            <a:noAutofit/>
-          </a:bodyPr>
-          <a:lstStyle/>
-          <a:p>
-            <a:pPr algn="ctr" fontAlgn="base">
-              <a:lnSpc>
-                <a:spcPts val="2359"/>
-              </a:lnSpc>
-              <a:spcBef>
-                <a:spcPts val="0"/>
-              </a:spcBef>
-              <a:spcAft>
-                <a:spcPts val="0"/>
-              </a:spcAft>
-              <a:defRPr sz="1624" b="1" i="0" lang="zh-CN" dirty="0">
-                <a:solidFill>
-                  <a:srgbClr val="1F2326"/>
-                </a:solidFill>
-                <a:latin typeface="Noto Sans CJK SC"/>
-                <a:ea typeface="Noto Sans CJK SC"/>
-                <a:cs typeface="Noto Sans CJK SC"/>
-              </a:defRPr>
-            </a:pPr>
-            <a:r>
-              <a:rPr sz="1624" b="1" i="0" lang="zh-CN" dirty="0">
-                <a:solidFill>
-                  <a:srgbClr val="1F2326"/>
-                </a:solidFill>
-                <a:latin typeface="Noto Sans CJK SC"/>
-                <a:ea typeface="Noto Sans CJK SC"/>
-                <a:cs typeface="Noto Sans CJK SC"/>
-              </a:rPr>
-              <a:t>谱系内相图与</a:t>
-            </a:r>
-          </a:p>
-          <a:p>
-            <a:pPr algn="ctr" fontAlgn="base">
-              <a:lnSpc>
-                <a:spcPts val="2359"/>
-              </a:lnSpc>
-              <a:spcBef>
-                <a:spcPts val="0"/>
-              </a:spcBef>
-              <a:spcAft>
-                <a:spcPts val="0"/>
-              </a:spcAft>
-              <a:defRPr sz="1624" b="1" i="0" lang="zh-CN" dirty="0">
-                <a:solidFill>
-                  <a:srgbClr val="1F2326"/>
-                </a:solidFill>
-                <a:latin typeface="Noto Sans CJK SC"/>
-                <a:ea typeface="Noto Sans CJK SC"/>
-                <a:cs typeface="Noto Sans CJK SC"/>
-              </a:defRPr>
-            </a:pPr>
-            <a:r>
-              <a:rPr sz="1624" b="1" i="0" lang="zh-CN" dirty="0">
-                <a:solidFill>
-                  <a:srgbClr val="1F2326"/>
-                </a:solidFill>
-                <a:latin typeface="Noto Sans CJK SC"/>
-                <a:ea typeface="Noto Sans CJK SC"/>
-                <a:cs typeface="Noto Sans CJK SC"/>
-              </a:rPr>
-              <a:t>结构比较</a:t>
-            </a:r>
-          </a:p>
-        </p:txBody>
-      </p:sp>
-      <p:sp>
-        <p:nvSpPr>
-          <p:cNvPr id="43" name="u3_a" descr="Editable line; source id u3_a"/>
-          <p:cNvSpPr/>
-          <p:nvPr/>
-        </p:nvSpPr>
-        <p:spPr>
-          <a:xfrm>
-            <a:off x="9644062" y="4770437"/>
-            <a:ext cx="460375" cy="142875"/>
-          </a:xfrm>
-          <a:custGeom>
-            <a:avLst/>
-            <a:gdLst/>
-            <a:ahLst/>
-            <a:cxnLst/>
-            <a:rect l="l" t="t" r="r" b="b"/>
-            <a:pathLst>
-              <a:path w="58000" h="18000">
-                <a:moveTo>
-                  <a:pt x="0" y="6000"/>
-                </a:moveTo>
-                <a:lnTo>
-                  <a:pt x="38000" y="6000"/>
-                </a:lnTo>
-                <a:lnTo>
-                  <a:pt x="38000" y="0"/>
-                </a:lnTo>
-                <a:lnTo>
-                  <a:pt x="58000" y="9000"/>
-                </a:lnTo>
-                <a:lnTo>
-                  <a:pt x="38000" y="18000"/>
-                </a:lnTo>
-                <a:lnTo>
-                  <a:pt x="38000" y="12000"/>
-                </a:lnTo>
-                <a:lnTo>
-                  <a:pt x="0" y="12000"/>
-                </a:lnTo>
-                <a:close/>
-              </a:path>
-            </a:pathLst>
-          </a:custGeom>
-          <a:solidFill>
-            <a:srgbClr val="1F6F78"/>
-          </a:solidFill>
-          <a:ln>
-            <a:noFill/>
-          </a:ln>
-          <a:effectLst/>
-        </p:spPr>
-        <p:style>
-          <a:lnRef idx="1">
-            <a:schemeClr val="accent1"/>
-          </a:lnRef>
-          <a:fillRef idx="3">
-            <a:schemeClr val="accent1"/>
-          </a:fillRef>
-          <a:effectRef idx="0">
-            <a:schemeClr val="accent1"/>
-          </a:effectRef>
-          <a:fontRef idx="minor">
-            <a:schemeClr val="lt1"/>
-          </a:fontRef>
-        </p:style>
-        <p:txBody>
-          <a:bodyPr rtlCol="0" anchor="ctr"/>
-          <a:lstStyle/>
-          <a:p>
-            <a:pPr algn="ctr"/>
-          </a:p>
-        </p:txBody>
-      </p:sp>
-      <p:sp>
-        <p:nvSpPr>
-          <p:cNvPr id="44" name="u3" descr="Editable shape; source id u3"/>
-          <p:cNvSpPr/>
-          <p:nvPr/>
-        </p:nvSpPr>
-        <p:spPr>
-          <a:xfrm>
-            <a:off x="10120312" y="4437062"/>
-            <a:ext cx="1865312" cy="809624"/>
-          </a:xfrm>
-          <a:prstGeom prst="roundRect">
-            <a:avLst>
-              <a:gd name="adj" fmla="val 13725"/>
-            </a:avLst>
-          </a:prstGeom>
-          <a:solidFill>
-            <a:srgbClr val="FFFFFF"/>
-          </a:solidFill>
-          <a:ln w="19843">
-            <a:solidFill>
-              <a:srgbClr val="4A5158"/>
-            </a:solidFill>
-          </a:ln>
-          <a:effectLst/>
-        </p:spPr>
-        <p:style>
-          <a:lnRef idx="1">
-            <a:schemeClr val="accent1"/>
-          </a:lnRef>
-          <a:fillRef idx="3">
-            <a:schemeClr val="accent1"/>
-          </a:fillRef>
-          <a:effectRef idx="0">
-            <a:schemeClr val="accent1"/>
-          </a:effectRef>
-          <a:fontRef idx="minor">
-            <a:schemeClr val="lt1"/>
-          </a:fontRef>
-        </p:style>
-        <p:txBody>
-          <a:bodyPr rtlCol="0" anchor="ctr"/>
-          <a:lstStyle/>
-          <a:p>
-            <a:pPr algn="ctr"/>
-          </a:p>
-        </p:txBody>
-      </p:sp>
-      <p:sp>
-        <p:nvSpPr>
-          <p:cNvPr id="45" name="u3_t" descr="Editable text; source id u3_t"/>
-          <p:cNvSpPr txBox="1"/>
-          <p:nvPr/>
-        </p:nvSpPr>
-        <p:spPr>
-          <a:xfrm>
-            <a:off x="10199687" y="4516437"/>
-            <a:ext cx="1706562" cy="650874"/>
-          </a:xfrm>
-          <a:prstGeom prst="rect">
-            <a:avLst/>
-          </a:prstGeom>
-          <a:noFill/>
-          <a:effectLst/>
-        </p:spPr>
-        <p:txBody>
-          <a:bodyPr wrap="none" anchor="ctr" tIns="0" rIns="0" bIns="0" lIns="0" anchorCtr="0" vertOverflow="overflow">
-            <a:noAutofit/>
-          </a:bodyPr>
-          <a:lstStyle/>
-          <a:p>
-            <a:pPr algn="ctr" fontAlgn="base">
-              <a:lnSpc>
-                <a:spcPts val="2359"/>
-              </a:lnSpc>
-              <a:spcBef>
-                <a:spcPts val="0"/>
-              </a:spcBef>
-              <a:spcAft>
-                <a:spcPts val="0"/>
-              </a:spcAft>
-              <a:defRPr sz="1624" b="1" i="0" lang="zh-CN" dirty="0">
-                <a:solidFill>
-                  <a:srgbClr val="1F2326"/>
-                </a:solidFill>
-                <a:latin typeface="Noto Sans CJK SC"/>
-                <a:ea typeface="Noto Sans CJK SC"/>
-                <a:cs typeface="Noto Sans CJK SC"/>
-              </a:defRPr>
-            </a:pPr>
-            <a:r>
-              <a:rPr sz="1624" b="1" i="0" lang="zh-CN" dirty="0">
-                <a:solidFill>
-                  <a:srgbClr val="1F2326"/>
-                </a:solidFill>
-                <a:latin typeface="Noto Sans CJK SC"/>
-                <a:ea typeface="Noto Sans CJK SC"/>
-                <a:cs typeface="Noto Sans CJK SC"/>
-              </a:rPr>
-              <a:t>方法与变量结构</a:t>
-            </a:r>
-          </a:p>
-        </p:txBody>
-      </p:sp>
-      <p:cxnSp>
-        <p:nvCxnSpPr>
-          <p:cNvPr id="46" name="ex1" descr="Editable line; source id ex1"/>
-          <p:cNvCxnSpPr/>
-          <p:nvPr/>
-        </p:nvCxnSpPr>
-        <p:spPr>
-          <a:xfrm>
-            <a:off x="1746249" y="5778499"/>
-            <a:ext cx="0" cy="619125"/>
-          </a:xfrm>
-          <a:prstGeom prst="line">
-            <a:avLst/>
-          </a:prstGeom>
-          <a:ln w="23812">
-            <a:solidFill>
-              <a:srgbClr val="8A9199"/>
-            </a:solidFill>
-            <a:custDash>
-              <a:ds d="466667" sp="333333"/>
-            </a:custDash>
           </a:ln>
           <a:effectLst/>
         </p:spPr>
@@ -5980,25 +5707,22 @@
       </p:cxnSp>
       <p:cxnSp>
         <p:nvCxnSpPr>
-          <p:cNvPr id="47" name="ex2" descr="Editable line; source id ex2"/>
+          <p:cNvPr id="48" name="br2_0" descr="Editable line; source id br2_0"/>
           <p:cNvCxnSpPr/>
           <p:nvPr/>
         </p:nvCxnSpPr>
         <p:spPr>
           <a:xfrm>
-            <a:off x="1746249" y="6397624"/>
-            <a:ext cx="5381625" cy="0"/>
+            <a:off x="3230123" y="2948347"/>
+            <a:ext cx="288650" cy="0"/>
           </a:xfrm>
           <a:prstGeom prst="line">
             <a:avLst/>
           </a:prstGeom>
-          <a:ln w="23812">
+          <a:ln w="13745">
             <a:solidFill>
-              <a:srgbClr val="8A9199"/>
+              <a:srgbClr val="4B5563"/>
             </a:solidFill>
-            <a:custDash>
-              <a:ds d="466667" sp="333333"/>
-            </a:custDash>
           </a:ln>
           <a:effectLst/>
         </p:spPr>
@@ -6017,16 +5741,88 @@
           </a:fontRef>
         </p:style>
       </p:cxnSp>
-      <p:sp>
-        <p:nvSpPr>
-          <p:cNvPr id="48" name="expill" descr="Editable shape; source id expill"/>
+      <p:cxnSp>
+        <p:nvCxnSpPr>
+          <p:cNvPr id="49" name="br3_0" descr="Editable line; source id br3_0"/>
+          <p:cNvCxnSpPr/>
+          <p:nvPr/>
+        </p:nvCxnSpPr>
+        <p:spPr>
+          <a:xfrm>
+            <a:off x="3230123" y="3828040"/>
+            <a:ext cx="288650" cy="0"/>
+          </a:xfrm>
+          <a:prstGeom prst="line">
+            <a:avLst/>
+          </a:prstGeom>
+          <a:ln w="13745">
+            <a:solidFill>
+              <a:srgbClr val="4B5563"/>
+            </a:solidFill>
+          </a:ln>
+          <a:effectLst/>
+        </p:spPr>
+        <p:style>
+          <a:lnRef idx="2">
+            <a:schemeClr val="accent1"/>
+          </a:lnRef>
+          <a:fillRef idx="0">
+            <a:schemeClr val="accent1"/>
+          </a:fillRef>
+          <a:effectRef idx="0">
+            <a:schemeClr val="accent1"/>
+          </a:effectRef>
+          <a:fontRef idx="minor">
+            <a:schemeClr val="tx1"/>
+          </a:fontRef>
+        </p:style>
+      </p:cxnSp>
+      <p:cxnSp>
+        <p:nvCxnSpPr>
+          <p:cNvPr id="50" name="brv_0" descr="Editable line; source id brv_0"/>
+          <p:cNvCxnSpPr/>
+          <p:nvPr/>
+        </p:nvCxnSpPr>
+        <p:spPr>
+          <a:xfrm>
+            <a:off x="3518773" y="1188960"/>
+            <a:ext cx="0" cy="2639080"/>
+          </a:xfrm>
+          <a:prstGeom prst="line">
+            <a:avLst/>
+          </a:prstGeom>
+          <a:ln w="13745">
+            <a:solidFill>
+              <a:srgbClr val="4B5563"/>
+            </a:solidFill>
+          </a:ln>
+          <a:effectLst/>
+        </p:spPr>
+        <p:style>
+          <a:lnRef idx="2">
+            <a:schemeClr val="accent1"/>
+          </a:lnRef>
+          <a:fillRef idx="0">
+            <a:schemeClr val="accent1"/>
+          </a:fillRef>
+          <a:effectRef idx="0">
+            <a:schemeClr val="accent1"/>
+          </a:effectRef>
+          <a:fontRef idx="minor">
+            <a:schemeClr val="tx1"/>
+          </a:fontRef>
+        </p:style>
+      </p:cxnSp>
+      <p:sp>
+        <p:nvSpPr>
+          <p:cNvPr id="51" name="brh_p" descr="Editable shape; source id brh_p"/>
           <p:cNvSpPr/>
           <p:nvPr/>
         </p:nvSpPr>
         <p:spPr>
           <a:xfrm>
-            <a:off x="7143749" y="6199187"/>
-            <a:ext cx="976312" cy="396874"/>
+            <a:off x="3738696" y="2364175"/>
+            <a:ext cx="1532590" cy="281776"/>
           </a:xfrm>
           <a:prstGeom prst="roundRect">
             <a:avLst>
@@ -6034,11 +5830,11 @@
             </a:avLst>
           </a:prstGeom>
           <a:solidFill>
-            <a:srgbClr val="FFFFFF"/>
+            <a:srgbClr val="FFF6E3"/>
           </a:solidFill>
-          <a:ln w="15874">
+          <a:ln w="8247">
             <a:solidFill>
-              <a:srgbClr val="B5BDC4"/>
+              <a:srgbClr val="C48A24"/>
             </a:solidFill>
           </a:ln>
           <a:effectLst/>
@@ -6067,14 +5863,14 @@
       </p:sp>
       <p:sp>
         <p:nvSpPr>
-          <p:cNvPr id="49" name="expill_t" descr="Editable text; source id expill_t"/>
+          <p:cNvPr id="52" name="brh_p_t" descr="Editable text; source id brh_p_t"/>
           <p:cNvSpPr txBox="1"/>
           <p:nvPr/>
         </p:nvSpPr>
         <p:spPr>
           <a:xfrm>
-            <a:off x="7207249" y="6246812"/>
-            <a:ext cx="849312" cy="301624"/>
+            <a:off x="3821167" y="2405411"/>
+            <a:ext cx="1367648" cy="213050"/>
           </a:xfrm>
           <a:prstGeom prst="rect">
             <a:avLst/>
@@ -6090,7 +5886,7 @@
           <a:p>
             <a:pPr algn="ctr" fontAlgn="base">
               <a:lnSpc>
-                <a:spcPts val="2187"/>
+                <a:spcPts val="1420"/>
               </a:lnSpc>
               <a:spcBef>
                 <a:spcPts val="0"/>
@@ -6098,9 +5894,9 @@
               <a:spcAft>
                 <a:spcPts val="0"/>
               </a:spcAft>
-              <a:defRPr sz="1499" b="1" i="0" lang="zh-CN" dirty="0">
+              <a:defRPr sz="974" b="0" i="0" lang="zh-CN" dirty="0">
                 <a:solidFill>
-                  <a:srgbClr val="3A4046"/>
+                  <a:srgbClr val="7A5410"/>
                 </a:solidFill>
                 <a:latin typeface="Noto Sans CJK SC"/>
                 <a:ea typeface="Noto Sans CJK SC"/>
@@ -6108,41 +5904,59 @@
               </a:defRPr>
             </a:pPr>
             <a:r>
-              <a:rPr sz="1499" b="1" i="0" lang="zh-CN" dirty="0">
+              <a:rPr sz="974" b="0" i="0" lang="zh-CN" dirty="0">
                 <a:solidFill>
-                  <a:srgbClr val="3A4046"/>
+                  <a:srgbClr val="7A5410"/>
                 </a:solidFill>
                 <a:latin typeface="Noto Sans CJK SC"/>
                 <a:ea typeface="Noto Sans CJK SC"/>
                 <a:cs typeface="Noto Sans CJK SC"/>
               </a:rPr>
-              <a:t>排除</a:t>
+              <a:t>近邻条件</a:t>
+            </a:r>
+            <a:r>
+              <a:rPr sz="974" b="0" i="0" lang="zh-CN" dirty="0">
+                <a:solidFill>
+                  <a:srgbClr val="7A5410"/>
+                </a:solidFill>
+                <a:latin typeface="DejaVu Sans"/>
+                <a:ea typeface="DejaVu Sans"/>
+                <a:cs typeface="DejaVu Sans"/>
+              </a:rPr>
+              <a:t> ≠ </a:t>
+            </a:r>
+            <a:r>
+              <a:rPr sz="974" b="0" i="0" lang="zh-CN" dirty="0">
+                <a:solidFill>
+                  <a:srgbClr val="7A5410"/>
+                </a:solidFill>
+                <a:latin typeface="Noto Sans CJK SC"/>
+                <a:ea typeface="Noto Sans CJK SC"/>
+                <a:cs typeface="Noto Sans CJK SC"/>
+              </a:rPr>
+              <a:t>已验证配方</a:t>
             </a:r>
           </a:p>
         </p:txBody>
       </p:sp>
       <p:cxnSp>
         <p:nvCxnSpPr>
-          <p:cNvPr id="50" name="ex3" descr="Editable line; source id ex3"/>
+          <p:cNvPr id="53" name="brh_0" descr="Editable line; source id brh_0"/>
           <p:cNvCxnSpPr/>
           <p:nvPr/>
         </p:nvCxnSpPr>
         <p:spPr>
           <a:xfrm>
-            <a:off x="8135937" y="6397624"/>
-            <a:ext cx="1976437" cy="0"/>
+            <a:off x="3518773" y="2508500"/>
+            <a:ext cx="192433" cy="0"/>
           </a:xfrm>
           <a:prstGeom prst="line">
             <a:avLst/>
           </a:prstGeom>
-          <a:ln w="23812">
+          <a:ln w="13745">
             <a:solidFill>
-              <a:srgbClr val="8A9199"/>
+              <a:srgbClr val="4B5563"/>
             </a:solidFill>
-            <a:custDash>
-              <a:ds d="466667" sp="333333"/>
-            </a:custDash>
-            <a:tailEnd type="triangle"/>
           </a:ln>
           <a:effectLst/>
         </p:spPr>
@@ -6163,27 +5977,53 @@
       </p:cxnSp>
       <p:sp>
         <p:nvSpPr>
-          <p:cNvPr id="51" name="u4" descr="Editable shape; source id u4"/>
+          <p:cNvPr id="54" name="brh_1" descr="Editable line; source id brh_1"/>
           <p:cNvSpPr/>
           <p:nvPr/>
         </p:nvSpPr>
         <p:spPr>
           <a:xfrm>
-            <a:off x="10128249" y="6008687"/>
-            <a:ext cx="1857374" cy="809624"/>
-          </a:xfrm>
-          <a:prstGeom prst="roundRect">
-            <a:avLst>
-              <a:gd name="adj" fmla="val 13725"/>
-            </a:avLst>
-          </a:prstGeom>
+            <a:off x="5305650" y="2470701"/>
+            <a:ext cx="178688" cy="75599"/>
+          </a:xfrm>
+          <a:custGeom>
+            <a:avLst/>
+            <a:gdLst/>
+            <a:ahLst/>
+            <a:cxnLst/>
+            <a:rect l="l" t="t" r="r" b="b"/>
+            <a:pathLst>
+              <a:path w="26000" h="11000">
+                <a:moveTo>
+                  <a:pt x="0" y="4500"/>
+                </a:moveTo>
+                <a:lnTo>
+                  <a:pt x="13000" y="4500"/>
+                </a:lnTo>
+                <a:lnTo>
+                  <a:pt x="13000" y="0"/>
+                </a:lnTo>
+                <a:lnTo>
+                  <a:pt x="26000" y="5500"/>
+                </a:lnTo>
+                <a:lnTo>
+                  <a:pt x="13000" y="11000"/>
+                </a:lnTo>
+                <a:lnTo>
+                  <a:pt x="13000" y="6500"/>
+                </a:lnTo>
+                <a:lnTo>
+                  <a:pt x="0" y="6500"/>
+                </a:lnTo>
+                <a:close/>
+              </a:path>
+            </a:pathLst>
+          </a:custGeom>
           <a:solidFill>
-            <a:srgbClr val="FFFFFF"/>
+            <a:srgbClr val="4B5563"/>
           </a:solidFill>
-          <a:ln w="19843">
-            <a:solidFill>
-              <a:srgbClr val="4A5158"/>
-            </a:solidFill>
+          <a:ln>
+            <a:noFill/>
           </a:ln>
           <a:effectLst/>
         </p:spPr>
@@ -6211,14 +6051,133 @@
       </p:sp>
       <p:sp>
         <p:nvSpPr>
-          <p:cNvPr id="52" name="u4_t" descr="Editable text; source id u4_t"/>
+          <p:cNvPr id="55" name="u1" descr="Editable shape; source id u1"/>
+          <p:cNvSpPr/>
+          <p:nvPr/>
+        </p:nvSpPr>
+        <p:spPr>
+          <a:xfrm>
+            <a:off x="8934385" y="810967"/>
+            <a:ext cx="2859003" cy="755986"/>
+          </a:xfrm>
+          <a:prstGeom prst="roundRect">
+            <a:avLst>
+              <a:gd name="adj" fmla="val 9090"/>
+            </a:avLst>
+          </a:prstGeom>
+          <a:solidFill>
+            <a:srgbClr val="FFFFFF"/>
+          </a:solidFill>
+          <a:ln w="10308">
+            <a:solidFill>
+              <a:srgbClr val="5B7592"/>
+            </a:solidFill>
+          </a:ln>
+          <a:effectLst/>
+        </p:spPr>
+        <p:style>
+          <a:lnRef idx="1">
+            <a:schemeClr val="accent1"/>
+          </a:lnRef>
+          <a:fillRef idx="3">
+            <a:schemeClr val="accent1"/>
+          </a:fillRef>
+          <a:effectRef idx="0">
+            <a:schemeClr val="accent1"/>
+          </a:effectRef>
+          <a:fontRef idx="minor">
+            <a:schemeClr val="lt1"/>
+          </a:fontRef>
+        </p:style>
+        <p:txBody>
+          <a:bodyPr rtlCol="0" anchor="ctr"/>
+          <a:lstStyle/>
+          <a:p>
+            <a:pPr algn="ctr"/>
+          </a:p>
+        </p:txBody>
+      </p:sp>
+      <p:sp>
+        <p:nvSpPr>
+          <p:cNvPr id="56" name="u1_s" descr="Editable shape; source id u1_s"/>
+          <p:cNvSpPr/>
+          <p:nvPr/>
+        </p:nvSpPr>
+        <p:spPr>
+          <a:xfrm>
+            <a:off x="8934385" y="810967"/>
+            <a:ext cx="2859003" cy="54980"/>
+          </a:xfrm>
+          <a:prstGeom prst="roundRect">
+            <a:avLst>
+              <a:gd name="adj" fmla="val 50000"/>
+            </a:avLst>
+          </a:prstGeom>
+          <a:solidFill>
+            <a:srgbClr val="5B7592"/>
+          </a:solidFill>
+          <a:ln>
+            <a:noFill/>
+          </a:ln>
+          <a:effectLst/>
+        </p:spPr>
+        <p:style>
+          <a:lnRef idx="1">
+            <a:schemeClr val="accent1"/>
+          </a:lnRef>
+          <a:fillRef idx="3">
+            <a:schemeClr val="accent1"/>
+          </a:fillRef>
+          <a:effectRef idx="0">
+            <a:schemeClr val="accent1"/>
+          </a:effectRef>
+          <a:fontRef idx="minor">
+            <a:schemeClr val="lt1"/>
+          </a:fontRef>
+        </p:style>
+        <p:txBody>
+          <a:bodyPr rtlCol="0" anchor="ctr"/>
+          <a:lstStyle/>
+          <a:p>
+            <a:pPr algn="ctr"/>
+          </a:p>
+        </p:txBody>
+      </p:sp>
+      <p:pic>
+        <p:nvPicPr>
+          <p:cNvPr id="57" name="u1_i" descr="exact crop of the generated raster (line motif)"/>
+          <p:cNvPicPr>
+            <a:picLocks noChangeAspect="1"/>
+          </p:cNvPicPr>
+          <p:nvPr/>
+        </p:nvPicPr>
+        <p:blipFill>
+          <a:blip r:embed="rId8"/>
+          <a:stretch>
+            <a:fillRect/>
+          </a:stretch>
+        </p:blipFill>
+        <p:spPr>
+          <a:xfrm>
+            <a:off x="9116290" y="1030890"/>
+            <a:ext cx="295960" cy="302394"/>
+          </a:xfrm>
+          <a:prstGeom prst="rect">
+            <a:avLst/>
+          </a:prstGeom>
+          <a:effectLst/>
+        </p:spPr>
+      </p:pic>
+      <p:sp>
+        <p:nvSpPr>
+          <p:cNvPr id="58" name="u1_t" descr="Editable text; source id u1_t"/>
           <p:cNvSpPr txBox="1"/>
           <p:nvPr/>
         </p:nvSpPr>
         <p:spPr>
           <a:xfrm>
-            <a:off x="10207624" y="6088062"/>
-            <a:ext cx="1698624" cy="650874"/>
+            <a:off x="9497938" y="1044635"/>
+            <a:ext cx="2116762" cy="268031"/>
           </a:xfrm>
           <a:prstGeom prst="rect">
             <a:avLst/>
@@ -6232,9 +6191,9 @@
           </a:bodyPr>
           <a:lstStyle/>
           <a:p>
-            <a:pPr algn="ctr" fontAlgn="base">
+            <a:pPr algn="l" fontAlgn="base">
               <a:lnSpc>
-                <a:spcPts val="2359"/>
+                <a:spcPts val="2002"/>
               </a:lnSpc>
               <a:spcBef>
                 <a:spcPts val="0"/>
@@ -6242,9 +6201,9 @@
               <a:spcAft>
                 <a:spcPts val="0"/>
               </a:spcAft>
-              <a:defRPr sz="1624" b="1" i="0" lang="zh-CN" dirty="0">
+              <a:defRPr sz="1366" b="1" i="0" lang="zh-CN" dirty="0">
                 <a:solidFill>
-                  <a:srgbClr val="1F2326"/>
+                  <a:srgbClr val="2B3E57"/>
                 </a:solidFill>
                 <a:latin typeface="Noto Sans CJK SC"/>
                 <a:ea typeface="Noto Sans CJK SC"/>
@@ -6252,9 +6211,491 @@
               </a:defRPr>
             </a:pPr>
             <a:r>
-              <a:rPr sz="1624" b="1" i="0" lang="zh-CN" dirty="0">
+              <a:rPr sz="1366" b="1" i="0" lang="zh-CN" dirty="0">
                 <a:solidFill>
-                  <a:srgbClr val="1F2326"/>
+                  <a:srgbClr val="2B3E57"/>
+                </a:solidFill>
+                <a:latin typeface="Noto Sans CJK SC"/>
+                <a:ea typeface="Noto Sans CJK SC"/>
+                <a:cs typeface="Noto Sans CJK SC"/>
+              </a:rPr>
+              <a:t>直接条件复现</a:t>
+            </a:r>
+          </a:p>
+        </p:txBody>
+      </p:sp>
+      <p:sp>
+        <p:nvSpPr>
+          <p:cNvPr id="59" name="u2" descr="Editable shape; source id u2"/>
+          <p:cNvSpPr/>
+          <p:nvPr/>
+        </p:nvSpPr>
+        <p:spPr>
+          <a:xfrm>
+            <a:off x="8934385" y="2130507"/>
+            <a:ext cx="2859003" cy="755986"/>
+          </a:xfrm>
+          <a:prstGeom prst="roundRect">
+            <a:avLst>
+              <a:gd name="adj" fmla="val 9090"/>
+            </a:avLst>
+          </a:prstGeom>
+          <a:solidFill>
+            <a:srgbClr val="FFFFFF"/>
+          </a:solidFill>
+          <a:ln w="10308">
+            <a:solidFill>
+              <a:srgbClr val="5B7592"/>
+            </a:solidFill>
+          </a:ln>
+          <a:effectLst/>
+        </p:spPr>
+        <p:style>
+          <a:lnRef idx="1">
+            <a:schemeClr val="accent1"/>
+          </a:lnRef>
+          <a:fillRef idx="3">
+            <a:schemeClr val="accent1"/>
+          </a:fillRef>
+          <a:effectRef idx="0">
+            <a:schemeClr val="accent1"/>
+          </a:effectRef>
+          <a:fontRef idx="minor">
+            <a:schemeClr val="lt1"/>
+          </a:fontRef>
+        </p:style>
+        <p:txBody>
+          <a:bodyPr rtlCol="0" anchor="ctr"/>
+          <a:lstStyle/>
+          <a:p>
+            <a:pPr algn="ctr"/>
+          </a:p>
+        </p:txBody>
+      </p:sp>
+      <p:sp>
+        <p:nvSpPr>
+          <p:cNvPr id="60" name="u2_s" descr="Editable shape; source id u2_s"/>
+          <p:cNvSpPr/>
+          <p:nvPr/>
+        </p:nvSpPr>
+        <p:spPr>
+          <a:xfrm>
+            <a:off x="8934385" y="2130507"/>
+            <a:ext cx="2859003" cy="54980"/>
+          </a:xfrm>
+          <a:prstGeom prst="roundRect">
+            <a:avLst>
+              <a:gd name="adj" fmla="val 50000"/>
+            </a:avLst>
+          </a:prstGeom>
+          <a:solidFill>
+            <a:srgbClr val="5B7592"/>
+          </a:solidFill>
+          <a:ln>
+            <a:noFill/>
+          </a:ln>
+          <a:effectLst/>
+        </p:spPr>
+        <p:style>
+          <a:lnRef idx="1">
+            <a:schemeClr val="accent1"/>
+          </a:lnRef>
+          <a:fillRef idx="3">
+            <a:schemeClr val="accent1"/>
+          </a:fillRef>
+          <a:effectRef idx="0">
+            <a:schemeClr val="accent1"/>
+          </a:effectRef>
+          <a:fontRef idx="minor">
+            <a:schemeClr val="lt1"/>
+          </a:fontRef>
+        </p:style>
+        <p:txBody>
+          <a:bodyPr rtlCol="0" anchor="ctr"/>
+          <a:lstStyle/>
+          <a:p>
+            <a:pPr algn="ctr"/>
+          </a:p>
+        </p:txBody>
+      </p:sp>
+      <p:pic>
+        <p:nvPicPr>
+          <p:cNvPr id="61" name="u2_i" descr="exact crop of the generated raster (line motif)"/>
+          <p:cNvPicPr>
+            <a:picLocks noChangeAspect="1"/>
+          </p:cNvPicPr>
+          <p:nvPr/>
+        </p:nvPicPr>
+        <p:blipFill>
+          <a:blip r:embed="rId9"/>
+          <a:stretch>
+            <a:fillRect/>
+          </a:stretch>
+        </p:blipFill>
+        <p:spPr>
+          <a:xfrm>
+            <a:off x="9113073" y="2365400"/>
+            <a:ext cx="302394" cy="272454"/>
+          </a:xfrm>
+          <a:prstGeom prst="rect">
+            <a:avLst/>
+          </a:prstGeom>
+          <a:effectLst/>
+        </p:spPr>
+      </p:pic>
+      <p:sp>
+        <p:nvSpPr>
+          <p:cNvPr id="62" name="u2_t" descr="Editable text; source id u2_t"/>
+          <p:cNvSpPr txBox="1"/>
+          <p:nvPr/>
+        </p:nvSpPr>
+        <p:spPr>
+          <a:xfrm>
+            <a:off x="9497938" y="2364175"/>
+            <a:ext cx="2116762" cy="268031"/>
+          </a:xfrm>
+          <a:prstGeom prst="rect">
+            <a:avLst/>
+          </a:prstGeom>
+          <a:noFill/>
+          <a:effectLst/>
+        </p:spPr>
+        <p:txBody>
+          <a:bodyPr wrap="none" anchor="ctr" tIns="0" rIns="0" bIns="0" lIns="0" anchorCtr="0" vertOverflow="overflow">
+            <a:noAutofit/>
+          </a:bodyPr>
+          <a:lstStyle/>
+          <a:p>
+            <a:pPr algn="l" fontAlgn="base">
+              <a:lnSpc>
+                <a:spcPts val="2002"/>
+              </a:lnSpc>
+              <a:spcBef>
+                <a:spcPts val="0"/>
+              </a:spcBef>
+              <a:spcAft>
+                <a:spcPts val="0"/>
+              </a:spcAft>
+              <a:defRPr sz="1366" b="1" i="0" lang="zh-CN" dirty="0">
+                <a:solidFill>
+                  <a:srgbClr val="2B3E57"/>
+                </a:solidFill>
+                <a:latin typeface="Noto Sans CJK SC"/>
+                <a:ea typeface="Noto Sans CJK SC"/>
+                <a:cs typeface="Noto Sans CJK SC"/>
+              </a:defRPr>
+            </a:pPr>
+            <a:r>
+              <a:rPr sz="1366" b="1" i="0" lang="zh-CN" dirty="0">
+                <a:solidFill>
+                  <a:srgbClr val="2B3E57"/>
+                </a:solidFill>
+                <a:latin typeface="Noto Sans CJK SC"/>
+                <a:ea typeface="Noto Sans CJK SC"/>
+                <a:cs typeface="Noto Sans CJK SC"/>
+              </a:rPr>
+              <a:t>谱系内相图与结构比较</a:t>
+            </a:r>
+          </a:p>
+        </p:txBody>
+      </p:sp>
+      <p:sp>
+        <p:nvSpPr>
+          <p:cNvPr id="63" name="u3" descr="Editable shape; source id u3"/>
+          <p:cNvSpPr/>
+          <p:nvPr/>
+        </p:nvSpPr>
+        <p:spPr>
+          <a:xfrm>
+            <a:off x="8934385" y="3450047"/>
+            <a:ext cx="2859003" cy="755986"/>
+          </a:xfrm>
+          <a:prstGeom prst="roundRect">
+            <a:avLst>
+              <a:gd name="adj" fmla="val 9090"/>
+            </a:avLst>
+          </a:prstGeom>
+          <a:solidFill>
+            <a:srgbClr val="FFFFFF"/>
+          </a:solidFill>
+          <a:ln w="10308">
+            <a:solidFill>
+              <a:srgbClr val="5B7592"/>
+            </a:solidFill>
+          </a:ln>
+          <a:effectLst/>
+        </p:spPr>
+        <p:style>
+          <a:lnRef idx="1">
+            <a:schemeClr val="accent1"/>
+          </a:lnRef>
+          <a:fillRef idx="3">
+            <a:schemeClr val="accent1"/>
+          </a:fillRef>
+          <a:effectRef idx="0">
+            <a:schemeClr val="accent1"/>
+          </a:effectRef>
+          <a:fontRef idx="minor">
+            <a:schemeClr val="lt1"/>
+          </a:fontRef>
+        </p:style>
+        <p:txBody>
+          <a:bodyPr rtlCol="0" anchor="ctr"/>
+          <a:lstStyle/>
+          <a:p>
+            <a:pPr algn="ctr"/>
+          </a:p>
+        </p:txBody>
+      </p:sp>
+      <p:sp>
+        <p:nvSpPr>
+          <p:cNvPr id="64" name="u3_s" descr="Editable shape; source id u3_s"/>
+          <p:cNvSpPr/>
+          <p:nvPr/>
+        </p:nvSpPr>
+        <p:spPr>
+          <a:xfrm>
+            <a:off x="8934385" y="3450047"/>
+            <a:ext cx="2859003" cy="54980"/>
+          </a:xfrm>
+          <a:prstGeom prst="roundRect">
+            <a:avLst>
+              <a:gd name="adj" fmla="val 50000"/>
+            </a:avLst>
+          </a:prstGeom>
+          <a:solidFill>
+            <a:srgbClr val="5B7592"/>
+          </a:solidFill>
+          <a:ln>
+            <a:noFill/>
+          </a:ln>
+          <a:effectLst/>
+        </p:spPr>
+        <p:style>
+          <a:lnRef idx="1">
+            <a:schemeClr val="accent1"/>
+          </a:lnRef>
+          <a:fillRef idx="3">
+            <a:schemeClr val="accent1"/>
+          </a:fillRef>
+          <a:effectRef idx="0">
+            <a:schemeClr val="accent1"/>
+          </a:effectRef>
+          <a:fontRef idx="minor">
+            <a:schemeClr val="lt1"/>
+          </a:fontRef>
+        </p:style>
+        <p:txBody>
+          <a:bodyPr rtlCol="0" anchor="ctr"/>
+          <a:lstStyle/>
+          <a:p>
+            <a:pPr algn="ctr"/>
+          </a:p>
+        </p:txBody>
+      </p:sp>
+      <p:pic>
+        <p:nvPicPr>
+          <p:cNvPr id="65" name="u3_i" descr="exact crop of the generated raster (line motif)"/>
+          <p:cNvPicPr>
+            <a:picLocks noChangeAspect="1"/>
+          </p:cNvPicPr>
+          <p:nvPr/>
+        </p:nvPicPr>
+        <p:blipFill>
+          <a:blip r:embed="rId10"/>
+          <a:stretch>
+            <a:fillRect/>
+          </a:stretch>
+        </p:blipFill>
+        <p:spPr>
+          <a:xfrm>
+            <a:off x="9113073" y="3674796"/>
+            <a:ext cx="302394" cy="292743"/>
+          </a:xfrm>
+          <a:prstGeom prst="rect">
+            <a:avLst/>
+          </a:prstGeom>
+          <a:effectLst/>
+        </p:spPr>
+      </p:pic>
+      <p:sp>
+        <p:nvSpPr>
+          <p:cNvPr id="66" name="u3_t" descr="Editable text; source id u3_t"/>
+          <p:cNvSpPr txBox="1"/>
+          <p:nvPr/>
+        </p:nvSpPr>
+        <p:spPr>
+          <a:xfrm>
+            <a:off x="9497938" y="3683715"/>
+            <a:ext cx="2116762" cy="268031"/>
+          </a:xfrm>
+          <a:prstGeom prst="rect">
+            <a:avLst/>
+          </a:prstGeom>
+          <a:noFill/>
+          <a:effectLst/>
+        </p:spPr>
+        <p:txBody>
+          <a:bodyPr wrap="none" anchor="ctr" tIns="0" rIns="0" bIns="0" lIns="0" anchorCtr="0" vertOverflow="overflow">
+            <a:noAutofit/>
+          </a:bodyPr>
+          <a:lstStyle/>
+          <a:p>
+            <a:pPr algn="l" fontAlgn="base">
+              <a:lnSpc>
+                <a:spcPts val="2002"/>
+              </a:lnSpc>
+              <a:spcBef>
+                <a:spcPts val="0"/>
+              </a:spcBef>
+              <a:spcAft>
+                <a:spcPts val="0"/>
+              </a:spcAft>
+              <a:defRPr sz="1366" b="1" i="0" lang="zh-CN" dirty="0">
+                <a:solidFill>
+                  <a:srgbClr val="2B3E57"/>
+                </a:solidFill>
+                <a:latin typeface="Noto Sans CJK SC"/>
+                <a:ea typeface="Noto Sans CJK SC"/>
+                <a:cs typeface="Noto Sans CJK SC"/>
+              </a:defRPr>
+            </a:pPr>
+            <a:r>
+              <a:rPr sz="1366" b="1" i="0" lang="zh-CN" dirty="0">
+                <a:solidFill>
+                  <a:srgbClr val="2B3E57"/>
+                </a:solidFill>
+                <a:latin typeface="Noto Sans CJK SC"/>
+                <a:ea typeface="Noto Sans CJK SC"/>
+                <a:cs typeface="Noto Sans CJK SC"/>
+              </a:rPr>
+              <a:t>方法与变量结构</a:t>
+            </a:r>
+          </a:p>
+        </p:txBody>
+      </p:sp>
+      <p:sp>
+        <p:nvSpPr>
+          <p:cNvPr id="67" name="u4" descr="Editable shape; source id u4"/>
+          <p:cNvSpPr/>
+          <p:nvPr/>
+        </p:nvSpPr>
+        <p:spPr>
+          <a:xfrm>
+            <a:off x="8934385" y="4535918"/>
+            <a:ext cx="2859003" cy="755986"/>
+          </a:xfrm>
+          <a:prstGeom prst="roundRect">
+            <a:avLst>
+              <a:gd name="adj" fmla="val 9090"/>
+            </a:avLst>
+          </a:prstGeom>
+          <a:solidFill>
+            <a:srgbClr val="FFFFFF"/>
+          </a:solidFill>
+          <a:ln w="10308">
+            <a:solidFill>
+              <a:srgbClr val="9AA3AB"/>
+            </a:solidFill>
+            <a:custDash>
+              <a:ds d="866667" sp="533333"/>
+            </a:custDash>
+          </a:ln>
+          <a:effectLst/>
+        </p:spPr>
+        <p:style>
+          <a:lnRef idx="1">
+            <a:schemeClr val="accent1"/>
+          </a:lnRef>
+          <a:fillRef idx="3">
+            <a:schemeClr val="accent1"/>
+          </a:fillRef>
+          <a:effectRef idx="0">
+            <a:schemeClr val="accent1"/>
+          </a:effectRef>
+          <a:fontRef idx="minor">
+            <a:schemeClr val="lt1"/>
+          </a:fontRef>
+        </p:style>
+        <p:txBody>
+          <a:bodyPr rtlCol="0" anchor="ctr"/>
+          <a:lstStyle/>
+          <a:p>
+            <a:pPr algn="ctr"/>
+          </a:p>
+        </p:txBody>
+      </p:sp>
+      <p:pic>
+        <p:nvPicPr>
+          <p:cNvPr id="68" name="u4_i" descr="exact crop of the generated raster (line motif)"/>
+          <p:cNvPicPr>
+            <a:picLocks noChangeAspect="1"/>
+          </p:cNvPicPr>
+          <p:nvPr/>
+        </p:nvPicPr>
+        <p:blipFill>
+          <a:blip r:embed="rId11"/>
+          <a:stretch>
+            <a:fillRect/>
+          </a:stretch>
+        </p:blipFill>
+        <p:spPr>
+          <a:xfrm>
+            <a:off x="9113073" y="4714008"/>
+            <a:ext cx="302394" cy="276099"/>
+          </a:xfrm>
+          <a:prstGeom prst="rect">
+            <a:avLst/>
+          </a:prstGeom>
+          <a:effectLst/>
+        </p:spPr>
+      </p:pic>
+      <p:sp>
+        <p:nvSpPr>
+          <p:cNvPr id="69" name="u4_t" descr="Editable text; source id u4_t"/>
+          <p:cNvSpPr txBox="1"/>
+          <p:nvPr/>
+        </p:nvSpPr>
+        <p:spPr>
+          <a:xfrm>
+            <a:off x="9497938" y="4714606"/>
+            <a:ext cx="2116762" cy="268031"/>
+          </a:xfrm>
+          <a:prstGeom prst="rect">
+            <a:avLst/>
+          </a:prstGeom>
+          <a:noFill/>
+          <a:effectLst/>
+        </p:spPr>
+        <p:txBody>
+          <a:bodyPr wrap="none" anchor="ctr" tIns="0" rIns="0" bIns="0" lIns="0" anchorCtr="0" vertOverflow="overflow">
+            <a:noAutofit/>
+          </a:bodyPr>
+          <a:lstStyle/>
+          <a:p>
+            <a:pPr algn="l" fontAlgn="base">
+              <a:lnSpc>
+                <a:spcPts val="2002"/>
+              </a:lnSpc>
+              <a:spcBef>
+                <a:spcPts val="0"/>
+              </a:spcBef>
+              <a:spcAft>
+                <a:spcPts val="0"/>
+              </a:spcAft>
+              <a:defRPr sz="1366" b="1" i="0" lang="zh-CN" dirty="0">
+                <a:solidFill>
+                  <a:srgbClr val="5B6570"/>
+                </a:solidFill>
+                <a:latin typeface="Noto Sans CJK SC"/>
+                <a:ea typeface="Noto Sans CJK SC"/>
+                <a:cs typeface="Noto Sans CJK SC"/>
+              </a:defRPr>
+            </a:pPr>
+            <a:r>
+              <a:rPr sz="1366" b="1" i="0" lang="zh-CN" dirty="0">
+                <a:solidFill>
+                  <a:srgbClr val="5B6570"/>
                 </a:solidFill>
                 <a:latin typeface="Noto Sans CJK SC"/>
                 <a:ea typeface="Noto Sans CJK SC"/>
@@ -6265,6 +6706,639 @@
           </a:p>
         </p:txBody>
       </p:sp>
+      <p:cxnSp>
+        <p:nvCxnSpPr>
+          <p:cNvPr id="70" name="fan0_0" descr="Editable line; source id fan0_0"/>
+          <p:cNvCxnSpPr/>
+          <p:nvPr/>
+        </p:nvCxnSpPr>
+        <p:spPr>
+          <a:xfrm>
+            <a:off x="8027201" y="2508500"/>
+            <a:ext cx="323012" cy="0"/>
+          </a:xfrm>
+          <a:prstGeom prst="line">
+            <a:avLst/>
+          </a:prstGeom>
+          <a:ln w="13745">
+            <a:solidFill>
+              <a:srgbClr val="4B5563"/>
+            </a:solidFill>
+          </a:ln>
+          <a:effectLst/>
+        </p:spPr>
+        <p:style>
+          <a:lnRef idx="2">
+            <a:schemeClr val="accent1"/>
+          </a:lnRef>
+          <a:fillRef idx="0">
+            <a:schemeClr val="accent1"/>
+          </a:fillRef>
+          <a:effectRef idx="0">
+            <a:schemeClr val="accent1"/>
+          </a:effectRef>
+          <a:fontRef idx="minor">
+            <a:schemeClr val="tx1"/>
+          </a:fontRef>
+        </p:style>
+      </p:cxnSp>
+      <p:cxnSp>
+        <p:nvCxnSpPr>
+          <p:cNvPr id="71" name="fanv_0" descr="Editable line; source id fanv_0"/>
+          <p:cNvCxnSpPr/>
+          <p:nvPr/>
+        </p:nvCxnSpPr>
+        <p:spPr>
+          <a:xfrm>
+            <a:off x="8350213" y="1188960"/>
+            <a:ext cx="0" cy="2639080"/>
+          </a:xfrm>
+          <a:prstGeom prst="line">
+            <a:avLst/>
+          </a:prstGeom>
+          <a:ln w="13745">
+            <a:solidFill>
+              <a:srgbClr val="4B5563"/>
+            </a:solidFill>
+          </a:ln>
+          <a:effectLst/>
+        </p:spPr>
+        <p:style>
+          <a:lnRef idx="2">
+            <a:schemeClr val="accent1"/>
+          </a:lnRef>
+          <a:fillRef idx="0">
+            <a:schemeClr val="accent1"/>
+          </a:fillRef>
+          <a:effectRef idx="0">
+            <a:schemeClr val="accent1"/>
+          </a:effectRef>
+          <a:fontRef idx="minor">
+            <a:schemeClr val="tx1"/>
+          </a:fontRef>
+        </p:style>
+      </p:cxnSp>
+      <p:sp>
+        <p:nvSpPr>
+          <p:cNvPr id="72" name="fan1_0" descr="Editable line; source id fan1_0"/>
+          <p:cNvSpPr/>
+          <p:nvPr/>
+        </p:nvSpPr>
+        <p:spPr>
+          <a:xfrm>
+            <a:off x="8350214" y="1151161"/>
+            <a:ext cx="570426" cy="75599"/>
+          </a:xfrm>
+          <a:custGeom>
+            <a:avLst/>
+            <a:gdLst/>
+            <a:ahLst/>
+            <a:cxnLst/>
+            <a:rect l="l" t="t" r="r" b="b"/>
+            <a:pathLst>
+              <a:path w="83000" h="11000">
+                <a:moveTo>
+                  <a:pt x="0" y="4500"/>
+                </a:moveTo>
+                <a:lnTo>
+                  <a:pt x="70000" y="4500"/>
+                </a:lnTo>
+                <a:lnTo>
+                  <a:pt x="70000" y="0"/>
+                </a:lnTo>
+                <a:lnTo>
+                  <a:pt x="83000" y="5500"/>
+                </a:lnTo>
+                <a:lnTo>
+                  <a:pt x="70000" y="11000"/>
+                </a:lnTo>
+                <a:lnTo>
+                  <a:pt x="70000" y="6500"/>
+                </a:lnTo>
+                <a:lnTo>
+                  <a:pt x="0" y="6500"/>
+                </a:lnTo>
+                <a:close/>
+              </a:path>
+            </a:pathLst>
+          </a:custGeom>
+          <a:solidFill>
+            <a:srgbClr val="4B5563"/>
+          </a:solidFill>
+          <a:ln>
+            <a:noFill/>
+          </a:ln>
+          <a:effectLst/>
+        </p:spPr>
+        <p:style>
+          <a:lnRef idx="1">
+            <a:schemeClr val="accent1"/>
+          </a:lnRef>
+          <a:fillRef idx="3">
+            <a:schemeClr val="accent1"/>
+          </a:fillRef>
+          <a:effectRef idx="0">
+            <a:schemeClr val="accent1"/>
+          </a:effectRef>
+          <a:fontRef idx="minor">
+            <a:schemeClr val="lt1"/>
+          </a:fontRef>
+        </p:style>
+        <p:txBody>
+          <a:bodyPr rtlCol="0" anchor="ctr"/>
+          <a:lstStyle/>
+          <a:p>
+            <a:pPr algn="ctr"/>
+          </a:p>
+        </p:txBody>
+      </p:sp>
+      <p:sp>
+        <p:nvSpPr>
+          <p:cNvPr id="73" name="fan2_0" descr="Editable line; source id fan2_0"/>
+          <p:cNvSpPr/>
+          <p:nvPr/>
+        </p:nvSpPr>
+        <p:spPr>
+          <a:xfrm>
+            <a:off x="8350214" y="2470701"/>
+            <a:ext cx="570426" cy="75599"/>
+          </a:xfrm>
+          <a:custGeom>
+            <a:avLst/>
+            <a:gdLst/>
+            <a:ahLst/>
+            <a:cxnLst/>
+            <a:rect l="l" t="t" r="r" b="b"/>
+            <a:pathLst>
+              <a:path w="83000" h="11000">
+                <a:moveTo>
+                  <a:pt x="0" y="4500"/>
+                </a:moveTo>
+                <a:lnTo>
+                  <a:pt x="70000" y="4500"/>
+                </a:lnTo>
+                <a:lnTo>
+                  <a:pt x="70000" y="0"/>
+                </a:lnTo>
+                <a:lnTo>
+                  <a:pt x="83000" y="5500"/>
+                </a:lnTo>
+                <a:lnTo>
+                  <a:pt x="70000" y="11000"/>
+                </a:lnTo>
+                <a:lnTo>
+                  <a:pt x="70000" y="6500"/>
+                </a:lnTo>
+                <a:lnTo>
+                  <a:pt x="0" y="6500"/>
+                </a:lnTo>
+                <a:close/>
+              </a:path>
+            </a:pathLst>
+          </a:custGeom>
+          <a:solidFill>
+            <a:srgbClr val="4B5563"/>
+          </a:solidFill>
+          <a:ln>
+            <a:noFill/>
+          </a:ln>
+          <a:effectLst/>
+        </p:spPr>
+        <p:style>
+          <a:lnRef idx="1">
+            <a:schemeClr val="accent1"/>
+          </a:lnRef>
+          <a:fillRef idx="3">
+            <a:schemeClr val="accent1"/>
+          </a:fillRef>
+          <a:effectRef idx="0">
+            <a:schemeClr val="accent1"/>
+          </a:effectRef>
+          <a:fontRef idx="minor">
+            <a:schemeClr val="lt1"/>
+          </a:fontRef>
+        </p:style>
+        <p:txBody>
+          <a:bodyPr rtlCol="0" anchor="ctr"/>
+          <a:lstStyle/>
+          <a:p>
+            <a:pPr algn="ctr"/>
+          </a:p>
+        </p:txBody>
+      </p:sp>
+      <p:sp>
+        <p:nvSpPr>
+          <p:cNvPr id="74" name="fan3_0" descr="Editable line; source id fan3_0"/>
+          <p:cNvSpPr/>
+          <p:nvPr/>
+        </p:nvSpPr>
+        <p:spPr>
+          <a:xfrm>
+            <a:off x="8350214" y="3790241"/>
+            <a:ext cx="570426" cy="75599"/>
+          </a:xfrm>
+          <a:custGeom>
+            <a:avLst/>
+            <a:gdLst/>
+            <a:ahLst/>
+            <a:cxnLst/>
+            <a:rect l="l" t="t" r="r" b="b"/>
+            <a:pathLst>
+              <a:path w="83000" h="11000">
+                <a:moveTo>
+                  <a:pt x="0" y="4500"/>
+                </a:moveTo>
+                <a:lnTo>
+                  <a:pt x="70000" y="4500"/>
+                </a:lnTo>
+                <a:lnTo>
+                  <a:pt x="70000" y="0"/>
+                </a:lnTo>
+                <a:lnTo>
+                  <a:pt x="83000" y="5500"/>
+                </a:lnTo>
+                <a:lnTo>
+                  <a:pt x="70000" y="11000"/>
+                </a:lnTo>
+                <a:lnTo>
+                  <a:pt x="70000" y="6500"/>
+                </a:lnTo>
+                <a:lnTo>
+                  <a:pt x="0" y="6500"/>
+                </a:lnTo>
+                <a:close/>
+              </a:path>
+            </a:pathLst>
+          </a:custGeom>
+          <a:solidFill>
+            <a:srgbClr val="4B5563"/>
+          </a:solidFill>
+          <a:ln>
+            <a:noFill/>
+          </a:ln>
+          <a:effectLst/>
+        </p:spPr>
+        <p:style>
+          <a:lnRef idx="1">
+            <a:schemeClr val="accent1"/>
+          </a:lnRef>
+          <a:fillRef idx="3">
+            <a:schemeClr val="accent1"/>
+          </a:fillRef>
+          <a:effectRef idx="0">
+            <a:schemeClr val="accent1"/>
+          </a:effectRef>
+          <a:fontRef idx="minor">
+            <a:schemeClr val="lt1"/>
+          </a:fontRef>
+        </p:style>
+        <p:txBody>
+          <a:bodyPr rtlCol="0" anchor="ctr"/>
+          <a:lstStyle/>
+          <a:p>
+            <a:pPr algn="ctr"/>
+          </a:p>
+        </p:txBody>
+      </p:sp>
+      <p:sp>
+        <p:nvSpPr>
+          <p:cNvPr id="75" name="ex_p" descr="Editable shape; source id ex_p"/>
+          <p:cNvSpPr/>
+          <p:nvPr/>
+        </p:nvSpPr>
+        <p:spPr>
+          <a:xfrm>
+            <a:off x="5772987" y="5388121"/>
+            <a:ext cx="549808" cy="302394"/>
+          </a:xfrm>
+          <a:prstGeom prst="roundRect">
+            <a:avLst>
+              <a:gd name="adj" fmla="val 50000"/>
+            </a:avLst>
+          </a:prstGeom>
+          <a:solidFill>
+            <a:srgbClr val="FFFFFF"/>
+          </a:solidFill>
+          <a:ln w="8247">
+            <a:solidFill>
+              <a:srgbClr val="C6CCD1"/>
+            </a:solidFill>
+          </a:ln>
+          <a:effectLst/>
+        </p:spPr>
+        <p:style>
+          <a:lnRef idx="1">
+            <a:schemeClr val="accent1"/>
+          </a:lnRef>
+          <a:fillRef idx="3">
+            <a:schemeClr val="accent1"/>
+          </a:fillRef>
+          <a:effectRef idx="0">
+            <a:schemeClr val="accent1"/>
+          </a:effectRef>
+          <a:fontRef idx="minor">
+            <a:schemeClr val="lt1"/>
+          </a:fontRef>
+        </p:style>
+        <p:txBody>
+          <a:bodyPr rtlCol="0" anchor="ctr"/>
+          <a:lstStyle/>
+          <a:p>
+            <a:pPr algn="ctr"/>
+          </a:p>
+        </p:txBody>
+      </p:sp>
+      <p:sp>
+        <p:nvSpPr>
+          <p:cNvPr id="76" name="ex_p_t" descr="Editable text; source id ex_p_t"/>
+          <p:cNvSpPr txBox="1"/>
+          <p:nvPr/>
+        </p:nvSpPr>
+        <p:spPr>
+          <a:xfrm>
+            <a:off x="5855458" y="5422484"/>
+            <a:ext cx="384865" cy="233668"/>
+          </a:xfrm>
+          <a:prstGeom prst="rect">
+            <a:avLst/>
+          </a:prstGeom>
+          <a:noFill/>
+          <a:effectLst/>
+        </p:spPr>
+        <p:txBody>
+          <a:bodyPr wrap="none" anchor="ctr" tIns="0" rIns="0" bIns="0" lIns="0" anchorCtr="0" vertOverflow="overflow">
+            <a:noAutofit/>
+          </a:bodyPr>
+          <a:lstStyle/>
+          <a:p>
+            <a:pPr algn="ctr" fontAlgn="base">
+              <a:lnSpc>
+                <a:spcPts val="1582"/>
+              </a:lnSpc>
+              <a:spcBef>
+                <a:spcPts val="0"/>
+              </a:spcBef>
+              <a:spcAft>
+                <a:spcPts val="0"/>
+              </a:spcAft>
+              <a:defRPr sz="1082" b="0" i="0" lang="zh-CN" dirty="0">
+                <a:solidFill>
+                  <a:srgbClr val="3F4854"/>
+                </a:solidFill>
+                <a:latin typeface="Noto Sans CJK SC"/>
+                <a:ea typeface="Noto Sans CJK SC"/>
+                <a:cs typeface="Noto Sans CJK SC"/>
+              </a:defRPr>
+            </a:pPr>
+            <a:r>
+              <a:rPr sz="1082" b="0" i="0" lang="zh-CN" dirty="0">
+                <a:solidFill>
+                  <a:srgbClr val="3F4854"/>
+                </a:solidFill>
+                <a:latin typeface="Noto Sans CJK SC"/>
+                <a:ea typeface="Noto Sans CJK SC"/>
+                <a:cs typeface="Noto Sans CJK SC"/>
+              </a:rPr>
+              <a:t>排除</a:t>
+            </a:r>
+          </a:p>
+        </p:txBody>
+      </p:sp>
+      <p:cxnSp>
+        <p:nvCxnSpPr>
+          <p:cNvPr id="77" name="ex_0" descr="Editable line; source id ex_0"/>
+          <p:cNvCxnSpPr/>
+          <p:nvPr/>
+        </p:nvCxnSpPr>
+        <p:spPr>
+          <a:xfrm>
+            <a:off x="3230123" y="4913911"/>
+            <a:ext cx="481083" cy="0"/>
+          </a:xfrm>
+          <a:prstGeom prst="line">
+            <a:avLst/>
+          </a:prstGeom>
+          <a:ln w="13745">
+            <a:solidFill>
+              <a:srgbClr val="4B5563"/>
+            </a:solidFill>
+            <a:custDash>
+              <a:ds d="600000" sp="400000"/>
+            </a:custDash>
+          </a:ln>
+          <a:effectLst/>
+        </p:spPr>
+        <p:style>
+          <a:lnRef idx="2">
+            <a:schemeClr val="accent1"/>
+          </a:lnRef>
+          <a:fillRef idx="0">
+            <a:schemeClr val="accent1"/>
+          </a:fillRef>
+          <a:effectRef idx="0">
+            <a:schemeClr val="accent1"/>
+          </a:effectRef>
+          <a:fontRef idx="minor">
+            <a:schemeClr val="tx1"/>
+          </a:fontRef>
+        </p:style>
+      </p:cxnSp>
+      <p:cxnSp>
+        <p:nvCxnSpPr>
+          <p:cNvPr id="78" name="ex_1" descr="Editable line; source id ex_1"/>
+          <p:cNvCxnSpPr/>
+          <p:nvPr/>
+        </p:nvCxnSpPr>
+        <p:spPr>
+          <a:xfrm>
+            <a:off x="3711206" y="4913911"/>
+            <a:ext cx="0" cy="625407"/>
+          </a:xfrm>
+          <a:prstGeom prst="line">
+            <a:avLst/>
+          </a:prstGeom>
+          <a:ln w="13745">
+            <a:solidFill>
+              <a:srgbClr val="4B5563"/>
+            </a:solidFill>
+            <a:custDash>
+              <a:ds d="600000" sp="400000"/>
+            </a:custDash>
+          </a:ln>
+          <a:effectLst/>
+        </p:spPr>
+        <p:style>
+          <a:lnRef idx="2">
+            <a:schemeClr val="accent1"/>
+          </a:lnRef>
+          <a:fillRef idx="0">
+            <a:schemeClr val="accent1"/>
+          </a:fillRef>
+          <a:effectRef idx="0">
+            <a:schemeClr val="accent1"/>
+          </a:effectRef>
+          <a:fontRef idx="minor">
+            <a:schemeClr val="tx1"/>
+          </a:fontRef>
+        </p:style>
+      </p:cxnSp>
+      <p:cxnSp>
+        <p:nvCxnSpPr>
+          <p:cNvPr id="79" name="ex_2" descr="Editable line; source id ex_2"/>
+          <p:cNvCxnSpPr/>
+          <p:nvPr/>
+        </p:nvCxnSpPr>
+        <p:spPr>
+          <a:xfrm>
+            <a:off x="3711206" y="5539318"/>
+            <a:ext cx="2034291" cy="0"/>
+          </a:xfrm>
+          <a:prstGeom prst="line">
+            <a:avLst/>
+          </a:prstGeom>
+          <a:ln w="13745">
+            <a:solidFill>
+              <a:srgbClr val="4B5563"/>
+            </a:solidFill>
+            <a:custDash>
+              <a:ds d="600000" sp="400000"/>
+            </a:custDash>
+          </a:ln>
+          <a:effectLst/>
+        </p:spPr>
+        <p:style>
+          <a:lnRef idx="2">
+            <a:schemeClr val="accent1"/>
+          </a:lnRef>
+          <a:fillRef idx="0">
+            <a:schemeClr val="accent1"/>
+          </a:fillRef>
+          <a:effectRef idx="0">
+            <a:schemeClr val="accent1"/>
+          </a:effectRef>
+          <a:fontRef idx="minor">
+            <a:schemeClr val="tx1"/>
+          </a:fontRef>
+        </p:style>
+      </p:cxnSp>
+      <p:cxnSp>
+        <p:nvCxnSpPr>
+          <p:cNvPr id="80" name="ex_3" descr="Editable line; source id ex_3"/>
+          <p:cNvCxnSpPr/>
+          <p:nvPr/>
+        </p:nvCxnSpPr>
+        <p:spPr>
+          <a:xfrm>
+            <a:off x="6350286" y="5539318"/>
+            <a:ext cx="2350430" cy="0"/>
+          </a:xfrm>
+          <a:prstGeom prst="line">
+            <a:avLst/>
+          </a:prstGeom>
+          <a:ln w="13745">
+            <a:solidFill>
+              <a:srgbClr val="4B5563"/>
+            </a:solidFill>
+            <a:custDash>
+              <a:ds d="600000" sp="400000"/>
+            </a:custDash>
+          </a:ln>
+          <a:effectLst/>
+        </p:spPr>
+        <p:style>
+          <a:lnRef idx="2">
+            <a:schemeClr val="accent1"/>
+          </a:lnRef>
+          <a:fillRef idx="0">
+            <a:schemeClr val="accent1"/>
+          </a:fillRef>
+          <a:effectRef idx="0">
+            <a:schemeClr val="accent1"/>
+          </a:effectRef>
+          <a:fontRef idx="minor">
+            <a:schemeClr val="tx1"/>
+          </a:fontRef>
+        </p:style>
+      </p:cxnSp>
+      <p:cxnSp>
+        <p:nvCxnSpPr>
+          <p:cNvPr id="81" name="ex_4" descr="Editable line; source id ex_4"/>
+          <p:cNvCxnSpPr/>
+          <p:nvPr/>
+        </p:nvCxnSpPr>
+        <p:spPr>
+          <a:xfrm flipV="1">
+            <a:off x="8700716" y="4913911"/>
+            <a:ext cx="0" cy="625407"/>
+          </a:xfrm>
+          <a:prstGeom prst="line">
+            <a:avLst/>
+          </a:prstGeom>
+          <a:ln w="13745">
+            <a:solidFill>
+              <a:srgbClr val="4B5563"/>
+            </a:solidFill>
+            <a:custDash>
+              <a:ds d="600000" sp="400000"/>
+            </a:custDash>
+          </a:ln>
+          <a:effectLst/>
+        </p:spPr>
+        <p:style>
+          <a:lnRef idx="2">
+            <a:schemeClr val="accent1"/>
+          </a:lnRef>
+          <a:fillRef idx="0">
+            <a:schemeClr val="accent1"/>
+          </a:fillRef>
+          <a:effectRef idx="0">
+            <a:schemeClr val="accent1"/>
+          </a:effectRef>
+          <a:fontRef idx="minor">
+            <a:schemeClr val="tx1"/>
+          </a:fontRef>
+        </p:style>
+      </p:cxnSp>
+      <p:cxnSp>
+        <p:nvCxnSpPr>
+          <p:cNvPr id="82" name="ex_5" descr="Editable line; source id ex_5"/>
+          <p:cNvCxnSpPr/>
+          <p:nvPr/>
+        </p:nvCxnSpPr>
+        <p:spPr>
+          <a:xfrm>
+            <a:off x="8700716" y="4913911"/>
+            <a:ext cx="219924" cy="0"/>
+          </a:xfrm>
+          <a:prstGeom prst="line">
+            <a:avLst/>
+          </a:prstGeom>
+          <a:ln w="13745">
+            <a:solidFill>
+              <a:srgbClr val="4B5563"/>
+            </a:solidFill>
+            <a:custDash>
+              <a:ds d="600000" sp="400000"/>
+            </a:custDash>
+            <a:tailEnd type="triangle"/>
+          </a:ln>
+          <a:effectLst/>
+        </p:spPr>
+        <p:style>
+          <a:lnRef idx="2">
+            <a:schemeClr val="accent1"/>
+          </a:lnRef>
+          <a:fillRef idx="0">
+            <a:schemeClr val="accent1"/>
+          </a:fillRef>
+          <a:effectRef idx="0">
+            <a:schemeClr val="accent1"/>
+          </a:effectRef>
+          <a:fontRef idx="minor">
+            <a:schemeClr val="tx1"/>
+          </a:fontRef>
+        </p:style>
+      </p:cxnSp>
     </p:spTree>
   </p:cSld>
   <p:clrMapOvr>

--- a/media/figstudio/fig01_evidence_map/fig01_evidence_synthesis_map_editable.pptx
+++ b/media/figstudio/fig01_evidence_map/fig01_evidence_synthesis_map_editable.pptx
@@ -7,7 +7,7 @@
   <p:sldIdLst>
     <p:sldId id="256" r:id="rId7"/>
   </p:sldIdLst>
-  <p:sldSz cx="12191999" cy="6095999" type="screen4x3"/>
+  <p:sldSz cx="12191999" cy="8127999" type="screen4x3"/>
   <p:notesSz cx="6858000" cy="9144000"/>
   <p:defaultTextStyle>
     <a:defPPr>
@@ -502,7 +502,7 @@
           <a:lstStyle/>
           <a:p>
             <a:r>
-              <a:t>图 1 不同文献对目标化合物合成研究的适用范围（super_teaser 第三轮 R01 → super_img2ppt 重建）</a:t>
+              <a:t>图 1 不同文献对目标化合物合成研究的适用范围（super_teaser 第四轮 R05 → super_img2ppt 重建）</a:t>
             </a:r>
           </a:p>
         </p:txBody>
@@ -3524,18 +3524,18 @@
         </p:nvSpPr>
         <p:spPr>
           <a:xfrm>
-            <a:off x="192432" y="247413"/>
-            <a:ext cx="4618389" cy="5601172"/>
+            <a:off x="206374" y="238124"/>
+            <a:ext cx="3730624" cy="7651749"/>
           </a:xfrm>
           <a:prstGeom prst="roundRect">
             <a:avLst>
-              <a:gd name="adj" fmla="val 2380"/>
+              <a:gd name="adj" fmla="val 2978"/>
             </a:avLst>
           </a:prstGeom>
           <a:solidFill>
             <a:srgbClr val="EEF2F7"/>
           </a:solidFill>
-          <a:ln w="10308">
+          <a:ln w="9524">
             <a:solidFill>
               <a:srgbClr val="5B7592"/>
             </a:solidFill>
@@ -3572,8 +3572,8 @@
         </p:nvSpPr>
         <p:spPr>
           <a:xfrm>
-            <a:off x="316139" y="329884"/>
-            <a:ext cx="687260" cy="226795"/>
+            <a:off x="349249" y="317499"/>
+            <a:ext cx="904874" cy="293687"/>
           </a:xfrm>
           <a:prstGeom prst="rect">
             <a:avLst/>
@@ -3589,7 +3589,7 @@
           <a:p>
             <a:pPr algn="l" fontAlgn="base">
               <a:lnSpc>
-                <a:spcPts val="1745"/>
+                <a:spcPts val="1921"/>
               </a:lnSpc>
               <a:spcBef>
                 <a:spcPts val="0"/>
@@ -3597,7 +3597,7 @@
               <a:spcAft>
                 <a:spcPts val="0"/>
               </a:spcAft>
-              <a:defRPr sz="1190" b="1" i="0" lang="zh-CN" dirty="0">
+              <a:defRPr sz="1312" b="1" i="0" lang="zh-CN" dirty="0">
                 <a:solidFill>
                   <a:srgbClr val="2B3E57"/>
                 </a:solidFill>
@@ -3607,7 +3607,7 @@
               </a:defRPr>
             </a:pPr>
             <a:r>
-              <a:rPr sz="1190" b="1" i="0" lang="zh-CN" dirty="0">
+              <a:rPr sz="1312" b="1" i="0" lang="zh-CN" dirty="0">
                 <a:solidFill>
                   <a:srgbClr val="2B3E57"/>
                 </a:solidFill>
@@ -3628,18 +3628,18 @@
         </p:nvSpPr>
         <p:spPr>
           <a:xfrm>
-            <a:off x="4948274" y="247413"/>
-            <a:ext cx="3230123" cy="5601172"/>
+            <a:off x="4095749" y="238124"/>
+            <a:ext cx="3968749" cy="7651749"/>
           </a:xfrm>
           <a:prstGeom prst="roundRect">
             <a:avLst>
-              <a:gd name="adj" fmla="val 3404"/>
+              <a:gd name="adj" fmla="val 2800"/>
             </a:avLst>
           </a:prstGeom>
           <a:solidFill>
             <a:srgbClr val="E6F2F3"/>
           </a:solidFill>
-          <a:ln w="10308">
+          <a:ln w="9524">
             <a:solidFill>
               <a:srgbClr val="1F7F8C"/>
             </a:solidFill>
@@ -3676,8 +3676,8 @@
         </p:nvSpPr>
         <p:spPr>
           <a:xfrm>
-            <a:off x="5071981" y="329884"/>
-            <a:ext cx="687260" cy="226795"/>
+            <a:off x="4238624" y="317499"/>
+            <a:ext cx="904874" cy="293687"/>
           </a:xfrm>
           <a:prstGeom prst="rect">
             <a:avLst/>
@@ -3693,7 +3693,7 @@
           <a:p>
             <a:pPr algn="l" fontAlgn="base">
               <a:lnSpc>
-                <a:spcPts val="1745"/>
+                <a:spcPts val="1921"/>
               </a:lnSpc>
               <a:spcBef>
                 <a:spcPts val="0"/>
@@ -3701,7 +3701,7 @@
               <a:spcAft>
                 <a:spcPts val="0"/>
               </a:spcAft>
-              <a:defRPr sz="1190" b="1" i="0" lang="zh-CN" dirty="0">
+              <a:defRPr sz="1312" b="1" i="0" lang="zh-CN" dirty="0">
                 <a:solidFill>
                   <a:srgbClr val="0F4F58"/>
                 </a:solidFill>
@@ -3711,7 +3711,7 @@
               </a:defRPr>
             </a:pPr>
             <a:r>
-              <a:rPr sz="1190" b="1" i="0" lang="zh-CN" dirty="0">
+              <a:rPr sz="1312" b="1" i="0" lang="zh-CN" dirty="0">
                 <a:solidFill>
                   <a:srgbClr val="0F4F58"/>
                 </a:solidFill>
@@ -3732,18 +3732,18 @@
         </p:nvSpPr>
         <p:spPr>
           <a:xfrm>
-            <a:off x="8522029" y="247413"/>
-            <a:ext cx="3477537" cy="5601172"/>
+            <a:off x="8223249" y="238124"/>
+            <a:ext cx="3762374" cy="7651749"/>
           </a:xfrm>
           <a:prstGeom prst="roundRect">
             <a:avLst>
-              <a:gd name="adj" fmla="val 3162"/>
+              <a:gd name="adj" fmla="val 2953"/>
             </a:avLst>
           </a:prstGeom>
           <a:solidFill>
             <a:srgbClr val="EEF2F7"/>
           </a:solidFill>
-          <a:ln w="10308">
+          <a:ln w="9524">
             <a:solidFill>
               <a:srgbClr val="5B7592"/>
             </a:solidFill>
@@ -3774,133 +3774,14 @@
       </p:sp>
       <p:sp>
         <p:nvSpPr>
-          <p:cNvPr id="7" name="a1" descr="Editable shape; source id a1"/>
-          <p:cNvSpPr/>
-          <p:nvPr/>
-        </p:nvSpPr>
-        <p:spPr>
-          <a:xfrm>
-            <a:off x="687260" y="810967"/>
-            <a:ext cx="2542863" cy="755986"/>
-          </a:xfrm>
-          <a:prstGeom prst="roundRect">
-            <a:avLst>
-              <a:gd name="adj" fmla="val 9090"/>
-            </a:avLst>
-          </a:prstGeom>
-          <a:solidFill>
-            <a:srgbClr val="FFFFFF"/>
-          </a:solidFill>
-          <a:ln w="10308">
-            <a:solidFill>
-              <a:srgbClr val="5B7592"/>
-            </a:solidFill>
-          </a:ln>
-          <a:effectLst/>
-        </p:spPr>
-        <p:style>
-          <a:lnRef idx="1">
-            <a:schemeClr val="accent1"/>
-          </a:lnRef>
-          <a:fillRef idx="3">
-            <a:schemeClr val="accent1"/>
-          </a:fillRef>
-          <a:effectRef idx="0">
-            <a:schemeClr val="accent1"/>
-          </a:effectRef>
-          <a:fontRef idx="minor">
-            <a:schemeClr val="lt1"/>
-          </a:fontRef>
-        </p:style>
-        <p:txBody>
-          <a:bodyPr rtlCol="0" anchor="ctr"/>
-          <a:lstStyle/>
-          <a:p>
-            <a:pPr algn="ctr"/>
-          </a:p>
-        </p:txBody>
-      </p:sp>
-      <p:sp>
-        <p:nvSpPr>
-          <p:cNvPr id="8" name="a1_s" descr="Editable shape; source id a1_s"/>
-          <p:cNvSpPr/>
-          <p:nvPr/>
-        </p:nvSpPr>
-        <p:spPr>
-          <a:xfrm>
-            <a:off x="687260" y="810967"/>
-            <a:ext cx="2542863" cy="54980"/>
-          </a:xfrm>
-          <a:prstGeom prst="roundRect">
-            <a:avLst>
-              <a:gd name="adj" fmla="val 50000"/>
-            </a:avLst>
-          </a:prstGeom>
-          <a:solidFill>
-            <a:srgbClr val="5B7592"/>
-          </a:solidFill>
-          <a:ln>
-            <a:noFill/>
-          </a:ln>
-          <a:effectLst/>
-        </p:spPr>
-        <p:style>
-          <a:lnRef idx="1">
-            <a:schemeClr val="accent1"/>
-          </a:lnRef>
-          <a:fillRef idx="3">
-            <a:schemeClr val="accent1"/>
-          </a:fillRef>
-          <a:effectRef idx="0">
-            <a:schemeClr val="accent1"/>
-          </a:effectRef>
-          <a:fontRef idx="minor">
-            <a:schemeClr val="lt1"/>
-          </a:fontRef>
-        </p:style>
-        <p:txBody>
-          <a:bodyPr rtlCol="0" anchor="ctr"/>
-          <a:lstStyle/>
-          <a:p>
-            <a:pPr algn="ctr"/>
-          </a:p>
-        </p:txBody>
-      </p:sp>
-      <p:pic>
-        <p:nvPicPr>
-          <p:cNvPr id="9" name="a1_i" descr="exact crop of the generated raster (line motif)"/>
-          <p:cNvPicPr>
-            <a:picLocks noChangeAspect="1"/>
-          </p:cNvPicPr>
-          <p:nvPr/>
-        </p:nvPicPr>
-        <p:blipFill>
-          <a:blip r:embed="rId2"/>
-          <a:stretch>
-            <a:fillRect/>
-          </a:stretch>
-        </p:blipFill>
-        <p:spPr>
-          <a:xfrm>
-            <a:off x="896660" y="1030890"/>
-            <a:ext cx="240970" cy="302394"/>
-          </a:xfrm>
-          <a:prstGeom prst="rect">
-            <a:avLst/>
-          </a:prstGeom>
-          <a:effectLst/>
-        </p:spPr>
-      </p:pic>
-      <p:sp>
-        <p:nvSpPr>
-          <p:cNvPr id="10" name="a1_t" descr="Editable text; source id a1_t"/>
+          <p:cNvPr id="7" name="zC_l" descr="Editable text; source id zC_l"/>
           <p:cNvSpPr txBox="1"/>
           <p:nvPr/>
         </p:nvSpPr>
         <p:spPr>
           <a:xfrm>
-            <a:off x="1250813" y="1044635"/>
-            <a:ext cx="1800622" cy="268031"/>
+            <a:off x="8366124" y="317499"/>
+            <a:ext cx="1238249" cy="293687"/>
           </a:xfrm>
           <a:prstGeom prst="rect">
             <a:avLst/>
@@ -3916,7 +3797,7 @@
           <a:p>
             <a:pPr algn="l" fontAlgn="base">
               <a:lnSpc>
-                <a:spcPts val="2002"/>
+                <a:spcPts val="1921"/>
               </a:lnSpc>
               <a:spcBef>
                 <a:spcPts val="0"/>
@@ -3924,7 +3805,7 @@
               <a:spcAft>
                 <a:spcPts val="0"/>
               </a:spcAft>
-              <a:defRPr sz="1366" b="1" i="0" lang="zh-CN" dirty="0">
+              <a:defRPr sz="1312" b="1" i="0" lang="zh-CN" dirty="0">
                 <a:solidFill>
                   <a:srgbClr val="2B3E57"/>
                 </a:solidFill>
@@ -3934,7 +3815,435 @@
               </a:defRPr>
             </a:pPr>
             <a:r>
-              <a:rPr sz="1366" b="1" i="0" lang="zh-CN" dirty="0">
+              <a:rPr sz="1312" b="1" i="0" lang="zh-CN" dirty="0">
+                <a:solidFill>
+                  <a:srgbClr val="2B3E57"/>
+                </a:solidFill>
+                <a:latin typeface="Noto Sans CJK SC"/>
+                <a:ea typeface="Noto Sans CJK SC"/>
+                <a:cs typeface="Noto Sans CJK SC"/>
+              </a:rPr>
+              <a:t>可回答的问题</a:t>
+            </a:r>
+          </a:p>
+        </p:txBody>
+      </p:sp>
+      <p:sp>
+        <p:nvSpPr>
+          <p:cNvPr id="8" name="cav" descr="Editable shape; source id cav"/>
+          <p:cNvSpPr/>
+          <p:nvPr/>
+        </p:nvSpPr>
+        <p:spPr>
+          <a:xfrm>
+            <a:off x="6016624" y="301624"/>
+            <a:ext cx="1658937" cy="293687"/>
+          </a:xfrm>
+          <a:prstGeom prst="roundRect">
+            <a:avLst>
+              <a:gd name="adj" fmla="val 50000"/>
+            </a:avLst>
+          </a:prstGeom>
+          <a:solidFill>
+            <a:srgbClr val="FFF6E3"/>
+          </a:solidFill>
+          <a:ln w="8731">
+            <a:solidFill>
+              <a:srgbClr val="C48A24"/>
+            </a:solidFill>
+          </a:ln>
+          <a:effectLst/>
+        </p:spPr>
+        <p:style>
+          <a:lnRef idx="1">
+            <a:schemeClr val="accent1"/>
+          </a:lnRef>
+          <a:fillRef idx="3">
+            <a:schemeClr val="accent1"/>
+          </a:fillRef>
+          <a:effectRef idx="0">
+            <a:schemeClr val="accent1"/>
+          </a:effectRef>
+          <a:fontRef idx="minor">
+            <a:schemeClr val="lt1"/>
+          </a:fontRef>
+        </p:style>
+        <p:txBody>
+          <a:bodyPr rtlCol="0" anchor="ctr"/>
+          <a:lstStyle/>
+          <a:p>
+            <a:pPr algn="ctr"/>
+          </a:p>
+        </p:txBody>
+      </p:sp>
+      <p:sp>
+        <p:nvSpPr>
+          <p:cNvPr id="9" name="cav_t" descr="Editable text; source id cav_t"/>
+          <p:cNvSpPr txBox="1"/>
+          <p:nvPr/>
+        </p:nvSpPr>
+        <p:spPr>
+          <a:xfrm>
+            <a:off x="6095999" y="333374"/>
+            <a:ext cx="1500187" cy="230187"/>
+          </a:xfrm>
+          <a:prstGeom prst="rect">
+            <a:avLst/>
+          </a:prstGeom>
+          <a:noFill/>
+          <a:effectLst/>
+        </p:spPr>
+        <p:txBody>
+          <a:bodyPr wrap="none" anchor="ctr" tIns="0" rIns="0" bIns="0" lIns="0" anchorCtr="0" vertOverflow="overflow">
+            <a:noAutofit/>
+          </a:bodyPr>
+          <a:lstStyle/>
+          <a:p>
+            <a:pPr algn="ctr" fontAlgn="base">
+              <a:lnSpc>
+                <a:spcPts val="1546"/>
+              </a:lnSpc>
+              <a:spcBef>
+                <a:spcPts val="0"/>
+              </a:spcBef>
+              <a:spcAft>
+                <a:spcPts val="0"/>
+              </a:spcAft>
+              <a:defRPr sz="1062" b="0" i="0" lang="zh-CN" dirty="0">
+                <a:solidFill>
+                  <a:srgbClr val="7A5410"/>
+                </a:solidFill>
+                <a:latin typeface="Noto Sans CJK SC"/>
+                <a:ea typeface="Noto Sans CJK SC"/>
+                <a:cs typeface="Noto Sans CJK SC"/>
+              </a:defRPr>
+            </a:pPr>
+            <a:r>
+              <a:rPr sz="1062" b="0" i="0" lang="zh-CN" dirty="0">
+                <a:solidFill>
+                  <a:srgbClr val="7A5410"/>
+                </a:solidFill>
+                <a:latin typeface="Noto Sans CJK SC"/>
+                <a:ea typeface="Noto Sans CJK SC"/>
+                <a:cs typeface="Noto Sans CJK SC"/>
+              </a:rPr>
+              <a:t>近邻条件</a:t>
+            </a:r>
+            <a:r>
+              <a:rPr sz="1062" b="0" i="0" lang="zh-CN" dirty="0">
+                <a:solidFill>
+                  <a:srgbClr val="7A5410"/>
+                </a:solidFill>
+                <a:latin typeface="DejaVu Sans"/>
+                <a:ea typeface="DejaVu Sans"/>
+                <a:cs typeface="DejaVu Sans"/>
+              </a:rPr>
+              <a:t> ≠ </a:t>
+            </a:r>
+            <a:r>
+              <a:rPr sz="1062" b="0" i="0" lang="zh-CN" dirty="0">
+                <a:solidFill>
+                  <a:srgbClr val="7A5410"/>
+                </a:solidFill>
+                <a:latin typeface="Noto Sans CJK SC"/>
+                <a:ea typeface="Noto Sans CJK SC"/>
+                <a:cs typeface="Noto Sans CJK SC"/>
+              </a:rPr>
+              <a:t>已验证配方</a:t>
+            </a:r>
+          </a:p>
+        </p:txBody>
+      </p:sp>
+      <p:sp>
+        <p:nvSpPr>
+          <p:cNvPr id="10" name="a1" descr="Editable shape; source id a1"/>
+          <p:cNvSpPr/>
+          <p:nvPr/>
+        </p:nvSpPr>
+        <p:spPr>
+          <a:xfrm>
+            <a:off x="761999" y="761999"/>
+            <a:ext cx="3000374" cy="984249"/>
+          </a:xfrm>
+          <a:prstGeom prst="roundRect">
+            <a:avLst>
+              <a:gd name="adj" fmla="val 7258"/>
+            </a:avLst>
+          </a:prstGeom>
+          <a:solidFill>
+            <a:srgbClr val="FFFFFF"/>
+          </a:solidFill>
+          <a:ln w="11112">
+            <a:solidFill>
+              <a:srgbClr val="5B7592"/>
+            </a:solidFill>
+          </a:ln>
+          <a:effectLst/>
+        </p:spPr>
+        <p:style>
+          <a:lnRef idx="1">
+            <a:schemeClr val="accent1"/>
+          </a:lnRef>
+          <a:fillRef idx="3">
+            <a:schemeClr val="accent1"/>
+          </a:fillRef>
+          <a:effectRef idx="0">
+            <a:schemeClr val="accent1"/>
+          </a:effectRef>
+          <a:fontRef idx="minor">
+            <a:schemeClr val="lt1"/>
+          </a:fontRef>
+        </p:style>
+        <p:txBody>
+          <a:bodyPr rtlCol="0" anchor="ctr"/>
+          <a:lstStyle/>
+          <a:p>
+            <a:pPr algn="ctr"/>
+          </a:p>
+        </p:txBody>
+      </p:sp>
+      <p:sp>
+        <p:nvSpPr>
+          <p:cNvPr id="11" name="a1_a" descr="Editable shape; source id a1_a"/>
+          <p:cNvSpPr/>
+          <p:nvPr/>
+        </p:nvSpPr>
+        <p:spPr>
+          <a:xfrm>
+            <a:off x="761999" y="761999"/>
+            <a:ext cx="3000374" cy="47624"/>
+          </a:xfrm>
+          <a:prstGeom prst="roundRect">
+            <a:avLst>
+              <a:gd name="adj" fmla="val 50000"/>
+            </a:avLst>
+          </a:prstGeom>
+          <a:solidFill>
+            <a:srgbClr val="5B7592"/>
+          </a:solidFill>
+          <a:ln>
+            <a:noFill/>
+          </a:ln>
+          <a:effectLst/>
+        </p:spPr>
+        <p:style>
+          <a:lnRef idx="1">
+            <a:schemeClr val="accent1"/>
+          </a:lnRef>
+          <a:fillRef idx="3">
+            <a:schemeClr val="accent1"/>
+          </a:fillRef>
+          <a:effectRef idx="0">
+            <a:schemeClr val="accent1"/>
+          </a:effectRef>
+          <a:fontRef idx="minor">
+            <a:schemeClr val="lt1"/>
+          </a:fontRef>
+        </p:style>
+        <p:txBody>
+          <a:bodyPr rtlCol="0" anchor="ctr"/>
+          <a:lstStyle/>
+          <a:p>
+            <a:pPr algn="ctr"/>
+          </a:p>
+        </p:txBody>
+      </p:sp>
+      <p:sp>
+        <p:nvSpPr>
+          <p:cNvPr id="12" name="a1_g_s0" descr="Editable shape; source id a1_g_s0"/>
+          <p:cNvSpPr/>
+          <p:nvPr/>
+        </p:nvSpPr>
+        <p:spPr>
+          <a:xfrm>
+            <a:off x="984249" y="1182687"/>
+            <a:ext cx="126999" cy="190499"/>
+          </a:xfrm>
+          <a:prstGeom prst="rect">
+            <a:avLst/>
+          </a:prstGeom>
+          <a:noFill/>
+          <a:ln w="7937">
+            <a:solidFill>
+              <a:srgbClr val="1F2937"/>
+            </a:solidFill>
+          </a:ln>
+          <a:effectLst/>
+        </p:spPr>
+        <p:style>
+          <a:lnRef idx="1">
+            <a:schemeClr val="accent1"/>
+          </a:lnRef>
+          <a:fillRef idx="3">
+            <a:schemeClr val="accent1"/>
+          </a:fillRef>
+          <a:effectRef idx="0">
+            <a:schemeClr val="accent1"/>
+          </a:effectRef>
+          <a:fontRef idx="minor">
+            <a:schemeClr val="lt1"/>
+          </a:fontRef>
+        </p:style>
+        <p:txBody>
+          <a:bodyPr rtlCol="0" anchor="ctr"/>
+          <a:lstStyle/>
+          <a:p>
+            <a:pPr algn="ctr"/>
+          </a:p>
+        </p:txBody>
+      </p:sp>
+      <p:cxnSp>
+        <p:nvCxnSpPr>
+          <p:cNvPr id="13" name="a1_g_l1" descr="Editable line; source id a1_g_l1"/>
+          <p:cNvCxnSpPr/>
+          <p:nvPr/>
+        </p:nvCxnSpPr>
+        <p:spPr>
+          <a:xfrm>
+            <a:off x="1015999" y="1254124"/>
+            <a:ext cx="87313" cy="0"/>
+          </a:xfrm>
+          <a:prstGeom prst="line">
+            <a:avLst/>
+          </a:prstGeom>
+          <a:ln w="7937">
+            <a:solidFill>
+              <a:srgbClr val="1F2937"/>
+            </a:solidFill>
+          </a:ln>
+          <a:effectLst/>
+        </p:spPr>
+        <p:style>
+          <a:lnRef idx="2">
+            <a:schemeClr val="accent1"/>
+          </a:lnRef>
+          <a:fillRef idx="0">
+            <a:schemeClr val="accent1"/>
+          </a:fillRef>
+          <a:effectRef idx="0">
+            <a:schemeClr val="accent1"/>
+          </a:effectRef>
+          <a:fontRef idx="minor">
+            <a:schemeClr val="tx1"/>
+          </a:fontRef>
+        </p:style>
+      </p:cxnSp>
+      <p:cxnSp>
+        <p:nvCxnSpPr>
+          <p:cNvPr id="14" name="a1_g_l2" descr="Editable line; source id a1_g_l2"/>
+          <p:cNvCxnSpPr/>
+          <p:nvPr/>
+        </p:nvCxnSpPr>
+        <p:spPr>
+          <a:xfrm>
+            <a:off x="1015999" y="1285874"/>
+            <a:ext cx="87313" cy="0"/>
+          </a:xfrm>
+          <a:prstGeom prst="line">
+            <a:avLst/>
+          </a:prstGeom>
+          <a:ln w="7937">
+            <a:solidFill>
+              <a:srgbClr val="1F2937"/>
+            </a:solidFill>
+          </a:ln>
+          <a:effectLst/>
+        </p:spPr>
+        <p:style>
+          <a:lnRef idx="2">
+            <a:schemeClr val="accent1"/>
+          </a:lnRef>
+          <a:fillRef idx="0">
+            <a:schemeClr val="accent1"/>
+          </a:fillRef>
+          <a:effectRef idx="0">
+            <a:schemeClr val="accent1"/>
+          </a:effectRef>
+          <a:fontRef idx="minor">
+            <a:schemeClr val="tx1"/>
+          </a:fontRef>
+        </p:style>
+      </p:cxnSp>
+      <p:cxnSp>
+        <p:nvCxnSpPr>
+          <p:cNvPr id="15" name="a1_g_l3" descr="Editable line; source id a1_g_l3"/>
+          <p:cNvCxnSpPr/>
+          <p:nvPr/>
+        </p:nvCxnSpPr>
+        <p:spPr>
+          <a:xfrm>
+            <a:off x="1015999" y="1325562"/>
+            <a:ext cx="63500" cy="0"/>
+          </a:xfrm>
+          <a:prstGeom prst="line">
+            <a:avLst/>
+          </a:prstGeom>
+          <a:ln w="7937">
+            <a:solidFill>
+              <a:srgbClr val="1F2937"/>
+            </a:solidFill>
+          </a:ln>
+          <a:effectLst/>
+        </p:spPr>
+        <p:style>
+          <a:lnRef idx="2">
+            <a:schemeClr val="accent1"/>
+          </a:lnRef>
+          <a:fillRef idx="0">
+            <a:schemeClr val="accent1"/>
+          </a:fillRef>
+          <a:effectRef idx="0">
+            <a:schemeClr val="accent1"/>
+          </a:effectRef>
+          <a:fontRef idx="minor">
+            <a:schemeClr val="tx1"/>
+          </a:fontRef>
+        </p:style>
+      </p:cxnSp>
+      <p:sp>
+        <p:nvSpPr>
+          <p:cNvPr id="16" name="a1_t" descr="Editable text; source id a1_t"/>
+          <p:cNvSpPr txBox="1"/>
+          <p:nvPr/>
+        </p:nvSpPr>
+        <p:spPr>
+          <a:xfrm>
+            <a:off x="1285874" y="1135062"/>
+            <a:ext cx="2301874" cy="285749"/>
+          </a:xfrm>
+          <a:prstGeom prst="rect">
+            <a:avLst/>
+          </a:prstGeom>
+          <a:noFill/>
+          <a:effectLst/>
+        </p:spPr>
+        <p:txBody>
+          <a:bodyPr wrap="none" anchor="ctr" tIns="0" rIns="0" bIns="0" lIns="0" anchorCtr="0" vertOverflow="overflow">
+            <a:noAutofit/>
+          </a:bodyPr>
+          <a:lstStyle/>
+          <a:p>
+            <a:pPr algn="l" fontAlgn="base">
+              <a:lnSpc>
+                <a:spcPts val="2203"/>
+              </a:lnSpc>
+              <a:spcBef>
+                <a:spcPts val="0"/>
+              </a:spcBef>
+              <a:spcAft>
+                <a:spcPts val="0"/>
+              </a:spcAft>
+              <a:defRPr sz="1513" b="1" i="0" lang="zh-CN" dirty="0">
+                <a:solidFill>
+                  <a:srgbClr val="2B3E57"/>
+                </a:solidFill>
+                <a:latin typeface="Noto Sans CJK SC"/>
+                <a:ea typeface="Noto Sans CJK SC"/>
+                <a:cs typeface="Noto Sans CJK SC"/>
+              </a:defRPr>
+            </a:pPr>
+            <a:r>
+              <a:rPr sz="1513" b="1" i="0" lang="zh-CN" dirty="0">
                 <a:solidFill>
                   <a:srgbClr val="2B3E57"/>
                 </a:solidFill>
@@ -3949,24 +4258,24 @@
       </p:sp>
       <p:sp>
         <p:nvSpPr>
-          <p:cNvPr id="11" name="a2" descr="Editable shape; source id a2"/>
+          <p:cNvPr id="17" name="a2" descr="Editable shape; source id a2"/>
           <p:cNvSpPr/>
           <p:nvPr/>
         </p:nvSpPr>
         <p:spPr>
           <a:xfrm>
-            <a:off x="687260" y="1690660"/>
-            <a:ext cx="2542863" cy="755986"/>
+            <a:off x="761999" y="1936749"/>
+            <a:ext cx="3000374" cy="984249"/>
           </a:xfrm>
           <a:prstGeom prst="roundRect">
             <a:avLst>
-              <a:gd name="adj" fmla="val 9090"/>
+              <a:gd name="adj" fmla="val 7258"/>
             </a:avLst>
           </a:prstGeom>
           <a:solidFill>
             <a:srgbClr val="FFFFFF"/>
           </a:solidFill>
-          <a:ln w="10308">
+          <a:ln w="11112">
             <a:solidFill>
               <a:srgbClr val="5B7592"/>
             </a:solidFill>
@@ -3997,14 +4306,14 @@
       </p:sp>
       <p:sp>
         <p:nvSpPr>
-          <p:cNvPr id="12" name="a2_s" descr="Editable shape; source id a2_s"/>
+          <p:cNvPr id="18" name="a2_a" descr="Editable shape; source id a2_a"/>
           <p:cNvSpPr/>
           <p:nvPr/>
         </p:nvSpPr>
         <p:spPr>
           <a:xfrm>
-            <a:off x="687260" y="1690660"/>
-            <a:ext cx="2542863" cy="54980"/>
+            <a:off x="761999" y="1936749"/>
+            <a:ext cx="3000374" cy="47624"/>
           </a:xfrm>
           <a:prstGeom prst="roundRect">
             <a:avLst>
@@ -4041,41 +4350,256 @@
           </a:p>
         </p:txBody>
       </p:sp>
-      <p:pic>
-        <p:nvPicPr>
-          <p:cNvPr id="13" name="a2_i" descr="exact crop of the generated raster (line motif)"/>
-          <p:cNvPicPr>
-            <a:picLocks noChangeAspect="1"/>
-          </p:cNvPicPr>
-          <p:nvPr/>
-        </p:nvPicPr>
-        <p:blipFill>
-          <a:blip r:embed="rId3"/>
-          <a:stretch>
-            <a:fillRect/>
-          </a:stretch>
-        </p:blipFill>
-        <p:spPr>
-          <a:xfrm>
-            <a:off x="891147" y="1910583"/>
-            <a:ext cx="251995" cy="302394"/>
+      <p:sp>
+        <p:nvSpPr>
+          <p:cNvPr id="19" name="a2_g_s2" descr="Editable shape; source id a2_g_s2"/>
+          <p:cNvSpPr/>
+          <p:nvPr/>
+        </p:nvSpPr>
+        <p:spPr>
+          <a:xfrm>
+            <a:off x="1031874" y="2405062"/>
+            <a:ext cx="126999" cy="190499"/>
           </a:xfrm>
           <a:prstGeom prst="rect">
             <a:avLst/>
           </a:prstGeom>
-          <a:effectLst/>
-        </p:spPr>
-      </p:pic>
-      <p:sp>
-        <p:nvSpPr>
-          <p:cNvPr id="14" name="a2_t" descr="Editable text; source id a2_t"/>
+          <a:noFill/>
+          <a:ln w="7937">
+            <a:solidFill>
+              <a:srgbClr val="1F2937"/>
+            </a:solidFill>
+          </a:ln>
+          <a:effectLst/>
+        </p:spPr>
+        <p:style>
+          <a:lnRef idx="1">
+            <a:schemeClr val="accent1"/>
+          </a:lnRef>
+          <a:fillRef idx="3">
+            <a:schemeClr val="accent1"/>
+          </a:fillRef>
+          <a:effectRef idx="0">
+            <a:schemeClr val="accent1"/>
+          </a:effectRef>
+          <a:fontRef idx="minor">
+            <a:schemeClr val="lt1"/>
+          </a:fontRef>
+        </p:style>
+        <p:txBody>
+          <a:bodyPr rtlCol="0" anchor="ctr"/>
+          <a:lstStyle/>
+          <a:p>
+            <a:pPr algn="ctr"/>
+          </a:p>
+        </p:txBody>
+      </p:sp>
+      <p:sp>
+        <p:nvSpPr>
+          <p:cNvPr id="20" name="a2_g_s1" descr="Editable shape; source id a2_g_s1"/>
+          <p:cNvSpPr/>
+          <p:nvPr/>
+        </p:nvSpPr>
+        <p:spPr>
+          <a:xfrm>
+            <a:off x="1008062" y="2381249"/>
+            <a:ext cx="126999" cy="190499"/>
+          </a:xfrm>
+          <a:prstGeom prst="rect">
+            <a:avLst/>
+          </a:prstGeom>
+          <a:noFill/>
+          <a:ln w="7937">
+            <a:solidFill>
+              <a:srgbClr val="1F2937"/>
+            </a:solidFill>
+          </a:ln>
+          <a:effectLst/>
+        </p:spPr>
+        <p:style>
+          <a:lnRef idx="1">
+            <a:schemeClr val="accent1"/>
+          </a:lnRef>
+          <a:fillRef idx="3">
+            <a:schemeClr val="accent1"/>
+          </a:fillRef>
+          <a:effectRef idx="0">
+            <a:schemeClr val="accent1"/>
+          </a:effectRef>
+          <a:fontRef idx="minor">
+            <a:schemeClr val="lt1"/>
+          </a:fontRef>
+        </p:style>
+        <p:txBody>
+          <a:bodyPr rtlCol="0" anchor="ctr"/>
+          <a:lstStyle/>
+          <a:p>
+            <a:pPr algn="ctr"/>
+          </a:p>
+        </p:txBody>
+      </p:sp>
+      <p:sp>
+        <p:nvSpPr>
+          <p:cNvPr id="21" name="a2_g_s0" descr="Editable shape; source id a2_g_s0"/>
+          <p:cNvSpPr/>
+          <p:nvPr/>
+        </p:nvSpPr>
+        <p:spPr>
+          <a:xfrm>
+            <a:off x="984249" y="2357437"/>
+            <a:ext cx="126999" cy="190499"/>
+          </a:xfrm>
+          <a:prstGeom prst="rect">
+            <a:avLst/>
+          </a:prstGeom>
+          <a:noFill/>
+          <a:ln w="7937">
+            <a:solidFill>
+              <a:srgbClr val="1F2937"/>
+            </a:solidFill>
+          </a:ln>
+          <a:effectLst/>
+        </p:spPr>
+        <p:style>
+          <a:lnRef idx="1">
+            <a:schemeClr val="accent1"/>
+          </a:lnRef>
+          <a:fillRef idx="3">
+            <a:schemeClr val="accent1"/>
+          </a:fillRef>
+          <a:effectRef idx="0">
+            <a:schemeClr val="accent1"/>
+          </a:effectRef>
+          <a:fontRef idx="minor">
+            <a:schemeClr val="lt1"/>
+          </a:fontRef>
+        </p:style>
+        <p:txBody>
+          <a:bodyPr rtlCol="0" anchor="ctr"/>
+          <a:lstStyle/>
+          <a:p>
+            <a:pPr algn="ctr"/>
+          </a:p>
+        </p:txBody>
+      </p:sp>
+      <p:cxnSp>
+        <p:nvCxnSpPr>
+          <p:cNvPr id="22" name="a2_g_l1" descr="Editable line; source id a2_g_l1"/>
+          <p:cNvCxnSpPr/>
+          <p:nvPr/>
+        </p:nvCxnSpPr>
+        <p:spPr>
+          <a:xfrm>
+            <a:off x="1015999" y="2428874"/>
+            <a:ext cx="87313" cy="0"/>
+          </a:xfrm>
+          <a:prstGeom prst="line">
+            <a:avLst/>
+          </a:prstGeom>
+          <a:ln w="7937">
+            <a:solidFill>
+              <a:srgbClr val="1F2937"/>
+            </a:solidFill>
+          </a:ln>
+          <a:effectLst/>
+        </p:spPr>
+        <p:style>
+          <a:lnRef idx="2">
+            <a:schemeClr val="accent1"/>
+          </a:lnRef>
+          <a:fillRef idx="0">
+            <a:schemeClr val="accent1"/>
+          </a:fillRef>
+          <a:effectRef idx="0">
+            <a:schemeClr val="accent1"/>
+          </a:effectRef>
+          <a:fontRef idx="minor">
+            <a:schemeClr val="tx1"/>
+          </a:fontRef>
+        </p:style>
+      </p:cxnSp>
+      <p:cxnSp>
+        <p:nvCxnSpPr>
+          <p:cNvPr id="23" name="a2_g_l2" descr="Editable line; source id a2_g_l2"/>
+          <p:cNvCxnSpPr/>
+          <p:nvPr/>
+        </p:nvCxnSpPr>
+        <p:spPr>
+          <a:xfrm>
+            <a:off x="1015999" y="2460624"/>
+            <a:ext cx="87313" cy="0"/>
+          </a:xfrm>
+          <a:prstGeom prst="line">
+            <a:avLst/>
+          </a:prstGeom>
+          <a:ln w="7937">
+            <a:solidFill>
+              <a:srgbClr val="1F2937"/>
+            </a:solidFill>
+          </a:ln>
+          <a:effectLst/>
+        </p:spPr>
+        <p:style>
+          <a:lnRef idx="2">
+            <a:schemeClr val="accent1"/>
+          </a:lnRef>
+          <a:fillRef idx="0">
+            <a:schemeClr val="accent1"/>
+          </a:fillRef>
+          <a:effectRef idx="0">
+            <a:schemeClr val="accent1"/>
+          </a:effectRef>
+          <a:fontRef idx="minor">
+            <a:schemeClr val="tx1"/>
+          </a:fontRef>
+        </p:style>
+      </p:cxnSp>
+      <p:cxnSp>
+        <p:nvCxnSpPr>
+          <p:cNvPr id="24" name="a2_g_l3" descr="Editable line; source id a2_g_l3"/>
+          <p:cNvCxnSpPr/>
+          <p:nvPr/>
+        </p:nvCxnSpPr>
+        <p:spPr>
+          <a:xfrm>
+            <a:off x="1015999" y="2500312"/>
+            <a:ext cx="63500" cy="0"/>
+          </a:xfrm>
+          <a:prstGeom prst="line">
+            <a:avLst/>
+          </a:prstGeom>
+          <a:ln w="7937">
+            <a:solidFill>
+              <a:srgbClr val="1F2937"/>
+            </a:solidFill>
+          </a:ln>
+          <a:effectLst/>
+        </p:spPr>
+        <p:style>
+          <a:lnRef idx="2">
+            <a:schemeClr val="accent1"/>
+          </a:lnRef>
+          <a:fillRef idx="0">
+            <a:schemeClr val="accent1"/>
+          </a:fillRef>
+          <a:effectRef idx="0">
+            <a:schemeClr val="accent1"/>
+          </a:effectRef>
+          <a:fontRef idx="minor">
+            <a:schemeClr val="tx1"/>
+          </a:fontRef>
+        </p:style>
+      </p:cxnSp>
+      <p:sp>
+        <p:nvSpPr>
+          <p:cNvPr id="25" name="a2_t" descr="Editable text; source id a2_t"/>
           <p:cNvSpPr txBox="1"/>
           <p:nvPr/>
         </p:nvSpPr>
         <p:spPr>
           <a:xfrm>
-            <a:off x="1250813" y="1924329"/>
-            <a:ext cx="1800622" cy="268031"/>
+            <a:off x="1285874" y="2309812"/>
+            <a:ext cx="2301874" cy="285749"/>
           </a:xfrm>
           <a:prstGeom prst="rect">
             <a:avLst/>
@@ -4091,7 +4615,7 @@
           <a:p>
             <a:pPr algn="l" fontAlgn="base">
               <a:lnSpc>
-                <a:spcPts val="2002"/>
+                <a:spcPts val="2203"/>
               </a:lnSpc>
               <a:spcBef>
                 <a:spcPts val="0"/>
@@ -4099,7 +4623,7 @@
               <a:spcAft>
                 <a:spcPts val="0"/>
               </a:spcAft>
-              <a:defRPr sz="1366" b="1" i="0" lang="zh-CN" dirty="0">
+              <a:defRPr sz="1513" b="1" i="0" lang="zh-CN" dirty="0">
                 <a:solidFill>
                   <a:srgbClr val="2B3E57"/>
                 </a:solidFill>
@@ -4109,7 +4633,7 @@
               </a:defRPr>
             </a:pPr>
             <a:r>
-              <a:rPr sz="1366" b="1" i="0" lang="zh-CN" dirty="0">
+              <a:rPr sz="1513" b="1" i="0" lang="zh-CN" dirty="0">
                 <a:solidFill>
                   <a:srgbClr val="2B3E57"/>
                 </a:solidFill>
@@ -4120,7 +4644,7 @@
               <a:t>同类</a:t>
             </a:r>
             <a:r>
-              <a:rPr sz="1366" b="1" i="0" lang="zh-CN" dirty="0">
+              <a:rPr sz="1513" b="1" i="0" lang="zh-CN" dirty="0">
                 <a:solidFill>
                   <a:srgbClr val="2B3E57"/>
                 </a:solidFill>
@@ -4131,7 +4655,7 @@
               <a:t> Ba–Y </a:t>
             </a:r>
             <a:r>
-              <a:rPr sz="1366" b="1" i="0" lang="zh-CN" dirty="0">
+              <a:rPr sz="1513" b="1" i="0" lang="zh-CN" dirty="0">
                 <a:solidFill>
                   <a:srgbClr val="2B3E57"/>
                 </a:solidFill>
@@ -4146,24 +4670,24 @@
       </p:sp>
       <p:sp>
         <p:nvSpPr>
-          <p:cNvPr id="15" name="a3" descr="Editable shape; source id a3"/>
+          <p:cNvPr id="26" name="a3" descr="Editable shape; source id a3"/>
           <p:cNvSpPr/>
           <p:nvPr/>
         </p:nvSpPr>
         <p:spPr>
           <a:xfrm>
-            <a:off x="687260" y="2570353"/>
-            <a:ext cx="2542863" cy="755986"/>
+            <a:off x="761999" y="3111499"/>
+            <a:ext cx="3000374" cy="984249"/>
           </a:xfrm>
           <a:prstGeom prst="roundRect">
             <a:avLst>
-              <a:gd name="adj" fmla="val 9090"/>
+              <a:gd name="adj" fmla="val 7258"/>
             </a:avLst>
           </a:prstGeom>
           <a:solidFill>
             <a:srgbClr val="FFFFFF"/>
           </a:solidFill>
-          <a:ln w="10308">
+          <a:ln w="11112">
             <a:solidFill>
               <a:srgbClr val="5B7592"/>
             </a:solidFill>
@@ -4194,14 +4718,14 @@
       </p:sp>
       <p:sp>
         <p:nvSpPr>
-          <p:cNvPr id="16" name="a3_s" descr="Editable shape; source id a3_s"/>
+          <p:cNvPr id="27" name="a3_a" descr="Editable shape; source id a3_a"/>
           <p:cNvSpPr/>
           <p:nvPr/>
         </p:nvSpPr>
         <p:spPr>
           <a:xfrm>
-            <a:off x="687260" y="2570353"/>
-            <a:ext cx="2542863" cy="54980"/>
+            <a:off x="761999" y="3111499"/>
+            <a:ext cx="3000374" cy="47624"/>
           </a:xfrm>
           <a:prstGeom prst="roundRect">
             <a:avLst>
@@ -4238,41 +4762,268 @@
           </a:p>
         </p:txBody>
       </p:sp>
-      <p:pic>
-        <p:nvPicPr>
-          <p:cNvPr id="17" name="a3_i" descr="exact crop of the generated raster (line motif)"/>
-          <p:cNvPicPr>
-            <a:picLocks noChangeAspect="1"/>
-          </p:cNvPicPr>
-          <p:nvPr/>
-        </p:nvPicPr>
-        <p:blipFill>
-          <a:blip r:embed="rId4"/>
-          <a:stretch>
-            <a:fillRect/>
-          </a:stretch>
-        </p:blipFill>
-        <p:spPr>
-          <a:xfrm>
-            <a:off x="892407" y="2790277"/>
-            <a:ext cx="249475" cy="302394"/>
-          </a:xfrm>
-          <a:prstGeom prst="rect">
-            <a:avLst/>
-          </a:prstGeom>
-          <a:effectLst/>
-        </p:spPr>
-      </p:pic>
-      <p:sp>
-        <p:nvSpPr>
-          <p:cNvPr id="18" name="a3_t" descr="Editable text; source id a3_t"/>
+      <p:cxnSp>
+        <p:nvCxnSpPr>
+          <p:cNvPr id="28" name="a3_g_o_0" descr="Editable line; source id a3_g_o_0"/>
+          <p:cNvCxnSpPr/>
+          <p:nvPr/>
+        </p:nvCxnSpPr>
+        <p:spPr>
+          <a:xfrm>
+            <a:off x="1071562" y="3516312"/>
+            <a:ext cx="111125" cy="71437"/>
+          </a:xfrm>
+          <a:prstGeom prst="line">
+            <a:avLst/>
+          </a:prstGeom>
+          <a:ln w="7937">
+            <a:solidFill>
+              <a:srgbClr val="1F2937"/>
+            </a:solidFill>
+          </a:ln>
+          <a:effectLst/>
+        </p:spPr>
+        <p:style>
+          <a:lnRef idx="2">
+            <a:schemeClr val="accent1"/>
+          </a:lnRef>
+          <a:fillRef idx="0">
+            <a:schemeClr val="accent1"/>
+          </a:fillRef>
+          <a:effectRef idx="0">
+            <a:schemeClr val="accent1"/>
+          </a:effectRef>
+          <a:fontRef idx="minor">
+            <a:schemeClr val="tx1"/>
+          </a:fontRef>
+        </p:style>
+      </p:cxnSp>
+      <p:cxnSp>
+        <p:nvCxnSpPr>
+          <p:cNvPr id="29" name="a3_g_o_1" descr="Editable line; source id a3_g_o_1"/>
+          <p:cNvCxnSpPr/>
+          <p:nvPr/>
+        </p:nvCxnSpPr>
+        <p:spPr>
+          <a:xfrm flipH="1">
+            <a:off x="1127124" y="3587749"/>
+            <a:ext cx="55563" cy="142875"/>
+          </a:xfrm>
+          <a:prstGeom prst="line">
+            <a:avLst/>
+          </a:prstGeom>
+          <a:ln w="7937">
+            <a:solidFill>
+              <a:srgbClr val="1F2937"/>
+            </a:solidFill>
+          </a:ln>
+          <a:effectLst/>
+        </p:spPr>
+        <p:style>
+          <a:lnRef idx="2">
+            <a:schemeClr val="accent1"/>
+          </a:lnRef>
+          <a:fillRef idx="0">
+            <a:schemeClr val="accent1"/>
+          </a:fillRef>
+          <a:effectRef idx="0">
+            <a:schemeClr val="accent1"/>
+          </a:effectRef>
+          <a:fontRef idx="minor">
+            <a:schemeClr val="tx1"/>
+          </a:fontRef>
+        </p:style>
+      </p:cxnSp>
+      <p:cxnSp>
+        <p:nvCxnSpPr>
+          <p:cNvPr id="30" name="a3_g_o_2" descr="Editable line; source id a3_g_o_2"/>
+          <p:cNvCxnSpPr/>
+          <p:nvPr/>
+        </p:nvCxnSpPr>
+        <p:spPr>
+          <a:xfrm flipH="1">
+            <a:off x="1015999" y="3730624"/>
+            <a:ext cx="111125" cy="0"/>
+          </a:xfrm>
+          <a:prstGeom prst="line">
+            <a:avLst/>
+          </a:prstGeom>
+          <a:ln w="7937">
+            <a:solidFill>
+              <a:srgbClr val="1F2937"/>
+            </a:solidFill>
+          </a:ln>
+          <a:effectLst/>
+        </p:spPr>
+        <p:style>
+          <a:lnRef idx="2">
+            <a:schemeClr val="accent1"/>
+          </a:lnRef>
+          <a:fillRef idx="0">
+            <a:schemeClr val="accent1"/>
+          </a:fillRef>
+          <a:effectRef idx="0">
+            <a:schemeClr val="accent1"/>
+          </a:effectRef>
+          <a:fontRef idx="minor">
+            <a:schemeClr val="tx1"/>
+          </a:fontRef>
+        </p:style>
+      </p:cxnSp>
+      <p:cxnSp>
+        <p:nvCxnSpPr>
+          <p:cNvPr id="31" name="a3_g_o_3" descr="Editable line; source id a3_g_o_3"/>
+          <p:cNvCxnSpPr/>
+          <p:nvPr/>
+        </p:nvCxnSpPr>
+        <p:spPr>
+          <a:xfrm flipH="1" flipV="1">
+            <a:off x="960437" y="3587749"/>
+            <a:ext cx="55562" cy="142875"/>
+          </a:xfrm>
+          <a:prstGeom prst="line">
+            <a:avLst/>
+          </a:prstGeom>
+          <a:ln w="7937">
+            <a:solidFill>
+              <a:srgbClr val="1F2937"/>
+            </a:solidFill>
+          </a:ln>
+          <a:effectLst/>
+        </p:spPr>
+        <p:style>
+          <a:lnRef idx="2">
+            <a:schemeClr val="accent1"/>
+          </a:lnRef>
+          <a:fillRef idx="0">
+            <a:schemeClr val="accent1"/>
+          </a:fillRef>
+          <a:effectRef idx="0">
+            <a:schemeClr val="accent1"/>
+          </a:effectRef>
+          <a:fontRef idx="minor">
+            <a:schemeClr val="tx1"/>
+          </a:fontRef>
+        </p:style>
+      </p:cxnSp>
+      <p:cxnSp>
+        <p:nvCxnSpPr>
+          <p:cNvPr id="32" name="a3_g_o_4" descr="Editable line; source id a3_g_o_4"/>
+          <p:cNvCxnSpPr/>
+          <p:nvPr/>
+        </p:nvCxnSpPr>
+        <p:spPr>
+          <a:xfrm flipV="1">
+            <a:off x="960437" y="3516312"/>
+            <a:ext cx="111125" cy="71437"/>
+          </a:xfrm>
+          <a:prstGeom prst="line">
+            <a:avLst/>
+          </a:prstGeom>
+          <a:ln w="7937">
+            <a:solidFill>
+              <a:srgbClr val="1F2937"/>
+            </a:solidFill>
+          </a:ln>
+          <a:effectLst/>
+        </p:spPr>
+        <p:style>
+          <a:lnRef idx="2">
+            <a:schemeClr val="accent1"/>
+          </a:lnRef>
+          <a:fillRef idx="0">
+            <a:schemeClr val="accent1"/>
+          </a:fillRef>
+          <a:effectRef idx="0">
+            <a:schemeClr val="accent1"/>
+          </a:effectRef>
+          <a:fontRef idx="minor">
+            <a:schemeClr val="tx1"/>
+          </a:fontRef>
+        </p:style>
+      </p:cxnSp>
+      <p:cxnSp>
+        <p:nvCxnSpPr>
+          <p:cNvPr id="33" name="a3_g_a" descr="Editable line; source id a3_g_a"/>
+          <p:cNvCxnSpPr/>
+          <p:nvPr/>
+        </p:nvCxnSpPr>
+        <p:spPr>
+          <a:xfrm>
+            <a:off x="1071562" y="3516312"/>
+            <a:ext cx="0" cy="214312"/>
+          </a:xfrm>
+          <a:prstGeom prst="line">
+            <a:avLst/>
+          </a:prstGeom>
+          <a:ln w="7937">
+            <a:solidFill>
+              <a:srgbClr val="1F2937"/>
+            </a:solidFill>
+          </a:ln>
+          <a:effectLst/>
+        </p:spPr>
+        <p:style>
+          <a:lnRef idx="2">
+            <a:schemeClr val="accent1"/>
+          </a:lnRef>
+          <a:fillRef idx="0">
+            <a:schemeClr val="accent1"/>
+          </a:fillRef>
+          <a:effectRef idx="0">
+            <a:schemeClr val="accent1"/>
+          </a:effectRef>
+          <a:fontRef idx="minor">
+            <a:schemeClr val="tx1"/>
+          </a:fontRef>
+        </p:style>
+      </p:cxnSp>
+      <p:cxnSp>
+        <p:nvCxnSpPr>
+          <p:cNvPr id="34" name="a3_g_b" descr="Editable line; source id a3_g_b"/>
+          <p:cNvCxnSpPr/>
+          <p:nvPr/>
+        </p:nvCxnSpPr>
+        <p:spPr>
+          <a:xfrm>
+            <a:off x="960437" y="3587749"/>
+            <a:ext cx="222250" cy="0"/>
+          </a:xfrm>
+          <a:prstGeom prst="line">
+            <a:avLst/>
+          </a:prstGeom>
+          <a:ln w="7937">
+            <a:solidFill>
+              <a:srgbClr val="1F2937"/>
+            </a:solidFill>
+          </a:ln>
+          <a:effectLst/>
+        </p:spPr>
+        <p:style>
+          <a:lnRef idx="2">
+            <a:schemeClr val="accent1"/>
+          </a:lnRef>
+          <a:fillRef idx="0">
+            <a:schemeClr val="accent1"/>
+          </a:fillRef>
+          <a:effectRef idx="0">
+            <a:schemeClr val="accent1"/>
+          </a:effectRef>
+          <a:fontRef idx="minor">
+            <a:schemeClr val="tx1"/>
+          </a:fontRef>
+        </p:style>
+      </p:cxnSp>
+      <p:sp>
+        <p:nvSpPr>
+          <p:cNvPr id="35" name="a3_t" descr="Editable text; source id a3_t"/>
           <p:cNvSpPr txBox="1"/>
           <p:nvPr/>
         </p:nvSpPr>
         <p:spPr>
           <a:xfrm>
-            <a:off x="1250813" y="2804022"/>
-            <a:ext cx="1800622" cy="268031"/>
+            <a:off x="1285874" y="3484562"/>
+            <a:ext cx="2301874" cy="285749"/>
           </a:xfrm>
           <a:prstGeom prst="rect">
             <a:avLst/>
@@ -4288,7 +5039,7 @@
           <a:p>
             <a:pPr algn="l" fontAlgn="base">
               <a:lnSpc>
-                <a:spcPts val="2002"/>
+                <a:spcPts val="2203"/>
               </a:lnSpc>
               <a:spcBef>
                 <a:spcPts val="0"/>
@@ -4296,7 +5047,7 @@
               <a:spcAft>
                 <a:spcPts val="0"/>
               </a:spcAft>
-              <a:defRPr sz="1366" b="1" i="0" lang="zh-CN" dirty="0">
+              <a:defRPr sz="1513" b="1" i="0" lang="zh-CN" dirty="0">
                 <a:solidFill>
                   <a:srgbClr val="2B3E57"/>
                 </a:solidFill>
@@ -4306,7 +5057,7 @@
               </a:defRPr>
             </a:pPr>
             <a:r>
-              <a:rPr sz="1366" b="1" i="0" lang="zh-CN" dirty="0">
+              <a:rPr sz="1513" b="1" i="0" lang="zh-CN" dirty="0">
                 <a:solidFill>
                   <a:srgbClr val="2B3E57"/>
                 </a:solidFill>
@@ -4321,24 +5072,24 @@
       </p:sp>
       <p:sp>
         <p:nvSpPr>
-          <p:cNvPr id="19" name="a4" descr="Editable shape; source id a4"/>
+          <p:cNvPr id="36" name="a4" descr="Editable shape; source id a4"/>
           <p:cNvSpPr/>
           <p:nvPr/>
         </p:nvSpPr>
         <p:spPr>
           <a:xfrm>
-            <a:off x="687260" y="3450047"/>
-            <a:ext cx="2542863" cy="755986"/>
+            <a:off x="761999" y="4286249"/>
+            <a:ext cx="3000374" cy="984249"/>
           </a:xfrm>
           <a:prstGeom prst="roundRect">
             <a:avLst>
-              <a:gd name="adj" fmla="val 9090"/>
+              <a:gd name="adj" fmla="val 7258"/>
             </a:avLst>
           </a:prstGeom>
           <a:solidFill>
             <a:srgbClr val="FFFFFF"/>
           </a:solidFill>
-          <a:ln w="10308">
+          <a:ln w="11112">
             <a:solidFill>
               <a:srgbClr val="5B7592"/>
             </a:solidFill>
@@ -4369,14 +5120,14 @@
       </p:sp>
       <p:sp>
         <p:nvSpPr>
-          <p:cNvPr id="20" name="a4_s" descr="Editable shape; source id a4_s"/>
+          <p:cNvPr id="37" name="a4_a" descr="Editable shape; source id a4_a"/>
           <p:cNvSpPr/>
           <p:nvPr/>
         </p:nvSpPr>
         <p:spPr>
           <a:xfrm>
-            <a:off x="687260" y="3450047"/>
-            <a:ext cx="2542863" cy="54980"/>
+            <a:off x="761999" y="4286249"/>
+            <a:ext cx="3000374" cy="47624"/>
           </a:xfrm>
           <a:prstGeom prst="roundRect">
             <a:avLst>
@@ -4413,41 +5164,160 @@
           </a:p>
         </p:txBody>
       </p:sp>
-      <p:pic>
-        <p:nvPicPr>
-          <p:cNvPr id="21" name="a4_i" descr="exact crop of the generated raster (line motif)"/>
-          <p:cNvPicPr>
-            <a:picLocks noChangeAspect="1"/>
-          </p:cNvPicPr>
-          <p:nvPr/>
-        </p:nvPicPr>
-        <p:blipFill>
-          <a:blip r:embed="rId5"/>
-          <a:stretch>
-            <a:fillRect/>
-          </a:stretch>
-        </p:blipFill>
-        <p:spPr>
-          <a:xfrm>
-            <a:off x="872077" y="3669970"/>
-            <a:ext cx="290135" cy="302394"/>
-          </a:xfrm>
-          <a:prstGeom prst="rect">
-            <a:avLst/>
-          </a:prstGeom>
-          <a:effectLst/>
-        </p:spPr>
-      </p:pic>
-      <p:sp>
-        <p:nvSpPr>
-          <p:cNvPr id="22" name="a4_t" descr="Editable text; source id a4_t"/>
+      <p:cxnSp>
+        <p:nvCxnSpPr>
+          <p:cNvPr id="38" name="a4_g_b_0" descr="Editable line; source id a4_g_b_0"/>
+          <p:cNvCxnSpPr/>
+          <p:nvPr/>
+        </p:nvCxnSpPr>
+        <p:spPr>
+          <a:xfrm>
+            <a:off x="992187" y="4746624"/>
+            <a:ext cx="31750" cy="150813"/>
+          </a:xfrm>
+          <a:prstGeom prst="line">
+            <a:avLst/>
+          </a:prstGeom>
+          <a:ln w="7937">
+            <a:solidFill>
+              <a:srgbClr val="1F2937"/>
+            </a:solidFill>
+          </a:ln>
+          <a:effectLst/>
+        </p:spPr>
+        <p:style>
+          <a:lnRef idx="2">
+            <a:schemeClr val="accent1"/>
+          </a:lnRef>
+          <a:fillRef idx="0">
+            <a:schemeClr val="accent1"/>
+          </a:fillRef>
+          <a:effectRef idx="0">
+            <a:schemeClr val="accent1"/>
+          </a:effectRef>
+          <a:fontRef idx="minor">
+            <a:schemeClr val="tx1"/>
+          </a:fontRef>
+        </p:style>
+      </p:cxnSp>
+      <p:cxnSp>
+        <p:nvCxnSpPr>
+          <p:cNvPr id="39" name="a4_g_b_1" descr="Editable line; source id a4_g_b_1"/>
+          <p:cNvCxnSpPr/>
+          <p:nvPr/>
+        </p:nvCxnSpPr>
+        <p:spPr>
+          <a:xfrm>
+            <a:off x="1023937" y="4897437"/>
+            <a:ext cx="95250" cy="0"/>
+          </a:xfrm>
+          <a:prstGeom prst="line">
+            <a:avLst/>
+          </a:prstGeom>
+          <a:ln w="7937">
+            <a:solidFill>
+              <a:srgbClr val="1F2937"/>
+            </a:solidFill>
+          </a:ln>
+          <a:effectLst/>
+        </p:spPr>
+        <p:style>
+          <a:lnRef idx="2">
+            <a:schemeClr val="accent1"/>
+          </a:lnRef>
+          <a:fillRef idx="0">
+            <a:schemeClr val="accent1"/>
+          </a:fillRef>
+          <a:effectRef idx="0">
+            <a:schemeClr val="accent1"/>
+          </a:effectRef>
+          <a:fontRef idx="minor">
+            <a:schemeClr val="tx1"/>
+          </a:fontRef>
+        </p:style>
+      </p:cxnSp>
+      <p:cxnSp>
+        <p:nvCxnSpPr>
+          <p:cNvPr id="40" name="a4_g_b_2" descr="Editable line; source id a4_g_b_2"/>
+          <p:cNvCxnSpPr/>
+          <p:nvPr/>
+        </p:nvCxnSpPr>
+        <p:spPr>
+          <a:xfrm flipV="1">
+            <a:off x="1119187" y="4746624"/>
+            <a:ext cx="31750" cy="150813"/>
+          </a:xfrm>
+          <a:prstGeom prst="line">
+            <a:avLst/>
+          </a:prstGeom>
+          <a:ln w="7937">
+            <a:solidFill>
+              <a:srgbClr val="1F2937"/>
+            </a:solidFill>
+          </a:ln>
+          <a:effectLst/>
+        </p:spPr>
+        <p:style>
+          <a:lnRef idx="2">
+            <a:schemeClr val="accent1"/>
+          </a:lnRef>
+          <a:fillRef idx="0">
+            <a:schemeClr val="accent1"/>
+          </a:fillRef>
+          <a:effectRef idx="0">
+            <a:schemeClr val="accent1"/>
+          </a:effectRef>
+          <a:fontRef idx="minor">
+            <a:schemeClr val="tx1"/>
+          </a:fontRef>
+        </p:style>
+      </p:cxnSp>
+      <p:cxnSp>
+        <p:nvCxnSpPr>
+          <p:cNvPr id="41" name="a4_g_r" descr="Editable line; source id a4_g_r"/>
+          <p:cNvCxnSpPr/>
+          <p:nvPr/>
+        </p:nvCxnSpPr>
+        <p:spPr>
+          <a:xfrm>
+            <a:off x="976312" y="4746624"/>
+            <a:ext cx="190500" cy="0"/>
+          </a:xfrm>
+          <a:prstGeom prst="line">
+            <a:avLst/>
+          </a:prstGeom>
+          <a:ln w="7937">
+            <a:solidFill>
+              <a:srgbClr val="1F2937"/>
+            </a:solidFill>
+          </a:ln>
+          <a:effectLst/>
+        </p:spPr>
+        <p:style>
+          <a:lnRef idx="2">
+            <a:schemeClr val="accent1"/>
+          </a:lnRef>
+          <a:fillRef idx="0">
+            <a:schemeClr val="accent1"/>
+          </a:fillRef>
+          <a:effectRef idx="0">
+            <a:schemeClr val="accent1"/>
+          </a:effectRef>
+          <a:fontRef idx="minor">
+            <a:schemeClr val="tx1"/>
+          </a:fontRef>
+        </p:style>
+      </p:cxnSp>
+      <p:sp>
+        <p:nvSpPr>
+          <p:cNvPr id="42" name="a4_t" descr="Editable text; source id a4_t"/>
           <p:cNvSpPr txBox="1"/>
           <p:nvPr/>
         </p:nvSpPr>
         <p:spPr>
           <a:xfrm>
-            <a:off x="1250813" y="3683715"/>
-            <a:ext cx="1800622" cy="268031"/>
+            <a:off x="1285874" y="4659312"/>
+            <a:ext cx="2301874" cy="285749"/>
           </a:xfrm>
           <a:prstGeom prst="rect">
             <a:avLst/>
@@ -4463,7 +5333,7 @@
           <a:p>
             <a:pPr algn="l" fontAlgn="base">
               <a:lnSpc>
-                <a:spcPts val="2002"/>
+                <a:spcPts val="2203"/>
               </a:lnSpc>
               <a:spcBef>
                 <a:spcPts val="0"/>
@@ -4471,7 +5341,7 @@
               <a:spcAft>
                 <a:spcPts val="0"/>
               </a:spcAft>
-              <a:defRPr sz="1366" b="1" i="0" lang="zh-CN" dirty="0">
+              <a:defRPr sz="1513" b="1" i="0" lang="zh-CN" dirty="0">
                 <a:solidFill>
                   <a:srgbClr val="2B3E57"/>
                 </a:solidFill>
@@ -4481,7 +5351,7 @@
               </a:defRPr>
             </a:pPr>
             <a:r>
-              <a:rPr sz="1366" b="1" i="0" lang="zh-CN" dirty="0">
+              <a:rPr sz="1513" b="1" i="0" lang="zh-CN" dirty="0">
                 <a:solidFill>
                   <a:srgbClr val="2B3E57"/>
                 </a:solidFill>
@@ -4496,29 +5366,29 @@
       </p:sp>
       <p:sp>
         <p:nvSpPr>
-          <p:cNvPr id="23" name="a5" descr="Editable shape; source id a5"/>
+          <p:cNvPr id="43" name="a5" descr="Editable shape; source id a5"/>
           <p:cNvSpPr/>
           <p:nvPr/>
         </p:nvSpPr>
         <p:spPr>
           <a:xfrm>
-            <a:off x="687260" y="4535918"/>
-            <a:ext cx="2542863" cy="755986"/>
+            <a:off x="761999" y="5937249"/>
+            <a:ext cx="3000374" cy="984249"/>
           </a:xfrm>
           <a:prstGeom prst="roundRect">
             <a:avLst>
-              <a:gd name="adj" fmla="val 9090"/>
+              <a:gd name="adj" fmla="val 7258"/>
             </a:avLst>
           </a:prstGeom>
           <a:solidFill>
             <a:srgbClr val="FFFFFF"/>
           </a:solidFill>
-          <a:ln w="10308">
+          <a:ln w="11112">
             <a:solidFill>
               <a:srgbClr val="9AA3AB"/>
             </a:solidFill>
             <a:custDash>
-              <a:ds d="866667" sp="533333"/>
+              <a:ds d="857143" sp="571429"/>
             </a:custDash>
           </a:ln>
           <a:effectLst/>
@@ -4545,41 +5415,204 @@
           </a:p>
         </p:txBody>
       </p:sp>
-      <p:pic>
-        <p:nvPicPr>
-          <p:cNvPr id="24" name="a5_i" descr="exact crop of the generated raster (line motif)"/>
-          <p:cNvPicPr>
-            <a:picLocks noChangeAspect="1"/>
-          </p:cNvPicPr>
-          <p:nvPr/>
-        </p:nvPicPr>
-        <p:blipFill>
-          <a:blip r:embed="rId6"/>
-          <a:stretch>
-            <a:fillRect/>
-          </a:stretch>
-        </p:blipFill>
-        <p:spPr>
-          <a:xfrm>
-            <a:off x="871479" y="4700861"/>
-            <a:ext cx="291331" cy="302394"/>
+      <p:sp>
+        <p:nvSpPr>
+          <p:cNvPr id="44" name="a5_g_s0" descr="Editable shape; source id a5_g_s0"/>
+          <p:cNvSpPr/>
+          <p:nvPr/>
+        </p:nvSpPr>
+        <p:spPr>
+          <a:xfrm>
+            <a:off x="984249" y="6334124"/>
+            <a:ext cx="126999" cy="190499"/>
           </a:xfrm>
           <a:prstGeom prst="rect">
             <a:avLst/>
           </a:prstGeom>
-          <a:effectLst/>
-        </p:spPr>
-      </p:pic>
-      <p:sp>
-        <p:nvSpPr>
-          <p:cNvPr id="25" name="a5_t" descr="Editable text; source id a5_t"/>
+          <a:noFill/>
+          <a:ln w="7937">
+            <a:solidFill>
+              <a:srgbClr val="1F2937"/>
+            </a:solidFill>
+          </a:ln>
+          <a:effectLst/>
+        </p:spPr>
+        <p:style>
+          <a:lnRef idx="1">
+            <a:schemeClr val="accent1"/>
+          </a:lnRef>
+          <a:fillRef idx="3">
+            <a:schemeClr val="accent1"/>
+          </a:fillRef>
+          <a:effectRef idx="0">
+            <a:schemeClr val="accent1"/>
+          </a:effectRef>
+          <a:fontRef idx="minor">
+            <a:schemeClr val="lt1"/>
+          </a:fontRef>
+        </p:style>
+        <p:txBody>
+          <a:bodyPr rtlCol="0" anchor="ctr"/>
+          <a:lstStyle/>
+          <a:p>
+            <a:pPr algn="ctr"/>
+          </a:p>
+        </p:txBody>
+      </p:sp>
+      <p:cxnSp>
+        <p:nvCxnSpPr>
+          <p:cNvPr id="45" name="a5_g_l1" descr="Editable line; source id a5_g_l1"/>
+          <p:cNvCxnSpPr/>
+          <p:nvPr/>
+        </p:nvCxnSpPr>
+        <p:spPr>
+          <a:xfrm>
+            <a:off x="1015999" y="6405562"/>
+            <a:ext cx="87313" cy="0"/>
+          </a:xfrm>
+          <a:prstGeom prst="line">
+            <a:avLst/>
+          </a:prstGeom>
+          <a:ln w="7937">
+            <a:solidFill>
+              <a:srgbClr val="1F2937"/>
+            </a:solidFill>
+          </a:ln>
+          <a:effectLst/>
+        </p:spPr>
+        <p:style>
+          <a:lnRef idx="2">
+            <a:schemeClr val="accent1"/>
+          </a:lnRef>
+          <a:fillRef idx="0">
+            <a:schemeClr val="accent1"/>
+          </a:fillRef>
+          <a:effectRef idx="0">
+            <a:schemeClr val="accent1"/>
+          </a:effectRef>
+          <a:fontRef idx="minor">
+            <a:schemeClr val="tx1"/>
+          </a:fontRef>
+        </p:style>
+      </p:cxnSp>
+      <p:cxnSp>
+        <p:nvCxnSpPr>
+          <p:cNvPr id="46" name="a5_g_l2" descr="Editable line; source id a5_g_l2"/>
+          <p:cNvCxnSpPr/>
+          <p:nvPr/>
+        </p:nvCxnSpPr>
+        <p:spPr>
+          <a:xfrm>
+            <a:off x="1015999" y="6437312"/>
+            <a:ext cx="87313" cy="0"/>
+          </a:xfrm>
+          <a:prstGeom prst="line">
+            <a:avLst/>
+          </a:prstGeom>
+          <a:ln w="7937">
+            <a:solidFill>
+              <a:srgbClr val="1F2937"/>
+            </a:solidFill>
+          </a:ln>
+          <a:effectLst/>
+        </p:spPr>
+        <p:style>
+          <a:lnRef idx="2">
+            <a:schemeClr val="accent1"/>
+          </a:lnRef>
+          <a:fillRef idx="0">
+            <a:schemeClr val="accent1"/>
+          </a:fillRef>
+          <a:effectRef idx="0">
+            <a:schemeClr val="accent1"/>
+          </a:effectRef>
+          <a:fontRef idx="minor">
+            <a:schemeClr val="tx1"/>
+          </a:fontRef>
+        </p:style>
+      </p:cxnSp>
+      <p:cxnSp>
+        <p:nvCxnSpPr>
+          <p:cNvPr id="47" name="a5_g_l3" descr="Editable line; source id a5_g_l3"/>
+          <p:cNvCxnSpPr/>
+          <p:nvPr/>
+        </p:nvCxnSpPr>
+        <p:spPr>
+          <a:xfrm>
+            <a:off x="1015999" y="6476999"/>
+            <a:ext cx="63500" cy="0"/>
+          </a:xfrm>
+          <a:prstGeom prst="line">
+            <a:avLst/>
+          </a:prstGeom>
+          <a:ln w="7937">
+            <a:solidFill>
+              <a:srgbClr val="1F2937"/>
+            </a:solidFill>
+          </a:ln>
+          <a:effectLst/>
+        </p:spPr>
+        <p:style>
+          <a:lnRef idx="2">
+            <a:schemeClr val="accent1"/>
+          </a:lnRef>
+          <a:fillRef idx="0">
+            <a:schemeClr val="accent1"/>
+          </a:fillRef>
+          <a:effectRef idx="0">
+            <a:schemeClr val="accent1"/>
+          </a:effectRef>
+          <a:fontRef idx="minor">
+            <a:schemeClr val="tx1"/>
+          </a:fontRef>
+        </p:style>
+      </p:cxnSp>
+      <p:cxnSp>
+        <p:nvCxnSpPr>
+          <p:cNvPr id="48" name="a5_g_x" descr="Editable line; source id a5_g_x"/>
+          <p:cNvCxnSpPr/>
+          <p:nvPr/>
+        </p:nvCxnSpPr>
+        <p:spPr>
+          <a:xfrm flipV="1">
+            <a:off x="976312" y="6318249"/>
+            <a:ext cx="190500" cy="222250"/>
+          </a:xfrm>
+          <a:prstGeom prst="line">
+            <a:avLst/>
+          </a:prstGeom>
+          <a:ln w="7937">
+            <a:solidFill>
+              <a:srgbClr val="1F2937"/>
+            </a:solidFill>
+          </a:ln>
+          <a:effectLst/>
+        </p:spPr>
+        <p:style>
+          <a:lnRef idx="2">
+            <a:schemeClr val="accent1"/>
+          </a:lnRef>
+          <a:fillRef idx="0">
+            <a:schemeClr val="accent1"/>
+          </a:fillRef>
+          <a:effectRef idx="0">
+            <a:schemeClr val="accent1"/>
+          </a:effectRef>
+          <a:fontRef idx="minor">
+            <a:schemeClr val="tx1"/>
+          </a:fontRef>
+        </p:style>
+      </p:cxnSp>
+      <p:sp>
+        <p:nvSpPr>
+          <p:cNvPr id="49" name="a5_t" descr="Editable text; source id a5_t"/>
           <p:cNvSpPr txBox="1"/>
           <p:nvPr/>
         </p:nvSpPr>
         <p:spPr>
           <a:xfrm>
-            <a:off x="1250813" y="4714606"/>
-            <a:ext cx="1800622" cy="268031"/>
+            <a:off x="1285874" y="6286499"/>
+            <a:ext cx="2301874" cy="285749"/>
           </a:xfrm>
           <a:prstGeom prst="rect">
             <a:avLst/>
@@ -4595,7 +5628,7 @@
           <a:p>
             <a:pPr algn="l" fontAlgn="base">
               <a:lnSpc>
-                <a:spcPts val="2002"/>
+                <a:spcPts val="2203"/>
               </a:lnSpc>
               <a:spcBef>
                 <a:spcPts val="0"/>
@@ -4603,7 +5636,7 @@
               <a:spcAft>
                 <a:spcPts val="0"/>
               </a:spcAft>
-              <a:defRPr sz="1366" b="1" i="0" lang="zh-CN" dirty="0">
+              <a:defRPr sz="1513" b="1" i="0" lang="zh-CN" dirty="0">
                 <a:solidFill>
                   <a:srgbClr val="5B6570"/>
                 </a:solidFill>
@@ -4613,7 +5646,7 @@
               </a:defRPr>
             </a:pPr>
             <a:r>
-              <a:rPr sz="1366" b="1" i="0" lang="zh-CN" dirty="0">
+              <a:rPr sz="1513" b="1" i="0" lang="zh-CN" dirty="0">
                 <a:solidFill>
                   <a:srgbClr val="5B6570"/>
                 </a:solidFill>
@@ -4628,14 +5661,14 @@
       </p:sp>
       <p:sp>
         <p:nvSpPr>
-          <p:cNvPr id="26" name="ax_u" descr="Editable line; source id ax_u"/>
+          <p:cNvPr id="50" name="ax_u" descr="Editable line; source id ax_u"/>
           <p:cNvSpPr/>
           <p:nvPr/>
         </p:nvSpPr>
         <p:spPr>
           <a:xfrm>
-            <a:off x="487955" y="989655"/>
-            <a:ext cx="68726" cy="1759387"/>
+            <a:off x="456406" y="952500"/>
+            <a:ext cx="71437" cy="2555875"/>
           </a:xfrm>
           <a:custGeom>
             <a:avLst/>
@@ -4644,27 +5677,27 @@
             <a:cxnLst/>
             <a:rect l="l" t="t" r="r" b="b"/>
             <a:pathLst>
-              <a:path w="10000" h="256000">
+              <a:path w="9000" h="322000">
                 <a:moveTo>
-                  <a:pt x="4000" y="256000"/>
+                  <a:pt x="3700" y="322000"/>
                 </a:moveTo>
                 <a:lnTo>
-                  <a:pt x="4000" y="12000"/>
+                  <a:pt x="3700" y="11000"/>
                 </a:lnTo>
                 <a:lnTo>
-                  <a:pt x="0" y="12000"/>
+                  <a:pt x="0" y="11000"/>
                 </a:lnTo>
                 <a:lnTo>
-                  <a:pt x="5000" y="0"/>
+                  <a:pt x="4500" y="0"/>
                 </a:lnTo>
                 <a:lnTo>
-                  <a:pt x="10000" y="12000"/>
+                  <a:pt x="9000" y="11000"/>
                 </a:lnTo>
                 <a:lnTo>
-                  <a:pt x="6000" y="12000"/>
+                  <a:pt x="5300" y="11000"/>
                 </a:lnTo>
                 <a:lnTo>
-                  <a:pt x="6000" y="256000"/>
+                  <a:pt x="5300" y="322000"/>
                 </a:lnTo>
                 <a:close/>
               </a:path>
@@ -4702,14 +5735,14 @@
       </p:sp>
       <p:sp>
         <p:nvSpPr>
-          <p:cNvPr id="27" name="ax_d" descr="Editable line; source id ax_d"/>
+          <p:cNvPr id="51" name="ax_d" descr="Editable line; source id ax_d"/>
           <p:cNvSpPr/>
           <p:nvPr/>
         </p:nvSpPr>
         <p:spPr>
           <a:xfrm>
-            <a:off x="487955" y="3353831"/>
-            <a:ext cx="68726" cy="1759387"/>
+            <a:off x="456406" y="4175125"/>
+            <a:ext cx="71437" cy="2555875"/>
           </a:xfrm>
           <a:custGeom>
             <a:avLst/>
@@ -4718,27 +5751,27 @@
             <a:cxnLst/>
             <a:rect l="l" t="t" r="r" b="b"/>
             <a:pathLst>
-              <a:path w="10000" h="256000">
+              <a:path w="9000" h="322000">
                 <a:moveTo>
-                  <a:pt x="6000" y="0"/>
+                  <a:pt x="5300" y="0"/>
                 </a:moveTo>
                 <a:lnTo>
-                  <a:pt x="6000" y="244000"/>
+                  <a:pt x="5300" y="311000"/>
                 </a:lnTo>
                 <a:lnTo>
-                  <a:pt x="10000" y="244000"/>
+                  <a:pt x="9000" y="311000"/>
                 </a:lnTo>
                 <a:lnTo>
-                  <a:pt x="5000" y="256000"/>
+                  <a:pt x="4500" y="322000"/>
                 </a:lnTo>
                 <a:lnTo>
-                  <a:pt x="0" y="244000"/>
+                  <a:pt x="0" y="311000"/>
                 </a:lnTo>
                 <a:lnTo>
-                  <a:pt x="4000" y="244000"/>
+                  <a:pt x="3700" y="311000"/>
                 </a:lnTo>
                 <a:lnTo>
-                  <a:pt x="4000" y="0"/>
+                  <a:pt x="3700" y="0"/>
                 </a:lnTo>
                 <a:close/>
               </a:path>
@@ -4776,14 +5809,14 @@
       </p:sp>
       <p:sp>
         <p:nvSpPr>
-          <p:cNvPr id="28" name="ax_n" descr="Editable text; source id ax_n"/>
+          <p:cNvPr id="52" name="ax_n" descr="Editable text; source id ax_n"/>
           <p:cNvSpPr txBox="1"/>
           <p:nvPr/>
         </p:nvSpPr>
         <p:spPr>
           <a:xfrm>
-            <a:off x="357375" y="769731"/>
-            <a:ext cx="329884" cy="206178"/>
+            <a:off x="317499" y="698499"/>
+            <a:ext cx="349249" cy="222249"/>
           </a:xfrm>
           <a:prstGeom prst="rect">
             <a:avLst/>
@@ -4799,7 +5832,7 @@
           <a:p>
             <a:pPr algn="ctr" fontAlgn="base">
               <a:lnSpc>
-                <a:spcPts val="1582"/>
+                <a:spcPts val="1640"/>
               </a:lnSpc>
               <a:spcBef>
                 <a:spcPts val="0"/>
@@ -4807,7 +5840,7 @@
               <a:spcAft>
                 <a:spcPts val="0"/>
               </a:spcAft>
-              <a:defRPr sz="1082" b="1" i="0" lang="zh-CN" dirty="0">
+              <a:defRPr sz="1124" b="1" i="0" lang="zh-CN" dirty="0">
                 <a:solidFill>
                   <a:srgbClr val="3F4854"/>
                 </a:solidFill>
@@ -4817,7 +5850,7 @@
               </a:defRPr>
             </a:pPr>
             <a:r>
-              <a:rPr sz="1082" b="1" i="0" lang="zh-CN" dirty="0">
+              <a:rPr sz="1124" b="1" i="0" lang="zh-CN" dirty="0">
                 <a:solidFill>
                   <a:srgbClr val="3F4854"/>
                 </a:solidFill>
@@ -4832,14 +5865,14 @@
       </p:sp>
       <p:sp>
         <p:nvSpPr>
-          <p:cNvPr id="29" name="ax_f" descr="Editable text; source id ax_f"/>
+          <p:cNvPr id="53" name="ax_f" descr="Editable text; source id ax_f"/>
           <p:cNvSpPr txBox="1"/>
           <p:nvPr/>
         </p:nvSpPr>
         <p:spPr>
           <a:xfrm>
-            <a:off x="357375" y="5126962"/>
-            <a:ext cx="329884" cy="206178"/>
+            <a:off x="317499" y="6746874"/>
+            <a:ext cx="349249" cy="222249"/>
           </a:xfrm>
           <a:prstGeom prst="rect">
             <a:avLst/>
@@ -4855,7 +5888,7 @@
           <a:p>
             <a:pPr algn="ctr" fontAlgn="base">
               <a:lnSpc>
-                <a:spcPts val="1582"/>
+                <a:spcPts val="1640"/>
               </a:lnSpc>
               <a:spcBef>
                 <a:spcPts val="0"/>
@@ -4863,7 +5896,7 @@
               <a:spcAft>
                 <a:spcPts val="0"/>
               </a:spcAft>
-              <a:defRPr sz="1082" b="1" i="0" lang="zh-CN" dirty="0">
+              <a:defRPr sz="1124" b="1" i="0" lang="zh-CN" dirty="0">
                 <a:solidFill>
                   <a:srgbClr val="3F4854"/>
                 </a:solidFill>
@@ -4873,7 +5906,7 @@
               </a:defRPr>
             </a:pPr>
             <a:r>
-              <a:rPr sz="1082" b="1" i="0" lang="zh-CN" dirty="0">
+              <a:rPr sz="1124" b="1" i="0" lang="zh-CN" dirty="0">
                 <a:solidFill>
                   <a:srgbClr val="3F4854"/>
                 </a:solidFill>
@@ -4888,14 +5921,14 @@
       </p:sp>
       <p:sp>
         <p:nvSpPr>
-          <p:cNvPr id="30" name="ax_l" descr="Editable text; source id ax_l"/>
+          <p:cNvPr id="54" name="ax_l" descr="Editable text; source id ax_l"/>
           <p:cNvSpPr txBox="1"/>
           <p:nvPr/>
         </p:nvSpPr>
         <p:spPr>
           <a:xfrm rot="16200000">
-            <a:off x="-233668" y="2948347"/>
-            <a:ext cx="1072126" cy="206178"/>
+            <a:off x="-230187" y="3730624"/>
+            <a:ext cx="1127124" cy="214312"/>
           </a:xfrm>
           <a:prstGeom prst="rect">
             <a:avLst/>
@@ -4911,7 +5944,7 @@
           <a:p>
             <a:pPr algn="ctr" fontAlgn="base">
               <a:lnSpc>
-                <a:spcPts val="1582"/>
+                <a:spcPts val="1640"/>
               </a:lnSpc>
               <a:spcBef>
                 <a:spcPts val="0"/>
@@ -4919,7 +5952,7 @@
               <a:spcAft>
                 <a:spcPts val="0"/>
               </a:spcAft>
-              <a:defRPr sz="1082" b="0" i="0" lang="zh-CN" dirty="0">
+              <a:defRPr sz="1124" b="0" i="0" lang="zh-CN" dirty="0">
                 <a:solidFill>
                   <a:srgbClr val="3F4854"/>
                 </a:solidFill>
@@ -4929,7 +5962,7 @@
               </a:defRPr>
             </a:pPr>
             <a:r>
-              <a:rPr sz="1082" b="0" i="0" lang="zh-CN" dirty="0">
+              <a:rPr sz="1124" b="0" i="0" lang="zh-CN" dirty="0">
                 <a:solidFill>
                   <a:srgbClr val="3F4854"/>
                 </a:solidFill>
@@ -4944,24 +5977,24 @@
       </p:sp>
       <p:sp>
         <p:nvSpPr>
-          <p:cNvPr id="31" name="led" descr="Editable shape; source id led"/>
+          <p:cNvPr id="55" name="led" descr="Editable shape; source id led"/>
           <p:cNvSpPr/>
           <p:nvPr/>
         </p:nvSpPr>
         <p:spPr>
           <a:xfrm>
-            <a:off x="5498083" y="1030890"/>
-            <a:ext cx="2529118" cy="3848658"/>
+            <a:off x="4444999" y="761999"/>
+            <a:ext cx="3270249" cy="6159499"/>
           </a:xfrm>
           <a:prstGeom prst="roundRect">
             <a:avLst>
-              <a:gd name="adj" fmla="val 2717"/>
+              <a:gd name="adj" fmla="val 2184"/>
             </a:avLst>
           </a:prstGeom>
           <a:solidFill>
             <a:srgbClr val="FFFFFF"/>
           </a:solidFill>
-          <a:ln w="10308">
+          <a:ln w="11112">
             <a:solidFill>
               <a:srgbClr val="1F7F8C"/>
             </a:solidFill>
@@ -4992,14 +6025,14 @@
       </p:sp>
       <p:sp>
         <p:nvSpPr>
-          <p:cNvPr id="32" name="led_s" descr="Editable shape; source id led_s"/>
+          <p:cNvPr id="56" name="led_a" descr="Editable shape; source id led_a"/>
           <p:cNvSpPr/>
           <p:nvPr/>
         </p:nvSpPr>
         <p:spPr>
           <a:xfrm>
-            <a:off x="5498083" y="1030890"/>
-            <a:ext cx="2529118" cy="54980"/>
+            <a:off x="4444999" y="761999"/>
+            <a:ext cx="3270249" cy="47624"/>
           </a:xfrm>
           <a:prstGeom prst="roundRect">
             <a:avLst>
@@ -5036,41 +6069,204 @@
           </a:p>
         </p:txBody>
       </p:sp>
-      <p:pic>
-        <p:nvPicPr>
-          <p:cNvPr id="33" name="led_i" descr="exact crop of the generated raster (line motif)"/>
-          <p:cNvPicPr>
-            <a:picLocks noChangeAspect="1"/>
-          </p:cNvPicPr>
-          <p:nvPr/>
-        </p:nvPicPr>
-        <p:blipFill>
-          <a:blip r:embed="rId7"/>
-          <a:stretch>
-            <a:fillRect/>
-          </a:stretch>
-        </p:blipFill>
-        <p:spPr>
-          <a:xfrm>
-            <a:off x="5639917" y="1216450"/>
-            <a:ext cx="293629" cy="302394"/>
+      <p:sp>
+        <p:nvSpPr>
+          <p:cNvPr id="57" name="led_g_b" descr="Editable shape; source id led_g_b"/>
+          <p:cNvSpPr/>
+          <p:nvPr/>
+        </p:nvSpPr>
+        <p:spPr>
+          <a:xfrm>
+            <a:off x="4635499" y="1031874"/>
+            <a:ext cx="206374" cy="174624"/>
           </a:xfrm>
           <a:prstGeom prst="rect">
             <a:avLst/>
           </a:prstGeom>
-          <a:effectLst/>
-        </p:spPr>
-      </p:pic>
-      <p:sp>
-        <p:nvSpPr>
-          <p:cNvPr id="34" name="led_t" descr="Editable text; source id led_t"/>
+          <a:noFill/>
+          <a:ln w="7937">
+            <a:solidFill>
+              <a:srgbClr val="1F2937"/>
+            </a:solidFill>
+          </a:ln>
+          <a:effectLst/>
+        </p:spPr>
+        <p:style>
+          <a:lnRef idx="1">
+            <a:schemeClr val="accent1"/>
+          </a:lnRef>
+          <a:fillRef idx="3">
+            <a:schemeClr val="accent1"/>
+          </a:fillRef>
+          <a:effectRef idx="0">
+            <a:schemeClr val="accent1"/>
+          </a:effectRef>
+          <a:fontRef idx="minor">
+            <a:schemeClr val="lt1"/>
+          </a:fontRef>
+        </p:style>
+        <p:txBody>
+          <a:bodyPr rtlCol="0" anchor="ctr"/>
+          <a:lstStyle/>
+          <a:p>
+            <a:pPr algn="ctr"/>
+          </a:p>
+        </p:txBody>
+      </p:sp>
+      <p:cxnSp>
+        <p:nvCxnSpPr>
+          <p:cNvPr id="58" name="led_g_r1" descr="Editable line; source id led_g_r1"/>
+          <p:cNvCxnSpPr/>
+          <p:nvPr/>
+        </p:nvCxnSpPr>
+        <p:spPr>
+          <a:xfrm>
+            <a:off x="4635499" y="1087437"/>
+            <a:ext cx="206375" cy="0"/>
+          </a:xfrm>
+          <a:prstGeom prst="line">
+            <a:avLst/>
+          </a:prstGeom>
+          <a:ln w="7937">
+            <a:solidFill>
+              <a:srgbClr val="1F2937"/>
+            </a:solidFill>
+          </a:ln>
+          <a:effectLst/>
+        </p:spPr>
+        <p:style>
+          <a:lnRef idx="2">
+            <a:schemeClr val="accent1"/>
+          </a:lnRef>
+          <a:fillRef idx="0">
+            <a:schemeClr val="accent1"/>
+          </a:fillRef>
+          <a:effectRef idx="0">
+            <a:schemeClr val="accent1"/>
+          </a:effectRef>
+          <a:fontRef idx="minor">
+            <a:schemeClr val="tx1"/>
+          </a:fontRef>
+        </p:style>
+      </p:cxnSp>
+      <p:cxnSp>
+        <p:nvCxnSpPr>
+          <p:cNvPr id="59" name="led_g_r2" descr="Editable line; source id led_g_r2"/>
+          <p:cNvCxnSpPr/>
+          <p:nvPr/>
+        </p:nvCxnSpPr>
+        <p:spPr>
+          <a:xfrm>
+            <a:off x="4635499" y="1150937"/>
+            <a:ext cx="206375" cy="0"/>
+          </a:xfrm>
+          <a:prstGeom prst="line">
+            <a:avLst/>
+          </a:prstGeom>
+          <a:ln w="7937">
+            <a:solidFill>
+              <a:srgbClr val="1F2937"/>
+            </a:solidFill>
+          </a:ln>
+          <a:effectLst/>
+        </p:spPr>
+        <p:style>
+          <a:lnRef idx="2">
+            <a:schemeClr val="accent1"/>
+          </a:lnRef>
+          <a:fillRef idx="0">
+            <a:schemeClr val="accent1"/>
+          </a:fillRef>
+          <a:effectRef idx="0">
+            <a:schemeClr val="accent1"/>
+          </a:effectRef>
+          <a:fontRef idx="minor">
+            <a:schemeClr val="tx1"/>
+          </a:fontRef>
+        </p:style>
+      </p:cxnSp>
+      <p:cxnSp>
+        <p:nvCxnSpPr>
+          <p:cNvPr id="60" name="led_g_c1" descr="Editable line; source id led_g_c1"/>
+          <p:cNvCxnSpPr/>
+          <p:nvPr/>
+        </p:nvCxnSpPr>
+        <p:spPr>
+          <a:xfrm>
+            <a:off x="4706937" y="1031874"/>
+            <a:ext cx="0" cy="174625"/>
+          </a:xfrm>
+          <a:prstGeom prst="line">
+            <a:avLst/>
+          </a:prstGeom>
+          <a:ln w="7937">
+            <a:solidFill>
+              <a:srgbClr val="1F2937"/>
+            </a:solidFill>
+          </a:ln>
+          <a:effectLst/>
+        </p:spPr>
+        <p:style>
+          <a:lnRef idx="2">
+            <a:schemeClr val="accent1"/>
+          </a:lnRef>
+          <a:fillRef idx="0">
+            <a:schemeClr val="accent1"/>
+          </a:fillRef>
+          <a:effectRef idx="0">
+            <a:schemeClr val="accent1"/>
+          </a:effectRef>
+          <a:fontRef idx="minor">
+            <a:schemeClr val="tx1"/>
+          </a:fontRef>
+        </p:style>
+      </p:cxnSp>
+      <p:cxnSp>
+        <p:nvCxnSpPr>
+          <p:cNvPr id="61" name="led_g_c2" descr="Editable line; source id led_g_c2"/>
+          <p:cNvCxnSpPr/>
+          <p:nvPr/>
+        </p:nvCxnSpPr>
+        <p:spPr>
+          <a:xfrm>
+            <a:off x="4770437" y="1031874"/>
+            <a:ext cx="0" cy="174625"/>
+          </a:xfrm>
+          <a:prstGeom prst="line">
+            <a:avLst/>
+          </a:prstGeom>
+          <a:ln w="7937">
+            <a:solidFill>
+              <a:srgbClr val="1F2937"/>
+            </a:solidFill>
+          </a:ln>
+          <a:effectLst/>
+        </p:spPr>
+        <p:style>
+          <a:lnRef idx="2">
+            <a:schemeClr val="accent1"/>
+          </a:lnRef>
+          <a:fillRef idx="0">
+            <a:schemeClr val="accent1"/>
+          </a:fillRef>
+          <a:effectRef idx="0">
+            <a:schemeClr val="accent1"/>
+          </a:effectRef>
+          <a:fontRef idx="minor">
+            <a:schemeClr val="tx1"/>
+          </a:fontRef>
+        </p:style>
+      </p:cxnSp>
+      <p:sp>
+        <p:nvSpPr>
+          <p:cNvPr id="62" name="led_t" descr="Editable text; source id led_t"/>
           <p:cNvSpPr txBox="1"/>
           <p:nvPr/>
         </p:nvSpPr>
         <p:spPr>
           <a:xfrm>
-            <a:off x="6020401" y="1223323"/>
-            <a:ext cx="1869348" cy="288649"/>
+            <a:off x="4952999" y="968374"/>
+            <a:ext cx="2603499" cy="293687"/>
           </a:xfrm>
           <a:prstGeom prst="rect">
             <a:avLst/>
@@ -5086,7 +6282,7 @@
           <a:p>
             <a:pPr algn="l" fontAlgn="base">
               <a:lnSpc>
-                <a:spcPts val="2151"/>
+                <a:spcPts val="2281"/>
               </a:lnSpc>
               <a:spcBef>
                 <a:spcPts val="0"/>
@@ -5094,7 +6290,7 @@
               <a:spcAft>
                 <a:spcPts val="0"/>
               </a:spcAft>
-              <a:defRPr sz="1471" b="1" i="0" lang="zh-CN" dirty="0">
+              <a:defRPr sz="1573" b="1" i="0" lang="zh-CN" dirty="0">
                 <a:solidFill>
                   <a:srgbClr val="0F4F58"/>
                 </a:solidFill>
@@ -5104,7 +6300,7 @@
               </a:defRPr>
             </a:pPr>
             <a:r>
-              <a:rPr sz="1471" b="1" i="0" lang="zh-CN" dirty="0">
+              <a:rPr sz="1573" b="1" i="0" lang="zh-CN" dirty="0">
                 <a:solidFill>
                   <a:srgbClr val="0F4F58"/>
                 </a:solidFill>
@@ -5119,14 +6315,62 @@
       </p:sp>
       <p:sp>
         <p:nvSpPr>
-          <p:cNvPr id="35" name="led_k0" descr="Editable text; source id led_k0"/>
+          <p:cNvPr id="63" name="ledr_r0" descr="Editable shape; source id ledr_r0"/>
+          <p:cNvSpPr/>
+          <p:nvPr/>
+        </p:nvSpPr>
+        <p:spPr>
+          <a:xfrm>
+            <a:off x="4635499" y="1452562"/>
+            <a:ext cx="2889249" cy="754062"/>
+          </a:xfrm>
+          <a:prstGeom prst="roundRect">
+            <a:avLst>
+              <a:gd name="adj" fmla="val 6315"/>
+            </a:avLst>
+          </a:prstGeom>
+          <a:solidFill>
+            <a:srgbClr val="F7F9FB"/>
+          </a:solidFill>
+          <a:ln w="9524">
+            <a:solidFill>
+              <a:srgbClr val="CBD3DA"/>
+            </a:solidFill>
+          </a:ln>
+          <a:effectLst/>
+        </p:spPr>
+        <p:style>
+          <a:lnRef idx="1">
+            <a:schemeClr val="accent1"/>
+          </a:lnRef>
+          <a:fillRef idx="3">
+            <a:schemeClr val="accent1"/>
+          </a:fillRef>
+          <a:effectRef idx="0">
+            <a:schemeClr val="accent1"/>
+          </a:effectRef>
+          <a:fontRef idx="minor">
+            <a:schemeClr val="lt1"/>
+          </a:fontRef>
+        </p:style>
+        <p:txBody>
+          <a:bodyPr rtlCol="0" anchor="ctr"/>
+          <a:lstStyle/>
+          <a:p>
+            <a:pPr algn="ctr"/>
+          </a:p>
+        </p:txBody>
+      </p:sp>
+      <p:sp>
+        <p:nvSpPr>
+          <p:cNvPr id="64" name="ledr_r0_t" descr="Editable text; source id ledr_r0_t"/>
           <p:cNvSpPr txBox="1"/>
           <p:nvPr/>
         </p:nvSpPr>
         <p:spPr>
           <a:xfrm>
-            <a:off x="5635535" y="1566953"/>
-            <a:ext cx="2254214" cy="233668"/>
+            <a:off x="4691062" y="1484312"/>
+            <a:ext cx="2778124" cy="690562"/>
           </a:xfrm>
           <a:prstGeom prst="rect">
             <a:avLst/>
@@ -5140,9 +6384,9 @@
           </a:bodyPr>
           <a:lstStyle/>
           <a:p>
-            <a:pPr algn="l" fontAlgn="base">
+            <a:pPr algn="ctr" fontAlgn="base">
               <a:lnSpc>
-                <a:spcPts val="1745"/>
+                <a:spcPts val="1921"/>
               </a:lnSpc>
               <a:spcBef>
                 <a:spcPts val="0"/>
@@ -5150,7 +6394,7 @@
               <a:spcAft>
                 <a:spcPts val="0"/>
               </a:spcAft>
-              <a:defRPr sz="1190" b="0" i="0" lang="zh-CN" dirty="0">
+              <a:defRPr sz="1312" b="0" i="0" lang="zh-CN" dirty="0">
                 <a:solidFill>
                   <a:srgbClr val="3F4854"/>
                 </a:solidFill>
@@ -5160,7 +6404,7 @@
               </a:defRPr>
             </a:pPr>
             <a:r>
-              <a:rPr sz="1190" b="0" i="0" lang="zh-CN" dirty="0">
+              <a:rPr sz="1312" b="0" i="0" lang="zh-CN" dirty="0">
                 <a:solidFill>
                   <a:srgbClr val="3F4854"/>
                 </a:solidFill>
@@ -5175,21 +6419,21 @@
       </p:sp>
       <p:cxnSp>
         <p:nvCxnSpPr>
-          <p:cNvPr id="36" name="led_r1" descr="Editable line; source id led_r1"/>
+          <p:cNvPr id="65" name="ledr_k0a" descr="Editable line; source id ledr_k0a"/>
           <p:cNvCxnSpPr/>
           <p:nvPr/>
         </p:nvCxnSpPr>
         <p:spPr>
           <a:xfrm>
-            <a:off x="5635535" y="2048036"/>
-            <a:ext cx="2254214" cy="0"/>
+            <a:off x="7318374" y="1825624"/>
+            <a:ext cx="47625" cy="47625"/>
           </a:xfrm>
           <a:prstGeom prst="line">
             <a:avLst/>
           </a:prstGeom>
-          <a:ln w="6872">
+          <a:ln w="12699">
             <a:solidFill>
-              <a:srgbClr val="DCE2E8"/>
+              <a:srgbClr val="4B5563"/>
             </a:solidFill>
           </a:ln>
           <a:effectLst/>
@@ -5209,16 +6453,100 @@
           </a:fontRef>
         </p:style>
       </p:cxnSp>
-      <p:sp>
-        <p:nvSpPr>
-          <p:cNvPr id="37" name="led_k1" descr="Editable text; source id led_k1"/>
+      <p:cxnSp>
+        <p:nvCxnSpPr>
+          <p:cNvPr id="66" name="ledr_k0b" descr="Editable line; source id ledr_k0b"/>
+          <p:cNvCxnSpPr/>
+          <p:nvPr/>
+        </p:nvCxnSpPr>
+        <p:spPr>
+          <a:xfrm flipV="1">
+            <a:off x="7365999" y="1777999"/>
+            <a:ext cx="79375" cy="95250"/>
+          </a:xfrm>
+          <a:prstGeom prst="line">
+            <a:avLst/>
+          </a:prstGeom>
+          <a:ln w="12699">
+            <a:solidFill>
+              <a:srgbClr val="4B5563"/>
+            </a:solidFill>
+          </a:ln>
+          <a:effectLst/>
+        </p:spPr>
+        <p:style>
+          <a:lnRef idx="2">
+            <a:schemeClr val="accent1"/>
+          </a:lnRef>
+          <a:fillRef idx="0">
+            <a:schemeClr val="accent1"/>
+          </a:fillRef>
+          <a:effectRef idx="0">
+            <a:schemeClr val="accent1"/>
+          </a:effectRef>
+          <a:fontRef idx="minor">
+            <a:schemeClr val="tx1"/>
+          </a:fontRef>
+        </p:style>
+      </p:cxnSp>
+      <p:sp>
+        <p:nvSpPr>
+          <p:cNvPr id="67" name="ledr_r1" descr="Editable shape; source id ledr_r1"/>
+          <p:cNvSpPr/>
+          <p:nvPr/>
+        </p:nvSpPr>
+        <p:spPr>
+          <a:xfrm>
+            <a:off x="4635499" y="2349499"/>
+            <a:ext cx="2889249" cy="754062"/>
+          </a:xfrm>
+          <a:prstGeom prst="roundRect">
+            <a:avLst>
+              <a:gd name="adj" fmla="val 6315"/>
+            </a:avLst>
+          </a:prstGeom>
+          <a:solidFill>
+            <a:srgbClr val="F7F9FB"/>
+          </a:solidFill>
+          <a:ln w="9524">
+            <a:solidFill>
+              <a:srgbClr val="CBD3DA"/>
+            </a:solidFill>
+          </a:ln>
+          <a:effectLst/>
+        </p:spPr>
+        <p:style>
+          <a:lnRef idx="1">
+            <a:schemeClr val="accent1"/>
+          </a:lnRef>
+          <a:fillRef idx="3">
+            <a:schemeClr val="accent1"/>
+          </a:fillRef>
+          <a:effectRef idx="0">
+            <a:schemeClr val="accent1"/>
+          </a:effectRef>
+          <a:fontRef idx="minor">
+            <a:schemeClr val="lt1"/>
+          </a:fontRef>
+        </p:style>
+        <p:txBody>
+          <a:bodyPr rtlCol="0" anchor="ctr"/>
+          <a:lstStyle/>
+          <a:p>
+            <a:pPr algn="ctr"/>
+          </a:p>
+        </p:txBody>
+      </p:sp>
+      <p:sp>
+        <p:nvSpPr>
+          <p:cNvPr id="68" name="ledr_r1_t" descr="Editable text; source id ledr_r1_t"/>
           <p:cNvSpPr txBox="1"/>
           <p:nvPr/>
         </p:nvSpPr>
         <p:spPr>
           <a:xfrm>
-            <a:off x="5635535" y="2075526"/>
-            <a:ext cx="2254214" cy="233668"/>
+            <a:off x="4691062" y="2381249"/>
+            <a:ext cx="2778124" cy="690562"/>
           </a:xfrm>
           <a:prstGeom prst="rect">
             <a:avLst/>
@@ -5232,9 +6560,9 @@
           </a:bodyPr>
           <a:lstStyle/>
           <a:p>
-            <a:pPr algn="l" fontAlgn="base">
+            <a:pPr algn="ctr" fontAlgn="base">
               <a:lnSpc>
-                <a:spcPts val="1745"/>
+                <a:spcPts val="1921"/>
               </a:lnSpc>
               <a:spcBef>
                 <a:spcPts val="0"/>
@@ -5242,7 +6570,7 @@
               <a:spcAft>
                 <a:spcPts val="0"/>
               </a:spcAft>
-              <a:defRPr sz="1190" b="0" i="0" lang="zh-CN" dirty="0">
+              <a:defRPr sz="1312" b="0" i="0" lang="zh-CN" dirty="0">
                 <a:solidFill>
                   <a:srgbClr val="3F4854"/>
                 </a:solidFill>
@@ -5252,7 +6580,7 @@
               </a:defRPr>
             </a:pPr>
             <a:r>
-              <a:rPr sz="1190" b="0" i="0" lang="zh-CN" dirty="0">
+              <a:rPr sz="1312" b="0" i="0" lang="zh-CN" dirty="0">
                 <a:solidFill>
                   <a:srgbClr val="3F4854"/>
                 </a:solidFill>
@@ -5267,21 +6595,21 @@
       </p:sp>
       <p:cxnSp>
         <p:nvCxnSpPr>
-          <p:cNvPr id="38" name="led_r2" descr="Editable line; source id led_r2"/>
+          <p:cNvPr id="69" name="ledr_k1a" descr="Editable line; source id ledr_k1a"/>
           <p:cNvCxnSpPr/>
           <p:nvPr/>
         </p:nvCxnSpPr>
         <p:spPr>
           <a:xfrm>
-            <a:off x="5635535" y="2556608"/>
-            <a:ext cx="2254214" cy="0"/>
+            <a:off x="7318374" y="2730499"/>
+            <a:ext cx="47625" cy="47625"/>
           </a:xfrm>
           <a:prstGeom prst="line">
             <a:avLst/>
           </a:prstGeom>
-          <a:ln w="6872">
+          <a:ln w="12699">
             <a:solidFill>
-              <a:srgbClr val="DCE2E8"/>
+              <a:srgbClr val="4B5563"/>
             </a:solidFill>
           </a:ln>
           <a:effectLst/>
@@ -5301,16 +6629,100 @@
           </a:fontRef>
         </p:style>
       </p:cxnSp>
-      <p:sp>
-        <p:nvSpPr>
-          <p:cNvPr id="39" name="led_k2" descr="Editable text; source id led_k2"/>
+      <p:cxnSp>
+        <p:nvCxnSpPr>
+          <p:cNvPr id="70" name="ledr_k1b" descr="Editable line; source id ledr_k1b"/>
+          <p:cNvCxnSpPr/>
+          <p:nvPr/>
+        </p:nvCxnSpPr>
+        <p:spPr>
+          <a:xfrm flipV="1">
+            <a:off x="7365999" y="2666999"/>
+            <a:ext cx="79375" cy="111125"/>
+          </a:xfrm>
+          <a:prstGeom prst="line">
+            <a:avLst/>
+          </a:prstGeom>
+          <a:ln w="12699">
+            <a:solidFill>
+              <a:srgbClr val="4B5563"/>
+            </a:solidFill>
+          </a:ln>
+          <a:effectLst/>
+        </p:spPr>
+        <p:style>
+          <a:lnRef idx="2">
+            <a:schemeClr val="accent1"/>
+          </a:lnRef>
+          <a:fillRef idx="0">
+            <a:schemeClr val="accent1"/>
+          </a:fillRef>
+          <a:effectRef idx="0">
+            <a:schemeClr val="accent1"/>
+          </a:effectRef>
+          <a:fontRef idx="minor">
+            <a:schemeClr val="tx1"/>
+          </a:fontRef>
+        </p:style>
+      </p:cxnSp>
+      <p:sp>
+        <p:nvSpPr>
+          <p:cNvPr id="71" name="ledr_r2" descr="Editable shape; source id ledr_r2"/>
+          <p:cNvSpPr/>
+          <p:nvPr/>
+        </p:nvSpPr>
+        <p:spPr>
+          <a:xfrm>
+            <a:off x="4635499" y="3246437"/>
+            <a:ext cx="2889249" cy="754062"/>
+          </a:xfrm>
+          <a:prstGeom prst="roundRect">
+            <a:avLst>
+              <a:gd name="adj" fmla="val 6315"/>
+            </a:avLst>
+          </a:prstGeom>
+          <a:solidFill>
+            <a:srgbClr val="F7F9FB"/>
+          </a:solidFill>
+          <a:ln w="9524">
+            <a:solidFill>
+              <a:srgbClr val="CBD3DA"/>
+            </a:solidFill>
+          </a:ln>
+          <a:effectLst/>
+        </p:spPr>
+        <p:style>
+          <a:lnRef idx="1">
+            <a:schemeClr val="accent1"/>
+          </a:lnRef>
+          <a:fillRef idx="3">
+            <a:schemeClr val="accent1"/>
+          </a:fillRef>
+          <a:effectRef idx="0">
+            <a:schemeClr val="accent1"/>
+          </a:effectRef>
+          <a:fontRef idx="minor">
+            <a:schemeClr val="lt1"/>
+          </a:fontRef>
+        </p:style>
+        <p:txBody>
+          <a:bodyPr rtlCol="0" anchor="ctr"/>
+          <a:lstStyle/>
+          <a:p>
+            <a:pPr algn="ctr"/>
+          </a:p>
+        </p:txBody>
+      </p:sp>
+      <p:sp>
+        <p:nvSpPr>
+          <p:cNvPr id="72" name="ledr_r2_t" descr="Editable text; source id ledr_r2_t"/>
           <p:cNvSpPr txBox="1"/>
           <p:nvPr/>
         </p:nvSpPr>
         <p:spPr>
           <a:xfrm>
-            <a:off x="5635535" y="2584099"/>
-            <a:ext cx="2254214" cy="233668"/>
+            <a:off x="4691062" y="3278187"/>
+            <a:ext cx="2778124" cy="690562"/>
           </a:xfrm>
           <a:prstGeom prst="rect">
             <a:avLst/>
@@ -5324,9 +6736,9 @@
           </a:bodyPr>
           <a:lstStyle/>
           <a:p>
-            <a:pPr algn="l" fontAlgn="base">
+            <a:pPr algn="ctr" fontAlgn="base">
               <a:lnSpc>
-                <a:spcPts val="1745"/>
+                <a:spcPts val="1921"/>
               </a:lnSpc>
               <a:spcBef>
                 <a:spcPts val="0"/>
@@ -5334,7 +6746,7 @@
               <a:spcAft>
                 <a:spcPts val="0"/>
               </a:spcAft>
-              <a:defRPr sz="1190" b="0" i="0" lang="zh-CN" dirty="0">
+              <a:defRPr sz="1312" b="0" i="0" lang="zh-CN" dirty="0">
                 <a:solidFill>
                   <a:srgbClr val="3F4854"/>
                 </a:solidFill>
@@ -5344,7 +6756,7 @@
               </a:defRPr>
             </a:pPr>
             <a:r>
-              <a:rPr sz="1190" b="0" i="0" lang="zh-CN" dirty="0">
+              <a:rPr sz="1312" b="0" i="0" lang="zh-CN" dirty="0">
                 <a:solidFill>
                   <a:srgbClr val="3F4854"/>
                 </a:solidFill>
@@ -5359,21 +6771,21 @@
       </p:sp>
       <p:cxnSp>
         <p:nvCxnSpPr>
-          <p:cNvPr id="40" name="led_r3" descr="Editable line; source id led_r3"/>
+          <p:cNvPr id="73" name="ledr_k2a" descr="Editable line; source id ledr_k2a"/>
           <p:cNvCxnSpPr/>
           <p:nvPr/>
         </p:nvCxnSpPr>
         <p:spPr>
           <a:xfrm>
-            <a:off x="5635535" y="3065181"/>
-            <a:ext cx="2254214" cy="0"/>
+            <a:off x="7318374" y="3619499"/>
+            <a:ext cx="47625" cy="47625"/>
           </a:xfrm>
           <a:prstGeom prst="line">
             <a:avLst/>
           </a:prstGeom>
-          <a:ln w="6872">
+          <a:ln w="12699">
             <a:solidFill>
-              <a:srgbClr val="DCE2E8"/>
+              <a:srgbClr val="4B5563"/>
             </a:solidFill>
           </a:ln>
           <a:effectLst/>
@@ -5393,16 +6805,100 @@
           </a:fontRef>
         </p:style>
       </p:cxnSp>
-      <p:sp>
-        <p:nvSpPr>
-          <p:cNvPr id="41" name="led_k3" descr="Editable text; source id led_k3"/>
+      <p:cxnSp>
+        <p:nvCxnSpPr>
+          <p:cNvPr id="74" name="ledr_k2b" descr="Editable line; source id ledr_k2b"/>
+          <p:cNvCxnSpPr/>
+          <p:nvPr/>
+        </p:nvCxnSpPr>
+        <p:spPr>
+          <a:xfrm flipV="1">
+            <a:off x="7365999" y="3571874"/>
+            <a:ext cx="79375" cy="95250"/>
+          </a:xfrm>
+          <a:prstGeom prst="line">
+            <a:avLst/>
+          </a:prstGeom>
+          <a:ln w="12699">
+            <a:solidFill>
+              <a:srgbClr val="4B5563"/>
+            </a:solidFill>
+          </a:ln>
+          <a:effectLst/>
+        </p:spPr>
+        <p:style>
+          <a:lnRef idx="2">
+            <a:schemeClr val="accent1"/>
+          </a:lnRef>
+          <a:fillRef idx="0">
+            <a:schemeClr val="accent1"/>
+          </a:fillRef>
+          <a:effectRef idx="0">
+            <a:schemeClr val="accent1"/>
+          </a:effectRef>
+          <a:fontRef idx="minor">
+            <a:schemeClr val="tx1"/>
+          </a:fontRef>
+        </p:style>
+      </p:cxnSp>
+      <p:sp>
+        <p:nvSpPr>
+          <p:cNvPr id="75" name="ledr_r3" descr="Editable shape; source id ledr_r3"/>
+          <p:cNvSpPr/>
+          <p:nvPr/>
+        </p:nvSpPr>
+        <p:spPr>
+          <a:xfrm>
+            <a:off x="4635499" y="4143374"/>
+            <a:ext cx="2889249" cy="754062"/>
+          </a:xfrm>
+          <a:prstGeom prst="roundRect">
+            <a:avLst>
+              <a:gd name="adj" fmla="val 6315"/>
+            </a:avLst>
+          </a:prstGeom>
+          <a:solidFill>
+            <a:srgbClr val="F7F9FB"/>
+          </a:solidFill>
+          <a:ln w="9524">
+            <a:solidFill>
+              <a:srgbClr val="CBD3DA"/>
+            </a:solidFill>
+          </a:ln>
+          <a:effectLst/>
+        </p:spPr>
+        <p:style>
+          <a:lnRef idx="1">
+            <a:schemeClr val="accent1"/>
+          </a:lnRef>
+          <a:fillRef idx="3">
+            <a:schemeClr val="accent1"/>
+          </a:fillRef>
+          <a:effectRef idx="0">
+            <a:schemeClr val="accent1"/>
+          </a:effectRef>
+          <a:fontRef idx="minor">
+            <a:schemeClr val="lt1"/>
+          </a:fontRef>
+        </p:style>
+        <p:txBody>
+          <a:bodyPr rtlCol="0" anchor="ctr"/>
+          <a:lstStyle/>
+          <a:p>
+            <a:pPr algn="ctr"/>
+          </a:p>
+        </p:txBody>
+      </p:sp>
+      <p:sp>
+        <p:nvSpPr>
+          <p:cNvPr id="76" name="ledr_r3_t" descr="Editable text; source id ledr_r3_t"/>
           <p:cNvSpPr txBox="1"/>
           <p:nvPr/>
         </p:nvSpPr>
         <p:spPr>
           <a:xfrm>
-            <a:off x="5635535" y="3092671"/>
-            <a:ext cx="2254214" cy="233668"/>
+            <a:off x="4691062" y="4175124"/>
+            <a:ext cx="2778124" cy="690562"/>
           </a:xfrm>
           <a:prstGeom prst="rect">
             <a:avLst/>
@@ -5416,9 +6912,9 @@
           </a:bodyPr>
           <a:lstStyle/>
           <a:p>
-            <a:pPr algn="l" fontAlgn="base">
+            <a:pPr algn="ctr" fontAlgn="base">
               <a:lnSpc>
-                <a:spcPts val="1745"/>
+                <a:spcPts val="1921"/>
               </a:lnSpc>
               <a:spcBef>
                 <a:spcPts val="0"/>
@@ -5426,7 +6922,7 @@
               <a:spcAft>
                 <a:spcPts val="0"/>
               </a:spcAft>
-              <a:defRPr sz="1190" b="0" i="0" lang="zh-CN" dirty="0">
+              <a:defRPr sz="1312" b="0" i="0" lang="zh-CN" dirty="0">
                 <a:solidFill>
                   <a:srgbClr val="3F4854"/>
                 </a:solidFill>
@@ -5436,7 +6932,7 @@
               </a:defRPr>
             </a:pPr>
             <a:r>
-              <a:rPr sz="1190" b="0" i="0" lang="zh-CN" dirty="0">
+              <a:rPr sz="1312" b="0" i="0" lang="zh-CN" dirty="0">
                 <a:solidFill>
                   <a:srgbClr val="3F4854"/>
                 </a:solidFill>
@@ -5451,21 +6947,21 @@
       </p:sp>
       <p:cxnSp>
         <p:nvCxnSpPr>
-          <p:cNvPr id="42" name="led_r4" descr="Editable line; source id led_r4"/>
+          <p:cNvPr id="77" name="ledr_k3a" descr="Editable line; source id ledr_k3a"/>
           <p:cNvCxnSpPr/>
           <p:nvPr/>
         </p:nvCxnSpPr>
         <p:spPr>
           <a:xfrm>
-            <a:off x="5635535" y="3573754"/>
-            <a:ext cx="2254214" cy="0"/>
+            <a:off x="7318374" y="4524374"/>
+            <a:ext cx="47625" cy="47625"/>
           </a:xfrm>
           <a:prstGeom prst="line">
             <a:avLst/>
           </a:prstGeom>
-          <a:ln w="6872">
+          <a:ln w="12699">
             <a:solidFill>
-              <a:srgbClr val="DCE2E8"/>
+              <a:srgbClr val="4B5563"/>
             </a:solidFill>
           </a:ln>
           <a:effectLst/>
@@ -5485,16 +6981,100 @@
           </a:fontRef>
         </p:style>
       </p:cxnSp>
-      <p:sp>
-        <p:nvSpPr>
-          <p:cNvPr id="43" name="led_k4" descr="Editable text; source id led_k4"/>
+      <p:cxnSp>
+        <p:nvCxnSpPr>
+          <p:cNvPr id="78" name="ledr_k3b" descr="Editable line; source id ledr_k3b"/>
+          <p:cNvCxnSpPr/>
+          <p:nvPr/>
+        </p:nvCxnSpPr>
+        <p:spPr>
+          <a:xfrm flipV="1">
+            <a:off x="7365999" y="4460874"/>
+            <a:ext cx="79375" cy="111125"/>
+          </a:xfrm>
+          <a:prstGeom prst="line">
+            <a:avLst/>
+          </a:prstGeom>
+          <a:ln w="12699">
+            <a:solidFill>
+              <a:srgbClr val="4B5563"/>
+            </a:solidFill>
+          </a:ln>
+          <a:effectLst/>
+        </p:spPr>
+        <p:style>
+          <a:lnRef idx="2">
+            <a:schemeClr val="accent1"/>
+          </a:lnRef>
+          <a:fillRef idx="0">
+            <a:schemeClr val="accent1"/>
+          </a:fillRef>
+          <a:effectRef idx="0">
+            <a:schemeClr val="accent1"/>
+          </a:effectRef>
+          <a:fontRef idx="minor">
+            <a:schemeClr val="tx1"/>
+          </a:fontRef>
+        </p:style>
+      </p:cxnSp>
+      <p:sp>
+        <p:nvSpPr>
+          <p:cNvPr id="79" name="ledr_r4" descr="Editable shape; source id ledr_r4"/>
+          <p:cNvSpPr/>
+          <p:nvPr/>
+        </p:nvSpPr>
+        <p:spPr>
+          <a:xfrm>
+            <a:off x="4635499" y="5040312"/>
+            <a:ext cx="2889249" cy="754062"/>
+          </a:xfrm>
+          <a:prstGeom prst="roundRect">
+            <a:avLst>
+              <a:gd name="adj" fmla="val 6315"/>
+            </a:avLst>
+          </a:prstGeom>
+          <a:solidFill>
+            <a:srgbClr val="F7F9FB"/>
+          </a:solidFill>
+          <a:ln w="9524">
+            <a:solidFill>
+              <a:srgbClr val="CBD3DA"/>
+            </a:solidFill>
+          </a:ln>
+          <a:effectLst/>
+        </p:spPr>
+        <p:style>
+          <a:lnRef idx="1">
+            <a:schemeClr val="accent1"/>
+          </a:lnRef>
+          <a:fillRef idx="3">
+            <a:schemeClr val="accent1"/>
+          </a:fillRef>
+          <a:effectRef idx="0">
+            <a:schemeClr val="accent1"/>
+          </a:effectRef>
+          <a:fontRef idx="minor">
+            <a:schemeClr val="lt1"/>
+          </a:fontRef>
+        </p:style>
+        <p:txBody>
+          <a:bodyPr rtlCol="0" anchor="ctr"/>
+          <a:lstStyle/>
+          <a:p>
+            <a:pPr algn="ctr"/>
+          </a:p>
+        </p:txBody>
+      </p:sp>
+      <p:sp>
+        <p:nvSpPr>
+          <p:cNvPr id="80" name="ledr_r4_t" descr="Editable text; source id ledr_r4_t"/>
           <p:cNvSpPr txBox="1"/>
           <p:nvPr/>
         </p:nvSpPr>
         <p:spPr>
           <a:xfrm>
-            <a:off x="5635535" y="3601244"/>
-            <a:ext cx="2254214" cy="233668"/>
+            <a:off x="4691062" y="5072062"/>
+            <a:ext cx="2778124" cy="690562"/>
           </a:xfrm>
           <a:prstGeom prst="rect">
             <a:avLst/>
@@ -5508,9 +7088,9 @@
           </a:bodyPr>
           <a:lstStyle/>
           <a:p>
-            <a:pPr algn="l" fontAlgn="base">
+            <a:pPr algn="ctr" fontAlgn="base">
               <a:lnSpc>
-                <a:spcPts val="1745"/>
+                <a:spcPts val="1921"/>
               </a:lnSpc>
               <a:spcBef>
                 <a:spcPts val="0"/>
@@ -5518,7 +7098,7 @@
               <a:spcAft>
                 <a:spcPts val="0"/>
               </a:spcAft>
-              <a:defRPr sz="1190" b="0" i="0" lang="zh-CN" dirty="0">
+              <a:defRPr sz="1312" b="0" i="0" lang="zh-CN" dirty="0">
                 <a:solidFill>
                   <a:srgbClr val="3F4854"/>
                 </a:solidFill>
@@ -5528,7 +7108,7 @@
               </a:defRPr>
             </a:pPr>
             <a:r>
-              <a:rPr sz="1190" b="0" i="0" lang="zh-CN" dirty="0">
+              <a:rPr sz="1312" b="0" i="0" lang="zh-CN" dirty="0">
                 <a:solidFill>
                   <a:srgbClr val="3F4854"/>
                 </a:solidFill>
@@ -5543,21 +7123,21 @@
       </p:sp>
       <p:cxnSp>
         <p:nvCxnSpPr>
-          <p:cNvPr id="44" name="led_r5" descr="Editable line; source id led_r5"/>
+          <p:cNvPr id="81" name="ledr_k4a" descr="Editable line; source id ledr_k4a"/>
           <p:cNvCxnSpPr/>
           <p:nvPr/>
         </p:nvCxnSpPr>
         <p:spPr>
           <a:xfrm>
-            <a:off x="5635535" y="4082326"/>
-            <a:ext cx="2254214" cy="0"/>
+            <a:off x="7318374" y="5413374"/>
+            <a:ext cx="47625" cy="47625"/>
           </a:xfrm>
           <a:prstGeom prst="line">
             <a:avLst/>
           </a:prstGeom>
-          <a:ln w="6872">
+          <a:ln w="12699">
             <a:solidFill>
-              <a:srgbClr val="DCE2E8"/>
+              <a:srgbClr val="4B5563"/>
             </a:solidFill>
           </a:ln>
           <a:effectLst/>
@@ -5577,16 +7157,100 @@
           </a:fontRef>
         </p:style>
       </p:cxnSp>
-      <p:sp>
-        <p:nvSpPr>
-          <p:cNvPr id="45" name="led_k5" descr="Editable text; source id led_k5"/>
+      <p:cxnSp>
+        <p:nvCxnSpPr>
+          <p:cNvPr id="82" name="ledr_k4b" descr="Editable line; source id ledr_k4b"/>
+          <p:cNvCxnSpPr/>
+          <p:nvPr/>
+        </p:nvCxnSpPr>
+        <p:spPr>
+          <a:xfrm flipV="1">
+            <a:off x="7365999" y="5365749"/>
+            <a:ext cx="79375" cy="95250"/>
+          </a:xfrm>
+          <a:prstGeom prst="line">
+            <a:avLst/>
+          </a:prstGeom>
+          <a:ln w="12699">
+            <a:solidFill>
+              <a:srgbClr val="4B5563"/>
+            </a:solidFill>
+          </a:ln>
+          <a:effectLst/>
+        </p:spPr>
+        <p:style>
+          <a:lnRef idx="2">
+            <a:schemeClr val="accent1"/>
+          </a:lnRef>
+          <a:fillRef idx="0">
+            <a:schemeClr val="accent1"/>
+          </a:fillRef>
+          <a:effectRef idx="0">
+            <a:schemeClr val="accent1"/>
+          </a:effectRef>
+          <a:fontRef idx="minor">
+            <a:schemeClr val="tx1"/>
+          </a:fontRef>
+        </p:style>
+      </p:cxnSp>
+      <p:sp>
+        <p:nvSpPr>
+          <p:cNvPr id="83" name="ledr_r5" descr="Editable shape; source id ledr_r5"/>
+          <p:cNvSpPr/>
+          <p:nvPr/>
+        </p:nvSpPr>
+        <p:spPr>
+          <a:xfrm>
+            <a:off x="4635499" y="5937249"/>
+            <a:ext cx="2889249" cy="754062"/>
+          </a:xfrm>
+          <a:prstGeom prst="roundRect">
+            <a:avLst>
+              <a:gd name="adj" fmla="val 6315"/>
+            </a:avLst>
+          </a:prstGeom>
+          <a:solidFill>
+            <a:srgbClr val="F7F9FB"/>
+          </a:solidFill>
+          <a:ln w="9524">
+            <a:solidFill>
+              <a:srgbClr val="CBD3DA"/>
+            </a:solidFill>
+          </a:ln>
+          <a:effectLst/>
+        </p:spPr>
+        <p:style>
+          <a:lnRef idx="1">
+            <a:schemeClr val="accent1"/>
+          </a:lnRef>
+          <a:fillRef idx="3">
+            <a:schemeClr val="accent1"/>
+          </a:fillRef>
+          <a:effectRef idx="0">
+            <a:schemeClr val="accent1"/>
+          </a:effectRef>
+          <a:fontRef idx="minor">
+            <a:schemeClr val="lt1"/>
+          </a:fontRef>
+        </p:style>
+        <p:txBody>
+          <a:bodyPr rtlCol="0" anchor="ctr"/>
+          <a:lstStyle/>
+          <a:p>
+            <a:pPr algn="ctr"/>
+          </a:p>
+        </p:txBody>
+      </p:sp>
+      <p:sp>
+        <p:nvSpPr>
+          <p:cNvPr id="84" name="ledr_r5_t" descr="Editable text; source id ledr_r5_t"/>
           <p:cNvSpPr txBox="1"/>
           <p:nvPr/>
         </p:nvSpPr>
         <p:spPr>
           <a:xfrm>
-            <a:off x="5635535" y="4109817"/>
-            <a:ext cx="2254214" cy="233668"/>
+            <a:off x="4691062" y="5968999"/>
+            <a:ext cx="2778124" cy="690562"/>
           </a:xfrm>
           <a:prstGeom prst="rect">
             <a:avLst/>
@@ -5600,9 +7264,9 @@
           </a:bodyPr>
           <a:lstStyle/>
           <a:p>
-            <a:pPr algn="l" fontAlgn="base">
+            <a:pPr algn="ctr" fontAlgn="base">
               <a:lnSpc>
-                <a:spcPts val="1745"/>
+                <a:spcPts val="1921"/>
               </a:lnSpc>
               <a:spcBef>
                 <a:spcPts val="0"/>
@@ -5610,7 +7274,7 @@
               <a:spcAft>
                 <a:spcPts val="0"/>
               </a:spcAft>
-              <a:defRPr sz="1190" b="0" i="0" lang="zh-CN" dirty="0">
+              <a:defRPr sz="1312" b="0" i="0" lang="zh-CN" dirty="0">
                 <a:solidFill>
                   <a:srgbClr val="3F4854"/>
                 </a:solidFill>
@@ -5620,7 +7284,7 @@
               </a:defRPr>
             </a:pPr>
             <a:r>
-              <a:rPr sz="1190" b="0" i="0" lang="zh-CN" dirty="0">
+              <a:rPr sz="1312" b="0" i="0" lang="zh-CN" dirty="0">
                 <a:solidFill>
                   <a:srgbClr val="3F4854"/>
                 </a:solidFill>
@@ -5635,19 +7299,19 @@
       </p:sp>
       <p:cxnSp>
         <p:nvCxnSpPr>
-          <p:cNvPr id="46" name="br0_0" descr="Editable line; source id br0_0"/>
+          <p:cNvPr id="85" name="ledr_k5a" descr="Editable line; source id ledr_k5a"/>
           <p:cNvCxnSpPr/>
           <p:nvPr/>
         </p:nvCxnSpPr>
         <p:spPr>
           <a:xfrm>
-            <a:off x="3230123" y="1188960"/>
-            <a:ext cx="288650" cy="0"/>
+            <a:off x="7318374" y="6318249"/>
+            <a:ext cx="47625" cy="47625"/>
           </a:xfrm>
           <a:prstGeom prst="line">
             <a:avLst/>
           </a:prstGeom>
-          <a:ln w="13745">
+          <a:ln w="12699">
             <a:solidFill>
               <a:srgbClr val="4B5563"/>
             </a:solidFill>
@@ -5671,19 +7335,19 @@
       </p:cxnSp>
       <p:cxnSp>
         <p:nvCxnSpPr>
-          <p:cNvPr id="47" name="br1_0" descr="Editable line; source id br1_0"/>
+          <p:cNvPr id="86" name="ledr_k5b" descr="Editable line; source id ledr_k5b"/>
           <p:cNvCxnSpPr/>
           <p:nvPr/>
         </p:nvCxnSpPr>
         <p:spPr>
-          <a:xfrm>
-            <a:off x="3230123" y="2068653"/>
-            <a:ext cx="288650" cy="0"/>
+          <a:xfrm flipV="1">
+            <a:off x="7365999" y="6254749"/>
+            <a:ext cx="79375" cy="111125"/>
           </a:xfrm>
           <a:prstGeom prst="line">
             <a:avLst/>
           </a:prstGeom>
-          <a:ln w="13745">
+          <a:ln w="12699">
             <a:solidFill>
               <a:srgbClr val="4B5563"/>
             </a:solidFill>
@@ -5705,124 +7369,64 @@
           </a:fontRef>
         </p:style>
       </p:cxnSp>
-      <p:cxnSp>
-        <p:nvCxnSpPr>
-          <p:cNvPr id="48" name="br2_0" descr="Editable line; source id br2_0"/>
-          <p:cNvCxnSpPr/>
-          <p:nvPr/>
-        </p:nvCxnSpPr>
-        <p:spPr>
-          <a:xfrm>
-            <a:off x="3230123" y="2948347"/>
-            <a:ext cx="288650" cy="0"/>
-          </a:xfrm>
-          <a:prstGeom prst="line">
-            <a:avLst/>
-          </a:prstGeom>
-          <a:ln w="13745">
+      <p:sp>
+        <p:nvSpPr>
+          <p:cNvPr id="87" name="u1" descr="Editable shape; source id u1"/>
+          <p:cNvSpPr/>
+          <p:nvPr/>
+        </p:nvSpPr>
+        <p:spPr>
+          <a:xfrm>
+            <a:off x="8477249" y="761999"/>
+            <a:ext cx="3254374" cy="984249"/>
+          </a:xfrm>
+          <a:prstGeom prst="roundRect">
+            <a:avLst>
+              <a:gd name="adj" fmla="val 7258"/>
+            </a:avLst>
+          </a:prstGeom>
+          <a:solidFill>
+            <a:srgbClr val="FFFFFF"/>
+          </a:solidFill>
+          <a:ln w="11112">
             <a:solidFill>
-              <a:srgbClr val="4B5563"/>
+              <a:srgbClr val="5B7592"/>
             </a:solidFill>
           </a:ln>
           <a:effectLst/>
         </p:spPr>
         <p:style>
-          <a:lnRef idx="2">
-            <a:schemeClr val="accent1"/>
-          </a:lnRef>
-          <a:fillRef idx="0">
-            <a:schemeClr val="accent1"/>
-          </a:fillRef>
-          <a:effectRef idx="0">
-            <a:schemeClr val="accent1"/>
-          </a:effectRef>
-          <a:fontRef idx="minor">
-            <a:schemeClr val="tx1"/>
-          </a:fontRef>
-        </p:style>
-      </p:cxnSp>
-      <p:cxnSp>
-        <p:nvCxnSpPr>
-          <p:cNvPr id="49" name="br3_0" descr="Editable line; source id br3_0"/>
-          <p:cNvCxnSpPr/>
-          <p:nvPr/>
-        </p:nvCxnSpPr>
-        <p:spPr>
-          <a:xfrm>
-            <a:off x="3230123" y="3828040"/>
-            <a:ext cx="288650" cy="0"/>
-          </a:xfrm>
-          <a:prstGeom prst="line">
-            <a:avLst/>
-          </a:prstGeom>
-          <a:ln w="13745">
-            <a:solidFill>
-              <a:srgbClr val="4B5563"/>
-            </a:solidFill>
-          </a:ln>
-          <a:effectLst/>
-        </p:spPr>
-        <p:style>
-          <a:lnRef idx="2">
-            <a:schemeClr val="accent1"/>
-          </a:lnRef>
-          <a:fillRef idx="0">
-            <a:schemeClr val="accent1"/>
-          </a:fillRef>
-          <a:effectRef idx="0">
-            <a:schemeClr val="accent1"/>
-          </a:effectRef>
-          <a:fontRef idx="minor">
-            <a:schemeClr val="tx1"/>
-          </a:fontRef>
-        </p:style>
-      </p:cxnSp>
-      <p:cxnSp>
-        <p:nvCxnSpPr>
-          <p:cNvPr id="50" name="brv_0" descr="Editable line; source id brv_0"/>
-          <p:cNvCxnSpPr/>
-          <p:nvPr/>
-        </p:nvCxnSpPr>
-        <p:spPr>
-          <a:xfrm>
-            <a:off x="3518773" y="1188960"/>
-            <a:ext cx="0" cy="2639080"/>
-          </a:xfrm>
-          <a:prstGeom prst="line">
-            <a:avLst/>
-          </a:prstGeom>
-          <a:ln w="13745">
-            <a:solidFill>
-              <a:srgbClr val="4B5563"/>
-            </a:solidFill>
-          </a:ln>
-          <a:effectLst/>
-        </p:spPr>
-        <p:style>
-          <a:lnRef idx="2">
-            <a:schemeClr val="accent1"/>
-          </a:lnRef>
-          <a:fillRef idx="0">
-            <a:schemeClr val="accent1"/>
-          </a:fillRef>
-          <a:effectRef idx="0">
-            <a:schemeClr val="accent1"/>
-          </a:effectRef>
-          <a:fontRef idx="minor">
-            <a:schemeClr val="tx1"/>
-          </a:fontRef>
-        </p:style>
-      </p:cxnSp>
-      <p:sp>
-        <p:nvSpPr>
-          <p:cNvPr id="51" name="brh_p" descr="Editable shape; source id brh_p"/>
+          <a:lnRef idx="1">
+            <a:schemeClr val="accent1"/>
+          </a:lnRef>
+          <a:fillRef idx="3">
+            <a:schemeClr val="accent1"/>
+          </a:fillRef>
+          <a:effectRef idx="0">
+            <a:schemeClr val="accent1"/>
+          </a:effectRef>
+          <a:fontRef idx="minor">
+            <a:schemeClr val="lt1"/>
+          </a:fontRef>
+        </p:style>
+        <p:txBody>
+          <a:bodyPr rtlCol="0" anchor="ctr"/>
+          <a:lstStyle/>
+          <a:p>
+            <a:pPr algn="ctr"/>
+          </a:p>
+        </p:txBody>
+      </p:sp>
+      <p:sp>
+        <p:nvSpPr>
+          <p:cNvPr id="88" name="u1_a" descr="Editable shape; source id u1_a"/>
           <p:cNvSpPr/>
           <p:nvPr/>
         </p:nvSpPr>
         <p:spPr>
           <a:xfrm>
-            <a:off x="3738696" y="2364175"/>
-            <a:ext cx="1532590" cy="281776"/>
+            <a:off x="8477249" y="761999"/>
+            <a:ext cx="3254374" cy="47624"/>
           </a:xfrm>
           <a:prstGeom prst="roundRect">
             <a:avLst>
@@ -5830,11 +7434,53 @@
             </a:avLst>
           </a:prstGeom>
           <a:solidFill>
-            <a:srgbClr val="FFF6E3"/>
+            <a:srgbClr val="5B7592"/>
           </a:solidFill>
-          <a:ln w="8247">
+          <a:ln>
+            <a:noFill/>
+          </a:ln>
+          <a:effectLst/>
+        </p:spPr>
+        <p:style>
+          <a:lnRef idx="1">
+            <a:schemeClr val="accent1"/>
+          </a:lnRef>
+          <a:fillRef idx="3">
+            <a:schemeClr val="accent1"/>
+          </a:fillRef>
+          <a:effectRef idx="0">
+            <a:schemeClr val="accent1"/>
+          </a:effectRef>
+          <a:fontRef idx="minor">
+            <a:schemeClr val="lt1"/>
+          </a:fontRef>
+        </p:style>
+        <p:txBody>
+          <a:bodyPr rtlCol="0" anchor="ctr"/>
+          <a:lstStyle/>
+          <a:p>
+            <a:pPr algn="ctr"/>
+          </a:p>
+        </p:txBody>
+      </p:sp>
+      <p:sp>
+        <p:nvSpPr>
+          <p:cNvPr id="89" name="u1_g_o" descr="Editable shape; source id u1_g_o"/>
+          <p:cNvSpPr/>
+          <p:nvPr/>
+        </p:nvSpPr>
+        <p:spPr>
+          <a:xfrm>
+            <a:off x="8691562" y="1182687"/>
+            <a:ext cx="182562" cy="182562"/>
+          </a:xfrm>
+          <a:prstGeom prst="ellipse">
+            <a:avLst/>
+          </a:prstGeom>
+          <a:noFill/>
+          <a:ln w="7937">
             <a:solidFill>
-              <a:srgbClr val="C48A24"/>
+              <a:srgbClr val="1F2937"/>
             </a:solidFill>
           </a:ln>
           <a:effectLst/>
@@ -5861,16 +7507,88 @@
           </a:p>
         </p:txBody>
       </p:sp>
-      <p:sp>
-        <p:nvSpPr>
-          <p:cNvPr id="52" name="brh_p_t" descr="Editable text; source id brh_p_t"/>
+      <p:cxnSp>
+        <p:nvCxnSpPr>
+          <p:cNvPr id="90" name="u1_g_a_0" descr="Editable line; source id u1_g_a_0"/>
+          <p:cNvCxnSpPr/>
+          <p:nvPr/>
+        </p:nvCxnSpPr>
+        <p:spPr>
+          <a:xfrm>
+            <a:off x="8842374" y="1198562"/>
+            <a:ext cx="39688" cy="15875"/>
+          </a:xfrm>
+          <a:prstGeom prst="line">
+            <a:avLst/>
+          </a:prstGeom>
+          <a:ln w="7937">
+            <a:solidFill>
+              <a:srgbClr val="1F2937"/>
+            </a:solidFill>
+          </a:ln>
+          <a:effectLst/>
+        </p:spPr>
+        <p:style>
+          <a:lnRef idx="2">
+            <a:schemeClr val="accent1"/>
+          </a:lnRef>
+          <a:fillRef idx="0">
+            <a:schemeClr val="accent1"/>
+          </a:fillRef>
+          <a:effectRef idx="0">
+            <a:schemeClr val="accent1"/>
+          </a:effectRef>
+          <a:fontRef idx="minor">
+            <a:schemeClr val="tx1"/>
+          </a:fontRef>
+        </p:style>
+      </p:cxnSp>
+      <p:cxnSp>
+        <p:nvCxnSpPr>
+          <p:cNvPr id="91" name="u1_g_a_1" descr="Editable line; source id u1_g_a_1"/>
+          <p:cNvCxnSpPr/>
+          <p:nvPr/>
+        </p:nvCxnSpPr>
+        <p:spPr>
+          <a:xfrm flipH="1">
+            <a:off x="8874124" y="1214437"/>
+            <a:ext cx="7938" cy="39687"/>
+          </a:xfrm>
+          <a:prstGeom prst="line">
+            <a:avLst/>
+          </a:prstGeom>
+          <a:ln w="7937">
+            <a:solidFill>
+              <a:srgbClr val="1F2937"/>
+            </a:solidFill>
+          </a:ln>
+          <a:effectLst/>
+        </p:spPr>
+        <p:style>
+          <a:lnRef idx="2">
+            <a:schemeClr val="accent1"/>
+          </a:lnRef>
+          <a:fillRef idx="0">
+            <a:schemeClr val="accent1"/>
+          </a:fillRef>
+          <a:effectRef idx="0">
+            <a:schemeClr val="accent1"/>
+          </a:effectRef>
+          <a:fontRef idx="minor">
+            <a:schemeClr val="tx1"/>
+          </a:fontRef>
+        </p:style>
+      </p:cxnSp>
+      <p:sp>
+        <p:nvSpPr>
+          <p:cNvPr id="92" name="u1_t" descr="Editable text; source id u1_t"/>
           <p:cNvSpPr txBox="1"/>
           <p:nvPr/>
         </p:nvSpPr>
         <p:spPr>
           <a:xfrm>
-            <a:off x="3821167" y="2405411"/>
-            <a:ext cx="1367648" cy="213050"/>
+            <a:off x="9001124" y="1135062"/>
+            <a:ext cx="2555874" cy="285749"/>
           </a:xfrm>
           <a:prstGeom prst="rect">
             <a:avLst/>
@@ -5884,9 +7602,9 @@
           </a:bodyPr>
           <a:lstStyle/>
           <a:p>
-            <a:pPr algn="ctr" fontAlgn="base">
+            <a:pPr algn="l" fontAlgn="base">
               <a:lnSpc>
-                <a:spcPts val="1420"/>
+                <a:spcPts val="2203"/>
               </a:lnSpc>
               <a:spcBef>
                 <a:spcPts val="0"/>
@@ -5894,9 +7612,9 @@
               <a:spcAft>
                 <a:spcPts val="0"/>
               </a:spcAft>
-              <a:defRPr sz="974" b="0" i="0" lang="zh-CN" dirty="0">
+              <a:defRPr sz="1513" b="1" i="0" lang="zh-CN" dirty="0">
                 <a:solidFill>
-                  <a:srgbClr val="7A5410"/>
+                  <a:srgbClr val="2B3E57"/>
                 </a:solidFill>
                 <a:latin typeface="Noto Sans CJK SC"/>
                 <a:ea typeface="Noto Sans CJK SC"/>
@@ -5904,56 +7622,988 @@
               </a:defRPr>
             </a:pPr>
             <a:r>
-              <a:rPr sz="974" b="0" i="0" lang="zh-CN" dirty="0">
+              <a:rPr sz="1513" b="1" i="0" lang="zh-CN" dirty="0">
                 <a:solidFill>
-                  <a:srgbClr val="7A5410"/>
+                  <a:srgbClr val="2B3E57"/>
                 </a:solidFill>
                 <a:latin typeface="Noto Sans CJK SC"/>
                 <a:ea typeface="Noto Sans CJK SC"/>
                 <a:cs typeface="Noto Sans CJK SC"/>
               </a:rPr>
-              <a:t>近邻条件</a:t>
+              <a:t>直接条件复现</a:t>
             </a:r>
+          </a:p>
+        </p:txBody>
+      </p:sp>
+      <p:sp>
+        <p:nvSpPr>
+          <p:cNvPr id="93" name="u2" descr="Editable shape; source id u2"/>
+          <p:cNvSpPr/>
+          <p:nvPr/>
+        </p:nvSpPr>
+        <p:spPr>
+          <a:xfrm>
+            <a:off x="8477249" y="2127249"/>
+            <a:ext cx="3254374" cy="984249"/>
+          </a:xfrm>
+          <a:prstGeom prst="roundRect">
+            <a:avLst>
+              <a:gd name="adj" fmla="val 7258"/>
+            </a:avLst>
+          </a:prstGeom>
+          <a:solidFill>
+            <a:srgbClr val="FFFFFF"/>
+          </a:solidFill>
+          <a:ln w="11112">
+            <a:solidFill>
+              <a:srgbClr val="5B7592"/>
+            </a:solidFill>
+          </a:ln>
+          <a:effectLst/>
+        </p:spPr>
+        <p:style>
+          <a:lnRef idx="1">
+            <a:schemeClr val="accent1"/>
+          </a:lnRef>
+          <a:fillRef idx="3">
+            <a:schemeClr val="accent1"/>
+          </a:fillRef>
+          <a:effectRef idx="0">
+            <a:schemeClr val="accent1"/>
+          </a:effectRef>
+          <a:fontRef idx="minor">
+            <a:schemeClr val="lt1"/>
+          </a:fontRef>
+        </p:style>
+        <p:txBody>
+          <a:bodyPr rtlCol="0" anchor="ctr"/>
+          <a:lstStyle/>
+          <a:p>
+            <a:pPr algn="ctr"/>
+          </a:p>
+        </p:txBody>
+      </p:sp>
+      <p:sp>
+        <p:nvSpPr>
+          <p:cNvPr id="94" name="u2_a" descr="Editable shape; source id u2_a"/>
+          <p:cNvSpPr/>
+          <p:nvPr/>
+        </p:nvSpPr>
+        <p:spPr>
+          <a:xfrm>
+            <a:off x="8477249" y="2127249"/>
+            <a:ext cx="3254374" cy="47624"/>
+          </a:xfrm>
+          <a:prstGeom prst="roundRect">
+            <a:avLst>
+              <a:gd name="adj" fmla="val 50000"/>
+            </a:avLst>
+          </a:prstGeom>
+          <a:solidFill>
+            <a:srgbClr val="5B7592"/>
+          </a:solidFill>
+          <a:ln>
+            <a:noFill/>
+          </a:ln>
+          <a:effectLst/>
+        </p:spPr>
+        <p:style>
+          <a:lnRef idx="1">
+            <a:schemeClr val="accent1"/>
+          </a:lnRef>
+          <a:fillRef idx="3">
+            <a:schemeClr val="accent1"/>
+          </a:fillRef>
+          <a:effectRef idx="0">
+            <a:schemeClr val="accent1"/>
+          </a:effectRef>
+          <a:fontRef idx="minor">
+            <a:schemeClr val="lt1"/>
+          </a:fontRef>
+        </p:style>
+        <p:txBody>
+          <a:bodyPr rtlCol="0" anchor="ctr"/>
+          <a:lstStyle/>
+          <a:p>
+            <a:pPr algn="ctr"/>
+          </a:p>
+        </p:txBody>
+      </p:sp>
+      <p:cxnSp>
+        <p:nvCxnSpPr>
+          <p:cNvPr id="95" name="u2_g_t_0" descr="Editable line; source id u2_g_t_0"/>
+          <p:cNvCxnSpPr/>
+          <p:nvPr/>
+        </p:nvCxnSpPr>
+        <p:spPr>
+          <a:xfrm>
+            <a:off x="8786812" y="2532062"/>
+            <a:ext cx="111125" cy="206375"/>
+          </a:xfrm>
+          <a:prstGeom prst="line">
+            <a:avLst/>
+          </a:prstGeom>
+          <a:ln w="7937">
+            <a:solidFill>
+              <a:srgbClr val="1F2937"/>
+            </a:solidFill>
+          </a:ln>
+          <a:effectLst/>
+        </p:spPr>
+        <p:style>
+          <a:lnRef idx="2">
+            <a:schemeClr val="accent1"/>
+          </a:lnRef>
+          <a:fillRef idx="0">
+            <a:schemeClr val="accent1"/>
+          </a:fillRef>
+          <a:effectRef idx="0">
+            <a:schemeClr val="accent1"/>
+          </a:effectRef>
+          <a:fontRef idx="minor">
+            <a:schemeClr val="tx1"/>
+          </a:fontRef>
+        </p:style>
+      </p:cxnSp>
+      <p:cxnSp>
+        <p:nvCxnSpPr>
+          <p:cNvPr id="96" name="u2_g_t_1" descr="Editable line; source id u2_g_t_1"/>
+          <p:cNvCxnSpPr/>
+          <p:nvPr/>
+        </p:nvCxnSpPr>
+        <p:spPr>
+          <a:xfrm flipH="1">
+            <a:off x="8675687" y="2738437"/>
+            <a:ext cx="222250" cy="0"/>
+          </a:xfrm>
+          <a:prstGeom prst="line">
+            <a:avLst/>
+          </a:prstGeom>
+          <a:ln w="7937">
+            <a:solidFill>
+              <a:srgbClr val="1F2937"/>
+            </a:solidFill>
+          </a:ln>
+          <a:effectLst/>
+        </p:spPr>
+        <p:style>
+          <a:lnRef idx="2">
+            <a:schemeClr val="accent1"/>
+          </a:lnRef>
+          <a:fillRef idx="0">
+            <a:schemeClr val="accent1"/>
+          </a:fillRef>
+          <a:effectRef idx="0">
+            <a:schemeClr val="accent1"/>
+          </a:effectRef>
+          <a:fontRef idx="minor">
+            <a:schemeClr val="tx1"/>
+          </a:fontRef>
+        </p:style>
+      </p:cxnSp>
+      <p:cxnSp>
+        <p:nvCxnSpPr>
+          <p:cNvPr id="97" name="u2_g_t_2" descr="Editable line; source id u2_g_t_2"/>
+          <p:cNvCxnSpPr/>
+          <p:nvPr/>
+        </p:nvCxnSpPr>
+        <p:spPr>
+          <a:xfrm flipV="1">
+            <a:off x="8675687" y="2532062"/>
+            <a:ext cx="111125" cy="206375"/>
+          </a:xfrm>
+          <a:prstGeom prst="line">
+            <a:avLst/>
+          </a:prstGeom>
+          <a:ln w="7937">
+            <a:solidFill>
+              <a:srgbClr val="1F2937"/>
+            </a:solidFill>
+          </a:ln>
+          <a:effectLst/>
+        </p:spPr>
+        <p:style>
+          <a:lnRef idx="2">
+            <a:schemeClr val="accent1"/>
+          </a:lnRef>
+          <a:fillRef idx="0">
+            <a:schemeClr val="accent1"/>
+          </a:fillRef>
+          <a:effectRef idx="0">
+            <a:schemeClr val="accent1"/>
+          </a:effectRef>
+          <a:fontRef idx="minor">
+            <a:schemeClr val="tx1"/>
+          </a:fontRef>
+        </p:style>
+      </p:cxnSp>
+      <p:cxnSp>
+        <p:nvCxnSpPr>
+          <p:cNvPr id="98" name="u2_g_i_0" descr="Editable line; source id u2_g_i_0"/>
+          <p:cNvCxnSpPr/>
+          <p:nvPr/>
+        </p:nvCxnSpPr>
+        <p:spPr>
+          <a:xfrm>
+            <a:off x="8786812" y="2532062"/>
+            <a:ext cx="31750" cy="134937"/>
+          </a:xfrm>
+          <a:prstGeom prst="line">
+            <a:avLst/>
+          </a:prstGeom>
+          <a:ln w="7937">
+            <a:solidFill>
+              <a:srgbClr val="1F2937"/>
+            </a:solidFill>
+          </a:ln>
+          <a:effectLst/>
+        </p:spPr>
+        <p:style>
+          <a:lnRef idx="2">
+            <a:schemeClr val="accent1"/>
+          </a:lnRef>
+          <a:fillRef idx="0">
+            <a:schemeClr val="accent1"/>
+          </a:fillRef>
+          <a:effectRef idx="0">
+            <a:schemeClr val="accent1"/>
+          </a:effectRef>
+          <a:fontRef idx="minor">
+            <a:schemeClr val="tx1"/>
+          </a:fontRef>
+        </p:style>
+      </p:cxnSp>
+      <p:cxnSp>
+        <p:nvCxnSpPr>
+          <p:cNvPr id="99" name="u2_g_i_1" descr="Editable line; source id u2_g_i_1"/>
+          <p:cNvCxnSpPr/>
+          <p:nvPr/>
+        </p:nvCxnSpPr>
+        <p:spPr>
+          <a:xfrm flipH="1">
+            <a:off x="8675687" y="2666999"/>
+            <a:ext cx="142875" cy="71438"/>
+          </a:xfrm>
+          <a:prstGeom prst="line">
+            <a:avLst/>
+          </a:prstGeom>
+          <a:ln w="7937">
+            <a:solidFill>
+              <a:srgbClr val="1F2937"/>
+            </a:solidFill>
+          </a:ln>
+          <a:effectLst/>
+        </p:spPr>
+        <p:style>
+          <a:lnRef idx="2">
+            <a:schemeClr val="accent1"/>
+          </a:lnRef>
+          <a:fillRef idx="0">
+            <a:schemeClr val="accent1"/>
+          </a:fillRef>
+          <a:effectRef idx="0">
+            <a:schemeClr val="accent1"/>
+          </a:effectRef>
+          <a:fontRef idx="minor">
+            <a:schemeClr val="tx1"/>
+          </a:fontRef>
+        </p:style>
+      </p:cxnSp>
+      <p:sp>
+        <p:nvSpPr>
+          <p:cNvPr id="100" name="u2_g_d" descr="Editable shape; source id u2_g_d"/>
+          <p:cNvSpPr/>
+          <p:nvPr/>
+        </p:nvSpPr>
+        <p:spPr>
+          <a:xfrm>
+            <a:off x="8818562" y="2674937"/>
+            <a:ext cx="31749" cy="31749"/>
+          </a:xfrm>
+          <a:prstGeom prst="ellipse">
+            <a:avLst/>
+          </a:prstGeom>
+          <a:solidFill>
+            <a:srgbClr val="1F2937"/>
+          </a:solidFill>
+          <a:ln>
+            <a:noFill/>
+          </a:ln>
+          <a:effectLst/>
+        </p:spPr>
+        <p:style>
+          <a:lnRef idx="1">
+            <a:schemeClr val="accent1"/>
+          </a:lnRef>
+          <a:fillRef idx="3">
+            <a:schemeClr val="accent1"/>
+          </a:fillRef>
+          <a:effectRef idx="0">
+            <a:schemeClr val="accent1"/>
+          </a:effectRef>
+          <a:fontRef idx="minor">
+            <a:schemeClr val="lt1"/>
+          </a:fontRef>
+        </p:style>
+        <p:txBody>
+          <a:bodyPr rtlCol="0" anchor="ctr"/>
+          <a:lstStyle/>
+          <a:p>
+            <a:pPr algn="ctr"/>
+          </a:p>
+        </p:txBody>
+      </p:sp>
+      <p:sp>
+        <p:nvSpPr>
+          <p:cNvPr id="101" name="u2_t" descr="Editable text; source id u2_t"/>
+          <p:cNvSpPr txBox="1"/>
+          <p:nvPr/>
+        </p:nvSpPr>
+        <p:spPr>
+          <a:xfrm>
+            <a:off x="9001124" y="2500312"/>
+            <a:ext cx="2555874" cy="285749"/>
+          </a:xfrm>
+          <a:prstGeom prst="rect">
+            <a:avLst/>
+          </a:prstGeom>
+          <a:noFill/>
+          <a:effectLst/>
+        </p:spPr>
+        <p:txBody>
+          <a:bodyPr wrap="none" anchor="ctr" tIns="0" rIns="0" bIns="0" lIns="0" anchorCtr="0" vertOverflow="overflow">
+            <a:noAutofit/>
+          </a:bodyPr>
+          <a:lstStyle/>
+          <a:p>
+            <a:pPr algn="l" fontAlgn="base">
+              <a:lnSpc>
+                <a:spcPts val="2203"/>
+              </a:lnSpc>
+              <a:spcBef>
+                <a:spcPts val="0"/>
+              </a:spcBef>
+              <a:spcAft>
+                <a:spcPts val="0"/>
+              </a:spcAft>
+              <a:defRPr sz="1513" b="1" i="0" lang="zh-CN" dirty="0">
+                <a:solidFill>
+                  <a:srgbClr val="2B3E57"/>
+                </a:solidFill>
+                <a:latin typeface="Noto Sans CJK SC"/>
+                <a:ea typeface="Noto Sans CJK SC"/>
+                <a:cs typeface="Noto Sans CJK SC"/>
+              </a:defRPr>
+            </a:pPr>
             <a:r>
-              <a:rPr sz="974" b="0" i="0" lang="zh-CN" dirty="0">
+              <a:rPr sz="1513" b="1" i="0" lang="zh-CN" dirty="0">
                 <a:solidFill>
-                  <a:srgbClr val="7A5410"/>
-                </a:solidFill>
-                <a:latin typeface="DejaVu Sans"/>
-                <a:ea typeface="DejaVu Sans"/>
-                <a:cs typeface="DejaVu Sans"/>
-              </a:rPr>
-              <a:t> ≠ </a:t>
-            </a:r>
-            <a:r>
-              <a:rPr sz="974" b="0" i="0" lang="zh-CN" dirty="0">
-                <a:solidFill>
-                  <a:srgbClr val="7A5410"/>
+                  <a:srgbClr val="2B3E57"/>
                 </a:solidFill>
                 <a:latin typeface="Noto Sans CJK SC"/>
                 <a:ea typeface="Noto Sans CJK SC"/>
                 <a:cs typeface="Noto Sans CJK SC"/>
               </a:rPr>
-              <a:t>已验证配方</a:t>
+              <a:t>谱系内相图与结构比较</a:t>
             </a:r>
+          </a:p>
+        </p:txBody>
+      </p:sp>
+      <p:sp>
+        <p:nvSpPr>
+          <p:cNvPr id="102" name="u3" descr="Editable shape; source id u3"/>
+          <p:cNvSpPr/>
+          <p:nvPr/>
+        </p:nvSpPr>
+        <p:spPr>
+          <a:xfrm>
+            <a:off x="8477249" y="3492499"/>
+            <a:ext cx="3254374" cy="984249"/>
+          </a:xfrm>
+          <a:prstGeom prst="roundRect">
+            <a:avLst>
+              <a:gd name="adj" fmla="val 7258"/>
+            </a:avLst>
+          </a:prstGeom>
+          <a:solidFill>
+            <a:srgbClr val="FFFFFF"/>
+          </a:solidFill>
+          <a:ln w="11112">
+            <a:solidFill>
+              <a:srgbClr val="5B7592"/>
+            </a:solidFill>
+          </a:ln>
+          <a:effectLst/>
+        </p:spPr>
+        <p:style>
+          <a:lnRef idx="1">
+            <a:schemeClr val="accent1"/>
+          </a:lnRef>
+          <a:fillRef idx="3">
+            <a:schemeClr val="accent1"/>
+          </a:fillRef>
+          <a:effectRef idx="0">
+            <a:schemeClr val="accent1"/>
+          </a:effectRef>
+          <a:fontRef idx="minor">
+            <a:schemeClr val="lt1"/>
+          </a:fontRef>
+        </p:style>
+        <p:txBody>
+          <a:bodyPr rtlCol="0" anchor="ctr"/>
+          <a:lstStyle/>
+          <a:p>
+            <a:pPr algn="ctr"/>
+          </a:p>
+        </p:txBody>
+      </p:sp>
+      <p:sp>
+        <p:nvSpPr>
+          <p:cNvPr id="103" name="u3_a" descr="Editable shape; source id u3_a"/>
+          <p:cNvSpPr/>
+          <p:nvPr/>
+        </p:nvSpPr>
+        <p:spPr>
+          <a:xfrm>
+            <a:off x="8477249" y="3492499"/>
+            <a:ext cx="3254374" cy="47624"/>
+          </a:xfrm>
+          <a:prstGeom prst="roundRect">
+            <a:avLst>
+              <a:gd name="adj" fmla="val 50000"/>
+            </a:avLst>
+          </a:prstGeom>
+          <a:solidFill>
+            <a:srgbClr val="5B7592"/>
+          </a:solidFill>
+          <a:ln>
+            <a:noFill/>
+          </a:ln>
+          <a:effectLst/>
+        </p:spPr>
+        <p:style>
+          <a:lnRef idx="1">
+            <a:schemeClr val="accent1"/>
+          </a:lnRef>
+          <a:fillRef idx="3">
+            <a:schemeClr val="accent1"/>
+          </a:fillRef>
+          <a:effectRef idx="0">
+            <a:schemeClr val="accent1"/>
+          </a:effectRef>
+          <a:fontRef idx="minor">
+            <a:schemeClr val="lt1"/>
+          </a:fontRef>
+        </p:style>
+        <p:txBody>
+          <a:bodyPr rtlCol="0" anchor="ctr"/>
+          <a:lstStyle/>
+          <a:p>
+            <a:pPr algn="ctr"/>
+          </a:p>
+        </p:txBody>
+      </p:sp>
+      <p:sp>
+        <p:nvSpPr>
+          <p:cNvPr id="104" name="u3_g_a" descr="Editable shape; source id u3_g_a"/>
+          <p:cNvSpPr/>
+          <p:nvPr/>
+        </p:nvSpPr>
+        <p:spPr>
+          <a:xfrm>
+            <a:off x="8747124" y="3897312"/>
+            <a:ext cx="87312" cy="55562"/>
+          </a:xfrm>
+          <a:prstGeom prst="rect">
+            <a:avLst/>
+          </a:prstGeom>
+          <a:noFill/>
+          <a:ln w="7937">
+            <a:solidFill>
+              <a:srgbClr val="1F2937"/>
+            </a:solidFill>
+          </a:ln>
+          <a:effectLst/>
+        </p:spPr>
+        <p:style>
+          <a:lnRef idx="1">
+            <a:schemeClr val="accent1"/>
+          </a:lnRef>
+          <a:fillRef idx="3">
+            <a:schemeClr val="accent1"/>
+          </a:fillRef>
+          <a:effectRef idx="0">
+            <a:schemeClr val="accent1"/>
+          </a:effectRef>
+          <a:fontRef idx="minor">
+            <a:schemeClr val="lt1"/>
+          </a:fontRef>
+        </p:style>
+        <p:txBody>
+          <a:bodyPr rtlCol="0" anchor="ctr"/>
+          <a:lstStyle/>
+          <a:p>
+            <a:pPr algn="ctr"/>
+          </a:p>
+        </p:txBody>
+      </p:sp>
+      <p:sp>
+        <p:nvSpPr>
+          <p:cNvPr id="105" name="u3_g_b" descr="Editable shape; source id u3_g_b"/>
+          <p:cNvSpPr/>
+          <p:nvPr/>
+        </p:nvSpPr>
+        <p:spPr>
+          <a:xfrm>
+            <a:off x="8675687" y="4040187"/>
+            <a:ext cx="87312" cy="55562"/>
+          </a:xfrm>
+          <a:prstGeom prst="rect">
+            <a:avLst/>
+          </a:prstGeom>
+          <a:noFill/>
+          <a:ln w="7937">
+            <a:solidFill>
+              <a:srgbClr val="1F2937"/>
+            </a:solidFill>
+          </a:ln>
+          <a:effectLst/>
+        </p:spPr>
+        <p:style>
+          <a:lnRef idx="1">
+            <a:schemeClr val="accent1"/>
+          </a:lnRef>
+          <a:fillRef idx="3">
+            <a:schemeClr val="accent1"/>
+          </a:fillRef>
+          <a:effectRef idx="0">
+            <a:schemeClr val="accent1"/>
+          </a:effectRef>
+          <a:fontRef idx="minor">
+            <a:schemeClr val="lt1"/>
+          </a:fontRef>
+        </p:style>
+        <p:txBody>
+          <a:bodyPr rtlCol="0" anchor="ctr"/>
+          <a:lstStyle/>
+          <a:p>
+            <a:pPr algn="ctr"/>
+          </a:p>
+        </p:txBody>
+      </p:sp>
+      <p:sp>
+        <p:nvSpPr>
+          <p:cNvPr id="106" name="u3_g_c" descr="Editable shape; source id u3_g_c"/>
+          <p:cNvSpPr/>
+          <p:nvPr/>
+        </p:nvSpPr>
+        <p:spPr>
+          <a:xfrm>
+            <a:off x="8810624" y="4040187"/>
+            <a:ext cx="87312" cy="55562"/>
+          </a:xfrm>
+          <a:prstGeom prst="rect">
+            <a:avLst/>
+          </a:prstGeom>
+          <a:noFill/>
+          <a:ln w="7937">
+            <a:solidFill>
+              <a:srgbClr val="1F2937"/>
+            </a:solidFill>
+          </a:ln>
+          <a:effectLst/>
+        </p:spPr>
+        <p:style>
+          <a:lnRef idx="1">
+            <a:schemeClr val="accent1"/>
+          </a:lnRef>
+          <a:fillRef idx="3">
+            <a:schemeClr val="accent1"/>
+          </a:fillRef>
+          <a:effectRef idx="0">
+            <a:schemeClr val="accent1"/>
+          </a:effectRef>
+          <a:fontRef idx="minor">
+            <a:schemeClr val="lt1"/>
+          </a:fontRef>
+        </p:style>
+        <p:txBody>
+          <a:bodyPr rtlCol="0" anchor="ctr"/>
+          <a:lstStyle/>
+          <a:p>
+            <a:pPr algn="ctr"/>
           </a:p>
         </p:txBody>
       </p:sp>
       <p:cxnSp>
         <p:nvCxnSpPr>
-          <p:cNvPr id="53" name="brh_0" descr="Editable line; source id brh_0"/>
+          <p:cNvPr id="107" name="u3_g_s" descr="Editable line; source id u3_g_s"/>
           <p:cNvCxnSpPr/>
           <p:nvPr/>
         </p:nvCxnSpPr>
         <p:spPr>
           <a:xfrm>
-            <a:off x="3518773" y="2508500"/>
-            <a:ext cx="192433" cy="0"/>
+            <a:off x="8786812" y="3960812"/>
+            <a:ext cx="0" cy="39687"/>
           </a:xfrm>
           <a:prstGeom prst="line">
             <a:avLst/>
           </a:prstGeom>
-          <a:ln w="13745">
+          <a:ln w="7937">
+            <a:solidFill>
+              <a:srgbClr val="1F2937"/>
+            </a:solidFill>
+          </a:ln>
+          <a:effectLst/>
+        </p:spPr>
+        <p:style>
+          <a:lnRef idx="2">
+            <a:schemeClr val="accent1"/>
+          </a:lnRef>
+          <a:fillRef idx="0">
+            <a:schemeClr val="accent1"/>
+          </a:fillRef>
+          <a:effectRef idx="0">
+            <a:schemeClr val="accent1"/>
+          </a:effectRef>
+          <a:fontRef idx="minor">
+            <a:schemeClr val="tx1"/>
+          </a:fontRef>
+        </p:style>
+      </p:cxnSp>
+      <p:cxnSp>
+        <p:nvCxnSpPr>
+          <p:cNvPr id="108" name="u3_g_h" descr="Editable line; source id u3_g_h"/>
+          <p:cNvCxnSpPr/>
+          <p:nvPr/>
+        </p:nvCxnSpPr>
+        <p:spPr>
+          <a:xfrm>
+            <a:off x="8715374" y="4000499"/>
+            <a:ext cx="142875" cy="0"/>
+          </a:xfrm>
+          <a:prstGeom prst="line">
+            <a:avLst/>
+          </a:prstGeom>
+          <a:ln w="7937">
+            <a:solidFill>
+              <a:srgbClr val="1F2937"/>
+            </a:solidFill>
+          </a:ln>
+          <a:effectLst/>
+        </p:spPr>
+        <p:style>
+          <a:lnRef idx="2">
+            <a:schemeClr val="accent1"/>
+          </a:lnRef>
+          <a:fillRef idx="0">
+            <a:schemeClr val="accent1"/>
+          </a:fillRef>
+          <a:effectRef idx="0">
+            <a:schemeClr val="accent1"/>
+          </a:effectRef>
+          <a:fontRef idx="minor">
+            <a:schemeClr val="tx1"/>
+          </a:fontRef>
+        </p:style>
+      </p:cxnSp>
+      <p:cxnSp>
+        <p:nvCxnSpPr>
+          <p:cNvPr id="109" name="u3_g_l" descr="Editable line; source id u3_g_l"/>
+          <p:cNvCxnSpPr/>
+          <p:nvPr/>
+        </p:nvCxnSpPr>
+        <p:spPr>
+          <a:xfrm>
+            <a:off x="8715374" y="4000499"/>
+            <a:ext cx="0" cy="39688"/>
+          </a:xfrm>
+          <a:prstGeom prst="line">
+            <a:avLst/>
+          </a:prstGeom>
+          <a:ln w="7937">
+            <a:solidFill>
+              <a:srgbClr val="1F2937"/>
+            </a:solidFill>
+          </a:ln>
+          <a:effectLst/>
+        </p:spPr>
+        <p:style>
+          <a:lnRef idx="2">
+            <a:schemeClr val="accent1"/>
+          </a:lnRef>
+          <a:fillRef idx="0">
+            <a:schemeClr val="accent1"/>
+          </a:fillRef>
+          <a:effectRef idx="0">
+            <a:schemeClr val="accent1"/>
+          </a:effectRef>
+          <a:fontRef idx="minor">
+            <a:schemeClr val="tx1"/>
+          </a:fontRef>
+        </p:style>
+      </p:cxnSp>
+      <p:cxnSp>
+        <p:nvCxnSpPr>
+          <p:cNvPr id="110" name="u3_g_r" descr="Editable line; source id u3_g_r"/>
+          <p:cNvCxnSpPr/>
+          <p:nvPr/>
+        </p:nvCxnSpPr>
+        <p:spPr>
+          <a:xfrm>
+            <a:off x="8858249" y="4000499"/>
+            <a:ext cx="0" cy="39688"/>
+          </a:xfrm>
+          <a:prstGeom prst="line">
+            <a:avLst/>
+          </a:prstGeom>
+          <a:ln w="7937">
+            <a:solidFill>
+              <a:srgbClr val="1F2937"/>
+            </a:solidFill>
+          </a:ln>
+          <a:effectLst/>
+        </p:spPr>
+        <p:style>
+          <a:lnRef idx="2">
+            <a:schemeClr val="accent1"/>
+          </a:lnRef>
+          <a:fillRef idx="0">
+            <a:schemeClr val="accent1"/>
+          </a:fillRef>
+          <a:effectRef idx="0">
+            <a:schemeClr val="accent1"/>
+          </a:effectRef>
+          <a:fontRef idx="minor">
+            <a:schemeClr val="tx1"/>
+          </a:fontRef>
+        </p:style>
+      </p:cxnSp>
+      <p:sp>
+        <p:nvSpPr>
+          <p:cNvPr id="111" name="u3_t" descr="Editable text; source id u3_t"/>
+          <p:cNvSpPr txBox="1"/>
+          <p:nvPr/>
+        </p:nvSpPr>
+        <p:spPr>
+          <a:xfrm>
+            <a:off x="9001124" y="3865562"/>
+            <a:ext cx="2555874" cy="285749"/>
+          </a:xfrm>
+          <a:prstGeom prst="rect">
+            <a:avLst/>
+          </a:prstGeom>
+          <a:noFill/>
+          <a:effectLst/>
+        </p:spPr>
+        <p:txBody>
+          <a:bodyPr wrap="none" anchor="ctr" tIns="0" rIns="0" bIns="0" lIns="0" anchorCtr="0" vertOverflow="overflow">
+            <a:noAutofit/>
+          </a:bodyPr>
+          <a:lstStyle/>
+          <a:p>
+            <a:pPr algn="l" fontAlgn="base">
+              <a:lnSpc>
+                <a:spcPts val="2203"/>
+              </a:lnSpc>
+              <a:spcBef>
+                <a:spcPts val="0"/>
+              </a:spcBef>
+              <a:spcAft>
+                <a:spcPts val="0"/>
+              </a:spcAft>
+              <a:defRPr sz="1513" b="1" i="0" lang="zh-CN" dirty="0">
+                <a:solidFill>
+                  <a:srgbClr val="2B3E57"/>
+                </a:solidFill>
+                <a:latin typeface="Noto Sans CJK SC"/>
+                <a:ea typeface="Noto Sans CJK SC"/>
+                <a:cs typeface="Noto Sans CJK SC"/>
+              </a:defRPr>
+            </a:pPr>
+            <a:r>
+              <a:rPr sz="1513" b="1" i="0" lang="zh-CN" dirty="0">
+                <a:solidFill>
+                  <a:srgbClr val="2B3E57"/>
+                </a:solidFill>
+                <a:latin typeface="Noto Sans CJK SC"/>
+                <a:ea typeface="Noto Sans CJK SC"/>
+                <a:cs typeface="Noto Sans CJK SC"/>
+              </a:rPr>
+              <a:t>方法与变量结构</a:t>
+            </a:r>
+          </a:p>
+        </p:txBody>
+      </p:sp>
+      <p:sp>
+        <p:nvSpPr>
+          <p:cNvPr id="112" name="u4" descr="Editable shape; source id u4"/>
+          <p:cNvSpPr/>
+          <p:nvPr/>
+        </p:nvSpPr>
+        <p:spPr>
+          <a:xfrm>
+            <a:off x="8477249" y="5937249"/>
+            <a:ext cx="3254374" cy="984249"/>
+          </a:xfrm>
+          <a:prstGeom prst="roundRect">
+            <a:avLst>
+              <a:gd name="adj" fmla="val 7258"/>
+            </a:avLst>
+          </a:prstGeom>
+          <a:solidFill>
+            <a:srgbClr val="FFFFFF"/>
+          </a:solidFill>
+          <a:ln w="11112">
+            <a:solidFill>
+              <a:srgbClr val="9AA3AB"/>
+            </a:solidFill>
+            <a:custDash>
+              <a:ds d="857143" sp="571429"/>
+            </a:custDash>
+          </a:ln>
+          <a:effectLst/>
+        </p:spPr>
+        <p:style>
+          <a:lnRef idx="1">
+            <a:schemeClr val="accent1"/>
+          </a:lnRef>
+          <a:fillRef idx="3">
+            <a:schemeClr val="accent1"/>
+          </a:fillRef>
+          <a:effectRef idx="0">
+            <a:schemeClr val="accent1"/>
+          </a:effectRef>
+          <a:fontRef idx="minor">
+            <a:schemeClr val="lt1"/>
+          </a:fontRef>
+        </p:style>
+        <p:txBody>
+          <a:bodyPr rtlCol="0" anchor="ctr"/>
+          <a:lstStyle/>
+          <a:p>
+            <a:pPr algn="ctr"/>
+          </a:p>
+        </p:txBody>
+      </p:sp>
+      <p:sp>
+        <p:nvSpPr>
+          <p:cNvPr id="113" name="u4_g_b" descr="Editable shape; source id u4_g_b"/>
+          <p:cNvSpPr/>
+          <p:nvPr/>
+        </p:nvSpPr>
+        <p:spPr>
+          <a:xfrm>
+            <a:off x="8683624" y="6349999"/>
+            <a:ext cx="206374" cy="166687"/>
+          </a:xfrm>
+          <a:prstGeom prst="rect">
+            <a:avLst/>
+          </a:prstGeom>
+          <a:noFill/>
+          <a:ln w="7937">
+            <a:solidFill>
+              <a:srgbClr val="1F2937"/>
+            </a:solidFill>
+            <a:custDash>
+              <a:ds d="238000" sp="204000"/>
+            </a:custDash>
+          </a:ln>
+          <a:effectLst/>
+        </p:spPr>
+        <p:style>
+          <a:lnRef idx="1">
+            <a:schemeClr val="accent1"/>
+          </a:lnRef>
+          <a:fillRef idx="3">
+            <a:schemeClr val="accent1"/>
+          </a:fillRef>
+          <a:effectRef idx="0">
+            <a:schemeClr val="accent1"/>
+          </a:effectRef>
+          <a:fontRef idx="minor">
+            <a:schemeClr val="lt1"/>
+          </a:fontRef>
+        </p:style>
+        <p:txBody>
+          <a:bodyPr rtlCol="0" anchor="ctr"/>
+          <a:lstStyle/>
+          <a:p>
+            <a:pPr algn="ctr"/>
+          </a:p>
+        </p:txBody>
+      </p:sp>
+      <p:sp>
+        <p:nvSpPr>
+          <p:cNvPr id="114" name="u4_t" descr="Editable text; source id u4_t"/>
+          <p:cNvSpPr txBox="1"/>
+          <p:nvPr/>
+        </p:nvSpPr>
+        <p:spPr>
+          <a:xfrm>
+            <a:off x="9001124" y="6286499"/>
+            <a:ext cx="2555874" cy="285749"/>
+          </a:xfrm>
+          <a:prstGeom prst="rect">
+            <a:avLst/>
+          </a:prstGeom>
+          <a:noFill/>
+          <a:effectLst/>
+        </p:spPr>
+        <p:txBody>
+          <a:bodyPr wrap="none" anchor="ctr" tIns="0" rIns="0" bIns="0" lIns="0" anchorCtr="0" vertOverflow="overflow">
+            <a:noAutofit/>
+          </a:bodyPr>
+          <a:lstStyle/>
+          <a:p>
+            <a:pPr algn="l" fontAlgn="base">
+              <a:lnSpc>
+                <a:spcPts val="2203"/>
+              </a:lnSpc>
+              <a:spcBef>
+                <a:spcPts val="0"/>
+              </a:spcBef>
+              <a:spcAft>
+                <a:spcPts val="0"/>
+              </a:spcAft>
+              <a:defRPr sz="1513" b="1" i="0" lang="zh-CN" dirty="0">
+                <a:solidFill>
+                  <a:srgbClr val="5B6570"/>
+                </a:solidFill>
+                <a:latin typeface="Noto Sans CJK SC"/>
+                <a:ea typeface="Noto Sans CJK SC"/>
+                <a:cs typeface="Noto Sans CJK SC"/>
+              </a:defRPr>
+            </a:pPr>
+            <a:r>
+              <a:rPr sz="1513" b="1" i="0" lang="zh-CN" dirty="0">
+                <a:solidFill>
+                  <a:srgbClr val="5B6570"/>
+                </a:solidFill>
+                <a:latin typeface="Noto Sans CJK SC"/>
+                <a:ea typeface="Noto Sans CJK SC"/>
+                <a:cs typeface="Noto Sans CJK SC"/>
+              </a:rPr>
+              <a:t>划定研究范围</a:t>
+            </a:r>
+          </a:p>
+        </p:txBody>
+      </p:sp>
+      <p:cxnSp>
+        <p:nvCxnSpPr>
+          <p:cNvPr id="115" name="br0_0" descr="Editable line; source id br0_0"/>
+          <p:cNvCxnSpPr/>
+          <p:nvPr/>
+        </p:nvCxnSpPr>
+        <p:spPr>
+          <a:xfrm>
+            <a:off x="3794124" y="1254124"/>
+            <a:ext cx="222250" cy="0"/>
+          </a:xfrm>
+          <a:prstGeom prst="line">
+            <a:avLst/>
+          </a:prstGeom>
+          <a:ln w="14287">
             <a:solidFill>
               <a:srgbClr val="4B5563"/>
             </a:solidFill>
@@ -5975,16 +8625,160 @@
           </a:fontRef>
         </p:style>
       </p:cxnSp>
-      <p:sp>
-        <p:nvSpPr>
-          <p:cNvPr id="54" name="brh_1" descr="Editable line; source id brh_1"/>
+      <p:cxnSp>
+        <p:nvCxnSpPr>
+          <p:cNvPr id="116" name="br1_0" descr="Editable line; source id br1_0"/>
+          <p:cNvCxnSpPr/>
+          <p:nvPr/>
+        </p:nvCxnSpPr>
+        <p:spPr>
+          <a:xfrm>
+            <a:off x="3794124" y="2428874"/>
+            <a:ext cx="222250" cy="0"/>
+          </a:xfrm>
+          <a:prstGeom prst="line">
+            <a:avLst/>
+          </a:prstGeom>
+          <a:ln w="14287">
+            <a:solidFill>
+              <a:srgbClr val="4B5563"/>
+            </a:solidFill>
+          </a:ln>
+          <a:effectLst/>
+        </p:spPr>
+        <p:style>
+          <a:lnRef idx="2">
+            <a:schemeClr val="accent1"/>
+          </a:lnRef>
+          <a:fillRef idx="0">
+            <a:schemeClr val="accent1"/>
+          </a:fillRef>
+          <a:effectRef idx="0">
+            <a:schemeClr val="accent1"/>
+          </a:effectRef>
+          <a:fontRef idx="minor">
+            <a:schemeClr val="tx1"/>
+          </a:fontRef>
+        </p:style>
+      </p:cxnSp>
+      <p:cxnSp>
+        <p:nvCxnSpPr>
+          <p:cNvPr id="117" name="br2_0" descr="Editable line; source id br2_0"/>
+          <p:cNvCxnSpPr/>
+          <p:nvPr/>
+        </p:nvCxnSpPr>
+        <p:spPr>
+          <a:xfrm>
+            <a:off x="3794124" y="3603624"/>
+            <a:ext cx="222250" cy="0"/>
+          </a:xfrm>
+          <a:prstGeom prst="line">
+            <a:avLst/>
+          </a:prstGeom>
+          <a:ln w="14287">
+            <a:solidFill>
+              <a:srgbClr val="4B5563"/>
+            </a:solidFill>
+          </a:ln>
+          <a:effectLst/>
+        </p:spPr>
+        <p:style>
+          <a:lnRef idx="2">
+            <a:schemeClr val="accent1"/>
+          </a:lnRef>
+          <a:fillRef idx="0">
+            <a:schemeClr val="accent1"/>
+          </a:fillRef>
+          <a:effectRef idx="0">
+            <a:schemeClr val="accent1"/>
+          </a:effectRef>
+          <a:fontRef idx="minor">
+            <a:schemeClr val="tx1"/>
+          </a:fontRef>
+        </p:style>
+      </p:cxnSp>
+      <p:cxnSp>
+        <p:nvCxnSpPr>
+          <p:cNvPr id="118" name="br3_0" descr="Editable line; source id br3_0"/>
+          <p:cNvCxnSpPr/>
+          <p:nvPr/>
+        </p:nvCxnSpPr>
+        <p:spPr>
+          <a:xfrm>
+            <a:off x="3794124" y="4778374"/>
+            <a:ext cx="222250" cy="0"/>
+          </a:xfrm>
+          <a:prstGeom prst="line">
+            <a:avLst/>
+          </a:prstGeom>
+          <a:ln w="14287">
+            <a:solidFill>
+              <a:srgbClr val="4B5563"/>
+            </a:solidFill>
+          </a:ln>
+          <a:effectLst/>
+        </p:spPr>
+        <p:style>
+          <a:lnRef idx="2">
+            <a:schemeClr val="accent1"/>
+          </a:lnRef>
+          <a:fillRef idx="0">
+            <a:schemeClr val="accent1"/>
+          </a:fillRef>
+          <a:effectRef idx="0">
+            <a:schemeClr val="accent1"/>
+          </a:effectRef>
+          <a:fontRef idx="minor">
+            <a:schemeClr val="tx1"/>
+          </a:fontRef>
+        </p:style>
+      </p:cxnSp>
+      <p:cxnSp>
+        <p:nvCxnSpPr>
+          <p:cNvPr id="119" name="brv_0" descr="Editable line; source id brv_0"/>
+          <p:cNvCxnSpPr/>
+          <p:nvPr/>
+        </p:nvCxnSpPr>
+        <p:spPr>
+          <a:xfrm>
+            <a:off x="4016374" y="1254124"/>
+            <a:ext cx="0" cy="3524250"/>
+          </a:xfrm>
+          <a:prstGeom prst="line">
+            <a:avLst/>
+          </a:prstGeom>
+          <a:ln w="14287">
+            <a:solidFill>
+              <a:srgbClr val="4B5563"/>
+            </a:solidFill>
+          </a:ln>
+          <a:effectLst/>
+        </p:spPr>
+        <p:style>
+          <a:lnRef idx="2">
+            <a:schemeClr val="accent1"/>
+          </a:lnRef>
+          <a:fillRef idx="0">
+            <a:schemeClr val="accent1"/>
+          </a:fillRef>
+          <a:effectRef idx="0">
+            <a:schemeClr val="accent1"/>
+          </a:effectRef>
+          <a:fontRef idx="minor">
+            <a:schemeClr val="tx1"/>
+          </a:fontRef>
+        </p:style>
+      </p:cxnSp>
+      <p:sp>
+        <p:nvSpPr>
+          <p:cNvPr id="120" name="brh_0" descr="Editable line; source id brh_0"/>
           <p:cNvSpPr/>
           <p:nvPr/>
         </p:nvSpPr>
         <p:spPr>
           <a:xfrm>
-            <a:off x="5305650" y="2470701"/>
-            <a:ext cx="178688" cy="75599"/>
+            <a:off x="4016375" y="2976562"/>
+            <a:ext cx="396875" cy="79375"/>
           </a:xfrm>
           <a:custGeom>
             <a:avLst/>
@@ -5993,27 +8787,27 @@
             <a:cxnLst/>
             <a:rect l="l" t="t" r="r" b="b"/>
             <a:pathLst>
-              <a:path w="26000" h="11000">
+              <a:path w="50000" h="10000">
                 <a:moveTo>
-                  <a:pt x="0" y="4500"/>
+                  <a:pt x="0" y="4100"/>
                 </a:moveTo>
                 <a:lnTo>
-                  <a:pt x="13000" y="4500"/>
+                  <a:pt x="38000" y="4100"/>
                 </a:lnTo>
                 <a:lnTo>
-                  <a:pt x="13000" y="0"/>
+                  <a:pt x="38000" y="0"/>
                 </a:lnTo>
                 <a:lnTo>
-                  <a:pt x="26000" y="5500"/>
+                  <a:pt x="50000" y="5000"/>
                 </a:lnTo>
                 <a:lnTo>
-                  <a:pt x="13000" y="11000"/>
+                  <a:pt x="38000" y="10000"/>
                 </a:lnTo>
                 <a:lnTo>
-                  <a:pt x="13000" y="6500"/>
+                  <a:pt x="38000" y="5900"/>
                 </a:lnTo>
                 <a:lnTo>
-                  <a:pt x="0" y="6500"/>
+                  <a:pt x="0" y="5900"/>
                 </a:lnTo>
                 <a:close/>
               </a:path>
@@ -6049,678 +8843,21 @@
           </a:p>
         </p:txBody>
       </p:sp>
-      <p:sp>
-        <p:nvSpPr>
-          <p:cNvPr id="55" name="u1" descr="Editable shape; source id u1"/>
-          <p:cNvSpPr/>
-          <p:nvPr/>
-        </p:nvSpPr>
-        <p:spPr>
-          <a:xfrm>
-            <a:off x="8934385" y="810967"/>
-            <a:ext cx="2859003" cy="755986"/>
-          </a:xfrm>
-          <a:prstGeom prst="roundRect">
-            <a:avLst>
-              <a:gd name="adj" fmla="val 9090"/>
-            </a:avLst>
-          </a:prstGeom>
-          <a:solidFill>
-            <a:srgbClr val="FFFFFF"/>
-          </a:solidFill>
-          <a:ln w="10308">
-            <a:solidFill>
-              <a:srgbClr val="5B7592"/>
-            </a:solidFill>
-          </a:ln>
-          <a:effectLst/>
-        </p:spPr>
-        <p:style>
-          <a:lnRef idx="1">
-            <a:schemeClr val="accent1"/>
-          </a:lnRef>
-          <a:fillRef idx="3">
-            <a:schemeClr val="accent1"/>
-          </a:fillRef>
-          <a:effectRef idx="0">
-            <a:schemeClr val="accent1"/>
-          </a:effectRef>
-          <a:fontRef idx="minor">
-            <a:schemeClr val="lt1"/>
-          </a:fontRef>
-        </p:style>
-        <p:txBody>
-          <a:bodyPr rtlCol="0" anchor="ctr"/>
-          <a:lstStyle/>
-          <a:p>
-            <a:pPr algn="ctr"/>
-          </a:p>
-        </p:txBody>
-      </p:sp>
-      <p:sp>
-        <p:nvSpPr>
-          <p:cNvPr id="56" name="u1_s" descr="Editable shape; source id u1_s"/>
-          <p:cNvSpPr/>
-          <p:nvPr/>
-        </p:nvSpPr>
-        <p:spPr>
-          <a:xfrm>
-            <a:off x="8934385" y="810967"/>
-            <a:ext cx="2859003" cy="54980"/>
-          </a:xfrm>
-          <a:prstGeom prst="roundRect">
-            <a:avLst>
-              <a:gd name="adj" fmla="val 50000"/>
-            </a:avLst>
-          </a:prstGeom>
-          <a:solidFill>
-            <a:srgbClr val="5B7592"/>
-          </a:solidFill>
-          <a:ln>
-            <a:noFill/>
-          </a:ln>
-          <a:effectLst/>
-        </p:spPr>
-        <p:style>
-          <a:lnRef idx="1">
-            <a:schemeClr val="accent1"/>
-          </a:lnRef>
-          <a:fillRef idx="3">
-            <a:schemeClr val="accent1"/>
-          </a:fillRef>
-          <a:effectRef idx="0">
-            <a:schemeClr val="accent1"/>
-          </a:effectRef>
-          <a:fontRef idx="minor">
-            <a:schemeClr val="lt1"/>
-          </a:fontRef>
-        </p:style>
-        <p:txBody>
-          <a:bodyPr rtlCol="0" anchor="ctr"/>
-          <a:lstStyle/>
-          <a:p>
-            <a:pPr algn="ctr"/>
-          </a:p>
-        </p:txBody>
-      </p:sp>
-      <p:pic>
-        <p:nvPicPr>
-          <p:cNvPr id="57" name="u1_i" descr="exact crop of the generated raster (line motif)"/>
-          <p:cNvPicPr>
-            <a:picLocks noChangeAspect="1"/>
-          </p:cNvPicPr>
-          <p:nvPr/>
-        </p:nvPicPr>
-        <p:blipFill>
-          <a:blip r:embed="rId8"/>
-          <a:stretch>
-            <a:fillRect/>
-          </a:stretch>
-        </p:blipFill>
-        <p:spPr>
-          <a:xfrm>
-            <a:off x="9116290" y="1030890"/>
-            <a:ext cx="295960" cy="302394"/>
-          </a:xfrm>
-          <a:prstGeom prst="rect">
-            <a:avLst/>
-          </a:prstGeom>
-          <a:effectLst/>
-        </p:spPr>
-      </p:pic>
-      <p:sp>
-        <p:nvSpPr>
-          <p:cNvPr id="58" name="u1_t" descr="Editable text; source id u1_t"/>
-          <p:cNvSpPr txBox="1"/>
-          <p:nvPr/>
-        </p:nvSpPr>
-        <p:spPr>
-          <a:xfrm>
-            <a:off x="9497938" y="1044635"/>
-            <a:ext cx="2116762" cy="268031"/>
-          </a:xfrm>
-          <a:prstGeom prst="rect">
-            <a:avLst/>
-          </a:prstGeom>
-          <a:noFill/>
-          <a:effectLst/>
-        </p:spPr>
-        <p:txBody>
-          <a:bodyPr wrap="none" anchor="ctr" tIns="0" rIns="0" bIns="0" lIns="0" anchorCtr="0" vertOverflow="overflow">
-            <a:noAutofit/>
-          </a:bodyPr>
-          <a:lstStyle/>
-          <a:p>
-            <a:pPr algn="l" fontAlgn="base">
-              <a:lnSpc>
-                <a:spcPts val="2002"/>
-              </a:lnSpc>
-              <a:spcBef>
-                <a:spcPts val="0"/>
-              </a:spcBef>
-              <a:spcAft>
-                <a:spcPts val="0"/>
-              </a:spcAft>
-              <a:defRPr sz="1366" b="1" i="0" lang="zh-CN" dirty="0">
-                <a:solidFill>
-                  <a:srgbClr val="2B3E57"/>
-                </a:solidFill>
-                <a:latin typeface="Noto Sans CJK SC"/>
-                <a:ea typeface="Noto Sans CJK SC"/>
-                <a:cs typeface="Noto Sans CJK SC"/>
-              </a:defRPr>
-            </a:pPr>
-            <a:r>
-              <a:rPr sz="1366" b="1" i="0" lang="zh-CN" dirty="0">
-                <a:solidFill>
-                  <a:srgbClr val="2B3E57"/>
-                </a:solidFill>
-                <a:latin typeface="Noto Sans CJK SC"/>
-                <a:ea typeface="Noto Sans CJK SC"/>
-                <a:cs typeface="Noto Sans CJK SC"/>
-              </a:rPr>
-              <a:t>直接条件复现</a:t>
-            </a:r>
-          </a:p>
-        </p:txBody>
-      </p:sp>
-      <p:sp>
-        <p:nvSpPr>
-          <p:cNvPr id="59" name="u2" descr="Editable shape; source id u2"/>
-          <p:cNvSpPr/>
-          <p:nvPr/>
-        </p:nvSpPr>
-        <p:spPr>
-          <a:xfrm>
-            <a:off x="8934385" y="2130507"/>
-            <a:ext cx="2859003" cy="755986"/>
-          </a:xfrm>
-          <a:prstGeom prst="roundRect">
-            <a:avLst>
-              <a:gd name="adj" fmla="val 9090"/>
-            </a:avLst>
-          </a:prstGeom>
-          <a:solidFill>
-            <a:srgbClr val="FFFFFF"/>
-          </a:solidFill>
-          <a:ln w="10308">
-            <a:solidFill>
-              <a:srgbClr val="5B7592"/>
-            </a:solidFill>
-          </a:ln>
-          <a:effectLst/>
-        </p:spPr>
-        <p:style>
-          <a:lnRef idx="1">
-            <a:schemeClr val="accent1"/>
-          </a:lnRef>
-          <a:fillRef idx="3">
-            <a:schemeClr val="accent1"/>
-          </a:fillRef>
-          <a:effectRef idx="0">
-            <a:schemeClr val="accent1"/>
-          </a:effectRef>
-          <a:fontRef idx="minor">
-            <a:schemeClr val="lt1"/>
-          </a:fontRef>
-        </p:style>
-        <p:txBody>
-          <a:bodyPr rtlCol="0" anchor="ctr"/>
-          <a:lstStyle/>
-          <a:p>
-            <a:pPr algn="ctr"/>
-          </a:p>
-        </p:txBody>
-      </p:sp>
-      <p:sp>
-        <p:nvSpPr>
-          <p:cNvPr id="60" name="u2_s" descr="Editable shape; source id u2_s"/>
-          <p:cNvSpPr/>
-          <p:nvPr/>
-        </p:nvSpPr>
-        <p:spPr>
-          <a:xfrm>
-            <a:off x="8934385" y="2130507"/>
-            <a:ext cx="2859003" cy="54980"/>
-          </a:xfrm>
-          <a:prstGeom prst="roundRect">
-            <a:avLst>
-              <a:gd name="adj" fmla="val 50000"/>
-            </a:avLst>
-          </a:prstGeom>
-          <a:solidFill>
-            <a:srgbClr val="5B7592"/>
-          </a:solidFill>
-          <a:ln>
-            <a:noFill/>
-          </a:ln>
-          <a:effectLst/>
-        </p:spPr>
-        <p:style>
-          <a:lnRef idx="1">
-            <a:schemeClr val="accent1"/>
-          </a:lnRef>
-          <a:fillRef idx="3">
-            <a:schemeClr val="accent1"/>
-          </a:fillRef>
-          <a:effectRef idx="0">
-            <a:schemeClr val="accent1"/>
-          </a:effectRef>
-          <a:fontRef idx="minor">
-            <a:schemeClr val="lt1"/>
-          </a:fontRef>
-        </p:style>
-        <p:txBody>
-          <a:bodyPr rtlCol="0" anchor="ctr"/>
-          <a:lstStyle/>
-          <a:p>
-            <a:pPr algn="ctr"/>
-          </a:p>
-        </p:txBody>
-      </p:sp>
-      <p:pic>
-        <p:nvPicPr>
-          <p:cNvPr id="61" name="u2_i" descr="exact crop of the generated raster (line motif)"/>
-          <p:cNvPicPr>
-            <a:picLocks noChangeAspect="1"/>
-          </p:cNvPicPr>
-          <p:nvPr/>
-        </p:nvPicPr>
-        <p:blipFill>
-          <a:blip r:embed="rId9"/>
-          <a:stretch>
-            <a:fillRect/>
-          </a:stretch>
-        </p:blipFill>
-        <p:spPr>
-          <a:xfrm>
-            <a:off x="9113073" y="2365400"/>
-            <a:ext cx="302394" cy="272454"/>
-          </a:xfrm>
-          <a:prstGeom prst="rect">
-            <a:avLst/>
-          </a:prstGeom>
-          <a:effectLst/>
-        </p:spPr>
-      </p:pic>
-      <p:sp>
-        <p:nvSpPr>
-          <p:cNvPr id="62" name="u2_t" descr="Editable text; source id u2_t"/>
-          <p:cNvSpPr txBox="1"/>
-          <p:nvPr/>
-        </p:nvSpPr>
-        <p:spPr>
-          <a:xfrm>
-            <a:off x="9497938" y="2364175"/>
-            <a:ext cx="2116762" cy="268031"/>
-          </a:xfrm>
-          <a:prstGeom prst="rect">
-            <a:avLst/>
-          </a:prstGeom>
-          <a:noFill/>
-          <a:effectLst/>
-        </p:spPr>
-        <p:txBody>
-          <a:bodyPr wrap="none" anchor="ctr" tIns="0" rIns="0" bIns="0" lIns="0" anchorCtr="0" vertOverflow="overflow">
-            <a:noAutofit/>
-          </a:bodyPr>
-          <a:lstStyle/>
-          <a:p>
-            <a:pPr algn="l" fontAlgn="base">
-              <a:lnSpc>
-                <a:spcPts val="2002"/>
-              </a:lnSpc>
-              <a:spcBef>
-                <a:spcPts val="0"/>
-              </a:spcBef>
-              <a:spcAft>
-                <a:spcPts val="0"/>
-              </a:spcAft>
-              <a:defRPr sz="1366" b="1" i="0" lang="zh-CN" dirty="0">
-                <a:solidFill>
-                  <a:srgbClr val="2B3E57"/>
-                </a:solidFill>
-                <a:latin typeface="Noto Sans CJK SC"/>
-                <a:ea typeface="Noto Sans CJK SC"/>
-                <a:cs typeface="Noto Sans CJK SC"/>
-              </a:defRPr>
-            </a:pPr>
-            <a:r>
-              <a:rPr sz="1366" b="1" i="0" lang="zh-CN" dirty="0">
-                <a:solidFill>
-                  <a:srgbClr val="2B3E57"/>
-                </a:solidFill>
-                <a:latin typeface="Noto Sans CJK SC"/>
-                <a:ea typeface="Noto Sans CJK SC"/>
-                <a:cs typeface="Noto Sans CJK SC"/>
-              </a:rPr>
-              <a:t>谱系内相图与结构比较</a:t>
-            </a:r>
-          </a:p>
-        </p:txBody>
-      </p:sp>
-      <p:sp>
-        <p:nvSpPr>
-          <p:cNvPr id="63" name="u3" descr="Editable shape; source id u3"/>
-          <p:cNvSpPr/>
-          <p:nvPr/>
-        </p:nvSpPr>
-        <p:spPr>
-          <a:xfrm>
-            <a:off x="8934385" y="3450047"/>
-            <a:ext cx="2859003" cy="755986"/>
-          </a:xfrm>
-          <a:prstGeom prst="roundRect">
-            <a:avLst>
-              <a:gd name="adj" fmla="val 9090"/>
-            </a:avLst>
-          </a:prstGeom>
-          <a:solidFill>
-            <a:srgbClr val="FFFFFF"/>
-          </a:solidFill>
-          <a:ln w="10308">
-            <a:solidFill>
-              <a:srgbClr val="5B7592"/>
-            </a:solidFill>
-          </a:ln>
-          <a:effectLst/>
-        </p:spPr>
-        <p:style>
-          <a:lnRef idx="1">
-            <a:schemeClr val="accent1"/>
-          </a:lnRef>
-          <a:fillRef idx="3">
-            <a:schemeClr val="accent1"/>
-          </a:fillRef>
-          <a:effectRef idx="0">
-            <a:schemeClr val="accent1"/>
-          </a:effectRef>
-          <a:fontRef idx="minor">
-            <a:schemeClr val="lt1"/>
-          </a:fontRef>
-        </p:style>
-        <p:txBody>
-          <a:bodyPr rtlCol="0" anchor="ctr"/>
-          <a:lstStyle/>
-          <a:p>
-            <a:pPr algn="ctr"/>
-          </a:p>
-        </p:txBody>
-      </p:sp>
-      <p:sp>
-        <p:nvSpPr>
-          <p:cNvPr id="64" name="u3_s" descr="Editable shape; source id u3_s"/>
-          <p:cNvSpPr/>
-          <p:nvPr/>
-        </p:nvSpPr>
-        <p:spPr>
-          <a:xfrm>
-            <a:off x="8934385" y="3450047"/>
-            <a:ext cx="2859003" cy="54980"/>
-          </a:xfrm>
-          <a:prstGeom prst="roundRect">
-            <a:avLst>
-              <a:gd name="adj" fmla="val 50000"/>
-            </a:avLst>
-          </a:prstGeom>
-          <a:solidFill>
-            <a:srgbClr val="5B7592"/>
-          </a:solidFill>
-          <a:ln>
-            <a:noFill/>
-          </a:ln>
-          <a:effectLst/>
-        </p:spPr>
-        <p:style>
-          <a:lnRef idx="1">
-            <a:schemeClr val="accent1"/>
-          </a:lnRef>
-          <a:fillRef idx="3">
-            <a:schemeClr val="accent1"/>
-          </a:fillRef>
-          <a:effectRef idx="0">
-            <a:schemeClr val="accent1"/>
-          </a:effectRef>
-          <a:fontRef idx="minor">
-            <a:schemeClr val="lt1"/>
-          </a:fontRef>
-        </p:style>
-        <p:txBody>
-          <a:bodyPr rtlCol="0" anchor="ctr"/>
-          <a:lstStyle/>
-          <a:p>
-            <a:pPr algn="ctr"/>
-          </a:p>
-        </p:txBody>
-      </p:sp>
-      <p:pic>
-        <p:nvPicPr>
-          <p:cNvPr id="65" name="u3_i" descr="exact crop of the generated raster (line motif)"/>
-          <p:cNvPicPr>
-            <a:picLocks noChangeAspect="1"/>
-          </p:cNvPicPr>
-          <p:nvPr/>
-        </p:nvPicPr>
-        <p:blipFill>
-          <a:blip r:embed="rId10"/>
-          <a:stretch>
-            <a:fillRect/>
-          </a:stretch>
-        </p:blipFill>
-        <p:spPr>
-          <a:xfrm>
-            <a:off x="9113073" y="3674796"/>
-            <a:ext cx="302394" cy="292743"/>
-          </a:xfrm>
-          <a:prstGeom prst="rect">
-            <a:avLst/>
-          </a:prstGeom>
-          <a:effectLst/>
-        </p:spPr>
-      </p:pic>
-      <p:sp>
-        <p:nvSpPr>
-          <p:cNvPr id="66" name="u3_t" descr="Editable text; source id u3_t"/>
-          <p:cNvSpPr txBox="1"/>
-          <p:nvPr/>
-        </p:nvSpPr>
-        <p:spPr>
-          <a:xfrm>
-            <a:off x="9497938" y="3683715"/>
-            <a:ext cx="2116762" cy="268031"/>
-          </a:xfrm>
-          <a:prstGeom prst="rect">
-            <a:avLst/>
-          </a:prstGeom>
-          <a:noFill/>
-          <a:effectLst/>
-        </p:spPr>
-        <p:txBody>
-          <a:bodyPr wrap="none" anchor="ctr" tIns="0" rIns="0" bIns="0" lIns="0" anchorCtr="0" vertOverflow="overflow">
-            <a:noAutofit/>
-          </a:bodyPr>
-          <a:lstStyle/>
-          <a:p>
-            <a:pPr algn="l" fontAlgn="base">
-              <a:lnSpc>
-                <a:spcPts val="2002"/>
-              </a:lnSpc>
-              <a:spcBef>
-                <a:spcPts val="0"/>
-              </a:spcBef>
-              <a:spcAft>
-                <a:spcPts val="0"/>
-              </a:spcAft>
-              <a:defRPr sz="1366" b="1" i="0" lang="zh-CN" dirty="0">
-                <a:solidFill>
-                  <a:srgbClr val="2B3E57"/>
-                </a:solidFill>
-                <a:latin typeface="Noto Sans CJK SC"/>
-                <a:ea typeface="Noto Sans CJK SC"/>
-                <a:cs typeface="Noto Sans CJK SC"/>
-              </a:defRPr>
-            </a:pPr>
-            <a:r>
-              <a:rPr sz="1366" b="1" i="0" lang="zh-CN" dirty="0">
-                <a:solidFill>
-                  <a:srgbClr val="2B3E57"/>
-                </a:solidFill>
-                <a:latin typeface="Noto Sans CJK SC"/>
-                <a:ea typeface="Noto Sans CJK SC"/>
-                <a:cs typeface="Noto Sans CJK SC"/>
-              </a:rPr>
-              <a:t>方法与变量结构</a:t>
-            </a:r>
-          </a:p>
-        </p:txBody>
-      </p:sp>
-      <p:sp>
-        <p:nvSpPr>
-          <p:cNvPr id="67" name="u4" descr="Editable shape; source id u4"/>
-          <p:cNvSpPr/>
-          <p:nvPr/>
-        </p:nvSpPr>
-        <p:spPr>
-          <a:xfrm>
-            <a:off x="8934385" y="4535918"/>
-            <a:ext cx="2859003" cy="755986"/>
-          </a:xfrm>
-          <a:prstGeom prst="roundRect">
-            <a:avLst>
-              <a:gd name="adj" fmla="val 9090"/>
-            </a:avLst>
-          </a:prstGeom>
-          <a:solidFill>
-            <a:srgbClr val="FFFFFF"/>
-          </a:solidFill>
-          <a:ln w="10308">
-            <a:solidFill>
-              <a:srgbClr val="9AA3AB"/>
-            </a:solidFill>
-            <a:custDash>
-              <a:ds d="866667" sp="533333"/>
-            </a:custDash>
-          </a:ln>
-          <a:effectLst/>
-        </p:spPr>
-        <p:style>
-          <a:lnRef idx="1">
-            <a:schemeClr val="accent1"/>
-          </a:lnRef>
-          <a:fillRef idx="3">
-            <a:schemeClr val="accent1"/>
-          </a:fillRef>
-          <a:effectRef idx="0">
-            <a:schemeClr val="accent1"/>
-          </a:effectRef>
-          <a:fontRef idx="minor">
-            <a:schemeClr val="lt1"/>
-          </a:fontRef>
-        </p:style>
-        <p:txBody>
-          <a:bodyPr rtlCol="0" anchor="ctr"/>
-          <a:lstStyle/>
-          <a:p>
-            <a:pPr algn="ctr"/>
-          </a:p>
-        </p:txBody>
-      </p:sp>
-      <p:pic>
-        <p:nvPicPr>
-          <p:cNvPr id="68" name="u4_i" descr="exact crop of the generated raster (line motif)"/>
-          <p:cNvPicPr>
-            <a:picLocks noChangeAspect="1"/>
-          </p:cNvPicPr>
-          <p:nvPr/>
-        </p:nvPicPr>
-        <p:blipFill>
-          <a:blip r:embed="rId11"/>
-          <a:stretch>
-            <a:fillRect/>
-          </a:stretch>
-        </p:blipFill>
-        <p:spPr>
-          <a:xfrm>
-            <a:off x="9113073" y="4714008"/>
-            <a:ext cx="302394" cy="276099"/>
-          </a:xfrm>
-          <a:prstGeom prst="rect">
-            <a:avLst/>
-          </a:prstGeom>
-          <a:effectLst/>
-        </p:spPr>
-      </p:pic>
-      <p:sp>
-        <p:nvSpPr>
-          <p:cNvPr id="69" name="u4_t" descr="Editable text; source id u4_t"/>
-          <p:cNvSpPr txBox="1"/>
-          <p:nvPr/>
-        </p:nvSpPr>
-        <p:spPr>
-          <a:xfrm>
-            <a:off x="9497938" y="4714606"/>
-            <a:ext cx="2116762" cy="268031"/>
-          </a:xfrm>
-          <a:prstGeom prst="rect">
-            <a:avLst/>
-          </a:prstGeom>
-          <a:noFill/>
-          <a:effectLst/>
-        </p:spPr>
-        <p:txBody>
-          <a:bodyPr wrap="none" anchor="ctr" tIns="0" rIns="0" bIns="0" lIns="0" anchorCtr="0" vertOverflow="overflow">
-            <a:noAutofit/>
-          </a:bodyPr>
-          <a:lstStyle/>
-          <a:p>
-            <a:pPr algn="l" fontAlgn="base">
-              <a:lnSpc>
-                <a:spcPts val="2002"/>
-              </a:lnSpc>
-              <a:spcBef>
-                <a:spcPts val="0"/>
-              </a:spcBef>
-              <a:spcAft>
-                <a:spcPts val="0"/>
-              </a:spcAft>
-              <a:defRPr sz="1366" b="1" i="0" lang="zh-CN" dirty="0">
-                <a:solidFill>
-                  <a:srgbClr val="5B6570"/>
-                </a:solidFill>
-                <a:latin typeface="Noto Sans CJK SC"/>
-                <a:ea typeface="Noto Sans CJK SC"/>
-                <a:cs typeface="Noto Sans CJK SC"/>
-              </a:defRPr>
-            </a:pPr>
-            <a:r>
-              <a:rPr sz="1366" b="1" i="0" lang="zh-CN" dirty="0">
-                <a:solidFill>
-                  <a:srgbClr val="5B6570"/>
-                </a:solidFill>
-                <a:latin typeface="Noto Sans CJK SC"/>
-                <a:ea typeface="Noto Sans CJK SC"/>
-                <a:cs typeface="Noto Sans CJK SC"/>
-              </a:rPr>
-              <a:t>划定研究范围</a:t>
-            </a:r>
-          </a:p>
-        </p:txBody>
-      </p:sp>
       <p:cxnSp>
         <p:nvCxnSpPr>
-          <p:cNvPr id="70" name="fan0_0" descr="Editable line; source id fan0_0"/>
+          <p:cNvPr id="121" name="fan0_0" descr="Editable line; source id fan0_0"/>
           <p:cNvCxnSpPr/>
           <p:nvPr/>
         </p:nvCxnSpPr>
         <p:spPr>
           <a:xfrm>
-            <a:off x="8027201" y="2508500"/>
-            <a:ext cx="323012" cy="0"/>
+            <a:off x="7746999" y="3016249"/>
+            <a:ext cx="269875" cy="0"/>
           </a:xfrm>
           <a:prstGeom prst="line">
             <a:avLst/>
           </a:prstGeom>
-          <a:ln w="13745">
+          <a:ln w="14287">
             <a:solidFill>
               <a:srgbClr val="4B5563"/>
             </a:solidFill>
@@ -6744,19 +8881,19 @@
       </p:cxnSp>
       <p:cxnSp>
         <p:nvCxnSpPr>
-          <p:cNvPr id="71" name="fanv_0" descr="Editable line; source id fanv_0"/>
+          <p:cNvPr id="122" name="fanv_0" descr="Editable line; source id fanv_0"/>
           <p:cNvCxnSpPr/>
           <p:nvPr/>
         </p:nvCxnSpPr>
         <p:spPr>
           <a:xfrm>
-            <a:off x="8350213" y="1188960"/>
-            <a:ext cx="0" cy="2639080"/>
+            <a:off x="8016874" y="1254124"/>
+            <a:ext cx="0" cy="2730500"/>
           </a:xfrm>
           <a:prstGeom prst="line">
             <a:avLst/>
           </a:prstGeom>
-          <a:ln w="13745">
+          <a:ln w="14287">
             <a:solidFill>
               <a:srgbClr val="4B5563"/>
             </a:solidFill>
@@ -6780,14 +8917,14 @@
       </p:cxnSp>
       <p:sp>
         <p:nvSpPr>
-          <p:cNvPr id="72" name="fan1_0" descr="Editable line; source id fan1_0"/>
+          <p:cNvPr id="123" name="fan1_0" descr="Editable line; source id fan1_0"/>
           <p:cNvSpPr/>
           <p:nvPr/>
         </p:nvSpPr>
         <p:spPr>
           <a:xfrm>
-            <a:off x="8350214" y="1151161"/>
-            <a:ext cx="570426" cy="75599"/>
+            <a:off x="8016875" y="1214437"/>
+            <a:ext cx="428625" cy="79375"/>
           </a:xfrm>
           <a:custGeom>
             <a:avLst/>
@@ -6796,27 +8933,27 @@
             <a:cxnLst/>
             <a:rect l="l" t="t" r="r" b="b"/>
             <a:pathLst>
-              <a:path w="83000" h="11000">
+              <a:path w="54000" h="10000">
                 <a:moveTo>
-                  <a:pt x="0" y="4500"/>
+                  <a:pt x="0" y="4100"/>
                 </a:moveTo>
                 <a:lnTo>
-                  <a:pt x="70000" y="4500"/>
+                  <a:pt x="42000" y="4100"/>
                 </a:lnTo>
                 <a:lnTo>
-                  <a:pt x="70000" y="0"/>
+                  <a:pt x="42000" y="0"/>
                 </a:lnTo>
                 <a:lnTo>
-                  <a:pt x="83000" y="5500"/>
+                  <a:pt x="54000" y="5000"/>
                 </a:lnTo>
                 <a:lnTo>
-                  <a:pt x="70000" y="11000"/>
+                  <a:pt x="42000" y="10000"/>
                 </a:lnTo>
                 <a:lnTo>
-                  <a:pt x="70000" y="6500"/>
+                  <a:pt x="42000" y="5900"/>
                 </a:lnTo>
                 <a:lnTo>
-                  <a:pt x="0" y="6500"/>
+                  <a:pt x="0" y="5900"/>
                 </a:lnTo>
                 <a:close/>
               </a:path>
@@ -6854,14 +8991,14 @@
       </p:sp>
       <p:sp>
         <p:nvSpPr>
-          <p:cNvPr id="73" name="fan2_0" descr="Editable line; source id fan2_0"/>
+          <p:cNvPr id="124" name="fan2_0" descr="Editable line; source id fan2_0"/>
           <p:cNvSpPr/>
           <p:nvPr/>
         </p:nvSpPr>
         <p:spPr>
           <a:xfrm>
-            <a:off x="8350214" y="2470701"/>
-            <a:ext cx="570426" cy="75599"/>
+            <a:off x="8016875" y="2579687"/>
+            <a:ext cx="428625" cy="79375"/>
           </a:xfrm>
           <a:custGeom>
             <a:avLst/>
@@ -6870,27 +9007,27 @@
             <a:cxnLst/>
             <a:rect l="l" t="t" r="r" b="b"/>
             <a:pathLst>
-              <a:path w="83000" h="11000">
+              <a:path w="54000" h="10000">
                 <a:moveTo>
-                  <a:pt x="0" y="4500"/>
+                  <a:pt x="0" y="4100"/>
                 </a:moveTo>
                 <a:lnTo>
-                  <a:pt x="70000" y="4500"/>
+                  <a:pt x="42000" y="4100"/>
                 </a:lnTo>
                 <a:lnTo>
-                  <a:pt x="70000" y="0"/>
+                  <a:pt x="42000" y="0"/>
                 </a:lnTo>
                 <a:lnTo>
-                  <a:pt x="83000" y="5500"/>
+                  <a:pt x="54000" y="5000"/>
                 </a:lnTo>
                 <a:lnTo>
-                  <a:pt x="70000" y="11000"/>
+                  <a:pt x="42000" y="10000"/>
                 </a:lnTo>
                 <a:lnTo>
-                  <a:pt x="70000" y="6500"/>
+                  <a:pt x="42000" y="5900"/>
                 </a:lnTo>
                 <a:lnTo>
-                  <a:pt x="0" y="6500"/>
+                  <a:pt x="0" y="5900"/>
                 </a:lnTo>
                 <a:close/>
               </a:path>
@@ -6928,14 +9065,14 @@
       </p:sp>
       <p:sp>
         <p:nvSpPr>
-          <p:cNvPr id="74" name="fan3_0" descr="Editable line; source id fan3_0"/>
+          <p:cNvPr id="125" name="fan3_0" descr="Editable line; source id fan3_0"/>
           <p:cNvSpPr/>
           <p:nvPr/>
         </p:nvSpPr>
         <p:spPr>
           <a:xfrm>
-            <a:off x="8350214" y="3790241"/>
-            <a:ext cx="570426" cy="75599"/>
+            <a:off x="8016875" y="3944937"/>
+            <a:ext cx="428625" cy="79375"/>
           </a:xfrm>
           <a:custGeom>
             <a:avLst/>
@@ -6944,27 +9081,27 @@
             <a:cxnLst/>
             <a:rect l="l" t="t" r="r" b="b"/>
             <a:pathLst>
-              <a:path w="83000" h="11000">
+              <a:path w="54000" h="10000">
                 <a:moveTo>
-                  <a:pt x="0" y="4500"/>
+                  <a:pt x="0" y="4100"/>
                 </a:moveTo>
                 <a:lnTo>
-                  <a:pt x="70000" y="4500"/>
+                  <a:pt x="42000" y="4100"/>
                 </a:lnTo>
                 <a:lnTo>
-                  <a:pt x="70000" y="0"/>
+                  <a:pt x="42000" y="0"/>
                 </a:lnTo>
                 <a:lnTo>
-                  <a:pt x="83000" y="5500"/>
+                  <a:pt x="54000" y="5000"/>
                 </a:lnTo>
                 <a:lnTo>
-                  <a:pt x="70000" y="11000"/>
+                  <a:pt x="42000" y="10000"/>
                 </a:lnTo>
                 <a:lnTo>
-                  <a:pt x="70000" y="6500"/>
+                  <a:pt x="42000" y="5900"/>
                 </a:lnTo>
                 <a:lnTo>
-                  <a:pt x="0" y="6500"/>
+                  <a:pt x="0" y="5900"/>
                 </a:lnTo>
                 <a:close/>
               </a:path>
@@ -7000,16 +9137,134 @@
           </a:p>
         </p:txBody>
       </p:sp>
-      <p:sp>
-        <p:nvSpPr>
-          <p:cNvPr id="75" name="ex_p" descr="Editable shape; source id ex_p"/>
+      <p:cxnSp>
+        <p:nvCxnSpPr>
+          <p:cNvPr id="126" name="ex_0" descr="Editable line; source id ex_0"/>
+          <p:cNvCxnSpPr/>
+          <p:nvPr/>
+        </p:nvCxnSpPr>
+        <p:spPr>
+          <a:xfrm>
+            <a:off x="2262187" y="6953249"/>
+            <a:ext cx="0" cy="428625"/>
+          </a:xfrm>
+          <a:prstGeom prst="line">
+            <a:avLst/>
+          </a:prstGeom>
+          <a:ln w="14287">
+            <a:solidFill>
+              <a:srgbClr val="4B5563"/>
+            </a:solidFill>
+            <a:custDash>
+              <a:ds d="611111" sp="388889"/>
+            </a:custDash>
+          </a:ln>
+          <a:effectLst/>
+        </p:spPr>
+        <p:style>
+          <a:lnRef idx="2">
+            <a:schemeClr val="accent1"/>
+          </a:lnRef>
+          <a:fillRef idx="0">
+            <a:schemeClr val="accent1"/>
+          </a:fillRef>
+          <a:effectRef idx="0">
+            <a:schemeClr val="accent1"/>
+          </a:effectRef>
+          <a:fontRef idx="minor">
+            <a:schemeClr val="tx1"/>
+          </a:fontRef>
+        </p:style>
+      </p:cxnSp>
+      <p:cxnSp>
+        <p:nvCxnSpPr>
+          <p:cNvPr id="127" name="ex_1" descr="Editable line; source id ex_1"/>
+          <p:cNvCxnSpPr/>
+          <p:nvPr/>
+        </p:nvCxnSpPr>
+        <p:spPr>
+          <a:xfrm>
+            <a:off x="2262187" y="7381874"/>
+            <a:ext cx="7842250" cy="0"/>
+          </a:xfrm>
+          <a:prstGeom prst="line">
+            <a:avLst/>
+          </a:prstGeom>
+          <a:ln w="14287">
+            <a:solidFill>
+              <a:srgbClr val="4B5563"/>
+            </a:solidFill>
+            <a:custDash>
+              <a:ds d="611111" sp="388889"/>
+            </a:custDash>
+          </a:ln>
+          <a:effectLst/>
+        </p:spPr>
+        <p:style>
+          <a:lnRef idx="2">
+            <a:schemeClr val="accent1"/>
+          </a:lnRef>
+          <a:fillRef idx="0">
+            <a:schemeClr val="accent1"/>
+          </a:fillRef>
+          <a:effectRef idx="0">
+            <a:schemeClr val="accent1"/>
+          </a:effectRef>
+          <a:fontRef idx="minor">
+            <a:schemeClr val="tx1"/>
+          </a:fontRef>
+        </p:style>
+      </p:cxnSp>
+      <p:cxnSp>
+        <p:nvCxnSpPr>
+          <p:cNvPr id="128" name="ex_2" descr="Editable line; source id ex_2"/>
+          <p:cNvCxnSpPr/>
+          <p:nvPr/>
+        </p:nvCxnSpPr>
+        <p:spPr>
+          <a:xfrm flipV="1">
+            <a:off x="10104437" y="6953249"/>
+            <a:ext cx="0" cy="428625"/>
+          </a:xfrm>
+          <a:prstGeom prst="line">
+            <a:avLst/>
+          </a:prstGeom>
+          <a:ln w="14287">
+            <a:solidFill>
+              <a:srgbClr val="4B5563"/>
+            </a:solidFill>
+            <a:custDash>
+              <a:ds d="611111" sp="388889"/>
+            </a:custDash>
+            <a:tailEnd type="triangle"/>
+          </a:ln>
+          <a:effectLst/>
+        </p:spPr>
+        <p:style>
+          <a:lnRef idx="2">
+            <a:schemeClr val="accent1"/>
+          </a:lnRef>
+          <a:fillRef idx="0">
+            <a:schemeClr val="accent1"/>
+          </a:fillRef>
+          <a:effectRef idx="0">
+            <a:schemeClr val="accent1"/>
+          </a:effectRef>
+          <a:fontRef idx="minor">
+            <a:schemeClr val="tx1"/>
+          </a:fontRef>
+        </p:style>
+      </p:cxnSp>
+      <p:sp>
+        <p:nvSpPr>
+          <p:cNvPr id="129" name="ex_p" descr="Editable shape; source id ex_p"/>
           <p:cNvSpPr/>
           <p:nvPr/>
         </p:nvSpPr>
         <p:spPr>
           <a:xfrm>
-            <a:off x="5772987" y="5388121"/>
-            <a:ext cx="549808" cy="302394"/>
+            <a:off x="5897562" y="7223124"/>
+            <a:ext cx="571499" cy="309562"/>
           </a:xfrm>
           <a:prstGeom prst="roundRect">
             <a:avLst>
@@ -7019,9 +9274,9 @@
           <a:solidFill>
             <a:srgbClr val="FFFFFF"/>
           </a:solidFill>
-          <a:ln w="8247">
+          <a:ln w="8731">
             <a:solidFill>
-              <a:srgbClr val="C6CCD1"/>
+              <a:srgbClr val="CBD3DA"/>
             </a:solidFill>
           </a:ln>
           <a:effectLst/>
@@ -7050,14 +9305,14 @@
       </p:sp>
       <p:sp>
         <p:nvSpPr>
-          <p:cNvPr id="76" name="ex_p_t" descr="Editable text; source id ex_p_t"/>
+          <p:cNvPr id="130" name="ex_p_t" descr="Editable text; source id ex_p_t"/>
           <p:cNvSpPr txBox="1"/>
           <p:nvPr/>
         </p:nvSpPr>
         <p:spPr>
           <a:xfrm>
-            <a:off x="5855458" y="5422484"/>
-            <a:ext cx="384865" cy="233668"/>
+            <a:off x="5976937" y="7254874"/>
+            <a:ext cx="412749" cy="246062"/>
           </a:xfrm>
           <a:prstGeom prst="rect">
             <a:avLst/>
@@ -7073,7 +9328,7 @@
           <a:p>
             <a:pPr algn="ctr" fontAlgn="base">
               <a:lnSpc>
-                <a:spcPts val="1582"/>
+                <a:spcPts val="1640"/>
               </a:lnSpc>
               <a:spcBef>
                 <a:spcPts val="0"/>
@@ -7081,7 +9336,7 @@
               <a:spcAft>
                 <a:spcPts val="0"/>
               </a:spcAft>
-              <a:defRPr sz="1082" b="0" i="0" lang="zh-CN" dirty="0">
+              <a:defRPr sz="1124" b="0" i="0" lang="zh-CN" dirty="0">
                 <a:solidFill>
                   <a:srgbClr val="3F4854"/>
                 </a:solidFill>
@@ -7091,7 +9346,7 @@
               </a:defRPr>
             </a:pPr>
             <a:r>
-              <a:rPr sz="1082" b="0" i="0" lang="zh-CN" dirty="0">
+              <a:rPr sz="1124" b="0" i="0" lang="zh-CN" dirty="0">
                 <a:solidFill>
                   <a:srgbClr val="3F4854"/>
                 </a:solidFill>
@@ -7104,241 +9359,6 @@
           </a:p>
         </p:txBody>
       </p:sp>
-      <p:cxnSp>
-        <p:nvCxnSpPr>
-          <p:cNvPr id="77" name="ex_0" descr="Editable line; source id ex_0"/>
-          <p:cNvCxnSpPr/>
-          <p:nvPr/>
-        </p:nvCxnSpPr>
-        <p:spPr>
-          <a:xfrm>
-            <a:off x="3230123" y="4913911"/>
-            <a:ext cx="481083" cy="0"/>
-          </a:xfrm>
-          <a:prstGeom prst="line">
-            <a:avLst/>
-          </a:prstGeom>
-          <a:ln w="13745">
-            <a:solidFill>
-              <a:srgbClr val="4B5563"/>
-            </a:solidFill>
-            <a:custDash>
-              <a:ds d="600000" sp="400000"/>
-            </a:custDash>
-          </a:ln>
-          <a:effectLst/>
-        </p:spPr>
-        <p:style>
-          <a:lnRef idx="2">
-            <a:schemeClr val="accent1"/>
-          </a:lnRef>
-          <a:fillRef idx="0">
-            <a:schemeClr val="accent1"/>
-          </a:fillRef>
-          <a:effectRef idx="0">
-            <a:schemeClr val="accent1"/>
-          </a:effectRef>
-          <a:fontRef idx="minor">
-            <a:schemeClr val="tx1"/>
-          </a:fontRef>
-        </p:style>
-      </p:cxnSp>
-      <p:cxnSp>
-        <p:nvCxnSpPr>
-          <p:cNvPr id="78" name="ex_1" descr="Editable line; source id ex_1"/>
-          <p:cNvCxnSpPr/>
-          <p:nvPr/>
-        </p:nvCxnSpPr>
-        <p:spPr>
-          <a:xfrm>
-            <a:off x="3711206" y="4913911"/>
-            <a:ext cx="0" cy="625407"/>
-          </a:xfrm>
-          <a:prstGeom prst="line">
-            <a:avLst/>
-          </a:prstGeom>
-          <a:ln w="13745">
-            <a:solidFill>
-              <a:srgbClr val="4B5563"/>
-            </a:solidFill>
-            <a:custDash>
-              <a:ds d="600000" sp="400000"/>
-            </a:custDash>
-          </a:ln>
-          <a:effectLst/>
-        </p:spPr>
-        <p:style>
-          <a:lnRef idx="2">
-            <a:schemeClr val="accent1"/>
-          </a:lnRef>
-          <a:fillRef idx="0">
-            <a:schemeClr val="accent1"/>
-          </a:fillRef>
-          <a:effectRef idx="0">
-            <a:schemeClr val="accent1"/>
-          </a:effectRef>
-          <a:fontRef idx="minor">
-            <a:schemeClr val="tx1"/>
-          </a:fontRef>
-        </p:style>
-      </p:cxnSp>
-      <p:cxnSp>
-        <p:nvCxnSpPr>
-          <p:cNvPr id="79" name="ex_2" descr="Editable line; source id ex_2"/>
-          <p:cNvCxnSpPr/>
-          <p:nvPr/>
-        </p:nvCxnSpPr>
-        <p:spPr>
-          <a:xfrm>
-            <a:off x="3711206" y="5539318"/>
-            <a:ext cx="2034291" cy="0"/>
-          </a:xfrm>
-          <a:prstGeom prst="line">
-            <a:avLst/>
-          </a:prstGeom>
-          <a:ln w="13745">
-            <a:solidFill>
-              <a:srgbClr val="4B5563"/>
-            </a:solidFill>
-            <a:custDash>
-              <a:ds d="600000" sp="400000"/>
-            </a:custDash>
-          </a:ln>
-          <a:effectLst/>
-        </p:spPr>
-        <p:style>
-          <a:lnRef idx="2">
-            <a:schemeClr val="accent1"/>
-          </a:lnRef>
-          <a:fillRef idx="0">
-            <a:schemeClr val="accent1"/>
-          </a:fillRef>
-          <a:effectRef idx="0">
-            <a:schemeClr val="accent1"/>
-          </a:effectRef>
-          <a:fontRef idx="minor">
-            <a:schemeClr val="tx1"/>
-          </a:fontRef>
-        </p:style>
-      </p:cxnSp>
-      <p:cxnSp>
-        <p:nvCxnSpPr>
-          <p:cNvPr id="80" name="ex_3" descr="Editable line; source id ex_3"/>
-          <p:cNvCxnSpPr/>
-          <p:nvPr/>
-        </p:nvCxnSpPr>
-        <p:spPr>
-          <a:xfrm>
-            <a:off x="6350286" y="5539318"/>
-            <a:ext cx="2350430" cy="0"/>
-          </a:xfrm>
-          <a:prstGeom prst="line">
-            <a:avLst/>
-          </a:prstGeom>
-          <a:ln w="13745">
-            <a:solidFill>
-              <a:srgbClr val="4B5563"/>
-            </a:solidFill>
-            <a:custDash>
-              <a:ds d="600000" sp="400000"/>
-            </a:custDash>
-          </a:ln>
-          <a:effectLst/>
-        </p:spPr>
-        <p:style>
-          <a:lnRef idx="2">
-            <a:schemeClr val="accent1"/>
-          </a:lnRef>
-          <a:fillRef idx="0">
-            <a:schemeClr val="accent1"/>
-          </a:fillRef>
-          <a:effectRef idx="0">
-            <a:schemeClr val="accent1"/>
-          </a:effectRef>
-          <a:fontRef idx="minor">
-            <a:schemeClr val="tx1"/>
-          </a:fontRef>
-        </p:style>
-      </p:cxnSp>
-      <p:cxnSp>
-        <p:nvCxnSpPr>
-          <p:cNvPr id="81" name="ex_4" descr="Editable line; source id ex_4"/>
-          <p:cNvCxnSpPr/>
-          <p:nvPr/>
-        </p:nvCxnSpPr>
-        <p:spPr>
-          <a:xfrm flipV="1">
-            <a:off x="8700716" y="4913911"/>
-            <a:ext cx="0" cy="625407"/>
-          </a:xfrm>
-          <a:prstGeom prst="line">
-            <a:avLst/>
-          </a:prstGeom>
-          <a:ln w="13745">
-            <a:solidFill>
-              <a:srgbClr val="4B5563"/>
-            </a:solidFill>
-            <a:custDash>
-              <a:ds d="600000" sp="400000"/>
-            </a:custDash>
-          </a:ln>
-          <a:effectLst/>
-        </p:spPr>
-        <p:style>
-          <a:lnRef idx="2">
-            <a:schemeClr val="accent1"/>
-          </a:lnRef>
-          <a:fillRef idx="0">
-            <a:schemeClr val="accent1"/>
-          </a:fillRef>
-          <a:effectRef idx="0">
-            <a:schemeClr val="accent1"/>
-          </a:effectRef>
-          <a:fontRef idx="minor">
-            <a:schemeClr val="tx1"/>
-          </a:fontRef>
-        </p:style>
-      </p:cxnSp>
-      <p:cxnSp>
-        <p:nvCxnSpPr>
-          <p:cNvPr id="82" name="ex_5" descr="Editable line; source id ex_5"/>
-          <p:cNvCxnSpPr/>
-          <p:nvPr/>
-        </p:nvCxnSpPr>
-        <p:spPr>
-          <a:xfrm>
-            <a:off x="8700716" y="4913911"/>
-            <a:ext cx="219924" cy="0"/>
-          </a:xfrm>
-          <a:prstGeom prst="line">
-            <a:avLst/>
-          </a:prstGeom>
-          <a:ln w="13745">
-            <a:solidFill>
-              <a:srgbClr val="4B5563"/>
-            </a:solidFill>
-            <a:custDash>
-              <a:ds d="600000" sp="400000"/>
-            </a:custDash>
-            <a:tailEnd type="triangle"/>
-          </a:ln>
-          <a:effectLst/>
-        </p:spPr>
-        <p:style>
-          <a:lnRef idx="2">
-            <a:schemeClr val="accent1"/>
-          </a:lnRef>
-          <a:fillRef idx="0">
-            <a:schemeClr val="accent1"/>
-          </a:fillRef>
-          <a:effectRef idx="0">
-            <a:schemeClr val="accent1"/>
-          </a:effectRef>
-          <a:fontRef idx="minor">
-            <a:schemeClr val="tx1"/>
-          </a:fontRef>
-        </p:style>
-      </p:cxnSp>
     </p:spTree>
   </p:cSld>
   <p:clrMapOvr>

--- a/media/figstudio/fig01_evidence_map/fig01_evidence_synthesis_map_editable.pptx
+++ b/media/figstudio/fig01_evidence_map/fig01_evidence_synthesis_map_editable.pptx
@@ -502,7 +502,7 @@
           <a:lstStyle/>
           <a:p>
             <a:r>
-              <a:t>图 1 不同文献对目标化合物合成研究的适用范围（super_teaser 第四轮 R05 → super_img2ppt 重建）</a:t>
+              <a:t>图 1 不同文献对目标化合物合成研究的适用范围（第五轮 F02 嵌套容器 → super_img2ppt 重建）</a:t>
             </a:r>
           </a:p>
         </p:txBody>
@@ -3518,18 +3518,18 @@
       <p:grpSpPr/>
       <p:sp>
         <p:nvSpPr>
-          <p:cNvPr id="2" name="zA" descr="Editable shape; source id zA"/>
+          <p:cNvPr id="2" name="zL" descr="Editable shape; source id zL"/>
           <p:cNvSpPr/>
           <p:nvPr/>
         </p:nvSpPr>
         <p:spPr>
           <a:xfrm>
-            <a:off x="206374" y="238124"/>
-            <a:ext cx="3730624" cy="7651749"/>
+            <a:off x="873124" y="396874"/>
+            <a:ext cx="3667124" cy="6397624"/>
           </a:xfrm>
           <a:prstGeom prst="roundRect">
             <a:avLst>
-              <a:gd name="adj" fmla="val 2978"/>
+              <a:gd name="adj" fmla="val 3030"/>
             </a:avLst>
           </a:prstGeom>
           <a:solidFill>
@@ -3566,14 +3566,14 @@
       </p:sp>
       <p:sp>
         <p:nvSpPr>
-          <p:cNvPr id="3" name="zA_l" descr="Editable text; source id zA_l"/>
+          <p:cNvPr id="3" name="zL_l" descr="Editable text; source id zL_l"/>
           <p:cNvSpPr txBox="1"/>
           <p:nvPr/>
         </p:nvSpPr>
         <p:spPr>
           <a:xfrm>
-            <a:off x="349249" y="317499"/>
-            <a:ext cx="904874" cy="293687"/>
+            <a:off x="1015999" y="476249"/>
+            <a:ext cx="1063624" cy="357187"/>
           </a:xfrm>
           <a:prstGeom prst="rect">
             <a:avLst/>
@@ -3589,7 +3589,7 @@
           <a:p>
             <a:pPr algn="l" fontAlgn="base">
               <a:lnSpc>
-                <a:spcPts val="1921"/>
+                <a:spcPts val="2359"/>
               </a:lnSpc>
               <a:spcBef>
                 <a:spcPts val="0"/>
@@ -3597,7 +3597,7 @@
               <a:spcAft>
                 <a:spcPts val="0"/>
               </a:spcAft>
-              <a:defRPr sz="1312" b="1" i="0" lang="zh-CN" dirty="0">
+              <a:defRPr sz="1624" b="1" i="0" lang="zh-CN" dirty="0">
                 <a:solidFill>
                   <a:srgbClr val="2B3E57"/>
                 </a:solidFill>
@@ -3607,7 +3607,7 @@
               </a:defRPr>
             </a:pPr>
             <a:r>
-              <a:rPr sz="1312" b="1" i="0" lang="zh-CN" dirty="0">
+              <a:rPr sz="1624" b="1" i="0" lang="zh-CN" dirty="0">
                 <a:solidFill>
                   <a:srgbClr val="2B3E57"/>
                 </a:solidFill>
@@ -3622,18 +3622,18 @@
       </p:sp>
       <p:sp>
         <p:nvSpPr>
-          <p:cNvPr id="4" name="zB" descr="Editable shape; source id zB"/>
+          <p:cNvPr id="4" name="zE" descr="Editable shape; source id zE"/>
           <p:cNvSpPr/>
           <p:nvPr/>
         </p:nvSpPr>
         <p:spPr>
           <a:xfrm>
-            <a:off x="4095749" y="238124"/>
-            <a:ext cx="3968749" cy="7651749"/>
+            <a:off x="4698999" y="396874"/>
+            <a:ext cx="3492499" cy="6397624"/>
           </a:xfrm>
           <a:prstGeom prst="roundRect">
             <a:avLst>
-              <a:gd name="adj" fmla="val 2800"/>
+              <a:gd name="adj" fmla="val 3181"/>
             </a:avLst>
           </a:prstGeom>
           <a:solidFill>
@@ -3670,14 +3670,14 @@
       </p:sp>
       <p:sp>
         <p:nvSpPr>
-          <p:cNvPr id="5" name="zB_l" descr="Editable text; source id zB_l"/>
+          <p:cNvPr id="5" name="zE_l" descr="Editable text; source id zE_l"/>
           <p:cNvSpPr txBox="1"/>
           <p:nvPr/>
         </p:nvSpPr>
         <p:spPr>
           <a:xfrm>
-            <a:off x="4238624" y="317499"/>
-            <a:ext cx="904874" cy="293687"/>
+            <a:off x="4841874" y="476249"/>
+            <a:ext cx="1063624" cy="357187"/>
           </a:xfrm>
           <a:prstGeom prst="rect">
             <a:avLst/>
@@ -3693,7 +3693,7 @@
           <a:p>
             <a:pPr algn="l" fontAlgn="base">
               <a:lnSpc>
-                <a:spcPts val="1921"/>
+                <a:spcPts val="2359"/>
               </a:lnSpc>
               <a:spcBef>
                 <a:spcPts val="0"/>
@@ -3701,7 +3701,7 @@
               <a:spcAft>
                 <a:spcPts val="0"/>
               </a:spcAft>
-              <a:defRPr sz="1312" b="1" i="0" lang="zh-CN" dirty="0">
+              <a:defRPr sz="1624" b="1" i="0" lang="zh-CN" dirty="0">
                 <a:solidFill>
                   <a:srgbClr val="0F4F58"/>
                 </a:solidFill>
@@ -3711,7 +3711,7 @@
               </a:defRPr>
             </a:pPr>
             <a:r>
-              <a:rPr sz="1312" b="1" i="0" lang="zh-CN" dirty="0">
+              <a:rPr sz="1624" b="1" i="0" lang="zh-CN" dirty="0">
                 <a:solidFill>
                   <a:srgbClr val="0F4F58"/>
                 </a:solidFill>
@@ -3726,26 +3726,26 @@
       </p:sp>
       <p:sp>
         <p:nvSpPr>
-          <p:cNvPr id="6" name="zC" descr="Editable shape; source id zC"/>
+          <p:cNvPr id="6" name="zQ" descr="Editable shape; source id zQ"/>
           <p:cNvSpPr/>
           <p:nvPr/>
         </p:nvSpPr>
         <p:spPr>
           <a:xfrm>
-            <a:off x="8223249" y="238124"/>
-            <a:ext cx="3762374" cy="7651749"/>
+            <a:off x="8350249" y="396874"/>
+            <a:ext cx="3635374" cy="6397624"/>
           </a:xfrm>
           <a:prstGeom prst="roundRect">
             <a:avLst>
-              <a:gd name="adj" fmla="val 2953"/>
+              <a:gd name="adj" fmla="val 3056"/>
             </a:avLst>
           </a:prstGeom>
           <a:solidFill>
-            <a:srgbClr val="EEF2F7"/>
+            <a:srgbClr val="FFF6E3"/>
           </a:solidFill>
           <a:ln w="9524">
             <a:solidFill>
-              <a:srgbClr val="5B7592"/>
+              <a:srgbClr val="C48A24"/>
             </a:solidFill>
           </a:ln>
           <a:effectLst/>
@@ -3774,14 +3774,14 @@
       </p:sp>
       <p:sp>
         <p:nvSpPr>
-          <p:cNvPr id="7" name="zC_l" descr="Editable text; source id zC_l"/>
+          <p:cNvPr id="7" name="zQ_l" descr="Editable text; source id zQ_l"/>
           <p:cNvSpPr txBox="1"/>
           <p:nvPr/>
         </p:nvSpPr>
         <p:spPr>
           <a:xfrm>
-            <a:off x="8366124" y="317499"/>
-            <a:ext cx="1238249" cy="293687"/>
+            <a:off x="8493124" y="476249"/>
+            <a:ext cx="1476374" cy="357187"/>
           </a:xfrm>
           <a:prstGeom prst="rect">
             <a:avLst/>
@@ -3797,7 +3797,7 @@
           <a:p>
             <a:pPr algn="l" fontAlgn="base">
               <a:lnSpc>
-                <a:spcPts val="1921"/>
+                <a:spcPts val="2359"/>
               </a:lnSpc>
               <a:spcBef>
                 <a:spcPts val="0"/>
@@ -3805,7 +3805,309 @@
               <a:spcAft>
                 <a:spcPts val="0"/>
               </a:spcAft>
-              <a:defRPr sz="1312" b="1" i="0" lang="zh-CN" dirty="0">
+              <a:defRPr sz="1624" b="1" i="0" lang="zh-CN" dirty="0">
+                <a:solidFill>
+                  <a:srgbClr val="7A5410"/>
+                </a:solidFill>
+                <a:latin typeface="Noto Sans CJK SC"/>
+                <a:ea typeface="Noto Sans CJK SC"/>
+                <a:cs typeface="Noto Sans CJK SC"/>
+              </a:defRPr>
+            </a:pPr>
+            <a:r>
+              <a:rPr sz="1624" b="1" i="0" lang="zh-CN" dirty="0">
+                <a:solidFill>
+                  <a:srgbClr val="7A5410"/>
+                </a:solidFill>
+                <a:latin typeface="Noto Sans CJK SC"/>
+                <a:ea typeface="Noto Sans CJK SC"/>
+                <a:cs typeface="Noto Sans CJK SC"/>
+              </a:rPr>
+              <a:t>可回答的问题</a:t>
+            </a:r>
+          </a:p>
+        </p:txBody>
+      </p:sp>
+      <p:sp>
+        <p:nvSpPr>
+          <p:cNvPr id="8" name="a1" descr="Editable shape; source id a1"/>
+          <p:cNvSpPr/>
+          <p:nvPr/>
+        </p:nvSpPr>
+        <p:spPr>
+          <a:xfrm>
+            <a:off x="1031874" y="1190624"/>
+            <a:ext cx="3333749" cy="809624"/>
+          </a:xfrm>
+          <a:prstGeom prst="roundRect">
+            <a:avLst>
+              <a:gd name="adj" fmla="val 8823"/>
+            </a:avLst>
+          </a:prstGeom>
+          <a:solidFill>
+            <a:srgbClr val="FFFFFF"/>
+          </a:solidFill>
+          <a:ln w="11112">
+            <a:solidFill>
+              <a:srgbClr val="5B7592"/>
+            </a:solidFill>
+          </a:ln>
+          <a:effectLst/>
+        </p:spPr>
+        <p:style>
+          <a:lnRef idx="1">
+            <a:schemeClr val="accent1"/>
+          </a:lnRef>
+          <a:fillRef idx="3">
+            <a:schemeClr val="accent1"/>
+          </a:fillRef>
+          <a:effectRef idx="0">
+            <a:schemeClr val="accent1"/>
+          </a:effectRef>
+          <a:fontRef idx="minor">
+            <a:schemeClr val="lt1"/>
+          </a:fontRef>
+        </p:style>
+        <p:txBody>
+          <a:bodyPr rtlCol="0" anchor="ctr"/>
+          <a:lstStyle/>
+          <a:p>
+            <a:pPr algn="ctr"/>
+          </a:p>
+        </p:txBody>
+      </p:sp>
+      <p:sp>
+        <p:nvSpPr>
+          <p:cNvPr id="9" name="a1_b" descr="Editable shape; source id a1_b"/>
+          <p:cNvSpPr/>
+          <p:nvPr/>
+        </p:nvSpPr>
+        <p:spPr>
+          <a:xfrm>
+            <a:off x="1031874" y="1190624"/>
+            <a:ext cx="63499" cy="809624"/>
+          </a:xfrm>
+          <a:prstGeom prst="roundRect">
+            <a:avLst>
+              <a:gd name="adj" fmla="val 37500"/>
+            </a:avLst>
+          </a:prstGeom>
+          <a:solidFill>
+            <a:srgbClr val="5B7592"/>
+          </a:solidFill>
+          <a:ln>
+            <a:noFill/>
+          </a:ln>
+          <a:effectLst/>
+        </p:spPr>
+        <p:style>
+          <a:lnRef idx="1">
+            <a:schemeClr val="accent1"/>
+          </a:lnRef>
+          <a:fillRef idx="3">
+            <a:schemeClr val="accent1"/>
+          </a:fillRef>
+          <a:effectRef idx="0">
+            <a:schemeClr val="accent1"/>
+          </a:effectRef>
+          <a:fontRef idx="minor">
+            <a:schemeClr val="lt1"/>
+          </a:fontRef>
+        </p:style>
+        <p:txBody>
+          <a:bodyPr rtlCol="0" anchor="ctr"/>
+          <a:lstStyle/>
+          <a:p>
+            <a:pPr algn="ctr"/>
+          </a:p>
+        </p:txBody>
+      </p:sp>
+      <p:sp>
+        <p:nvSpPr>
+          <p:cNvPr id="10" name="a1_g_s0" descr="Editable shape; source id a1_g_s0"/>
+          <p:cNvSpPr/>
+          <p:nvPr/>
+        </p:nvSpPr>
+        <p:spPr>
+          <a:xfrm>
+            <a:off x="1277937" y="1484312"/>
+            <a:ext cx="150812" cy="230187"/>
+          </a:xfrm>
+          <a:prstGeom prst="rect">
+            <a:avLst/>
+          </a:prstGeom>
+          <a:noFill/>
+          <a:ln w="7937">
+            <a:solidFill>
+              <a:srgbClr val="1F2937"/>
+            </a:solidFill>
+          </a:ln>
+          <a:effectLst/>
+        </p:spPr>
+        <p:style>
+          <a:lnRef idx="1">
+            <a:schemeClr val="accent1"/>
+          </a:lnRef>
+          <a:fillRef idx="3">
+            <a:schemeClr val="accent1"/>
+          </a:fillRef>
+          <a:effectRef idx="0">
+            <a:schemeClr val="accent1"/>
+          </a:effectRef>
+          <a:fontRef idx="minor">
+            <a:schemeClr val="lt1"/>
+          </a:fontRef>
+        </p:style>
+        <p:txBody>
+          <a:bodyPr rtlCol="0" anchor="ctr"/>
+          <a:lstStyle/>
+          <a:p>
+            <a:pPr algn="ctr"/>
+          </a:p>
+        </p:txBody>
+      </p:sp>
+      <p:cxnSp>
+        <p:nvCxnSpPr>
+          <p:cNvPr id="11" name="a1_g_l1" descr="Editable line; source id a1_g_l1"/>
+          <p:cNvCxnSpPr/>
+          <p:nvPr/>
+        </p:nvCxnSpPr>
+        <p:spPr>
+          <a:xfrm>
+            <a:off x="1317624" y="1563687"/>
+            <a:ext cx="103188" cy="0"/>
+          </a:xfrm>
+          <a:prstGeom prst="line">
+            <a:avLst/>
+          </a:prstGeom>
+          <a:ln w="7937">
+            <a:solidFill>
+              <a:srgbClr val="1F2937"/>
+            </a:solidFill>
+          </a:ln>
+          <a:effectLst/>
+        </p:spPr>
+        <p:style>
+          <a:lnRef idx="2">
+            <a:schemeClr val="accent1"/>
+          </a:lnRef>
+          <a:fillRef idx="0">
+            <a:schemeClr val="accent1"/>
+          </a:fillRef>
+          <a:effectRef idx="0">
+            <a:schemeClr val="accent1"/>
+          </a:effectRef>
+          <a:fontRef idx="minor">
+            <a:schemeClr val="tx1"/>
+          </a:fontRef>
+        </p:style>
+      </p:cxnSp>
+      <p:cxnSp>
+        <p:nvCxnSpPr>
+          <p:cNvPr id="12" name="a1_g_l2" descr="Editable line; source id a1_g_l2"/>
+          <p:cNvCxnSpPr/>
+          <p:nvPr/>
+        </p:nvCxnSpPr>
+        <p:spPr>
+          <a:xfrm>
+            <a:off x="1317624" y="1611312"/>
+            <a:ext cx="103188" cy="0"/>
+          </a:xfrm>
+          <a:prstGeom prst="line">
+            <a:avLst/>
+          </a:prstGeom>
+          <a:ln w="7937">
+            <a:solidFill>
+              <a:srgbClr val="1F2937"/>
+            </a:solidFill>
+          </a:ln>
+          <a:effectLst/>
+        </p:spPr>
+        <p:style>
+          <a:lnRef idx="2">
+            <a:schemeClr val="accent1"/>
+          </a:lnRef>
+          <a:fillRef idx="0">
+            <a:schemeClr val="accent1"/>
+          </a:fillRef>
+          <a:effectRef idx="0">
+            <a:schemeClr val="accent1"/>
+          </a:effectRef>
+          <a:fontRef idx="minor">
+            <a:schemeClr val="tx1"/>
+          </a:fontRef>
+        </p:style>
+      </p:cxnSp>
+      <p:cxnSp>
+        <p:nvCxnSpPr>
+          <p:cNvPr id="13" name="a1_g_l3" descr="Editable line; source id a1_g_l3"/>
+          <p:cNvCxnSpPr/>
+          <p:nvPr/>
+        </p:nvCxnSpPr>
+        <p:spPr>
+          <a:xfrm>
+            <a:off x="1317624" y="1650999"/>
+            <a:ext cx="71438" cy="0"/>
+          </a:xfrm>
+          <a:prstGeom prst="line">
+            <a:avLst/>
+          </a:prstGeom>
+          <a:ln w="7937">
+            <a:solidFill>
+              <a:srgbClr val="1F2937"/>
+            </a:solidFill>
+          </a:ln>
+          <a:effectLst/>
+        </p:spPr>
+        <p:style>
+          <a:lnRef idx="2">
+            <a:schemeClr val="accent1"/>
+          </a:lnRef>
+          <a:fillRef idx="0">
+            <a:schemeClr val="accent1"/>
+          </a:fillRef>
+          <a:effectRef idx="0">
+            <a:schemeClr val="accent1"/>
+          </a:effectRef>
+          <a:fontRef idx="minor">
+            <a:schemeClr val="tx1"/>
+          </a:fontRef>
+        </p:style>
+      </p:cxnSp>
+      <p:sp>
+        <p:nvSpPr>
+          <p:cNvPr id="14" name="a1_t" descr="Editable text; source id a1_t"/>
+          <p:cNvSpPr txBox="1"/>
+          <p:nvPr/>
+        </p:nvSpPr>
+        <p:spPr>
+          <a:xfrm>
+            <a:off x="1635124" y="1428749"/>
+            <a:ext cx="2603499" cy="325437"/>
+          </a:xfrm>
+          <a:prstGeom prst="rect">
+            <a:avLst/>
+          </a:prstGeom>
+          <a:noFill/>
+          <a:effectLst/>
+        </p:spPr>
+        <p:txBody>
+          <a:bodyPr wrap="none" anchor="ctr" tIns="0" rIns="0" bIns="0" lIns="0" anchorCtr="0" vertOverflow="overflow">
+            <a:noAutofit/>
+          </a:bodyPr>
+          <a:lstStyle/>
+          <a:p>
+            <a:pPr algn="l" fontAlgn="base">
+              <a:lnSpc>
+                <a:spcPts val="2187"/>
+              </a:lnSpc>
+              <a:spcBef>
+                <a:spcPts val="0"/>
+              </a:spcBef>
+              <a:spcAft>
+                <a:spcPts val="0"/>
+              </a:spcAft>
+              <a:defRPr sz="1499" b="1" i="0" lang="zh-CN" dirty="0">
                 <a:solidFill>
                   <a:srgbClr val="2B3E57"/>
                 </a:solidFill>
@@ -3815,7 +4117,7 @@
               </a:defRPr>
             </a:pPr>
             <a:r>
-              <a:rPr sz="1312" b="1" i="0" lang="zh-CN" dirty="0">
+              <a:rPr sz="1499" b="1" i="0" lang="zh-CN" dirty="0">
                 <a:solidFill>
                   <a:srgbClr val="2B3E57"/>
                 </a:solidFill>
@@ -3823,33 +4125,33 @@
                 <a:ea typeface="Noto Sans CJK SC"/>
                 <a:cs typeface="Noto Sans CJK SC"/>
               </a:rPr>
-              <a:t>可回答的问题</a:t>
+              <a:t>目标化合物直接报道</a:t>
             </a:r>
           </a:p>
         </p:txBody>
       </p:sp>
       <p:sp>
         <p:nvSpPr>
-          <p:cNvPr id="8" name="cav" descr="Editable shape; source id cav"/>
+          <p:cNvPr id="15" name="a2" descr="Editable shape; source id a2"/>
           <p:cNvSpPr/>
           <p:nvPr/>
         </p:nvSpPr>
         <p:spPr>
           <a:xfrm>
-            <a:off x="6016624" y="301624"/>
-            <a:ext cx="1658937" cy="293687"/>
+            <a:off x="1031874" y="2079624"/>
+            <a:ext cx="3333749" cy="809624"/>
           </a:xfrm>
           <a:prstGeom prst="roundRect">
             <a:avLst>
-              <a:gd name="adj" fmla="val 50000"/>
+              <a:gd name="adj" fmla="val 8823"/>
             </a:avLst>
           </a:prstGeom>
           <a:solidFill>
-            <a:srgbClr val="FFF6E3"/>
+            <a:srgbClr val="FFFFFF"/>
           </a:solidFill>
-          <a:ln w="8731">
+          <a:ln w="11112">
             <a:solidFill>
-              <a:srgbClr val="C48A24"/>
+              <a:srgbClr val="5B7592"/>
             </a:solidFill>
           </a:ln>
           <a:effectLst/>
@@ -3878,14 +4180,312 @@
       </p:sp>
       <p:sp>
         <p:nvSpPr>
-          <p:cNvPr id="9" name="cav_t" descr="Editable text; source id cav_t"/>
+          <p:cNvPr id="16" name="a2_b" descr="Editable shape; source id a2_b"/>
+          <p:cNvSpPr/>
+          <p:nvPr/>
+        </p:nvSpPr>
+        <p:spPr>
+          <a:xfrm>
+            <a:off x="1031874" y="2079624"/>
+            <a:ext cx="63499" cy="809624"/>
+          </a:xfrm>
+          <a:prstGeom prst="roundRect">
+            <a:avLst>
+              <a:gd name="adj" fmla="val 37500"/>
+            </a:avLst>
+          </a:prstGeom>
+          <a:solidFill>
+            <a:srgbClr val="5B7592"/>
+          </a:solidFill>
+          <a:ln>
+            <a:noFill/>
+          </a:ln>
+          <a:effectLst/>
+        </p:spPr>
+        <p:style>
+          <a:lnRef idx="1">
+            <a:schemeClr val="accent1"/>
+          </a:lnRef>
+          <a:fillRef idx="3">
+            <a:schemeClr val="accent1"/>
+          </a:fillRef>
+          <a:effectRef idx="0">
+            <a:schemeClr val="accent1"/>
+          </a:effectRef>
+          <a:fontRef idx="minor">
+            <a:schemeClr val="lt1"/>
+          </a:fontRef>
+        </p:style>
+        <p:txBody>
+          <a:bodyPr rtlCol="0" anchor="ctr"/>
+          <a:lstStyle/>
+          <a:p>
+            <a:pPr algn="ctr"/>
+          </a:p>
+        </p:txBody>
+      </p:sp>
+      <p:cxnSp>
+        <p:nvCxnSpPr>
+          <p:cNvPr id="17" name="a2_g_o_0" descr="Editable line; source id a2_g_o_0"/>
+          <p:cNvCxnSpPr/>
+          <p:nvPr/>
+        </p:nvCxnSpPr>
+        <p:spPr>
+          <a:xfrm>
+            <a:off x="1381124" y="2349499"/>
+            <a:ext cx="127000" cy="87313"/>
+          </a:xfrm>
+          <a:prstGeom prst="line">
+            <a:avLst/>
+          </a:prstGeom>
+          <a:ln w="7937">
+            <a:solidFill>
+              <a:srgbClr val="1F2937"/>
+            </a:solidFill>
+          </a:ln>
+          <a:effectLst/>
+        </p:spPr>
+        <p:style>
+          <a:lnRef idx="2">
+            <a:schemeClr val="accent1"/>
+          </a:lnRef>
+          <a:fillRef idx="0">
+            <a:schemeClr val="accent1"/>
+          </a:fillRef>
+          <a:effectRef idx="0">
+            <a:schemeClr val="accent1"/>
+          </a:effectRef>
+          <a:fontRef idx="minor">
+            <a:schemeClr val="tx1"/>
+          </a:fontRef>
+        </p:style>
+      </p:cxnSp>
+      <p:cxnSp>
+        <p:nvCxnSpPr>
+          <p:cNvPr id="18" name="a2_g_o_1" descr="Editable line; source id a2_g_o_1"/>
+          <p:cNvCxnSpPr/>
+          <p:nvPr/>
+        </p:nvCxnSpPr>
+        <p:spPr>
+          <a:xfrm flipH="1">
+            <a:off x="1452562" y="2436812"/>
+            <a:ext cx="55562" cy="166687"/>
+          </a:xfrm>
+          <a:prstGeom prst="line">
+            <a:avLst/>
+          </a:prstGeom>
+          <a:ln w="7937">
+            <a:solidFill>
+              <a:srgbClr val="1F2937"/>
+            </a:solidFill>
+          </a:ln>
+          <a:effectLst/>
+        </p:spPr>
+        <p:style>
+          <a:lnRef idx="2">
+            <a:schemeClr val="accent1"/>
+          </a:lnRef>
+          <a:fillRef idx="0">
+            <a:schemeClr val="accent1"/>
+          </a:fillRef>
+          <a:effectRef idx="0">
+            <a:schemeClr val="accent1"/>
+          </a:effectRef>
+          <a:fontRef idx="minor">
+            <a:schemeClr val="tx1"/>
+          </a:fontRef>
+        </p:style>
+      </p:cxnSp>
+      <p:cxnSp>
+        <p:nvCxnSpPr>
+          <p:cNvPr id="19" name="a2_g_o_2" descr="Editable line; source id a2_g_o_2"/>
+          <p:cNvCxnSpPr/>
+          <p:nvPr/>
+        </p:nvCxnSpPr>
+        <p:spPr>
+          <a:xfrm flipH="1">
+            <a:off x="1309687" y="2603499"/>
+            <a:ext cx="142875" cy="0"/>
+          </a:xfrm>
+          <a:prstGeom prst="line">
+            <a:avLst/>
+          </a:prstGeom>
+          <a:ln w="7937">
+            <a:solidFill>
+              <a:srgbClr val="1F2937"/>
+            </a:solidFill>
+          </a:ln>
+          <a:effectLst/>
+        </p:spPr>
+        <p:style>
+          <a:lnRef idx="2">
+            <a:schemeClr val="accent1"/>
+          </a:lnRef>
+          <a:fillRef idx="0">
+            <a:schemeClr val="accent1"/>
+          </a:fillRef>
+          <a:effectRef idx="0">
+            <a:schemeClr val="accent1"/>
+          </a:effectRef>
+          <a:fontRef idx="minor">
+            <a:schemeClr val="tx1"/>
+          </a:fontRef>
+        </p:style>
+      </p:cxnSp>
+      <p:cxnSp>
+        <p:nvCxnSpPr>
+          <p:cNvPr id="20" name="a2_g_o_3" descr="Editable line; source id a2_g_o_3"/>
+          <p:cNvCxnSpPr/>
+          <p:nvPr/>
+        </p:nvCxnSpPr>
+        <p:spPr>
+          <a:xfrm flipH="1" flipV="1">
+            <a:off x="1254124" y="2436812"/>
+            <a:ext cx="55563" cy="166687"/>
+          </a:xfrm>
+          <a:prstGeom prst="line">
+            <a:avLst/>
+          </a:prstGeom>
+          <a:ln w="7937">
+            <a:solidFill>
+              <a:srgbClr val="1F2937"/>
+            </a:solidFill>
+          </a:ln>
+          <a:effectLst/>
+        </p:spPr>
+        <p:style>
+          <a:lnRef idx="2">
+            <a:schemeClr val="accent1"/>
+          </a:lnRef>
+          <a:fillRef idx="0">
+            <a:schemeClr val="accent1"/>
+          </a:fillRef>
+          <a:effectRef idx="0">
+            <a:schemeClr val="accent1"/>
+          </a:effectRef>
+          <a:fontRef idx="minor">
+            <a:schemeClr val="tx1"/>
+          </a:fontRef>
+        </p:style>
+      </p:cxnSp>
+      <p:cxnSp>
+        <p:nvCxnSpPr>
+          <p:cNvPr id="21" name="a2_g_o_4" descr="Editable line; source id a2_g_o_4"/>
+          <p:cNvCxnSpPr/>
+          <p:nvPr/>
+        </p:nvCxnSpPr>
+        <p:spPr>
+          <a:xfrm flipV="1">
+            <a:off x="1254124" y="2349499"/>
+            <a:ext cx="127000" cy="87313"/>
+          </a:xfrm>
+          <a:prstGeom prst="line">
+            <a:avLst/>
+          </a:prstGeom>
+          <a:ln w="7937">
+            <a:solidFill>
+              <a:srgbClr val="1F2937"/>
+            </a:solidFill>
+          </a:ln>
+          <a:effectLst/>
+        </p:spPr>
+        <p:style>
+          <a:lnRef idx="2">
+            <a:schemeClr val="accent1"/>
+          </a:lnRef>
+          <a:fillRef idx="0">
+            <a:schemeClr val="accent1"/>
+          </a:fillRef>
+          <a:effectRef idx="0">
+            <a:schemeClr val="accent1"/>
+          </a:effectRef>
+          <a:fontRef idx="minor">
+            <a:schemeClr val="tx1"/>
+          </a:fontRef>
+        </p:style>
+      </p:cxnSp>
+      <p:cxnSp>
+        <p:nvCxnSpPr>
+          <p:cNvPr id="22" name="a2_g_a" descr="Editable line; source id a2_g_a"/>
+          <p:cNvCxnSpPr/>
+          <p:nvPr/>
+        </p:nvCxnSpPr>
+        <p:spPr>
+          <a:xfrm>
+            <a:off x="1381124" y="2349499"/>
+            <a:ext cx="0" cy="254000"/>
+          </a:xfrm>
+          <a:prstGeom prst="line">
+            <a:avLst/>
+          </a:prstGeom>
+          <a:ln w="7937">
+            <a:solidFill>
+              <a:srgbClr val="1F2937"/>
+            </a:solidFill>
+          </a:ln>
+          <a:effectLst/>
+        </p:spPr>
+        <p:style>
+          <a:lnRef idx="2">
+            <a:schemeClr val="accent1"/>
+          </a:lnRef>
+          <a:fillRef idx="0">
+            <a:schemeClr val="accent1"/>
+          </a:fillRef>
+          <a:effectRef idx="0">
+            <a:schemeClr val="accent1"/>
+          </a:effectRef>
+          <a:fontRef idx="minor">
+            <a:schemeClr val="tx1"/>
+          </a:fontRef>
+        </p:style>
+      </p:cxnSp>
+      <p:cxnSp>
+        <p:nvCxnSpPr>
+          <p:cNvPr id="23" name="a2_g_b" descr="Editable line; source id a2_g_b"/>
+          <p:cNvCxnSpPr/>
+          <p:nvPr/>
+        </p:nvCxnSpPr>
+        <p:spPr>
+          <a:xfrm>
+            <a:off x="1254124" y="2436812"/>
+            <a:ext cx="254000" cy="0"/>
+          </a:xfrm>
+          <a:prstGeom prst="line">
+            <a:avLst/>
+          </a:prstGeom>
+          <a:ln w="7937">
+            <a:solidFill>
+              <a:srgbClr val="1F2937"/>
+            </a:solidFill>
+          </a:ln>
+          <a:effectLst/>
+        </p:spPr>
+        <p:style>
+          <a:lnRef idx="2">
+            <a:schemeClr val="accent1"/>
+          </a:lnRef>
+          <a:fillRef idx="0">
+            <a:schemeClr val="accent1"/>
+          </a:fillRef>
+          <a:effectRef idx="0">
+            <a:schemeClr val="accent1"/>
+          </a:effectRef>
+          <a:fontRef idx="minor">
+            <a:schemeClr val="tx1"/>
+          </a:fontRef>
+        </p:style>
+      </p:cxnSp>
+      <p:sp>
+        <p:nvSpPr>
+          <p:cNvPr id="24" name="a2_t" descr="Editable text; source id a2_t"/>
           <p:cNvSpPr txBox="1"/>
           <p:nvPr/>
         </p:nvSpPr>
         <p:spPr>
           <a:xfrm>
-            <a:off x="6095999" y="333374"/>
-            <a:ext cx="1500187" cy="230187"/>
+            <a:off x="1635124" y="2317749"/>
+            <a:ext cx="2603499" cy="325437"/>
           </a:xfrm>
           <a:prstGeom prst="rect">
             <a:avLst/>
@@ -3899,9 +4499,9 @@
           </a:bodyPr>
           <a:lstStyle/>
           <a:p>
-            <a:pPr algn="ctr" fontAlgn="base">
+            <a:pPr algn="l" fontAlgn="base">
               <a:lnSpc>
-                <a:spcPts val="1546"/>
+                <a:spcPts val="2187"/>
               </a:lnSpc>
               <a:spcBef>
                 <a:spcPts val="0"/>
@@ -3909,331 +4509,7 @@
               <a:spcAft>
                 <a:spcPts val="0"/>
               </a:spcAft>
-              <a:defRPr sz="1062" b="0" i="0" lang="zh-CN" dirty="0">
-                <a:solidFill>
-                  <a:srgbClr val="7A5410"/>
-                </a:solidFill>
-                <a:latin typeface="Noto Sans CJK SC"/>
-                <a:ea typeface="Noto Sans CJK SC"/>
-                <a:cs typeface="Noto Sans CJK SC"/>
-              </a:defRPr>
-            </a:pPr>
-            <a:r>
-              <a:rPr sz="1062" b="0" i="0" lang="zh-CN" dirty="0">
-                <a:solidFill>
-                  <a:srgbClr val="7A5410"/>
-                </a:solidFill>
-                <a:latin typeface="Noto Sans CJK SC"/>
-                <a:ea typeface="Noto Sans CJK SC"/>
-                <a:cs typeface="Noto Sans CJK SC"/>
-              </a:rPr>
-              <a:t>近邻条件</a:t>
-            </a:r>
-            <a:r>
-              <a:rPr sz="1062" b="0" i="0" lang="zh-CN" dirty="0">
-                <a:solidFill>
-                  <a:srgbClr val="7A5410"/>
-                </a:solidFill>
-                <a:latin typeface="DejaVu Sans"/>
-                <a:ea typeface="DejaVu Sans"/>
-                <a:cs typeface="DejaVu Sans"/>
-              </a:rPr>
-              <a:t> ≠ </a:t>
-            </a:r>
-            <a:r>
-              <a:rPr sz="1062" b="0" i="0" lang="zh-CN" dirty="0">
-                <a:solidFill>
-                  <a:srgbClr val="7A5410"/>
-                </a:solidFill>
-                <a:latin typeface="Noto Sans CJK SC"/>
-                <a:ea typeface="Noto Sans CJK SC"/>
-                <a:cs typeface="Noto Sans CJK SC"/>
-              </a:rPr>
-              <a:t>已验证配方</a:t>
-            </a:r>
-          </a:p>
-        </p:txBody>
-      </p:sp>
-      <p:sp>
-        <p:nvSpPr>
-          <p:cNvPr id="10" name="a1" descr="Editable shape; source id a1"/>
-          <p:cNvSpPr/>
-          <p:nvPr/>
-        </p:nvSpPr>
-        <p:spPr>
-          <a:xfrm>
-            <a:off x="761999" y="761999"/>
-            <a:ext cx="3000374" cy="984249"/>
-          </a:xfrm>
-          <a:prstGeom prst="roundRect">
-            <a:avLst>
-              <a:gd name="adj" fmla="val 7258"/>
-            </a:avLst>
-          </a:prstGeom>
-          <a:solidFill>
-            <a:srgbClr val="FFFFFF"/>
-          </a:solidFill>
-          <a:ln w="11112">
-            <a:solidFill>
-              <a:srgbClr val="5B7592"/>
-            </a:solidFill>
-          </a:ln>
-          <a:effectLst/>
-        </p:spPr>
-        <p:style>
-          <a:lnRef idx="1">
-            <a:schemeClr val="accent1"/>
-          </a:lnRef>
-          <a:fillRef idx="3">
-            <a:schemeClr val="accent1"/>
-          </a:fillRef>
-          <a:effectRef idx="0">
-            <a:schemeClr val="accent1"/>
-          </a:effectRef>
-          <a:fontRef idx="minor">
-            <a:schemeClr val="lt1"/>
-          </a:fontRef>
-        </p:style>
-        <p:txBody>
-          <a:bodyPr rtlCol="0" anchor="ctr"/>
-          <a:lstStyle/>
-          <a:p>
-            <a:pPr algn="ctr"/>
-          </a:p>
-        </p:txBody>
-      </p:sp>
-      <p:sp>
-        <p:nvSpPr>
-          <p:cNvPr id="11" name="a1_a" descr="Editable shape; source id a1_a"/>
-          <p:cNvSpPr/>
-          <p:nvPr/>
-        </p:nvSpPr>
-        <p:spPr>
-          <a:xfrm>
-            <a:off x="761999" y="761999"/>
-            <a:ext cx="3000374" cy="47624"/>
-          </a:xfrm>
-          <a:prstGeom prst="roundRect">
-            <a:avLst>
-              <a:gd name="adj" fmla="val 50000"/>
-            </a:avLst>
-          </a:prstGeom>
-          <a:solidFill>
-            <a:srgbClr val="5B7592"/>
-          </a:solidFill>
-          <a:ln>
-            <a:noFill/>
-          </a:ln>
-          <a:effectLst/>
-        </p:spPr>
-        <p:style>
-          <a:lnRef idx="1">
-            <a:schemeClr val="accent1"/>
-          </a:lnRef>
-          <a:fillRef idx="3">
-            <a:schemeClr val="accent1"/>
-          </a:fillRef>
-          <a:effectRef idx="0">
-            <a:schemeClr val="accent1"/>
-          </a:effectRef>
-          <a:fontRef idx="minor">
-            <a:schemeClr val="lt1"/>
-          </a:fontRef>
-        </p:style>
-        <p:txBody>
-          <a:bodyPr rtlCol="0" anchor="ctr"/>
-          <a:lstStyle/>
-          <a:p>
-            <a:pPr algn="ctr"/>
-          </a:p>
-        </p:txBody>
-      </p:sp>
-      <p:sp>
-        <p:nvSpPr>
-          <p:cNvPr id="12" name="a1_g_s0" descr="Editable shape; source id a1_g_s0"/>
-          <p:cNvSpPr/>
-          <p:nvPr/>
-        </p:nvSpPr>
-        <p:spPr>
-          <a:xfrm>
-            <a:off x="984249" y="1182687"/>
-            <a:ext cx="126999" cy="190499"/>
-          </a:xfrm>
-          <a:prstGeom prst="rect">
-            <a:avLst/>
-          </a:prstGeom>
-          <a:noFill/>
-          <a:ln w="7937">
-            <a:solidFill>
-              <a:srgbClr val="1F2937"/>
-            </a:solidFill>
-          </a:ln>
-          <a:effectLst/>
-        </p:spPr>
-        <p:style>
-          <a:lnRef idx="1">
-            <a:schemeClr val="accent1"/>
-          </a:lnRef>
-          <a:fillRef idx="3">
-            <a:schemeClr val="accent1"/>
-          </a:fillRef>
-          <a:effectRef idx="0">
-            <a:schemeClr val="accent1"/>
-          </a:effectRef>
-          <a:fontRef idx="minor">
-            <a:schemeClr val="lt1"/>
-          </a:fontRef>
-        </p:style>
-        <p:txBody>
-          <a:bodyPr rtlCol="0" anchor="ctr"/>
-          <a:lstStyle/>
-          <a:p>
-            <a:pPr algn="ctr"/>
-          </a:p>
-        </p:txBody>
-      </p:sp>
-      <p:cxnSp>
-        <p:nvCxnSpPr>
-          <p:cNvPr id="13" name="a1_g_l1" descr="Editable line; source id a1_g_l1"/>
-          <p:cNvCxnSpPr/>
-          <p:nvPr/>
-        </p:nvCxnSpPr>
-        <p:spPr>
-          <a:xfrm>
-            <a:off x="1015999" y="1254124"/>
-            <a:ext cx="87313" cy="0"/>
-          </a:xfrm>
-          <a:prstGeom prst="line">
-            <a:avLst/>
-          </a:prstGeom>
-          <a:ln w="7937">
-            <a:solidFill>
-              <a:srgbClr val="1F2937"/>
-            </a:solidFill>
-          </a:ln>
-          <a:effectLst/>
-        </p:spPr>
-        <p:style>
-          <a:lnRef idx="2">
-            <a:schemeClr val="accent1"/>
-          </a:lnRef>
-          <a:fillRef idx="0">
-            <a:schemeClr val="accent1"/>
-          </a:fillRef>
-          <a:effectRef idx="0">
-            <a:schemeClr val="accent1"/>
-          </a:effectRef>
-          <a:fontRef idx="minor">
-            <a:schemeClr val="tx1"/>
-          </a:fontRef>
-        </p:style>
-      </p:cxnSp>
-      <p:cxnSp>
-        <p:nvCxnSpPr>
-          <p:cNvPr id="14" name="a1_g_l2" descr="Editable line; source id a1_g_l2"/>
-          <p:cNvCxnSpPr/>
-          <p:nvPr/>
-        </p:nvCxnSpPr>
-        <p:spPr>
-          <a:xfrm>
-            <a:off x="1015999" y="1285874"/>
-            <a:ext cx="87313" cy="0"/>
-          </a:xfrm>
-          <a:prstGeom prst="line">
-            <a:avLst/>
-          </a:prstGeom>
-          <a:ln w="7937">
-            <a:solidFill>
-              <a:srgbClr val="1F2937"/>
-            </a:solidFill>
-          </a:ln>
-          <a:effectLst/>
-        </p:spPr>
-        <p:style>
-          <a:lnRef idx="2">
-            <a:schemeClr val="accent1"/>
-          </a:lnRef>
-          <a:fillRef idx="0">
-            <a:schemeClr val="accent1"/>
-          </a:fillRef>
-          <a:effectRef idx="0">
-            <a:schemeClr val="accent1"/>
-          </a:effectRef>
-          <a:fontRef idx="minor">
-            <a:schemeClr val="tx1"/>
-          </a:fontRef>
-        </p:style>
-      </p:cxnSp>
-      <p:cxnSp>
-        <p:nvCxnSpPr>
-          <p:cNvPr id="15" name="a1_g_l3" descr="Editable line; source id a1_g_l3"/>
-          <p:cNvCxnSpPr/>
-          <p:nvPr/>
-        </p:nvCxnSpPr>
-        <p:spPr>
-          <a:xfrm>
-            <a:off x="1015999" y="1325562"/>
-            <a:ext cx="63500" cy="0"/>
-          </a:xfrm>
-          <a:prstGeom prst="line">
-            <a:avLst/>
-          </a:prstGeom>
-          <a:ln w="7937">
-            <a:solidFill>
-              <a:srgbClr val="1F2937"/>
-            </a:solidFill>
-          </a:ln>
-          <a:effectLst/>
-        </p:spPr>
-        <p:style>
-          <a:lnRef idx="2">
-            <a:schemeClr val="accent1"/>
-          </a:lnRef>
-          <a:fillRef idx="0">
-            <a:schemeClr val="accent1"/>
-          </a:fillRef>
-          <a:effectRef idx="0">
-            <a:schemeClr val="accent1"/>
-          </a:effectRef>
-          <a:fontRef idx="minor">
-            <a:schemeClr val="tx1"/>
-          </a:fontRef>
-        </p:style>
-      </p:cxnSp>
-      <p:sp>
-        <p:nvSpPr>
-          <p:cNvPr id="16" name="a1_t" descr="Editable text; source id a1_t"/>
-          <p:cNvSpPr txBox="1"/>
-          <p:nvPr/>
-        </p:nvSpPr>
-        <p:spPr>
-          <a:xfrm>
-            <a:off x="1285874" y="1135062"/>
-            <a:ext cx="2301874" cy="285749"/>
-          </a:xfrm>
-          <a:prstGeom prst="rect">
-            <a:avLst/>
-          </a:prstGeom>
-          <a:noFill/>
-          <a:effectLst/>
-        </p:spPr>
-        <p:txBody>
-          <a:bodyPr wrap="none" anchor="ctr" tIns="0" rIns="0" bIns="0" lIns="0" anchorCtr="0" vertOverflow="overflow">
-            <a:noAutofit/>
-          </a:bodyPr>
-          <a:lstStyle/>
-          <a:p>
-            <a:pPr algn="l" fontAlgn="base">
-              <a:lnSpc>
-                <a:spcPts val="2203"/>
-              </a:lnSpc>
-              <a:spcBef>
-                <a:spcPts val="0"/>
-              </a:spcBef>
-              <a:spcAft>
-                <a:spcPts val="0"/>
-              </a:spcAft>
-              <a:defRPr sz="1513" b="1" i="0" lang="zh-CN" dirty="0">
+              <a:defRPr sz="1499" b="1" i="0" lang="zh-CN" dirty="0">
                 <a:solidFill>
                   <a:srgbClr val="2B3E57"/>
                 </a:solidFill>
@@ -4243,397 +4519,7 @@
               </a:defRPr>
             </a:pPr>
             <a:r>
-              <a:rPr sz="1513" b="1" i="0" lang="zh-CN" dirty="0">
-                <a:solidFill>
-                  <a:srgbClr val="2B3E57"/>
-                </a:solidFill>
-                <a:latin typeface="Noto Sans CJK SC"/>
-                <a:ea typeface="Noto Sans CJK SC"/>
-                <a:cs typeface="Noto Sans CJK SC"/>
-              </a:rPr>
-              <a:t>目标化合物直接报道</a:t>
-            </a:r>
-          </a:p>
-        </p:txBody>
-      </p:sp>
-      <p:sp>
-        <p:nvSpPr>
-          <p:cNvPr id="17" name="a2" descr="Editable shape; source id a2"/>
-          <p:cNvSpPr/>
-          <p:nvPr/>
-        </p:nvSpPr>
-        <p:spPr>
-          <a:xfrm>
-            <a:off x="761999" y="1936749"/>
-            <a:ext cx="3000374" cy="984249"/>
-          </a:xfrm>
-          <a:prstGeom prst="roundRect">
-            <a:avLst>
-              <a:gd name="adj" fmla="val 7258"/>
-            </a:avLst>
-          </a:prstGeom>
-          <a:solidFill>
-            <a:srgbClr val="FFFFFF"/>
-          </a:solidFill>
-          <a:ln w="11112">
-            <a:solidFill>
-              <a:srgbClr val="5B7592"/>
-            </a:solidFill>
-          </a:ln>
-          <a:effectLst/>
-        </p:spPr>
-        <p:style>
-          <a:lnRef idx="1">
-            <a:schemeClr val="accent1"/>
-          </a:lnRef>
-          <a:fillRef idx="3">
-            <a:schemeClr val="accent1"/>
-          </a:fillRef>
-          <a:effectRef idx="0">
-            <a:schemeClr val="accent1"/>
-          </a:effectRef>
-          <a:fontRef idx="minor">
-            <a:schemeClr val="lt1"/>
-          </a:fontRef>
-        </p:style>
-        <p:txBody>
-          <a:bodyPr rtlCol="0" anchor="ctr"/>
-          <a:lstStyle/>
-          <a:p>
-            <a:pPr algn="ctr"/>
-          </a:p>
-        </p:txBody>
-      </p:sp>
-      <p:sp>
-        <p:nvSpPr>
-          <p:cNvPr id="18" name="a2_a" descr="Editable shape; source id a2_a"/>
-          <p:cNvSpPr/>
-          <p:nvPr/>
-        </p:nvSpPr>
-        <p:spPr>
-          <a:xfrm>
-            <a:off x="761999" y="1936749"/>
-            <a:ext cx="3000374" cy="47624"/>
-          </a:xfrm>
-          <a:prstGeom prst="roundRect">
-            <a:avLst>
-              <a:gd name="adj" fmla="val 50000"/>
-            </a:avLst>
-          </a:prstGeom>
-          <a:solidFill>
-            <a:srgbClr val="5B7592"/>
-          </a:solidFill>
-          <a:ln>
-            <a:noFill/>
-          </a:ln>
-          <a:effectLst/>
-        </p:spPr>
-        <p:style>
-          <a:lnRef idx="1">
-            <a:schemeClr val="accent1"/>
-          </a:lnRef>
-          <a:fillRef idx="3">
-            <a:schemeClr val="accent1"/>
-          </a:fillRef>
-          <a:effectRef idx="0">
-            <a:schemeClr val="accent1"/>
-          </a:effectRef>
-          <a:fontRef idx="minor">
-            <a:schemeClr val="lt1"/>
-          </a:fontRef>
-        </p:style>
-        <p:txBody>
-          <a:bodyPr rtlCol="0" anchor="ctr"/>
-          <a:lstStyle/>
-          <a:p>
-            <a:pPr algn="ctr"/>
-          </a:p>
-        </p:txBody>
-      </p:sp>
-      <p:sp>
-        <p:nvSpPr>
-          <p:cNvPr id="19" name="a2_g_s2" descr="Editable shape; source id a2_g_s2"/>
-          <p:cNvSpPr/>
-          <p:nvPr/>
-        </p:nvSpPr>
-        <p:spPr>
-          <a:xfrm>
-            <a:off x="1031874" y="2405062"/>
-            <a:ext cx="126999" cy="190499"/>
-          </a:xfrm>
-          <a:prstGeom prst="rect">
-            <a:avLst/>
-          </a:prstGeom>
-          <a:noFill/>
-          <a:ln w="7937">
-            <a:solidFill>
-              <a:srgbClr val="1F2937"/>
-            </a:solidFill>
-          </a:ln>
-          <a:effectLst/>
-        </p:spPr>
-        <p:style>
-          <a:lnRef idx="1">
-            <a:schemeClr val="accent1"/>
-          </a:lnRef>
-          <a:fillRef idx="3">
-            <a:schemeClr val="accent1"/>
-          </a:fillRef>
-          <a:effectRef idx="0">
-            <a:schemeClr val="accent1"/>
-          </a:effectRef>
-          <a:fontRef idx="minor">
-            <a:schemeClr val="lt1"/>
-          </a:fontRef>
-        </p:style>
-        <p:txBody>
-          <a:bodyPr rtlCol="0" anchor="ctr"/>
-          <a:lstStyle/>
-          <a:p>
-            <a:pPr algn="ctr"/>
-          </a:p>
-        </p:txBody>
-      </p:sp>
-      <p:sp>
-        <p:nvSpPr>
-          <p:cNvPr id="20" name="a2_g_s1" descr="Editable shape; source id a2_g_s1"/>
-          <p:cNvSpPr/>
-          <p:nvPr/>
-        </p:nvSpPr>
-        <p:spPr>
-          <a:xfrm>
-            <a:off x="1008062" y="2381249"/>
-            <a:ext cx="126999" cy="190499"/>
-          </a:xfrm>
-          <a:prstGeom prst="rect">
-            <a:avLst/>
-          </a:prstGeom>
-          <a:noFill/>
-          <a:ln w="7937">
-            <a:solidFill>
-              <a:srgbClr val="1F2937"/>
-            </a:solidFill>
-          </a:ln>
-          <a:effectLst/>
-        </p:spPr>
-        <p:style>
-          <a:lnRef idx="1">
-            <a:schemeClr val="accent1"/>
-          </a:lnRef>
-          <a:fillRef idx="3">
-            <a:schemeClr val="accent1"/>
-          </a:fillRef>
-          <a:effectRef idx="0">
-            <a:schemeClr val="accent1"/>
-          </a:effectRef>
-          <a:fontRef idx="minor">
-            <a:schemeClr val="lt1"/>
-          </a:fontRef>
-        </p:style>
-        <p:txBody>
-          <a:bodyPr rtlCol="0" anchor="ctr"/>
-          <a:lstStyle/>
-          <a:p>
-            <a:pPr algn="ctr"/>
-          </a:p>
-        </p:txBody>
-      </p:sp>
-      <p:sp>
-        <p:nvSpPr>
-          <p:cNvPr id="21" name="a2_g_s0" descr="Editable shape; source id a2_g_s0"/>
-          <p:cNvSpPr/>
-          <p:nvPr/>
-        </p:nvSpPr>
-        <p:spPr>
-          <a:xfrm>
-            <a:off x="984249" y="2357437"/>
-            <a:ext cx="126999" cy="190499"/>
-          </a:xfrm>
-          <a:prstGeom prst="rect">
-            <a:avLst/>
-          </a:prstGeom>
-          <a:noFill/>
-          <a:ln w="7937">
-            <a:solidFill>
-              <a:srgbClr val="1F2937"/>
-            </a:solidFill>
-          </a:ln>
-          <a:effectLst/>
-        </p:spPr>
-        <p:style>
-          <a:lnRef idx="1">
-            <a:schemeClr val="accent1"/>
-          </a:lnRef>
-          <a:fillRef idx="3">
-            <a:schemeClr val="accent1"/>
-          </a:fillRef>
-          <a:effectRef idx="0">
-            <a:schemeClr val="accent1"/>
-          </a:effectRef>
-          <a:fontRef idx="minor">
-            <a:schemeClr val="lt1"/>
-          </a:fontRef>
-        </p:style>
-        <p:txBody>
-          <a:bodyPr rtlCol="0" anchor="ctr"/>
-          <a:lstStyle/>
-          <a:p>
-            <a:pPr algn="ctr"/>
-          </a:p>
-        </p:txBody>
-      </p:sp>
-      <p:cxnSp>
-        <p:nvCxnSpPr>
-          <p:cNvPr id="22" name="a2_g_l1" descr="Editable line; source id a2_g_l1"/>
-          <p:cNvCxnSpPr/>
-          <p:nvPr/>
-        </p:nvCxnSpPr>
-        <p:spPr>
-          <a:xfrm>
-            <a:off x="1015999" y="2428874"/>
-            <a:ext cx="87313" cy="0"/>
-          </a:xfrm>
-          <a:prstGeom prst="line">
-            <a:avLst/>
-          </a:prstGeom>
-          <a:ln w="7937">
-            <a:solidFill>
-              <a:srgbClr val="1F2937"/>
-            </a:solidFill>
-          </a:ln>
-          <a:effectLst/>
-        </p:spPr>
-        <p:style>
-          <a:lnRef idx="2">
-            <a:schemeClr val="accent1"/>
-          </a:lnRef>
-          <a:fillRef idx="0">
-            <a:schemeClr val="accent1"/>
-          </a:fillRef>
-          <a:effectRef idx="0">
-            <a:schemeClr val="accent1"/>
-          </a:effectRef>
-          <a:fontRef idx="minor">
-            <a:schemeClr val="tx1"/>
-          </a:fontRef>
-        </p:style>
-      </p:cxnSp>
-      <p:cxnSp>
-        <p:nvCxnSpPr>
-          <p:cNvPr id="23" name="a2_g_l2" descr="Editable line; source id a2_g_l2"/>
-          <p:cNvCxnSpPr/>
-          <p:nvPr/>
-        </p:nvCxnSpPr>
-        <p:spPr>
-          <a:xfrm>
-            <a:off x="1015999" y="2460624"/>
-            <a:ext cx="87313" cy="0"/>
-          </a:xfrm>
-          <a:prstGeom prst="line">
-            <a:avLst/>
-          </a:prstGeom>
-          <a:ln w="7937">
-            <a:solidFill>
-              <a:srgbClr val="1F2937"/>
-            </a:solidFill>
-          </a:ln>
-          <a:effectLst/>
-        </p:spPr>
-        <p:style>
-          <a:lnRef idx="2">
-            <a:schemeClr val="accent1"/>
-          </a:lnRef>
-          <a:fillRef idx="0">
-            <a:schemeClr val="accent1"/>
-          </a:fillRef>
-          <a:effectRef idx="0">
-            <a:schemeClr val="accent1"/>
-          </a:effectRef>
-          <a:fontRef idx="minor">
-            <a:schemeClr val="tx1"/>
-          </a:fontRef>
-        </p:style>
-      </p:cxnSp>
-      <p:cxnSp>
-        <p:nvCxnSpPr>
-          <p:cNvPr id="24" name="a2_g_l3" descr="Editable line; source id a2_g_l3"/>
-          <p:cNvCxnSpPr/>
-          <p:nvPr/>
-        </p:nvCxnSpPr>
-        <p:spPr>
-          <a:xfrm>
-            <a:off x="1015999" y="2500312"/>
-            <a:ext cx="63500" cy="0"/>
-          </a:xfrm>
-          <a:prstGeom prst="line">
-            <a:avLst/>
-          </a:prstGeom>
-          <a:ln w="7937">
-            <a:solidFill>
-              <a:srgbClr val="1F2937"/>
-            </a:solidFill>
-          </a:ln>
-          <a:effectLst/>
-        </p:spPr>
-        <p:style>
-          <a:lnRef idx="2">
-            <a:schemeClr val="accent1"/>
-          </a:lnRef>
-          <a:fillRef idx="0">
-            <a:schemeClr val="accent1"/>
-          </a:fillRef>
-          <a:effectRef idx="0">
-            <a:schemeClr val="accent1"/>
-          </a:effectRef>
-          <a:fontRef idx="minor">
-            <a:schemeClr val="tx1"/>
-          </a:fontRef>
-        </p:style>
-      </p:cxnSp>
-      <p:sp>
-        <p:nvSpPr>
-          <p:cNvPr id="25" name="a2_t" descr="Editable text; source id a2_t"/>
-          <p:cNvSpPr txBox="1"/>
-          <p:nvPr/>
-        </p:nvSpPr>
-        <p:spPr>
-          <a:xfrm>
-            <a:off x="1285874" y="2309812"/>
-            <a:ext cx="2301874" cy="285749"/>
-          </a:xfrm>
-          <a:prstGeom prst="rect">
-            <a:avLst/>
-          </a:prstGeom>
-          <a:noFill/>
-          <a:effectLst/>
-        </p:spPr>
-        <p:txBody>
-          <a:bodyPr wrap="none" anchor="ctr" tIns="0" rIns="0" bIns="0" lIns="0" anchorCtr="0" vertOverflow="overflow">
-            <a:noAutofit/>
-          </a:bodyPr>
-          <a:lstStyle/>
-          <a:p>
-            <a:pPr algn="l" fontAlgn="base">
-              <a:lnSpc>
-                <a:spcPts val="2203"/>
-              </a:lnSpc>
-              <a:spcBef>
-                <a:spcPts val="0"/>
-              </a:spcBef>
-              <a:spcAft>
-                <a:spcPts val="0"/>
-              </a:spcAft>
-              <a:defRPr sz="1513" b="1" i="0" lang="zh-CN" dirty="0">
-                <a:solidFill>
-                  <a:srgbClr val="2B3E57"/>
-                </a:solidFill>
-                <a:latin typeface="Noto Sans CJK SC"/>
-                <a:ea typeface="Noto Sans CJK SC"/>
-                <a:cs typeface="Noto Sans CJK SC"/>
-              </a:defRPr>
-            </a:pPr>
-            <a:r>
-              <a:rPr sz="1513" b="1" i="0" lang="zh-CN" dirty="0">
+              <a:rPr sz="1499" b="1" i="0" lang="zh-CN" dirty="0">
                 <a:solidFill>
                   <a:srgbClr val="2B3E57"/>
                 </a:solidFill>
@@ -4644,7 +4530,7 @@
               <a:t>同类</a:t>
             </a:r>
             <a:r>
-              <a:rPr sz="1513" b="1" i="0" lang="zh-CN" dirty="0">
+              <a:rPr sz="1499" b="1" i="0" lang="zh-CN" dirty="0">
                 <a:solidFill>
                   <a:srgbClr val="2B3E57"/>
                 </a:solidFill>
@@ -4655,7 +4541,7 @@
               <a:t> Ba–Y </a:t>
             </a:r>
             <a:r>
-              <a:rPr sz="1513" b="1" i="0" lang="zh-CN" dirty="0">
+              <a:rPr sz="1499" b="1" i="0" lang="zh-CN" dirty="0">
                 <a:solidFill>
                   <a:srgbClr val="2B3E57"/>
                 </a:solidFill>
@@ -4670,18 +4556,18 @@
       </p:sp>
       <p:sp>
         <p:nvSpPr>
-          <p:cNvPr id="26" name="a3" descr="Editable shape; source id a3"/>
+          <p:cNvPr id="25" name="a3" descr="Editable shape; source id a3"/>
           <p:cNvSpPr/>
           <p:nvPr/>
         </p:nvSpPr>
         <p:spPr>
           <a:xfrm>
-            <a:off x="761999" y="3111499"/>
-            <a:ext cx="3000374" cy="984249"/>
+            <a:off x="1031874" y="2968624"/>
+            <a:ext cx="3333749" cy="809624"/>
           </a:xfrm>
           <a:prstGeom prst="roundRect">
             <a:avLst>
-              <a:gd name="adj" fmla="val 7258"/>
+              <a:gd name="adj" fmla="val 8823"/>
             </a:avLst>
           </a:prstGeom>
           <a:solidFill>
@@ -4718,18 +4604,18 @@
       </p:sp>
       <p:sp>
         <p:nvSpPr>
-          <p:cNvPr id="27" name="a3_a" descr="Editable shape; source id a3_a"/>
+          <p:cNvPr id="26" name="a3_b" descr="Editable shape; source id a3_b"/>
           <p:cNvSpPr/>
           <p:nvPr/>
         </p:nvSpPr>
         <p:spPr>
           <a:xfrm>
-            <a:off x="761999" y="3111499"/>
-            <a:ext cx="3000374" cy="47624"/>
+            <a:off x="1031874" y="2968624"/>
+            <a:ext cx="63499" cy="809624"/>
           </a:xfrm>
           <a:prstGeom prst="roundRect">
             <a:avLst>
-              <a:gd name="adj" fmla="val 50000"/>
+              <a:gd name="adj" fmla="val 37500"/>
             </a:avLst>
           </a:prstGeom>
           <a:solidFill>
@@ -4764,14 +4650,14 @@
       </p:sp>
       <p:cxnSp>
         <p:nvCxnSpPr>
-          <p:cNvPr id="28" name="a3_g_o_0" descr="Editable line; source id a3_g_o_0"/>
+          <p:cNvPr id="27" name="a3_g_h0" descr="Editable line; source id a3_g_h0"/>
           <p:cNvCxnSpPr/>
           <p:nvPr/>
         </p:nvCxnSpPr>
         <p:spPr>
           <a:xfrm>
-            <a:off x="1071562" y="3516312"/>
-            <a:ext cx="111125" cy="71437"/>
+            <a:off x="1277937" y="3270249"/>
+            <a:ext cx="206375" cy="0"/>
           </a:xfrm>
           <a:prstGeom prst="line">
             <a:avLst/>
@@ -4800,14 +4686,14 @@
       </p:cxnSp>
       <p:cxnSp>
         <p:nvCxnSpPr>
-          <p:cNvPr id="29" name="a3_g_o_1" descr="Editable line; source id a3_g_o_1"/>
+          <p:cNvPr id="28" name="a3_g_v0" descr="Editable line; source id a3_g_v0"/>
           <p:cNvCxnSpPr/>
           <p:nvPr/>
         </p:nvCxnSpPr>
         <p:spPr>
-          <a:xfrm flipH="1">
-            <a:off x="1127124" y="3587749"/>
-            <a:ext cx="55563" cy="142875"/>
+          <a:xfrm>
+            <a:off x="1277937" y="3270249"/>
+            <a:ext cx="0" cy="206375"/>
           </a:xfrm>
           <a:prstGeom prst="line">
             <a:avLst/>
@@ -4836,14 +4722,14 @@
       </p:cxnSp>
       <p:cxnSp>
         <p:nvCxnSpPr>
-          <p:cNvPr id="30" name="a3_g_o_2" descr="Editable line; source id a3_g_o_2"/>
+          <p:cNvPr id="29" name="a3_g_h1" descr="Editable line; source id a3_g_h1"/>
           <p:cNvCxnSpPr/>
           <p:nvPr/>
         </p:nvCxnSpPr>
         <p:spPr>
-          <a:xfrm flipH="1">
-            <a:off x="1015999" y="3730624"/>
-            <a:ext cx="111125" cy="0"/>
+          <a:xfrm>
+            <a:off x="1277937" y="3373437"/>
+            <a:ext cx="206375" cy="0"/>
           </a:xfrm>
           <a:prstGeom prst="line">
             <a:avLst/>
@@ -4872,14 +4758,14 @@
       </p:cxnSp>
       <p:cxnSp>
         <p:nvCxnSpPr>
-          <p:cNvPr id="31" name="a3_g_o_3" descr="Editable line; source id a3_g_o_3"/>
+          <p:cNvPr id="30" name="a3_g_v1" descr="Editable line; source id a3_g_v1"/>
           <p:cNvCxnSpPr/>
           <p:nvPr/>
         </p:nvCxnSpPr>
         <p:spPr>
-          <a:xfrm flipH="1" flipV="1">
-            <a:off x="960437" y="3587749"/>
-            <a:ext cx="55562" cy="142875"/>
+          <a:xfrm>
+            <a:off x="1381124" y="3270249"/>
+            <a:ext cx="0" cy="206375"/>
           </a:xfrm>
           <a:prstGeom prst="line">
             <a:avLst/>
@@ -4908,14 +4794,14 @@
       </p:cxnSp>
       <p:cxnSp>
         <p:nvCxnSpPr>
-          <p:cNvPr id="32" name="a3_g_o_4" descr="Editable line; source id a3_g_o_4"/>
+          <p:cNvPr id="31" name="a3_g_h2" descr="Editable line; source id a3_g_h2"/>
           <p:cNvCxnSpPr/>
           <p:nvPr/>
         </p:nvCxnSpPr>
         <p:spPr>
-          <a:xfrm flipV="1">
-            <a:off x="960437" y="3516312"/>
-            <a:ext cx="111125" cy="71437"/>
+          <a:xfrm>
+            <a:off x="1277937" y="3476624"/>
+            <a:ext cx="206375" cy="0"/>
           </a:xfrm>
           <a:prstGeom prst="line">
             <a:avLst/>
@@ -4944,14 +4830,14 @@
       </p:cxnSp>
       <p:cxnSp>
         <p:nvCxnSpPr>
-          <p:cNvPr id="33" name="a3_g_a" descr="Editable line; source id a3_g_a"/>
+          <p:cNvPr id="32" name="a3_g_v2" descr="Editable line; source id a3_g_v2"/>
           <p:cNvCxnSpPr/>
           <p:nvPr/>
         </p:nvCxnSpPr>
         <p:spPr>
           <a:xfrm>
-            <a:off x="1071562" y="3516312"/>
-            <a:ext cx="0" cy="214312"/>
+            <a:off x="1484312" y="3270249"/>
+            <a:ext cx="0" cy="206375"/>
           </a:xfrm>
           <a:prstGeom prst="line">
             <a:avLst/>
@@ -4978,52 +4864,412 @@
           </a:fontRef>
         </p:style>
       </p:cxnSp>
-      <p:cxnSp>
-        <p:nvCxnSpPr>
-          <p:cNvPr id="34" name="a3_g_b" descr="Editable line; source id a3_g_b"/>
-          <p:cNvCxnSpPr/>
-          <p:nvPr/>
-        </p:nvCxnSpPr>
-        <p:spPr>
-          <a:xfrm>
-            <a:off x="960437" y="3587749"/>
-            <a:ext cx="222250" cy="0"/>
-          </a:xfrm>
-          <a:prstGeom prst="line">
-            <a:avLst/>
-          </a:prstGeom>
-          <a:ln w="7937">
-            <a:solidFill>
-              <a:srgbClr val="1F2937"/>
-            </a:solidFill>
-          </a:ln>
-          <a:effectLst/>
-        </p:spPr>
-        <p:style>
-          <a:lnRef idx="2">
-            <a:schemeClr val="accent1"/>
-          </a:lnRef>
-          <a:fillRef idx="0">
-            <a:schemeClr val="accent1"/>
-          </a:fillRef>
-          <a:effectRef idx="0">
-            <a:schemeClr val="accent1"/>
-          </a:effectRef>
-          <a:fontRef idx="minor">
-            <a:schemeClr val="tx1"/>
-          </a:fontRef>
-        </p:style>
-      </p:cxnSp>
-      <p:sp>
-        <p:nvSpPr>
-          <p:cNvPr id="35" name="a3_t" descr="Editable text; source id a3_t"/>
+      <p:sp>
+        <p:nvSpPr>
+          <p:cNvPr id="33" name="a3_g_d00" descr="Editable shape; source id a3_g_d00"/>
+          <p:cNvSpPr/>
+          <p:nvPr/>
+        </p:nvSpPr>
+        <p:spPr>
+          <a:xfrm>
+            <a:off x="1254124" y="3246437"/>
+            <a:ext cx="47624" cy="47624"/>
+          </a:xfrm>
+          <a:prstGeom prst="ellipse">
+            <a:avLst/>
+          </a:prstGeom>
+          <a:solidFill>
+            <a:srgbClr val="FFFFFF"/>
+          </a:solidFill>
+          <a:ln>
+            <a:noFill/>
+          </a:ln>
+          <a:effectLst/>
+        </p:spPr>
+        <p:style>
+          <a:lnRef idx="1">
+            <a:schemeClr val="accent1"/>
+          </a:lnRef>
+          <a:fillRef idx="3">
+            <a:schemeClr val="accent1"/>
+          </a:fillRef>
+          <a:effectRef idx="0">
+            <a:schemeClr val="accent1"/>
+          </a:effectRef>
+          <a:fontRef idx="minor">
+            <a:schemeClr val="lt1"/>
+          </a:fontRef>
+        </p:style>
+        <p:txBody>
+          <a:bodyPr rtlCol="0" anchor="ctr"/>
+          <a:lstStyle/>
+          <a:p>
+            <a:pPr algn="ctr"/>
+          </a:p>
+        </p:txBody>
+      </p:sp>
+      <p:sp>
+        <p:nvSpPr>
+          <p:cNvPr id="34" name="a3_g_d01" descr="Editable shape; source id a3_g_d01"/>
+          <p:cNvSpPr/>
+          <p:nvPr/>
+        </p:nvSpPr>
+        <p:spPr>
+          <a:xfrm>
+            <a:off x="1254124" y="3349624"/>
+            <a:ext cx="47624" cy="47624"/>
+          </a:xfrm>
+          <a:prstGeom prst="ellipse">
+            <a:avLst/>
+          </a:prstGeom>
+          <a:solidFill>
+            <a:srgbClr val="FFFFFF"/>
+          </a:solidFill>
+          <a:ln>
+            <a:noFill/>
+          </a:ln>
+          <a:effectLst/>
+        </p:spPr>
+        <p:style>
+          <a:lnRef idx="1">
+            <a:schemeClr val="accent1"/>
+          </a:lnRef>
+          <a:fillRef idx="3">
+            <a:schemeClr val="accent1"/>
+          </a:fillRef>
+          <a:effectRef idx="0">
+            <a:schemeClr val="accent1"/>
+          </a:effectRef>
+          <a:fontRef idx="minor">
+            <a:schemeClr val="lt1"/>
+          </a:fontRef>
+        </p:style>
+        <p:txBody>
+          <a:bodyPr rtlCol="0" anchor="ctr"/>
+          <a:lstStyle/>
+          <a:p>
+            <a:pPr algn="ctr"/>
+          </a:p>
+        </p:txBody>
+      </p:sp>
+      <p:sp>
+        <p:nvSpPr>
+          <p:cNvPr id="35" name="a3_g_d02" descr="Editable shape; source id a3_g_d02"/>
+          <p:cNvSpPr/>
+          <p:nvPr/>
+        </p:nvSpPr>
+        <p:spPr>
+          <a:xfrm>
+            <a:off x="1254124" y="3452812"/>
+            <a:ext cx="47624" cy="47624"/>
+          </a:xfrm>
+          <a:prstGeom prst="ellipse">
+            <a:avLst/>
+          </a:prstGeom>
+          <a:solidFill>
+            <a:srgbClr val="FFFFFF"/>
+          </a:solidFill>
+          <a:ln>
+            <a:noFill/>
+          </a:ln>
+          <a:effectLst/>
+        </p:spPr>
+        <p:style>
+          <a:lnRef idx="1">
+            <a:schemeClr val="accent1"/>
+          </a:lnRef>
+          <a:fillRef idx="3">
+            <a:schemeClr val="accent1"/>
+          </a:fillRef>
+          <a:effectRef idx="0">
+            <a:schemeClr val="accent1"/>
+          </a:effectRef>
+          <a:fontRef idx="minor">
+            <a:schemeClr val="lt1"/>
+          </a:fontRef>
+        </p:style>
+        <p:txBody>
+          <a:bodyPr rtlCol="0" anchor="ctr"/>
+          <a:lstStyle/>
+          <a:p>
+            <a:pPr algn="ctr"/>
+          </a:p>
+        </p:txBody>
+      </p:sp>
+      <p:sp>
+        <p:nvSpPr>
+          <p:cNvPr id="36" name="a3_g_d10" descr="Editable shape; source id a3_g_d10"/>
+          <p:cNvSpPr/>
+          <p:nvPr/>
+        </p:nvSpPr>
+        <p:spPr>
+          <a:xfrm>
+            <a:off x="1357312" y="3246437"/>
+            <a:ext cx="47624" cy="47624"/>
+          </a:xfrm>
+          <a:prstGeom prst="ellipse">
+            <a:avLst/>
+          </a:prstGeom>
+          <a:solidFill>
+            <a:srgbClr val="FFFFFF"/>
+          </a:solidFill>
+          <a:ln>
+            <a:noFill/>
+          </a:ln>
+          <a:effectLst/>
+        </p:spPr>
+        <p:style>
+          <a:lnRef idx="1">
+            <a:schemeClr val="accent1"/>
+          </a:lnRef>
+          <a:fillRef idx="3">
+            <a:schemeClr val="accent1"/>
+          </a:fillRef>
+          <a:effectRef idx="0">
+            <a:schemeClr val="accent1"/>
+          </a:effectRef>
+          <a:fontRef idx="minor">
+            <a:schemeClr val="lt1"/>
+          </a:fontRef>
+        </p:style>
+        <p:txBody>
+          <a:bodyPr rtlCol="0" anchor="ctr"/>
+          <a:lstStyle/>
+          <a:p>
+            <a:pPr algn="ctr"/>
+          </a:p>
+        </p:txBody>
+      </p:sp>
+      <p:sp>
+        <p:nvSpPr>
+          <p:cNvPr id="37" name="a3_g_d11" descr="Editable shape; source id a3_g_d11"/>
+          <p:cNvSpPr/>
+          <p:nvPr/>
+        </p:nvSpPr>
+        <p:spPr>
+          <a:xfrm>
+            <a:off x="1357312" y="3349624"/>
+            <a:ext cx="47624" cy="47624"/>
+          </a:xfrm>
+          <a:prstGeom prst="ellipse">
+            <a:avLst/>
+          </a:prstGeom>
+          <a:solidFill>
+            <a:srgbClr val="1F2937"/>
+          </a:solidFill>
+          <a:ln>
+            <a:noFill/>
+          </a:ln>
+          <a:effectLst/>
+        </p:spPr>
+        <p:style>
+          <a:lnRef idx="1">
+            <a:schemeClr val="accent1"/>
+          </a:lnRef>
+          <a:fillRef idx="3">
+            <a:schemeClr val="accent1"/>
+          </a:fillRef>
+          <a:effectRef idx="0">
+            <a:schemeClr val="accent1"/>
+          </a:effectRef>
+          <a:fontRef idx="minor">
+            <a:schemeClr val="lt1"/>
+          </a:fontRef>
+        </p:style>
+        <p:txBody>
+          <a:bodyPr rtlCol="0" anchor="ctr"/>
+          <a:lstStyle/>
+          <a:p>
+            <a:pPr algn="ctr"/>
+          </a:p>
+        </p:txBody>
+      </p:sp>
+      <p:sp>
+        <p:nvSpPr>
+          <p:cNvPr id="38" name="a3_g_d12" descr="Editable shape; source id a3_g_d12"/>
+          <p:cNvSpPr/>
+          <p:nvPr/>
+        </p:nvSpPr>
+        <p:spPr>
+          <a:xfrm>
+            <a:off x="1357312" y="3452812"/>
+            <a:ext cx="47624" cy="47624"/>
+          </a:xfrm>
+          <a:prstGeom prst="ellipse">
+            <a:avLst/>
+          </a:prstGeom>
+          <a:solidFill>
+            <a:srgbClr val="FFFFFF"/>
+          </a:solidFill>
+          <a:ln>
+            <a:noFill/>
+          </a:ln>
+          <a:effectLst/>
+        </p:spPr>
+        <p:style>
+          <a:lnRef idx="1">
+            <a:schemeClr val="accent1"/>
+          </a:lnRef>
+          <a:fillRef idx="3">
+            <a:schemeClr val="accent1"/>
+          </a:fillRef>
+          <a:effectRef idx="0">
+            <a:schemeClr val="accent1"/>
+          </a:effectRef>
+          <a:fontRef idx="minor">
+            <a:schemeClr val="lt1"/>
+          </a:fontRef>
+        </p:style>
+        <p:txBody>
+          <a:bodyPr rtlCol="0" anchor="ctr"/>
+          <a:lstStyle/>
+          <a:p>
+            <a:pPr algn="ctr"/>
+          </a:p>
+        </p:txBody>
+      </p:sp>
+      <p:sp>
+        <p:nvSpPr>
+          <p:cNvPr id="39" name="a3_g_d20" descr="Editable shape; source id a3_g_d20"/>
+          <p:cNvSpPr/>
+          <p:nvPr/>
+        </p:nvSpPr>
+        <p:spPr>
+          <a:xfrm>
+            <a:off x="1460499" y="3246437"/>
+            <a:ext cx="47624" cy="47624"/>
+          </a:xfrm>
+          <a:prstGeom prst="ellipse">
+            <a:avLst/>
+          </a:prstGeom>
+          <a:solidFill>
+            <a:srgbClr val="FFFFFF"/>
+          </a:solidFill>
+          <a:ln>
+            <a:noFill/>
+          </a:ln>
+          <a:effectLst/>
+        </p:spPr>
+        <p:style>
+          <a:lnRef idx="1">
+            <a:schemeClr val="accent1"/>
+          </a:lnRef>
+          <a:fillRef idx="3">
+            <a:schemeClr val="accent1"/>
+          </a:fillRef>
+          <a:effectRef idx="0">
+            <a:schemeClr val="accent1"/>
+          </a:effectRef>
+          <a:fontRef idx="minor">
+            <a:schemeClr val="lt1"/>
+          </a:fontRef>
+        </p:style>
+        <p:txBody>
+          <a:bodyPr rtlCol="0" anchor="ctr"/>
+          <a:lstStyle/>
+          <a:p>
+            <a:pPr algn="ctr"/>
+          </a:p>
+        </p:txBody>
+      </p:sp>
+      <p:sp>
+        <p:nvSpPr>
+          <p:cNvPr id="40" name="a3_g_d21" descr="Editable shape; source id a3_g_d21"/>
+          <p:cNvSpPr/>
+          <p:nvPr/>
+        </p:nvSpPr>
+        <p:spPr>
+          <a:xfrm>
+            <a:off x="1460499" y="3349624"/>
+            <a:ext cx="47624" cy="47624"/>
+          </a:xfrm>
+          <a:prstGeom prst="ellipse">
+            <a:avLst/>
+          </a:prstGeom>
+          <a:solidFill>
+            <a:srgbClr val="FFFFFF"/>
+          </a:solidFill>
+          <a:ln>
+            <a:noFill/>
+          </a:ln>
+          <a:effectLst/>
+        </p:spPr>
+        <p:style>
+          <a:lnRef idx="1">
+            <a:schemeClr val="accent1"/>
+          </a:lnRef>
+          <a:fillRef idx="3">
+            <a:schemeClr val="accent1"/>
+          </a:fillRef>
+          <a:effectRef idx="0">
+            <a:schemeClr val="accent1"/>
+          </a:effectRef>
+          <a:fontRef idx="minor">
+            <a:schemeClr val="lt1"/>
+          </a:fontRef>
+        </p:style>
+        <p:txBody>
+          <a:bodyPr rtlCol="0" anchor="ctr"/>
+          <a:lstStyle/>
+          <a:p>
+            <a:pPr algn="ctr"/>
+          </a:p>
+        </p:txBody>
+      </p:sp>
+      <p:sp>
+        <p:nvSpPr>
+          <p:cNvPr id="41" name="a3_g_d22" descr="Editable shape; source id a3_g_d22"/>
+          <p:cNvSpPr/>
+          <p:nvPr/>
+        </p:nvSpPr>
+        <p:spPr>
+          <a:xfrm>
+            <a:off x="1460499" y="3452812"/>
+            <a:ext cx="47624" cy="47624"/>
+          </a:xfrm>
+          <a:prstGeom prst="ellipse">
+            <a:avLst/>
+          </a:prstGeom>
+          <a:solidFill>
+            <a:srgbClr val="FFFFFF"/>
+          </a:solidFill>
+          <a:ln>
+            <a:noFill/>
+          </a:ln>
+          <a:effectLst/>
+        </p:spPr>
+        <p:style>
+          <a:lnRef idx="1">
+            <a:schemeClr val="accent1"/>
+          </a:lnRef>
+          <a:fillRef idx="3">
+            <a:schemeClr val="accent1"/>
+          </a:fillRef>
+          <a:effectRef idx="0">
+            <a:schemeClr val="accent1"/>
+          </a:effectRef>
+          <a:fontRef idx="minor">
+            <a:schemeClr val="lt1"/>
+          </a:fontRef>
+        </p:style>
+        <p:txBody>
+          <a:bodyPr rtlCol="0" anchor="ctr"/>
+          <a:lstStyle/>
+          <a:p>
+            <a:pPr algn="ctr"/>
+          </a:p>
+        </p:txBody>
+      </p:sp>
+      <p:sp>
+        <p:nvSpPr>
+          <p:cNvPr id="42" name="a3_t" descr="Editable text; source id a3_t"/>
           <p:cNvSpPr txBox="1"/>
           <p:nvPr/>
         </p:nvSpPr>
         <p:spPr>
           <a:xfrm>
-            <a:off x="1285874" y="3484562"/>
-            <a:ext cx="2301874" cy="285749"/>
+            <a:off x="1635124" y="3206749"/>
+            <a:ext cx="2603499" cy="325437"/>
           </a:xfrm>
           <a:prstGeom prst="rect">
             <a:avLst/>
@@ -5039,7 +5285,7 @@
           <a:p>
             <a:pPr algn="l" fontAlgn="base">
               <a:lnSpc>
-                <a:spcPts val="2203"/>
+                <a:spcPts val="2187"/>
               </a:lnSpc>
               <a:spcBef>
                 <a:spcPts val="0"/>
@@ -5047,7 +5293,7 @@
               <a:spcAft>
                 <a:spcPts val="0"/>
               </a:spcAft>
-              <a:defRPr sz="1513" b="1" i="0" lang="zh-CN" dirty="0">
+              <a:defRPr sz="1499" b="1" i="0" lang="zh-CN" dirty="0">
                 <a:solidFill>
                   <a:srgbClr val="2B3E57"/>
                 </a:solidFill>
@@ -5057,7 +5303,7 @@
               </a:defRPr>
             </a:pPr>
             <a:r>
-              <a:rPr sz="1513" b="1" i="0" lang="zh-CN" dirty="0">
+              <a:rPr sz="1499" b="1" i="0" lang="zh-CN" dirty="0">
                 <a:solidFill>
                   <a:srgbClr val="2B3E57"/>
                 </a:solidFill>
@@ -5072,18 +5318,18 @@
       </p:sp>
       <p:sp>
         <p:nvSpPr>
-          <p:cNvPr id="36" name="a4" descr="Editable shape; source id a4"/>
+          <p:cNvPr id="43" name="a4" descr="Editable shape; source id a4"/>
           <p:cNvSpPr/>
           <p:nvPr/>
         </p:nvSpPr>
         <p:spPr>
           <a:xfrm>
-            <a:off x="761999" y="4286249"/>
-            <a:ext cx="3000374" cy="984249"/>
+            <a:off x="1031874" y="3857624"/>
+            <a:ext cx="3333749" cy="809624"/>
           </a:xfrm>
           <a:prstGeom prst="roundRect">
             <a:avLst>
-              <a:gd name="adj" fmla="val 7258"/>
+              <a:gd name="adj" fmla="val 8823"/>
             </a:avLst>
           </a:prstGeom>
           <a:solidFill>
@@ -5120,18 +5366,18 @@
       </p:sp>
       <p:sp>
         <p:nvSpPr>
-          <p:cNvPr id="37" name="a4_a" descr="Editable shape; source id a4_a"/>
+          <p:cNvPr id="44" name="a4_b" descr="Editable shape; source id a4_b"/>
           <p:cNvSpPr/>
           <p:nvPr/>
         </p:nvSpPr>
         <p:spPr>
           <a:xfrm>
-            <a:off x="761999" y="4286249"/>
-            <a:ext cx="3000374" cy="47624"/>
+            <a:off x="1031874" y="3857624"/>
+            <a:ext cx="63499" cy="809624"/>
           </a:xfrm>
           <a:prstGeom prst="roundRect">
             <a:avLst>
-              <a:gd name="adj" fmla="val 50000"/>
+              <a:gd name="adj" fmla="val 37500"/>
             </a:avLst>
           </a:prstGeom>
           <a:solidFill>
@@ -5166,14 +5412,14 @@
       </p:sp>
       <p:cxnSp>
         <p:nvCxnSpPr>
-          <p:cNvPr id="38" name="a4_g_b_0" descr="Editable line; source id a4_g_b_0"/>
+          <p:cNvPr id="45" name="a4_g_b_0" descr="Editable line; source id a4_g_b_0"/>
           <p:cNvCxnSpPr/>
           <p:nvPr/>
         </p:nvCxnSpPr>
         <p:spPr>
           <a:xfrm>
-            <a:off x="992187" y="4746624"/>
-            <a:ext cx="31750" cy="150813"/>
+            <a:off x="1293812" y="4198937"/>
+            <a:ext cx="31750" cy="174625"/>
           </a:xfrm>
           <a:prstGeom prst="line">
             <a:avLst/>
@@ -5202,14 +5448,14 @@
       </p:cxnSp>
       <p:cxnSp>
         <p:nvCxnSpPr>
-          <p:cNvPr id="39" name="a4_g_b_1" descr="Editable line; source id a4_g_b_1"/>
+          <p:cNvPr id="46" name="a4_g_b_1" descr="Editable line; source id a4_g_b_1"/>
           <p:cNvCxnSpPr/>
           <p:nvPr/>
         </p:nvCxnSpPr>
         <p:spPr>
           <a:xfrm>
-            <a:off x="1023937" y="4897437"/>
-            <a:ext cx="95250" cy="0"/>
+            <a:off x="1325562" y="4373562"/>
+            <a:ext cx="111125" cy="0"/>
           </a:xfrm>
           <a:prstGeom prst="line">
             <a:avLst/>
@@ -5238,14 +5484,14 @@
       </p:cxnSp>
       <p:cxnSp>
         <p:nvCxnSpPr>
-          <p:cNvPr id="40" name="a4_g_b_2" descr="Editable line; source id a4_g_b_2"/>
+          <p:cNvPr id="47" name="a4_g_b_2" descr="Editable line; source id a4_g_b_2"/>
           <p:cNvCxnSpPr/>
           <p:nvPr/>
         </p:nvCxnSpPr>
         <p:spPr>
           <a:xfrm flipV="1">
-            <a:off x="1119187" y="4746624"/>
-            <a:ext cx="31750" cy="150813"/>
+            <a:off x="1436687" y="4198937"/>
+            <a:ext cx="31750" cy="174625"/>
           </a:xfrm>
           <a:prstGeom prst="line">
             <a:avLst/>
@@ -5274,14 +5520,14 @@
       </p:cxnSp>
       <p:cxnSp>
         <p:nvCxnSpPr>
-          <p:cNvPr id="41" name="a4_g_r" descr="Editable line; source id a4_g_r"/>
+          <p:cNvPr id="48" name="a4_g_r" descr="Editable line; source id a4_g_r"/>
           <p:cNvCxnSpPr/>
           <p:nvPr/>
         </p:nvCxnSpPr>
         <p:spPr>
           <a:xfrm>
-            <a:off x="976312" y="4746624"/>
-            <a:ext cx="190500" cy="0"/>
+            <a:off x="1269999" y="4198937"/>
+            <a:ext cx="222250" cy="0"/>
           </a:xfrm>
           <a:prstGeom prst="line">
             <a:avLst/>
@@ -5310,14 +5556,14 @@
       </p:cxnSp>
       <p:sp>
         <p:nvSpPr>
-          <p:cNvPr id="42" name="a4_t" descr="Editable text; source id a4_t"/>
+          <p:cNvPr id="49" name="a4_t" descr="Editable text; source id a4_t"/>
           <p:cNvSpPr txBox="1"/>
           <p:nvPr/>
         </p:nvSpPr>
         <p:spPr>
           <a:xfrm>
-            <a:off x="1285874" y="4659312"/>
-            <a:ext cx="2301874" cy="285749"/>
+            <a:off x="1635124" y="4095749"/>
+            <a:ext cx="2603499" cy="325437"/>
           </a:xfrm>
           <a:prstGeom prst="rect">
             <a:avLst/>
@@ -5333,7 +5579,7 @@
           <a:p>
             <a:pPr algn="l" fontAlgn="base">
               <a:lnSpc>
-                <a:spcPts val="2203"/>
+                <a:spcPts val="2187"/>
               </a:lnSpc>
               <a:spcBef>
                 <a:spcPts val="0"/>
@@ -5341,7 +5587,7 @@
               <a:spcAft>
                 <a:spcPts val="0"/>
               </a:spcAft>
-              <a:defRPr sz="1513" b="1" i="0" lang="zh-CN" dirty="0">
+              <a:defRPr sz="1499" b="1" i="0" lang="zh-CN" dirty="0">
                 <a:solidFill>
                   <a:srgbClr val="2B3E57"/>
                 </a:solidFill>
@@ -5351,7 +5597,7 @@
               </a:defRPr>
             </a:pPr>
             <a:r>
-              <a:rPr sz="1513" b="1" i="0" lang="zh-CN" dirty="0">
+              <a:rPr sz="1499" b="1" i="0" lang="zh-CN" dirty="0">
                 <a:solidFill>
                   <a:srgbClr val="2B3E57"/>
                 </a:solidFill>
@@ -5366,18 +5612,18 @@
       </p:sp>
       <p:sp>
         <p:nvSpPr>
-          <p:cNvPr id="43" name="a5" descr="Editable shape; source id a5"/>
+          <p:cNvPr id="50" name="a5" descr="Editable shape; source id a5"/>
           <p:cNvSpPr/>
           <p:nvPr/>
         </p:nvSpPr>
         <p:spPr>
           <a:xfrm>
-            <a:off x="761999" y="5937249"/>
-            <a:ext cx="3000374" cy="984249"/>
+            <a:off x="1031874" y="5556249"/>
+            <a:ext cx="3333749" cy="888999"/>
           </a:xfrm>
           <a:prstGeom prst="roundRect">
             <a:avLst>
-              <a:gd name="adj" fmla="val 7258"/>
+              <a:gd name="adj" fmla="val 8035"/>
             </a:avLst>
           </a:prstGeom>
           <a:solidFill>
@@ -5417,14 +5663,14 @@
       </p:sp>
       <p:sp>
         <p:nvSpPr>
-          <p:cNvPr id="44" name="a5_g_s0" descr="Editable shape; source id a5_g_s0"/>
+          <p:cNvPr id="51" name="a5_g_s0" descr="Editable shape; source id a5_g_s0"/>
           <p:cNvSpPr/>
           <p:nvPr/>
         </p:nvSpPr>
         <p:spPr>
           <a:xfrm>
-            <a:off x="984249" y="6334124"/>
-            <a:ext cx="126999" cy="190499"/>
+            <a:off x="1293812" y="5889624"/>
+            <a:ext cx="150812" cy="230187"/>
           </a:xfrm>
           <a:prstGeom prst="rect">
             <a:avLst/>
@@ -5461,14 +5707,14 @@
       </p:sp>
       <p:cxnSp>
         <p:nvCxnSpPr>
-          <p:cNvPr id="45" name="a5_g_l1" descr="Editable line; source id a5_g_l1"/>
+          <p:cNvPr id="52" name="a5_g_l1" descr="Editable line; source id a5_g_l1"/>
           <p:cNvCxnSpPr/>
           <p:nvPr/>
         </p:nvCxnSpPr>
         <p:spPr>
           <a:xfrm>
-            <a:off x="1015999" y="6405562"/>
-            <a:ext cx="87313" cy="0"/>
+            <a:off x="1333499" y="5968999"/>
+            <a:ext cx="103188" cy="0"/>
           </a:xfrm>
           <a:prstGeom prst="line">
             <a:avLst/>
@@ -5497,14 +5743,14 @@
       </p:cxnSp>
       <p:cxnSp>
         <p:nvCxnSpPr>
-          <p:cNvPr id="46" name="a5_g_l2" descr="Editable line; source id a5_g_l2"/>
+          <p:cNvPr id="53" name="a5_g_l2" descr="Editable line; source id a5_g_l2"/>
           <p:cNvCxnSpPr/>
           <p:nvPr/>
         </p:nvCxnSpPr>
         <p:spPr>
           <a:xfrm>
-            <a:off x="1015999" y="6437312"/>
-            <a:ext cx="87313" cy="0"/>
+            <a:off x="1333499" y="6016624"/>
+            <a:ext cx="103188" cy="0"/>
           </a:xfrm>
           <a:prstGeom prst="line">
             <a:avLst/>
@@ -5533,14 +5779,14 @@
       </p:cxnSp>
       <p:cxnSp>
         <p:nvCxnSpPr>
-          <p:cNvPr id="47" name="a5_g_l3" descr="Editable line; source id a5_g_l3"/>
+          <p:cNvPr id="54" name="a5_g_l3" descr="Editable line; source id a5_g_l3"/>
           <p:cNvCxnSpPr/>
           <p:nvPr/>
         </p:nvCxnSpPr>
         <p:spPr>
           <a:xfrm>
-            <a:off x="1015999" y="6476999"/>
-            <a:ext cx="63500" cy="0"/>
+            <a:off x="1333499" y="6056312"/>
+            <a:ext cx="71438" cy="0"/>
           </a:xfrm>
           <a:prstGeom prst="line">
             <a:avLst/>
@@ -5569,14 +5815,14 @@
       </p:cxnSp>
       <p:cxnSp>
         <p:nvCxnSpPr>
-          <p:cNvPr id="48" name="a5_g_x" descr="Editable line; source id a5_g_x"/>
+          <p:cNvPr id="55" name="a5_g_x" descr="Editable line; source id a5_g_x"/>
           <p:cNvCxnSpPr/>
           <p:nvPr/>
         </p:nvCxnSpPr>
         <p:spPr>
           <a:xfrm flipV="1">
-            <a:off x="976312" y="6318249"/>
-            <a:ext cx="190500" cy="222250"/>
+            <a:off x="1285874" y="5873749"/>
+            <a:ext cx="222250" cy="254000"/>
           </a:xfrm>
           <a:prstGeom prst="line">
             <a:avLst/>
@@ -5605,14 +5851,14 @@
       </p:cxnSp>
       <p:sp>
         <p:nvSpPr>
-          <p:cNvPr id="49" name="a5_t" descr="Editable text; source id a5_t"/>
+          <p:cNvPr id="56" name="a5_t" descr="Editable text; source id a5_t"/>
           <p:cNvSpPr txBox="1"/>
           <p:nvPr/>
         </p:nvSpPr>
         <p:spPr>
           <a:xfrm>
-            <a:off x="1285874" y="6286499"/>
-            <a:ext cx="2301874" cy="285749"/>
+            <a:off x="1650999" y="5841999"/>
+            <a:ext cx="2571749" cy="325437"/>
           </a:xfrm>
           <a:prstGeom prst="rect">
             <a:avLst/>
@@ -5628,7 +5874,7 @@
           <a:p>
             <a:pPr algn="l" fontAlgn="base">
               <a:lnSpc>
-                <a:spcPts val="2203"/>
+                <a:spcPts val="2187"/>
               </a:lnSpc>
               <a:spcBef>
                 <a:spcPts val="0"/>
@@ -5636,7 +5882,7 @@
               <a:spcAft>
                 <a:spcPts val="0"/>
               </a:spcAft>
-              <a:defRPr sz="1513" b="1" i="0" lang="zh-CN" dirty="0">
+              <a:defRPr sz="1499" b="1" i="0" lang="zh-CN" dirty="0">
                 <a:solidFill>
                   <a:srgbClr val="5B6570"/>
                 </a:solidFill>
@@ -5646,7 +5892,7 @@
               </a:defRPr>
             </a:pPr>
             <a:r>
-              <a:rPr sz="1513" b="1" i="0" lang="zh-CN" dirty="0">
+              <a:rPr sz="1499" b="1" i="0" lang="zh-CN" dirty="0">
                 <a:solidFill>
                   <a:srgbClr val="5B6570"/>
                 </a:solidFill>
@@ -5661,14 +5907,14 @@
       </p:sp>
       <p:sp>
         <p:nvSpPr>
-          <p:cNvPr id="50" name="ax_u" descr="Editable line; source id ax_u"/>
+          <p:cNvPr id="57" name="ax_u" descr="Editable line; source id ax_u"/>
           <p:cNvSpPr/>
           <p:nvPr/>
         </p:nvSpPr>
         <p:spPr>
           <a:xfrm>
-            <a:off x="456406" y="952500"/>
-            <a:ext cx="71437" cy="2555875"/>
+            <a:off x="456406" y="1381125"/>
+            <a:ext cx="71437" cy="2103437"/>
           </a:xfrm>
           <a:custGeom>
             <a:avLst/>
@@ -5677,9 +5923,9 @@
             <a:cxnLst/>
             <a:rect l="l" t="t" r="r" b="b"/>
             <a:pathLst>
-              <a:path w="9000" h="322000">
+              <a:path w="9000" h="265000">
                 <a:moveTo>
-                  <a:pt x="3700" y="322000"/>
+                  <a:pt x="3700" y="265000"/>
                 </a:moveTo>
                 <a:lnTo>
                   <a:pt x="3700" y="11000"/>
@@ -5697,7 +5943,7 @@
                   <a:pt x="5300" y="11000"/>
                 </a:lnTo>
                 <a:lnTo>
-                  <a:pt x="5300" y="322000"/>
+                  <a:pt x="5300" y="265000"/>
                 </a:lnTo>
                 <a:close/>
               </a:path>
@@ -5735,14 +5981,14 @@
       </p:sp>
       <p:sp>
         <p:nvSpPr>
-          <p:cNvPr id="51" name="ax_d" descr="Editable line; source id ax_d"/>
+          <p:cNvPr id="58" name="ax_d" descr="Editable line; source id ax_d"/>
           <p:cNvSpPr/>
           <p:nvPr/>
         </p:nvSpPr>
         <p:spPr>
           <a:xfrm>
-            <a:off x="456406" y="4175125"/>
-            <a:ext cx="71437" cy="2555875"/>
+            <a:off x="456406" y="4151312"/>
+            <a:ext cx="71437" cy="2103437"/>
           </a:xfrm>
           <a:custGeom>
             <a:avLst/>
@@ -5751,24 +5997,24 @@
             <a:cxnLst/>
             <a:rect l="l" t="t" r="r" b="b"/>
             <a:pathLst>
-              <a:path w="9000" h="322000">
+              <a:path w="9000" h="265000">
                 <a:moveTo>
                   <a:pt x="5300" y="0"/>
                 </a:moveTo>
                 <a:lnTo>
-                  <a:pt x="5300" y="311000"/>
+                  <a:pt x="5300" y="254000"/>
                 </a:lnTo>
                 <a:lnTo>
-                  <a:pt x="9000" y="311000"/>
+                  <a:pt x="9000" y="254000"/>
                 </a:lnTo>
                 <a:lnTo>
-                  <a:pt x="4500" y="322000"/>
+                  <a:pt x="4500" y="265000"/>
                 </a:lnTo>
                 <a:lnTo>
-                  <a:pt x="0" y="311000"/>
+                  <a:pt x="0" y="254000"/>
                 </a:lnTo>
                 <a:lnTo>
-                  <a:pt x="3700" y="311000"/>
+                  <a:pt x="3700" y="254000"/>
                 </a:lnTo>
                 <a:lnTo>
                   <a:pt x="3700" y="0"/>
@@ -5809,14 +6055,14 @@
       </p:sp>
       <p:sp>
         <p:nvSpPr>
-          <p:cNvPr id="52" name="ax_n" descr="Editable text; source id ax_n"/>
+          <p:cNvPr id="59" name="ax_n" descr="Editable text; source id ax_n"/>
           <p:cNvSpPr txBox="1"/>
           <p:nvPr/>
         </p:nvSpPr>
         <p:spPr>
           <a:xfrm>
-            <a:off x="317499" y="698499"/>
-            <a:ext cx="349249" cy="222249"/>
+            <a:off x="301624" y="1095374"/>
+            <a:ext cx="380999" cy="269874"/>
           </a:xfrm>
           <a:prstGeom prst="rect">
             <a:avLst/>
@@ -5865,14 +6111,14 @@
       </p:sp>
       <p:sp>
         <p:nvSpPr>
-          <p:cNvPr id="53" name="ax_f" descr="Editable text; source id ax_f"/>
+          <p:cNvPr id="60" name="ax_f" descr="Editable text; source id ax_f"/>
           <p:cNvSpPr txBox="1"/>
           <p:nvPr/>
         </p:nvSpPr>
         <p:spPr>
           <a:xfrm>
-            <a:off x="317499" y="6746874"/>
-            <a:ext cx="349249" cy="222249"/>
+            <a:off x="301624" y="6254749"/>
+            <a:ext cx="380999" cy="269874"/>
           </a:xfrm>
           <a:prstGeom prst="rect">
             <a:avLst/>
@@ -5921,14 +6167,14 @@
       </p:sp>
       <p:sp>
         <p:nvSpPr>
-          <p:cNvPr id="54" name="ax_l" descr="Editable text; source id ax_l"/>
+          <p:cNvPr id="61" name="ax_l" descr="Editable text; source id ax_l"/>
           <p:cNvSpPr txBox="1"/>
           <p:nvPr/>
         </p:nvSpPr>
         <p:spPr>
           <a:xfrm rot="16200000">
-            <a:off x="-230187" y="3730624"/>
-            <a:ext cx="1127124" cy="214312"/>
+            <a:off x="-261937" y="3698874"/>
+            <a:ext cx="1190624" cy="246062"/>
           </a:xfrm>
           <a:prstGeom prst="rect">
             <a:avLst/>
@@ -5977,18 +6223,18 @@
       </p:sp>
       <p:sp>
         <p:nvSpPr>
-          <p:cNvPr id="55" name="led" descr="Editable shape; source id led"/>
+          <p:cNvPr id="62" name="led" descr="Editable shape; source id led"/>
           <p:cNvSpPr/>
           <p:nvPr/>
         </p:nvSpPr>
         <p:spPr>
           <a:xfrm>
-            <a:off x="4444999" y="761999"/>
-            <a:ext cx="3270249" cy="6159499"/>
+            <a:off x="4921249" y="1190624"/>
+            <a:ext cx="3032124" cy="4286249"/>
           </a:xfrm>
           <a:prstGeom prst="roundRect">
             <a:avLst>
-              <a:gd name="adj" fmla="val 2184"/>
+              <a:gd name="adj" fmla="val 2356"/>
             </a:avLst>
           </a:prstGeom>
           <a:solidFill>
@@ -6025,18 +6271,18 @@
       </p:sp>
       <p:sp>
         <p:nvSpPr>
-          <p:cNvPr id="56" name="led_a" descr="Editable shape; source id led_a"/>
+          <p:cNvPr id="63" name="led_b" descr="Editable shape; source id led_b"/>
           <p:cNvSpPr/>
           <p:nvPr/>
         </p:nvSpPr>
         <p:spPr>
           <a:xfrm>
-            <a:off x="4444999" y="761999"/>
-            <a:ext cx="3270249" cy="47624"/>
+            <a:off x="4921249" y="1190624"/>
+            <a:ext cx="63499" cy="4286249"/>
           </a:xfrm>
           <a:prstGeom prst="roundRect">
             <a:avLst>
-              <a:gd name="adj" fmla="val 50000"/>
+              <a:gd name="adj" fmla="val 37500"/>
             </a:avLst>
           </a:prstGeom>
           <a:solidFill>
@@ -6071,14 +6317,14 @@
       </p:sp>
       <p:sp>
         <p:nvSpPr>
-          <p:cNvPr id="57" name="led_g_b" descr="Editable shape; source id led_g_b"/>
+          <p:cNvPr id="64" name="led_g_b" descr="Editable shape; source id led_g_b"/>
           <p:cNvSpPr/>
           <p:nvPr/>
         </p:nvSpPr>
         <p:spPr>
           <a:xfrm>
-            <a:off x="4635499" y="1031874"/>
-            <a:ext cx="206374" cy="174624"/>
+            <a:off x="5183187" y="1476374"/>
+            <a:ext cx="261937" cy="230187"/>
           </a:xfrm>
           <a:prstGeom prst="rect">
             <a:avLst/>
@@ -6115,14 +6361,14 @@
       </p:sp>
       <p:cxnSp>
         <p:nvCxnSpPr>
-          <p:cNvPr id="58" name="led_g_r1" descr="Editable line; source id led_g_r1"/>
+          <p:cNvPr id="65" name="led_g_r1" descr="Editable line; source id led_g_r1"/>
           <p:cNvCxnSpPr/>
           <p:nvPr/>
         </p:nvCxnSpPr>
         <p:spPr>
           <a:xfrm>
-            <a:off x="4635499" y="1087437"/>
-            <a:ext cx="206375" cy="0"/>
+            <a:off x="5183187" y="1555749"/>
+            <a:ext cx="269875" cy="0"/>
           </a:xfrm>
           <a:prstGeom prst="line">
             <a:avLst/>
@@ -6151,14 +6397,14 @@
       </p:cxnSp>
       <p:cxnSp>
         <p:nvCxnSpPr>
-          <p:cNvPr id="59" name="led_g_r2" descr="Editable line; source id led_g_r2"/>
+          <p:cNvPr id="66" name="led_g_r2" descr="Editable line; source id led_g_r2"/>
           <p:cNvCxnSpPr/>
           <p:nvPr/>
         </p:nvCxnSpPr>
         <p:spPr>
           <a:xfrm>
-            <a:off x="4635499" y="1150937"/>
-            <a:ext cx="206375" cy="0"/>
+            <a:off x="5183187" y="1627187"/>
+            <a:ext cx="269875" cy="0"/>
           </a:xfrm>
           <a:prstGeom prst="line">
             <a:avLst/>
@@ -6187,14 +6433,14 @@
       </p:cxnSp>
       <p:cxnSp>
         <p:nvCxnSpPr>
-          <p:cNvPr id="60" name="led_g_c1" descr="Editable line; source id led_g_c1"/>
+          <p:cNvPr id="67" name="led_g_c1" descr="Editable line; source id led_g_c1"/>
           <p:cNvCxnSpPr/>
           <p:nvPr/>
         </p:nvCxnSpPr>
         <p:spPr>
           <a:xfrm>
-            <a:off x="4706937" y="1031874"/>
-            <a:ext cx="0" cy="174625"/>
+            <a:off x="5270499" y="1476374"/>
+            <a:ext cx="0" cy="230188"/>
           </a:xfrm>
           <a:prstGeom prst="line">
             <a:avLst/>
@@ -6223,14 +6469,14 @@
       </p:cxnSp>
       <p:cxnSp>
         <p:nvCxnSpPr>
-          <p:cNvPr id="61" name="led_g_c2" descr="Editable line; source id led_g_c2"/>
+          <p:cNvPr id="68" name="led_g_c2" descr="Editable line; source id led_g_c2"/>
           <p:cNvCxnSpPr/>
           <p:nvPr/>
         </p:nvCxnSpPr>
         <p:spPr>
           <a:xfrm>
-            <a:off x="4770437" y="1031874"/>
-            <a:ext cx="0" cy="174625"/>
+            <a:off x="5365749" y="1476374"/>
+            <a:ext cx="0" cy="230188"/>
           </a:xfrm>
           <a:prstGeom prst="line">
             <a:avLst/>
@@ -6259,14 +6505,14 @@
       </p:cxnSp>
       <p:sp>
         <p:nvSpPr>
-          <p:cNvPr id="62" name="led_t" descr="Editable text; source id led_t"/>
+          <p:cNvPr id="69" name="led_t" descr="Editable text; source id led_t"/>
           <p:cNvSpPr txBox="1"/>
           <p:nvPr/>
         </p:nvSpPr>
         <p:spPr>
           <a:xfrm>
-            <a:off x="4952999" y="968374"/>
-            <a:ext cx="2603499" cy="293687"/>
+            <a:off x="5587999" y="1412874"/>
+            <a:ext cx="2238374" cy="349249"/>
           </a:xfrm>
           <a:prstGeom prst="rect">
             <a:avLst/>
@@ -6282,7 +6528,7 @@
           <a:p>
             <a:pPr algn="l" fontAlgn="base">
               <a:lnSpc>
-                <a:spcPts val="2281"/>
+                <a:spcPts val="2265"/>
               </a:lnSpc>
               <a:spcBef>
                 <a:spcPts val="0"/>
@@ -6290,7 +6536,7 @@
               <a:spcAft>
                 <a:spcPts val="0"/>
               </a:spcAft>
-              <a:defRPr sz="1573" b="1" i="0" lang="zh-CN" dirty="0">
+              <a:defRPr sz="1562" b="1" i="0" lang="zh-CN" dirty="0">
                 <a:solidFill>
                   <a:srgbClr val="0F4F58"/>
                 </a:solidFill>
@@ -6300,7 +6546,7 @@
               </a:defRPr>
             </a:pPr>
             <a:r>
-              <a:rPr sz="1573" b="1" i="0" lang="zh-CN" dirty="0">
+              <a:rPr sz="1562" b="1" i="0" lang="zh-CN" dirty="0">
                 <a:solidFill>
                   <a:srgbClr val="0F4F58"/>
                 </a:solidFill>
@@ -6315,18 +6561,18 @@
       </p:sp>
       <p:sp>
         <p:nvSpPr>
-          <p:cNvPr id="63" name="ledr_r0" descr="Editable shape; source id ledr_r0"/>
+          <p:cNvPr id="70" name="ledr_r0" descr="Editable shape; source id ledr_r0"/>
           <p:cNvSpPr/>
           <p:nvPr/>
         </p:nvSpPr>
         <p:spPr>
           <a:xfrm>
-            <a:off x="4635499" y="1452562"/>
-            <a:ext cx="2889249" cy="754062"/>
+            <a:off x="5143499" y="1968499"/>
+            <a:ext cx="2619374" cy="484187"/>
           </a:xfrm>
           <a:prstGeom prst="roundRect">
             <a:avLst>
-              <a:gd name="adj" fmla="val 6315"/>
+              <a:gd name="adj" fmla="val 9836"/>
             </a:avLst>
           </a:prstGeom>
           <a:solidFill>
@@ -6363,14 +6609,130 @@
       </p:sp>
       <p:sp>
         <p:nvSpPr>
-          <p:cNvPr id="64" name="ledr_r0_t" descr="Editable text; source id ledr_r0_t"/>
+          <p:cNvPr id="71" name="ledr_c0_b" descr="Editable shape; source id ledr_c0_b"/>
+          <p:cNvSpPr/>
+          <p:nvPr/>
+        </p:nvSpPr>
+        <p:spPr>
+          <a:xfrm>
+            <a:off x="5254624" y="2135187"/>
+            <a:ext cx="142874" cy="142874"/>
+          </a:xfrm>
+          <a:prstGeom prst="rect">
+            <a:avLst/>
+          </a:prstGeom>
+          <a:noFill/>
+          <a:ln w="7937">
+            <a:solidFill>
+              <a:srgbClr val="1F2937"/>
+            </a:solidFill>
+          </a:ln>
+          <a:effectLst/>
+        </p:spPr>
+        <p:style>
+          <a:lnRef idx="1">
+            <a:schemeClr val="accent1"/>
+          </a:lnRef>
+          <a:fillRef idx="3">
+            <a:schemeClr val="accent1"/>
+          </a:fillRef>
+          <a:effectRef idx="0">
+            <a:schemeClr val="accent1"/>
+          </a:effectRef>
+          <a:fontRef idx="minor">
+            <a:schemeClr val="lt1"/>
+          </a:fontRef>
+        </p:style>
+        <p:txBody>
+          <a:bodyPr rtlCol="0" anchor="ctr"/>
+          <a:lstStyle/>
+          <a:p>
+            <a:pPr algn="ctr"/>
+          </a:p>
+        </p:txBody>
+      </p:sp>
+      <p:cxnSp>
+        <p:nvCxnSpPr>
+          <p:cNvPr id="72" name="ledr_c0_k_0" descr="Editable line; source id ledr_c0_k_0"/>
+          <p:cNvCxnSpPr/>
+          <p:nvPr/>
+        </p:nvCxnSpPr>
+        <p:spPr>
+          <a:xfrm>
+            <a:off x="5286374" y="2214562"/>
+            <a:ext cx="31750" cy="31750"/>
+          </a:xfrm>
+          <a:prstGeom prst="line">
+            <a:avLst/>
+          </a:prstGeom>
+          <a:ln w="10318">
+            <a:solidFill>
+              <a:srgbClr val="1F2937"/>
+            </a:solidFill>
+          </a:ln>
+          <a:effectLst/>
+        </p:spPr>
+        <p:style>
+          <a:lnRef idx="2">
+            <a:schemeClr val="accent1"/>
+          </a:lnRef>
+          <a:fillRef idx="0">
+            <a:schemeClr val="accent1"/>
+          </a:fillRef>
+          <a:effectRef idx="0">
+            <a:schemeClr val="accent1"/>
+          </a:effectRef>
+          <a:fontRef idx="minor">
+            <a:schemeClr val="tx1"/>
+          </a:fontRef>
+        </p:style>
+      </p:cxnSp>
+      <p:cxnSp>
+        <p:nvCxnSpPr>
+          <p:cNvPr id="73" name="ledr_c0_k_1" descr="Editable line; source id ledr_c0_k_1"/>
+          <p:cNvCxnSpPr/>
+          <p:nvPr/>
+        </p:nvCxnSpPr>
+        <p:spPr>
+          <a:xfrm flipV="1">
+            <a:off x="5318124" y="2174874"/>
+            <a:ext cx="55563" cy="71438"/>
+          </a:xfrm>
+          <a:prstGeom prst="line">
+            <a:avLst/>
+          </a:prstGeom>
+          <a:ln w="10318">
+            <a:solidFill>
+              <a:srgbClr val="1F2937"/>
+            </a:solidFill>
+          </a:ln>
+          <a:effectLst/>
+        </p:spPr>
+        <p:style>
+          <a:lnRef idx="2">
+            <a:schemeClr val="accent1"/>
+          </a:lnRef>
+          <a:fillRef idx="0">
+            <a:schemeClr val="accent1"/>
+          </a:fillRef>
+          <a:effectRef idx="0">
+            <a:schemeClr val="accent1"/>
+          </a:effectRef>
+          <a:fontRef idx="minor">
+            <a:schemeClr val="tx1"/>
+          </a:fontRef>
+        </p:style>
+      </p:cxnSp>
+      <p:sp>
+        <p:nvSpPr>
+          <p:cNvPr id="74" name="ledr_x0" descr="Editable text; source id ledr_x0"/>
           <p:cNvSpPr txBox="1"/>
           <p:nvPr/>
         </p:nvSpPr>
         <p:spPr>
           <a:xfrm>
-            <a:off x="4691062" y="1484312"/>
-            <a:ext cx="2778124" cy="690562"/>
+            <a:off x="5508624" y="2071687"/>
+            <a:ext cx="2127249" cy="277812"/>
           </a:xfrm>
           <a:prstGeom prst="rect">
             <a:avLst/>
@@ -6384,9 +6746,9 @@
           </a:bodyPr>
           <a:lstStyle/>
           <a:p>
-            <a:pPr algn="ctr" fontAlgn="base">
+            <a:pPr algn="l" fontAlgn="base">
               <a:lnSpc>
-                <a:spcPts val="1921"/>
+                <a:spcPts val="1828"/>
               </a:lnSpc>
               <a:spcBef>
                 <a:spcPts val="0"/>
@@ -6394,7 +6756,7 @@
               <a:spcAft>
                 <a:spcPts val="0"/>
               </a:spcAft>
-              <a:defRPr sz="1312" b="0" i="0" lang="zh-CN" dirty="0">
+              <a:defRPr sz="1249" b="0" i="0" lang="zh-CN" dirty="0">
                 <a:solidFill>
                   <a:srgbClr val="3F4854"/>
                 </a:solidFill>
@@ -6404,7 +6766,7 @@
               </a:defRPr>
             </a:pPr>
             <a:r>
-              <a:rPr sz="1312" b="0" i="0" lang="zh-CN" dirty="0">
+              <a:rPr sz="1249" b="0" i="0" lang="zh-CN" dirty="0">
                 <a:solidFill>
                   <a:srgbClr val="3F4854"/>
                 </a:solidFill>
@@ -6417,92 +6779,20 @@
           </a:p>
         </p:txBody>
       </p:sp>
-      <p:cxnSp>
-        <p:nvCxnSpPr>
-          <p:cNvPr id="65" name="ledr_k0a" descr="Editable line; source id ledr_k0a"/>
-          <p:cNvCxnSpPr/>
-          <p:nvPr/>
-        </p:nvCxnSpPr>
-        <p:spPr>
-          <a:xfrm>
-            <a:off x="7318374" y="1825624"/>
-            <a:ext cx="47625" cy="47625"/>
-          </a:xfrm>
-          <a:prstGeom prst="line">
-            <a:avLst/>
-          </a:prstGeom>
-          <a:ln w="12699">
-            <a:solidFill>
-              <a:srgbClr val="4B5563"/>
-            </a:solidFill>
-          </a:ln>
-          <a:effectLst/>
-        </p:spPr>
-        <p:style>
-          <a:lnRef idx="2">
-            <a:schemeClr val="accent1"/>
-          </a:lnRef>
-          <a:fillRef idx="0">
-            <a:schemeClr val="accent1"/>
-          </a:fillRef>
-          <a:effectRef idx="0">
-            <a:schemeClr val="accent1"/>
-          </a:effectRef>
-          <a:fontRef idx="minor">
-            <a:schemeClr val="tx1"/>
-          </a:fontRef>
-        </p:style>
-      </p:cxnSp>
-      <p:cxnSp>
-        <p:nvCxnSpPr>
-          <p:cNvPr id="66" name="ledr_k0b" descr="Editable line; source id ledr_k0b"/>
-          <p:cNvCxnSpPr/>
-          <p:nvPr/>
-        </p:nvCxnSpPr>
-        <p:spPr>
-          <a:xfrm flipV="1">
-            <a:off x="7365999" y="1777999"/>
-            <a:ext cx="79375" cy="95250"/>
-          </a:xfrm>
-          <a:prstGeom prst="line">
-            <a:avLst/>
-          </a:prstGeom>
-          <a:ln w="12699">
-            <a:solidFill>
-              <a:srgbClr val="4B5563"/>
-            </a:solidFill>
-          </a:ln>
-          <a:effectLst/>
-        </p:spPr>
-        <p:style>
-          <a:lnRef idx="2">
-            <a:schemeClr val="accent1"/>
-          </a:lnRef>
-          <a:fillRef idx="0">
-            <a:schemeClr val="accent1"/>
-          </a:fillRef>
-          <a:effectRef idx="0">
-            <a:schemeClr val="accent1"/>
-          </a:effectRef>
-          <a:fontRef idx="minor">
-            <a:schemeClr val="tx1"/>
-          </a:fontRef>
-        </p:style>
-      </p:cxnSp>
-      <p:sp>
-        <p:nvSpPr>
-          <p:cNvPr id="67" name="ledr_r1" descr="Editable shape; source id ledr_r1"/>
+      <p:sp>
+        <p:nvSpPr>
+          <p:cNvPr id="75" name="ledr_r1" descr="Editable shape; source id ledr_r1"/>
           <p:cNvSpPr/>
           <p:nvPr/>
         </p:nvSpPr>
         <p:spPr>
           <a:xfrm>
-            <a:off x="4635499" y="2349499"/>
-            <a:ext cx="2889249" cy="754062"/>
+            <a:off x="5143499" y="2532062"/>
+            <a:ext cx="2619374" cy="484187"/>
           </a:xfrm>
           <a:prstGeom prst="roundRect">
             <a:avLst>
-              <a:gd name="adj" fmla="val 6315"/>
+              <a:gd name="adj" fmla="val 9836"/>
             </a:avLst>
           </a:prstGeom>
           <a:solidFill>
@@ -6539,14 +6829,130 @@
       </p:sp>
       <p:sp>
         <p:nvSpPr>
-          <p:cNvPr id="68" name="ledr_r1_t" descr="Editable text; source id ledr_r1_t"/>
+          <p:cNvPr id="76" name="ledr_c1_b" descr="Editable shape; source id ledr_c1_b"/>
+          <p:cNvSpPr/>
+          <p:nvPr/>
+        </p:nvSpPr>
+        <p:spPr>
+          <a:xfrm>
+            <a:off x="5254624" y="2698749"/>
+            <a:ext cx="142874" cy="142874"/>
+          </a:xfrm>
+          <a:prstGeom prst="rect">
+            <a:avLst/>
+          </a:prstGeom>
+          <a:noFill/>
+          <a:ln w="7937">
+            <a:solidFill>
+              <a:srgbClr val="1F2937"/>
+            </a:solidFill>
+          </a:ln>
+          <a:effectLst/>
+        </p:spPr>
+        <p:style>
+          <a:lnRef idx="1">
+            <a:schemeClr val="accent1"/>
+          </a:lnRef>
+          <a:fillRef idx="3">
+            <a:schemeClr val="accent1"/>
+          </a:fillRef>
+          <a:effectRef idx="0">
+            <a:schemeClr val="accent1"/>
+          </a:effectRef>
+          <a:fontRef idx="minor">
+            <a:schemeClr val="lt1"/>
+          </a:fontRef>
+        </p:style>
+        <p:txBody>
+          <a:bodyPr rtlCol="0" anchor="ctr"/>
+          <a:lstStyle/>
+          <a:p>
+            <a:pPr algn="ctr"/>
+          </a:p>
+        </p:txBody>
+      </p:sp>
+      <p:cxnSp>
+        <p:nvCxnSpPr>
+          <p:cNvPr id="77" name="ledr_c1_k_0" descr="Editable line; source id ledr_c1_k_0"/>
+          <p:cNvCxnSpPr/>
+          <p:nvPr/>
+        </p:nvCxnSpPr>
+        <p:spPr>
+          <a:xfrm>
+            <a:off x="5286374" y="2770187"/>
+            <a:ext cx="31750" cy="31750"/>
+          </a:xfrm>
+          <a:prstGeom prst="line">
+            <a:avLst/>
+          </a:prstGeom>
+          <a:ln w="10318">
+            <a:solidFill>
+              <a:srgbClr val="1F2937"/>
+            </a:solidFill>
+          </a:ln>
+          <a:effectLst/>
+        </p:spPr>
+        <p:style>
+          <a:lnRef idx="2">
+            <a:schemeClr val="accent1"/>
+          </a:lnRef>
+          <a:fillRef idx="0">
+            <a:schemeClr val="accent1"/>
+          </a:fillRef>
+          <a:effectRef idx="0">
+            <a:schemeClr val="accent1"/>
+          </a:effectRef>
+          <a:fontRef idx="minor">
+            <a:schemeClr val="tx1"/>
+          </a:fontRef>
+        </p:style>
+      </p:cxnSp>
+      <p:cxnSp>
+        <p:nvCxnSpPr>
+          <p:cNvPr id="78" name="ledr_c1_k_1" descr="Editable line; source id ledr_c1_k_1"/>
+          <p:cNvCxnSpPr/>
+          <p:nvPr/>
+        </p:nvCxnSpPr>
+        <p:spPr>
+          <a:xfrm flipV="1">
+            <a:off x="5318124" y="2738437"/>
+            <a:ext cx="55563" cy="63500"/>
+          </a:xfrm>
+          <a:prstGeom prst="line">
+            <a:avLst/>
+          </a:prstGeom>
+          <a:ln w="10318">
+            <a:solidFill>
+              <a:srgbClr val="1F2937"/>
+            </a:solidFill>
+          </a:ln>
+          <a:effectLst/>
+        </p:spPr>
+        <p:style>
+          <a:lnRef idx="2">
+            <a:schemeClr val="accent1"/>
+          </a:lnRef>
+          <a:fillRef idx="0">
+            <a:schemeClr val="accent1"/>
+          </a:fillRef>
+          <a:effectRef idx="0">
+            <a:schemeClr val="accent1"/>
+          </a:effectRef>
+          <a:fontRef idx="minor">
+            <a:schemeClr val="tx1"/>
+          </a:fontRef>
+        </p:style>
+      </p:cxnSp>
+      <p:sp>
+        <p:nvSpPr>
+          <p:cNvPr id="79" name="ledr_x1" descr="Editable text; source id ledr_x1"/>
           <p:cNvSpPr txBox="1"/>
           <p:nvPr/>
         </p:nvSpPr>
         <p:spPr>
           <a:xfrm>
-            <a:off x="4691062" y="2381249"/>
-            <a:ext cx="2778124" cy="690562"/>
+            <a:off x="5508624" y="2627312"/>
+            <a:ext cx="2127249" cy="277812"/>
           </a:xfrm>
           <a:prstGeom prst="rect">
             <a:avLst/>
@@ -6560,9 +6966,9 @@
           </a:bodyPr>
           <a:lstStyle/>
           <a:p>
-            <a:pPr algn="ctr" fontAlgn="base">
+            <a:pPr algn="l" fontAlgn="base">
               <a:lnSpc>
-                <a:spcPts val="1921"/>
+                <a:spcPts val="1828"/>
               </a:lnSpc>
               <a:spcBef>
                 <a:spcPts val="0"/>
@@ -6570,7 +6976,7 @@
               <a:spcAft>
                 <a:spcPts val="0"/>
               </a:spcAft>
-              <a:defRPr sz="1312" b="0" i="0" lang="zh-CN" dirty="0">
+              <a:defRPr sz="1249" b="0" i="0" lang="zh-CN" dirty="0">
                 <a:solidFill>
                   <a:srgbClr val="3F4854"/>
                 </a:solidFill>
@@ -6580,7 +6986,7 @@
               </a:defRPr>
             </a:pPr>
             <a:r>
-              <a:rPr sz="1312" b="0" i="0" lang="zh-CN" dirty="0">
+              <a:rPr sz="1249" b="0" i="0" lang="zh-CN" dirty="0">
                 <a:solidFill>
                   <a:srgbClr val="3F4854"/>
                 </a:solidFill>
@@ -6593,92 +6999,20 @@
           </a:p>
         </p:txBody>
       </p:sp>
-      <p:cxnSp>
-        <p:nvCxnSpPr>
-          <p:cNvPr id="69" name="ledr_k1a" descr="Editable line; source id ledr_k1a"/>
-          <p:cNvCxnSpPr/>
-          <p:nvPr/>
-        </p:nvCxnSpPr>
-        <p:spPr>
-          <a:xfrm>
-            <a:off x="7318374" y="2730499"/>
-            <a:ext cx="47625" cy="47625"/>
-          </a:xfrm>
-          <a:prstGeom prst="line">
-            <a:avLst/>
-          </a:prstGeom>
-          <a:ln w="12699">
-            <a:solidFill>
-              <a:srgbClr val="4B5563"/>
-            </a:solidFill>
-          </a:ln>
-          <a:effectLst/>
-        </p:spPr>
-        <p:style>
-          <a:lnRef idx="2">
-            <a:schemeClr val="accent1"/>
-          </a:lnRef>
-          <a:fillRef idx="0">
-            <a:schemeClr val="accent1"/>
-          </a:fillRef>
-          <a:effectRef idx="0">
-            <a:schemeClr val="accent1"/>
-          </a:effectRef>
-          <a:fontRef idx="minor">
-            <a:schemeClr val="tx1"/>
-          </a:fontRef>
-        </p:style>
-      </p:cxnSp>
-      <p:cxnSp>
-        <p:nvCxnSpPr>
-          <p:cNvPr id="70" name="ledr_k1b" descr="Editable line; source id ledr_k1b"/>
-          <p:cNvCxnSpPr/>
-          <p:nvPr/>
-        </p:nvCxnSpPr>
-        <p:spPr>
-          <a:xfrm flipV="1">
-            <a:off x="7365999" y="2666999"/>
-            <a:ext cx="79375" cy="111125"/>
-          </a:xfrm>
-          <a:prstGeom prst="line">
-            <a:avLst/>
-          </a:prstGeom>
-          <a:ln w="12699">
-            <a:solidFill>
-              <a:srgbClr val="4B5563"/>
-            </a:solidFill>
-          </a:ln>
-          <a:effectLst/>
-        </p:spPr>
-        <p:style>
-          <a:lnRef idx="2">
-            <a:schemeClr val="accent1"/>
-          </a:lnRef>
-          <a:fillRef idx="0">
-            <a:schemeClr val="accent1"/>
-          </a:fillRef>
-          <a:effectRef idx="0">
-            <a:schemeClr val="accent1"/>
-          </a:effectRef>
-          <a:fontRef idx="minor">
-            <a:schemeClr val="tx1"/>
-          </a:fontRef>
-        </p:style>
-      </p:cxnSp>
-      <p:sp>
-        <p:nvSpPr>
-          <p:cNvPr id="71" name="ledr_r2" descr="Editable shape; source id ledr_r2"/>
+      <p:sp>
+        <p:nvSpPr>
+          <p:cNvPr id="80" name="ledr_r2" descr="Editable shape; source id ledr_r2"/>
           <p:cNvSpPr/>
           <p:nvPr/>
         </p:nvSpPr>
         <p:spPr>
           <a:xfrm>
-            <a:off x="4635499" y="3246437"/>
-            <a:ext cx="2889249" cy="754062"/>
+            <a:off x="5143499" y="3087687"/>
+            <a:ext cx="2619374" cy="484187"/>
           </a:xfrm>
           <a:prstGeom prst="roundRect">
             <a:avLst>
-              <a:gd name="adj" fmla="val 6315"/>
+              <a:gd name="adj" fmla="val 9836"/>
             </a:avLst>
           </a:prstGeom>
           <a:solidFill>
@@ -6715,14 +7049,130 @@
       </p:sp>
       <p:sp>
         <p:nvSpPr>
-          <p:cNvPr id="72" name="ledr_r2_t" descr="Editable text; source id ledr_r2_t"/>
+          <p:cNvPr id="81" name="ledr_c2_b" descr="Editable shape; source id ledr_c2_b"/>
+          <p:cNvSpPr/>
+          <p:nvPr/>
+        </p:nvSpPr>
+        <p:spPr>
+          <a:xfrm>
+            <a:off x="5254624" y="3254374"/>
+            <a:ext cx="142874" cy="142874"/>
+          </a:xfrm>
+          <a:prstGeom prst="rect">
+            <a:avLst/>
+          </a:prstGeom>
+          <a:noFill/>
+          <a:ln w="7937">
+            <a:solidFill>
+              <a:srgbClr val="1F2937"/>
+            </a:solidFill>
+          </a:ln>
+          <a:effectLst/>
+        </p:spPr>
+        <p:style>
+          <a:lnRef idx="1">
+            <a:schemeClr val="accent1"/>
+          </a:lnRef>
+          <a:fillRef idx="3">
+            <a:schemeClr val="accent1"/>
+          </a:fillRef>
+          <a:effectRef idx="0">
+            <a:schemeClr val="accent1"/>
+          </a:effectRef>
+          <a:fontRef idx="minor">
+            <a:schemeClr val="lt1"/>
+          </a:fontRef>
+        </p:style>
+        <p:txBody>
+          <a:bodyPr rtlCol="0" anchor="ctr"/>
+          <a:lstStyle/>
+          <a:p>
+            <a:pPr algn="ctr"/>
+          </a:p>
+        </p:txBody>
+      </p:sp>
+      <p:cxnSp>
+        <p:nvCxnSpPr>
+          <p:cNvPr id="82" name="ledr_c2_k_0" descr="Editable line; source id ledr_c2_k_0"/>
+          <p:cNvCxnSpPr/>
+          <p:nvPr/>
+        </p:nvCxnSpPr>
+        <p:spPr>
+          <a:xfrm>
+            <a:off x="5286374" y="3333749"/>
+            <a:ext cx="31750" cy="31750"/>
+          </a:xfrm>
+          <a:prstGeom prst="line">
+            <a:avLst/>
+          </a:prstGeom>
+          <a:ln w="10318">
+            <a:solidFill>
+              <a:srgbClr val="1F2937"/>
+            </a:solidFill>
+          </a:ln>
+          <a:effectLst/>
+        </p:spPr>
+        <p:style>
+          <a:lnRef idx="2">
+            <a:schemeClr val="accent1"/>
+          </a:lnRef>
+          <a:fillRef idx="0">
+            <a:schemeClr val="accent1"/>
+          </a:fillRef>
+          <a:effectRef idx="0">
+            <a:schemeClr val="accent1"/>
+          </a:effectRef>
+          <a:fontRef idx="minor">
+            <a:schemeClr val="tx1"/>
+          </a:fontRef>
+        </p:style>
+      </p:cxnSp>
+      <p:cxnSp>
+        <p:nvCxnSpPr>
+          <p:cNvPr id="83" name="ledr_c2_k_1" descr="Editable line; source id ledr_c2_k_1"/>
+          <p:cNvCxnSpPr/>
+          <p:nvPr/>
+        </p:nvCxnSpPr>
+        <p:spPr>
+          <a:xfrm flipV="1">
+            <a:off x="5318124" y="3294062"/>
+            <a:ext cx="55563" cy="71437"/>
+          </a:xfrm>
+          <a:prstGeom prst="line">
+            <a:avLst/>
+          </a:prstGeom>
+          <a:ln w="10318">
+            <a:solidFill>
+              <a:srgbClr val="1F2937"/>
+            </a:solidFill>
+          </a:ln>
+          <a:effectLst/>
+        </p:spPr>
+        <p:style>
+          <a:lnRef idx="2">
+            <a:schemeClr val="accent1"/>
+          </a:lnRef>
+          <a:fillRef idx="0">
+            <a:schemeClr val="accent1"/>
+          </a:fillRef>
+          <a:effectRef idx="0">
+            <a:schemeClr val="accent1"/>
+          </a:effectRef>
+          <a:fontRef idx="minor">
+            <a:schemeClr val="tx1"/>
+          </a:fontRef>
+        </p:style>
+      </p:cxnSp>
+      <p:sp>
+        <p:nvSpPr>
+          <p:cNvPr id="84" name="ledr_x2" descr="Editable text; source id ledr_x2"/>
           <p:cNvSpPr txBox="1"/>
           <p:nvPr/>
         </p:nvSpPr>
         <p:spPr>
           <a:xfrm>
-            <a:off x="4691062" y="3278187"/>
-            <a:ext cx="2778124" cy="690562"/>
+            <a:off x="5508624" y="3190874"/>
+            <a:ext cx="2127249" cy="277812"/>
           </a:xfrm>
           <a:prstGeom prst="rect">
             <a:avLst/>
@@ -6736,9 +7186,9 @@
           </a:bodyPr>
           <a:lstStyle/>
           <a:p>
-            <a:pPr algn="ctr" fontAlgn="base">
+            <a:pPr algn="l" fontAlgn="base">
               <a:lnSpc>
-                <a:spcPts val="1921"/>
+                <a:spcPts val="1828"/>
               </a:lnSpc>
               <a:spcBef>
                 <a:spcPts val="0"/>
@@ -6746,7 +7196,7 @@
               <a:spcAft>
                 <a:spcPts val="0"/>
               </a:spcAft>
-              <a:defRPr sz="1312" b="0" i="0" lang="zh-CN" dirty="0">
+              <a:defRPr sz="1249" b="0" i="0" lang="zh-CN" dirty="0">
                 <a:solidFill>
                   <a:srgbClr val="3F4854"/>
                 </a:solidFill>
@@ -6756,7 +7206,7 @@
               </a:defRPr>
             </a:pPr>
             <a:r>
-              <a:rPr sz="1312" b="0" i="0" lang="zh-CN" dirty="0">
+              <a:rPr sz="1249" b="0" i="0" lang="zh-CN" dirty="0">
                 <a:solidFill>
                   <a:srgbClr val="3F4854"/>
                 </a:solidFill>
@@ -6769,92 +7219,20 @@
           </a:p>
         </p:txBody>
       </p:sp>
-      <p:cxnSp>
-        <p:nvCxnSpPr>
-          <p:cNvPr id="73" name="ledr_k2a" descr="Editable line; source id ledr_k2a"/>
-          <p:cNvCxnSpPr/>
-          <p:nvPr/>
-        </p:nvCxnSpPr>
-        <p:spPr>
-          <a:xfrm>
-            <a:off x="7318374" y="3619499"/>
-            <a:ext cx="47625" cy="47625"/>
-          </a:xfrm>
-          <a:prstGeom prst="line">
-            <a:avLst/>
-          </a:prstGeom>
-          <a:ln w="12699">
-            <a:solidFill>
-              <a:srgbClr val="4B5563"/>
-            </a:solidFill>
-          </a:ln>
-          <a:effectLst/>
-        </p:spPr>
-        <p:style>
-          <a:lnRef idx="2">
-            <a:schemeClr val="accent1"/>
-          </a:lnRef>
-          <a:fillRef idx="0">
-            <a:schemeClr val="accent1"/>
-          </a:fillRef>
-          <a:effectRef idx="0">
-            <a:schemeClr val="accent1"/>
-          </a:effectRef>
-          <a:fontRef idx="minor">
-            <a:schemeClr val="tx1"/>
-          </a:fontRef>
-        </p:style>
-      </p:cxnSp>
-      <p:cxnSp>
-        <p:nvCxnSpPr>
-          <p:cNvPr id="74" name="ledr_k2b" descr="Editable line; source id ledr_k2b"/>
-          <p:cNvCxnSpPr/>
-          <p:nvPr/>
-        </p:nvCxnSpPr>
-        <p:spPr>
-          <a:xfrm flipV="1">
-            <a:off x="7365999" y="3571874"/>
-            <a:ext cx="79375" cy="95250"/>
-          </a:xfrm>
-          <a:prstGeom prst="line">
-            <a:avLst/>
-          </a:prstGeom>
-          <a:ln w="12699">
-            <a:solidFill>
-              <a:srgbClr val="4B5563"/>
-            </a:solidFill>
-          </a:ln>
-          <a:effectLst/>
-        </p:spPr>
-        <p:style>
-          <a:lnRef idx="2">
-            <a:schemeClr val="accent1"/>
-          </a:lnRef>
-          <a:fillRef idx="0">
-            <a:schemeClr val="accent1"/>
-          </a:fillRef>
-          <a:effectRef idx="0">
-            <a:schemeClr val="accent1"/>
-          </a:effectRef>
-          <a:fontRef idx="minor">
-            <a:schemeClr val="tx1"/>
-          </a:fontRef>
-        </p:style>
-      </p:cxnSp>
-      <p:sp>
-        <p:nvSpPr>
-          <p:cNvPr id="75" name="ledr_r3" descr="Editable shape; source id ledr_r3"/>
+      <p:sp>
+        <p:nvSpPr>
+          <p:cNvPr id="85" name="ledr_r3" descr="Editable shape; source id ledr_r3"/>
           <p:cNvSpPr/>
           <p:nvPr/>
         </p:nvSpPr>
         <p:spPr>
           <a:xfrm>
-            <a:off x="4635499" y="4143374"/>
-            <a:ext cx="2889249" cy="754062"/>
+            <a:off x="5143499" y="3651249"/>
+            <a:ext cx="2619374" cy="484187"/>
           </a:xfrm>
           <a:prstGeom prst="roundRect">
             <a:avLst>
-              <a:gd name="adj" fmla="val 6315"/>
+              <a:gd name="adj" fmla="val 9836"/>
             </a:avLst>
           </a:prstGeom>
           <a:solidFill>
@@ -6891,14 +7269,130 @@
       </p:sp>
       <p:sp>
         <p:nvSpPr>
-          <p:cNvPr id="76" name="ledr_r3_t" descr="Editable text; source id ledr_r3_t"/>
+          <p:cNvPr id="86" name="ledr_c3_b" descr="Editable shape; source id ledr_c3_b"/>
+          <p:cNvSpPr/>
+          <p:nvPr/>
+        </p:nvSpPr>
+        <p:spPr>
+          <a:xfrm>
+            <a:off x="5254624" y="3817937"/>
+            <a:ext cx="142874" cy="142874"/>
+          </a:xfrm>
+          <a:prstGeom prst="rect">
+            <a:avLst/>
+          </a:prstGeom>
+          <a:noFill/>
+          <a:ln w="7937">
+            <a:solidFill>
+              <a:srgbClr val="1F2937"/>
+            </a:solidFill>
+          </a:ln>
+          <a:effectLst/>
+        </p:spPr>
+        <p:style>
+          <a:lnRef idx="1">
+            <a:schemeClr val="accent1"/>
+          </a:lnRef>
+          <a:fillRef idx="3">
+            <a:schemeClr val="accent1"/>
+          </a:fillRef>
+          <a:effectRef idx="0">
+            <a:schemeClr val="accent1"/>
+          </a:effectRef>
+          <a:fontRef idx="minor">
+            <a:schemeClr val="lt1"/>
+          </a:fontRef>
+        </p:style>
+        <p:txBody>
+          <a:bodyPr rtlCol="0" anchor="ctr"/>
+          <a:lstStyle/>
+          <a:p>
+            <a:pPr algn="ctr"/>
+          </a:p>
+        </p:txBody>
+      </p:sp>
+      <p:cxnSp>
+        <p:nvCxnSpPr>
+          <p:cNvPr id="87" name="ledr_c3_k_0" descr="Editable line; source id ledr_c3_k_0"/>
+          <p:cNvCxnSpPr/>
+          <p:nvPr/>
+        </p:nvCxnSpPr>
+        <p:spPr>
+          <a:xfrm>
+            <a:off x="5286374" y="3897312"/>
+            <a:ext cx="31750" cy="31750"/>
+          </a:xfrm>
+          <a:prstGeom prst="line">
+            <a:avLst/>
+          </a:prstGeom>
+          <a:ln w="10318">
+            <a:solidFill>
+              <a:srgbClr val="1F2937"/>
+            </a:solidFill>
+          </a:ln>
+          <a:effectLst/>
+        </p:spPr>
+        <p:style>
+          <a:lnRef idx="2">
+            <a:schemeClr val="accent1"/>
+          </a:lnRef>
+          <a:fillRef idx="0">
+            <a:schemeClr val="accent1"/>
+          </a:fillRef>
+          <a:effectRef idx="0">
+            <a:schemeClr val="accent1"/>
+          </a:effectRef>
+          <a:fontRef idx="minor">
+            <a:schemeClr val="tx1"/>
+          </a:fontRef>
+        </p:style>
+      </p:cxnSp>
+      <p:cxnSp>
+        <p:nvCxnSpPr>
+          <p:cNvPr id="88" name="ledr_c3_k_1" descr="Editable line; source id ledr_c3_k_1"/>
+          <p:cNvCxnSpPr/>
+          <p:nvPr/>
+        </p:nvCxnSpPr>
+        <p:spPr>
+          <a:xfrm flipV="1">
+            <a:off x="5318124" y="3857624"/>
+            <a:ext cx="55563" cy="71438"/>
+          </a:xfrm>
+          <a:prstGeom prst="line">
+            <a:avLst/>
+          </a:prstGeom>
+          <a:ln w="10318">
+            <a:solidFill>
+              <a:srgbClr val="1F2937"/>
+            </a:solidFill>
+          </a:ln>
+          <a:effectLst/>
+        </p:spPr>
+        <p:style>
+          <a:lnRef idx="2">
+            <a:schemeClr val="accent1"/>
+          </a:lnRef>
+          <a:fillRef idx="0">
+            <a:schemeClr val="accent1"/>
+          </a:fillRef>
+          <a:effectRef idx="0">
+            <a:schemeClr val="accent1"/>
+          </a:effectRef>
+          <a:fontRef idx="minor">
+            <a:schemeClr val="tx1"/>
+          </a:fontRef>
+        </p:style>
+      </p:cxnSp>
+      <p:sp>
+        <p:nvSpPr>
+          <p:cNvPr id="89" name="ledr_x3" descr="Editable text; source id ledr_x3"/>
           <p:cNvSpPr txBox="1"/>
           <p:nvPr/>
         </p:nvSpPr>
         <p:spPr>
           <a:xfrm>
-            <a:off x="4691062" y="4175124"/>
-            <a:ext cx="2778124" cy="690562"/>
+            <a:off x="5508624" y="3754437"/>
+            <a:ext cx="2127249" cy="277812"/>
           </a:xfrm>
           <a:prstGeom prst="rect">
             <a:avLst/>
@@ -6912,9 +7406,9 @@
           </a:bodyPr>
           <a:lstStyle/>
           <a:p>
-            <a:pPr algn="ctr" fontAlgn="base">
+            <a:pPr algn="l" fontAlgn="base">
               <a:lnSpc>
-                <a:spcPts val="1921"/>
+                <a:spcPts val="1828"/>
               </a:lnSpc>
               <a:spcBef>
                 <a:spcPts val="0"/>
@@ -6922,7 +7416,7 @@
               <a:spcAft>
                 <a:spcPts val="0"/>
               </a:spcAft>
-              <a:defRPr sz="1312" b="0" i="0" lang="zh-CN" dirty="0">
+              <a:defRPr sz="1249" b="0" i="0" lang="zh-CN" dirty="0">
                 <a:solidFill>
                   <a:srgbClr val="3F4854"/>
                 </a:solidFill>
@@ -6932,7 +7426,7 @@
               </a:defRPr>
             </a:pPr>
             <a:r>
-              <a:rPr sz="1312" b="0" i="0" lang="zh-CN" dirty="0">
+              <a:rPr sz="1249" b="0" i="0" lang="zh-CN" dirty="0">
                 <a:solidFill>
                   <a:srgbClr val="3F4854"/>
                 </a:solidFill>
@@ -6945,92 +7439,20 @@
           </a:p>
         </p:txBody>
       </p:sp>
-      <p:cxnSp>
-        <p:nvCxnSpPr>
-          <p:cNvPr id="77" name="ledr_k3a" descr="Editable line; source id ledr_k3a"/>
-          <p:cNvCxnSpPr/>
-          <p:nvPr/>
-        </p:nvCxnSpPr>
-        <p:spPr>
-          <a:xfrm>
-            <a:off x="7318374" y="4524374"/>
-            <a:ext cx="47625" cy="47625"/>
-          </a:xfrm>
-          <a:prstGeom prst="line">
-            <a:avLst/>
-          </a:prstGeom>
-          <a:ln w="12699">
-            <a:solidFill>
-              <a:srgbClr val="4B5563"/>
-            </a:solidFill>
-          </a:ln>
-          <a:effectLst/>
-        </p:spPr>
-        <p:style>
-          <a:lnRef idx="2">
-            <a:schemeClr val="accent1"/>
-          </a:lnRef>
-          <a:fillRef idx="0">
-            <a:schemeClr val="accent1"/>
-          </a:fillRef>
-          <a:effectRef idx="0">
-            <a:schemeClr val="accent1"/>
-          </a:effectRef>
-          <a:fontRef idx="minor">
-            <a:schemeClr val="tx1"/>
-          </a:fontRef>
-        </p:style>
-      </p:cxnSp>
-      <p:cxnSp>
-        <p:nvCxnSpPr>
-          <p:cNvPr id="78" name="ledr_k3b" descr="Editable line; source id ledr_k3b"/>
-          <p:cNvCxnSpPr/>
-          <p:nvPr/>
-        </p:nvCxnSpPr>
-        <p:spPr>
-          <a:xfrm flipV="1">
-            <a:off x="7365999" y="4460874"/>
-            <a:ext cx="79375" cy="111125"/>
-          </a:xfrm>
-          <a:prstGeom prst="line">
-            <a:avLst/>
-          </a:prstGeom>
-          <a:ln w="12699">
-            <a:solidFill>
-              <a:srgbClr val="4B5563"/>
-            </a:solidFill>
-          </a:ln>
-          <a:effectLst/>
-        </p:spPr>
-        <p:style>
-          <a:lnRef idx="2">
-            <a:schemeClr val="accent1"/>
-          </a:lnRef>
-          <a:fillRef idx="0">
-            <a:schemeClr val="accent1"/>
-          </a:fillRef>
-          <a:effectRef idx="0">
-            <a:schemeClr val="accent1"/>
-          </a:effectRef>
-          <a:fontRef idx="minor">
-            <a:schemeClr val="tx1"/>
-          </a:fontRef>
-        </p:style>
-      </p:cxnSp>
-      <p:sp>
-        <p:nvSpPr>
-          <p:cNvPr id="79" name="ledr_r4" descr="Editable shape; source id ledr_r4"/>
+      <p:sp>
+        <p:nvSpPr>
+          <p:cNvPr id="90" name="ledr_r4" descr="Editable shape; source id ledr_r4"/>
           <p:cNvSpPr/>
           <p:nvPr/>
         </p:nvSpPr>
         <p:spPr>
           <a:xfrm>
-            <a:off x="4635499" y="5040312"/>
-            <a:ext cx="2889249" cy="754062"/>
+            <a:off x="5143499" y="4214812"/>
+            <a:ext cx="2619374" cy="484187"/>
           </a:xfrm>
           <a:prstGeom prst="roundRect">
             <a:avLst>
-              <a:gd name="adj" fmla="val 6315"/>
+              <a:gd name="adj" fmla="val 9836"/>
             </a:avLst>
           </a:prstGeom>
           <a:solidFill>
@@ -7067,14 +7489,130 @@
       </p:sp>
       <p:sp>
         <p:nvSpPr>
-          <p:cNvPr id="80" name="ledr_r4_t" descr="Editable text; source id ledr_r4_t"/>
+          <p:cNvPr id="91" name="ledr_c4_b" descr="Editable shape; source id ledr_c4_b"/>
+          <p:cNvSpPr/>
+          <p:nvPr/>
+        </p:nvSpPr>
+        <p:spPr>
+          <a:xfrm>
+            <a:off x="5254624" y="4381499"/>
+            <a:ext cx="142874" cy="142874"/>
+          </a:xfrm>
+          <a:prstGeom prst="rect">
+            <a:avLst/>
+          </a:prstGeom>
+          <a:noFill/>
+          <a:ln w="7937">
+            <a:solidFill>
+              <a:srgbClr val="1F2937"/>
+            </a:solidFill>
+          </a:ln>
+          <a:effectLst/>
+        </p:spPr>
+        <p:style>
+          <a:lnRef idx="1">
+            <a:schemeClr val="accent1"/>
+          </a:lnRef>
+          <a:fillRef idx="3">
+            <a:schemeClr val="accent1"/>
+          </a:fillRef>
+          <a:effectRef idx="0">
+            <a:schemeClr val="accent1"/>
+          </a:effectRef>
+          <a:fontRef idx="minor">
+            <a:schemeClr val="lt1"/>
+          </a:fontRef>
+        </p:style>
+        <p:txBody>
+          <a:bodyPr rtlCol="0" anchor="ctr"/>
+          <a:lstStyle/>
+          <a:p>
+            <a:pPr algn="ctr"/>
+          </a:p>
+        </p:txBody>
+      </p:sp>
+      <p:cxnSp>
+        <p:nvCxnSpPr>
+          <p:cNvPr id="92" name="ledr_c4_k_0" descr="Editable line; source id ledr_c4_k_0"/>
+          <p:cNvCxnSpPr/>
+          <p:nvPr/>
+        </p:nvCxnSpPr>
+        <p:spPr>
+          <a:xfrm>
+            <a:off x="5286374" y="4452937"/>
+            <a:ext cx="31750" cy="31750"/>
+          </a:xfrm>
+          <a:prstGeom prst="line">
+            <a:avLst/>
+          </a:prstGeom>
+          <a:ln w="10318">
+            <a:solidFill>
+              <a:srgbClr val="1F2937"/>
+            </a:solidFill>
+          </a:ln>
+          <a:effectLst/>
+        </p:spPr>
+        <p:style>
+          <a:lnRef idx="2">
+            <a:schemeClr val="accent1"/>
+          </a:lnRef>
+          <a:fillRef idx="0">
+            <a:schemeClr val="accent1"/>
+          </a:fillRef>
+          <a:effectRef idx="0">
+            <a:schemeClr val="accent1"/>
+          </a:effectRef>
+          <a:fontRef idx="minor">
+            <a:schemeClr val="tx1"/>
+          </a:fontRef>
+        </p:style>
+      </p:cxnSp>
+      <p:cxnSp>
+        <p:nvCxnSpPr>
+          <p:cNvPr id="93" name="ledr_c4_k_1" descr="Editable line; source id ledr_c4_k_1"/>
+          <p:cNvCxnSpPr/>
+          <p:nvPr/>
+        </p:nvCxnSpPr>
+        <p:spPr>
+          <a:xfrm flipV="1">
+            <a:off x="5318124" y="4421187"/>
+            <a:ext cx="55563" cy="63500"/>
+          </a:xfrm>
+          <a:prstGeom prst="line">
+            <a:avLst/>
+          </a:prstGeom>
+          <a:ln w="10318">
+            <a:solidFill>
+              <a:srgbClr val="1F2937"/>
+            </a:solidFill>
+          </a:ln>
+          <a:effectLst/>
+        </p:spPr>
+        <p:style>
+          <a:lnRef idx="2">
+            <a:schemeClr val="accent1"/>
+          </a:lnRef>
+          <a:fillRef idx="0">
+            <a:schemeClr val="accent1"/>
+          </a:fillRef>
+          <a:effectRef idx="0">
+            <a:schemeClr val="accent1"/>
+          </a:effectRef>
+          <a:fontRef idx="minor">
+            <a:schemeClr val="tx1"/>
+          </a:fontRef>
+        </p:style>
+      </p:cxnSp>
+      <p:sp>
+        <p:nvSpPr>
+          <p:cNvPr id="94" name="ledr_x4" descr="Editable text; source id ledr_x4"/>
           <p:cNvSpPr txBox="1"/>
           <p:nvPr/>
         </p:nvSpPr>
         <p:spPr>
           <a:xfrm>
-            <a:off x="4691062" y="5072062"/>
-            <a:ext cx="2778124" cy="690562"/>
+            <a:off x="5508624" y="4317999"/>
+            <a:ext cx="2127249" cy="277812"/>
           </a:xfrm>
           <a:prstGeom prst="rect">
             <a:avLst/>
@@ -7088,9 +7626,9 @@
           </a:bodyPr>
           <a:lstStyle/>
           <a:p>
-            <a:pPr algn="ctr" fontAlgn="base">
+            <a:pPr algn="l" fontAlgn="base">
               <a:lnSpc>
-                <a:spcPts val="1921"/>
+                <a:spcPts val="1828"/>
               </a:lnSpc>
               <a:spcBef>
                 <a:spcPts val="0"/>
@@ -7098,7 +7636,7 @@
               <a:spcAft>
                 <a:spcPts val="0"/>
               </a:spcAft>
-              <a:defRPr sz="1312" b="0" i="0" lang="zh-CN" dirty="0">
+              <a:defRPr sz="1249" b="0" i="0" lang="zh-CN" dirty="0">
                 <a:solidFill>
                   <a:srgbClr val="3F4854"/>
                 </a:solidFill>
@@ -7108,7 +7646,7 @@
               </a:defRPr>
             </a:pPr>
             <a:r>
-              <a:rPr sz="1312" b="0" i="0" lang="zh-CN" dirty="0">
+              <a:rPr sz="1249" b="0" i="0" lang="zh-CN" dirty="0">
                 <a:solidFill>
                   <a:srgbClr val="3F4854"/>
                 </a:solidFill>
@@ -7121,92 +7659,20 @@
           </a:p>
         </p:txBody>
       </p:sp>
-      <p:cxnSp>
-        <p:nvCxnSpPr>
-          <p:cNvPr id="81" name="ledr_k4a" descr="Editable line; source id ledr_k4a"/>
-          <p:cNvCxnSpPr/>
-          <p:nvPr/>
-        </p:nvCxnSpPr>
-        <p:spPr>
-          <a:xfrm>
-            <a:off x="7318374" y="5413374"/>
-            <a:ext cx="47625" cy="47625"/>
-          </a:xfrm>
-          <a:prstGeom prst="line">
-            <a:avLst/>
-          </a:prstGeom>
-          <a:ln w="12699">
-            <a:solidFill>
-              <a:srgbClr val="4B5563"/>
-            </a:solidFill>
-          </a:ln>
-          <a:effectLst/>
-        </p:spPr>
-        <p:style>
-          <a:lnRef idx="2">
-            <a:schemeClr val="accent1"/>
-          </a:lnRef>
-          <a:fillRef idx="0">
-            <a:schemeClr val="accent1"/>
-          </a:fillRef>
-          <a:effectRef idx="0">
-            <a:schemeClr val="accent1"/>
-          </a:effectRef>
-          <a:fontRef idx="minor">
-            <a:schemeClr val="tx1"/>
-          </a:fontRef>
-        </p:style>
-      </p:cxnSp>
-      <p:cxnSp>
-        <p:nvCxnSpPr>
-          <p:cNvPr id="82" name="ledr_k4b" descr="Editable line; source id ledr_k4b"/>
-          <p:cNvCxnSpPr/>
-          <p:nvPr/>
-        </p:nvCxnSpPr>
-        <p:spPr>
-          <a:xfrm flipV="1">
-            <a:off x="7365999" y="5365749"/>
-            <a:ext cx="79375" cy="95250"/>
-          </a:xfrm>
-          <a:prstGeom prst="line">
-            <a:avLst/>
-          </a:prstGeom>
-          <a:ln w="12699">
-            <a:solidFill>
-              <a:srgbClr val="4B5563"/>
-            </a:solidFill>
-          </a:ln>
-          <a:effectLst/>
-        </p:spPr>
-        <p:style>
-          <a:lnRef idx="2">
-            <a:schemeClr val="accent1"/>
-          </a:lnRef>
-          <a:fillRef idx="0">
-            <a:schemeClr val="accent1"/>
-          </a:fillRef>
-          <a:effectRef idx="0">
-            <a:schemeClr val="accent1"/>
-          </a:effectRef>
-          <a:fontRef idx="minor">
-            <a:schemeClr val="tx1"/>
-          </a:fontRef>
-        </p:style>
-      </p:cxnSp>
-      <p:sp>
-        <p:nvSpPr>
-          <p:cNvPr id="83" name="ledr_r5" descr="Editable shape; source id ledr_r5"/>
+      <p:sp>
+        <p:nvSpPr>
+          <p:cNvPr id="95" name="ledr_r5" descr="Editable shape; source id ledr_r5"/>
           <p:cNvSpPr/>
           <p:nvPr/>
         </p:nvSpPr>
         <p:spPr>
           <a:xfrm>
-            <a:off x="4635499" y="5937249"/>
-            <a:ext cx="2889249" cy="754062"/>
+            <a:off x="5143499" y="4770437"/>
+            <a:ext cx="2619374" cy="484187"/>
           </a:xfrm>
           <a:prstGeom prst="roundRect">
             <a:avLst>
-              <a:gd name="adj" fmla="val 6315"/>
+              <a:gd name="adj" fmla="val 9836"/>
             </a:avLst>
           </a:prstGeom>
           <a:solidFill>
@@ -7243,14 +7709,130 @@
       </p:sp>
       <p:sp>
         <p:nvSpPr>
-          <p:cNvPr id="84" name="ledr_r5_t" descr="Editable text; source id ledr_r5_t"/>
+          <p:cNvPr id="96" name="ledr_c5_b" descr="Editable shape; source id ledr_c5_b"/>
+          <p:cNvSpPr/>
+          <p:nvPr/>
+        </p:nvSpPr>
+        <p:spPr>
+          <a:xfrm>
+            <a:off x="5254624" y="4937124"/>
+            <a:ext cx="142874" cy="142874"/>
+          </a:xfrm>
+          <a:prstGeom prst="rect">
+            <a:avLst/>
+          </a:prstGeom>
+          <a:noFill/>
+          <a:ln w="7937">
+            <a:solidFill>
+              <a:srgbClr val="1F2937"/>
+            </a:solidFill>
+          </a:ln>
+          <a:effectLst/>
+        </p:spPr>
+        <p:style>
+          <a:lnRef idx="1">
+            <a:schemeClr val="accent1"/>
+          </a:lnRef>
+          <a:fillRef idx="3">
+            <a:schemeClr val="accent1"/>
+          </a:fillRef>
+          <a:effectRef idx="0">
+            <a:schemeClr val="accent1"/>
+          </a:effectRef>
+          <a:fontRef idx="minor">
+            <a:schemeClr val="lt1"/>
+          </a:fontRef>
+        </p:style>
+        <p:txBody>
+          <a:bodyPr rtlCol="0" anchor="ctr"/>
+          <a:lstStyle/>
+          <a:p>
+            <a:pPr algn="ctr"/>
+          </a:p>
+        </p:txBody>
+      </p:sp>
+      <p:cxnSp>
+        <p:nvCxnSpPr>
+          <p:cNvPr id="97" name="ledr_c5_k_0" descr="Editable line; source id ledr_c5_k_0"/>
+          <p:cNvCxnSpPr/>
+          <p:nvPr/>
+        </p:nvCxnSpPr>
+        <p:spPr>
+          <a:xfrm>
+            <a:off x="5286374" y="5016499"/>
+            <a:ext cx="31750" cy="31750"/>
+          </a:xfrm>
+          <a:prstGeom prst="line">
+            <a:avLst/>
+          </a:prstGeom>
+          <a:ln w="10318">
+            <a:solidFill>
+              <a:srgbClr val="1F2937"/>
+            </a:solidFill>
+          </a:ln>
+          <a:effectLst/>
+        </p:spPr>
+        <p:style>
+          <a:lnRef idx="2">
+            <a:schemeClr val="accent1"/>
+          </a:lnRef>
+          <a:fillRef idx="0">
+            <a:schemeClr val="accent1"/>
+          </a:fillRef>
+          <a:effectRef idx="0">
+            <a:schemeClr val="accent1"/>
+          </a:effectRef>
+          <a:fontRef idx="minor">
+            <a:schemeClr val="tx1"/>
+          </a:fontRef>
+        </p:style>
+      </p:cxnSp>
+      <p:cxnSp>
+        <p:nvCxnSpPr>
+          <p:cNvPr id="98" name="ledr_c5_k_1" descr="Editable line; source id ledr_c5_k_1"/>
+          <p:cNvCxnSpPr/>
+          <p:nvPr/>
+        </p:nvCxnSpPr>
+        <p:spPr>
+          <a:xfrm flipV="1">
+            <a:off x="5318124" y="4976812"/>
+            <a:ext cx="55563" cy="71437"/>
+          </a:xfrm>
+          <a:prstGeom prst="line">
+            <a:avLst/>
+          </a:prstGeom>
+          <a:ln w="10318">
+            <a:solidFill>
+              <a:srgbClr val="1F2937"/>
+            </a:solidFill>
+          </a:ln>
+          <a:effectLst/>
+        </p:spPr>
+        <p:style>
+          <a:lnRef idx="2">
+            <a:schemeClr val="accent1"/>
+          </a:lnRef>
+          <a:fillRef idx="0">
+            <a:schemeClr val="accent1"/>
+          </a:fillRef>
+          <a:effectRef idx="0">
+            <a:schemeClr val="accent1"/>
+          </a:effectRef>
+          <a:fontRef idx="minor">
+            <a:schemeClr val="tx1"/>
+          </a:fontRef>
+        </p:style>
+      </p:cxnSp>
+      <p:sp>
+        <p:nvSpPr>
+          <p:cNvPr id="99" name="ledr_x5" descr="Editable text; source id ledr_x5"/>
           <p:cNvSpPr txBox="1"/>
           <p:nvPr/>
         </p:nvSpPr>
         <p:spPr>
           <a:xfrm>
-            <a:off x="4691062" y="5968999"/>
-            <a:ext cx="2778124" cy="690562"/>
+            <a:off x="5508624" y="4873624"/>
+            <a:ext cx="2127249" cy="277812"/>
           </a:xfrm>
           <a:prstGeom prst="rect">
             <a:avLst/>
@@ -7264,9 +7846,9 @@
           </a:bodyPr>
           <a:lstStyle/>
           <a:p>
-            <a:pPr algn="ctr" fontAlgn="base">
+            <a:pPr algn="l" fontAlgn="base">
               <a:lnSpc>
-                <a:spcPts val="1921"/>
+                <a:spcPts val="1828"/>
               </a:lnSpc>
               <a:spcBef>
                 <a:spcPts val="0"/>
@@ -7274,7 +7856,7 @@
               <a:spcAft>
                 <a:spcPts val="0"/>
               </a:spcAft>
-              <a:defRPr sz="1312" b="0" i="0" lang="zh-CN" dirty="0">
+              <a:defRPr sz="1249" b="0" i="0" lang="zh-CN" dirty="0">
                 <a:solidFill>
                   <a:srgbClr val="3F4854"/>
                 </a:solidFill>
@@ -7284,7 +7866,7 @@
               </a:defRPr>
             </a:pPr>
             <a:r>
-              <a:rPr sz="1312" b="0" i="0" lang="zh-CN" dirty="0">
+              <a:rPr sz="1249" b="0" i="0" lang="zh-CN" dirty="0">
                 <a:solidFill>
                   <a:srgbClr val="3F4854"/>
                 </a:solidFill>
@@ -7297,92 +7879,20 @@
           </a:p>
         </p:txBody>
       </p:sp>
-      <p:cxnSp>
-        <p:nvCxnSpPr>
-          <p:cNvPr id="85" name="ledr_k5a" descr="Editable line; source id ledr_k5a"/>
-          <p:cNvCxnSpPr/>
-          <p:nvPr/>
-        </p:nvCxnSpPr>
-        <p:spPr>
-          <a:xfrm>
-            <a:off x="7318374" y="6318249"/>
-            <a:ext cx="47625" cy="47625"/>
-          </a:xfrm>
-          <a:prstGeom prst="line">
-            <a:avLst/>
-          </a:prstGeom>
-          <a:ln w="12699">
-            <a:solidFill>
-              <a:srgbClr val="4B5563"/>
-            </a:solidFill>
-          </a:ln>
-          <a:effectLst/>
-        </p:spPr>
-        <p:style>
-          <a:lnRef idx="2">
-            <a:schemeClr val="accent1"/>
-          </a:lnRef>
-          <a:fillRef idx="0">
-            <a:schemeClr val="accent1"/>
-          </a:fillRef>
-          <a:effectRef idx="0">
-            <a:schemeClr val="accent1"/>
-          </a:effectRef>
-          <a:fontRef idx="minor">
-            <a:schemeClr val="tx1"/>
-          </a:fontRef>
-        </p:style>
-      </p:cxnSp>
-      <p:cxnSp>
-        <p:nvCxnSpPr>
-          <p:cNvPr id="86" name="ledr_k5b" descr="Editable line; source id ledr_k5b"/>
-          <p:cNvCxnSpPr/>
-          <p:nvPr/>
-        </p:nvCxnSpPr>
-        <p:spPr>
-          <a:xfrm flipV="1">
-            <a:off x="7365999" y="6254749"/>
-            <a:ext cx="79375" cy="111125"/>
-          </a:xfrm>
-          <a:prstGeom prst="line">
-            <a:avLst/>
-          </a:prstGeom>
-          <a:ln w="12699">
-            <a:solidFill>
-              <a:srgbClr val="4B5563"/>
-            </a:solidFill>
-          </a:ln>
-          <a:effectLst/>
-        </p:spPr>
-        <p:style>
-          <a:lnRef idx="2">
-            <a:schemeClr val="accent1"/>
-          </a:lnRef>
-          <a:fillRef idx="0">
-            <a:schemeClr val="accent1"/>
-          </a:fillRef>
-          <a:effectRef idx="0">
-            <a:schemeClr val="accent1"/>
-          </a:effectRef>
-          <a:fontRef idx="minor">
-            <a:schemeClr val="tx1"/>
-          </a:fontRef>
-        </p:style>
-      </p:cxnSp>
-      <p:sp>
-        <p:nvSpPr>
-          <p:cNvPr id="87" name="u1" descr="Editable shape; source id u1"/>
+      <p:sp>
+        <p:nvSpPr>
+          <p:cNvPr id="100" name="u1" descr="Editable shape; source id u1"/>
           <p:cNvSpPr/>
           <p:nvPr/>
         </p:nvSpPr>
         <p:spPr>
           <a:xfrm>
-            <a:off x="8477249" y="761999"/>
-            <a:ext cx="3254374" cy="984249"/>
+            <a:off x="8540749" y="1190624"/>
+            <a:ext cx="3254374" cy="888999"/>
           </a:xfrm>
           <a:prstGeom prst="roundRect">
             <a:avLst>
-              <a:gd name="adj" fmla="val 7258"/>
+              <a:gd name="adj" fmla="val 8035"/>
             </a:avLst>
           </a:prstGeom>
           <a:solidFill>
@@ -7390,7 +7900,7 @@
           </a:solidFill>
           <a:ln w="11112">
             <a:solidFill>
-              <a:srgbClr val="5B7592"/>
+              <a:srgbClr val="C48A24"/>
             </a:solidFill>
           </a:ln>
           <a:effectLst/>
@@ -7419,22 +7929,22 @@
       </p:sp>
       <p:sp>
         <p:nvSpPr>
-          <p:cNvPr id="88" name="u1_a" descr="Editable shape; source id u1_a"/>
+          <p:cNvPr id="101" name="u1_b" descr="Editable shape; source id u1_b"/>
           <p:cNvSpPr/>
           <p:nvPr/>
         </p:nvSpPr>
         <p:spPr>
           <a:xfrm>
-            <a:off x="8477249" y="761999"/>
-            <a:ext cx="3254374" cy="47624"/>
+            <a:off x="8540749" y="1190624"/>
+            <a:ext cx="63499" cy="888999"/>
           </a:xfrm>
           <a:prstGeom prst="roundRect">
             <a:avLst>
-              <a:gd name="adj" fmla="val 50000"/>
+              <a:gd name="adj" fmla="val 37500"/>
             </a:avLst>
           </a:prstGeom>
           <a:solidFill>
-            <a:srgbClr val="5B7592"/>
+            <a:srgbClr val="C48A24"/>
           </a:solidFill>
           <a:ln>
             <a:noFill/>
@@ -7463,16 +7973,232 @@
           </a:p>
         </p:txBody>
       </p:sp>
-      <p:sp>
-        <p:nvSpPr>
-          <p:cNvPr id="89" name="u1_g_o" descr="Editable shape; source id u1_g_o"/>
+      <p:cxnSp>
+        <p:nvCxnSpPr>
+          <p:cNvPr id="102" name="u1_g_n_0" descr="Editable line; source id u1_g_n_0"/>
+          <p:cNvCxnSpPr/>
+          <p:nvPr/>
+        </p:nvCxnSpPr>
+        <p:spPr>
+          <a:xfrm>
+            <a:off x="8874124" y="1508124"/>
+            <a:ext cx="0" cy="87313"/>
+          </a:xfrm>
+          <a:prstGeom prst="line">
+            <a:avLst/>
+          </a:prstGeom>
+          <a:ln w="7937">
+            <a:solidFill>
+              <a:srgbClr val="1F2937"/>
+            </a:solidFill>
+          </a:ln>
+          <a:effectLst/>
+        </p:spPr>
+        <p:style>
+          <a:lnRef idx="2">
+            <a:schemeClr val="accent1"/>
+          </a:lnRef>
+          <a:fillRef idx="0">
+            <a:schemeClr val="accent1"/>
+          </a:fillRef>
+          <a:effectRef idx="0">
+            <a:schemeClr val="accent1"/>
+          </a:effectRef>
+          <a:fontRef idx="minor">
+            <a:schemeClr val="tx1"/>
+          </a:fontRef>
+        </p:style>
+      </p:cxnSp>
+      <p:cxnSp>
+        <p:nvCxnSpPr>
+          <p:cNvPr id="103" name="u1_g_n_1" descr="Editable line; source id u1_g_n_1"/>
+          <p:cNvCxnSpPr/>
+          <p:nvPr/>
+        </p:nvCxnSpPr>
+        <p:spPr>
+          <a:xfrm flipH="1">
+            <a:off x="8794749" y="1595437"/>
+            <a:ext cx="79375" cy="158750"/>
+          </a:xfrm>
+          <a:prstGeom prst="line">
+            <a:avLst/>
+          </a:prstGeom>
+          <a:ln w="7937">
+            <a:solidFill>
+              <a:srgbClr val="1F2937"/>
+            </a:solidFill>
+          </a:ln>
+          <a:effectLst/>
+        </p:spPr>
+        <p:style>
+          <a:lnRef idx="2">
+            <a:schemeClr val="accent1"/>
+          </a:lnRef>
+          <a:fillRef idx="0">
+            <a:schemeClr val="accent1"/>
+          </a:fillRef>
+          <a:effectRef idx="0">
+            <a:schemeClr val="accent1"/>
+          </a:effectRef>
+          <a:fontRef idx="minor">
+            <a:schemeClr val="tx1"/>
+          </a:fontRef>
+        </p:style>
+      </p:cxnSp>
+      <p:cxnSp>
+        <p:nvCxnSpPr>
+          <p:cNvPr id="104" name="u1_g_n_2" descr="Editable line; source id u1_g_n_2"/>
+          <p:cNvCxnSpPr/>
+          <p:nvPr/>
+        </p:nvCxnSpPr>
+        <p:spPr>
+          <a:xfrm>
+            <a:off x="8794749" y="1754187"/>
+            <a:ext cx="222250" cy="0"/>
+          </a:xfrm>
+          <a:prstGeom prst="line">
+            <a:avLst/>
+          </a:prstGeom>
+          <a:ln w="7937">
+            <a:solidFill>
+              <a:srgbClr val="1F2937"/>
+            </a:solidFill>
+          </a:ln>
+          <a:effectLst/>
+        </p:spPr>
+        <p:style>
+          <a:lnRef idx="2">
+            <a:schemeClr val="accent1"/>
+          </a:lnRef>
+          <a:fillRef idx="0">
+            <a:schemeClr val="accent1"/>
+          </a:fillRef>
+          <a:effectRef idx="0">
+            <a:schemeClr val="accent1"/>
+          </a:effectRef>
+          <a:fontRef idx="minor">
+            <a:schemeClr val="tx1"/>
+          </a:fontRef>
+        </p:style>
+      </p:cxnSp>
+      <p:cxnSp>
+        <p:nvCxnSpPr>
+          <p:cNvPr id="105" name="u1_g_n_3" descr="Editable line; source id u1_g_n_3"/>
+          <p:cNvCxnSpPr/>
+          <p:nvPr/>
+        </p:nvCxnSpPr>
+        <p:spPr>
+          <a:xfrm flipH="1" flipV="1">
+            <a:off x="8937624" y="1595437"/>
+            <a:ext cx="79375" cy="158750"/>
+          </a:xfrm>
+          <a:prstGeom prst="line">
+            <a:avLst/>
+          </a:prstGeom>
+          <a:ln w="7937">
+            <a:solidFill>
+              <a:srgbClr val="1F2937"/>
+            </a:solidFill>
+          </a:ln>
+          <a:effectLst/>
+        </p:spPr>
+        <p:style>
+          <a:lnRef idx="2">
+            <a:schemeClr val="accent1"/>
+          </a:lnRef>
+          <a:fillRef idx="0">
+            <a:schemeClr val="accent1"/>
+          </a:fillRef>
+          <a:effectRef idx="0">
+            <a:schemeClr val="accent1"/>
+          </a:effectRef>
+          <a:fontRef idx="minor">
+            <a:schemeClr val="tx1"/>
+          </a:fontRef>
+        </p:style>
+      </p:cxnSp>
+      <p:cxnSp>
+        <p:nvCxnSpPr>
+          <p:cNvPr id="106" name="u1_g_n_4" descr="Editable line; source id u1_g_n_4"/>
+          <p:cNvCxnSpPr/>
+          <p:nvPr/>
+        </p:nvCxnSpPr>
+        <p:spPr>
+          <a:xfrm flipV="1">
+            <a:off x="8937624" y="1508124"/>
+            <a:ext cx="0" cy="87313"/>
+          </a:xfrm>
+          <a:prstGeom prst="line">
+            <a:avLst/>
+          </a:prstGeom>
+          <a:ln w="7937">
+            <a:solidFill>
+              <a:srgbClr val="1F2937"/>
+            </a:solidFill>
+          </a:ln>
+          <a:effectLst/>
+        </p:spPr>
+        <p:style>
+          <a:lnRef idx="2">
+            <a:schemeClr val="accent1"/>
+          </a:lnRef>
+          <a:fillRef idx="0">
+            <a:schemeClr val="accent1"/>
+          </a:fillRef>
+          <a:effectRef idx="0">
+            <a:schemeClr val="accent1"/>
+          </a:effectRef>
+          <a:fontRef idx="minor">
+            <a:schemeClr val="tx1"/>
+          </a:fontRef>
+        </p:style>
+      </p:cxnSp>
+      <p:cxnSp>
+        <p:nvCxnSpPr>
+          <p:cNvPr id="107" name="u1_g_m" descr="Editable line; source id u1_g_m"/>
+          <p:cNvCxnSpPr/>
+          <p:nvPr/>
+        </p:nvCxnSpPr>
+        <p:spPr>
+          <a:xfrm>
+            <a:off x="8858249" y="1508124"/>
+            <a:ext cx="95250" cy="0"/>
+          </a:xfrm>
+          <a:prstGeom prst="line">
+            <a:avLst/>
+          </a:prstGeom>
+          <a:ln w="7937">
+            <a:solidFill>
+              <a:srgbClr val="1F2937"/>
+            </a:solidFill>
+          </a:ln>
+          <a:effectLst/>
+        </p:spPr>
+        <p:style>
+          <a:lnRef idx="2">
+            <a:schemeClr val="accent1"/>
+          </a:lnRef>
+          <a:fillRef idx="0">
+            <a:schemeClr val="accent1"/>
+          </a:fillRef>
+          <a:effectRef idx="0">
+            <a:schemeClr val="accent1"/>
+          </a:effectRef>
+          <a:fontRef idx="minor">
+            <a:schemeClr val="tx1"/>
+          </a:fontRef>
+        </p:style>
+      </p:cxnSp>
+      <p:sp>
+        <p:nvSpPr>
+          <p:cNvPr id="108" name="u1_g_d1" descr="Editable shape; source id u1_g_d1"/>
           <p:cNvSpPr/>
           <p:nvPr/>
         </p:nvSpPr>
         <p:spPr>
           <a:xfrm>
-            <a:off x="8691562" y="1182687"/>
-            <a:ext cx="182562" cy="182562"/>
+            <a:off x="8866187" y="1682749"/>
+            <a:ext cx="23812" cy="23812"/>
           </a:xfrm>
           <a:prstGeom prst="ellipse">
             <a:avLst/>
@@ -7507,20 +8233,21 @@
           </a:p>
         </p:txBody>
       </p:sp>
-      <p:cxnSp>
-        <p:nvCxnSpPr>
-          <p:cNvPr id="90" name="u1_g_a_0" descr="Editable line; source id u1_g_a_0"/>
-          <p:cNvCxnSpPr/>
-          <p:nvPr/>
-        </p:nvCxnSpPr>
-        <p:spPr>
-          <a:xfrm>
-            <a:off x="8842374" y="1198562"/>
-            <a:ext cx="39688" cy="15875"/>
-          </a:xfrm>
-          <a:prstGeom prst="line">
-            <a:avLst/>
-          </a:prstGeom>
+      <p:sp>
+        <p:nvSpPr>
+          <p:cNvPr id="109" name="u1_g_d2" descr="Editable shape; source id u1_g_d2"/>
+          <p:cNvSpPr/>
+          <p:nvPr/>
+        </p:nvSpPr>
+        <p:spPr>
+          <a:xfrm>
+            <a:off x="8921749" y="1706562"/>
+            <a:ext cx="15874" cy="15874"/>
+          </a:xfrm>
+          <a:prstGeom prst="ellipse">
+            <a:avLst/>
+          </a:prstGeom>
+          <a:noFill/>
           <a:ln w="7937">
             <a:solidFill>
               <a:srgbClr val="1F2937"/>
@@ -7529,66 +8256,37 @@
           <a:effectLst/>
         </p:spPr>
         <p:style>
-          <a:lnRef idx="2">
-            <a:schemeClr val="accent1"/>
-          </a:lnRef>
-          <a:fillRef idx="0">
-            <a:schemeClr val="accent1"/>
-          </a:fillRef>
-          <a:effectRef idx="0">
-            <a:schemeClr val="accent1"/>
-          </a:effectRef>
-          <a:fontRef idx="minor">
-            <a:schemeClr val="tx1"/>
-          </a:fontRef>
-        </p:style>
-      </p:cxnSp>
-      <p:cxnSp>
-        <p:nvCxnSpPr>
-          <p:cNvPr id="91" name="u1_g_a_1" descr="Editable line; source id u1_g_a_1"/>
-          <p:cNvCxnSpPr/>
-          <p:nvPr/>
-        </p:nvCxnSpPr>
-        <p:spPr>
-          <a:xfrm flipH="1">
-            <a:off x="8874124" y="1214437"/>
-            <a:ext cx="7938" cy="39687"/>
-          </a:xfrm>
-          <a:prstGeom prst="line">
-            <a:avLst/>
-          </a:prstGeom>
-          <a:ln w="7937">
-            <a:solidFill>
-              <a:srgbClr val="1F2937"/>
-            </a:solidFill>
-          </a:ln>
-          <a:effectLst/>
-        </p:spPr>
-        <p:style>
-          <a:lnRef idx="2">
-            <a:schemeClr val="accent1"/>
-          </a:lnRef>
-          <a:fillRef idx="0">
-            <a:schemeClr val="accent1"/>
-          </a:fillRef>
-          <a:effectRef idx="0">
-            <a:schemeClr val="accent1"/>
-          </a:effectRef>
-          <a:fontRef idx="minor">
-            <a:schemeClr val="tx1"/>
-          </a:fontRef>
-        </p:style>
-      </p:cxnSp>
-      <p:sp>
-        <p:nvSpPr>
-          <p:cNvPr id="92" name="u1_t" descr="Editable text; source id u1_t"/>
+          <a:lnRef idx="1">
+            <a:schemeClr val="accent1"/>
+          </a:lnRef>
+          <a:fillRef idx="3">
+            <a:schemeClr val="accent1"/>
+          </a:fillRef>
+          <a:effectRef idx="0">
+            <a:schemeClr val="accent1"/>
+          </a:effectRef>
+          <a:fontRef idx="minor">
+            <a:schemeClr val="lt1"/>
+          </a:fontRef>
+        </p:style>
+        <p:txBody>
+          <a:bodyPr rtlCol="0" anchor="ctr"/>
+          <a:lstStyle/>
+          <a:p>
+            <a:pPr algn="ctr"/>
+          </a:p>
+        </p:txBody>
+      </p:sp>
+      <p:sp>
+        <p:nvSpPr>
+          <p:cNvPr id="110" name="u1_t" descr="Editable text; source id u1_t"/>
           <p:cNvSpPr txBox="1"/>
           <p:nvPr/>
         </p:nvSpPr>
         <p:spPr>
           <a:xfrm>
-            <a:off x="9001124" y="1135062"/>
-            <a:ext cx="2555874" cy="285749"/>
+            <a:off x="9159874" y="1476374"/>
+            <a:ext cx="2492374" cy="325437"/>
           </a:xfrm>
           <a:prstGeom prst="rect">
             <a:avLst/>
@@ -7604,7 +8302,7 @@
           <a:p>
             <a:pPr algn="l" fontAlgn="base">
               <a:lnSpc>
-                <a:spcPts val="2203"/>
+                <a:spcPts val="2187"/>
               </a:lnSpc>
               <a:spcBef>
                 <a:spcPts val="0"/>
@@ -7612,9 +8310,9 @@
               <a:spcAft>
                 <a:spcPts val="0"/>
               </a:spcAft>
-              <a:defRPr sz="1513" b="1" i="0" lang="zh-CN" dirty="0">
+              <a:defRPr sz="1499" b="1" i="0" lang="zh-CN" dirty="0">
                 <a:solidFill>
-                  <a:srgbClr val="2B3E57"/>
+                  <a:srgbClr val="7A5410"/>
                 </a:solidFill>
                 <a:latin typeface="Noto Sans CJK SC"/>
                 <a:ea typeface="Noto Sans CJK SC"/>
@@ -7622,9 +8320,9 @@
               </a:defRPr>
             </a:pPr>
             <a:r>
-              <a:rPr sz="1513" b="1" i="0" lang="zh-CN" dirty="0">
+              <a:rPr sz="1499" b="1" i="0" lang="zh-CN" dirty="0">
                 <a:solidFill>
-                  <a:srgbClr val="2B3E57"/>
+                  <a:srgbClr val="7A5410"/>
                 </a:solidFill>
                 <a:latin typeface="Noto Sans CJK SC"/>
                 <a:ea typeface="Noto Sans CJK SC"/>
@@ -7637,18 +8335,18 @@
       </p:sp>
       <p:sp>
         <p:nvSpPr>
-          <p:cNvPr id="93" name="u2" descr="Editable shape; source id u2"/>
+          <p:cNvPr id="111" name="u2" descr="Editable shape; source id u2"/>
           <p:cNvSpPr/>
           <p:nvPr/>
         </p:nvSpPr>
         <p:spPr>
           <a:xfrm>
-            <a:off x="8477249" y="2127249"/>
-            <a:ext cx="3254374" cy="984249"/>
+            <a:off x="8540749" y="2238374"/>
+            <a:ext cx="3254374" cy="888999"/>
           </a:xfrm>
           <a:prstGeom prst="roundRect">
             <a:avLst>
-              <a:gd name="adj" fmla="val 7258"/>
+              <a:gd name="adj" fmla="val 8035"/>
             </a:avLst>
           </a:prstGeom>
           <a:solidFill>
@@ -7656,7 +8354,7 @@
           </a:solidFill>
           <a:ln w="11112">
             <a:solidFill>
-              <a:srgbClr val="5B7592"/>
+              <a:srgbClr val="C48A24"/>
             </a:solidFill>
           </a:ln>
           <a:effectLst/>
@@ -7685,22 +8383,22 @@
       </p:sp>
       <p:sp>
         <p:nvSpPr>
-          <p:cNvPr id="94" name="u2_a" descr="Editable shape; source id u2_a"/>
+          <p:cNvPr id="112" name="u2_b" descr="Editable shape; source id u2_b"/>
           <p:cNvSpPr/>
           <p:nvPr/>
         </p:nvSpPr>
         <p:spPr>
           <a:xfrm>
-            <a:off x="8477249" y="2127249"/>
-            <a:ext cx="3254374" cy="47624"/>
+            <a:off x="8540749" y="2238374"/>
+            <a:ext cx="63499" cy="888999"/>
           </a:xfrm>
           <a:prstGeom prst="roundRect">
             <a:avLst>
-              <a:gd name="adj" fmla="val 50000"/>
+              <a:gd name="adj" fmla="val 37500"/>
             </a:avLst>
           </a:prstGeom>
           <a:solidFill>
-            <a:srgbClr val="5B7592"/>
+            <a:srgbClr val="C48A24"/>
           </a:solidFill>
           <a:ln>
             <a:noFill/>
@@ -7731,14 +8429,14 @@
       </p:sp>
       <p:cxnSp>
         <p:nvCxnSpPr>
-          <p:cNvPr id="95" name="u2_g_t_0" descr="Editable line; source id u2_g_t_0"/>
+          <p:cNvPr id="113" name="u2_g_o_0" descr="Editable line; source id u2_g_o_0"/>
           <p:cNvCxnSpPr/>
           <p:nvPr/>
         </p:nvCxnSpPr>
         <p:spPr>
           <a:xfrm>
-            <a:off x="8786812" y="2532062"/>
-            <a:ext cx="111125" cy="206375"/>
+            <a:off x="8905874" y="2547937"/>
+            <a:ext cx="127000" cy="87312"/>
           </a:xfrm>
           <a:prstGeom prst="line">
             <a:avLst/>
@@ -7767,14 +8465,14 @@
       </p:cxnSp>
       <p:cxnSp>
         <p:nvCxnSpPr>
-          <p:cNvPr id="96" name="u2_g_t_1" descr="Editable line; source id u2_g_t_1"/>
+          <p:cNvPr id="114" name="u2_g_o_1" descr="Editable line; source id u2_g_o_1"/>
           <p:cNvCxnSpPr/>
           <p:nvPr/>
         </p:nvCxnSpPr>
         <p:spPr>
           <a:xfrm flipH="1">
-            <a:off x="8675687" y="2738437"/>
-            <a:ext cx="222250" cy="0"/>
+            <a:off x="8977312" y="2635249"/>
+            <a:ext cx="55562" cy="166688"/>
           </a:xfrm>
           <a:prstGeom prst="line">
             <a:avLst/>
@@ -7803,14 +8501,14 @@
       </p:cxnSp>
       <p:cxnSp>
         <p:nvCxnSpPr>
-          <p:cNvPr id="97" name="u2_g_t_2" descr="Editable line; source id u2_g_t_2"/>
+          <p:cNvPr id="115" name="u2_g_o_2" descr="Editable line; source id u2_g_o_2"/>
           <p:cNvCxnSpPr/>
           <p:nvPr/>
         </p:nvCxnSpPr>
         <p:spPr>
-          <a:xfrm flipV="1">
-            <a:off x="8675687" y="2532062"/>
-            <a:ext cx="111125" cy="206375"/>
+          <a:xfrm flipH="1">
+            <a:off x="8834437" y="2801937"/>
+            <a:ext cx="142875" cy="0"/>
           </a:xfrm>
           <a:prstGeom prst="line">
             <a:avLst/>
@@ -7839,14 +8537,14 @@
       </p:cxnSp>
       <p:cxnSp>
         <p:nvCxnSpPr>
-          <p:cNvPr id="98" name="u2_g_i_0" descr="Editable line; source id u2_g_i_0"/>
+          <p:cNvPr id="116" name="u2_g_o_3" descr="Editable line; source id u2_g_o_3"/>
           <p:cNvCxnSpPr/>
           <p:nvPr/>
         </p:nvCxnSpPr>
         <p:spPr>
-          <a:xfrm>
-            <a:off x="8786812" y="2532062"/>
-            <a:ext cx="31750" cy="134937"/>
+          <a:xfrm flipH="1" flipV="1">
+            <a:off x="8778874" y="2635249"/>
+            <a:ext cx="55563" cy="166688"/>
           </a:xfrm>
           <a:prstGeom prst="line">
             <a:avLst/>
@@ -7875,14 +8573,14 @@
       </p:cxnSp>
       <p:cxnSp>
         <p:nvCxnSpPr>
-          <p:cNvPr id="99" name="u2_g_i_1" descr="Editable line; source id u2_g_i_1"/>
+          <p:cNvPr id="117" name="u2_g_o_4" descr="Editable line; source id u2_g_o_4"/>
           <p:cNvCxnSpPr/>
           <p:nvPr/>
         </p:nvCxnSpPr>
         <p:spPr>
-          <a:xfrm flipH="1">
-            <a:off x="8675687" y="2666999"/>
-            <a:ext cx="142875" cy="71438"/>
+          <a:xfrm flipV="1">
+            <a:off x="8778874" y="2547937"/>
+            <a:ext cx="127000" cy="87312"/>
           </a:xfrm>
           <a:prstGeom prst="line">
             <a:avLst/>
@@ -7909,60 +8607,88 @@
           </a:fontRef>
         </p:style>
       </p:cxnSp>
-      <p:sp>
-        <p:nvSpPr>
-          <p:cNvPr id="100" name="u2_g_d" descr="Editable shape; source id u2_g_d"/>
-          <p:cNvSpPr/>
-          <p:nvPr/>
-        </p:nvSpPr>
-        <p:spPr>
-          <a:xfrm>
-            <a:off x="8818562" y="2674937"/>
-            <a:ext cx="31749" cy="31749"/>
-          </a:xfrm>
-          <a:prstGeom prst="ellipse">
-            <a:avLst/>
-          </a:prstGeom>
-          <a:solidFill>
-            <a:srgbClr val="1F2937"/>
-          </a:solidFill>
-          <a:ln>
-            <a:noFill/>
-          </a:ln>
-          <a:effectLst/>
-        </p:spPr>
-        <p:style>
-          <a:lnRef idx="1">
-            <a:schemeClr val="accent1"/>
-          </a:lnRef>
-          <a:fillRef idx="3">
-            <a:schemeClr val="accent1"/>
-          </a:fillRef>
-          <a:effectRef idx="0">
-            <a:schemeClr val="accent1"/>
-          </a:effectRef>
-          <a:fontRef idx="minor">
-            <a:schemeClr val="lt1"/>
-          </a:fontRef>
-        </p:style>
-        <p:txBody>
-          <a:bodyPr rtlCol="0" anchor="ctr"/>
-          <a:lstStyle/>
-          <a:p>
-            <a:pPr algn="ctr"/>
-          </a:p>
-        </p:txBody>
-      </p:sp>
-      <p:sp>
-        <p:nvSpPr>
-          <p:cNvPr id="101" name="u2_t" descr="Editable text; source id u2_t"/>
+      <p:cxnSp>
+        <p:nvCxnSpPr>
+          <p:cNvPr id="118" name="u2_g_a" descr="Editable line; source id u2_g_a"/>
+          <p:cNvCxnSpPr/>
+          <p:nvPr/>
+        </p:nvCxnSpPr>
+        <p:spPr>
+          <a:xfrm>
+            <a:off x="8905874" y="2547937"/>
+            <a:ext cx="0" cy="254000"/>
+          </a:xfrm>
+          <a:prstGeom prst="line">
+            <a:avLst/>
+          </a:prstGeom>
+          <a:ln w="7937">
+            <a:solidFill>
+              <a:srgbClr val="1F2937"/>
+            </a:solidFill>
+          </a:ln>
+          <a:effectLst/>
+        </p:spPr>
+        <p:style>
+          <a:lnRef idx="2">
+            <a:schemeClr val="accent1"/>
+          </a:lnRef>
+          <a:fillRef idx="0">
+            <a:schemeClr val="accent1"/>
+          </a:fillRef>
+          <a:effectRef idx="0">
+            <a:schemeClr val="accent1"/>
+          </a:effectRef>
+          <a:fontRef idx="minor">
+            <a:schemeClr val="tx1"/>
+          </a:fontRef>
+        </p:style>
+      </p:cxnSp>
+      <p:cxnSp>
+        <p:nvCxnSpPr>
+          <p:cNvPr id="119" name="u2_g_b" descr="Editable line; source id u2_g_b"/>
+          <p:cNvCxnSpPr/>
+          <p:nvPr/>
+        </p:nvCxnSpPr>
+        <p:spPr>
+          <a:xfrm>
+            <a:off x="8778874" y="2635249"/>
+            <a:ext cx="254000" cy="0"/>
+          </a:xfrm>
+          <a:prstGeom prst="line">
+            <a:avLst/>
+          </a:prstGeom>
+          <a:ln w="7937">
+            <a:solidFill>
+              <a:srgbClr val="1F2937"/>
+            </a:solidFill>
+          </a:ln>
+          <a:effectLst/>
+        </p:spPr>
+        <p:style>
+          <a:lnRef idx="2">
+            <a:schemeClr val="accent1"/>
+          </a:lnRef>
+          <a:fillRef idx="0">
+            <a:schemeClr val="accent1"/>
+          </a:fillRef>
+          <a:effectRef idx="0">
+            <a:schemeClr val="accent1"/>
+          </a:effectRef>
+          <a:fontRef idx="minor">
+            <a:schemeClr val="tx1"/>
+          </a:fontRef>
+        </p:style>
+      </p:cxnSp>
+      <p:sp>
+        <p:nvSpPr>
+          <p:cNvPr id="120" name="u2_t" descr="Editable text; source id u2_t"/>
           <p:cNvSpPr txBox="1"/>
           <p:nvPr/>
         </p:nvSpPr>
         <p:spPr>
           <a:xfrm>
-            <a:off x="9001124" y="2500312"/>
-            <a:ext cx="2555874" cy="285749"/>
+            <a:off x="9159874" y="2524124"/>
+            <a:ext cx="2492374" cy="325437"/>
           </a:xfrm>
           <a:prstGeom prst="rect">
             <a:avLst/>
@@ -7978,7 +8704,7 @@
           <a:p>
             <a:pPr algn="l" fontAlgn="base">
               <a:lnSpc>
-                <a:spcPts val="2203"/>
+                <a:spcPts val="2187"/>
               </a:lnSpc>
               <a:spcBef>
                 <a:spcPts val="0"/>
@@ -7986,9 +8712,9 @@
               <a:spcAft>
                 <a:spcPts val="0"/>
               </a:spcAft>
-              <a:defRPr sz="1513" b="1" i="0" lang="zh-CN" dirty="0">
+              <a:defRPr sz="1499" b="1" i="0" lang="zh-CN" dirty="0">
                 <a:solidFill>
-                  <a:srgbClr val="2B3E57"/>
+                  <a:srgbClr val="7A5410"/>
                 </a:solidFill>
                 <a:latin typeface="Noto Sans CJK SC"/>
                 <a:ea typeface="Noto Sans CJK SC"/>
@@ -7996,9 +8722,9 @@
               </a:defRPr>
             </a:pPr>
             <a:r>
-              <a:rPr sz="1513" b="1" i="0" lang="zh-CN" dirty="0">
+              <a:rPr sz="1499" b="1" i="0" lang="zh-CN" dirty="0">
                 <a:solidFill>
-                  <a:srgbClr val="2B3E57"/>
+                  <a:srgbClr val="7A5410"/>
                 </a:solidFill>
                 <a:latin typeface="Noto Sans CJK SC"/>
                 <a:ea typeface="Noto Sans CJK SC"/>
@@ -8011,18 +8737,18 @@
       </p:sp>
       <p:sp>
         <p:nvSpPr>
-          <p:cNvPr id="102" name="u3" descr="Editable shape; source id u3"/>
+          <p:cNvPr id="121" name="u3" descr="Editable shape; source id u3"/>
           <p:cNvSpPr/>
           <p:nvPr/>
         </p:nvSpPr>
         <p:spPr>
           <a:xfrm>
-            <a:off x="8477249" y="3492499"/>
-            <a:ext cx="3254374" cy="984249"/>
+            <a:off x="8540749" y="3286124"/>
+            <a:ext cx="3254374" cy="888999"/>
           </a:xfrm>
           <a:prstGeom prst="roundRect">
             <a:avLst>
-              <a:gd name="adj" fmla="val 7258"/>
+              <a:gd name="adj" fmla="val 8035"/>
             </a:avLst>
           </a:prstGeom>
           <a:solidFill>
@@ -8030,7 +8756,7 @@
           </a:solidFill>
           <a:ln w="11112">
             <a:solidFill>
-              <a:srgbClr val="5B7592"/>
+              <a:srgbClr val="C48A24"/>
             </a:solidFill>
           </a:ln>
           <a:effectLst/>
@@ -8059,22 +8785,22 @@
       </p:sp>
       <p:sp>
         <p:nvSpPr>
-          <p:cNvPr id="103" name="u3_a" descr="Editable shape; source id u3_a"/>
+          <p:cNvPr id="122" name="u3_b" descr="Editable shape; source id u3_b"/>
           <p:cNvSpPr/>
           <p:nvPr/>
         </p:nvSpPr>
         <p:spPr>
           <a:xfrm>
-            <a:off x="8477249" y="3492499"/>
-            <a:ext cx="3254374" cy="47624"/>
+            <a:off x="8540749" y="3286124"/>
+            <a:ext cx="63499" cy="888999"/>
           </a:xfrm>
           <a:prstGeom prst="roundRect">
             <a:avLst>
-              <a:gd name="adj" fmla="val 50000"/>
+              <a:gd name="adj" fmla="val 37500"/>
             </a:avLst>
           </a:prstGeom>
           <a:solidFill>
-            <a:srgbClr val="5B7592"/>
+            <a:srgbClr val="C48A24"/>
           </a:solidFill>
           <a:ln>
             <a:noFill/>
@@ -8103,21 +8829,20 @@
           </a:p>
         </p:txBody>
       </p:sp>
-      <p:sp>
-        <p:nvSpPr>
-          <p:cNvPr id="104" name="u3_g_a" descr="Editable shape; source id u3_g_a"/>
-          <p:cNvSpPr/>
-          <p:nvPr/>
-        </p:nvSpPr>
-        <p:spPr>
-          <a:xfrm>
-            <a:off x="8747124" y="3897312"/>
-            <a:ext cx="87312" cy="55562"/>
-          </a:xfrm>
-          <a:prstGeom prst="rect">
-            <a:avLst/>
-          </a:prstGeom>
-          <a:noFill/>
+      <p:cxnSp>
+        <p:nvCxnSpPr>
+          <p:cNvPr id="123" name="u3_g_p" descr="Editable line; source id u3_g_p"/>
+          <p:cNvCxnSpPr/>
+          <p:nvPr/>
+        </p:nvCxnSpPr>
+        <p:spPr>
+          <a:xfrm>
+            <a:off x="8905874" y="3619499"/>
+            <a:ext cx="0" cy="198438"/>
+          </a:xfrm>
+          <a:prstGeom prst="line">
+            <a:avLst/>
+          </a:prstGeom>
           <a:ln w="7937">
             <a:solidFill>
               <a:srgbClr val="1F2937"/>
@@ -8126,42 +8851,34 @@
           <a:effectLst/>
         </p:spPr>
         <p:style>
-          <a:lnRef idx="1">
-            <a:schemeClr val="accent1"/>
-          </a:lnRef>
-          <a:fillRef idx="3">
-            <a:schemeClr val="accent1"/>
-          </a:fillRef>
-          <a:effectRef idx="0">
-            <a:schemeClr val="accent1"/>
-          </a:effectRef>
-          <a:fontRef idx="minor">
-            <a:schemeClr val="lt1"/>
-          </a:fontRef>
-        </p:style>
-        <p:txBody>
-          <a:bodyPr rtlCol="0" anchor="ctr"/>
-          <a:lstStyle/>
-          <a:p>
-            <a:pPr algn="ctr"/>
-          </a:p>
-        </p:txBody>
-      </p:sp>
-      <p:sp>
-        <p:nvSpPr>
-          <p:cNvPr id="105" name="u3_g_b" descr="Editable shape; source id u3_g_b"/>
-          <p:cNvSpPr/>
-          <p:nvPr/>
-        </p:nvSpPr>
-        <p:spPr>
-          <a:xfrm>
-            <a:off x="8675687" y="4040187"/>
-            <a:ext cx="87312" cy="55562"/>
-          </a:xfrm>
-          <a:prstGeom prst="rect">
-            <a:avLst/>
-          </a:prstGeom>
-          <a:noFill/>
+          <a:lnRef idx="2">
+            <a:schemeClr val="accent1"/>
+          </a:lnRef>
+          <a:fillRef idx="0">
+            <a:schemeClr val="accent1"/>
+          </a:fillRef>
+          <a:effectRef idx="0">
+            <a:schemeClr val="accent1"/>
+          </a:effectRef>
+          <a:fontRef idx="minor">
+            <a:schemeClr val="tx1"/>
+          </a:fontRef>
+        </p:style>
+      </p:cxnSp>
+      <p:cxnSp>
+        <p:nvCxnSpPr>
+          <p:cNvPr id="124" name="u3_g_b" descr="Editable line; source id u3_g_b"/>
+          <p:cNvCxnSpPr/>
+          <p:nvPr/>
+        </p:nvCxnSpPr>
+        <p:spPr>
+          <a:xfrm>
+            <a:off x="8794749" y="3659187"/>
+            <a:ext cx="222250" cy="0"/>
+          </a:xfrm>
+          <a:prstGeom prst="line">
+            <a:avLst/>
+          </a:prstGeom>
           <a:ln w="7937">
             <a:solidFill>
               <a:srgbClr val="1F2937"/>
@@ -8170,42 +8887,34 @@
           <a:effectLst/>
         </p:spPr>
         <p:style>
-          <a:lnRef idx="1">
-            <a:schemeClr val="accent1"/>
-          </a:lnRef>
-          <a:fillRef idx="3">
-            <a:schemeClr val="accent1"/>
-          </a:fillRef>
-          <a:effectRef idx="0">
-            <a:schemeClr val="accent1"/>
-          </a:effectRef>
-          <a:fontRef idx="minor">
-            <a:schemeClr val="lt1"/>
-          </a:fontRef>
-        </p:style>
-        <p:txBody>
-          <a:bodyPr rtlCol="0" anchor="ctr"/>
-          <a:lstStyle/>
-          <a:p>
-            <a:pPr algn="ctr"/>
-          </a:p>
-        </p:txBody>
-      </p:sp>
-      <p:sp>
-        <p:nvSpPr>
-          <p:cNvPr id="106" name="u3_g_c" descr="Editable shape; source id u3_g_c"/>
-          <p:cNvSpPr/>
-          <p:nvPr/>
-        </p:nvSpPr>
-        <p:spPr>
-          <a:xfrm>
-            <a:off x="8810624" y="4040187"/>
-            <a:ext cx="87312" cy="55562"/>
-          </a:xfrm>
-          <a:prstGeom prst="rect">
-            <a:avLst/>
-          </a:prstGeom>
-          <a:noFill/>
+          <a:lnRef idx="2">
+            <a:schemeClr val="accent1"/>
+          </a:lnRef>
+          <a:fillRef idx="0">
+            <a:schemeClr val="accent1"/>
+          </a:fillRef>
+          <a:effectRef idx="0">
+            <a:schemeClr val="accent1"/>
+          </a:effectRef>
+          <a:fontRef idx="minor">
+            <a:schemeClr val="tx1"/>
+          </a:fontRef>
+        </p:style>
+      </p:cxnSp>
+      <p:cxnSp>
+        <p:nvCxnSpPr>
+          <p:cNvPr id="125" name="u3_g_l_0" descr="Editable line; source id u3_g_l_0"/>
+          <p:cNvCxnSpPr/>
+          <p:nvPr/>
+        </p:nvCxnSpPr>
+        <p:spPr>
+          <a:xfrm flipH="1">
+            <a:off x="8762999" y="3659187"/>
+            <a:ext cx="31750" cy="71437"/>
+          </a:xfrm>
+          <a:prstGeom prst="line">
+            <a:avLst/>
+          </a:prstGeom>
           <a:ln w="7937">
             <a:solidFill>
               <a:srgbClr val="1F2937"/>
@@ -8214,37 +8923,30 @@
           <a:effectLst/>
         </p:spPr>
         <p:style>
-          <a:lnRef idx="1">
-            <a:schemeClr val="accent1"/>
-          </a:lnRef>
-          <a:fillRef idx="3">
-            <a:schemeClr val="accent1"/>
-          </a:fillRef>
-          <a:effectRef idx="0">
-            <a:schemeClr val="accent1"/>
-          </a:effectRef>
-          <a:fontRef idx="minor">
-            <a:schemeClr val="lt1"/>
-          </a:fontRef>
-        </p:style>
-        <p:txBody>
-          <a:bodyPr rtlCol="0" anchor="ctr"/>
-          <a:lstStyle/>
-          <a:p>
-            <a:pPr algn="ctr"/>
-          </a:p>
-        </p:txBody>
-      </p:sp>
+          <a:lnRef idx="2">
+            <a:schemeClr val="accent1"/>
+          </a:lnRef>
+          <a:fillRef idx="0">
+            <a:schemeClr val="accent1"/>
+          </a:fillRef>
+          <a:effectRef idx="0">
+            <a:schemeClr val="accent1"/>
+          </a:effectRef>
+          <a:fontRef idx="minor">
+            <a:schemeClr val="tx1"/>
+          </a:fontRef>
+        </p:style>
+      </p:cxnSp>
       <p:cxnSp>
         <p:nvCxnSpPr>
-          <p:cNvPr id="107" name="u3_g_s" descr="Editable line; source id u3_g_s"/>
+          <p:cNvPr id="126" name="u3_g_l_1" descr="Editable line; source id u3_g_l_1"/>
           <p:cNvCxnSpPr/>
           <p:nvPr/>
         </p:nvCxnSpPr>
         <p:spPr>
           <a:xfrm>
-            <a:off x="8786812" y="3960812"/>
-            <a:ext cx="0" cy="39687"/>
+            <a:off x="8762999" y="3730624"/>
+            <a:ext cx="63500" cy="0"/>
           </a:xfrm>
           <a:prstGeom prst="line">
             <a:avLst/>
@@ -8273,14 +8975,14 @@
       </p:cxnSp>
       <p:cxnSp>
         <p:nvCxnSpPr>
-          <p:cNvPr id="108" name="u3_g_h" descr="Editable line; source id u3_g_h"/>
+          <p:cNvPr id="127" name="u3_g_l_2" descr="Editable line; source id u3_g_l_2"/>
           <p:cNvCxnSpPr/>
           <p:nvPr/>
         </p:nvCxnSpPr>
         <p:spPr>
-          <a:xfrm>
-            <a:off x="8715374" y="4000499"/>
-            <a:ext cx="142875" cy="0"/>
+          <a:xfrm flipH="1" flipV="1">
+            <a:off x="8794749" y="3659187"/>
+            <a:ext cx="31750" cy="71437"/>
           </a:xfrm>
           <a:prstGeom prst="line">
             <a:avLst/>
@@ -8309,14 +9011,14 @@
       </p:cxnSp>
       <p:cxnSp>
         <p:nvCxnSpPr>
-          <p:cNvPr id="109" name="u3_g_l" descr="Editable line; source id u3_g_l"/>
+          <p:cNvPr id="128" name="u3_g_r_0" descr="Editable line; source id u3_g_r_0"/>
           <p:cNvCxnSpPr/>
           <p:nvPr/>
         </p:nvCxnSpPr>
         <p:spPr>
-          <a:xfrm>
-            <a:off x="8715374" y="4000499"/>
-            <a:ext cx="0" cy="39688"/>
+          <a:xfrm flipH="1">
+            <a:off x="8985249" y="3659187"/>
+            <a:ext cx="31750" cy="71437"/>
           </a:xfrm>
           <a:prstGeom prst="line">
             <a:avLst/>
@@ -8345,14 +9047,14 @@
       </p:cxnSp>
       <p:cxnSp>
         <p:nvCxnSpPr>
-          <p:cNvPr id="110" name="u3_g_r" descr="Editable line; source id u3_g_r"/>
+          <p:cNvPr id="129" name="u3_g_r_1" descr="Editable line; source id u3_g_r_1"/>
           <p:cNvCxnSpPr/>
           <p:nvPr/>
         </p:nvCxnSpPr>
         <p:spPr>
           <a:xfrm>
-            <a:off x="8858249" y="4000499"/>
-            <a:ext cx="0" cy="39688"/>
+            <a:off x="8985249" y="3730624"/>
+            <a:ext cx="63500" cy="0"/>
           </a:xfrm>
           <a:prstGeom prst="line">
             <a:avLst/>
@@ -8379,16 +9081,88 @@
           </a:fontRef>
         </p:style>
       </p:cxnSp>
-      <p:sp>
-        <p:nvSpPr>
-          <p:cNvPr id="111" name="u3_t" descr="Editable text; source id u3_t"/>
+      <p:cxnSp>
+        <p:nvCxnSpPr>
+          <p:cNvPr id="130" name="u3_g_r_2" descr="Editable line; source id u3_g_r_2"/>
+          <p:cNvCxnSpPr/>
+          <p:nvPr/>
+        </p:nvCxnSpPr>
+        <p:spPr>
+          <a:xfrm flipH="1" flipV="1">
+            <a:off x="9016999" y="3659187"/>
+            <a:ext cx="31750" cy="71437"/>
+          </a:xfrm>
+          <a:prstGeom prst="line">
+            <a:avLst/>
+          </a:prstGeom>
+          <a:ln w="7937">
+            <a:solidFill>
+              <a:srgbClr val="1F2937"/>
+            </a:solidFill>
+          </a:ln>
+          <a:effectLst/>
+        </p:spPr>
+        <p:style>
+          <a:lnRef idx="2">
+            <a:schemeClr val="accent1"/>
+          </a:lnRef>
+          <a:fillRef idx="0">
+            <a:schemeClr val="accent1"/>
+          </a:fillRef>
+          <a:effectRef idx="0">
+            <a:schemeClr val="accent1"/>
+          </a:effectRef>
+          <a:fontRef idx="minor">
+            <a:schemeClr val="tx1"/>
+          </a:fontRef>
+        </p:style>
+      </p:cxnSp>
+      <p:cxnSp>
+        <p:nvCxnSpPr>
+          <p:cNvPr id="131" name="u3_g_f" descr="Editable line; source id u3_g_f"/>
+          <p:cNvCxnSpPr/>
+          <p:nvPr/>
+        </p:nvCxnSpPr>
+        <p:spPr>
+          <a:xfrm>
+            <a:off x="8842374" y="3841749"/>
+            <a:ext cx="127000" cy="0"/>
+          </a:xfrm>
+          <a:prstGeom prst="line">
+            <a:avLst/>
+          </a:prstGeom>
+          <a:ln w="7937">
+            <a:solidFill>
+              <a:srgbClr val="1F2937"/>
+            </a:solidFill>
+          </a:ln>
+          <a:effectLst/>
+        </p:spPr>
+        <p:style>
+          <a:lnRef idx="2">
+            <a:schemeClr val="accent1"/>
+          </a:lnRef>
+          <a:fillRef idx="0">
+            <a:schemeClr val="accent1"/>
+          </a:fillRef>
+          <a:effectRef idx="0">
+            <a:schemeClr val="accent1"/>
+          </a:effectRef>
+          <a:fontRef idx="minor">
+            <a:schemeClr val="tx1"/>
+          </a:fontRef>
+        </p:style>
+      </p:cxnSp>
+      <p:sp>
+        <p:nvSpPr>
+          <p:cNvPr id="132" name="u3_t" descr="Editable text; source id u3_t"/>
           <p:cNvSpPr txBox="1"/>
           <p:nvPr/>
         </p:nvSpPr>
         <p:spPr>
           <a:xfrm>
-            <a:off x="9001124" y="3865562"/>
-            <a:ext cx="2555874" cy="285749"/>
+            <a:off x="9159874" y="3571874"/>
+            <a:ext cx="2492374" cy="325437"/>
           </a:xfrm>
           <a:prstGeom prst="rect">
             <a:avLst/>
@@ -8404,7 +9178,7 @@
           <a:p>
             <a:pPr algn="l" fontAlgn="base">
               <a:lnSpc>
-                <a:spcPts val="2203"/>
+                <a:spcPts val="2187"/>
               </a:lnSpc>
               <a:spcBef>
                 <a:spcPts val="0"/>
@@ -8412,9 +9186,9 @@
               <a:spcAft>
                 <a:spcPts val="0"/>
               </a:spcAft>
-              <a:defRPr sz="1513" b="1" i="0" lang="zh-CN" dirty="0">
+              <a:defRPr sz="1499" b="1" i="0" lang="zh-CN" dirty="0">
                 <a:solidFill>
-                  <a:srgbClr val="2B3E57"/>
+                  <a:srgbClr val="7A5410"/>
                 </a:solidFill>
                 <a:latin typeface="Noto Sans CJK SC"/>
                 <a:ea typeface="Noto Sans CJK SC"/>
@@ -8422,9 +9196,9 @@
               </a:defRPr>
             </a:pPr>
             <a:r>
-              <a:rPr sz="1513" b="1" i="0" lang="zh-CN" dirty="0">
+              <a:rPr sz="1499" b="1" i="0" lang="zh-CN" dirty="0">
                 <a:solidFill>
-                  <a:srgbClr val="2B3E57"/>
+                  <a:srgbClr val="7A5410"/>
                 </a:solidFill>
                 <a:latin typeface="Noto Sans CJK SC"/>
                 <a:ea typeface="Noto Sans CJK SC"/>
@@ -8437,18 +9211,144 @@
       </p:sp>
       <p:sp>
         <p:nvSpPr>
-          <p:cNvPr id="112" name="u4" descr="Editable shape; source id u4"/>
+          <p:cNvPr id="133" name="cav" descr="Editable shape; source id cav"/>
           <p:cNvSpPr/>
           <p:nvPr/>
         </p:nvSpPr>
         <p:spPr>
           <a:xfrm>
-            <a:off x="8477249" y="5937249"/>
-            <a:ext cx="3254374" cy="984249"/>
+            <a:off x="9255124" y="4603749"/>
+            <a:ext cx="1825624" cy="317499"/>
           </a:xfrm>
           <a:prstGeom prst="roundRect">
             <a:avLst>
-              <a:gd name="adj" fmla="val 7258"/>
+              <a:gd name="adj" fmla="val 50000"/>
+            </a:avLst>
+          </a:prstGeom>
+          <a:solidFill>
+            <a:srgbClr val="FFF6E3"/>
+          </a:solidFill>
+          <a:ln w="8731">
+            <a:solidFill>
+              <a:srgbClr val="C48A24"/>
+            </a:solidFill>
+          </a:ln>
+          <a:effectLst/>
+        </p:spPr>
+        <p:style>
+          <a:lnRef idx="1">
+            <a:schemeClr val="accent1"/>
+          </a:lnRef>
+          <a:fillRef idx="3">
+            <a:schemeClr val="accent1"/>
+          </a:fillRef>
+          <a:effectRef idx="0">
+            <a:schemeClr val="accent1"/>
+          </a:effectRef>
+          <a:fontRef idx="minor">
+            <a:schemeClr val="lt1"/>
+          </a:fontRef>
+        </p:style>
+        <p:txBody>
+          <a:bodyPr rtlCol="0" anchor="ctr"/>
+          <a:lstStyle/>
+          <a:p>
+            <a:pPr algn="ctr"/>
+          </a:p>
+        </p:txBody>
+      </p:sp>
+      <p:sp>
+        <p:nvSpPr>
+          <p:cNvPr id="134" name="cav_t" descr="Editable text; source id cav_t"/>
+          <p:cNvSpPr txBox="1"/>
+          <p:nvPr/>
+        </p:nvSpPr>
+        <p:spPr>
+          <a:xfrm>
+            <a:off x="9334499" y="4635499"/>
+            <a:ext cx="1666874" cy="253999"/>
+          </a:xfrm>
+          <a:prstGeom prst="rect">
+            <a:avLst/>
+          </a:prstGeom>
+          <a:noFill/>
+          <a:effectLst/>
+        </p:spPr>
+        <p:txBody>
+          <a:bodyPr wrap="none" anchor="ctr" tIns="0" rIns="0" bIns="0" lIns="0" anchorCtr="0" vertOverflow="overflow">
+            <a:noAutofit/>
+          </a:bodyPr>
+          <a:lstStyle/>
+          <a:p>
+            <a:pPr algn="ctr" fontAlgn="base">
+              <a:lnSpc>
+                <a:spcPts val="1734"/>
+              </a:lnSpc>
+              <a:spcBef>
+                <a:spcPts val="0"/>
+              </a:spcBef>
+              <a:spcAft>
+                <a:spcPts val="0"/>
+              </a:spcAft>
+              <a:defRPr sz="1187" b="0" i="0" lang="zh-CN" dirty="0">
+                <a:solidFill>
+                  <a:srgbClr val="7A5410"/>
+                </a:solidFill>
+                <a:latin typeface="Noto Sans CJK SC"/>
+                <a:ea typeface="Noto Sans CJK SC"/>
+                <a:cs typeface="Noto Sans CJK SC"/>
+              </a:defRPr>
+            </a:pPr>
+            <a:r>
+              <a:rPr sz="1187" b="0" i="0" lang="zh-CN" dirty="0">
+                <a:solidFill>
+                  <a:srgbClr val="7A5410"/>
+                </a:solidFill>
+                <a:latin typeface="Noto Sans CJK SC"/>
+                <a:ea typeface="Noto Sans CJK SC"/>
+                <a:cs typeface="Noto Sans CJK SC"/>
+              </a:rPr>
+              <a:t>近邻条件</a:t>
+            </a:r>
+            <a:r>
+              <a:rPr sz="1187" b="0" i="0" lang="zh-CN" dirty="0">
+                <a:solidFill>
+                  <a:srgbClr val="7A5410"/>
+                </a:solidFill>
+                <a:latin typeface="DejaVu Sans"/>
+                <a:ea typeface="DejaVu Sans"/>
+                <a:cs typeface="DejaVu Sans"/>
+              </a:rPr>
+              <a:t> ≠ </a:t>
+            </a:r>
+            <a:r>
+              <a:rPr sz="1187" b="0" i="0" lang="zh-CN" dirty="0">
+                <a:solidFill>
+                  <a:srgbClr val="7A5410"/>
+                </a:solidFill>
+                <a:latin typeface="Noto Sans CJK SC"/>
+                <a:ea typeface="Noto Sans CJK SC"/>
+                <a:cs typeface="Noto Sans CJK SC"/>
+              </a:rPr>
+              <a:t>已验证配方</a:t>
+            </a:r>
+          </a:p>
+        </p:txBody>
+      </p:sp>
+      <p:sp>
+        <p:nvSpPr>
+          <p:cNvPr id="135" name="u4" descr="Editable shape; source id u4"/>
+          <p:cNvSpPr/>
+          <p:nvPr/>
+        </p:nvSpPr>
+        <p:spPr>
+          <a:xfrm>
+            <a:off x="8540749" y="5556249"/>
+            <a:ext cx="3254374" cy="888999"/>
+          </a:xfrm>
+          <a:prstGeom prst="roundRect">
+            <a:avLst>
+              <a:gd name="adj" fmla="val 8035"/>
             </a:avLst>
           </a:prstGeom>
           <a:solidFill>
@@ -8488,16 +9388,16 @@
       </p:sp>
       <p:sp>
         <p:nvSpPr>
-          <p:cNvPr id="113" name="u4_g_b" descr="Editable shape; source id u4_g_b"/>
+          <p:cNvPr id="136" name="u4_g_o" descr="Editable shape; source id u4_g_o"/>
           <p:cNvSpPr/>
           <p:nvPr/>
         </p:nvSpPr>
         <p:spPr>
           <a:xfrm>
-            <a:off x="8683624" y="6349999"/>
-            <a:ext cx="206374" cy="166687"/>
-          </a:xfrm>
-          <a:prstGeom prst="rect">
+            <a:off x="8810624" y="5905499"/>
+            <a:ext cx="190499" cy="190499"/>
+          </a:xfrm>
+          <a:prstGeom prst="ellipse">
             <a:avLst/>
           </a:prstGeom>
           <a:noFill/>
@@ -8505,9 +9405,6 @@
             <a:solidFill>
               <a:srgbClr val="1F2937"/>
             </a:solidFill>
-            <a:custDash>
-              <a:ds d="238000" sp="204000"/>
-            </a:custDash>
           </a:ln>
           <a:effectLst/>
         </p:spPr>
@@ -8535,14 +9432,202 @@
       </p:sp>
       <p:sp>
         <p:nvSpPr>
-          <p:cNvPr id="114" name="u4_t" descr="Editable text; source id u4_t"/>
+          <p:cNvPr id="137" name="u4_g_i" descr="Editable shape; source id u4_g_i"/>
+          <p:cNvSpPr/>
+          <p:nvPr/>
+        </p:nvSpPr>
+        <p:spPr>
+          <a:xfrm>
+            <a:off x="8874124" y="5968999"/>
+            <a:ext cx="63499" cy="63499"/>
+          </a:xfrm>
+          <a:prstGeom prst="ellipse">
+            <a:avLst/>
+          </a:prstGeom>
+          <a:noFill/>
+          <a:ln w="7937">
+            <a:solidFill>
+              <a:srgbClr val="1F2937"/>
+            </a:solidFill>
+          </a:ln>
+          <a:effectLst/>
+        </p:spPr>
+        <p:style>
+          <a:lnRef idx="1">
+            <a:schemeClr val="accent1"/>
+          </a:lnRef>
+          <a:fillRef idx="3">
+            <a:schemeClr val="accent1"/>
+          </a:fillRef>
+          <a:effectRef idx="0">
+            <a:schemeClr val="accent1"/>
+          </a:effectRef>
+          <a:fontRef idx="minor">
+            <a:schemeClr val="lt1"/>
+          </a:fontRef>
+        </p:style>
+        <p:txBody>
+          <a:bodyPr rtlCol="0" anchor="ctr"/>
+          <a:lstStyle/>
+          <a:p>
+            <a:pPr algn="ctr"/>
+          </a:p>
+        </p:txBody>
+      </p:sp>
+      <p:cxnSp>
+        <p:nvCxnSpPr>
+          <p:cNvPr id="138" name="u4_g_t506" descr="Editable line; source id u4_g_t506"/>
+          <p:cNvCxnSpPr/>
+          <p:nvPr/>
+        </p:nvCxnSpPr>
+        <p:spPr>
+          <a:xfrm>
+            <a:off x="8905874" y="5857874"/>
+            <a:ext cx="0" cy="55563"/>
+          </a:xfrm>
+          <a:prstGeom prst="line">
+            <a:avLst/>
+          </a:prstGeom>
+          <a:ln w="7937">
+            <a:solidFill>
+              <a:srgbClr val="1F2937"/>
+            </a:solidFill>
+          </a:ln>
+          <a:effectLst/>
+        </p:spPr>
+        <p:style>
+          <a:lnRef idx="2">
+            <a:schemeClr val="accent1"/>
+          </a:lnRef>
+          <a:fillRef idx="0">
+            <a:schemeClr val="accent1"/>
+          </a:fillRef>
+          <a:effectRef idx="0">
+            <a:schemeClr val="accent1"/>
+          </a:effectRef>
+          <a:fontRef idx="minor">
+            <a:schemeClr val="tx1"/>
+          </a:fontRef>
+        </p:style>
+      </p:cxnSp>
+      <p:cxnSp>
+        <p:nvCxnSpPr>
+          <p:cNvPr id="139" name="u4_g_t5078" descr="Editable line; source id u4_g_t5078"/>
+          <p:cNvCxnSpPr/>
+          <p:nvPr/>
+        </p:nvCxnSpPr>
+        <p:spPr>
+          <a:xfrm>
+            <a:off x="8905874" y="6088062"/>
+            <a:ext cx="0" cy="55562"/>
+          </a:xfrm>
+          <a:prstGeom prst="line">
+            <a:avLst/>
+          </a:prstGeom>
+          <a:ln w="7937">
+            <a:solidFill>
+              <a:srgbClr val="1F2937"/>
+            </a:solidFill>
+          </a:ln>
+          <a:effectLst/>
+        </p:spPr>
+        <p:style>
+          <a:lnRef idx="2">
+            <a:schemeClr val="accent1"/>
+          </a:lnRef>
+          <a:fillRef idx="0">
+            <a:schemeClr val="accent1"/>
+          </a:fillRef>
+          <a:effectRef idx="0">
+            <a:schemeClr val="accent1"/>
+          </a:effectRef>
+          <a:fontRef idx="minor">
+            <a:schemeClr val="tx1"/>
+          </a:fontRef>
+        </p:style>
+      </p:cxnSp>
+      <p:cxnSp>
+        <p:nvCxnSpPr>
+          <p:cNvPr id="140" name="u4_g_t650" descr="Editable line; source id u4_g_t650"/>
+          <p:cNvCxnSpPr/>
+          <p:nvPr/>
+        </p:nvCxnSpPr>
+        <p:spPr>
+          <a:xfrm>
+            <a:off x="8762999" y="6000749"/>
+            <a:ext cx="55563" cy="0"/>
+          </a:xfrm>
+          <a:prstGeom prst="line">
+            <a:avLst/>
+          </a:prstGeom>
+          <a:ln w="7937">
+            <a:solidFill>
+              <a:srgbClr val="1F2937"/>
+            </a:solidFill>
+          </a:ln>
+          <a:effectLst/>
+        </p:spPr>
+        <p:style>
+          <a:lnRef idx="2">
+            <a:schemeClr val="accent1"/>
+          </a:lnRef>
+          <a:fillRef idx="0">
+            <a:schemeClr val="accent1"/>
+          </a:fillRef>
+          <a:effectRef idx="0">
+            <a:schemeClr val="accent1"/>
+          </a:effectRef>
+          <a:fontRef idx="minor">
+            <a:schemeClr val="tx1"/>
+          </a:fontRef>
+        </p:style>
+      </p:cxnSp>
+      <p:cxnSp>
+        <p:nvCxnSpPr>
+          <p:cNvPr id="141" name="u4_g_t7850" descr="Editable line; source id u4_g_t7850"/>
+          <p:cNvCxnSpPr/>
+          <p:nvPr/>
+        </p:nvCxnSpPr>
+        <p:spPr>
+          <a:xfrm>
+            <a:off x="8993187" y="6000749"/>
+            <a:ext cx="55562" cy="0"/>
+          </a:xfrm>
+          <a:prstGeom prst="line">
+            <a:avLst/>
+          </a:prstGeom>
+          <a:ln w="7937">
+            <a:solidFill>
+              <a:srgbClr val="1F2937"/>
+            </a:solidFill>
+          </a:ln>
+          <a:effectLst/>
+        </p:spPr>
+        <p:style>
+          <a:lnRef idx="2">
+            <a:schemeClr val="accent1"/>
+          </a:lnRef>
+          <a:fillRef idx="0">
+            <a:schemeClr val="accent1"/>
+          </a:fillRef>
+          <a:effectRef idx="0">
+            <a:schemeClr val="accent1"/>
+          </a:effectRef>
+          <a:fontRef idx="minor">
+            <a:schemeClr val="tx1"/>
+          </a:fontRef>
+        </p:style>
+      </p:cxnSp>
+      <p:sp>
+        <p:nvSpPr>
+          <p:cNvPr id="142" name="u4_t" descr="Editable text; source id u4_t"/>
           <p:cNvSpPr txBox="1"/>
           <p:nvPr/>
         </p:nvSpPr>
         <p:spPr>
           <a:xfrm>
-            <a:off x="9001124" y="6286499"/>
-            <a:ext cx="2555874" cy="285749"/>
+            <a:off x="9159874" y="5841999"/>
+            <a:ext cx="2492374" cy="325437"/>
           </a:xfrm>
           <a:prstGeom prst="rect">
             <a:avLst/>
@@ -8558,7 +9643,7 @@
           <a:p>
             <a:pPr algn="l" fontAlgn="base">
               <a:lnSpc>
-                <a:spcPts val="2203"/>
+                <a:spcPts val="2187"/>
               </a:lnSpc>
               <a:spcBef>
                 <a:spcPts val="0"/>
@@ -8566,7 +9651,7 @@
               <a:spcAft>
                 <a:spcPts val="0"/>
               </a:spcAft>
-              <a:defRPr sz="1513" b="1" i="0" lang="zh-CN" dirty="0">
+              <a:defRPr sz="1499" b="1" i="0" lang="zh-CN" dirty="0">
                 <a:solidFill>
                   <a:srgbClr val="5B6570"/>
                 </a:solidFill>
@@ -8576,7 +9661,7 @@
               </a:defRPr>
             </a:pPr>
             <a:r>
-              <a:rPr sz="1513" b="1" i="0" lang="zh-CN" dirty="0">
+              <a:rPr sz="1499" b="1" i="0" lang="zh-CN" dirty="0">
                 <a:solidFill>
                   <a:srgbClr val="5B6570"/>
                 </a:solidFill>
@@ -8591,14 +9676,14 @@
       </p:sp>
       <p:cxnSp>
         <p:nvCxnSpPr>
-          <p:cNvPr id="115" name="br0_0" descr="Editable line; source id br0_0"/>
+          <p:cNvPr id="143" name="br_a1_0" descr="Editable line; source id br_a1_0"/>
           <p:cNvCxnSpPr/>
           <p:nvPr/>
         </p:nvCxnSpPr>
         <p:spPr>
           <a:xfrm>
-            <a:off x="3794124" y="1254124"/>
-            <a:ext cx="222250" cy="0"/>
+            <a:off x="4397374" y="1595437"/>
+            <a:ext cx="238125" cy="0"/>
           </a:xfrm>
           <a:prstGeom prst="line">
             <a:avLst/>
@@ -8627,14 +9712,14 @@
       </p:cxnSp>
       <p:cxnSp>
         <p:nvCxnSpPr>
-          <p:cNvPr id="116" name="br1_0" descr="Editable line; source id br1_0"/>
+          <p:cNvPr id="144" name="br_a2_0" descr="Editable line; source id br_a2_0"/>
           <p:cNvCxnSpPr/>
           <p:nvPr/>
         </p:nvCxnSpPr>
         <p:spPr>
           <a:xfrm>
-            <a:off x="3794124" y="2428874"/>
-            <a:ext cx="222250" cy="0"/>
+            <a:off x="4397374" y="2484437"/>
+            <a:ext cx="238125" cy="0"/>
           </a:xfrm>
           <a:prstGeom prst="line">
             <a:avLst/>
@@ -8663,14 +9748,14 @@
       </p:cxnSp>
       <p:cxnSp>
         <p:nvCxnSpPr>
-          <p:cNvPr id="117" name="br2_0" descr="Editable line; source id br2_0"/>
+          <p:cNvPr id="145" name="br_a3_0" descr="Editable line; source id br_a3_0"/>
           <p:cNvCxnSpPr/>
           <p:nvPr/>
         </p:nvCxnSpPr>
         <p:spPr>
           <a:xfrm>
-            <a:off x="3794124" y="3603624"/>
-            <a:ext cx="222250" cy="0"/>
+            <a:off x="4397374" y="3373437"/>
+            <a:ext cx="238125" cy="0"/>
           </a:xfrm>
           <a:prstGeom prst="line">
             <a:avLst/>
@@ -8699,14 +9784,14 @@
       </p:cxnSp>
       <p:cxnSp>
         <p:nvCxnSpPr>
-          <p:cNvPr id="118" name="br3_0" descr="Editable line; source id br3_0"/>
+          <p:cNvPr id="146" name="br_a4_0" descr="Editable line; source id br_a4_0"/>
           <p:cNvCxnSpPr/>
           <p:nvPr/>
         </p:nvCxnSpPr>
         <p:spPr>
           <a:xfrm>
-            <a:off x="3794124" y="4778374"/>
-            <a:ext cx="222250" cy="0"/>
+            <a:off x="4397374" y="4262437"/>
+            <a:ext cx="238125" cy="0"/>
           </a:xfrm>
           <a:prstGeom prst="line">
             <a:avLst/>
@@ -8735,14 +9820,14 @@
       </p:cxnSp>
       <p:cxnSp>
         <p:nvCxnSpPr>
-          <p:cNvPr id="119" name="brv_0" descr="Editable line; source id brv_0"/>
+          <p:cNvPr id="147" name="brv_0" descr="Editable line; source id brv_0"/>
           <p:cNvCxnSpPr/>
           <p:nvPr/>
         </p:nvCxnSpPr>
         <p:spPr>
           <a:xfrm>
-            <a:off x="4016374" y="1254124"/>
-            <a:ext cx="0" cy="3524250"/>
+            <a:off x="4635499" y="1595437"/>
+            <a:ext cx="0" cy="2667000"/>
           </a:xfrm>
           <a:prstGeom prst="line">
             <a:avLst/>
@@ -8771,14 +9856,14 @@
       </p:cxnSp>
       <p:sp>
         <p:nvSpPr>
-          <p:cNvPr id="120" name="brh_0" descr="Editable line; source id brh_0"/>
+          <p:cNvPr id="148" name="brh_0" descr="Editable line; source id brh_0"/>
           <p:cNvSpPr/>
           <p:nvPr/>
         </p:nvSpPr>
         <p:spPr>
           <a:xfrm>
-            <a:off x="4016375" y="2976562"/>
-            <a:ext cx="396875" cy="79375"/>
+            <a:off x="4635500" y="2889250"/>
+            <a:ext cx="254000" cy="79375"/>
           </a:xfrm>
           <a:custGeom>
             <a:avLst/>
@@ -8787,24 +9872,24 @@
             <a:cxnLst/>
             <a:rect l="l" t="t" r="r" b="b"/>
             <a:pathLst>
-              <a:path w="50000" h="10000">
+              <a:path w="32000" h="10000">
                 <a:moveTo>
                   <a:pt x="0" y="4100"/>
                 </a:moveTo>
                 <a:lnTo>
-                  <a:pt x="38000" y="4100"/>
+                  <a:pt x="20000" y="4100"/>
                 </a:lnTo>
                 <a:lnTo>
-                  <a:pt x="38000" y="0"/>
+                  <a:pt x="20000" y="0"/>
                 </a:lnTo>
                 <a:lnTo>
-                  <a:pt x="50000" y="5000"/>
+                  <a:pt x="32000" y="5000"/>
                 </a:lnTo>
                 <a:lnTo>
-                  <a:pt x="38000" y="10000"/>
+                  <a:pt x="20000" y="10000"/>
                 </a:lnTo>
                 <a:lnTo>
-                  <a:pt x="38000" y="5900"/>
+                  <a:pt x="20000" y="5900"/>
                 </a:lnTo>
                 <a:lnTo>
                   <a:pt x="0" y="5900"/>
@@ -8845,14 +9930,14 @@
       </p:sp>
       <p:cxnSp>
         <p:nvCxnSpPr>
-          <p:cNvPr id="121" name="fan0_0" descr="Editable line; source id fan0_0"/>
+          <p:cNvPr id="149" name="fan0_0" descr="Editable line; source id fan0_0"/>
           <p:cNvCxnSpPr/>
           <p:nvPr/>
         </p:nvCxnSpPr>
         <p:spPr>
           <a:xfrm>
-            <a:off x="7746999" y="3016249"/>
-            <a:ext cx="269875" cy="0"/>
+            <a:off x="7985124" y="3333749"/>
+            <a:ext cx="190500" cy="0"/>
           </a:xfrm>
           <a:prstGeom prst="line">
             <a:avLst/>
@@ -8881,14 +9966,14 @@
       </p:cxnSp>
       <p:cxnSp>
         <p:nvCxnSpPr>
-          <p:cNvPr id="122" name="fanv_0" descr="Editable line; source id fanv_0"/>
+          <p:cNvPr id="150" name="fanv_0" descr="Editable line; source id fanv_0"/>
           <p:cNvCxnSpPr/>
           <p:nvPr/>
         </p:nvCxnSpPr>
         <p:spPr>
           <a:xfrm>
-            <a:off x="8016874" y="1254124"/>
-            <a:ext cx="0" cy="2730500"/>
+            <a:off x="8175624" y="1635124"/>
+            <a:ext cx="0" cy="2095500"/>
           </a:xfrm>
           <a:prstGeom prst="line">
             <a:avLst/>
@@ -8917,14 +10002,14 @@
       </p:cxnSp>
       <p:sp>
         <p:nvSpPr>
-          <p:cNvPr id="123" name="fan1_0" descr="Editable line; source id fan1_0"/>
+          <p:cNvPr id="151" name="fan1_0" descr="Editable line; source id fan1_0"/>
           <p:cNvSpPr/>
           <p:nvPr/>
         </p:nvSpPr>
         <p:spPr>
           <a:xfrm>
-            <a:off x="8016875" y="1214437"/>
-            <a:ext cx="428625" cy="79375"/>
+            <a:off x="8175625" y="1595437"/>
+            <a:ext cx="333375" cy="79375"/>
           </a:xfrm>
           <a:custGeom>
             <a:avLst/>
@@ -8933,24 +10018,24 @@
             <a:cxnLst/>
             <a:rect l="l" t="t" r="r" b="b"/>
             <a:pathLst>
-              <a:path w="54000" h="10000">
+              <a:path w="42000" h="10000">
                 <a:moveTo>
                   <a:pt x="0" y="4100"/>
                 </a:moveTo>
                 <a:lnTo>
-                  <a:pt x="42000" y="4100"/>
+                  <a:pt x="30000" y="4100"/>
                 </a:lnTo>
                 <a:lnTo>
-                  <a:pt x="42000" y="0"/>
+                  <a:pt x="30000" y="0"/>
                 </a:lnTo>
                 <a:lnTo>
-                  <a:pt x="54000" y="5000"/>
+                  <a:pt x="42000" y="5000"/>
                 </a:lnTo>
                 <a:lnTo>
-                  <a:pt x="42000" y="10000"/>
+                  <a:pt x="30000" y="10000"/>
                 </a:lnTo>
                 <a:lnTo>
-                  <a:pt x="42000" y="5900"/>
+                  <a:pt x="30000" y="5900"/>
                 </a:lnTo>
                 <a:lnTo>
                   <a:pt x="0" y="5900"/>
@@ -8991,14 +10076,14 @@
       </p:sp>
       <p:sp>
         <p:nvSpPr>
-          <p:cNvPr id="124" name="fan2_0" descr="Editable line; source id fan2_0"/>
+          <p:cNvPr id="152" name="fan2_0" descr="Editable line; source id fan2_0"/>
           <p:cNvSpPr/>
           <p:nvPr/>
         </p:nvSpPr>
         <p:spPr>
           <a:xfrm>
-            <a:off x="8016875" y="2579687"/>
-            <a:ext cx="428625" cy="79375"/>
+            <a:off x="8175625" y="2643187"/>
+            <a:ext cx="333375" cy="79375"/>
           </a:xfrm>
           <a:custGeom>
             <a:avLst/>
@@ -9007,24 +10092,24 @@
             <a:cxnLst/>
             <a:rect l="l" t="t" r="r" b="b"/>
             <a:pathLst>
-              <a:path w="54000" h="10000">
+              <a:path w="42000" h="10000">
                 <a:moveTo>
                   <a:pt x="0" y="4100"/>
                 </a:moveTo>
                 <a:lnTo>
-                  <a:pt x="42000" y="4100"/>
+                  <a:pt x="30000" y="4100"/>
                 </a:lnTo>
                 <a:lnTo>
-                  <a:pt x="42000" y="0"/>
+                  <a:pt x="30000" y="0"/>
                 </a:lnTo>
                 <a:lnTo>
-                  <a:pt x="54000" y="5000"/>
+                  <a:pt x="42000" y="5000"/>
                 </a:lnTo>
                 <a:lnTo>
-                  <a:pt x="42000" y="10000"/>
+                  <a:pt x="30000" y="10000"/>
                 </a:lnTo>
                 <a:lnTo>
-                  <a:pt x="42000" y="5900"/>
+                  <a:pt x="30000" y="5900"/>
                 </a:lnTo>
                 <a:lnTo>
                   <a:pt x="0" y="5900"/>
@@ -9065,14 +10150,14 @@
       </p:sp>
       <p:sp>
         <p:nvSpPr>
-          <p:cNvPr id="125" name="fan3_0" descr="Editable line; source id fan3_0"/>
+          <p:cNvPr id="153" name="fan3_0" descr="Editable line; source id fan3_0"/>
           <p:cNvSpPr/>
           <p:nvPr/>
         </p:nvSpPr>
         <p:spPr>
           <a:xfrm>
-            <a:off x="8016875" y="3944937"/>
-            <a:ext cx="428625" cy="79375"/>
+            <a:off x="8175625" y="3690937"/>
+            <a:ext cx="333375" cy="79375"/>
           </a:xfrm>
           <a:custGeom>
             <a:avLst/>
@@ -9081,24 +10166,24 @@
             <a:cxnLst/>
             <a:rect l="l" t="t" r="r" b="b"/>
             <a:pathLst>
-              <a:path w="54000" h="10000">
+              <a:path w="42000" h="10000">
                 <a:moveTo>
                   <a:pt x="0" y="4100"/>
                 </a:moveTo>
                 <a:lnTo>
-                  <a:pt x="42000" y="4100"/>
+                  <a:pt x="30000" y="4100"/>
                 </a:lnTo>
                 <a:lnTo>
-                  <a:pt x="42000" y="0"/>
+                  <a:pt x="30000" y="0"/>
                 </a:lnTo>
                 <a:lnTo>
-                  <a:pt x="54000" y="5000"/>
+                  <a:pt x="42000" y="5000"/>
                 </a:lnTo>
                 <a:lnTo>
-                  <a:pt x="42000" y="10000"/>
+                  <a:pt x="30000" y="10000"/>
                 </a:lnTo>
                 <a:lnTo>
-                  <a:pt x="42000" y="5900"/>
+                  <a:pt x="30000" y="5900"/>
                 </a:lnTo>
                 <a:lnTo>
                   <a:pt x="0" y="5900"/>
@@ -9139,92 +10224,14 @@
       </p:sp>
       <p:cxnSp>
         <p:nvCxnSpPr>
-          <p:cNvPr id="126" name="ex_0" descr="Editable line; source id ex_0"/>
+          <p:cNvPr id="154" name="ex_0" descr="Editable line; source id ex_0"/>
           <p:cNvCxnSpPr/>
           <p:nvPr/>
         </p:nvCxnSpPr>
         <p:spPr>
           <a:xfrm>
-            <a:off x="2262187" y="6953249"/>
-            <a:ext cx="0" cy="428625"/>
-          </a:xfrm>
-          <a:prstGeom prst="line">
-            <a:avLst/>
-          </a:prstGeom>
-          <a:ln w="14287">
-            <a:solidFill>
-              <a:srgbClr val="4B5563"/>
-            </a:solidFill>
-            <a:custDash>
-              <a:ds d="611111" sp="388889"/>
-            </a:custDash>
-          </a:ln>
-          <a:effectLst/>
-        </p:spPr>
-        <p:style>
-          <a:lnRef idx="2">
-            <a:schemeClr val="accent1"/>
-          </a:lnRef>
-          <a:fillRef idx="0">
-            <a:schemeClr val="accent1"/>
-          </a:fillRef>
-          <a:effectRef idx="0">
-            <a:schemeClr val="accent1"/>
-          </a:effectRef>
-          <a:fontRef idx="minor">
-            <a:schemeClr val="tx1"/>
-          </a:fontRef>
-        </p:style>
-      </p:cxnSp>
-      <p:cxnSp>
-        <p:nvCxnSpPr>
-          <p:cNvPr id="127" name="ex_1" descr="Editable line; source id ex_1"/>
-          <p:cNvCxnSpPr/>
-          <p:nvPr/>
-        </p:nvCxnSpPr>
-        <p:spPr>
-          <a:xfrm>
-            <a:off x="2262187" y="7381874"/>
-            <a:ext cx="7842250" cy="0"/>
-          </a:xfrm>
-          <a:prstGeom prst="line">
-            <a:avLst/>
-          </a:prstGeom>
-          <a:ln w="14287">
-            <a:solidFill>
-              <a:srgbClr val="4B5563"/>
-            </a:solidFill>
-            <a:custDash>
-              <a:ds d="611111" sp="388889"/>
-            </a:custDash>
-          </a:ln>
-          <a:effectLst/>
-        </p:spPr>
-        <p:style>
-          <a:lnRef idx="2">
-            <a:schemeClr val="accent1"/>
-          </a:lnRef>
-          <a:fillRef idx="0">
-            <a:schemeClr val="accent1"/>
-          </a:fillRef>
-          <a:effectRef idx="0">
-            <a:schemeClr val="accent1"/>
-          </a:effectRef>
-          <a:fontRef idx="minor">
-            <a:schemeClr val="tx1"/>
-          </a:fontRef>
-        </p:style>
-      </p:cxnSp>
-      <p:cxnSp>
-        <p:nvCxnSpPr>
-          <p:cNvPr id="128" name="ex_2" descr="Editable line; source id ex_2"/>
-          <p:cNvCxnSpPr/>
-          <p:nvPr/>
-        </p:nvCxnSpPr>
-        <p:spPr>
-          <a:xfrm flipV="1">
-            <a:off x="10104437" y="6953249"/>
-            <a:ext cx="0" cy="428625"/>
+            <a:off x="4397374" y="6000749"/>
+            <a:ext cx="4111625" cy="0"/>
           </a:xfrm>
           <a:prstGeom prst="line">
             <a:avLst/>
@@ -9257,14 +10264,14 @@
       </p:cxnSp>
       <p:sp>
         <p:nvSpPr>
-          <p:cNvPr id="129" name="ex_p" descr="Editable shape; source id ex_p"/>
+          <p:cNvPr id="155" name="ex_p" descr="Editable shape; source id ex_p"/>
           <p:cNvSpPr/>
           <p:nvPr/>
         </p:nvSpPr>
         <p:spPr>
           <a:xfrm>
-            <a:off x="5897562" y="7223124"/>
-            <a:ext cx="571499" cy="309562"/>
+            <a:off x="6159499" y="5841999"/>
+            <a:ext cx="587374" cy="317499"/>
           </a:xfrm>
           <a:prstGeom prst="roundRect">
             <a:avLst>
@@ -9305,14 +10312,14 @@
       </p:sp>
       <p:sp>
         <p:nvSpPr>
-          <p:cNvPr id="130" name="ex_p_t" descr="Editable text; source id ex_p_t"/>
+          <p:cNvPr id="156" name="ex_p_t" descr="Editable text; source id ex_p_t"/>
           <p:cNvSpPr txBox="1"/>
           <p:nvPr/>
         </p:nvSpPr>
         <p:spPr>
           <a:xfrm>
-            <a:off x="5976937" y="7254874"/>
-            <a:ext cx="412749" cy="246062"/>
+            <a:off x="6238874" y="5873749"/>
+            <a:ext cx="428624" cy="253999"/>
           </a:xfrm>
           <a:prstGeom prst="rect">
             <a:avLst/>
@@ -9328,7 +10335,7 @@
           <a:p>
             <a:pPr algn="ctr" fontAlgn="base">
               <a:lnSpc>
-                <a:spcPts val="1640"/>
+                <a:spcPts val="1734"/>
               </a:lnSpc>
               <a:spcBef>
                 <a:spcPts val="0"/>
@@ -9336,7 +10343,7 @@
               <a:spcAft>
                 <a:spcPts val="0"/>
               </a:spcAft>
-              <a:defRPr sz="1124" b="0" i="0" lang="zh-CN" dirty="0">
+              <a:defRPr sz="1187" b="0" i="0" lang="zh-CN" dirty="0">
                 <a:solidFill>
                   <a:srgbClr val="3F4854"/>
                 </a:solidFill>
@@ -9346,7 +10353,7 @@
               </a:defRPr>
             </a:pPr>
             <a:r>
-              <a:rPr sz="1124" b="0" i="0" lang="zh-CN" dirty="0">
+              <a:rPr sz="1187" b="0" i="0" lang="zh-CN" dirty="0">
                 <a:solidFill>
                   <a:srgbClr val="3F4854"/>
                 </a:solidFill>

--- a/media/figstudio/fig01_evidence_map/fig01_evidence_synthesis_map_editable.pptx
+++ b/media/figstudio/fig01_evidence_map/fig01_evidence_synthesis_map_editable.pptx
@@ -3535,7 +3535,7 @@
           <a:solidFill>
             <a:srgbClr val="EEF2F7"/>
           </a:solidFill>
-          <a:ln w="9524">
+          <a:ln w="12699">
             <a:solidFill>
               <a:srgbClr val="5B7592"/>
             </a:solidFill>
@@ -3639,7 +3639,7 @@
           <a:solidFill>
             <a:srgbClr val="E6F2F3"/>
           </a:solidFill>
-          <a:ln w="9524">
+          <a:ln w="12699">
             <a:solidFill>
               <a:srgbClr val="1F7F8C"/>
             </a:solidFill>
@@ -3743,7 +3743,7 @@
           <a:solidFill>
             <a:srgbClr val="FFF6E3"/>
           </a:solidFill>
-          <a:ln w="9524">
+          <a:ln w="12699">
             <a:solidFill>
               <a:srgbClr val="C48A24"/>
             </a:solidFill>
@@ -3847,7 +3847,7 @@
           <a:solidFill>
             <a:srgbClr val="FFFFFF"/>
           </a:solidFill>
-          <a:ln w="11112">
+          <a:ln w="15081">
             <a:solidFill>
               <a:srgbClr val="5B7592"/>
             </a:solidFill>
@@ -3937,9 +3937,9 @@
             <a:avLst/>
           </a:prstGeom>
           <a:noFill/>
-          <a:ln w="7937">
+          <a:ln w="18216">
             <a:solidFill>
-              <a:srgbClr val="1F2937"/>
+              <a:srgbClr val="111A24"/>
             </a:solidFill>
           </a:ln>
           <a:effectLst/>
@@ -3980,9 +3980,9 @@
           <a:prstGeom prst="line">
             <a:avLst/>
           </a:prstGeom>
-          <a:ln w="7937">
+          <a:ln w="18216">
             <a:solidFill>
-              <a:srgbClr val="1F2937"/>
+              <a:srgbClr val="111A24"/>
             </a:solidFill>
           </a:ln>
           <a:effectLst/>
@@ -4016,9 +4016,9 @@
           <a:prstGeom prst="line">
             <a:avLst/>
           </a:prstGeom>
-          <a:ln w="7937">
+          <a:ln w="18216">
             <a:solidFill>
-              <a:srgbClr val="1F2937"/>
+              <a:srgbClr val="111A24"/>
             </a:solidFill>
           </a:ln>
           <a:effectLst/>
@@ -4052,9 +4052,9 @@
           <a:prstGeom prst="line">
             <a:avLst/>
           </a:prstGeom>
-          <a:ln w="7937">
+          <a:ln w="18216">
             <a:solidFill>
-              <a:srgbClr val="1F2937"/>
+              <a:srgbClr val="111A24"/>
             </a:solidFill>
           </a:ln>
           <a:effectLst/>
@@ -4149,7 +4149,7 @@
           <a:solidFill>
             <a:srgbClr val="FFFFFF"/>
           </a:solidFill>
-          <a:ln w="11112">
+          <a:ln w="15081">
             <a:solidFill>
               <a:srgbClr val="5B7592"/>
             </a:solidFill>
@@ -4238,9 +4238,9 @@
           <a:prstGeom prst="line">
             <a:avLst/>
           </a:prstGeom>
-          <a:ln w="7937">
+          <a:ln w="18216">
             <a:solidFill>
-              <a:srgbClr val="1F2937"/>
+              <a:srgbClr val="111A24"/>
             </a:solidFill>
           </a:ln>
           <a:effectLst/>
@@ -4274,9 +4274,9 @@
           <a:prstGeom prst="line">
             <a:avLst/>
           </a:prstGeom>
-          <a:ln w="7937">
+          <a:ln w="18216">
             <a:solidFill>
-              <a:srgbClr val="1F2937"/>
+              <a:srgbClr val="111A24"/>
             </a:solidFill>
           </a:ln>
           <a:effectLst/>
@@ -4310,9 +4310,9 @@
           <a:prstGeom prst="line">
             <a:avLst/>
           </a:prstGeom>
-          <a:ln w="7937">
+          <a:ln w="18216">
             <a:solidFill>
-              <a:srgbClr val="1F2937"/>
+              <a:srgbClr val="111A24"/>
             </a:solidFill>
           </a:ln>
           <a:effectLst/>
@@ -4346,9 +4346,9 @@
           <a:prstGeom prst="line">
             <a:avLst/>
           </a:prstGeom>
-          <a:ln w="7937">
+          <a:ln w="18216">
             <a:solidFill>
-              <a:srgbClr val="1F2937"/>
+              <a:srgbClr val="111A24"/>
             </a:solidFill>
           </a:ln>
           <a:effectLst/>
@@ -4382,9 +4382,9 @@
           <a:prstGeom prst="line">
             <a:avLst/>
           </a:prstGeom>
-          <a:ln w="7937">
+          <a:ln w="18216">
             <a:solidFill>
-              <a:srgbClr val="1F2937"/>
+              <a:srgbClr val="111A24"/>
             </a:solidFill>
           </a:ln>
           <a:effectLst/>
@@ -4418,9 +4418,9 @@
           <a:prstGeom prst="line">
             <a:avLst/>
           </a:prstGeom>
-          <a:ln w="7937">
+          <a:ln w="18216">
             <a:solidFill>
-              <a:srgbClr val="1F2937"/>
+              <a:srgbClr val="111A24"/>
             </a:solidFill>
           </a:ln>
           <a:effectLst/>
@@ -4454,9 +4454,9 @@
           <a:prstGeom prst="line">
             <a:avLst/>
           </a:prstGeom>
-          <a:ln w="7937">
+          <a:ln w="18216">
             <a:solidFill>
-              <a:srgbClr val="1F2937"/>
+              <a:srgbClr val="111A24"/>
             </a:solidFill>
           </a:ln>
           <a:effectLst/>
@@ -4573,7 +4573,7 @@
           <a:solidFill>
             <a:srgbClr val="FFFFFF"/>
           </a:solidFill>
-          <a:ln w="11112">
+          <a:ln w="15081">
             <a:solidFill>
               <a:srgbClr val="5B7592"/>
             </a:solidFill>
@@ -4662,9 +4662,9 @@
           <a:prstGeom prst="line">
             <a:avLst/>
           </a:prstGeom>
-          <a:ln w="7937">
+          <a:ln w="18216">
             <a:solidFill>
-              <a:srgbClr val="1F2937"/>
+              <a:srgbClr val="111A24"/>
             </a:solidFill>
           </a:ln>
           <a:effectLst/>
@@ -4698,9 +4698,9 @@
           <a:prstGeom prst="line">
             <a:avLst/>
           </a:prstGeom>
-          <a:ln w="7937">
+          <a:ln w="18216">
             <a:solidFill>
-              <a:srgbClr val="1F2937"/>
+              <a:srgbClr val="111A24"/>
             </a:solidFill>
           </a:ln>
           <a:effectLst/>
@@ -4734,9 +4734,9 @@
           <a:prstGeom prst="line">
             <a:avLst/>
           </a:prstGeom>
-          <a:ln w="7937">
+          <a:ln w="18216">
             <a:solidFill>
-              <a:srgbClr val="1F2937"/>
+              <a:srgbClr val="111A24"/>
             </a:solidFill>
           </a:ln>
           <a:effectLst/>
@@ -4770,9 +4770,9 @@
           <a:prstGeom prst="line">
             <a:avLst/>
           </a:prstGeom>
-          <a:ln w="7937">
+          <a:ln w="18216">
             <a:solidFill>
-              <a:srgbClr val="1F2937"/>
+              <a:srgbClr val="111A24"/>
             </a:solidFill>
           </a:ln>
           <a:effectLst/>
@@ -4806,9 +4806,9 @@
           <a:prstGeom prst="line">
             <a:avLst/>
           </a:prstGeom>
-          <a:ln w="7937">
+          <a:ln w="18216">
             <a:solidFill>
-              <a:srgbClr val="1F2937"/>
+              <a:srgbClr val="111A24"/>
             </a:solidFill>
           </a:ln>
           <a:effectLst/>
@@ -4842,9 +4842,9 @@
           <a:prstGeom prst="line">
             <a:avLst/>
           </a:prstGeom>
-          <a:ln w="7937">
+          <a:ln w="18216">
             <a:solidFill>
-              <a:srgbClr val="1F2937"/>
+              <a:srgbClr val="111A24"/>
             </a:solidFill>
           </a:ln>
           <a:effectLst/>
@@ -5055,7 +5055,7 @@
             <a:avLst/>
           </a:prstGeom>
           <a:solidFill>
-            <a:srgbClr val="1F2937"/>
+            <a:srgbClr val="111A24"/>
           </a:solidFill>
           <a:ln>
             <a:noFill/>
@@ -5335,7 +5335,7 @@
           <a:solidFill>
             <a:srgbClr val="FFFFFF"/>
           </a:solidFill>
-          <a:ln w="11112">
+          <a:ln w="15081">
             <a:solidFill>
               <a:srgbClr val="5B7592"/>
             </a:solidFill>
@@ -5424,9 +5424,9 @@
           <a:prstGeom prst="line">
             <a:avLst/>
           </a:prstGeom>
-          <a:ln w="7937">
+          <a:ln w="18216">
             <a:solidFill>
-              <a:srgbClr val="1F2937"/>
+              <a:srgbClr val="111A24"/>
             </a:solidFill>
           </a:ln>
           <a:effectLst/>
@@ -5460,9 +5460,9 @@
           <a:prstGeom prst="line">
             <a:avLst/>
           </a:prstGeom>
-          <a:ln w="7937">
+          <a:ln w="18216">
             <a:solidFill>
-              <a:srgbClr val="1F2937"/>
+              <a:srgbClr val="111A24"/>
             </a:solidFill>
           </a:ln>
           <a:effectLst/>
@@ -5496,9 +5496,9 @@
           <a:prstGeom prst="line">
             <a:avLst/>
           </a:prstGeom>
-          <a:ln w="7937">
+          <a:ln w="18216">
             <a:solidFill>
-              <a:srgbClr val="1F2937"/>
+              <a:srgbClr val="111A24"/>
             </a:solidFill>
           </a:ln>
           <a:effectLst/>
@@ -5532,9 +5532,9 @@
           <a:prstGeom prst="line">
             <a:avLst/>
           </a:prstGeom>
-          <a:ln w="7937">
+          <a:ln w="18216">
             <a:solidFill>
-              <a:srgbClr val="1F2937"/>
+              <a:srgbClr val="111A24"/>
             </a:solidFill>
           </a:ln>
           <a:effectLst/>
@@ -5629,12 +5629,12 @@
           <a:solidFill>
             <a:srgbClr val="FFFFFF"/>
           </a:solidFill>
-          <a:ln w="11112">
+          <a:ln w="15081">
             <a:solidFill>
               <a:srgbClr val="9AA3AB"/>
             </a:solidFill>
             <a:custDash>
-              <a:ds d="857143" sp="571429"/>
+              <a:ds d="631579" sp="421053"/>
             </a:custDash>
           </a:ln>
           <a:effectLst/>
@@ -5676,9 +5676,9 @@
             <a:avLst/>
           </a:prstGeom>
           <a:noFill/>
-          <a:ln w="7937">
+          <a:ln w="18216">
             <a:solidFill>
-              <a:srgbClr val="1F2937"/>
+              <a:srgbClr val="111A24"/>
             </a:solidFill>
           </a:ln>
           <a:effectLst/>
@@ -5719,9 +5719,9 @@
           <a:prstGeom prst="line">
             <a:avLst/>
           </a:prstGeom>
-          <a:ln w="7937">
+          <a:ln w="18216">
             <a:solidFill>
-              <a:srgbClr val="1F2937"/>
+              <a:srgbClr val="111A24"/>
             </a:solidFill>
           </a:ln>
           <a:effectLst/>
@@ -5755,9 +5755,9 @@
           <a:prstGeom prst="line">
             <a:avLst/>
           </a:prstGeom>
-          <a:ln w="7937">
+          <a:ln w="18216">
             <a:solidFill>
-              <a:srgbClr val="1F2937"/>
+              <a:srgbClr val="111A24"/>
             </a:solidFill>
           </a:ln>
           <a:effectLst/>
@@ -5791,9 +5791,9 @@
           <a:prstGeom prst="line">
             <a:avLst/>
           </a:prstGeom>
-          <a:ln w="7937">
+          <a:ln w="18216">
             <a:solidFill>
-              <a:srgbClr val="1F2937"/>
+              <a:srgbClr val="111A24"/>
             </a:solidFill>
           </a:ln>
           <a:effectLst/>
@@ -5827,9 +5827,9 @@
           <a:prstGeom prst="line">
             <a:avLst/>
           </a:prstGeom>
-          <a:ln w="7937">
+          <a:ln w="18216">
             <a:solidFill>
-              <a:srgbClr val="1F2937"/>
+              <a:srgbClr val="111A24"/>
             </a:solidFill>
           </a:ln>
           <a:effectLst/>
@@ -5913,8 +5913,8 @@
         </p:nvSpPr>
         <p:spPr>
           <a:xfrm>
-            <a:off x="456406" y="1381125"/>
-            <a:ext cx="71437" cy="2103437"/>
+            <a:off x="448469" y="1381125"/>
+            <a:ext cx="87312" cy="2103437"/>
           </a:xfrm>
           <a:custGeom>
             <a:avLst/>
@@ -5923,34 +5923,34 @@
             <a:cxnLst/>
             <a:rect l="l" t="t" r="r" b="b"/>
             <a:pathLst>
-              <a:path w="9000" h="265000">
+              <a:path w="11000" h="265000">
                 <a:moveTo>
-                  <a:pt x="3700" y="265000"/>
+                  <a:pt x="4400" y="265000"/>
                 </a:moveTo>
                 <a:lnTo>
-                  <a:pt x="3700" y="11000"/>
+                  <a:pt x="4400" y="14000"/>
                 </a:lnTo>
                 <a:lnTo>
-                  <a:pt x="0" y="11000"/>
+                  <a:pt x="0" y="14000"/>
                 </a:lnTo>
                 <a:lnTo>
-                  <a:pt x="4500" y="0"/>
+                  <a:pt x="5500" y="0"/>
                 </a:lnTo>
                 <a:lnTo>
-                  <a:pt x="9000" y="11000"/>
+                  <a:pt x="11000" y="14000"/>
                 </a:lnTo>
                 <a:lnTo>
-                  <a:pt x="5300" y="11000"/>
+                  <a:pt x="6600" y="14000"/>
                 </a:lnTo>
                 <a:lnTo>
-                  <a:pt x="5300" y="265000"/>
+                  <a:pt x="6600" y="265000"/>
                 </a:lnTo>
                 <a:close/>
               </a:path>
             </a:pathLst>
           </a:custGeom>
           <a:solidFill>
-            <a:srgbClr val="3F4854"/>
+            <a:srgbClr val="27303A"/>
           </a:solidFill>
           <a:ln>
             <a:noFill/>
@@ -5987,8 +5987,8 @@
         </p:nvSpPr>
         <p:spPr>
           <a:xfrm>
-            <a:off x="456406" y="4151312"/>
-            <a:ext cx="71437" cy="2103437"/>
+            <a:off x="448469" y="4151312"/>
+            <a:ext cx="87312" cy="2103437"/>
           </a:xfrm>
           <a:custGeom>
             <a:avLst/>
@@ -5997,34 +5997,34 @@
             <a:cxnLst/>
             <a:rect l="l" t="t" r="r" b="b"/>
             <a:pathLst>
-              <a:path w="9000" h="265000">
+              <a:path w="11000" h="265000">
                 <a:moveTo>
-                  <a:pt x="5300" y="0"/>
+                  <a:pt x="6600" y="0"/>
                 </a:moveTo>
                 <a:lnTo>
-                  <a:pt x="5300" y="254000"/>
+                  <a:pt x="6600" y="251000"/>
                 </a:lnTo>
                 <a:lnTo>
-                  <a:pt x="9000" y="254000"/>
+                  <a:pt x="11000" y="251000"/>
                 </a:lnTo>
                 <a:lnTo>
-                  <a:pt x="4500" y="265000"/>
+                  <a:pt x="5500" y="265000"/>
                 </a:lnTo>
                 <a:lnTo>
-                  <a:pt x="0" y="254000"/>
+                  <a:pt x="0" y="251000"/>
                 </a:lnTo>
                 <a:lnTo>
-                  <a:pt x="3700" y="254000"/>
+                  <a:pt x="4400" y="251000"/>
                 </a:lnTo>
                 <a:lnTo>
-                  <a:pt x="3700" y="0"/>
+                  <a:pt x="4400" y="0"/>
                 </a:lnTo>
                 <a:close/>
               </a:path>
             </a:pathLst>
           </a:custGeom>
           <a:solidFill>
-            <a:srgbClr val="3F4854"/>
+            <a:srgbClr val="27303A"/>
           </a:solidFill>
           <a:ln>
             <a:noFill/>
@@ -6088,7 +6088,7 @@
               </a:spcAft>
               <a:defRPr sz="1124" b="1" i="0" lang="zh-CN" dirty="0">
                 <a:solidFill>
-                  <a:srgbClr val="3F4854"/>
+                  <a:srgbClr val="27303A"/>
                 </a:solidFill>
                 <a:latin typeface="Noto Sans CJK SC"/>
                 <a:ea typeface="Noto Sans CJK SC"/>
@@ -6098,7 +6098,7 @@
             <a:r>
               <a:rPr sz="1124" b="1" i="0" lang="zh-CN" dirty="0">
                 <a:solidFill>
-                  <a:srgbClr val="3F4854"/>
+                  <a:srgbClr val="27303A"/>
                 </a:solidFill>
                 <a:latin typeface="Noto Sans CJK SC"/>
                 <a:ea typeface="Noto Sans CJK SC"/>
@@ -6144,7 +6144,7 @@
               </a:spcAft>
               <a:defRPr sz="1124" b="1" i="0" lang="zh-CN" dirty="0">
                 <a:solidFill>
-                  <a:srgbClr val="3F4854"/>
+                  <a:srgbClr val="27303A"/>
                 </a:solidFill>
                 <a:latin typeface="Noto Sans CJK SC"/>
                 <a:ea typeface="Noto Sans CJK SC"/>
@@ -6154,7 +6154,7 @@
             <a:r>
               <a:rPr sz="1124" b="1" i="0" lang="zh-CN" dirty="0">
                 <a:solidFill>
-                  <a:srgbClr val="3F4854"/>
+                  <a:srgbClr val="27303A"/>
                 </a:solidFill>
                 <a:latin typeface="Noto Sans CJK SC"/>
                 <a:ea typeface="Noto Sans CJK SC"/>
@@ -6198,9 +6198,9 @@
               <a:spcAft>
                 <a:spcPts val="0"/>
               </a:spcAft>
-              <a:defRPr sz="1124" b="0" i="0" lang="zh-CN" dirty="0">
+              <a:defRPr sz="1124" b="1" i="0" lang="zh-CN" dirty="0">
                 <a:solidFill>
-                  <a:srgbClr val="3F4854"/>
+                  <a:srgbClr val="27303A"/>
                 </a:solidFill>
                 <a:latin typeface="Noto Sans CJK SC"/>
                 <a:ea typeface="Noto Sans CJK SC"/>
@@ -6208,9 +6208,9 @@
               </a:defRPr>
             </a:pPr>
             <a:r>
-              <a:rPr sz="1124" b="0" i="0" lang="zh-CN" dirty="0">
+              <a:rPr sz="1124" b="1" i="0" lang="zh-CN" dirty="0">
                 <a:solidFill>
-                  <a:srgbClr val="3F4854"/>
+                  <a:srgbClr val="27303A"/>
                 </a:solidFill>
                 <a:latin typeface="Noto Sans CJK SC"/>
                 <a:ea typeface="Noto Sans CJK SC"/>
@@ -6240,7 +6240,7 @@
           <a:solidFill>
             <a:srgbClr val="FFFFFF"/>
           </a:solidFill>
-          <a:ln w="11112">
+          <a:ln w="15081">
             <a:solidFill>
               <a:srgbClr val="1F7F8C"/>
             </a:solidFill>
@@ -6278,11 +6278,11 @@
         <p:spPr>
           <a:xfrm>
             <a:off x="4921249" y="1190624"/>
-            <a:ext cx="63499" cy="4286249"/>
+            <a:ext cx="87312" cy="4286249"/>
           </a:xfrm>
           <a:prstGeom prst="roundRect">
             <a:avLst>
-              <a:gd name="adj" fmla="val 37500"/>
+              <a:gd name="adj" fmla="val 27272"/>
             </a:avLst>
           </a:prstGeom>
           <a:solidFill>
@@ -6330,9 +6330,9 @@
             <a:avLst/>
           </a:prstGeom>
           <a:noFill/>
-          <a:ln w="7937">
+          <a:ln w="18216">
             <a:solidFill>
-              <a:srgbClr val="1F2937"/>
+              <a:srgbClr val="111A24"/>
             </a:solidFill>
           </a:ln>
           <a:effectLst/>
@@ -6373,9 +6373,9 @@
           <a:prstGeom prst="line">
             <a:avLst/>
           </a:prstGeom>
-          <a:ln w="7937">
+          <a:ln w="18216">
             <a:solidFill>
-              <a:srgbClr val="1F2937"/>
+              <a:srgbClr val="111A24"/>
             </a:solidFill>
           </a:ln>
           <a:effectLst/>
@@ -6409,9 +6409,9 @@
           <a:prstGeom prst="line">
             <a:avLst/>
           </a:prstGeom>
-          <a:ln w="7937">
+          <a:ln w="18216">
             <a:solidFill>
-              <a:srgbClr val="1F2937"/>
+              <a:srgbClr val="111A24"/>
             </a:solidFill>
           </a:ln>
           <a:effectLst/>
@@ -6445,9 +6445,9 @@
           <a:prstGeom prst="line">
             <a:avLst/>
           </a:prstGeom>
-          <a:ln w="7937">
+          <a:ln w="18216">
             <a:solidFill>
-              <a:srgbClr val="1F2937"/>
+              <a:srgbClr val="111A24"/>
             </a:solidFill>
           </a:ln>
           <a:effectLst/>
@@ -6481,9 +6481,9 @@
           <a:prstGeom prst="line">
             <a:avLst/>
           </a:prstGeom>
-          <a:ln w="7937">
+          <a:ln w="18216">
             <a:solidFill>
-              <a:srgbClr val="1F2937"/>
+              <a:srgbClr val="111A24"/>
             </a:solidFill>
           </a:ln>
           <a:effectLst/>
@@ -6576,11 +6576,11 @@
             </a:avLst>
           </a:prstGeom>
           <a:solidFill>
-            <a:srgbClr val="F7F9FB"/>
+            <a:srgbClr val="F4F7FA"/>
           </a:solidFill>
-          <a:ln w="9524">
+          <a:ln w="12699">
             <a:solidFill>
-              <a:srgbClr val="CBD3DA"/>
+              <a:srgbClr val="AEBBC7"/>
             </a:solidFill>
           </a:ln>
           <a:effectLst/>
@@ -6622,9 +6622,9 @@
             <a:avLst/>
           </a:prstGeom>
           <a:noFill/>
-          <a:ln w="7937">
+          <a:ln w="18216">
             <a:solidFill>
-              <a:srgbClr val="1F2937"/>
+              <a:srgbClr val="111A24"/>
             </a:solidFill>
           </a:ln>
           <a:effectLst/>
@@ -6665,9 +6665,9 @@
           <a:prstGeom prst="line">
             <a:avLst/>
           </a:prstGeom>
-          <a:ln w="10318">
+          <a:ln w="23681">
             <a:solidFill>
-              <a:srgbClr val="1F2937"/>
+              <a:srgbClr val="111A24"/>
             </a:solidFill>
           </a:ln>
           <a:effectLst/>
@@ -6701,9 +6701,9 @@
           <a:prstGeom prst="line">
             <a:avLst/>
           </a:prstGeom>
-          <a:ln w="10318">
+          <a:ln w="23681">
             <a:solidFill>
-              <a:srgbClr val="1F2937"/>
+              <a:srgbClr val="111A24"/>
             </a:solidFill>
           </a:ln>
           <a:effectLst/>
@@ -6756,9 +6756,9 @@
               <a:spcAft>
                 <a:spcPts val="0"/>
               </a:spcAft>
-              <a:defRPr sz="1249" b="0" i="0" lang="zh-CN" dirty="0">
+              <a:defRPr sz="1249" b="1" i="0" lang="zh-CN" dirty="0">
                 <a:solidFill>
-                  <a:srgbClr val="3F4854"/>
+                  <a:srgbClr val="27303A"/>
                 </a:solidFill>
                 <a:latin typeface="Noto Sans CJK SC"/>
                 <a:ea typeface="Noto Sans CJK SC"/>
@@ -6766,9 +6766,9 @@
               </a:defRPr>
             </a:pPr>
             <a:r>
-              <a:rPr sz="1249" b="0" i="0" lang="zh-CN" dirty="0">
+              <a:rPr sz="1249" b="1" i="0" lang="zh-CN" dirty="0">
                 <a:solidFill>
-                  <a:srgbClr val="3F4854"/>
+                  <a:srgbClr val="27303A"/>
                 </a:solidFill>
                 <a:latin typeface="Noto Sans CJK SC"/>
                 <a:ea typeface="Noto Sans CJK SC"/>
@@ -6796,11 +6796,11 @@
             </a:avLst>
           </a:prstGeom>
           <a:solidFill>
-            <a:srgbClr val="F7F9FB"/>
+            <a:srgbClr val="F4F7FA"/>
           </a:solidFill>
-          <a:ln w="9524">
+          <a:ln w="12699">
             <a:solidFill>
-              <a:srgbClr val="CBD3DA"/>
+              <a:srgbClr val="AEBBC7"/>
             </a:solidFill>
           </a:ln>
           <a:effectLst/>
@@ -6842,9 +6842,9 @@
             <a:avLst/>
           </a:prstGeom>
           <a:noFill/>
-          <a:ln w="7937">
+          <a:ln w="18216">
             <a:solidFill>
-              <a:srgbClr val="1F2937"/>
+              <a:srgbClr val="111A24"/>
             </a:solidFill>
           </a:ln>
           <a:effectLst/>
@@ -6885,9 +6885,9 @@
           <a:prstGeom prst="line">
             <a:avLst/>
           </a:prstGeom>
-          <a:ln w="10318">
+          <a:ln w="23681">
             <a:solidFill>
-              <a:srgbClr val="1F2937"/>
+              <a:srgbClr val="111A24"/>
             </a:solidFill>
           </a:ln>
           <a:effectLst/>
@@ -6921,9 +6921,9 @@
           <a:prstGeom prst="line">
             <a:avLst/>
           </a:prstGeom>
-          <a:ln w="10318">
+          <a:ln w="23681">
             <a:solidFill>
-              <a:srgbClr val="1F2937"/>
+              <a:srgbClr val="111A24"/>
             </a:solidFill>
           </a:ln>
           <a:effectLst/>
@@ -6976,9 +6976,9 @@
               <a:spcAft>
                 <a:spcPts val="0"/>
               </a:spcAft>
-              <a:defRPr sz="1249" b="0" i="0" lang="zh-CN" dirty="0">
+              <a:defRPr sz="1249" b="1" i="0" lang="zh-CN" dirty="0">
                 <a:solidFill>
-                  <a:srgbClr val="3F4854"/>
+                  <a:srgbClr val="27303A"/>
                 </a:solidFill>
                 <a:latin typeface="Noto Sans CJK SC"/>
                 <a:ea typeface="Noto Sans CJK SC"/>
@@ -6986,9 +6986,9 @@
               </a:defRPr>
             </a:pPr>
             <a:r>
-              <a:rPr sz="1249" b="0" i="0" lang="zh-CN" dirty="0">
+              <a:rPr sz="1249" b="1" i="0" lang="zh-CN" dirty="0">
                 <a:solidFill>
-                  <a:srgbClr val="3F4854"/>
+                  <a:srgbClr val="27303A"/>
                 </a:solidFill>
                 <a:latin typeface="Noto Sans CJK SC"/>
                 <a:ea typeface="Noto Sans CJK SC"/>
@@ -7016,11 +7016,11 @@
             </a:avLst>
           </a:prstGeom>
           <a:solidFill>
-            <a:srgbClr val="F7F9FB"/>
+            <a:srgbClr val="F4F7FA"/>
           </a:solidFill>
-          <a:ln w="9524">
+          <a:ln w="12699">
             <a:solidFill>
-              <a:srgbClr val="CBD3DA"/>
+              <a:srgbClr val="AEBBC7"/>
             </a:solidFill>
           </a:ln>
           <a:effectLst/>
@@ -7062,9 +7062,9 @@
             <a:avLst/>
           </a:prstGeom>
           <a:noFill/>
-          <a:ln w="7937">
+          <a:ln w="18216">
             <a:solidFill>
-              <a:srgbClr val="1F2937"/>
+              <a:srgbClr val="111A24"/>
             </a:solidFill>
           </a:ln>
           <a:effectLst/>
@@ -7105,9 +7105,9 @@
           <a:prstGeom prst="line">
             <a:avLst/>
           </a:prstGeom>
-          <a:ln w="10318">
+          <a:ln w="23681">
             <a:solidFill>
-              <a:srgbClr val="1F2937"/>
+              <a:srgbClr val="111A24"/>
             </a:solidFill>
           </a:ln>
           <a:effectLst/>
@@ -7141,9 +7141,9 @@
           <a:prstGeom prst="line">
             <a:avLst/>
           </a:prstGeom>
-          <a:ln w="10318">
+          <a:ln w="23681">
             <a:solidFill>
-              <a:srgbClr val="1F2937"/>
+              <a:srgbClr val="111A24"/>
             </a:solidFill>
           </a:ln>
           <a:effectLst/>
@@ -7196,9 +7196,9 @@
               <a:spcAft>
                 <a:spcPts val="0"/>
               </a:spcAft>
-              <a:defRPr sz="1249" b="0" i="0" lang="zh-CN" dirty="0">
+              <a:defRPr sz="1249" b="1" i="0" lang="zh-CN" dirty="0">
                 <a:solidFill>
-                  <a:srgbClr val="3F4854"/>
+                  <a:srgbClr val="27303A"/>
                 </a:solidFill>
                 <a:latin typeface="Noto Sans CJK SC"/>
                 <a:ea typeface="Noto Sans CJK SC"/>
@@ -7206,9 +7206,9 @@
               </a:defRPr>
             </a:pPr>
             <a:r>
-              <a:rPr sz="1249" b="0" i="0" lang="zh-CN" dirty="0">
+              <a:rPr sz="1249" b="1" i="0" lang="zh-CN" dirty="0">
                 <a:solidFill>
-                  <a:srgbClr val="3F4854"/>
+                  <a:srgbClr val="27303A"/>
                 </a:solidFill>
                 <a:latin typeface="Noto Sans CJK SC"/>
                 <a:ea typeface="Noto Sans CJK SC"/>
@@ -7236,11 +7236,11 @@
             </a:avLst>
           </a:prstGeom>
           <a:solidFill>
-            <a:srgbClr val="F7F9FB"/>
+            <a:srgbClr val="F4F7FA"/>
           </a:solidFill>
-          <a:ln w="9524">
+          <a:ln w="12699">
             <a:solidFill>
-              <a:srgbClr val="CBD3DA"/>
+              <a:srgbClr val="AEBBC7"/>
             </a:solidFill>
           </a:ln>
           <a:effectLst/>
@@ -7282,9 +7282,9 @@
             <a:avLst/>
           </a:prstGeom>
           <a:noFill/>
-          <a:ln w="7937">
+          <a:ln w="18216">
             <a:solidFill>
-              <a:srgbClr val="1F2937"/>
+              <a:srgbClr val="111A24"/>
             </a:solidFill>
           </a:ln>
           <a:effectLst/>
@@ -7325,9 +7325,9 @@
           <a:prstGeom prst="line">
             <a:avLst/>
           </a:prstGeom>
-          <a:ln w="10318">
+          <a:ln w="23681">
             <a:solidFill>
-              <a:srgbClr val="1F2937"/>
+              <a:srgbClr val="111A24"/>
             </a:solidFill>
           </a:ln>
           <a:effectLst/>
@@ -7361,9 +7361,9 @@
           <a:prstGeom prst="line">
             <a:avLst/>
           </a:prstGeom>
-          <a:ln w="10318">
+          <a:ln w="23681">
             <a:solidFill>
-              <a:srgbClr val="1F2937"/>
+              <a:srgbClr val="111A24"/>
             </a:solidFill>
           </a:ln>
           <a:effectLst/>
@@ -7416,9 +7416,9 @@
               <a:spcAft>
                 <a:spcPts val="0"/>
               </a:spcAft>
-              <a:defRPr sz="1249" b="0" i="0" lang="zh-CN" dirty="0">
+              <a:defRPr sz="1249" b="1" i="0" lang="zh-CN" dirty="0">
                 <a:solidFill>
-                  <a:srgbClr val="3F4854"/>
+                  <a:srgbClr val="27303A"/>
                 </a:solidFill>
                 <a:latin typeface="Noto Sans CJK SC"/>
                 <a:ea typeface="Noto Sans CJK SC"/>
@@ -7426,9 +7426,9 @@
               </a:defRPr>
             </a:pPr>
             <a:r>
-              <a:rPr sz="1249" b="0" i="0" lang="zh-CN" dirty="0">
+              <a:rPr sz="1249" b="1" i="0" lang="zh-CN" dirty="0">
                 <a:solidFill>
-                  <a:srgbClr val="3F4854"/>
+                  <a:srgbClr val="27303A"/>
                 </a:solidFill>
                 <a:latin typeface="Noto Sans CJK SC"/>
                 <a:ea typeface="Noto Sans CJK SC"/>
@@ -7456,11 +7456,11 @@
             </a:avLst>
           </a:prstGeom>
           <a:solidFill>
-            <a:srgbClr val="F7F9FB"/>
+            <a:srgbClr val="F4F7FA"/>
           </a:solidFill>
-          <a:ln w="9524">
+          <a:ln w="12699">
             <a:solidFill>
-              <a:srgbClr val="CBD3DA"/>
+              <a:srgbClr val="AEBBC7"/>
             </a:solidFill>
           </a:ln>
           <a:effectLst/>
@@ -7502,9 +7502,9 @@
             <a:avLst/>
           </a:prstGeom>
           <a:noFill/>
-          <a:ln w="7937">
+          <a:ln w="18216">
             <a:solidFill>
-              <a:srgbClr val="1F2937"/>
+              <a:srgbClr val="111A24"/>
             </a:solidFill>
           </a:ln>
           <a:effectLst/>
@@ -7545,9 +7545,9 @@
           <a:prstGeom prst="line">
             <a:avLst/>
           </a:prstGeom>
-          <a:ln w="10318">
+          <a:ln w="23681">
             <a:solidFill>
-              <a:srgbClr val="1F2937"/>
+              <a:srgbClr val="111A24"/>
             </a:solidFill>
           </a:ln>
           <a:effectLst/>
@@ -7581,9 +7581,9 @@
           <a:prstGeom prst="line">
             <a:avLst/>
           </a:prstGeom>
-          <a:ln w="10318">
+          <a:ln w="23681">
             <a:solidFill>
-              <a:srgbClr val="1F2937"/>
+              <a:srgbClr val="111A24"/>
             </a:solidFill>
           </a:ln>
           <a:effectLst/>
@@ -7636,9 +7636,9 @@
               <a:spcAft>
                 <a:spcPts val="0"/>
               </a:spcAft>
-              <a:defRPr sz="1249" b="0" i="0" lang="zh-CN" dirty="0">
+              <a:defRPr sz="1249" b="1" i="0" lang="zh-CN" dirty="0">
                 <a:solidFill>
-                  <a:srgbClr val="3F4854"/>
+                  <a:srgbClr val="27303A"/>
                 </a:solidFill>
                 <a:latin typeface="Noto Sans CJK SC"/>
                 <a:ea typeface="Noto Sans CJK SC"/>
@@ -7646,9 +7646,9 @@
               </a:defRPr>
             </a:pPr>
             <a:r>
-              <a:rPr sz="1249" b="0" i="0" lang="zh-CN" dirty="0">
+              <a:rPr sz="1249" b="1" i="0" lang="zh-CN" dirty="0">
                 <a:solidFill>
-                  <a:srgbClr val="3F4854"/>
+                  <a:srgbClr val="27303A"/>
                 </a:solidFill>
                 <a:latin typeface="Noto Sans CJK SC"/>
                 <a:ea typeface="Noto Sans CJK SC"/>
@@ -7676,11 +7676,11 @@
             </a:avLst>
           </a:prstGeom>
           <a:solidFill>
-            <a:srgbClr val="F7F9FB"/>
+            <a:srgbClr val="F4F7FA"/>
           </a:solidFill>
-          <a:ln w="9524">
+          <a:ln w="12699">
             <a:solidFill>
-              <a:srgbClr val="CBD3DA"/>
+              <a:srgbClr val="AEBBC7"/>
             </a:solidFill>
           </a:ln>
           <a:effectLst/>
@@ -7722,9 +7722,9 @@
             <a:avLst/>
           </a:prstGeom>
           <a:noFill/>
-          <a:ln w="7937">
+          <a:ln w="18216">
             <a:solidFill>
-              <a:srgbClr val="1F2937"/>
+              <a:srgbClr val="111A24"/>
             </a:solidFill>
           </a:ln>
           <a:effectLst/>
@@ -7765,9 +7765,9 @@
           <a:prstGeom prst="line">
             <a:avLst/>
           </a:prstGeom>
-          <a:ln w="10318">
+          <a:ln w="23681">
             <a:solidFill>
-              <a:srgbClr val="1F2937"/>
+              <a:srgbClr val="111A24"/>
             </a:solidFill>
           </a:ln>
           <a:effectLst/>
@@ -7801,9 +7801,9 @@
           <a:prstGeom prst="line">
             <a:avLst/>
           </a:prstGeom>
-          <a:ln w="10318">
+          <a:ln w="23681">
             <a:solidFill>
-              <a:srgbClr val="1F2937"/>
+              <a:srgbClr val="111A24"/>
             </a:solidFill>
           </a:ln>
           <a:effectLst/>
@@ -7856,9 +7856,9 @@
               <a:spcAft>
                 <a:spcPts val="0"/>
               </a:spcAft>
-              <a:defRPr sz="1249" b="0" i="0" lang="zh-CN" dirty="0">
+              <a:defRPr sz="1249" b="1" i="0" lang="zh-CN" dirty="0">
                 <a:solidFill>
-                  <a:srgbClr val="3F4854"/>
+                  <a:srgbClr val="27303A"/>
                 </a:solidFill>
                 <a:latin typeface="Noto Sans CJK SC"/>
                 <a:ea typeface="Noto Sans CJK SC"/>
@@ -7866,9 +7866,9 @@
               </a:defRPr>
             </a:pPr>
             <a:r>
-              <a:rPr sz="1249" b="0" i="0" lang="zh-CN" dirty="0">
+              <a:rPr sz="1249" b="1" i="0" lang="zh-CN" dirty="0">
                 <a:solidFill>
-                  <a:srgbClr val="3F4854"/>
+                  <a:srgbClr val="27303A"/>
                 </a:solidFill>
                 <a:latin typeface="Noto Sans CJK SC"/>
                 <a:ea typeface="Noto Sans CJK SC"/>
@@ -7898,7 +7898,7 @@
           <a:solidFill>
             <a:srgbClr val="FFFFFF"/>
           </a:solidFill>
-          <a:ln w="11112">
+          <a:ln w="15081">
             <a:solidFill>
               <a:srgbClr val="C48A24"/>
             </a:solidFill>
@@ -7987,9 +7987,9 @@
           <a:prstGeom prst="line">
             <a:avLst/>
           </a:prstGeom>
-          <a:ln w="7937">
+          <a:ln w="18216">
             <a:solidFill>
-              <a:srgbClr val="1F2937"/>
+              <a:srgbClr val="111A24"/>
             </a:solidFill>
           </a:ln>
           <a:effectLst/>
@@ -8023,9 +8023,9 @@
           <a:prstGeom prst="line">
             <a:avLst/>
           </a:prstGeom>
-          <a:ln w="7937">
+          <a:ln w="18216">
             <a:solidFill>
-              <a:srgbClr val="1F2937"/>
+              <a:srgbClr val="111A24"/>
             </a:solidFill>
           </a:ln>
           <a:effectLst/>
@@ -8059,9 +8059,9 @@
           <a:prstGeom prst="line">
             <a:avLst/>
           </a:prstGeom>
-          <a:ln w="7937">
+          <a:ln w="18216">
             <a:solidFill>
-              <a:srgbClr val="1F2937"/>
+              <a:srgbClr val="111A24"/>
             </a:solidFill>
           </a:ln>
           <a:effectLst/>
@@ -8095,9 +8095,9 @@
           <a:prstGeom prst="line">
             <a:avLst/>
           </a:prstGeom>
-          <a:ln w="7937">
+          <a:ln w="18216">
             <a:solidFill>
-              <a:srgbClr val="1F2937"/>
+              <a:srgbClr val="111A24"/>
             </a:solidFill>
           </a:ln>
           <a:effectLst/>
@@ -8131,9 +8131,9 @@
           <a:prstGeom prst="line">
             <a:avLst/>
           </a:prstGeom>
-          <a:ln w="7937">
+          <a:ln w="18216">
             <a:solidFill>
-              <a:srgbClr val="1F2937"/>
+              <a:srgbClr val="111A24"/>
             </a:solidFill>
           </a:ln>
           <a:effectLst/>
@@ -8167,9 +8167,9 @@
           <a:prstGeom prst="line">
             <a:avLst/>
           </a:prstGeom>
-          <a:ln w="7937">
+          <a:ln w="18216">
             <a:solidFill>
-              <a:srgbClr val="1F2937"/>
+              <a:srgbClr val="111A24"/>
             </a:solidFill>
           </a:ln>
           <a:effectLst/>
@@ -8204,9 +8204,9 @@
             <a:avLst/>
           </a:prstGeom>
           <a:noFill/>
-          <a:ln w="7937">
+          <a:ln w="18216">
             <a:solidFill>
-              <a:srgbClr val="1F2937"/>
+              <a:srgbClr val="111A24"/>
             </a:solidFill>
           </a:ln>
           <a:effectLst/>
@@ -8248,9 +8248,9 @@
             <a:avLst/>
           </a:prstGeom>
           <a:noFill/>
-          <a:ln w="7937">
+          <a:ln w="18216">
             <a:solidFill>
-              <a:srgbClr val="1F2937"/>
+              <a:srgbClr val="111A24"/>
             </a:solidFill>
           </a:ln>
           <a:effectLst/>
@@ -8352,7 +8352,7 @@
           <a:solidFill>
             <a:srgbClr val="FFFFFF"/>
           </a:solidFill>
-          <a:ln w="11112">
+          <a:ln w="15081">
             <a:solidFill>
               <a:srgbClr val="C48A24"/>
             </a:solidFill>
@@ -8441,9 +8441,9 @@
           <a:prstGeom prst="line">
             <a:avLst/>
           </a:prstGeom>
-          <a:ln w="7937">
+          <a:ln w="18216">
             <a:solidFill>
-              <a:srgbClr val="1F2937"/>
+              <a:srgbClr val="111A24"/>
             </a:solidFill>
           </a:ln>
           <a:effectLst/>
@@ -8477,9 +8477,9 @@
           <a:prstGeom prst="line">
             <a:avLst/>
           </a:prstGeom>
-          <a:ln w="7937">
+          <a:ln w="18216">
             <a:solidFill>
-              <a:srgbClr val="1F2937"/>
+              <a:srgbClr val="111A24"/>
             </a:solidFill>
           </a:ln>
           <a:effectLst/>
@@ -8513,9 +8513,9 @@
           <a:prstGeom prst="line">
             <a:avLst/>
           </a:prstGeom>
-          <a:ln w="7937">
+          <a:ln w="18216">
             <a:solidFill>
-              <a:srgbClr val="1F2937"/>
+              <a:srgbClr val="111A24"/>
             </a:solidFill>
           </a:ln>
           <a:effectLst/>
@@ -8549,9 +8549,9 @@
           <a:prstGeom prst="line">
             <a:avLst/>
           </a:prstGeom>
-          <a:ln w="7937">
+          <a:ln w="18216">
             <a:solidFill>
-              <a:srgbClr val="1F2937"/>
+              <a:srgbClr val="111A24"/>
             </a:solidFill>
           </a:ln>
           <a:effectLst/>
@@ -8585,9 +8585,9 @@
           <a:prstGeom prst="line">
             <a:avLst/>
           </a:prstGeom>
-          <a:ln w="7937">
+          <a:ln w="18216">
             <a:solidFill>
-              <a:srgbClr val="1F2937"/>
+              <a:srgbClr val="111A24"/>
             </a:solidFill>
           </a:ln>
           <a:effectLst/>
@@ -8621,9 +8621,9 @@
           <a:prstGeom prst="line">
             <a:avLst/>
           </a:prstGeom>
-          <a:ln w="7937">
+          <a:ln w="18216">
             <a:solidFill>
-              <a:srgbClr val="1F2937"/>
+              <a:srgbClr val="111A24"/>
             </a:solidFill>
           </a:ln>
           <a:effectLst/>
@@ -8657,9 +8657,9 @@
           <a:prstGeom prst="line">
             <a:avLst/>
           </a:prstGeom>
-          <a:ln w="7937">
+          <a:ln w="18216">
             <a:solidFill>
-              <a:srgbClr val="1F2937"/>
+              <a:srgbClr val="111A24"/>
             </a:solidFill>
           </a:ln>
           <a:effectLst/>
@@ -8754,7 +8754,7 @@
           <a:solidFill>
             <a:srgbClr val="FFFFFF"/>
           </a:solidFill>
-          <a:ln w="11112">
+          <a:ln w="15081">
             <a:solidFill>
               <a:srgbClr val="C48A24"/>
             </a:solidFill>
@@ -8843,9 +8843,9 @@
           <a:prstGeom prst="line">
             <a:avLst/>
           </a:prstGeom>
-          <a:ln w="7937">
+          <a:ln w="18216">
             <a:solidFill>
-              <a:srgbClr val="1F2937"/>
+              <a:srgbClr val="111A24"/>
             </a:solidFill>
           </a:ln>
           <a:effectLst/>
@@ -8879,9 +8879,9 @@
           <a:prstGeom prst="line">
             <a:avLst/>
           </a:prstGeom>
-          <a:ln w="7937">
+          <a:ln w="18216">
             <a:solidFill>
-              <a:srgbClr val="1F2937"/>
+              <a:srgbClr val="111A24"/>
             </a:solidFill>
           </a:ln>
           <a:effectLst/>
@@ -8915,9 +8915,9 @@
           <a:prstGeom prst="line">
             <a:avLst/>
           </a:prstGeom>
-          <a:ln w="7937">
+          <a:ln w="18216">
             <a:solidFill>
-              <a:srgbClr val="1F2937"/>
+              <a:srgbClr val="111A24"/>
             </a:solidFill>
           </a:ln>
           <a:effectLst/>
@@ -8951,9 +8951,9 @@
           <a:prstGeom prst="line">
             <a:avLst/>
           </a:prstGeom>
-          <a:ln w="7937">
+          <a:ln w="18216">
             <a:solidFill>
-              <a:srgbClr val="1F2937"/>
+              <a:srgbClr val="111A24"/>
             </a:solidFill>
           </a:ln>
           <a:effectLst/>
@@ -8987,9 +8987,9 @@
           <a:prstGeom prst="line">
             <a:avLst/>
           </a:prstGeom>
-          <a:ln w="7937">
+          <a:ln w="18216">
             <a:solidFill>
-              <a:srgbClr val="1F2937"/>
+              <a:srgbClr val="111A24"/>
             </a:solidFill>
           </a:ln>
           <a:effectLst/>
@@ -9023,9 +9023,9 @@
           <a:prstGeom prst="line">
             <a:avLst/>
           </a:prstGeom>
-          <a:ln w="7937">
+          <a:ln w="18216">
             <a:solidFill>
-              <a:srgbClr val="1F2937"/>
+              <a:srgbClr val="111A24"/>
             </a:solidFill>
           </a:ln>
           <a:effectLst/>
@@ -9059,9 +9059,9 @@
           <a:prstGeom prst="line">
             <a:avLst/>
           </a:prstGeom>
-          <a:ln w="7937">
+          <a:ln w="18216">
             <a:solidFill>
-              <a:srgbClr val="1F2937"/>
+              <a:srgbClr val="111A24"/>
             </a:solidFill>
           </a:ln>
           <a:effectLst/>
@@ -9095,9 +9095,9 @@
           <a:prstGeom prst="line">
             <a:avLst/>
           </a:prstGeom>
-          <a:ln w="7937">
+          <a:ln w="18216">
             <a:solidFill>
-              <a:srgbClr val="1F2937"/>
+              <a:srgbClr val="111A24"/>
             </a:solidFill>
           </a:ln>
           <a:effectLst/>
@@ -9131,9 +9131,9 @@
           <a:prstGeom prst="line">
             <a:avLst/>
           </a:prstGeom>
-          <a:ln w="7937">
+          <a:ln w="18216">
             <a:solidFill>
-              <a:srgbClr val="1F2937"/>
+              <a:srgbClr val="111A24"/>
             </a:solidFill>
           </a:ln>
           <a:effectLst/>
@@ -9228,7 +9228,7 @@
           <a:solidFill>
             <a:srgbClr val="FFF6E3"/>
           </a:solidFill>
-          <a:ln w="8731">
+          <a:ln w="12699">
             <a:solidFill>
               <a:srgbClr val="C48A24"/>
             </a:solidFill>
@@ -9290,7 +9290,7 @@
               <a:spcAft>
                 <a:spcPts val="0"/>
               </a:spcAft>
-              <a:defRPr sz="1187" b="0" i="0" lang="zh-CN" dirty="0">
+              <a:defRPr sz="1187" b="1" i="0" lang="zh-CN" dirty="0">
                 <a:solidFill>
                   <a:srgbClr val="7A5410"/>
                 </a:solidFill>
@@ -9300,7 +9300,7 @@
               </a:defRPr>
             </a:pPr>
             <a:r>
-              <a:rPr sz="1187" b="0" i="0" lang="zh-CN" dirty="0">
+              <a:rPr sz="1187" b="1" i="0" lang="zh-CN" dirty="0">
                 <a:solidFill>
                   <a:srgbClr val="7A5410"/>
                 </a:solidFill>
@@ -9311,7 +9311,7 @@
               <a:t>近邻条件</a:t>
             </a:r>
             <a:r>
-              <a:rPr sz="1187" b="0" i="0" lang="zh-CN" dirty="0">
+              <a:rPr sz="1187" b="1" i="0" lang="zh-CN" dirty="0">
                 <a:solidFill>
                   <a:srgbClr val="7A5410"/>
                 </a:solidFill>
@@ -9322,7 +9322,7 @@
               <a:t> ≠ </a:t>
             </a:r>
             <a:r>
-              <a:rPr sz="1187" b="0" i="0" lang="zh-CN" dirty="0">
+              <a:rPr sz="1187" b="1" i="0" lang="zh-CN" dirty="0">
                 <a:solidFill>
                   <a:srgbClr val="7A5410"/>
                 </a:solidFill>
@@ -9354,12 +9354,12 @@
           <a:solidFill>
             <a:srgbClr val="FFFFFF"/>
           </a:solidFill>
-          <a:ln w="11112">
+          <a:ln w="15081">
             <a:solidFill>
               <a:srgbClr val="9AA3AB"/>
             </a:solidFill>
             <a:custDash>
-              <a:ds d="857143" sp="571429"/>
+              <a:ds d="631579" sp="421053"/>
             </a:custDash>
           </a:ln>
           <a:effectLst/>
@@ -9401,9 +9401,9 @@
             <a:avLst/>
           </a:prstGeom>
           <a:noFill/>
-          <a:ln w="7937">
+          <a:ln w="18216">
             <a:solidFill>
-              <a:srgbClr val="1F2937"/>
+              <a:srgbClr val="111A24"/>
             </a:solidFill>
           </a:ln>
           <a:effectLst/>
@@ -9445,9 +9445,9 @@
             <a:avLst/>
           </a:prstGeom>
           <a:noFill/>
-          <a:ln w="7937">
+          <a:ln w="18216">
             <a:solidFill>
-              <a:srgbClr val="1F2937"/>
+              <a:srgbClr val="111A24"/>
             </a:solidFill>
           </a:ln>
           <a:effectLst/>
@@ -9488,9 +9488,9 @@
           <a:prstGeom prst="line">
             <a:avLst/>
           </a:prstGeom>
-          <a:ln w="7937">
+          <a:ln w="18216">
             <a:solidFill>
-              <a:srgbClr val="1F2937"/>
+              <a:srgbClr val="111A24"/>
             </a:solidFill>
           </a:ln>
           <a:effectLst/>
@@ -9524,9 +9524,9 @@
           <a:prstGeom prst="line">
             <a:avLst/>
           </a:prstGeom>
-          <a:ln w="7937">
+          <a:ln w="18216">
             <a:solidFill>
-              <a:srgbClr val="1F2937"/>
+              <a:srgbClr val="111A24"/>
             </a:solidFill>
           </a:ln>
           <a:effectLst/>
@@ -9560,9 +9560,9 @@
           <a:prstGeom prst="line">
             <a:avLst/>
           </a:prstGeom>
-          <a:ln w="7937">
+          <a:ln w="18216">
             <a:solidFill>
-              <a:srgbClr val="1F2937"/>
+              <a:srgbClr val="111A24"/>
             </a:solidFill>
           </a:ln>
           <a:effectLst/>
@@ -9596,9 +9596,9 @@
           <a:prstGeom prst="line">
             <a:avLst/>
           </a:prstGeom>
-          <a:ln w="7937">
+          <a:ln w="18216">
             <a:solidFill>
-              <a:srgbClr val="1F2937"/>
+              <a:srgbClr val="111A24"/>
             </a:solidFill>
           </a:ln>
           <a:effectLst/>
@@ -9688,9 +9688,9 @@
           <a:prstGeom prst="line">
             <a:avLst/>
           </a:prstGeom>
-          <a:ln w="14287">
+          <a:ln w="19843">
             <a:solidFill>
-              <a:srgbClr val="4B5563"/>
+              <a:srgbClr val="3C4753"/>
             </a:solidFill>
           </a:ln>
           <a:effectLst/>
@@ -9724,9 +9724,9 @@
           <a:prstGeom prst="line">
             <a:avLst/>
           </a:prstGeom>
-          <a:ln w="14287">
+          <a:ln w="19843">
             <a:solidFill>
-              <a:srgbClr val="4B5563"/>
+              <a:srgbClr val="3C4753"/>
             </a:solidFill>
           </a:ln>
           <a:effectLst/>
@@ -9760,9 +9760,9 @@
           <a:prstGeom prst="line">
             <a:avLst/>
           </a:prstGeom>
-          <a:ln w="14287">
+          <a:ln w="19843">
             <a:solidFill>
-              <a:srgbClr val="4B5563"/>
+              <a:srgbClr val="3C4753"/>
             </a:solidFill>
           </a:ln>
           <a:effectLst/>
@@ -9796,9 +9796,9 @@
           <a:prstGeom prst="line">
             <a:avLst/>
           </a:prstGeom>
-          <a:ln w="14287">
+          <a:ln w="19843">
             <a:solidFill>
-              <a:srgbClr val="4B5563"/>
+              <a:srgbClr val="3C4753"/>
             </a:solidFill>
           </a:ln>
           <a:effectLst/>
@@ -9832,9 +9832,9 @@
           <a:prstGeom prst="line">
             <a:avLst/>
           </a:prstGeom>
-          <a:ln w="14287">
+          <a:ln w="19843">
             <a:solidFill>
-              <a:srgbClr val="4B5563"/>
+              <a:srgbClr val="3C4753"/>
             </a:solidFill>
           </a:ln>
           <a:effectLst/>
@@ -9862,8 +9862,8 @@
         </p:nvSpPr>
         <p:spPr>
           <a:xfrm>
-            <a:off x="4635500" y="2889250"/>
-            <a:ext cx="254000" cy="79375"/>
+            <a:off x="4635500" y="2881312"/>
+            <a:ext cx="254000" cy="95250"/>
           </a:xfrm>
           <a:custGeom>
             <a:avLst/>
@@ -9872,34 +9872,34 @@
             <a:cxnLst/>
             <a:rect l="l" t="t" r="r" b="b"/>
             <a:pathLst>
-              <a:path w="32000" h="10000">
+              <a:path w="32000" h="12000">
                 <a:moveTo>
-                  <a:pt x="0" y="4100"/>
+                  <a:pt x="0" y="4750"/>
                 </a:moveTo>
                 <a:lnTo>
-                  <a:pt x="20000" y="4100"/>
+                  <a:pt x="17000" y="4750"/>
                 </a:lnTo>
                 <a:lnTo>
-                  <a:pt x="20000" y="0"/>
+                  <a:pt x="17000" y="0"/>
                 </a:lnTo>
                 <a:lnTo>
-                  <a:pt x="32000" y="5000"/>
+                  <a:pt x="32000" y="6000"/>
                 </a:lnTo>
                 <a:lnTo>
-                  <a:pt x="20000" y="10000"/>
+                  <a:pt x="17000" y="12000"/>
                 </a:lnTo>
                 <a:lnTo>
-                  <a:pt x="20000" y="5900"/>
+                  <a:pt x="17000" y="7250"/>
                 </a:lnTo>
                 <a:lnTo>
-                  <a:pt x="0" y="5900"/>
+                  <a:pt x="0" y="7250"/>
                 </a:lnTo>
                 <a:close/>
               </a:path>
             </a:pathLst>
           </a:custGeom>
           <a:solidFill>
-            <a:srgbClr val="4B5563"/>
+            <a:srgbClr val="3C4753"/>
           </a:solidFill>
           <a:ln>
             <a:noFill/>
@@ -9942,9 +9942,9 @@
           <a:prstGeom prst="line">
             <a:avLst/>
           </a:prstGeom>
-          <a:ln w="14287">
+          <a:ln w="19843">
             <a:solidFill>
-              <a:srgbClr val="4B5563"/>
+              <a:srgbClr val="3C4753"/>
             </a:solidFill>
           </a:ln>
           <a:effectLst/>
@@ -9978,9 +9978,9 @@
           <a:prstGeom prst="line">
             <a:avLst/>
           </a:prstGeom>
-          <a:ln w="14287">
+          <a:ln w="19843">
             <a:solidFill>
-              <a:srgbClr val="4B5563"/>
+              <a:srgbClr val="3C4753"/>
             </a:solidFill>
           </a:ln>
           <a:effectLst/>
@@ -10008,8 +10008,8 @@
         </p:nvSpPr>
         <p:spPr>
           <a:xfrm>
-            <a:off x="8175625" y="1595437"/>
-            <a:ext cx="333375" cy="79375"/>
+            <a:off x="8175625" y="1587500"/>
+            <a:ext cx="333375" cy="95250"/>
           </a:xfrm>
           <a:custGeom>
             <a:avLst/>
@@ -10018,34 +10018,34 @@
             <a:cxnLst/>
             <a:rect l="l" t="t" r="r" b="b"/>
             <a:pathLst>
-              <a:path w="42000" h="10000">
+              <a:path w="42000" h="12000">
                 <a:moveTo>
-                  <a:pt x="0" y="4100"/>
+                  <a:pt x="0" y="4750"/>
                 </a:moveTo>
                 <a:lnTo>
-                  <a:pt x="30000" y="4100"/>
+                  <a:pt x="27000" y="4750"/>
                 </a:lnTo>
                 <a:lnTo>
-                  <a:pt x="30000" y="0"/>
+                  <a:pt x="27000" y="0"/>
                 </a:lnTo>
                 <a:lnTo>
-                  <a:pt x="42000" y="5000"/>
+                  <a:pt x="42000" y="6000"/>
                 </a:lnTo>
                 <a:lnTo>
-                  <a:pt x="30000" y="10000"/>
+                  <a:pt x="27000" y="12000"/>
                 </a:lnTo>
                 <a:lnTo>
-                  <a:pt x="30000" y="5900"/>
+                  <a:pt x="27000" y="7250"/>
                 </a:lnTo>
                 <a:lnTo>
-                  <a:pt x="0" y="5900"/>
+                  <a:pt x="0" y="7250"/>
                 </a:lnTo>
                 <a:close/>
               </a:path>
             </a:pathLst>
           </a:custGeom>
           <a:solidFill>
-            <a:srgbClr val="4B5563"/>
+            <a:srgbClr val="3C4753"/>
           </a:solidFill>
           <a:ln>
             <a:noFill/>
@@ -10082,8 +10082,8 @@
         </p:nvSpPr>
         <p:spPr>
           <a:xfrm>
-            <a:off x="8175625" y="2643187"/>
-            <a:ext cx="333375" cy="79375"/>
+            <a:off x="8175625" y="2635250"/>
+            <a:ext cx="333375" cy="95250"/>
           </a:xfrm>
           <a:custGeom>
             <a:avLst/>
@@ -10092,34 +10092,34 @@
             <a:cxnLst/>
             <a:rect l="l" t="t" r="r" b="b"/>
             <a:pathLst>
-              <a:path w="42000" h="10000">
+              <a:path w="42000" h="12000">
                 <a:moveTo>
-                  <a:pt x="0" y="4100"/>
+                  <a:pt x="0" y="4750"/>
                 </a:moveTo>
                 <a:lnTo>
-                  <a:pt x="30000" y="4100"/>
+                  <a:pt x="27000" y="4750"/>
                 </a:lnTo>
                 <a:lnTo>
-                  <a:pt x="30000" y="0"/>
+                  <a:pt x="27000" y="0"/>
                 </a:lnTo>
                 <a:lnTo>
-                  <a:pt x="42000" y="5000"/>
+                  <a:pt x="42000" y="6000"/>
                 </a:lnTo>
                 <a:lnTo>
-                  <a:pt x="30000" y="10000"/>
+                  <a:pt x="27000" y="12000"/>
                 </a:lnTo>
                 <a:lnTo>
-                  <a:pt x="30000" y="5900"/>
+                  <a:pt x="27000" y="7250"/>
                 </a:lnTo>
                 <a:lnTo>
-                  <a:pt x="0" y="5900"/>
+                  <a:pt x="0" y="7250"/>
                 </a:lnTo>
                 <a:close/>
               </a:path>
             </a:pathLst>
           </a:custGeom>
           <a:solidFill>
-            <a:srgbClr val="4B5563"/>
+            <a:srgbClr val="3C4753"/>
           </a:solidFill>
           <a:ln>
             <a:noFill/>
@@ -10156,8 +10156,8 @@
         </p:nvSpPr>
         <p:spPr>
           <a:xfrm>
-            <a:off x="8175625" y="3690937"/>
-            <a:ext cx="333375" cy="79375"/>
+            <a:off x="8175625" y="3683000"/>
+            <a:ext cx="333375" cy="95250"/>
           </a:xfrm>
           <a:custGeom>
             <a:avLst/>
@@ -10166,34 +10166,34 @@
             <a:cxnLst/>
             <a:rect l="l" t="t" r="r" b="b"/>
             <a:pathLst>
-              <a:path w="42000" h="10000">
+              <a:path w="42000" h="12000">
                 <a:moveTo>
-                  <a:pt x="0" y="4100"/>
+                  <a:pt x="0" y="4750"/>
                 </a:moveTo>
                 <a:lnTo>
-                  <a:pt x="30000" y="4100"/>
+                  <a:pt x="27000" y="4750"/>
                 </a:lnTo>
                 <a:lnTo>
-                  <a:pt x="30000" y="0"/>
+                  <a:pt x="27000" y="0"/>
                 </a:lnTo>
                 <a:lnTo>
-                  <a:pt x="42000" y="5000"/>
+                  <a:pt x="42000" y="6000"/>
                 </a:lnTo>
                 <a:lnTo>
-                  <a:pt x="30000" y="10000"/>
+                  <a:pt x="27000" y="12000"/>
                 </a:lnTo>
                 <a:lnTo>
-                  <a:pt x="30000" y="5900"/>
+                  <a:pt x="27000" y="7250"/>
                 </a:lnTo>
                 <a:lnTo>
-                  <a:pt x="0" y="5900"/>
+                  <a:pt x="0" y="7250"/>
                 </a:lnTo>
                 <a:close/>
               </a:path>
             </a:pathLst>
           </a:custGeom>
           <a:solidFill>
-            <a:srgbClr val="4B5563"/>
+            <a:srgbClr val="3C4753"/>
           </a:solidFill>
           <a:ln>
             <a:noFill/>
@@ -10236,12 +10236,12 @@
           <a:prstGeom prst="line">
             <a:avLst/>
           </a:prstGeom>
-          <a:ln w="14287">
+          <a:ln w="19843">
             <a:solidFill>
-              <a:srgbClr val="4B5563"/>
+              <a:srgbClr val="3C4753"/>
             </a:solidFill>
             <a:custDash>
-              <a:ds d="611111" sp="388889"/>
+              <a:ds d="440000" sp="280000"/>
             </a:custDash>
             <a:tailEnd type="triangle"/>
           </a:ln>
@@ -10281,7 +10281,7 @@
           <a:solidFill>
             <a:srgbClr val="FFFFFF"/>
           </a:solidFill>
-          <a:ln w="8731">
+          <a:ln w="12699">
             <a:solidFill>
               <a:srgbClr val="CBD3DA"/>
             </a:solidFill>
@@ -10343,9 +10343,9 @@
               <a:spcAft>
                 <a:spcPts val="0"/>
               </a:spcAft>
-              <a:defRPr sz="1187" b="0" i="0" lang="zh-CN" dirty="0">
+              <a:defRPr sz="1187" b="1" i="0" lang="zh-CN" dirty="0">
                 <a:solidFill>
-                  <a:srgbClr val="3F4854"/>
+                  <a:srgbClr val="27303A"/>
                 </a:solidFill>
                 <a:latin typeface="Noto Sans CJK SC"/>
                 <a:ea typeface="Noto Sans CJK SC"/>
@@ -10353,9 +10353,9 @@
               </a:defRPr>
             </a:pPr>
             <a:r>
-              <a:rPr sz="1187" b="0" i="0" lang="zh-CN" dirty="0">
+              <a:rPr sz="1187" b="1" i="0" lang="zh-CN" dirty="0">
                 <a:solidFill>
-                  <a:srgbClr val="3F4854"/>
+                  <a:srgbClr val="27303A"/>
                 </a:solidFill>
                 <a:latin typeface="Noto Sans CJK SC"/>
                 <a:ea typeface="Noto Sans CJK SC"/>

--- a/media/figstudio/fig01_evidence_map/fig01_evidence_synthesis_map_editable.pptx
+++ b/media/figstudio/fig01_evidence_map/fig01_evidence_synthesis_map_editable.pptx
@@ -6994,7 +6994,7 @@
                 <a:ea typeface="Noto Sans CJK SC"/>
                 <a:cs typeface="Noto Sans CJK SC"/>
               </a:rPr>
-              <a:t>热史</a:t>
+              <a:t>热历史</a:t>
             </a:r>
           </a:p>
         </p:txBody>
@@ -8730,7 +8730,7 @@
                 <a:ea typeface="Noto Sans CJK SC"/>
                 <a:cs typeface="Noto Sans CJK SC"/>
               </a:rPr>
-              <a:t>谱系内相图与结构比较</a:t>
+              <a:t>系列内相图与结构比较</a:t>
             </a:r>
           </a:p>
         </p:txBody>

--- a/media/figstudio/fig01_evidence_map/fig01_evidence_synthesis_map_editable.pptx
+++ b/media/figstudio/fig01_evidence_map/fig01_evidence_synthesis_map_editable.pptx
@@ -7,7 +7,7 @@
   <p:sldIdLst>
     <p:sldId id="256" r:id="rId7"/>
   </p:sldIdLst>
-  <p:sldSz cx="12191999" cy="8127999" type="screen4x3"/>
+  <p:sldSz cx="12191999" cy="6286499" type="screen4x3"/>
   <p:notesSz cx="6858000" cy="9144000"/>
   <p:defaultTextStyle>
     <a:defPPr>
@@ -502,7 +502,7 @@
           <a:lstStyle/>
           <a:p>
             <a:r>
-              <a:t>图 1 不同文献对目标化合物合成研究的适用范围（第五轮 F02 嵌套容器 → super_img2ppt 重建）</a:t>
+              <a:t>图 1 不同文献对目标化合物合成研究的适用范围（第六轮：印刷字号 + 内容定尺寸） [paper=byzso] [print_width_pt=435.2]</a:t>
             </a:r>
           </a:p>
         </p:txBody>
@@ -3524,12 +3524,12 @@
         </p:nvSpPr>
         <p:spPr>
           <a:xfrm>
-            <a:off x="873124" y="396874"/>
-            <a:ext cx="3667124" cy="6397624"/>
+            <a:off x="206374" y="206374"/>
+            <a:ext cx="4254499" cy="5881687"/>
           </a:xfrm>
           <a:prstGeom prst="roundRect">
             <a:avLst>
-              <a:gd name="adj" fmla="val 3030"/>
+              <a:gd name="adj" fmla="val 2611"/>
             </a:avLst>
           </a:prstGeom>
           <a:solidFill>
@@ -3572,8 +3572,8 @@
         </p:nvSpPr>
         <p:spPr>
           <a:xfrm>
-            <a:off x="1015999" y="476249"/>
-            <a:ext cx="1063624" cy="357187"/>
+            <a:off x="349249" y="285749"/>
+            <a:ext cx="1285874" cy="444499"/>
           </a:xfrm>
           <a:prstGeom prst="rect">
             <a:avLst/>
@@ -3589,7 +3589,7 @@
           <a:p>
             <a:pPr algn="l" fontAlgn="base">
               <a:lnSpc>
-                <a:spcPts val="2359"/>
+                <a:spcPts val="3015"/>
               </a:lnSpc>
               <a:spcBef>
                 <a:spcPts val="0"/>
@@ -3597,7 +3597,7 @@
               <a:spcAft>
                 <a:spcPts val="0"/>
               </a:spcAft>
-              <a:defRPr sz="1624" b="1" i="0" lang="zh-CN" dirty="0">
+              <a:defRPr sz="2062" b="1" i="0" lang="zh-CN" dirty="0">
                 <a:solidFill>
                   <a:srgbClr val="2B3E57"/>
                 </a:solidFill>
@@ -3607,7 +3607,7 @@
               </a:defRPr>
             </a:pPr>
             <a:r>
-              <a:rPr sz="1624" b="1" i="0" lang="zh-CN" dirty="0">
+              <a:rPr sz="2062" b="1" i="0" lang="zh-CN" dirty="0">
                 <a:solidFill>
                   <a:srgbClr val="2B3E57"/>
                 </a:solidFill>
@@ -3628,12 +3628,12 @@
         </p:nvSpPr>
         <p:spPr>
           <a:xfrm>
-            <a:off x="4698999" y="396874"/>
-            <a:ext cx="3492499" cy="6397624"/>
+            <a:off x="4651374" y="206374"/>
+            <a:ext cx="3174999" cy="5881687"/>
           </a:xfrm>
           <a:prstGeom prst="roundRect">
             <a:avLst>
-              <a:gd name="adj" fmla="val 3181"/>
+              <a:gd name="adj" fmla="val 3500"/>
             </a:avLst>
           </a:prstGeom>
           <a:solidFill>
@@ -3676,8 +3676,8 @@
         </p:nvSpPr>
         <p:spPr>
           <a:xfrm>
-            <a:off x="4841874" y="476249"/>
-            <a:ext cx="1063624" cy="357187"/>
+            <a:off x="4794249" y="285749"/>
+            <a:ext cx="1285874" cy="444499"/>
           </a:xfrm>
           <a:prstGeom prst="rect">
             <a:avLst/>
@@ -3693,7 +3693,7 @@
           <a:p>
             <a:pPr algn="l" fontAlgn="base">
               <a:lnSpc>
-                <a:spcPts val="2359"/>
+                <a:spcPts val="3015"/>
               </a:lnSpc>
               <a:spcBef>
                 <a:spcPts val="0"/>
@@ -3701,7 +3701,7 @@
               <a:spcAft>
                 <a:spcPts val="0"/>
               </a:spcAft>
-              <a:defRPr sz="1624" b="1" i="0" lang="zh-CN" dirty="0">
+              <a:defRPr sz="2062" b="1" i="0" lang="zh-CN" dirty="0">
                 <a:solidFill>
                   <a:srgbClr val="0F4F58"/>
                 </a:solidFill>
@@ -3711,7 +3711,7 @@
               </a:defRPr>
             </a:pPr>
             <a:r>
-              <a:rPr sz="1624" b="1" i="0" lang="zh-CN" dirty="0">
+              <a:rPr sz="2062" b="1" i="0" lang="zh-CN" dirty="0">
                 <a:solidFill>
                   <a:srgbClr val="0F4F58"/>
                 </a:solidFill>
@@ -3732,12 +3732,12 @@
         </p:nvSpPr>
         <p:spPr>
           <a:xfrm>
-            <a:off x="8350249" y="396874"/>
-            <a:ext cx="3635374" cy="6397624"/>
+            <a:off x="8016874" y="206374"/>
+            <a:ext cx="3968749" cy="5881687"/>
           </a:xfrm>
           <a:prstGeom prst="roundRect">
             <a:avLst>
-              <a:gd name="adj" fmla="val 3056"/>
+              <a:gd name="adj" fmla="val 2800"/>
             </a:avLst>
           </a:prstGeom>
           <a:solidFill>
@@ -3780,8 +3780,8 @@
         </p:nvSpPr>
         <p:spPr>
           <a:xfrm>
-            <a:off x="8493124" y="476249"/>
-            <a:ext cx="1476374" cy="357187"/>
+            <a:off x="8159749" y="285749"/>
+            <a:ext cx="1809749" cy="444499"/>
           </a:xfrm>
           <a:prstGeom prst="rect">
             <a:avLst/>
@@ -3797,7 +3797,7 @@
           <a:p>
             <a:pPr algn="l" fontAlgn="base">
               <a:lnSpc>
-                <a:spcPts val="2359"/>
+                <a:spcPts val="3015"/>
               </a:lnSpc>
               <a:spcBef>
                 <a:spcPts val="0"/>
@@ -3805,7 +3805,7 @@
               <a:spcAft>
                 <a:spcPts val="0"/>
               </a:spcAft>
-              <a:defRPr sz="1624" b="1" i="0" lang="zh-CN" dirty="0">
+              <a:defRPr sz="2062" b="1" i="0" lang="zh-CN" dirty="0">
                 <a:solidFill>
                   <a:srgbClr val="7A5410"/>
                 </a:solidFill>
@@ -3815,7 +3815,7 @@
               </a:defRPr>
             </a:pPr>
             <a:r>
-              <a:rPr sz="1624" b="1" i="0" lang="zh-CN" dirty="0">
+              <a:rPr sz="2062" b="1" i="0" lang="zh-CN" dirty="0">
                 <a:solidFill>
                   <a:srgbClr val="7A5410"/>
                 </a:solidFill>
@@ -3836,12 +3836,12 @@
         </p:nvSpPr>
         <p:spPr>
           <a:xfrm>
-            <a:off x="1031874" y="1190624"/>
-            <a:ext cx="3333749" cy="809624"/>
+            <a:off x="777874" y="809624"/>
+            <a:ext cx="3555999" cy="857249"/>
           </a:xfrm>
           <a:prstGeom prst="roundRect">
             <a:avLst>
-              <a:gd name="adj" fmla="val 8823"/>
+              <a:gd name="adj" fmla="val 8333"/>
             </a:avLst>
           </a:prstGeom>
           <a:solidFill>
@@ -3884,12 +3884,12 @@
         </p:nvSpPr>
         <p:spPr>
           <a:xfrm>
-            <a:off x="1031874" y="1190624"/>
-            <a:ext cx="63499" cy="809624"/>
+            <a:off x="777874" y="809624"/>
+            <a:ext cx="47624" cy="857249"/>
           </a:xfrm>
           <a:prstGeom prst="roundRect">
             <a:avLst>
-              <a:gd name="adj" fmla="val 37500"/>
+              <a:gd name="adj" fmla="val 50000"/>
             </a:avLst>
           </a:prstGeom>
           <a:solidFill>
@@ -3930,7 +3930,7 @@
         </p:nvSpPr>
         <p:spPr>
           <a:xfrm>
-            <a:off x="1277937" y="1484312"/>
+            <a:off x="976312" y="1119187"/>
             <a:ext cx="150812" cy="230187"/>
           </a:xfrm>
           <a:prstGeom prst="rect">
@@ -3974,7 +3974,7 @@
         </p:nvCxnSpPr>
         <p:spPr>
           <a:xfrm>
-            <a:off x="1317624" y="1563687"/>
+            <a:off x="1015999" y="1206499"/>
             <a:ext cx="103188" cy="0"/>
           </a:xfrm>
           <a:prstGeom prst="line">
@@ -4010,7 +4010,7 @@
         </p:nvCxnSpPr>
         <p:spPr>
           <a:xfrm>
-            <a:off x="1317624" y="1611312"/>
+            <a:off x="1015999" y="1246187"/>
             <a:ext cx="103188" cy="0"/>
           </a:xfrm>
           <a:prstGeom prst="line">
@@ -4046,7 +4046,7 @@
         </p:nvCxnSpPr>
         <p:spPr>
           <a:xfrm>
-            <a:off x="1317624" y="1650999"/>
+            <a:off x="1015999" y="1293812"/>
             <a:ext cx="71438" cy="0"/>
           </a:xfrm>
           <a:prstGeom prst="line">
@@ -4082,8 +4082,8 @@
         </p:nvSpPr>
         <p:spPr>
           <a:xfrm>
-            <a:off x="1635124" y="1428749"/>
-            <a:ext cx="2603499" cy="325437"/>
+            <a:off x="1317624" y="1023937"/>
+            <a:ext cx="2920999" cy="420687"/>
           </a:xfrm>
           <a:prstGeom prst="rect">
             <a:avLst/>
@@ -4099,7 +4099,7 @@
           <a:p>
             <a:pPr algn="l" fontAlgn="base">
               <a:lnSpc>
-                <a:spcPts val="2187"/>
+                <a:spcPts val="2812"/>
               </a:lnSpc>
               <a:spcBef>
                 <a:spcPts val="0"/>
@@ -4107,7 +4107,7 @@
               <a:spcAft>
                 <a:spcPts val="0"/>
               </a:spcAft>
-              <a:defRPr sz="1499" b="1" i="0" lang="zh-CN" dirty="0">
+              <a:defRPr sz="1937" b="1" i="0" lang="zh-CN" dirty="0">
                 <a:solidFill>
                   <a:srgbClr val="2B3E57"/>
                 </a:solidFill>
@@ -4117,7 +4117,7 @@
               </a:defRPr>
             </a:pPr>
             <a:r>
-              <a:rPr sz="1499" b="1" i="0" lang="zh-CN" dirty="0">
+              <a:rPr sz="1937" b="1" i="0" lang="zh-CN" dirty="0">
                 <a:solidFill>
                   <a:srgbClr val="2B3E57"/>
                 </a:solidFill>
@@ -4138,12 +4138,12 @@
         </p:nvSpPr>
         <p:spPr>
           <a:xfrm>
-            <a:off x="1031874" y="2079624"/>
-            <a:ext cx="3333749" cy="809624"/>
+            <a:off x="777874" y="1857374"/>
+            <a:ext cx="3555999" cy="857249"/>
           </a:xfrm>
           <a:prstGeom prst="roundRect">
             <a:avLst>
-              <a:gd name="adj" fmla="val 8823"/>
+              <a:gd name="adj" fmla="val 8333"/>
             </a:avLst>
           </a:prstGeom>
           <a:solidFill>
@@ -4186,12 +4186,12 @@
         </p:nvSpPr>
         <p:spPr>
           <a:xfrm>
-            <a:off x="1031874" y="2079624"/>
-            <a:ext cx="63499" cy="809624"/>
+            <a:off x="777874" y="1857374"/>
+            <a:ext cx="47624" cy="857249"/>
           </a:xfrm>
           <a:prstGeom prst="roundRect">
             <a:avLst>
-              <a:gd name="adj" fmla="val 37500"/>
+              <a:gd name="adj" fmla="val 50000"/>
             </a:avLst>
           </a:prstGeom>
           <a:solidFill>
@@ -4232,8 +4232,8 @@
         </p:nvCxnSpPr>
         <p:spPr>
           <a:xfrm>
-            <a:off x="1381124" y="2349499"/>
-            <a:ext cx="127000" cy="87313"/>
+            <a:off x="1079499" y="2151062"/>
+            <a:ext cx="127000" cy="79375"/>
           </a:xfrm>
           <a:prstGeom prst="line">
             <a:avLst/>
@@ -4268,8 +4268,8 @@
         </p:nvCxnSpPr>
         <p:spPr>
           <a:xfrm flipH="1">
-            <a:off x="1452562" y="2436812"/>
-            <a:ext cx="55562" cy="166687"/>
+            <a:off x="1150937" y="2230437"/>
+            <a:ext cx="55562" cy="174625"/>
           </a:xfrm>
           <a:prstGeom prst="line">
             <a:avLst/>
@@ -4304,7 +4304,7 @@
         </p:nvCxnSpPr>
         <p:spPr>
           <a:xfrm flipH="1">
-            <a:off x="1309687" y="2603499"/>
+            <a:off x="1008062" y="2405062"/>
             <a:ext cx="142875" cy="0"/>
           </a:xfrm>
           <a:prstGeom prst="line">
@@ -4340,8 +4340,8 @@
         </p:nvCxnSpPr>
         <p:spPr>
           <a:xfrm flipH="1" flipV="1">
-            <a:off x="1254124" y="2436812"/>
-            <a:ext cx="55563" cy="166687"/>
+            <a:off x="952499" y="2230437"/>
+            <a:ext cx="55563" cy="174625"/>
           </a:xfrm>
           <a:prstGeom prst="line">
             <a:avLst/>
@@ -4376,8 +4376,8 @@
         </p:nvCxnSpPr>
         <p:spPr>
           <a:xfrm flipV="1">
-            <a:off x="1254124" y="2349499"/>
-            <a:ext cx="127000" cy="87313"/>
+            <a:off x="952499" y="2151062"/>
+            <a:ext cx="127000" cy="79375"/>
           </a:xfrm>
           <a:prstGeom prst="line">
             <a:avLst/>
@@ -4412,7 +4412,7 @@
         </p:nvCxnSpPr>
         <p:spPr>
           <a:xfrm>
-            <a:off x="1381124" y="2349499"/>
+            <a:off x="1079499" y="2151062"/>
             <a:ext cx="0" cy="254000"/>
           </a:xfrm>
           <a:prstGeom prst="line">
@@ -4448,7 +4448,7 @@
         </p:nvCxnSpPr>
         <p:spPr>
           <a:xfrm>
-            <a:off x="1254124" y="2436812"/>
+            <a:off x="952499" y="2230437"/>
             <a:ext cx="254000" cy="0"/>
           </a:xfrm>
           <a:prstGeom prst="line">
@@ -4484,8 +4484,8 @@
         </p:nvSpPr>
         <p:spPr>
           <a:xfrm>
-            <a:off x="1635124" y="2317749"/>
-            <a:ext cx="2603499" cy="325437"/>
+            <a:off x="1317624" y="2071687"/>
+            <a:ext cx="2920999" cy="420687"/>
           </a:xfrm>
           <a:prstGeom prst="rect">
             <a:avLst/>
@@ -4501,7 +4501,7 @@
           <a:p>
             <a:pPr algn="l" fontAlgn="base">
               <a:lnSpc>
-                <a:spcPts val="2187"/>
+                <a:spcPts val="2812"/>
               </a:lnSpc>
               <a:spcBef>
                 <a:spcPts val="0"/>
@@ -4509,7 +4509,7 @@
               <a:spcAft>
                 <a:spcPts val="0"/>
               </a:spcAft>
-              <a:defRPr sz="1499" b="1" i="0" lang="zh-CN" dirty="0">
+              <a:defRPr sz="1937" b="1" i="0" lang="zh-CN" dirty="0">
                 <a:solidFill>
                   <a:srgbClr val="2B3E57"/>
                 </a:solidFill>
@@ -4519,7 +4519,7 @@
               </a:defRPr>
             </a:pPr>
             <a:r>
-              <a:rPr sz="1499" b="1" i="0" lang="zh-CN" dirty="0">
+              <a:rPr sz="1937" b="1" i="0" lang="zh-CN" dirty="0">
                 <a:solidFill>
                   <a:srgbClr val="2B3E57"/>
                 </a:solidFill>
@@ -4530,7 +4530,7 @@
               <a:t>同类</a:t>
             </a:r>
             <a:r>
-              <a:rPr sz="1499" b="1" i="0" lang="zh-CN" dirty="0">
+              <a:rPr sz="1937" b="1" i="0" lang="zh-CN" dirty="0">
                 <a:solidFill>
                   <a:srgbClr val="2B3E57"/>
                 </a:solidFill>
@@ -4541,7 +4541,7 @@
               <a:t> Ba–Y </a:t>
             </a:r>
             <a:r>
-              <a:rPr sz="1499" b="1" i="0" lang="zh-CN" dirty="0">
+              <a:rPr sz="1937" b="1" i="0" lang="zh-CN" dirty="0">
                 <a:solidFill>
                   <a:srgbClr val="2B3E57"/>
                 </a:solidFill>
@@ -4562,12 +4562,12 @@
         </p:nvSpPr>
         <p:spPr>
           <a:xfrm>
-            <a:off x="1031874" y="2968624"/>
-            <a:ext cx="3333749" cy="809624"/>
+            <a:off x="777874" y="2905124"/>
+            <a:ext cx="3555999" cy="857249"/>
           </a:xfrm>
           <a:prstGeom prst="roundRect">
             <a:avLst>
-              <a:gd name="adj" fmla="val 8823"/>
+              <a:gd name="adj" fmla="val 8333"/>
             </a:avLst>
           </a:prstGeom>
           <a:solidFill>
@@ -4610,12 +4610,12 @@
         </p:nvSpPr>
         <p:spPr>
           <a:xfrm>
-            <a:off x="1031874" y="2968624"/>
-            <a:ext cx="63499" cy="809624"/>
+            <a:off x="777874" y="2905124"/>
+            <a:ext cx="47624" cy="857249"/>
           </a:xfrm>
           <a:prstGeom prst="roundRect">
             <a:avLst>
-              <a:gd name="adj" fmla="val 37500"/>
+              <a:gd name="adj" fmla="val 50000"/>
             </a:avLst>
           </a:prstGeom>
           <a:solidFill>
@@ -4656,7 +4656,7 @@
         </p:nvCxnSpPr>
         <p:spPr>
           <a:xfrm>
-            <a:off x="1277937" y="3270249"/>
+            <a:off x="976312" y="3230562"/>
             <a:ext cx="206375" cy="0"/>
           </a:xfrm>
           <a:prstGeom prst="line">
@@ -4692,8 +4692,8 @@
         </p:nvCxnSpPr>
         <p:spPr>
           <a:xfrm>
-            <a:off x="1277937" y="3270249"/>
-            <a:ext cx="0" cy="206375"/>
+            <a:off x="976312" y="3230562"/>
+            <a:ext cx="0" cy="198437"/>
           </a:xfrm>
           <a:prstGeom prst="line">
             <a:avLst/>
@@ -4728,7 +4728,7 @@
         </p:nvCxnSpPr>
         <p:spPr>
           <a:xfrm>
-            <a:off x="1277937" y="3373437"/>
+            <a:off x="976312" y="3325812"/>
             <a:ext cx="206375" cy="0"/>
           </a:xfrm>
           <a:prstGeom prst="line">
@@ -4764,8 +4764,8 @@
         </p:nvCxnSpPr>
         <p:spPr>
           <a:xfrm>
-            <a:off x="1381124" y="3270249"/>
-            <a:ext cx="0" cy="206375"/>
+            <a:off x="1079499" y="3230562"/>
+            <a:ext cx="0" cy="198437"/>
           </a:xfrm>
           <a:prstGeom prst="line">
             <a:avLst/>
@@ -4800,7 +4800,7 @@
         </p:nvCxnSpPr>
         <p:spPr>
           <a:xfrm>
-            <a:off x="1277937" y="3476624"/>
+            <a:off x="976312" y="3428999"/>
             <a:ext cx="206375" cy="0"/>
           </a:xfrm>
           <a:prstGeom prst="line">
@@ -4836,8 +4836,8 @@
         </p:nvCxnSpPr>
         <p:spPr>
           <a:xfrm>
-            <a:off x="1484312" y="3270249"/>
-            <a:ext cx="0" cy="206375"/>
+            <a:off x="1182687" y="3230562"/>
+            <a:ext cx="0" cy="198437"/>
           </a:xfrm>
           <a:prstGeom prst="line">
             <a:avLst/>
@@ -4872,7 +4872,7 @@
         </p:nvSpPr>
         <p:spPr>
           <a:xfrm>
-            <a:off x="1254124" y="3246437"/>
+            <a:off x="952499" y="3206749"/>
             <a:ext cx="47624" cy="47624"/>
           </a:xfrm>
           <a:prstGeom prst="ellipse">
@@ -4916,7 +4916,7 @@
         </p:nvSpPr>
         <p:spPr>
           <a:xfrm>
-            <a:off x="1254124" y="3349624"/>
+            <a:off x="952499" y="3309937"/>
             <a:ext cx="47624" cy="47624"/>
           </a:xfrm>
           <a:prstGeom prst="ellipse">
@@ -4960,7 +4960,7 @@
         </p:nvSpPr>
         <p:spPr>
           <a:xfrm>
-            <a:off x="1254124" y="3452812"/>
+            <a:off x="952499" y="3405187"/>
             <a:ext cx="47624" cy="47624"/>
           </a:xfrm>
           <a:prstGeom prst="ellipse">
@@ -5004,7 +5004,7 @@
         </p:nvSpPr>
         <p:spPr>
           <a:xfrm>
-            <a:off x="1357312" y="3246437"/>
+            <a:off x="1055687" y="3206749"/>
             <a:ext cx="47624" cy="47624"/>
           </a:xfrm>
           <a:prstGeom prst="ellipse">
@@ -5048,7 +5048,7 @@
         </p:nvSpPr>
         <p:spPr>
           <a:xfrm>
-            <a:off x="1357312" y="3349624"/>
+            <a:off x="1055687" y="3309937"/>
             <a:ext cx="47624" cy="47624"/>
           </a:xfrm>
           <a:prstGeom prst="ellipse">
@@ -5092,7 +5092,7 @@
         </p:nvSpPr>
         <p:spPr>
           <a:xfrm>
-            <a:off x="1357312" y="3452812"/>
+            <a:off x="1055687" y="3405187"/>
             <a:ext cx="47624" cy="47624"/>
           </a:xfrm>
           <a:prstGeom prst="ellipse">
@@ -5136,7 +5136,7 @@
         </p:nvSpPr>
         <p:spPr>
           <a:xfrm>
-            <a:off x="1460499" y="3246437"/>
+            <a:off x="1158874" y="3206749"/>
             <a:ext cx="47624" cy="47624"/>
           </a:xfrm>
           <a:prstGeom prst="ellipse">
@@ -5180,7 +5180,7 @@
         </p:nvSpPr>
         <p:spPr>
           <a:xfrm>
-            <a:off x="1460499" y="3349624"/>
+            <a:off x="1158874" y="3309937"/>
             <a:ext cx="47624" cy="47624"/>
           </a:xfrm>
           <a:prstGeom prst="ellipse">
@@ -5224,7 +5224,7 @@
         </p:nvSpPr>
         <p:spPr>
           <a:xfrm>
-            <a:off x="1460499" y="3452812"/>
+            <a:off x="1158874" y="3405187"/>
             <a:ext cx="47624" cy="47624"/>
           </a:xfrm>
           <a:prstGeom prst="ellipse">
@@ -5268,8 +5268,8 @@
         </p:nvSpPr>
         <p:spPr>
           <a:xfrm>
-            <a:off x="1635124" y="3206749"/>
-            <a:ext cx="2603499" cy="325437"/>
+            <a:off x="1317624" y="3119437"/>
+            <a:ext cx="2920999" cy="420687"/>
           </a:xfrm>
           <a:prstGeom prst="rect">
             <a:avLst/>
@@ -5285,7 +5285,7 @@
           <a:p>
             <a:pPr algn="l" fontAlgn="base">
               <a:lnSpc>
-                <a:spcPts val="2187"/>
+                <a:spcPts val="2812"/>
               </a:lnSpc>
               <a:spcBef>
                 <a:spcPts val="0"/>
@@ -5293,7 +5293,7 @@
               <a:spcAft>
                 <a:spcPts val="0"/>
               </a:spcAft>
-              <a:defRPr sz="1499" b="1" i="0" lang="zh-CN" dirty="0">
+              <a:defRPr sz="1937" b="1" i="0" lang="zh-CN" dirty="0">
                 <a:solidFill>
                   <a:srgbClr val="2B3E57"/>
                 </a:solidFill>
@@ -5303,7 +5303,7 @@
               </a:defRPr>
             </a:pPr>
             <a:r>
-              <a:rPr sz="1499" b="1" i="0" lang="zh-CN" dirty="0">
+              <a:rPr sz="1937" b="1" i="0" lang="zh-CN" dirty="0">
                 <a:solidFill>
                   <a:srgbClr val="2B3E57"/>
                 </a:solidFill>
@@ -5324,12 +5324,12 @@
         </p:nvSpPr>
         <p:spPr>
           <a:xfrm>
-            <a:off x="1031874" y="3857624"/>
-            <a:ext cx="3333749" cy="809624"/>
+            <a:off x="777874" y="3944937"/>
+            <a:ext cx="3555999" cy="857249"/>
           </a:xfrm>
           <a:prstGeom prst="roundRect">
             <a:avLst>
-              <a:gd name="adj" fmla="val 8823"/>
+              <a:gd name="adj" fmla="val 8333"/>
             </a:avLst>
           </a:prstGeom>
           <a:solidFill>
@@ -5372,12 +5372,12 @@
         </p:nvSpPr>
         <p:spPr>
           <a:xfrm>
-            <a:off x="1031874" y="3857624"/>
-            <a:ext cx="63499" cy="809624"/>
+            <a:off x="777874" y="3944937"/>
+            <a:ext cx="47624" cy="857249"/>
           </a:xfrm>
           <a:prstGeom prst="roundRect">
             <a:avLst>
-              <a:gd name="adj" fmla="val 37500"/>
+              <a:gd name="adj" fmla="val 50000"/>
             </a:avLst>
           </a:prstGeom>
           <a:solidFill>
@@ -5418,7 +5418,7 @@
         </p:nvCxnSpPr>
         <p:spPr>
           <a:xfrm>
-            <a:off x="1293812" y="4198937"/>
+            <a:off x="992187" y="4310062"/>
             <a:ext cx="31750" cy="174625"/>
           </a:xfrm>
           <a:prstGeom prst="line">
@@ -5454,7 +5454,7 @@
         </p:nvCxnSpPr>
         <p:spPr>
           <a:xfrm>
-            <a:off x="1325562" y="4373562"/>
+            <a:off x="1023937" y="4484687"/>
             <a:ext cx="111125" cy="0"/>
           </a:xfrm>
           <a:prstGeom prst="line">
@@ -5490,7 +5490,7 @@
         </p:nvCxnSpPr>
         <p:spPr>
           <a:xfrm flipV="1">
-            <a:off x="1436687" y="4198937"/>
+            <a:off x="1135062" y="4310062"/>
             <a:ext cx="31750" cy="174625"/>
           </a:xfrm>
           <a:prstGeom prst="line">
@@ -5526,7 +5526,7 @@
         </p:nvCxnSpPr>
         <p:spPr>
           <a:xfrm>
-            <a:off x="1269999" y="4198937"/>
+            <a:off x="968374" y="4310062"/>
             <a:ext cx="222250" cy="0"/>
           </a:xfrm>
           <a:prstGeom prst="line">
@@ -5562,8 +5562,8 @@
         </p:nvSpPr>
         <p:spPr>
           <a:xfrm>
-            <a:off x="1635124" y="4095749"/>
-            <a:ext cx="2603499" cy="325437"/>
+            <a:off x="1317624" y="4167187"/>
+            <a:ext cx="2920999" cy="420687"/>
           </a:xfrm>
           <a:prstGeom prst="rect">
             <a:avLst/>
@@ -5579,7 +5579,7 @@
           <a:p>
             <a:pPr algn="l" fontAlgn="base">
               <a:lnSpc>
-                <a:spcPts val="2187"/>
+                <a:spcPts val="2812"/>
               </a:lnSpc>
               <a:spcBef>
                 <a:spcPts val="0"/>
@@ -5587,7 +5587,7 @@
               <a:spcAft>
                 <a:spcPts val="0"/>
               </a:spcAft>
-              <a:defRPr sz="1499" b="1" i="0" lang="zh-CN" dirty="0">
+              <a:defRPr sz="1937" b="1" i="0" lang="zh-CN" dirty="0">
                 <a:solidFill>
                   <a:srgbClr val="2B3E57"/>
                 </a:solidFill>
@@ -5597,7 +5597,7 @@
               </a:defRPr>
             </a:pPr>
             <a:r>
-              <a:rPr sz="1499" b="1" i="0" lang="zh-CN" dirty="0">
+              <a:rPr sz="1937" b="1" i="0" lang="zh-CN" dirty="0">
                 <a:solidFill>
                   <a:srgbClr val="2B3E57"/>
                 </a:solidFill>
@@ -5618,12 +5618,12 @@
         </p:nvSpPr>
         <p:spPr>
           <a:xfrm>
-            <a:off x="1031874" y="5556249"/>
-            <a:ext cx="3333749" cy="888999"/>
+            <a:off x="777874" y="5087937"/>
+            <a:ext cx="3555999" cy="857249"/>
           </a:xfrm>
           <a:prstGeom prst="roundRect">
             <a:avLst>
-              <a:gd name="adj" fmla="val 8035"/>
+              <a:gd name="adj" fmla="val 8333"/>
             </a:avLst>
           </a:prstGeom>
           <a:solidFill>
@@ -5669,7 +5669,7 @@
         </p:nvSpPr>
         <p:spPr>
           <a:xfrm>
-            <a:off x="1293812" y="5889624"/>
+            <a:off x="976312" y="5397499"/>
             <a:ext cx="150812" cy="230187"/>
           </a:xfrm>
           <a:prstGeom prst="rect">
@@ -5713,7 +5713,7 @@
         </p:nvCxnSpPr>
         <p:spPr>
           <a:xfrm>
-            <a:off x="1333499" y="5968999"/>
+            <a:off x="1015999" y="5484812"/>
             <a:ext cx="103188" cy="0"/>
           </a:xfrm>
           <a:prstGeom prst="line">
@@ -5749,7 +5749,7 @@
         </p:nvCxnSpPr>
         <p:spPr>
           <a:xfrm>
-            <a:off x="1333499" y="6016624"/>
+            <a:off x="1015999" y="5524499"/>
             <a:ext cx="103188" cy="0"/>
           </a:xfrm>
           <a:prstGeom prst="line">
@@ -5785,7 +5785,7 @@
         </p:nvCxnSpPr>
         <p:spPr>
           <a:xfrm>
-            <a:off x="1333499" y="6056312"/>
+            <a:off x="1015999" y="5572124"/>
             <a:ext cx="71438" cy="0"/>
           </a:xfrm>
           <a:prstGeom prst="line">
@@ -5821,7 +5821,7 @@
         </p:nvCxnSpPr>
         <p:spPr>
           <a:xfrm flipV="1">
-            <a:off x="1285874" y="5873749"/>
+            <a:off x="968374" y="5389562"/>
             <a:ext cx="222250" cy="254000"/>
           </a:xfrm>
           <a:prstGeom prst="line">
@@ -5857,8 +5857,8 @@
         </p:nvSpPr>
         <p:spPr>
           <a:xfrm>
-            <a:off x="1650999" y="5841999"/>
-            <a:ext cx="2571749" cy="325437"/>
+            <a:off x="1317624" y="5302249"/>
+            <a:ext cx="2920999" cy="420687"/>
           </a:xfrm>
           <a:prstGeom prst="rect">
             <a:avLst/>
@@ -5874,7 +5874,7 @@
           <a:p>
             <a:pPr algn="l" fontAlgn="base">
               <a:lnSpc>
-                <a:spcPts val="2187"/>
+                <a:spcPts val="2812"/>
               </a:lnSpc>
               <a:spcBef>
                 <a:spcPts val="0"/>
@@ -5882,7 +5882,7 @@
               <a:spcAft>
                 <a:spcPts val="0"/>
               </a:spcAft>
-              <a:defRPr sz="1499" b="1" i="0" lang="zh-CN" dirty="0">
+              <a:defRPr sz="1937" b="1" i="0" lang="zh-CN" dirty="0">
                 <a:solidFill>
                   <a:srgbClr val="5B6570"/>
                 </a:solidFill>
@@ -5892,7 +5892,7 @@
               </a:defRPr>
             </a:pPr>
             <a:r>
-              <a:rPr sz="1499" b="1" i="0" lang="zh-CN" dirty="0">
+              <a:rPr sz="1937" b="1" i="0" lang="zh-CN" dirty="0">
                 <a:solidFill>
                   <a:srgbClr val="5B6570"/>
                 </a:solidFill>
@@ -5907,14 +5907,218 @@
       </p:sp>
       <p:sp>
         <p:nvSpPr>
-          <p:cNvPr id="57" name="ax_u" descr="Editable line; source id ax_u"/>
+          <p:cNvPr id="57" name="ax_n" descr="Editable text; source id ax_n"/>
+          <p:cNvSpPr txBox="1"/>
+          <p:nvPr/>
+        </p:nvSpPr>
+        <p:spPr>
+          <a:xfrm>
+            <a:off x="349249" y="809624"/>
+            <a:ext cx="412749" cy="349249"/>
+          </a:xfrm>
+          <a:prstGeom prst="rect">
+            <a:avLst/>
+          </a:prstGeom>
+          <a:noFill/>
+          <a:effectLst/>
+        </p:spPr>
+        <p:txBody>
+          <a:bodyPr wrap="none" anchor="ctr" tIns="0" rIns="0" bIns="0" lIns="0" anchorCtr="0" vertOverflow="overflow">
+            <a:noAutofit/>
+          </a:bodyPr>
+          <a:lstStyle/>
+          <a:p>
+            <a:pPr algn="ctr" fontAlgn="base">
+              <a:lnSpc>
+                <a:spcPts val="2359"/>
+              </a:lnSpc>
+              <a:spcBef>
+                <a:spcPts val="0"/>
+              </a:spcBef>
+              <a:spcAft>
+                <a:spcPts val="0"/>
+              </a:spcAft>
+              <a:defRPr sz="1624" b="0" i="0" lang="zh-CN" dirty="0">
+                <a:solidFill>
+                  <a:srgbClr val="27303A"/>
+                </a:solidFill>
+                <a:latin typeface="Noto Sans CJK SC"/>
+                <a:ea typeface="Noto Sans CJK SC"/>
+                <a:cs typeface="Noto Sans CJK SC"/>
+              </a:defRPr>
+            </a:pPr>
+            <a:r>
+              <a:rPr sz="1624" b="0" i="0" lang="zh-CN" dirty="0">
+                <a:solidFill>
+                  <a:srgbClr val="27303A"/>
+                </a:solidFill>
+                <a:latin typeface="Noto Sans CJK SC"/>
+                <a:ea typeface="Noto Sans CJK SC"/>
+                <a:cs typeface="Noto Sans CJK SC"/>
+              </a:rPr>
+              <a:t>近</a:t>
+            </a:r>
+          </a:p>
+        </p:txBody>
+      </p:sp>
+      <p:sp>
+        <p:nvSpPr>
+          <p:cNvPr id="58" name="ax_f" descr="Editable text; source id ax_f"/>
+          <p:cNvSpPr txBox="1"/>
+          <p:nvPr/>
+        </p:nvSpPr>
+        <p:spPr>
+          <a:xfrm>
+            <a:off x="349249" y="4452937"/>
+            <a:ext cx="412749" cy="349249"/>
+          </a:xfrm>
+          <a:prstGeom prst="rect">
+            <a:avLst/>
+          </a:prstGeom>
+          <a:noFill/>
+          <a:effectLst/>
+        </p:spPr>
+        <p:txBody>
+          <a:bodyPr wrap="none" anchor="ctr" tIns="0" rIns="0" bIns="0" lIns="0" anchorCtr="0" vertOverflow="overflow">
+            <a:noAutofit/>
+          </a:bodyPr>
+          <a:lstStyle/>
+          <a:p>
+            <a:pPr algn="ctr" fontAlgn="base">
+              <a:lnSpc>
+                <a:spcPts val="2359"/>
+              </a:lnSpc>
+              <a:spcBef>
+                <a:spcPts val="0"/>
+              </a:spcBef>
+              <a:spcAft>
+                <a:spcPts val="0"/>
+              </a:spcAft>
+              <a:defRPr sz="1624" b="0" i="0" lang="zh-CN" dirty="0">
+                <a:solidFill>
+                  <a:srgbClr val="27303A"/>
+                </a:solidFill>
+                <a:latin typeface="Noto Sans CJK SC"/>
+                <a:ea typeface="Noto Sans CJK SC"/>
+                <a:cs typeface="Noto Sans CJK SC"/>
+              </a:defRPr>
+            </a:pPr>
+            <a:r>
+              <a:rPr sz="1624" b="0" i="0" lang="zh-CN" dirty="0">
+                <a:solidFill>
+                  <a:srgbClr val="27303A"/>
+                </a:solidFill>
+                <a:latin typeface="Noto Sans CJK SC"/>
+                <a:ea typeface="Noto Sans CJK SC"/>
+                <a:cs typeface="Noto Sans CJK SC"/>
+              </a:rPr>
+              <a:t>远</a:t>
+            </a:r>
+          </a:p>
+        </p:txBody>
+      </p:sp>
+      <p:sp>
+        <p:nvSpPr>
+          <p:cNvPr id="59" name="ax_l" descr="Editable text; source id ax_l"/>
+          <p:cNvSpPr txBox="1"/>
+          <p:nvPr/>
+        </p:nvSpPr>
+        <p:spPr>
+          <a:xfrm rot="16200000">
+            <a:off x="-238124" y="2627312"/>
+            <a:ext cx="1579562" cy="357187"/>
+          </a:xfrm>
+          <a:prstGeom prst="rect">
+            <a:avLst/>
+          </a:prstGeom>
+          <a:noFill/>
+          <a:effectLst/>
+        </p:spPr>
+        <p:txBody>
+          <a:bodyPr wrap="none" anchor="ctr" tIns="0" rIns="0" bIns="0" lIns="0" anchorCtr="0" vertOverflow="overflow">
+            <a:noAutofit/>
+          </a:bodyPr>
+          <a:lstStyle/>
+          <a:p>
+            <a:pPr algn="ctr" fontAlgn="base">
+              <a:lnSpc>
+                <a:spcPts val="2359"/>
+              </a:lnSpc>
+              <a:spcBef>
+                <a:spcPts val="0"/>
+              </a:spcBef>
+              <a:spcAft>
+                <a:spcPts val="0"/>
+              </a:spcAft>
+              <a:defRPr sz="1624" b="0" i="0" lang="zh-CN" dirty="0">
+                <a:solidFill>
+                  <a:srgbClr val="27303A"/>
+                </a:solidFill>
+                <a:latin typeface="Noto Sans CJK SC"/>
+                <a:ea typeface="Noto Sans CJK SC"/>
+                <a:cs typeface="Noto Sans CJK SC"/>
+              </a:defRPr>
+            </a:pPr>
+            <a:r>
+              <a:rPr sz="1624" b="0" i="0" lang="zh-CN" dirty="0">
+                <a:solidFill>
+                  <a:srgbClr val="27303A"/>
+                </a:solidFill>
+                <a:latin typeface="Noto Sans CJK SC"/>
+                <a:ea typeface="Noto Sans CJK SC"/>
+                <a:cs typeface="Noto Sans CJK SC"/>
+              </a:rPr>
+              <a:t>与目标相的距离</a:t>
+            </a:r>
+          </a:p>
+        </p:txBody>
+      </p:sp>
+      <p:cxnSp>
+        <p:nvCxnSpPr>
+          <p:cNvPr id="60" name="ax_u" descr="Editable line; source id ax_u"/>
+          <p:cNvCxnSpPr/>
+          <p:nvPr/>
+        </p:nvCxnSpPr>
+        <p:spPr>
+          <a:xfrm>
+            <a:off x="555624" y="1206499"/>
+            <a:ext cx="0" cy="746125"/>
+          </a:xfrm>
+          <a:prstGeom prst="line">
+            <a:avLst/>
+          </a:prstGeom>
+          <a:ln w="17462">
+            <a:solidFill>
+              <a:srgbClr val="27303A"/>
+            </a:solidFill>
+          </a:ln>
+          <a:effectLst/>
+        </p:spPr>
+        <p:style>
+          <a:lnRef idx="2">
+            <a:schemeClr val="accent1"/>
+          </a:lnRef>
+          <a:fillRef idx="0">
+            <a:schemeClr val="accent1"/>
+          </a:fillRef>
+          <a:effectRef idx="0">
+            <a:schemeClr val="accent1"/>
+          </a:effectRef>
+          <a:fontRef idx="minor">
+            <a:schemeClr val="tx1"/>
+          </a:fontRef>
+        </p:style>
+      </p:cxnSp>
+      <p:sp>
+        <p:nvSpPr>
+          <p:cNvPr id="61" name="ax_d" descr="Editable line; source id ax_d"/>
           <p:cNvSpPr/>
           <p:nvPr/>
         </p:nvSpPr>
         <p:spPr>
           <a:xfrm>
-            <a:off x="448469" y="1381125"/>
-            <a:ext cx="87312" cy="2103437"/>
+            <a:off x="515937" y="3659187"/>
+            <a:ext cx="79375" cy="746125"/>
           </a:xfrm>
           <a:custGeom>
             <a:avLst/>
@@ -5923,27 +6127,27 @@
             <a:cxnLst/>
             <a:rect l="l" t="t" r="r" b="b"/>
             <a:pathLst>
-              <a:path w="11000" h="265000">
+              <a:path w="10000" h="94000">
                 <a:moveTo>
-                  <a:pt x="4400" y="265000"/>
+                  <a:pt x="6100" y="0"/>
                 </a:moveTo>
                 <a:lnTo>
-                  <a:pt x="4400" y="14000"/>
+                  <a:pt x="6100" y="81000"/>
                 </a:lnTo>
                 <a:lnTo>
-                  <a:pt x="0" y="14000"/>
+                  <a:pt x="10000" y="81000"/>
                 </a:lnTo>
                 <a:lnTo>
-                  <a:pt x="5500" y="0"/>
+                  <a:pt x="5000" y="94000"/>
                 </a:lnTo>
                 <a:lnTo>
-                  <a:pt x="11000" y="14000"/>
+                  <a:pt x="0" y="81000"/>
                 </a:lnTo>
                 <a:lnTo>
-                  <a:pt x="6600" y="14000"/>
+                  <a:pt x="3900" y="81000"/>
                 </a:lnTo>
                 <a:lnTo>
-                  <a:pt x="6600" y="265000"/>
+                  <a:pt x="3900" y="0"/>
                 </a:lnTo>
                 <a:close/>
               </a:path>
@@ -5981,50 +6185,70 @@
       </p:sp>
       <p:sp>
         <p:nvSpPr>
-          <p:cNvPr id="58" name="ax_d" descr="Editable line; source id ax_d"/>
+          <p:cNvPr id="62" name="led" descr="Editable shape; source id led"/>
           <p:cNvSpPr/>
           <p:nvPr/>
         </p:nvSpPr>
         <p:spPr>
           <a:xfrm>
-            <a:off x="448469" y="4151312"/>
-            <a:ext cx="87312" cy="2103437"/>
-          </a:xfrm>
-          <a:custGeom>
-            <a:avLst/>
-            <a:gdLst/>
-            <a:ahLst/>
-            <a:cxnLst/>
-            <a:rect l="l" t="t" r="r" b="b"/>
-            <a:pathLst>
-              <a:path w="11000" h="265000">
-                <a:moveTo>
-                  <a:pt x="6600" y="0"/>
-                </a:moveTo>
-                <a:lnTo>
-                  <a:pt x="6600" y="251000"/>
-                </a:lnTo>
-                <a:lnTo>
-                  <a:pt x="11000" y="251000"/>
-                </a:lnTo>
-                <a:lnTo>
-                  <a:pt x="5500" y="265000"/>
-                </a:lnTo>
-                <a:lnTo>
-                  <a:pt x="0" y="251000"/>
-                </a:lnTo>
-                <a:lnTo>
-                  <a:pt x="4400" y="251000"/>
-                </a:lnTo>
-                <a:lnTo>
-                  <a:pt x="4400" y="0"/>
-                </a:lnTo>
-                <a:close/>
-              </a:path>
-            </a:pathLst>
-          </a:custGeom>
+            <a:off x="4778374" y="809624"/>
+            <a:ext cx="2920999" cy="3992562"/>
+          </a:xfrm>
+          <a:prstGeom prst="roundRect">
+            <a:avLst>
+              <a:gd name="adj" fmla="val 2445"/>
+            </a:avLst>
+          </a:prstGeom>
           <a:solidFill>
-            <a:srgbClr val="27303A"/>
+            <a:srgbClr val="FFFFFF"/>
+          </a:solidFill>
+          <a:ln w="15081">
+            <a:solidFill>
+              <a:srgbClr val="1F7F8C"/>
+            </a:solidFill>
+          </a:ln>
+          <a:effectLst/>
+        </p:spPr>
+        <p:style>
+          <a:lnRef idx="1">
+            <a:schemeClr val="accent1"/>
+          </a:lnRef>
+          <a:fillRef idx="3">
+            <a:schemeClr val="accent1"/>
+          </a:fillRef>
+          <a:effectRef idx="0">
+            <a:schemeClr val="accent1"/>
+          </a:effectRef>
+          <a:fontRef idx="minor">
+            <a:schemeClr val="lt1"/>
+          </a:fontRef>
+        </p:style>
+        <p:txBody>
+          <a:bodyPr rtlCol="0" anchor="ctr"/>
+          <a:lstStyle/>
+          <a:p>
+            <a:pPr algn="ctr"/>
+          </a:p>
+        </p:txBody>
+      </p:sp>
+      <p:sp>
+        <p:nvSpPr>
+          <p:cNvPr id="63" name="led_b" descr="Editable shape; source id led_b"/>
+          <p:cNvSpPr/>
+          <p:nvPr/>
+        </p:nvSpPr>
+        <p:spPr>
+          <a:xfrm>
+            <a:off x="4778374" y="809624"/>
+            <a:ext cx="47624" cy="3992562"/>
+          </a:xfrm>
+          <a:prstGeom prst="roundRect">
+            <a:avLst>
+              <a:gd name="adj" fmla="val 50000"/>
+            </a:avLst>
+          </a:prstGeom>
+          <a:solidFill>
+            <a:srgbClr val="1F7F8C"/>
           </a:solidFill>
           <a:ln>
             <a:noFill/>
@@ -6055,14 +6279,202 @@
       </p:sp>
       <p:sp>
         <p:nvSpPr>
-          <p:cNvPr id="59" name="ax_n" descr="Editable text; source id ax_n"/>
+          <p:cNvPr id="64" name="led_g_b" descr="Editable shape; source id led_g_b"/>
+          <p:cNvSpPr/>
+          <p:nvPr/>
+        </p:nvSpPr>
+        <p:spPr>
+          <a:xfrm>
+            <a:off x="6127749" y="1000124"/>
+            <a:ext cx="261937" cy="230187"/>
+          </a:xfrm>
+          <a:prstGeom prst="rect">
+            <a:avLst/>
+          </a:prstGeom>
+          <a:noFill/>
+          <a:ln w="18216">
+            <a:solidFill>
+              <a:srgbClr val="111A24"/>
+            </a:solidFill>
+          </a:ln>
+          <a:effectLst/>
+        </p:spPr>
+        <p:style>
+          <a:lnRef idx="1">
+            <a:schemeClr val="accent1"/>
+          </a:lnRef>
+          <a:fillRef idx="3">
+            <a:schemeClr val="accent1"/>
+          </a:fillRef>
+          <a:effectRef idx="0">
+            <a:schemeClr val="accent1"/>
+          </a:effectRef>
+          <a:fontRef idx="minor">
+            <a:schemeClr val="lt1"/>
+          </a:fontRef>
+        </p:style>
+        <p:txBody>
+          <a:bodyPr rtlCol="0" anchor="ctr"/>
+          <a:lstStyle/>
+          <a:p>
+            <a:pPr algn="ctr"/>
+          </a:p>
+        </p:txBody>
+      </p:sp>
+      <p:cxnSp>
+        <p:nvCxnSpPr>
+          <p:cNvPr id="65" name="led_g_r1" descr="Editable line; source id led_g_r1"/>
+          <p:cNvCxnSpPr/>
+          <p:nvPr/>
+        </p:nvCxnSpPr>
+        <p:spPr>
+          <a:xfrm>
+            <a:off x="6127749" y="1079499"/>
+            <a:ext cx="269875" cy="0"/>
+          </a:xfrm>
+          <a:prstGeom prst="line">
+            <a:avLst/>
+          </a:prstGeom>
+          <a:ln w="18216">
+            <a:solidFill>
+              <a:srgbClr val="111A24"/>
+            </a:solidFill>
+          </a:ln>
+          <a:effectLst/>
+        </p:spPr>
+        <p:style>
+          <a:lnRef idx="2">
+            <a:schemeClr val="accent1"/>
+          </a:lnRef>
+          <a:fillRef idx="0">
+            <a:schemeClr val="accent1"/>
+          </a:fillRef>
+          <a:effectRef idx="0">
+            <a:schemeClr val="accent1"/>
+          </a:effectRef>
+          <a:fontRef idx="minor">
+            <a:schemeClr val="tx1"/>
+          </a:fontRef>
+        </p:style>
+      </p:cxnSp>
+      <p:cxnSp>
+        <p:nvCxnSpPr>
+          <p:cNvPr id="66" name="led_g_r2" descr="Editable line; source id led_g_r2"/>
+          <p:cNvCxnSpPr/>
+          <p:nvPr/>
+        </p:nvCxnSpPr>
+        <p:spPr>
+          <a:xfrm>
+            <a:off x="6127749" y="1150937"/>
+            <a:ext cx="269875" cy="0"/>
+          </a:xfrm>
+          <a:prstGeom prst="line">
+            <a:avLst/>
+          </a:prstGeom>
+          <a:ln w="18216">
+            <a:solidFill>
+              <a:srgbClr val="111A24"/>
+            </a:solidFill>
+          </a:ln>
+          <a:effectLst/>
+        </p:spPr>
+        <p:style>
+          <a:lnRef idx="2">
+            <a:schemeClr val="accent1"/>
+          </a:lnRef>
+          <a:fillRef idx="0">
+            <a:schemeClr val="accent1"/>
+          </a:fillRef>
+          <a:effectRef idx="0">
+            <a:schemeClr val="accent1"/>
+          </a:effectRef>
+          <a:fontRef idx="minor">
+            <a:schemeClr val="tx1"/>
+          </a:fontRef>
+        </p:style>
+      </p:cxnSp>
+      <p:cxnSp>
+        <p:nvCxnSpPr>
+          <p:cNvPr id="67" name="led_g_c1" descr="Editable line; source id led_g_c1"/>
+          <p:cNvCxnSpPr/>
+          <p:nvPr/>
+        </p:nvCxnSpPr>
+        <p:spPr>
+          <a:xfrm>
+            <a:off x="6215062" y="1000124"/>
+            <a:ext cx="0" cy="230188"/>
+          </a:xfrm>
+          <a:prstGeom prst="line">
+            <a:avLst/>
+          </a:prstGeom>
+          <a:ln w="18216">
+            <a:solidFill>
+              <a:srgbClr val="111A24"/>
+            </a:solidFill>
+          </a:ln>
+          <a:effectLst/>
+        </p:spPr>
+        <p:style>
+          <a:lnRef idx="2">
+            <a:schemeClr val="accent1"/>
+          </a:lnRef>
+          <a:fillRef idx="0">
+            <a:schemeClr val="accent1"/>
+          </a:fillRef>
+          <a:effectRef idx="0">
+            <a:schemeClr val="accent1"/>
+          </a:effectRef>
+          <a:fontRef idx="minor">
+            <a:schemeClr val="tx1"/>
+          </a:fontRef>
+        </p:style>
+      </p:cxnSp>
+      <p:cxnSp>
+        <p:nvCxnSpPr>
+          <p:cNvPr id="68" name="led_g_c2" descr="Editable line; source id led_g_c2"/>
+          <p:cNvCxnSpPr/>
+          <p:nvPr/>
+        </p:nvCxnSpPr>
+        <p:spPr>
+          <a:xfrm>
+            <a:off x="6310312" y="1000124"/>
+            <a:ext cx="0" cy="230188"/>
+          </a:xfrm>
+          <a:prstGeom prst="line">
+            <a:avLst/>
+          </a:prstGeom>
+          <a:ln w="18216">
+            <a:solidFill>
+              <a:srgbClr val="111A24"/>
+            </a:solidFill>
+          </a:ln>
+          <a:effectLst/>
+        </p:spPr>
+        <p:style>
+          <a:lnRef idx="2">
+            <a:schemeClr val="accent1"/>
+          </a:lnRef>
+          <a:fillRef idx="0">
+            <a:schemeClr val="accent1"/>
+          </a:fillRef>
+          <a:effectRef idx="0">
+            <a:schemeClr val="accent1"/>
+          </a:effectRef>
+          <a:fontRef idx="minor">
+            <a:schemeClr val="tx1"/>
+          </a:fontRef>
+        </p:style>
+      </p:cxnSp>
+      <p:sp>
+        <p:nvSpPr>
+          <p:cNvPr id="69" name="led_t" descr="Editable text; source id led_t"/>
           <p:cNvSpPr txBox="1"/>
           <p:nvPr/>
         </p:nvSpPr>
         <p:spPr>
           <a:xfrm>
-            <a:off x="301624" y="1095374"/>
-            <a:ext cx="380999" cy="269874"/>
+            <a:off x="4937124" y="1349374"/>
+            <a:ext cx="2651124" cy="420687"/>
           </a:xfrm>
           <a:prstGeom prst="rect">
             <a:avLst/>
@@ -6078,7 +6490,7 @@
           <a:p>
             <a:pPr algn="ctr" fontAlgn="base">
               <a:lnSpc>
-                <a:spcPts val="1640"/>
+                <a:spcPts val="2812"/>
               </a:lnSpc>
               <a:spcBef>
                 <a:spcPts val="0"/>
@@ -6086,7 +6498,227 @@
               <a:spcAft>
                 <a:spcPts val="0"/>
               </a:spcAft>
-              <a:defRPr sz="1124" b="1" i="0" lang="zh-CN" dirty="0">
+              <a:defRPr sz="1937" b="1" i="0" lang="zh-CN" dirty="0">
+                <a:solidFill>
+                  <a:srgbClr val="0F4F58"/>
+                </a:solidFill>
+                <a:latin typeface="Noto Sans CJK SC"/>
+                <a:ea typeface="Noto Sans CJK SC"/>
+                <a:cs typeface="Noto Sans CJK SC"/>
+              </a:defRPr>
+            </a:pPr>
+            <a:r>
+              <a:rPr sz="1937" b="1" i="0" lang="zh-CN" dirty="0">
+                <a:solidFill>
+                  <a:srgbClr val="0F4F58"/>
+                </a:solidFill>
+                <a:latin typeface="Noto Sans CJK SC"/>
+                <a:ea typeface="Noto Sans CJK SC"/>
+                <a:cs typeface="Noto Sans CJK SC"/>
+              </a:rPr>
+              <a:t>相同实验项目下比较</a:t>
+            </a:r>
+          </a:p>
+        </p:txBody>
+      </p:sp>
+      <p:sp>
+        <p:nvSpPr>
+          <p:cNvPr id="70" name="ledr_r0" descr="Editable shape; source id ledr_r0"/>
+          <p:cNvSpPr/>
+          <p:nvPr/>
+        </p:nvSpPr>
+        <p:spPr>
+          <a:xfrm>
+            <a:off x="4937124" y="1865312"/>
+            <a:ext cx="2651124" cy="428624"/>
+          </a:xfrm>
+          <a:prstGeom prst="roundRect">
+            <a:avLst>
+              <a:gd name="adj" fmla="val 11111"/>
+            </a:avLst>
+          </a:prstGeom>
+          <a:solidFill>
+            <a:srgbClr val="F4F7FA"/>
+          </a:solidFill>
+          <a:ln w="12699">
+            <a:solidFill>
+              <a:srgbClr val="AEBBC7"/>
+            </a:solidFill>
+          </a:ln>
+          <a:effectLst/>
+        </p:spPr>
+        <p:style>
+          <a:lnRef idx="1">
+            <a:schemeClr val="accent1"/>
+          </a:lnRef>
+          <a:fillRef idx="3">
+            <a:schemeClr val="accent1"/>
+          </a:fillRef>
+          <a:effectRef idx="0">
+            <a:schemeClr val="accent1"/>
+          </a:effectRef>
+          <a:fontRef idx="minor">
+            <a:schemeClr val="lt1"/>
+          </a:fontRef>
+        </p:style>
+        <p:txBody>
+          <a:bodyPr rtlCol="0" anchor="ctr"/>
+          <a:lstStyle/>
+          <a:p>
+            <a:pPr algn="ctr"/>
+          </a:p>
+        </p:txBody>
+      </p:sp>
+      <p:sp>
+        <p:nvSpPr>
+          <p:cNvPr id="71" name="ledr_c0_b" descr="Editable shape; source id ledr_c0_b"/>
+          <p:cNvSpPr/>
+          <p:nvPr/>
+        </p:nvSpPr>
+        <p:spPr>
+          <a:xfrm>
+            <a:off x="5048249" y="2008187"/>
+            <a:ext cx="142874" cy="142874"/>
+          </a:xfrm>
+          <a:prstGeom prst="rect">
+            <a:avLst/>
+          </a:prstGeom>
+          <a:noFill/>
+          <a:ln w="18216">
+            <a:solidFill>
+              <a:srgbClr val="111A24"/>
+            </a:solidFill>
+          </a:ln>
+          <a:effectLst/>
+        </p:spPr>
+        <p:style>
+          <a:lnRef idx="1">
+            <a:schemeClr val="accent1"/>
+          </a:lnRef>
+          <a:fillRef idx="3">
+            <a:schemeClr val="accent1"/>
+          </a:fillRef>
+          <a:effectRef idx="0">
+            <a:schemeClr val="accent1"/>
+          </a:effectRef>
+          <a:fontRef idx="minor">
+            <a:schemeClr val="lt1"/>
+          </a:fontRef>
+        </p:style>
+        <p:txBody>
+          <a:bodyPr rtlCol="0" anchor="ctr"/>
+          <a:lstStyle/>
+          <a:p>
+            <a:pPr algn="ctr"/>
+          </a:p>
+        </p:txBody>
+      </p:sp>
+      <p:cxnSp>
+        <p:nvCxnSpPr>
+          <p:cNvPr id="72" name="ledr_c0_k_0" descr="Editable line; source id ledr_c0_k_0"/>
+          <p:cNvCxnSpPr/>
+          <p:nvPr/>
+        </p:nvCxnSpPr>
+        <p:spPr>
+          <a:xfrm>
+            <a:off x="5079999" y="2079624"/>
+            <a:ext cx="31750" cy="31750"/>
+          </a:xfrm>
+          <a:prstGeom prst="line">
+            <a:avLst/>
+          </a:prstGeom>
+          <a:ln w="23681">
+            <a:solidFill>
+              <a:srgbClr val="111A24"/>
+            </a:solidFill>
+          </a:ln>
+          <a:effectLst/>
+        </p:spPr>
+        <p:style>
+          <a:lnRef idx="2">
+            <a:schemeClr val="accent1"/>
+          </a:lnRef>
+          <a:fillRef idx="0">
+            <a:schemeClr val="accent1"/>
+          </a:fillRef>
+          <a:effectRef idx="0">
+            <a:schemeClr val="accent1"/>
+          </a:effectRef>
+          <a:fontRef idx="minor">
+            <a:schemeClr val="tx1"/>
+          </a:fontRef>
+        </p:style>
+      </p:cxnSp>
+      <p:cxnSp>
+        <p:nvCxnSpPr>
+          <p:cNvPr id="73" name="ledr_c0_k_1" descr="Editable line; source id ledr_c0_k_1"/>
+          <p:cNvCxnSpPr/>
+          <p:nvPr/>
+        </p:nvCxnSpPr>
+        <p:spPr>
+          <a:xfrm flipV="1">
+            <a:off x="5111749" y="2047874"/>
+            <a:ext cx="55563" cy="63500"/>
+          </a:xfrm>
+          <a:prstGeom prst="line">
+            <a:avLst/>
+          </a:prstGeom>
+          <a:ln w="23681">
+            <a:solidFill>
+              <a:srgbClr val="111A24"/>
+            </a:solidFill>
+          </a:ln>
+          <a:effectLst/>
+        </p:spPr>
+        <p:style>
+          <a:lnRef idx="2">
+            <a:schemeClr val="accent1"/>
+          </a:lnRef>
+          <a:fillRef idx="0">
+            <a:schemeClr val="accent1"/>
+          </a:fillRef>
+          <a:effectRef idx="0">
+            <a:schemeClr val="accent1"/>
+          </a:effectRef>
+          <a:fontRef idx="minor">
+            <a:schemeClr val="tx1"/>
+          </a:fontRef>
+        </p:style>
+      </p:cxnSp>
+      <p:sp>
+        <p:nvSpPr>
+          <p:cNvPr id="74" name="ledr_x0" descr="Editable text; source id ledr_x0"/>
+          <p:cNvSpPr txBox="1"/>
+          <p:nvPr/>
+        </p:nvSpPr>
+        <p:spPr>
+          <a:xfrm>
+            <a:off x="5302249" y="1889124"/>
+            <a:ext cx="2158999" cy="388937"/>
+          </a:xfrm>
+          <a:prstGeom prst="rect">
+            <a:avLst/>
+          </a:prstGeom>
+          <a:noFill/>
+          <a:effectLst/>
+        </p:spPr>
+        <p:txBody>
+          <a:bodyPr wrap="none" anchor="ctr" tIns="0" rIns="0" bIns="0" lIns="0" anchorCtr="0" vertOverflow="overflow">
+            <a:noAutofit/>
+          </a:bodyPr>
+          <a:lstStyle/>
+          <a:p>
+            <a:pPr algn="l" fontAlgn="base">
+              <a:lnSpc>
+                <a:spcPts val="2546"/>
+              </a:lnSpc>
+              <a:spcBef>
+                <a:spcPts val="0"/>
+              </a:spcBef>
+              <a:spcAft>
+                <a:spcPts val="0"/>
+              </a:spcAft>
+              <a:defRPr sz="1749" b="0" i="0" lang="zh-CN" dirty="0">
                 <a:solidFill>
                   <a:srgbClr val="27303A"/>
                 </a:solidFill>
@@ -6096,7 +6728,7 @@
               </a:defRPr>
             </a:pPr>
             <a:r>
-              <a:rPr sz="1124" b="1" i="0" lang="zh-CN" dirty="0">
+              <a:rPr sz="1749" b="0" i="0" lang="zh-CN" dirty="0">
                 <a:solidFill>
                   <a:srgbClr val="27303A"/>
                 </a:solidFill>
@@ -6104,21 +6736,185 @@
                 <a:ea typeface="Noto Sans CJK SC"/>
                 <a:cs typeface="Noto Sans CJK SC"/>
               </a:rPr>
-              <a:t>近</a:t>
+              <a:t>原料与配比</a:t>
             </a:r>
           </a:p>
         </p:txBody>
       </p:sp>
       <p:sp>
         <p:nvSpPr>
-          <p:cNvPr id="60" name="ax_f" descr="Editable text; source id ax_f"/>
+          <p:cNvPr id="75" name="ledr_r1" descr="Editable shape; source id ledr_r1"/>
+          <p:cNvSpPr/>
+          <p:nvPr/>
+        </p:nvSpPr>
+        <p:spPr>
+          <a:xfrm>
+            <a:off x="4937124" y="2341562"/>
+            <a:ext cx="2651124" cy="428624"/>
+          </a:xfrm>
+          <a:prstGeom prst="roundRect">
+            <a:avLst>
+              <a:gd name="adj" fmla="val 11111"/>
+            </a:avLst>
+          </a:prstGeom>
+          <a:solidFill>
+            <a:srgbClr val="F4F7FA"/>
+          </a:solidFill>
+          <a:ln w="12699">
+            <a:solidFill>
+              <a:srgbClr val="AEBBC7"/>
+            </a:solidFill>
+          </a:ln>
+          <a:effectLst/>
+        </p:spPr>
+        <p:style>
+          <a:lnRef idx="1">
+            <a:schemeClr val="accent1"/>
+          </a:lnRef>
+          <a:fillRef idx="3">
+            <a:schemeClr val="accent1"/>
+          </a:fillRef>
+          <a:effectRef idx="0">
+            <a:schemeClr val="accent1"/>
+          </a:effectRef>
+          <a:fontRef idx="minor">
+            <a:schemeClr val="lt1"/>
+          </a:fontRef>
+        </p:style>
+        <p:txBody>
+          <a:bodyPr rtlCol="0" anchor="ctr"/>
+          <a:lstStyle/>
+          <a:p>
+            <a:pPr algn="ctr"/>
+          </a:p>
+        </p:txBody>
+      </p:sp>
+      <p:sp>
+        <p:nvSpPr>
+          <p:cNvPr id="76" name="ledr_c1_b" descr="Editable shape; source id ledr_c1_b"/>
+          <p:cNvSpPr/>
+          <p:nvPr/>
+        </p:nvSpPr>
+        <p:spPr>
+          <a:xfrm>
+            <a:off x="5048249" y="2484437"/>
+            <a:ext cx="142874" cy="142874"/>
+          </a:xfrm>
+          <a:prstGeom prst="rect">
+            <a:avLst/>
+          </a:prstGeom>
+          <a:noFill/>
+          <a:ln w="18216">
+            <a:solidFill>
+              <a:srgbClr val="111A24"/>
+            </a:solidFill>
+          </a:ln>
+          <a:effectLst/>
+        </p:spPr>
+        <p:style>
+          <a:lnRef idx="1">
+            <a:schemeClr val="accent1"/>
+          </a:lnRef>
+          <a:fillRef idx="3">
+            <a:schemeClr val="accent1"/>
+          </a:fillRef>
+          <a:effectRef idx="0">
+            <a:schemeClr val="accent1"/>
+          </a:effectRef>
+          <a:fontRef idx="minor">
+            <a:schemeClr val="lt1"/>
+          </a:fontRef>
+        </p:style>
+        <p:txBody>
+          <a:bodyPr rtlCol="0" anchor="ctr"/>
+          <a:lstStyle/>
+          <a:p>
+            <a:pPr algn="ctr"/>
+          </a:p>
+        </p:txBody>
+      </p:sp>
+      <p:cxnSp>
+        <p:nvCxnSpPr>
+          <p:cNvPr id="77" name="ledr_c1_k_0" descr="Editable line; source id ledr_c1_k_0"/>
+          <p:cNvCxnSpPr/>
+          <p:nvPr/>
+        </p:nvCxnSpPr>
+        <p:spPr>
+          <a:xfrm>
+            <a:off x="5079999" y="2555874"/>
+            <a:ext cx="31750" cy="31750"/>
+          </a:xfrm>
+          <a:prstGeom prst="line">
+            <a:avLst/>
+          </a:prstGeom>
+          <a:ln w="23681">
+            <a:solidFill>
+              <a:srgbClr val="111A24"/>
+            </a:solidFill>
+          </a:ln>
+          <a:effectLst/>
+        </p:spPr>
+        <p:style>
+          <a:lnRef idx="2">
+            <a:schemeClr val="accent1"/>
+          </a:lnRef>
+          <a:fillRef idx="0">
+            <a:schemeClr val="accent1"/>
+          </a:fillRef>
+          <a:effectRef idx="0">
+            <a:schemeClr val="accent1"/>
+          </a:effectRef>
+          <a:fontRef idx="minor">
+            <a:schemeClr val="tx1"/>
+          </a:fontRef>
+        </p:style>
+      </p:cxnSp>
+      <p:cxnSp>
+        <p:nvCxnSpPr>
+          <p:cNvPr id="78" name="ledr_c1_k_1" descr="Editable line; source id ledr_c1_k_1"/>
+          <p:cNvCxnSpPr/>
+          <p:nvPr/>
+        </p:nvCxnSpPr>
+        <p:spPr>
+          <a:xfrm flipV="1">
+            <a:off x="5111749" y="2524124"/>
+            <a:ext cx="55563" cy="63500"/>
+          </a:xfrm>
+          <a:prstGeom prst="line">
+            <a:avLst/>
+          </a:prstGeom>
+          <a:ln w="23681">
+            <a:solidFill>
+              <a:srgbClr val="111A24"/>
+            </a:solidFill>
+          </a:ln>
+          <a:effectLst/>
+        </p:spPr>
+        <p:style>
+          <a:lnRef idx="2">
+            <a:schemeClr val="accent1"/>
+          </a:lnRef>
+          <a:fillRef idx="0">
+            <a:schemeClr val="accent1"/>
+          </a:fillRef>
+          <a:effectRef idx="0">
+            <a:schemeClr val="accent1"/>
+          </a:effectRef>
+          <a:fontRef idx="minor">
+            <a:schemeClr val="tx1"/>
+          </a:fontRef>
+        </p:style>
+      </p:cxnSp>
+      <p:sp>
+        <p:nvSpPr>
+          <p:cNvPr id="79" name="ledr_x1" descr="Editable text; source id ledr_x1"/>
           <p:cNvSpPr txBox="1"/>
           <p:nvPr/>
         </p:nvSpPr>
         <p:spPr>
           <a:xfrm>
-            <a:off x="301624" y="6254749"/>
-            <a:ext cx="380999" cy="269874"/>
+            <a:off x="5302249" y="2365374"/>
+            <a:ext cx="2158999" cy="388937"/>
           </a:xfrm>
           <a:prstGeom prst="rect">
             <a:avLst/>
@@ -6132,9 +6928,9 @@
           </a:bodyPr>
           <a:lstStyle/>
           <a:p>
-            <a:pPr algn="ctr" fontAlgn="base">
+            <a:pPr algn="l" fontAlgn="base">
               <a:lnSpc>
-                <a:spcPts val="1640"/>
+                <a:spcPts val="2546"/>
               </a:lnSpc>
               <a:spcBef>
                 <a:spcPts val="0"/>
@@ -6142,7 +6938,7 @@
               <a:spcAft>
                 <a:spcPts val="0"/>
               </a:spcAft>
-              <a:defRPr sz="1124" b="1" i="0" lang="zh-CN" dirty="0">
+              <a:defRPr sz="1749" b="0" i="0" lang="zh-CN" dirty="0">
                 <a:solidFill>
                   <a:srgbClr val="27303A"/>
                 </a:solidFill>
@@ -6152,7 +6948,7 @@
               </a:defRPr>
             </a:pPr>
             <a:r>
-              <a:rPr sz="1124" b="1" i="0" lang="zh-CN" dirty="0">
+              <a:rPr sz="1749" b="0" i="0" lang="zh-CN" dirty="0">
                 <a:solidFill>
                   <a:srgbClr val="27303A"/>
                 </a:solidFill>
@@ -6160,21 +6956,185 @@
                 <a:ea typeface="Noto Sans CJK SC"/>
                 <a:cs typeface="Noto Sans CJK SC"/>
               </a:rPr>
-              <a:t>远</a:t>
+              <a:t>热历史</a:t>
             </a:r>
           </a:p>
         </p:txBody>
       </p:sp>
       <p:sp>
         <p:nvSpPr>
-          <p:cNvPr id="61" name="ax_l" descr="Editable text; source id ax_l"/>
+          <p:cNvPr id="80" name="ledr_r2" descr="Editable shape; source id ledr_r2"/>
+          <p:cNvSpPr/>
+          <p:nvPr/>
+        </p:nvSpPr>
+        <p:spPr>
+          <a:xfrm>
+            <a:off x="4937124" y="2817812"/>
+            <a:ext cx="2651124" cy="428624"/>
+          </a:xfrm>
+          <a:prstGeom prst="roundRect">
+            <a:avLst>
+              <a:gd name="adj" fmla="val 11111"/>
+            </a:avLst>
+          </a:prstGeom>
+          <a:solidFill>
+            <a:srgbClr val="F4F7FA"/>
+          </a:solidFill>
+          <a:ln w="12699">
+            <a:solidFill>
+              <a:srgbClr val="AEBBC7"/>
+            </a:solidFill>
+          </a:ln>
+          <a:effectLst/>
+        </p:spPr>
+        <p:style>
+          <a:lnRef idx="1">
+            <a:schemeClr val="accent1"/>
+          </a:lnRef>
+          <a:fillRef idx="3">
+            <a:schemeClr val="accent1"/>
+          </a:fillRef>
+          <a:effectRef idx="0">
+            <a:schemeClr val="accent1"/>
+          </a:effectRef>
+          <a:fontRef idx="minor">
+            <a:schemeClr val="lt1"/>
+          </a:fontRef>
+        </p:style>
+        <p:txBody>
+          <a:bodyPr rtlCol="0" anchor="ctr"/>
+          <a:lstStyle/>
+          <a:p>
+            <a:pPr algn="ctr"/>
+          </a:p>
+        </p:txBody>
+      </p:sp>
+      <p:sp>
+        <p:nvSpPr>
+          <p:cNvPr id="81" name="ledr_c2_b" descr="Editable shape; source id ledr_c2_b"/>
+          <p:cNvSpPr/>
+          <p:nvPr/>
+        </p:nvSpPr>
+        <p:spPr>
+          <a:xfrm>
+            <a:off x="5048249" y="2960687"/>
+            <a:ext cx="142874" cy="142874"/>
+          </a:xfrm>
+          <a:prstGeom prst="rect">
+            <a:avLst/>
+          </a:prstGeom>
+          <a:noFill/>
+          <a:ln w="18216">
+            <a:solidFill>
+              <a:srgbClr val="111A24"/>
+            </a:solidFill>
+          </a:ln>
+          <a:effectLst/>
+        </p:spPr>
+        <p:style>
+          <a:lnRef idx="1">
+            <a:schemeClr val="accent1"/>
+          </a:lnRef>
+          <a:fillRef idx="3">
+            <a:schemeClr val="accent1"/>
+          </a:fillRef>
+          <a:effectRef idx="0">
+            <a:schemeClr val="accent1"/>
+          </a:effectRef>
+          <a:fontRef idx="minor">
+            <a:schemeClr val="lt1"/>
+          </a:fontRef>
+        </p:style>
+        <p:txBody>
+          <a:bodyPr rtlCol="0" anchor="ctr"/>
+          <a:lstStyle/>
+          <a:p>
+            <a:pPr algn="ctr"/>
+          </a:p>
+        </p:txBody>
+      </p:sp>
+      <p:cxnSp>
+        <p:nvCxnSpPr>
+          <p:cNvPr id="82" name="ledr_c2_k_0" descr="Editable line; source id ledr_c2_k_0"/>
+          <p:cNvCxnSpPr/>
+          <p:nvPr/>
+        </p:nvCxnSpPr>
+        <p:spPr>
+          <a:xfrm>
+            <a:off x="5079999" y="3032124"/>
+            <a:ext cx="31750" cy="31750"/>
+          </a:xfrm>
+          <a:prstGeom prst="line">
+            <a:avLst/>
+          </a:prstGeom>
+          <a:ln w="23681">
+            <a:solidFill>
+              <a:srgbClr val="111A24"/>
+            </a:solidFill>
+          </a:ln>
+          <a:effectLst/>
+        </p:spPr>
+        <p:style>
+          <a:lnRef idx="2">
+            <a:schemeClr val="accent1"/>
+          </a:lnRef>
+          <a:fillRef idx="0">
+            <a:schemeClr val="accent1"/>
+          </a:fillRef>
+          <a:effectRef idx="0">
+            <a:schemeClr val="accent1"/>
+          </a:effectRef>
+          <a:fontRef idx="minor">
+            <a:schemeClr val="tx1"/>
+          </a:fontRef>
+        </p:style>
+      </p:cxnSp>
+      <p:cxnSp>
+        <p:nvCxnSpPr>
+          <p:cNvPr id="83" name="ledr_c2_k_1" descr="Editable line; source id ledr_c2_k_1"/>
+          <p:cNvCxnSpPr/>
+          <p:nvPr/>
+        </p:nvCxnSpPr>
+        <p:spPr>
+          <a:xfrm flipV="1">
+            <a:off x="5111749" y="3000374"/>
+            <a:ext cx="55563" cy="63500"/>
+          </a:xfrm>
+          <a:prstGeom prst="line">
+            <a:avLst/>
+          </a:prstGeom>
+          <a:ln w="23681">
+            <a:solidFill>
+              <a:srgbClr val="111A24"/>
+            </a:solidFill>
+          </a:ln>
+          <a:effectLst/>
+        </p:spPr>
+        <p:style>
+          <a:lnRef idx="2">
+            <a:schemeClr val="accent1"/>
+          </a:lnRef>
+          <a:fillRef idx="0">
+            <a:schemeClr val="accent1"/>
+          </a:fillRef>
+          <a:effectRef idx="0">
+            <a:schemeClr val="accent1"/>
+          </a:effectRef>
+          <a:fontRef idx="minor">
+            <a:schemeClr val="tx1"/>
+          </a:fontRef>
+        </p:style>
+      </p:cxnSp>
+      <p:sp>
+        <p:nvSpPr>
+          <p:cNvPr id="84" name="ledr_x2" descr="Editable text; source id ledr_x2"/>
           <p:cNvSpPr txBox="1"/>
           <p:nvPr/>
         </p:nvSpPr>
         <p:spPr>
-          <a:xfrm rot="16200000">
-            <a:off x="-261937" y="3698874"/>
-            <a:ext cx="1190624" cy="246062"/>
+          <a:xfrm>
+            <a:off x="5302249" y="2841624"/>
+            <a:ext cx="2158999" cy="388937"/>
           </a:xfrm>
           <a:prstGeom prst="rect">
             <a:avLst/>
@@ -6188,9 +7148,9 @@
           </a:bodyPr>
           <a:lstStyle/>
           <a:p>
-            <a:pPr algn="ctr" fontAlgn="base">
+            <a:pPr algn="l" fontAlgn="base">
               <a:lnSpc>
-                <a:spcPts val="1640"/>
+                <a:spcPts val="2546"/>
               </a:lnSpc>
               <a:spcBef>
                 <a:spcPts val="0"/>
@@ -6198,7 +7158,7 @@
               <a:spcAft>
                 <a:spcPts val="0"/>
               </a:spcAft>
-              <a:defRPr sz="1124" b="1" i="0" lang="zh-CN" dirty="0">
+              <a:defRPr sz="1749" b="0" i="0" lang="zh-CN" dirty="0">
                 <a:solidFill>
                   <a:srgbClr val="27303A"/>
                 </a:solidFill>
@@ -6208,7 +7168,7 @@
               </a:defRPr>
             </a:pPr>
             <a:r>
-              <a:rPr sz="1124" b="1" i="0" lang="zh-CN" dirty="0">
+              <a:rPr sz="1749" b="0" i="0" lang="zh-CN" dirty="0">
                 <a:solidFill>
                   <a:srgbClr val="27303A"/>
                 </a:solidFill>
@@ -6216,33 +7176,33 @@
                 <a:ea typeface="Noto Sans CJK SC"/>
                 <a:cs typeface="Noto Sans CJK SC"/>
               </a:rPr>
-              <a:t>与目标相的距离</a:t>
+              <a:t>气氛</a:t>
             </a:r>
           </a:p>
         </p:txBody>
       </p:sp>
       <p:sp>
         <p:nvSpPr>
-          <p:cNvPr id="62" name="led" descr="Editable shape; source id led"/>
+          <p:cNvPr id="85" name="ledr_r3" descr="Editable shape; source id ledr_r3"/>
           <p:cNvSpPr/>
           <p:nvPr/>
         </p:nvSpPr>
         <p:spPr>
           <a:xfrm>
-            <a:off x="4921249" y="1190624"/>
-            <a:ext cx="3032124" cy="4286249"/>
+            <a:off x="4937124" y="3294062"/>
+            <a:ext cx="2651124" cy="428624"/>
           </a:xfrm>
           <a:prstGeom prst="roundRect">
             <a:avLst>
-              <a:gd name="adj" fmla="val 2356"/>
+              <a:gd name="adj" fmla="val 11111"/>
             </a:avLst>
           </a:prstGeom>
           <a:solidFill>
-            <a:srgbClr val="FFFFFF"/>
+            <a:srgbClr val="F4F7FA"/>
           </a:solidFill>
-          <a:ln w="15081">
+          <a:ln w="12699">
             <a:solidFill>
-              <a:srgbClr val="1F7F8C"/>
+              <a:srgbClr val="AEBBC7"/>
             </a:solidFill>
           </a:ln>
           <a:effectLst/>
@@ -6271,60 +7231,14 @@
       </p:sp>
       <p:sp>
         <p:nvSpPr>
-          <p:cNvPr id="63" name="led_b" descr="Editable shape; source id led_b"/>
+          <p:cNvPr id="86" name="ledr_c3_b" descr="Editable shape; source id ledr_c3_b"/>
           <p:cNvSpPr/>
           <p:nvPr/>
         </p:nvSpPr>
         <p:spPr>
           <a:xfrm>
-            <a:off x="4921249" y="1190624"/>
-            <a:ext cx="87312" cy="4286249"/>
-          </a:xfrm>
-          <a:prstGeom prst="roundRect">
-            <a:avLst>
-              <a:gd name="adj" fmla="val 27272"/>
-            </a:avLst>
-          </a:prstGeom>
-          <a:solidFill>
-            <a:srgbClr val="1F7F8C"/>
-          </a:solidFill>
-          <a:ln>
-            <a:noFill/>
-          </a:ln>
-          <a:effectLst/>
-        </p:spPr>
-        <p:style>
-          <a:lnRef idx="1">
-            <a:schemeClr val="accent1"/>
-          </a:lnRef>
-          <a:fillRef idx="3">
-            <a:schemeClr val="accent1"/>
-          </a:fillRef>
-          <a:effectRef idx="0">
-            <a:schemeClr val="accent1"/>
-          </a:effectRef>
-          <a:fontRef idx="minor">
-            <a:schemeClr val="lt1"/>
-          </a:fontRef>
-        </p:style>
-        <p:txBody>
-          <a:bodyPr rtlCol="0" anchor="ctr"/>
-          <a:lstStyle/>
-          <a:p>
-            <a:pPr algn="ctr"/>
-          </a:p>
-        </p:txBody>
-      </p:sp>
-      <p:sp>
-        <p:nvSpPr>
-          <p:cNvPr id="64" name="led_g_b" descr="Editable shape; source id led_g_b"/>
-          <p:cNvSpPr/>
-          <p:nvPr/>
-        </p:nvSpPr>
-        <p:spPr>
-          <a:xfrm>
-            <a:off x="5183187" y="1476374"/>
-            <a:ext cx="261937" cy="230187"/>
+            <a:off x="5048249" y="3436937"/>
+            <a:ext cx="142874" cy="142874"/>
           </a:xfrm>
           <a:prstGeom prst="rect">
             <a:avLst/>
@@ -6361,19 +7275,19 @@
       </p:sp>
       <p:cxnSp>
         <p:nvCxnSpPr>
-          <p:cNvPr id="65" name="led_g_r1" descr="Editable line; source id led_g_r1"/>
+          <p:cNvPr id="87" name="ledr_c3_k_0" descr="Editable line; source id ledr_c3_k_0"/>
           <p:cNvCxnSpPr/>
           <p:nvPr/>
         </p:nvCxnSpPr>
         <p:spPr>
           <a:xfrm>
-            <a:off x="5183187" y="1555749"/>
-            <a:ext cx="269875" cy="0"/>
+            <a:off x="5079999" y="3508374"/>
+            <a:ext cx="31750" cy="31750"/>
           </a:xfrm>
           <a:prstGeom prst="line">
             <a:avLst/>
           </a:prstGeom>
-          <a:ln w="18216">
+          <a:ln w="23681">
             <a:solidFill>
               <a:srgbClr val="111A24"/>
             </a:solidFill>
@@ -6397,19 +7311,19 @@
       </p:cxnSp>
       <p:cxnSp>
         <p:nvCxnSpPr>
-          <p:cNvPr id="66" name="led_g_r2" descr="Editable line; source id led_g_r2"/>
+          <p:cNvPr id="88" name="ledr_c3_k_1" descr="Editable line; source id ledr_c3_k_1"/>
           <p:cNvCxnSpPr/>
           <p:nvPr/>
         </p:nvCxnSpPr>
         <p:spPr>
-          <a:xfrm>
-            <a:off x="5183187" y="1627187"/>
-            <a:ext cx="269875" cy="0"/>
+          <a:xfrm flipV="1">
+            <a:off x="5111749" y="3476624"/>
+            <a:ext cx="55563" cy="63500"/>
           </a:xfrm>
           <a:prstGeom prst="line">
             <a:avLst/>
           </a:prstGeom>
-          <a:ln w="18216">
+          <a:ln w="23681">
             <a:solidFill>
               <a:srgbClr val="111A24"/>
             </a:solidFill>
@@ -6431,88 +7345,16 @@
           </a:fontRef>
         </p:style>
       </p:cxnSp>
-      <p:cxnSp>
-        <p:nvCxnSpPr>
-          <p:cNvPr id="67" name="led_g_c1" descr="Editable line; source id led_g_c1"/>
-          <p:cNvCxnSpPr/>
-          <p:nvPr/>
-        </p:nvCxnSpPr>
-        <p:spPr>
-          <a:xfrm>
-            <a:off x="5270499" y="1476374"/>
-            <a:ext cx="0" cy="230188"/>
-          </a:xfrm>
-          <a:prstGeom prst="line">
-            <a:avLst/>
-          </a:prstGeom>
-          <a:ln w="18216">
-            <a:solidFill>
-              <a:srgbClr val="111A24"/>
-            </a:solidFill>
-          </a:ln>
-          <a:effectLst/>
-        </p:spPr>
-        <p:style>
-          <a:lnRef idx="2">
-            <a:schemeClr val="accent1"/>
-          </a:lnRef>
-          <a:fillRef idx="0">
-            <a:schemeClr val="accent1"/>
-          </a:fillRef>
-          <a:effectRef idx="0">
-            <a:schemeClr val="accent1"/>
-          </a:effectRef>
-          <a:fontRef idx="minor">
-            <a:schemeClr val="tx1"/>
-          </a:fontRef>
-        </p:style>
-      </p:cxnSp>
-      <p:cxnSp>
-        <p:nvCxnSpPr>
-          <p:cNvPr id="68" name="led_g_c2" descr="Editable line; source id led_g_c2"/>
-          <p:cNvCxnSpPr/>
-          <p:nvPr/>
-        </p:nvCxnSpPr>
-        <p:spPr>
-          <a:xfrm>
-            <a:off x="5365749" y="1476374"/>
-            <a:ext cx="0" cy="230188"/>
-          </a:xfrm>
-          <a:prstGeom prst="line">
-            <a:avLst/>
-          </a:prstGeom>
-          <a:ln w="18216">
-            <a:solidFill>
-              <a:srgbClr val="111A24"/>
-            </a:solidFill>
-          </a:ln>
-          <a:effectLst/>
-        </p:spPr>
-        <p:style>
-          <a:lnRef idx="2">
-            <a:schemeClr val="accent1"/>
-          </a:lnRef>
-          <a:fillRef idx="0">
-            <a:schemeClr val="accent1"/>
-          </a:fillRef>
-          <a:effectRef idx="0">
-            <a:schemeClr val="accent1"/>
-          </a:effectRef>
-          <a:fontRef idx="minor">
-            <a:schemeClr val="tx1"/>
-          </a:fontRef>
-        </p:style>
-      </p:cxnSp>
-      <p:sp>
-        <p:nvSpPr>
-          <p:cNvPr id="69" name="led_t" descr="Editable text; source id led_t"/>
+      <p:sp>
+        <p:nvSpPr>
+          <p:cNvPr id="89" name="ledr_x3" descr="Editable text; source id ledr_x3"/>
           <p:cNvSpPr txBox="1"/>
           <p:nvPr/>
         </p:nvSpPr>
         <p:spPr>
           <a:xfrm>
-            <a:off x="5587999" y="1412874"/>
-            <a:ext cx="2238374" cy="349249"/>
+            <a:off x="5302249" y="3317874"/>
+            <a:ext cx="2158999" cy="388937"/>
           </a:xfrm>
           <a:prstGeom prst="rect">
             <a:avLst/>
@@ -6528,7 +7370,7 @@
           <a:p>
             <a:pPr algn="l" fontAlgn="base">
               <a:lnSpc>
-                <a:spcPts val="2265"/>
+                <a:spcPts val="2546"/>
               </a:lnSpc>
               <a:spcBef>
                 <a:spcPts val="0"/>
@@ -6536,227 +7378,7 @@
               <a:spcAft>
                 <a:spcPts val="0"/>
               </a:spcAft>
-              <a:defRPr sz="1562" b="1" i="0" lang="zh-CN" dirty="0">
-                <a:solidFill>
-                  <a:srgbClr val="0F4F58"/>
-                </a:solidFill>
-                <a:latin typeface="Noto Sans CJK SC"/>
-                <a:ea typeface="Noto Sans CJK SC"/>
-                <a:cs typeface="Noto Sans CJK SC"/>
-              </a:defRPr>
-            </a:pPr>
-            <a:r>
-              <a:rPr sz="1562" b="1" i="0" lang="zh-CN" dirty="0">
-                <a:solidFill>
-                  <a:srgbClr val="0F4F58"/>
-                </a:solidFill>
-                <a:latin typeface="Noto Sans CJK SC"/>
-                <a:ea typeface="Noto Sans CJK SC"/>
-                <a:cs typeface="Noto Sans CJK SC"/>
-              </a:rPr>
-              <a:t>相同实验项目下比较</a:t>
-            </a:r>
-          </a:p>
-        </p:txBody>
-      </p:sp>
-      <p:sp>
-        <p:nvSpPr>
-          <p:cNvPr id="70" name="ledr_r0" descr="Editable shape; source id ledr_r0"/>
-          <p:cNvSpPr/>
-          <p:nvPr/>
-        </p:nvSpPr>
-        <p:spPr>
-          <a:xfrm>
-            <a:off x="5143499" y="1968499"/>
-            <a:ext cx="2619374" cy="484187"/>
-          </a:xfrm>
-          <a:prstGeom prst="roundRect">
-            <a:avLst>
-              <a:gd name="adj" fmla="val 9836"/>
-            </a:avLst>
-          </a:prstGeom>
-          <a:solidFill>
-            <a:srgbClr val="F4F7FA"/>
-          </a:solidFill>
-          <a:ln w="12699">
-            <a:solidFill>
-              <a:srgbClr val="AEBBC7"/>
-            </a:solidFill>
-          </a:ln>
-          <a:effectLst/>
-        </p:spPr>
-        <p:style>
-          <a:lnRef idx="1">
-            <a:schemeClr val="accent1"/>
-          </a:lnRef>
-          <a:fillRef idx="3">
-            <a:schemeClr val="accent1"/>
-          </a:fillRef>
-          <a:effectRef idx="0">
-            <a:schemeClr val="accent1"/>
-          </a:effectRef>
-          <a:fontRef idx="minor">
-            <a:schemeClr val="lt1"/>
-          </a:fontRef>
-        </p:style>
-        <p:txBody>
-          <a:bodyPr rtlCol="0" anchor="ctr"/>
-          <a:lstStyle/>
-          <a:p>
-            <a:pPr algn="ctr"/>
-          </a:p>
-        </p:txBody>
-      </p:sp>
-      <p:sp>
-        <p:nvSpPr>
-          <p:cNvPr id="71" name="ledr_c0_b" descr="Editable shape; source id ledr_c0_b"/>
-          <p:cNvSpPr/>
-          <p:nvPr/>
-        </p:nvSpPr>
-        <p:spPr>
-          <a:xfrm>
-            <a:off x="5254624" y="2135187"/>
-            <a:ext cx="142874" cy="142874"/>
-          </a:xfrm>
-          <a:prstGeom prst="rect">
-            <a:avLst/>
-          </a:prstGeom>
-          <a:noFill/>
-          <a:ln w="18216">
-            <a:solidFill>
-              <a:srgbClr val="111A24"/>
-            </a:solidFill>
-          </a:ln>
-          <a:effectLst/>
-        </p:spPr>
-        <p:style>
-          <a:lnRef idx="1">
-            <a:schemeClr val="accent1"/>
-          </a:lnRef>
-          <a:fillRef idx="3">
-            <a:schemeClr val="accent1"/>
-          </a:fillRef>
-          <a:effectRef idx="0">
-            <a:schemeClr val="accent1"/>
-          </a:effectRef>
-          <a:fontRef idx="minor">
-            <a:schemeClr val="lt1"/>
-          </a:fontRef>
-        </p:style>
-        <p:txBody>
-          <a:bodyPr rtlCol="0" anchor="ctr"/>
-          <a:lstStyle/>
-          <a:p>
-            <a:pPr algn="ctr"/>
-          </a:p>
-        </p:txBody>
-      </p:sp>
-      <p:cxnSp>
-        <p:nvCxnSpPr>
-          <p:cNvPr id="72" name="ledr_c0_k_0" descr="Editable line; source id ledr_c0_k_0"/>
-          <p:cNvCxnSpPr/>
-          <p:nvPr/>
-        </p:nvCxnSpPr>
-        <p:spPr>
-          <a:xfrm>
-            <a:off x="5286374" y="2214562"/>
-            <a:ext cx="31750" cy="31750"/>
-          </a:xfrm>
-          <a:prstGeom prst="line">
-            <a:avLst/>
-          </a:prstGeom>
-          <a:ln w="23681">
-            <a:solidFill>
-              <a:srgbClr val="111A24"/>
-            </a:solidFill>
-          </a:ln>
-          <a:effectLst/>
-        </p:spPr>
-        <p:style>
-          <a:lnRef idx="2">
-            <a:schemeClr val="accent1"/>
-          </a:lnRef>
-          <a:fillRef idx="0">
-            <a:schemeClr val="accent1"/>
-          </a:fillRef>
-          <a:effectRef idx="0">
-            <a:schemeClr val="accent1"/>
-          </a:effectRef>
-          <a:fontRef idx="minor">
-            <a:schemeClr val="tx1"/>
-          </a:fontRef>
-        </p:style>
-      </p:cxnSp>
-      <p:cxnSp>
-        <p:nvCxnSpPr>
-          <p:cNvPr id="73" name="ledr_c0_k_1" descr="Editable line; source id ledr_c0_k_1"/>
-          <p:cNvCxnSpPr/>
-          <p:nvPr/>
-        </p:nvCxnSpPr>
-        <p:spPr>
-          <a:xfrm flipV="1">
-            <a:off x="5318124" y="2174874"/>
-            <a:ext cx="55563" cy="71438"/>
-          </a:xfrm>
-          <a:prstGeom prst="line">
-            <a:avLst/>
-          </a:prstGeom>
-          <a:ln w="23681">
-            <a:solidFill>
-              <a:srgbClr val="111A24"/>
-            </a:solidFill>
-          </a:ln>
-          <a:effectLst/>
-        </p:spPr>
-        <p:style>
-          <a:lnRef idx="2">
-            <a:schemeClr val="accent1"/>
-          </a:lnRef>
-          <a:fillRef idx="0">
-            <a:schemeClr val="accent1"/>
-          </a:fillRef>
-          <a:effectRef idx="0">
-            <a:schemeClr val="accent1"/>
-          </a:effectRef>
-          <a:fontRef idx="minor">
-            <a:schemeClr val="tx1"/>
-          </a:fontRef>
-        </p:style>
-      </p:cxnSp>
-      <p:sp>
-        <p:nvSpPr>
-          <p:cNvPr id="74" name="ledr_x0" descr="Editable text; source id ledr_x0"/>
-          <p:cNvSpPr txBox="1"/>
-          <p:nvPr/>
-        </p:nvSpPr>
-        <p:spPr>
-          <a:xfrm>
-            <a:off x="5508624" y="2071687"/>
-            <a:ext cx="2127249" cy="277812"/>
-          </a:xfrm>
-          <a:prstGeom prst="rect">
-            <a:avLst/>
-          </a:prstGeom>
-          <a:noFill/>
-          <a:effectLst/>
-        </p:spPr>
-        <p:txBody>
-          <a:bodyPr wrap="none" anchor="ctr" tIns="0" rIns="0" bIns="0" lIns="0" anchorCtr="0" vertOverflow="overflow">
-            <a:noAutofit/>
-          </a:bodyPr>
-          <a:lstStyle/>
-          <a:p>
-            <a:pPr algn="l" fontAlgn="base">
-              <a:lnSpc>
-                <a:spcPts val="1828"/>
-              </a:lnSpc>
-              <a:spcBef>
-                <a:spcPts val="0"/>
-              </a:spcBef>
-              <a:spcAft>
-                <a:spcPts val="0"/>
-              </a:spcAft>
-              <a:defRPr sz="1249" b="1" i="0" lang="zh-CN" dirty="0">
+              <a:defRPr sz="1749" b="0" i="0" lang="zh-CN" dirty="0">
                 <a:solidFill>
                   <a:srgbClr val="27303A"/>
                 </a:solidFill>
@@ -6766,7 +7388,7 @@
               </a:defRPr>
             </a:pPr>
             <a:r>
-              <a:rPr sz="1249" b="1" i="0" lang="zh-CN" dirty="0">
+              <a:rPr sz="1749" b="0" i="0" lang="zh-CN" dirty="0">
                 <a:solidFill>
                   <a:srgbClr val="27303A"/>
                 </a:solidFill>
@@ -6774,25 +7396,25 @@
                 <a:ea typeface="Noto Sans CJK SC"/>
                 <a:cs typeface="Noto Sans CJK SC"/>
               </a:rPr>
-              <a:t>原料与配比</a:t>
+              <a:t>容器与助熔剂</a:t>
             </a:r>
           </a:p>
         </p:txBody>
       </p:sp>
       <p:sp>
         <p:nvSpPr>
-          <p:cNvPr id="75" name="ledr_r1" descr="Editable shape; source id ledr_r1"/>
+          <p:cNvPr id="90" name="ledr_r4" descr="Editable shape; source id ledr_r4"/>
           <p:cNvSpPr/>
           <p:nvPr/>
         </p:nvSpPr>
         <p:spPr>
           <a:xfrm>
-            <a:off x="5143499" y="2532062"/>
-            <a:ext cx="2619374" cy="484187"/>
+            <a:off x="4937124" y="3770312"/>
+            <a:ext cx="2651124" cy="428624"/>
           </a:xfrm>
           <a:prstGeom prst="roundRect">
             <a:avLst>
-              <a:gd name="adj" fmla="val 9836"/>
+              <a:gd name="adj" fmla="val 11111"/>
             </a:avLst>
           </a:prstGeom>
           <a:solidFill>
@@ -6829,13 +7451,13 @@
       </p:sp>
       <p:sp>
         <p:nvSpPr>
-          <p:cNvPr id="76" name="ledr_c1_b" descr="Editable shape; source id ledr_c1_b"/>
+          <p:cNvPr id="91" name="ledr_c4_b" descr="Editable shape; source id ledr_c4_b"/>
           <p:cNvSpPr/>
           <p:nvPr/>
         </p:nvSpPr>
         <p:spPr>
           <a:xfrm>
-            <a:off x="5254624" y="2698749"/>
+            <a:off x="5048249" y="3913187"/>
             <a:ext cx="142874" cy="142874"/>
           </a:xfrm>
           <a:prstGeom prst="rect">
@@ -6873,13 +7495,13 @@
       </p:sp>
       <p:cxnSp>
         <p:nvCxnSpPr>
-          <p:cNvPr id="77" name="ledr_c1_k_0" descr="Editable line; source id ledr_c1_k_0"/>
+          <p:cNvPr id="92" name="ledr_c4_k_0" descr="Editable line; source id ledr_c4_k_0"/>
           <p:cNvCxnSpPr/>
           <p:nvPr/>
         </p:nvCxnSpPr>
         <p:spPr>
           <a:xfrm>
-            <a:off x="5286374" y="2770187"/>
+            <a:off x="5079999" y="3984624"/>
             <a:ext cx="31750" cy="31750"/>
           </a:xfrm>
           <a:prstGeom prst="line">
@@ -6909,13 +7531,13 @@
       </p:cxnSp>
       <p:cxnSp>
         <p:nvCxnSpPr>
-          <p:cNvPr id="78" name="ledr_c1_k_1" descr="Editable line; source id ledr_c1_k_1"/>
+          <p:cNvPr id="93" name="ledr_c4_k_1" descr="Editable line; source id ledr_c4_k_1"/>
           <p:cNvCxnSpPr/>
           <p:nvPr/>
         </p:nvCxnSpPr>
         <p:spPr>
           <a:xfrm flipV="1">
-            <a:off x="5318124" y="2738437"/>
+            <a:off x="5111749" y="3952874"/>
             <a:ext cx="55563" cy="63500"/>
           </a:xfrm>
           <a:prstGeom prst="line">
@@ -6945,14 +7567,14 @@
       </p:cxnSp>
       <p:sp>
         <p:nvSpPr>
-          <p:cNvPr id="79" name="ledr_x1" descr="Editable text; source id ledr_x1"/>
+          <p:cNvPr id="94" name="ledr_x4" descr="Editable text; source id ledr_x4"/>
           <p:cNvSpPr txBox="1"/>
           <p:nvPr/>
         </p:nvSpPr>
         <p:spPr>
           <a:xfrm>
-            <a:off x="5508624" y="2627312"/>
-            <a:ext cx="2127249" cy="277812"/>
+            <a:off x="5302249" y="3794124"/>
+            <a:ext cx="2158999" cy="388937"/>
           </a:xfrm>
           <a:prstGeom prst="rect">
             <a:avLst/>
@@ -6968,7 +7590,7 @@
           <a:p>
             <a:pPr algn="l" fontAlgn="base">
               <a:lnSpc>
-                <a:spcPts val="1828"/>
+                <a:spcPts val="2546"/>
               </a:lnSpc>
               <a:spcBef>
                 <a:spcPts val="0"/>
@@ -6976,7 +7598,7 @@
               <a:spcAft>
                 <a:spcPts val="0"/>
               </a:spcAft>
-              <a:defRPr sz="1249" b="1" i="0" lang="zh-CN" dirty="0">
+              <a:defRPr sz="1749" b="0" i="0" lang="zh-CN" dirty="0">
                 <a:solidFill>
                   <a:srgbClr val="27303A"/>
                 </a:solidFill>
@@ -6986,7 +7608,7 @@
               </a:defRPr>
             </a:pPr>
             <a:r>
-              <a:rPr sz="1249" b="1" i="0" lang="zh-CN" dirty="0">
+              <a:rPr sz="1749" b="0" i="0" lang="zh-CN" dirty="0">
                 <a:solidFill>
                   <a:srgbClr val="27303A"/>
                 </a:solidFill>
@@ -6994,25 +7616,25 @@
                 <a:ea typeface="Noto Sans CJK SC"/>
                 <a:cs typeface="Noto Sans CJK SC"/>
               </a:rPr>
-              <a:t>热历史</a:t>
+              <a:t>冷却与分离</a:t>
             </a:r>
           </a:p>
         </p:txBody>
       </p:sp>
       <p:sp>
         <p:nvSpPr>
-          <p:cNvPr id="80" name="ledr_r2" descr="Editable shape; source id ledr_r2"/>
+          <p:cNvPr id="95" name="ledr_r5" descr="Editable shape; source id ledr_r5"/>
           <p:cNvSpPr/>
           <p:nvPr/>
         </p:nvSpPr>
         <p:spPr>
           <a:xfrm>
-            <a:off x="5143499" y="3087687"/>
-            <a:ext cx="2619374" cy="484187"/>
+            <a:off x="4937124" y="4246562"/>
+            <a:ext cx="2651124" cy="428624"/>
           </a:xfrm>
           <a:prstGeom prst="roundRect">
             <a:avLst>
-              <a:gd name="adj" fmla="val 9836"/>
+              <a:gd name="adj" fmla="val 11111"/>
             </a:avLst>
           </a:prstGeom>
           <a:solidFill>
@@ -7049,13 +7671,13 @@
       </p:sp>
       <p:sp>
         <p:nvSpPr>
-          <p:cNvPr id="81" name="ledr_c2_b" descr="Editable shape; source id ledr_c2_b"/>
+          <p:cNvPr id="96" name="ledr_c5_b" descr="Editable shape; source id ledr_c5_b"/>
           <p:cNvSpPr/>
           <p:nvPr/>
         </p:nvSpPr>
         <p:spPr>
           <a:xfrm>
-            <a:off x="5254624" y="3254374"/>
+            <a:off x="5048249" y="4389437"/>
             <a:ext cx="142874" cy="142874"/>
           </a:xfrm>
           <a:prstGeom prst="rect">
@@ -7093,13 +7715,13 @@
       </p:sp>
       <p:cxnSp>
         <p:nvCxnSpPr>
-          <p:cNvPr id="82" name="ledr_c2_k_0" descr="Editable line; source id ledr_c2_k_0"/>
+          <p:cNvPr id="97" name="ledr_c5_k_0" descr="Editable line; source id ledr_c5_k_0"/>
           <p:cNvCxnSpPr/>
           <p:nvPr/>
         </p:nvCxnSpPr>
         <p:spPr>
           <a:xfrm>
-            <a:off x="5286374" y="3333749"/>
+            <a:off x="5079999" y="4460874"/>
             <a:ext cx="31750" cy="31750"/>
           </a:xfrm>
           <a:prstGeom prst="line">
@@ -7129,14 +7751,14 @@
       </p:cxnSp>
       <p:cxnSp>
         <p:nvCxnSpPr>
-          <p:cNvPr id="83" name="ledr_c2_k_1" descr="Editable line; source id ledr_c2_k_1"/>
+          <p:cNvPr id="98" name="ledr_c5_k_1" descr="Editable line; source id ledr_c5_k_1"/>
           <p:cNvCxnSpPr/>
           <p:nvPr/>
         </p:nvCxnSpPr>
         <p:spPr>
           <a:xfrm flipV="1">
-            <a:off x="5318124" y="3294062"/>
-            <a:ext cx="55563" cy="71437"/>
+            <a:off x="5111749" y="4429124"/>
+            <a:ext cx="55563" cy="63500"/>
           </a:xfrm>
           <a:prstGeom prst="line">
             <a:avLst/>
@@ -7165,14 +7787,14 @@
       </p:cxnSp>
       <p:sp>
         <p:nvSpPr>
-          <p:cNvPr id="84" name="ledr_x2" descr="Editable text; source id ledr_x2"/>
+          <p:cNvPr id="99" name="ledr_x5" descr="Editable text; source id ledr_x5"/>
           <p:cNvSpPr txBox="1"/>
           <p:nvPr/>
         </p:nvSpPr>
         <p:spPr>
           <a:xfrm>
-            <a:off x="5508624" y="3190874"/>
-            <a:ext cx="2127249" cy="277812"/>
+            <a:off x="5302249" y="4270374"/>
+            <a:ext cx="2158999" cy="388937"/>
           </a:xfrm>
           <a:prstGeom prst="rect">
             <a:avLst/>
@@ -7188,7 +7810,7 @@
           <a:p>
             <a:pPr algn="l" fontAlgn="base">
               <a:lnSpc>
-                <a:spcPts val="1828"/>
+                <a:spcPts val="2546"/>
               </a:lnSpc>
               <a:spcBef>
                 <a:spcPts val="0"/>
@@ -7196,7 +7818,7 @@
               <a:spcAft>
                 <a:spcPts val="0"/>
               </a:spcAft>
-              <a:defRPr sz="1249" b="1" i="0" lang="zh-CN" dirty="0">
+              <a:defRPr sz="1749" b="0" i="0" lang="zh-CN" dirty="0">
                 <a:solidFill>
                   <a:srgbClr val="27303A"/>
                 </a:solidFill>
@@ -7206,667 +7828,7 @@
               </a:defRPr>
             </a:pPr>
             <a:r>
-              <a:rPr sz="1249" b="1" i="0" lang="zh-CN" dirty="0">
-                <a:solidFill>
-                  <a:srgbClr val="27303A"/>
-                </a:solidFill>
-                <a:latin typeface="Noto Sans CJK SC"/>
-                <a:ea typeface="Noto Sans CJK SC"/>
-                <a:cs typeface="Noto Sans CJK SC"/>
-              </a:rPr>
-              <a:t>气氛</a:t>
-            </a:r>
-          </a:p>
-        </p:txBody>
-      </p:sp>
-      <p:sp>
-        <p:nvSpPr>
-          <p:cNvPr id="85" name="ledr_r3" descr="Editable shape; source id ledr_r3"/>
-          <p:cNvSpPr/>
-          <p:nvPr/>
-        </p:nvSpPr>
-        <p:spPr>
-          <a:xfrm>
-            <a:off x="5143499" y="3651249"/>
-            <a:ext cx="2619374" cy="484187"/>
-          </a:xfrm>
-          <a:prstGeom prst="roundRect">
-            <a:avLst>
-              <a:gd name="adj" fmla="val 9836"/>
-            </a:avLst>
-          </a:prstGeom>
-          <a:solidFill>
-            <a:srgbClr val="F4F7FA"/>
-          </a:solidFill>
-          <a:ln w="12699">
-            <a:solidFill>
-              <a:srgbClr val="AEBBC7"/>
-            </a:solidFill>
-          </a:ln>
-          <a:effectLst/>
-        </p:spPr>
-        <p:style>
-          <a:lnRef idx="1">
-            <a:schemeClr val="accent1"/>
-          </a:lnRef>
-          <a:fillRef idx="3">
-            <a:schemeClr val="accent1"/>
-          </a:fillRef>
-          <a:effectRef idx="0">
-            <a:schemeClr val="accent1"/>
-          </a:effectRef>
-          <a:fontRef idx="minor">
-            <a:schemeClr val="lt1"/>
-          </a:fontRef>
-        </p:style>
-        <p:txBody>
-          <a:bodyPr rtlCol="0" anchor="ctr"/>
-          <a:lstStyle/>
-          <a:p>
-            <a:pPr algn="ctr"/>
-          </a:p>
-        </p:txBody>
-      </p:sp>
-      <p:sp>
-        <p:nvSpPr>
-          <p:cNvPr id="86" name="ledr_c3_b" descr="Editable shape; source id ledr_c3_b"/>
-          <p:cNvSpPr/>
-          <p:nvPr/>
-        </p:nvSpPr>
-        <p:spPr>
-          <a:xfrm>
-            <a:off x="5254624" y="3817937"/>
-            <a:ext cx="142874" cy="142874"/>
-          </a:xfrm>
-          <a:prstGeom prst="rect">
-            <a:avLst/>
-          </a:prstGeom>
-          <a:noFill/>
-          <a:ln w="18216">
-            <a:solidFill>
-              <a:srgbClr val="111A24"/>
-            </a:solidFill>
-          </a:ln>
-          <a:effectLst/>
-        </p:spPr>
-        <p:style>
-          <a:lnRef idx="1">
-            <a:schemeClr val="accent1"/>
-          </a:lnRef>
-          <a:fillRef idx="3">
-            <a:schemeClr val="accent1"/>
-          </a:fillRef>
-          <a:effectRef idx="0">
-            <a:schemeClr val="accent1"/>
-          </a:effectRef>
-          <a:fontRef idx="minor">
-            <a:schemeClr val="lt1"/>
-          </a:fontRef>
-        </p:style>
-        <p:txBody>
-          <a:bodyPr rtlCol="0" anchor="ctr"/>
-          <a:lstStyle/>
-          <a:p>
-            <a:pPr algn="ctr"/>
-          </a:p>
-        </p:txBody>
-      </p:sp>
-      <p:cxnSp>
-        <p:nvCxnSpPr>
-          <p:cNvPr id="87" name="ledr_c3_k_0" descr="Editable line; source id ledr_c3_k_0"/>
-          <p:cNvCxnSpPr/>
-          <p:nvPr/>
-        </p:nvCxnSpPr>
-        <p:spPr>
-          <a:xfrm>
-            <a:off x="5286374" y="3897312"/>
-            <a:ext cx="31750" cy="31750"/>
-          </a:xfrm>
-          <a:prstGeom prst="line">
-            <a:avLst/>
-          </a:prstGeom>
-          <a:ln w="23681">
-            <a:solidFill>
-              <a:srgbClr val="111A24"/>
-            </a:solidFill>
-          </a:ln>
-          <a:effectLst/>
-        </p:spPr>
-        <p:style>
-          <a:lnRef idx="2">
-            <a:schemeClr val="accent1"/>
-          </a:lnRef>
-          <a:fillRef idx="0">
-            <a:schemeClr val="accent1"/>
-          </a:fillRef>
-          <a:effectRef idx="0">
-            <a:schemeClr val="accent1"/>
-          </a:effectRef>
-          <a:fontRef idx="minor">
-            <a:schemeClr val="tx1"/>
-          </a:fontRef>
-        </p:style>
-      </p:cxnSp>
-      <p:cxnSp>
-        <p:nvCxnSpPr>
-          <p:cNvPr id="88" name="ledr_c3_k_1" descr="Editable line; source id ledr_c3_k_1"/>
-          <p:cNvCxnSpPr/>
-          <p:nvPr/>
-        </p:nvCxnSpPr>
-        <p:spPr>
-          <a:xfrm flipV="1">
-            <a:off x="5318124" y="3857624"/>
-            <a:ext cx="55563" cy="71438"/>
-          </a:xfrm>
-          <a:prstGeom prst="line">
-            <a:avLst/>
-          </a:prstGeom>
-          <a:ln w="23681">
-            <a:solidFill>
-              <a:srgbClr val="111A24"/>
-            </a:solidFill>
-          </a:ln>
-          <a:effectLst/>
-        </p:spPr>
-        <p:style>
-          <a:lnRef idx="2">
-            <a:schemeClr val="accent1"/>
-          </a:lnRef>
-          <a:fillRef idx="0">
-            <a:schemeClr val="accent1"/>
-          </a:fillRef>
-          <a:effectRef idx="0">
-            <a:schemeClr val="accent1"/>
-          </a:effectRef>
-          <a:fontRef idx="minor">
-            <a:schemeClr val="tx1"/>
-          </a:fontRef>
-        </p:style>
-      </p:cxnSp>
-      <p:sp>
-        <p:nvSpPr>
-          <p:cNvPr id="89" name="ledr_x3" descr="Editable text; source id ledr_x3"/>
-          <p:cNvSpPr txBox="1"/>
-          <p:nvPr/>
-        </p:nvSpPr>
-        <p:spPr>
-          <a:xfrm>
-            <a:off x="5508624" y="3754437"/>
-            <a:ext cx="2127249" cy="277812"/>
-          </a:xfrm>
-          <a:prstGeom prst="rect">
-            <a:avLst/>
-          </a:prstGeom>
-          <a:noFill/>
-          <a:effectLst/>
-        </p:spPr>
-        <p:txBody>
-          <a:bodyPr wrap="none" anchor="ctr" tIns="0" rIns="0" bIns="0" lIns="0" anchorCtr="0" vertOverflow="overflow">
-            <a:noAutofit/>
-          </a:bodyPr>
-          <a:lstStyle/>
-          <a:p>
-            <a:pPr algn="l" fontAlgn="base">
-              <a:lnSpc>
-                <a:spcPts val="1828"/>
-              </a:lnSpc>
-              <a:spcBef>
-                <a:spcPts val="0"/>
-              </a:spcBef>
-              <a:spcAft>
-                <a:spcPts val="0"/>
-              </a:spcAft>
-              <a:defRPr sz="1249" b="1" i="0" lang="zh-CN" dirty="0">
-                <a:solidFill>
-                  <a:srgbClr val="27303A"/>
-                </a:solidFill>
-                <a:latin typeface="Noto Sans CJK SC"/>
-                <a:ea typeface="Noto Sans CJK SC"/>
-                <a:cs typeface="Noto Sans CJK SC"/>
-              </a:defRPr>
-            </a:pPr>
-            <a:r>
-              <a:rPr sz="1249" b="1" i="0" lang="zh-CN" dirty="0">
-                <a:solidFill>
-                  <a:srgbClr val="27303A"/>
-                </a:solidFill>
-                <a:latin typeface="Noto Sans CJK SC"/>
-                <a:ea typeface="Noto Sans CJK SC"/>
-                <a:cs typeface="Noto Sans CJK SC"/>
-              </a:rPr>
-              <a:t>容器与助熔剂</a:t>
-            </a:r>
-          </a:p>
-        </p:txBody>
-      </p:sp>
-      <p:sp>
-        <p:nvSpPr>
-          <p:cNvPr id="90" name="ledr_r4" descr="Editable shape; source id ledr_r4"/>
-          <p:cNvSpPr/>
-          <p:nvPr/>
-        </p:nvSpPr>
-        <p:spPr>
-          <a:xfrm>
-            <a:off x="5143499" y="4214812"/>
-            <a:ext cx="2619374" cy="484187"/>
-          </a:xfrm>
-          <a:prstGeom prst="roundRect">
-            <a:avLst>
-              <a:gd name="adj" fmla="val 9836"/>
-            </a:avLst>
-          </a:prstGeom>
-          <a:solidFill>
-            <a:srgbClr val="F4F7FA"/>
-          </a:solidFill>
-          <a:ln w="12699">
-            <a:solidFill>
-              <a:srgbClr val="AEBBC7"/>
-            </a:solidFill>
-          </a:ln>
-          <a:effectLst/>
-        </p:spPr>
-        <p:style>
-          <a:lnRef idx="1">
-            <a:schemeClr val="accent1"/>
-          </a:lnRef>
-          <a:fillRef idx="3">
-            <a:schemeClr val="accent1"/>
-          </a:fillRef>
-          <a:effectRef idx="0">
-            <a:schemeClr val="accent1"/>
-          </a:effectRef>
-          <a:fontRef idx="minor">
-            <a:schemeClr val="lt1"/>
-          </a:fontRef>
-        </p:style>
-        <p:txBody>
-          <a:bodyPr rtlCol="0" anchor="ctr"/>
-          <a:lstStyle/>
-          <a:p>
-            <a:pPr algn="ctr"/>
-          </a:p>
-        </p:txBody>
-      </p:sp>
-      <p:sp>
-        <p:nvSpPr>
-          <p:cNvPr id="91" name="ledr_c4_b" descr="Editable shape; source id ledr_c4_b"/>
-          <p:cNvSpPr/>
-          <p:nvPr/>
-        </p:nvSpPr>
-        <p:spPr>
-          <a:xfrm>
-            <a:off x="5254624" y="4381499"/>
-            <a:ext cx="142874" cy="142874"/>
-          </a:xfrm>
-          <a:prstGeom prst="rect">
-            <a:avLst/>
-          </a:prstGeom>
-          <a:noFill/>
-          <a:ln w="18216">
-            <a:solidFill>
-              <a:srgbClr val="111A24"/>
-            </a:solidFill>
-          </a:ln>
-          <a:effectLst/>
-        </p:spPr>
-        <p:style>
-          <a:lnRef idx="1">
-            <a:schemeClr val="accent1"/>
-          </a:lnRef>
-          <a:fillRef idx="3">
-            <a:schemeClr val="accent1"/>
-          </a:fillRef>
-          <a:effectRef idx="0">
-            <a:schemeClr val="accent1"/>
-          </a:effectRef>
-          <a:fontRef idx="minor">
-            <a:schemeClr val="lt1"/>
-          </a:fontRef>
-        </p:style>
-        <p:txBody>
-          <a:bodyPr rtlCol="0" anchor="ctr"/>
-          <a:lstStyle/>
-          <a:p>
-            <a:pPr algn="ctr"/>
-          </a:p>
-        </p:txBody>
-      </p:sp>
-      <p:cxnSp>
-        <p:nvCxnSpPr>
-          <p:cNvPr id="92" name="ledr_c4_k_0" descr="Editable line; source id ledr_c4_k_0"/>
-          <p:cNvCxnSpPr/>
-          <p:nvPr/>
-        </p:nvCxnSpPr>
-        <p:spPr>
-          <a:xfrm>
-            <a:off x="5286374" y="4452937"/>
-            <a:ext cx="31750" cy="31750"/>
-          </a:xfrm>
-          <a:prstGeom prst="line">
-            <a:avLst/>
-          </a:prstGeom>
-          <a:ln w="23681">
-            <a:solidFill>
-              <a:srgbClr val="111A24"/>
-            </a:solidFill>
-          </a:ln>
-          <a:effectLst/>
-        </p:spPr>
-        <p:style>
-          <a:lnRef idx="2">
-            <a:schemeClr val="accent1"/>
-          </a:lnRef>
-          <a:fillRef idx="0">
-            <a:schemeClr val="accent1"/>
-          </a:fillRef>
-          <a:effectRef idx="0">
-            <a:schemeClr val="accent1"/>
-          </a:effectRef>
-          <a:fontRef idx="minor">
-            <a:schemeClr val="tx1"/>
-          </a:fontRef>
-        </p:style>
-      </p:cxnSp>
-      <p:cxnSp>
-        <p:nvCxnSpPr>
-          <p:cNvPr id="93" name="ledr_c4_k_1" descr="Editable line; source id ledr_c4_k_1"/>
-          <p:cNvCxnSpPr/>
-          <p:nvPr/>
-        </p:nvCxnSpPr>
-        <p:spPr>
-          <a:xfrm flipV="1">
-            <a:off x="5318124" y="4421187"/>
-            <a:ext cx="55563" cy="63500"/>
-          </a:xfrm>
-          <a:prstGeom prst="line">
-            <a:avLst/>
-          </a:prstGeom>
-          <a:ln w="23681">
-            <a:solidFill>
-              <a:srgbClr val="111A24"/>
-            </a:solidFill>
-          </a:ln>
-          <a:effectLst/>
-        </p:spPr>
-        <p:style>
-          <a:lnRef idx="2">
-            <a:schemeClr val="accent1"/>
-          </a:lnRef>
-          <a:fillRef idx="0">
-            <a:schemeClr val="accent1"/>
-          </a:fillRef>
-          <a:effectRef idx="0">
-            <a:schemeClr val="accent1"/>
-          </a:effectRef>
-          <a:fontRef idx="minor">
-            <a:schemeClr val="tx1"/>
-          </a:fontRef>
-        </p:style>
-      </p:cxnSp>
-      <p:sp>
-        <p:nvSpPr>
-          <p:cNvPr id="94" name="ledr_x4" descr="Editable text; source id ledr_x4"/>
-          <p:cNvSpPr txBox="1"/>
-          <p:nvPr/>
-        </p:nvSpPr>
-        <p:spPr>
-          <a:xfrm>
-            <a:off x="5508624" y="4317999"/>
-            <a:ext cx="2127249" cy="277812"/>
-          </a:xfrm>
-          <a:prstGeom prst="rect">
-            <a:avLst/>
-          </a:prstGeom>
-          <a:noFill/>
-          <a:effectLst/>
-        </p:spPr>
-        <p:txBody>
-          <a:bodyPr wrap="none" anchor="ctr" tIns="0" rIns="0" bIns="0" lIns="0" anchorCtr="0" vertOverflow="overflow">
-            <a:noAutofit/>
-          </a:bodyPr>
-          <a:lstStyle/>
-          <a:p>
-            <a:pPr algn="l" fontAlgn="base">
-              <a:lnSpc>
-                <a:spcPts val="1828"/>
-              </a:lnSpc>
-              <a:spcBef>
-                <a:spcPts val="0"/>
-              </a:spcBef>
-              <a:spcAft>
-                <a:spcPts val="0"/>
-              </a:spcAft>
-              <a:defRPr sz="1249" b="1" i="0" lang="zh-CN" dirty="0">
-                <a:solidFill>
-                  <a:srgbClr val="27303A"/>
-                </a:solidFill>
-                <a:latin typeface="Noto Sans CJK SC"/>
-                <a:ea typeface="Noto Sans CJK SC"/>
-                <a:cs typeface="Noto Sans CJK SC"/>
-              </a:defRPr>
-            </a:pPr>
-            <a:r>
-              <a:rPr sz="1249" b="1" i="0" lang="zh-CN" dirty="0">
-                <a:solidFill>
-                  <a:srgbClr val="27303A"/>
-                </a:solidFill>
-                <a:latin typeface="Noto Sans CJK SC"/>
-                <a:ea typeface="Noto Sans CJK SC"/>
-                <a:cs typeface="Noto Sans CJK SC"/>
-              </a:rPr>
-              <a:t>冷却与分离</a:t>
-            </a:r>
-          </a:p>
-        </p:txBody>
-      </p:sp>
-      <p:sp>
-        <p:nvSpPr>
-          <p:cNvPr id="95" name="ledr_r5" descr="Editable shape; source id ledr_r5"/>
-          <p:cNvSpPr/>
-          <p:nvPr/>
-        </p:nvSpPr>
-        <p:spPr>
-          <a:xfrm>
-            <a:off x="5143499" y="4770437"/>
-            <a:ext cx="2619374" cy="484187"/>
-          </a:xfrm>
-          <a:prstGeom prst="roundRect">
-            <a:avLst>
-              <a:gd name="adj" fmla="val 9836"/>
-            </a:avLst>
-          </a:prstGeom>
-          <a:solidFill>
-            <a:srgbClr val="F4F7FA"/>
-          </a:solidFill>
-          <a:ln w="12699">
-            <a:solidFill>
-              <a:srgbClr val="AEBBC7"/>
-            </a:solidFill>
-          </a:ln>
-          <a:effectLst/>
-        </p:spPr>
-        <p:style>
-          <a:lnRef idx="1">
-            <a:schemeClr val="accent1"/>
-          </a:lnRef>
-          <a:fillRef idx="3">
-            <a:schemeClr val="accent1"/>
-          </a:fillRef>
-          <a:effectRef idx="0">
-            <a:schemeClr val="accent1"/>
-          </a:effectRef>
-          <a:fontRef idx="minor">
-            <a:schemeClr val="lt1"/>
-          </a:fontRef>
-        </p:style>
-        <p:txBody>
-          <a:bodyPr rtlCol="0" anchor="ctr"/>
-          <a:lstStyle/>
-          <a:p>
-            <a:pPr algn="ctr"/>
-          </a:p>
-        </p:txBody>
-      </p:sp>
-      <p:sp>
-        <p:nvSpPr>
-          <p:cNvPr id="96" name="ledr_c5_b" descr="Editable shape; source id ledr_c5_b"/>
-          <p:cNvSpPr/>
-          <p:nvPr/>
-        </p:nvSpPr>
-        <p:spPr>
-          <a:xfrm>
-            <a:off x="5254624" y="4937124"/>
-            <a:ext cx="142874" cy="142874"/>
-          </a:xfrm>
-          <a:prstGeom prst="rect">
-            <a:avLst/>
-          </a:prstGeom>
-          <a:noFill/>
-          <a:ln w="18216">
-            <a:solidFill>
-              <a:srgbClr val="111A24"/>
-            </a:solidFill>
-          </a:ln>
-          <a:effectLst/>
-        </p:spPr>
-        <p:style>
-          <a:lnRef idx="1">
-            <a:schemeClr val="accent1"/>
-          </a:lnRef>
-          <a:fillRef idx="3">
-            <a:schemeClr val="accent1"/>
-          </a:fillRef>
-          <a:effectRef idx="0">
-            <a:schemeClr val="accent1"/>
-          </a:effectRef>
-          <a:fontRef idx="minor">
-            <a:schemeClr val="lt1"/>
-          </a:fontRef>
-        </p:style>
-        <p:txBody>
-          <a:bodyPr rtlCol="0" anchor="ctr"/>
-          <a:lstStyle/>
-          <a:p>
-            <a:pPr algn="ctr"/>
-          </a:p>
-        </p:txBody>
-      </p:sp>
-      <p:cxnSp>
-        <p:nvCxnSpPr>
-          <p:cNvPr id="97" name="ledr_c5_k_0" descr="Editable line; source id ledr_c5_k_0"/>
-          <p:cNvCxnSpPr/>
-          <p:nvPr/>
-        </p:nvCxnSpPr>
-        <p:spPr>
-          <a:xfrm>
-            <a:off x="5286374" y="5016499"/>
-            <a:ext cx="31750" cy="31750"/>
-          </a:xfrm>
-          <a:prstGeom prst="line">
-            <a:avLst/>
-          </a:prstGeom>
-          <a:ln w="23681">
-            <a:solidFill>
-              <a:srgbClr val="111A24"/>
-            </a:solidFill>
-          </a:ln>
-          <a:effectLst/>
-        </p:spPr>
-        <p:style>
-          <a:lnRef idx="2">
-            <a:schemeClr val="accent1"/>
-          </a:lnRef>
-          <a:fillRef idx="0">
-            <a:schemeClr val="accent1"/>
-          </a:fillRef>
-          <a:effectRef idx="0">
-            <a:schemeClr val="accent1"/>
-          </a:effectRef>
-          <a:fontRef idx="minor">
-            <a:schemeClr val="tx1"/>
-          </a:fontRef>
-        </p:style>
-      </p:cxnSp>
-      <p:cxnSp>
-        <p:nvCxnSpPr>
-          <p:cNvPr id="98" name="ledr_c5_k_1" descr="Editable line; source id ledr_c5_k_1"/>
-          <p:cNvCxnSpPr/>
-          <p:nvPr/>
-        </p:nvCxnSpPr>
-        <p:spPr>
-          <a:xfrm flipV="1">
-            <a:off x="5318124" y="4976812"/>
-            <a:ext cx="55563" cy="71437"/>
-          </a:xfrm>
-          <a:prstGeom prst="line">
-            <a:avLst/>
-          </a:prstGeom>
-          <a:ln w="23681">
-            <a:solidFill>
-              <a:srgbClr val="111A24"/>
-            </a:solidFill>
-          </a:ln>
-          <a:effectLst/>
-        </p:spPr>
-        <p:style>
-          <a:lnRef idx="2">
-            <a:schemeClr val="accent1"/>
-          </a:lnRef>
-          <a:fillRef idx="0">
-            <a:schemeClr val="accent1"/>
-          </a:fillRef>
-          <a:effectRef idx="0">
-            <a:schemeClr val="accent1"/>
-          </a:effectRef>
-          <a:fontRef idx="minor">
-            <a:schemeClr val="tx1"/>
-          </a:fontRef>
-        </p:style>
-      </p:cxnSp>
-      <p:sp>
-        <p:nvSpPr>
-          <p:cNvPr id="99" name="ledr_x5" descr="Editable text; source id ledr_x5"/>
-          <p:cNvSpPr txBox="1"/>
-          <p:nvPr/>
-        </p:nvSpPr>
-        <p:spPr>
-          <a:xfrm>
-            <a:off x="5508624" y="4873624"/>
-            <a:ext cx="2127249" cy="277812"/>
-          </a:xfrm>
-          <a:prstGeom prst="rect">
-            <a:avLst/>
-          </a:prstGeom>
-          <a:noFill/>
-          <a:effectLst/>
-        </p:spPr>
-        <p:txBody>
-          <a:bodyPr wrap="none" anchor="ctr" tIns="0" rIns="0" bIns="0" lIns="0" anchorCtr="0" vertOverflow="overflow">
-            <a:noAutofit/>
-          </a:bodyPr>
-          <a:lstStyle/>
-          <a:p>
-            <a:pPr algn="l" fontAlgn="base">
-              <a:lnSpc>
-                <a:spcPts val="1828"/>
-              </a:lnSpc>
-              <a:spcBef>
-                <a:spcPts val="0"/>
-              </a:spcBef>
-              <a:spcAft>
-                <a:spcPts val="0"/>
-              </a:spcAft>
-              <a:defRPr sz="1249" b="1" i="0" lang="zh-CN" dirty="0">
-                <a:solidFill>
-                  <a:srgbClr val="27303A"/>
-                </a:solidFill>
-                <a:latin typeface="Noto Sans CJK SC"/>
-                <a:ea typeface="Noto Sans CJK SC"/>
-                <a:cs typeface="Noto Sans CJK SC"/>
-              </a:defRPr>
-            </a:pPr>
-            <a:r>
-              <a:rPr sz="1249" b="1" i="0" lang="zh-CN" dirty="0">
+              <a:rPr sz="1749" b="0" i="0" lang="zh-CN" dirty="0">
                 <a:solidFill>
                   <a:srgbClr val="27303A"/>
                 </a:solidFill>
@@ -7887,12 +7849,12 @@
         </p:nvSpPr>
         <p:spPr>
           <a:xfrm>
-            <a:off x="8540749" y="1190624"/>
-            <a:ext cx="3254374" cy="888999"/>
+            <a:off x="8143874" y="809624"/>
+            <a:ext cx="3714749" cy="857249"/>
           </a:xfrm>
           <a:prstGeom prst="roundRect">
             <a:avLst>
-              <a:gd name="adj" fmla="val 8035"/>
+              <a:gd name="adj" fmla="val 8333"/>
             </a:avLst>
           </a:prstGeom>
           <a:solidFill>
@@ -7935,12 +7897,12 @@
         </p:nvSpPr>
         <p:spPr>
           <a:xfrm>
-            <a:off x="8540749" y="1190624"/>
-            <a:ext cx="63499" cy="888999"/>
+            <a:off x="8143874" y="809624"/>
+            <a:ext cx="47624" cy="857249"/>
           </a:xfrm>
           <a:prstGeom prst="roundRect">
             <a:avLst>
-              <a:gd name="adj" fmla="val 37500"/>
+              <a:gd name="adj" fmla="val 50000"/>
             </a:avLst>
           </a:prstGeom>
           <a:solidFill>
@@ -7981,7 +7943,7 @@
         </p:nvCxnSpPr>
         <p:spPr>
           <a:xfrm>
-            <a:off x="8874124" y="1508124"/>
+            <a:off x="8413749" y="1111249"/>
             <a:ext cx="0" cy="87313"/>
           </a:xfrm>
           <a:prstGeom prst="line">
@@ -8017,7 +7979,7 @@
         </p:nvCxnSpPr>
         <p:spPr>
           <a:xfrm flipH="1">
-            <a:off x="8794749" y="1595437"/>
+            <a:off x="8334374" y="1198562"/>
             <a:ext cx="79375" cy="158750"/>
           </a:xfrm>
           <a:prstGeom prst="line">
@@ -8053,7 +8015,7 @@
         </p:nvCxnSpPr>
         <p:spPr>
           <a:xfrm>
-            <a:off x="8794749" y="1754187"/>
+            <a:off x="8334374" y="1357312"/>
             <a:ext cx="222250" cy="0"/>
           </a:xfrm>
           <a:prstGeom prst="line">
@@ -8089,7 +8051,7 @@
         </p:nvCxnSpPr>
         <p:spPr>
           <a:xfrm flipH="1" flipV="1">
-            <a:off x="8937624" y="1595437"/>
+            <a:off x="8477249" y="1198562"/>
             <a:ext cx="79375" cy="158750"/>
           </a:xfrm>
           <a:prstGeom prst="line">
@@ -8125,7 +8087,7 @@
         </p:nvCxnSpPr>
         <p:spPr>
           <a:xfrm flipV="1">
-            <a:off x="8937624" y="1508124"/>
+            <a:off x="8477249" y="1111249"/>
             <a:ext cx="0" cy="87313"/>
           </a:xfrm>
           <a:prstGeom prst="line">
@@ -8161,7 +8123,7 @@
         </p:nvCxnSpPr>
         <p:spPr>
           <a:xfrm>
-            <a:off x="8858249" y="1508124"/>
+            <a:off x="8397874" y="1111249"/>
             <a:ext cx="95250" cy="0"/>
           </a:xfrm>
           <a:prstGeom prst="line">
@@ -8197,7 +8159,7 @@
         </p:nvSpPr>
         <p:spPr>
           <a:xfrm>
-            <a:off x="8866187" y="1682749"/>
+            <a:off x="8405812" y="1285874"/>
             <a:ext cx="23812" cy="23812"/>
           </a:xfrm>
           <a:prstGeom prst="ellipse">
@@ -8241,7 +8203,7 @@
         </p:nvSpPr>
         <p:spPr>
           <a:xfrm>
-            <a:off x="8921749" y="1706562"/>
+            <a:off x="8461374" y="1309687"/>
             <a:ext cx="15874" cy="15874"/>
           </a:xfrm>
           <a:prstGeom prst="ellipse">
@@ -8285,8 +8247,8 @@
         </p:nvSpPr>
         <p:spPr>
           <a:xfrm>
-            <a:off x="9159874" y="1476374"/>
-            <a:ext cx="2492374" cy="325437"/>
+            <a:off x="8683624" y="1023937"/>
+            <a:ext cx="3079749" cy="420687"/>
           </a:xfrm>
           <a:prstGeom prst="rect">
             <a:avLst/>
@@ -8302,7 +8264,7 @@
           <a:p>
             <a:pPr algn="l" fontAlgn="base">
               <a:lnSpc>
-                <a:spcPts val="2187"/>
+                <a:spcPts val="2812"/>
               </a:lnSpc>
               <a:spcBef>
                 <a:spcPts val="0"/>
@@ -8310,7 +8272,7 @@
               <a:spcAft>
                 <a:spcPts val="0"/>
               </a:spcAft>
-              <a:defRPr sz="1499" b="1" i="0" lang="zh-CN" dirty="0">
+              <a:defRPr sz="1937" b="1" i="0" lang="zh-CN" dirty="0">
                 <a:solidFill>
                   <a:srgbClr val="7A5410"/>
                 </a:solidFill>
@@ -8320,7 +8282,7 @@
               </a:defRPr>
             </a:pPr>
             <a:r>
-              <a:rPr sz="1499" b="1" i="0" lang="zh-CN" dirty="0">
+              <a:rPr sz="1937" b="1" i="0" lang="zh-CN" dirty="0">
                 <a:solidFill>
                   <a:srgbClr val="7A5410"/>
                 </a:solidFill>
@@ -8341,12 +8303,12 @@
         </p:nvSpPr>
         <p:spPr>
           <a:xfrm>
-            <a:off x="8540749" y="2238374"/>
-            <a:ext cx="3254374" cy="888999"/>
+            <a:off x="8143874" y="1857374"/>
+            <a:ext cx="3714749" cy="857249"/>
           </a:xfrm>
           <a:prstGeom prst="roundRect">
             <a:avLst>
-              <a:gd name="adj" fmla="val 8035"/>
+              <a:gd name="adj" fmla="val 8333"/>
             </a:avLst>
           </a:prstGeom>
           <a:solidFill>
@@ -8389,12 +8351,12 @@
         </p:nvSpPr>
         <p:spPr>
           <a:xfrm>
-            <a:off x="8540749" y="2238374"/>
-            <a:ext cx="63499" cy="888999"/>
+            <a:off x="8143874" y="1857374"/>
+            <a:ext cx="47624" cy="857249"/>
           </a:xfrm>
           <a:prstGeom prst="roundRect">
             <a:avLst>
-              <a:gd name="adj" fmla="val 37500"/>
+              <a:gd name="adj" fmla="val 50000"/>
             </a:avLst>
           </a:prstGeom>
           <a:solidFill>
@@ -8435,8 +8397,8 @@
         </p:nvCxnSpPr>
         <p:spPr>
           <a:xfrm>
-            <a:off x="8905874" y="2547937"/>
-            <a:ext cx="127000" cy="87312"/>
+            <a:off x="8445499" y="2151062"/>
+            <a:ext cx="127000" cy="79375"/>
           </a:xfrm>
           <a:prstGeom prst="line">
             <a:avLst/>
@@ -8471,8 +8433,8 @@
         </p:nvCxnSpPr>
         <p:spPr>
           <a:xfrm flipH="1">
-            <a:off x="8977312" y="2635249"/>
-            <a:ext cx="55562" cy="166688"/>
+            <a:off x="8516937" y="2230437"/>
+            <a:ext cx="55562" cy="174625"/>
           </a:xfrm>
           <a:prstGeom prst="line">
             <a:avLst/>
@@ -8507,7 +8469,7 @@
         </p:nvCxnSpPr>
         <p:spPr>
           <a:xfrm flipH="1">
-            <a:off x="8834437" y="2801937"/>
+            <a:off x="8374062" y="2405062"/>
             <a:ext cx="142875" cy="0"/>
           </a:xfrm>
           <a:prstGeom prst="line">
@@ -8543,8 +8505,8 @@
         </p:nvCxnSpPr>
         <p:spPr>
           <a:xfrm flipH="1" flipV="1">
-            <a:off x="8778874" y="2635249"/>
-            <a:ext cx="55563" cy="166688"/>
+            <a:off x="8318499" y="2230437"/>
+            <a:ext cx="55563" cy="174625"/>
           </a:xfrm>
           <a:prstGeom prst="line">
             <a:avLst/>
@@ -8579,8 +8541,8 @@
         </p:nvCxnSpPr>
         <p:spPr>
           <a:xfrm flipV="1">
-            <a:off x="8778874" y="2547937"/>
-            <a:ext cx="127000" cy="87312"/>
+            <a:off x="8318499" y="2151062"/>
+            <a:ext cx="127000" cy="79375"/>
           </a:xfrm>
           <a:prstGeom prst="line">
             <a:avLst/>
@@ -8615,7 +8577,7 @@
         </p:nvCxnSpPr>
         <p:spPr>
           <a:xfrm>
-            <a:off x="8905874" y="2547937"/>
+            <a:off x="8445499" y="2151062"/>
             <a:ext cx="0" cy="254000"/>
           </a:xfrm>
           <a:prstGeom prst="line">
@@ -8651,7 +8613,7 @@
         </p:nvCxnSpPr>
         <p:spPr>
           <a:xfrm>
-            <a:off x="8778874" y="2635249"/>
+            <a:off x="8318499" y="2230437"/>
             <a:ext cx="254000" cy="0"/>
           </a:xfrm>
           <a:prstGeom prst="line">
@@ -8687,8 +8649,8 @@
         </p:nvSpPr>
         <p:spPr>
           <a:xfrm>
-            <a:off x="9159874" y="2524124"/>
-            <a:ext cx="2492374" cy="325437"/>
+            <a:off x="8683624" y="2071687"/>
+            <a:ext cx="3079749" cy="420687"/>
           </a:xfrm>
           <a:prstGeom prst="rect">
             <a:avLst/>
@@ -8704,7 +8666,7 @@
           <a:p>
             <a:pPr algn="l" fontAlgn="base">
               <a:lnSpc>
-                <a:spcPts val="2187"/>
+                <a:spcPts val="2812"/>
               </a:lnSpc>
               <a:spcBef>
                 <a:spcPts val="0"/>
@@ -8712,7 +8674,7 @@
               <a:spcAft>
                 <a:spcPts val="0"/>
               </a:spcAft>
-              <a:defRPr sz="1499" b="1" i="0" lang="zh-CN" dirty="0">
+              <a:defRPr sz="1937" b="1" i="0" lang="zh-CN" dirty="0">
                 <a:solidFill>
                   <a:srgbClr val="7A5410"/>
                 </a:solidFill>
@@ -8722,7 +8684,7 @@
               </a:defRPr>
             </a:pPr>
             <a:r>
-              <a:rPr sz="1499" b="1" i="0" lang="zh-CN" dirty="0">
+              <a:rPr sz="1937" b="1" i="0" lang="zh-CN" dirty="0">
                 <a:solidFill>
                   <a:srgbClr val="7A5410"/>
                 </a:solidFill>
@@ -8743,12 +8705,12 @@
         </p:nvSpPr>
         <p:spPr>
           <a:xfrm>
-            <a:off x="8540749" y="3286124"/>
-            <a:ext cx="3254374" cy="888999"/>
+            <a:off x="8143874" y="2905124"/>
+            <a:ext cx="3714749" cy="857249"/>
           </a:xfrm>
           <a:prstGeom prst="roundRect">
             <a:avLst>
-              <a:gd name="adj" fmla="val 8035"/>
+              <a:gd name="adj" fmla="val 8333"/>
             </a:avLst>
           </a:prstGeom>
           <a:solidFill>
@@ -8791,12 +8753,12 @@
         </p:nvSpPr>
         <p:spPr>
           <a:xfrm>
-            <a:off x="8540749" y="3286124"/>
-            <a:ext cx="63499" cy="888999"/>
+            <a:off x="8143874" y="2905124"/>
+            <a:ext cx="47624" cy="857249"/>
           </a:xfrm>
           <a:prstGeom prst="roundRect">
             <a:avLst>
-              <a:gd name="adj" fmla="val 37500"/>
+              <a:gd name="adj" fmla="val 50000"/>
             </a:avLst>
           </a:prstGeom>
           <a:solidFill>
@@ -8837,8 +8799,8 @@
         </p:nvCxnSpPr>
         <p:spPr>
           <a:xfrm>
-            <a:off x="8905874" y="3619499"/>
-            <a:ext cx="0" cy="198438"/>
+            <a:off x="8445499" y="3214687"/>
+            <a:ext cx="0" cy="206375"/>
           </a:xfrm>
           <a:prstGeom prst="line">
             <a:avLst/>
@@ -8873,7 +8835,7 @@
         </p:nvCxnSpPr>
         <p:spPr>
           <a:xfrm>
-            <a:off x="8794749" y="3659187"/>
+            <a:off x="8334374" y="3262312"/>
             <a:ext cx="222250" cy="0"/>
           </a:xfrm>
           <a:prstGeom prst="line">
@@ -8909,8 +8871,8 @@
         </p:nvCxnSpPr>
         <p:spPr>
           <a:xfrm flipH="1">
-            <a:off x="8762999" y="3659187"/>
-            <a:ext cx="31750" cy="71437"/>
+            <a:off x="8302624" y="3262312"/>
+            <a:ext cx="31750" cy="63500"/>
           </a:xfrm>
           <a:prstGeom prst="line">
             <a:avLst/>
@@ -8945,7 +8907,7 @@
         </p:nvCxnSpPr>
         <p:spPr>
           <a:xfrm>
-            <a:off x="8762999" y="3730624"/>
+            <a:off x="8302624" y="3325812"/>
             <a:ext cx="63500" cy="0"/>
           </a:xfrm>
           <a:prstGeom prst="line">
@@ -8981,8 +8943,8 @@
         </p:nvCxnSpPr>
         <p:spPr>
           <a:xfrm flipH="1" flipV="1">
-            <a:off x="8794749" y="3659187"/>
-            <a:ext cx="31750" cy="71437"/>
+            <a:off x="8334374" y="3262312"/>
+            <a:ext cx="31750" cy="63500"/>
           </a:xfrm>
           <a:prstGeom prst="line">
             <a:avLst/>
@@ -9017,8 +8979,8 @@
         </p:nvCxnSpPr>
         <p:spPr>
           <a:xfrm flipH="1">
-            <a:off x="8985249" y="3659187"/>
-            <a:ext cx="31750" cy="71437"/>
+            <a:off x="8524874" y="3262312"/>
+            <a:ext cx="31750" cy="63500"/>
           </a:xfrm>
           <a:prstGeom prst="line">
             <a:avLst/>
@@ -9053,7 +9015,7 @@
         </p:nvCxnSpPr>
         <p:spPr>
           <a:xfrm>
-            <a:off x="8985249" y="3730624"/>
+            <a:off x="8524874" y="3325812"/>
             <a:ext cx="63500" cy="0"/>
           </a:xfrm>
           <a:prstGeom prst="line">
@@ -9089,8 +9051,8 @@
         </p:nvCxnSpPr>
         <p:spPr>
           <a:xfrm flipH="1" flipV="1">
-            <a:off x="9016999" y="3659187"/>
-            <a:ext cx="31750" cy="71437"/>
+            <a:off x="8556624" y="3262312"/>
+            <a:ext cx="31750" cy="63500"/>
           </a:xfrm>
           <a:prstGeom prst="line">
             <a:avLst/>
@@ -9125,7 +9087,7 @@
         </p:nvCxnSpPr>
         <p:spPr>
           <a:xfrm>
-            <a:off x="8842374" y="3841749"/>
+            <a:off x="8381999" y="3444874"/>
             <a:ext cx="127000" cy="0"/>
           </a:xfrm>
           <a:prstGeom prst="line">
@@ -9161,8 +9123,8 @@
         </p:nvSpPr>
         <p:spPr>
           <a:xfrm>
-            <a:off x="9159874" y="3571874"/>
-            <a:ext cx="2492374" cy="325437"/>
+            <a:off x="8683624" y="3119437"/>
+            <a:ext cx="3079749" cy="420687"/>
           </a:xfrm>
           <a:prstGeom prst="rect">
             <a:avLst/>
@@ -9178,7 +9140,7 @@
           <a:p>
             <a:pPr algn="l" fontAlgn="base">
               <a:lnSpc>
-                <a:spcPts val="2187"/>
+                <a:spcPts val="2812"/>
               </a:lnSpc>
               <a:spcBef>
                 <a:spcPts val="0"/>
@@ -9186,7 +9148,7 @@
               <a:spcAft>
                 <a:spcPts val="0"/>
               </a:spcAft>
-              <a:defRPr sz="1499" b="1" i="0" lang="zh-CN" dirty="0">
+              <a:defRPr sz="1937" b="1" i="0" lang="zh-CN" dirty="0">
                 <a:solidFill>
                   <a:srgbClr val="7A5410"/>
                 </a:solidFill>
@@ -9196,7 +9158,7 @@
               </a:defRPr>
             </a:pPr>
             <a:r>
-              <a:rPr sz="1499" b="1" i="0" lang="zh-CN" dirty="0">
+              <a:rPr sz="1937" b="1" i="0" lang="zh-CN" dirty="0">
                 <a:solidFill>
                   <a:srgbClr val="7A5410"/>
                 </a:solidFill>
@@ -9217,8 +9179,8 @@
         </p:nvSpPr>
         <p:spPr>
           <a:xfrm>
-            <a:off x="9255124" y="4603749"/>
-            <a:ext cx="1825624" cy="317499"/>
+            <a:off x="8810624" y="4079874"/>
+            <a:ext cx="2389187" cy="404812"/>
           </a:xfrm>
           <a:prstGeom prst="roundRect">
             <a:avLst>
@@ -9265,8 +9227,8 @@
         </p:nvSpPr>
         <p:spPr>
           <a:xfrm>
-            <a:off x="9334499" y="4635499"/>
-            <a:ext cx="1666874" cy="253999"/>
+            <a:off x="8889999" y="4111624"/>
+            <a:ext cx="2230437" cy="341312"/>
           </a:xfrm>
           <a:prstGeom prst="rect">
             <a:avLst/>
@@ -9282,7 +9244,7 @@
           <a:p>
             <a:pPr algn="ctr" fontAlgn="base">
               <a:lnSpc>
-                <a:spcPts val="1734"/>
+                <a:spcPts val="2359"/>
               </a:lnSpc>
               <a:spcBef>
                 <a:spcPts val="0"/>
@@ -9290,7 +9252,7 @@
               <a:spcAft>
                 <a:spcPts val="0"/>
               </a:spcAft>
-              <a:defRPr sz="1187" b="1" i="0" lang="zh-CN" dirty="0">
+              <a:defRPr sz="1624" b="0" i="0" lang="zh-CN" dirty="0">
                 <a:solidFill>
                   <a:srgbClr val="7A5410"/>
                 </a:solidFill>
@@ -9300,7 +9262,7 @@
               </a:defRPr>
             </a:pPr>
             <a:r>
-              <a:rPr sz="1187" b="1" i="0" lang="zh-CN" dirty="0">
+              <a:rPr sz="1624" b="0" i="0" lang="zh-CN" dirty="0">
                 <a:solidFill>
                   <a:srgbClr val="7A5410"/>
                 </a:solidFill>
@@ -9311,7 +9273,7 @@
               <a:t>近邻条件</a:t>
             </a:r>
             <a:r>
-              <a:rPr sz="1187" b="1" i="0" lang="zh-CN" dirty="0">
+              <a:rPr sz="1624" b="0" i="0" lang="zh-CN" dirty="0">
                 <a:solidFill>
                   <a:srgbClr val="7A5410"/>
                 </a:solidFill>
@@ -9322,7 +9284,7 @@
               <a:t> ≠ </a:t>
             </a:r>
             <a:r>
-              <a:rPr sz="1187" b="1" i="0" lang="zh-CN" dirty="0">
+              <a:rPr sz="1624" b="0" i="0" lang="zh-CN" dirty="0">
                 <a:solidFill>
                   <a:srgbClr val="7A5410"/>
                 </a:solidFill>
@@ -9343,12 +9305,12 @@
         </p:nvSpPr>
         <p:spPr>
           <a:xfrm>
-            <a:off x="8540749" y="5556249"/>
-            <a:ext cx="3254374" cy="888999"/>
+            <a:off x="8143874" y="5087937"/>
+            <a:ext cx="3714749" cy="857249"/>
           </a:xfrm>
           <a:prstGeom prst="roundRect">
             <a:avLst>
-              <a:gd name="adj" fmla="val 8035"/>
+              <a:gd name="adj" fmla="val 8333"/>
             </a:avLst>
           </a:prstGeom>
           <a:solidFill>
@@ -9394,7 +9356,7 @@
         </p:nvSpPr>
         <p:spPr>
           <a:xfrm>
-            <a:off x="8810624" y="5905499"/>
+            <a:off x="8350249" y="5421312"/>
             <a:ext cx="190499" cy="190499"/>
           </a:xfrm>
           <a:prstGeom prst="ellipse">
@@ -9438,7 +9400,7 @@
         </p:nvSpPr>
         <p:spPr>
           <a:xfrm>
-            <a:off x="8874124" y="5968999"/>
+            <a:off x="8413749" y="5484812"/>
             <a:ext cx="63499" cy="63499"/>
           </a:xfrm>
           <a:prstGeom prst="ellipse">
@@ -9482,8 +9444,8 @@
         </p:nvCxnSpPr>
         <p:spPr>
           <a:xfrm>
-            <a:off x="8905874" y="5857874"/>
-            <a:ext cx="0" cy="55563"/>
+            <a:off x="8445499" y="5373687"/>
+            <a:ext cx="0" cy="55562"/>
           </a:xfrm>
           <a:prstGeom prst="line">
             <a:avLst/>
@@ -9518,8 +9480,8 @@
         </p:nvCxnSpPr>
         <p:spPr>
           <a:xfrm>
-            <a:off x="8905874" y="6088062"/>
-            <a:ext cx="0" cy="55562"/>
+            <a:off x="8445499" y="5603874"/>
+            <a:ext cx="0" cy="47625"/>
           </a:xfrm>
           <a:prstGeom prst="line">
             <a:avLst/>
@@ -9554,7 +9516,7 @@
         </p:nvCxnSpPr>
         <p:spPr>
           <a:xfrm>
-            <a:off x="8762999" y="6000749"/>
+            <a:off x="8302624" y="5516562"/>
             <a:ext cx="55563" cy="0"/>
           </a:xfrm>
           <a:prstGeom prst="line">
@@ -9590,7 +9552,7 @@
         </p:nvCxnSpPr>
         <p:spPr>
           <a:xfrm>
-            <a:off x="8993187" y="6000749"/>
+            <a:off x="8532812" y="5516562"/>
             <a:ext cx="55562" cy="0"/>
           </a:xfrm>
           <a:prstGeom prst="line">
@@ -9626,8 +9588,8 @@
         </p:nvSpPr>
         <p:spPr>
           <a:xfrm>
-            <a:off x="9159874" y="5841999"/>
-            <a:ext cx="2492374" cy="325437"/>
+            <a:off x="8683624" y="5302249"/>
+            <a:ext cx="3079749" cy="420687"/>
           </a:xfrm>
           <a:prstGeom prst="rect">
             <a:avLst/>
@@ -9643,7 +9605,7 @@
           <a:p>
             <a:pPr algn="l" fontAlgn="base">
               <a:lnSpc>
-                <a:spcPts val="2187"/>
+                <a:spcPts val="2812"/>
               </a:lnSpc>
               <a:spcBef>
                 <a:spcPts val="0"/>
@@ -9651,7 +9613,7 @@
               <a:spcAft>
                 <a:spcPts val="0"/>
               </a:spcAft>
-              <a:defRPr sz="1499" b="1" i="0" lang="zh-CN" dirty="0">
+              <a:defRPr sz="1937" b="1" i="0" lang="zh-CN" dirty="0">
                 <a:solidFill>
                   <a:srgbClr val="5B6570"/>
                 </a:solidFill>
@@ -9661,7 +9623,7 @@
               </a:defRPr>
             </a:pPr>
             <a:r>
-              <a:rPr sz="1499" b="1" i="0" lang="zh-CN" dirty="0">
+              <a:rPr sz="1937" b="1" i="0" lang="zh-CN" dirty="0">
                 <a:solidFill>
                   <a:srgbClr val="5B6570"/>
                 </a:solidFill>
@@ -9682,8 +9644,8 @@
         </p:nvCxnSpPr>
         <p:spPr>
           <a:xfrm>
-            <a:off x="4397374" y="1595437"/>
-            <a:ext cx="238125" cy="0"/>
+            <a:off x="4373562" y="1238249"/>
+            <a:ext cx="182562" cy="0"/>
           </a:xfrm>
           <a:prstGeom prst="line">
             <a:avLst/>
@@ -9718,8 +9680,8 @@
         </p:nvCxnSpPr>
         <p:spPr>
           <a:xfrm>
-            <a:off x="4397374" y="2484437"/>
-            <a:ext cx="238125" cy="0"/>
+            <a:off x="4373562" y="2285999"/>
+            <a:ext cx="182562" cy="0"/>
           </a:xfrm>
           <a:prstGeom prst="line">
             <a:avLst/>
@@ -9754,8 +9716,8 @@
         </p:nvCxnSpPr>
         <p:spPr>
           <a:xfrm>
-            <a:off x="4397374" y="3373437"/>
-            <a:ext cx="238125" cy="0"/>
+            <a:off x="4373562" y="3325812"/>
+            <a:ext cx="182562" cy="0"/>
           </a:xfrm>
           <a:prstGeom prst="line">
             <a:avLst/>
@@ -9790,8 +9752,8 @@
         </p:nvCxnSpPr>
         <p:spPr>
           <a:xfrm>
-            <a:off x="4397374" y="4262437"/>
-            <a:ext cx="238125" cy="0"/>
+            <a:off x="4373562" y="4373562"/>
+            <a:ext cx="182562" cy="0"/>
           </a:xfrm>
           <a:prstGeom prst="line">
             <a:avLst/>
@@ -9826,8 +9788,8 @@
         </p:nvCxnSpPr>
         <p:spPr>
           <a:xfrm>
-            <a:off x="4635499" y="1595437"/>
-            <a:ext cx="0" cy="2667000"/>
+            <a:off x="4556124" y="1238249"/>
+            <a:ext cx="0" cy="3135313"/>
           </a:xfrm>
           <a:prstGeom prst="line">
             <a:avLst/>
@@ -9862,8 +9824,8 @@
         </p:nvSpPr>
         <p:spPr>
           <a:xfrm>
-            <a:off x="4635500" y="2881312"/>
-            <a:ext cx="254000" cy="95250"/>
+            <a:off x="4556125" y="2762250"/>
+            <a:ext cx="198437" cy="95250"/>
           </a:xfrm>
           <a:custGeom>
             <a:avLst/>
@@ -9872,24 +9834,24 @@
             <a:cxnLst/>
             <a:rect l="l" t="t" r="r" b="b"/>
             <a:pathLst>
-              <a:path w="32000" h="12000">
+              <a:path w="25000" h="12000">
                 <a:moveTo>
                   <a:pt x="0" y="4750"/>
                 </a:moveTo>
                 <a:lnTo>
-                  <a:pt x="17000" y="4750"/>
+                  <a:pt x="10000" y="4750"/>
                 </a:lnTo>
                 <a:lnTo>
-                  <a:pt x="17000" y="0"/>
+                  <a:pt x="10000" y="0"/>
                 </a:lnTo>
                 <a:lnTo>
-                  <a:pt x="32000" y="6000"/>
+                  <a:pt x="25000" y="6000"/>
                 </a:lnTo>
                 <a:lnTo>
-                  <a:pt x="17000" y="12000"/>
+                  <a:pt x="10000" y="12000"/>
                 </a:lnTo>
                 <a:lnTo>
-                  <a:pt x="17000" y="7250"/>
+                  <a:pt x="10000" y="7250"/>
                 </a:lnTo>
                 <a:lnTo>
                   <a:pt x="0" y="7250"/>
@@ -9936,8 +9898,8 @@
         </p:nvCxnSpPr>
         <p:spPr>
           <a:xfrm>
-            <a:off x="7985124" y="3333749"/>
-            <a:ext cx="190500" cy="0"/>
+            <a:off x="7739062" y="2809874"/>
+            <a:ext cx="182562" cy="0"/>
           </a:xfrm>
           <a:prstGeom prst="line">
             <a:avLst/>
@@ -9972,8 +9934,8 @@
         </p:nvCxnSpPr>
         <p:spPr>
           <a:xfrm>
-            <a:off x="8175624" y="1635124"/>
-            <a:ext cx="0" cy="2095500"/>
+            <a:off x="7921624" y="1238249"/>
+            <a:ext cx="0" cy="2087563"/>
           </a:xfrm>
           <a:prstGeom prst="line">
             <a:avLst/>
@@ -10008,8 +9970,8 @@
         </p:nvSpPr>
         <p:spPr>
           <a:xfrm>
-            <a:off x="8175625" y="1587500"/>
-            <a:ext cx="333375" cy="95250"/>
+            <a:off x="7921625" y="1190625"/>
+            <a:ext cx="198437" cy="95250"/>
           </a:xfrm>
           <a:custGeom>
             <a:avLst/>
@@ -10018,24 +9980,24 @@
             <a:cxnLst/>
             <a:rect l="l" t="t" r="r" b="b"/>
             <a:pathLst>
-              <a:path w="42000" h="12000">
+              <a:path w="25000" h="12000">
                 <a:moveTo>
                   <a:pt x="0" y="4750"/>
                 </a:moveTo>
                 <a:lnTo>
-                  <a:pt x="27000" y="4750"/>
+                  <a:pt x="10000" y="4750"/>
                 </a:lnTo>
                 <a:lnTo>
-                  <a:pt x="27000" y="0"/>
+                  <a:pt x="10000" y="0"/>
                 </a:lnTo>
                 <a:lnTo>
-                  <a:pt x="42000" y="6000"/>
+                  <a:pt x="25000" y="6000"/>
                 </a:lnTo>
                 <a:lnTo>
-                  <a:pt x="27000" y="12000"/>
+                  <a:pt x="10000" y="12000"/>
                 </a:lnTo>
                 <a:lnTo>
-                  <a:pt x="27000" y="7250"/>
+                  <a:pt x="10000" y="7250"/>
                 </a:lnTo>
                 <a:lnTo>
                   <a:pt x="0" y="7250"/>
@@ -10082,8 +10044,8 @@
         </p:nvSpPr>
         <p:spPr>
           <a:xfrm>
-            <a:off x="8175625" y="2635250"/>
-            <a:ext cx="333375" cy="95250"/>
+            <a:off x="7921625" y="2238375"/>
+            <a:ext cx="198437" cy="95250"/>
           </a:xfrm>
           <a:custGeom>
             <a:avLst/>
@@ -10092,24 +10054,24 @@
             <a:cxnLst/>
             <a:rect l="l" t="t" r="r" b="b"/>
             <a:pathLst>
-              <a:path w="42000" h="12000">
+              <a:path w="25000" h="12000">
                 <a:moveTo>
                   <a:pt x="0" y="4750"/>
                 </a:moveTo>
                 <a:lnTo>
-                  <a:pt x="27000" y="4750"/>
+                  <a:pt x="10000" y="4750"/>
                 </a:lnTo>
                 <a:lnTo>
-                  <a:pt x="27000" y="0"/>
+                  <a:pt x="10000" y="0"/>
                 </a:lnTo>
                 <a:lnTo>
-                  <a:pt x="42000" y="6000"/>
+                  <a:pt x="25000" y="6000"/>
                 </a:lnTo>
                 <a:lnTo>
-                  <a:pt x="27000" y="12000"/>
+                  <a:pt x="10000" y="12000"/>
                 </a:lnTo>
                 <a:lnTo>
-                  <a:pt x="27000" y="7250"/>
+                  <a:pt x="10000" y="7250"/>
                 </a:lnTo>
                 <a:lnTo>
                   <a:pt x="0" y="7250"/>
@@ -10156,8 +10118,8 @@
         </p:nvSpPr>
         <p:spPr>
           <a:xfrm>
-            <a:off x="8175625" y="3683000"/>
-            <a:ext cx="333375" cy="95250"/>
+            <a:off x="7921625" y="3278187"/>
+            <a:ext cx="198437" cy="95250"/>
           </a:xfrm>
           <a:custGeom>
             <a:avLst/>
@@ -10166,24 +10128,24 @@
             <a:cxnLst/>
             <a:rect l="l" t="t" r="r" b="b"/>
             <a:pathLst>
-              <a:path w="42000" h="12000">
+              <a:path w="25000" h="12000">
                 <a:moveTo>
                   <a:pt x="0" y="4750"/>
                 </a:moveTo>
                 <a:lnTo>
-                  <a:pt x="27000" y="4750"/>
+                  <a:pt x="10000" y="4750"/>
                 </a:lnTo>
                 <a:lnTo>
-                  <a:pt x="27000" y="0"/>
+                  <a:pt x="10000" y="0"/>
                 </a:lnTo>
                 <a:lnTo>
-                  <a:pt x="42000" y="6000"/>
+                  <a:pt x="25000" y="6000"/>
                 </a:lnTo>
                 <a:lnTo>
-                  <a:pt x="27000" y="12000"/>
+                  <a:pt x="10000" y="12000"/>
                 </a:lnTo>
                 <a:lnTo>
-                  <a:pt x="27000" y="7250"/>
+                  <a:pt x="10000" y="7250"/>
                 </a:lnTo>
                 <a:lnTo>
                   <a:pt x="0" y="7250"/>
@@ -10230,8 +10192,8 @@
         </p:nvCxnSpPr>
         <p:spPr>
           <a:xfrm>
-            <a:off x="4397374" y="6000749"/>
-            <a:ext cx="4111625" cy="0"/>
+            <a:off x="4373562" y="5516562"/>
+            <a:ext cx="3738562" cy="0"/>
           </a:xfrm>
           <a:prstGeom prst="line">
             <a:avLst/>
@@ -10270,8 +10232,8 @@
         </p:nvSpPr>
         <p:spPr>
           <a:xfrm>
-            <a:off x="6159499" y="5841999"/>
-            <a:ext cx="587374" cy="317499"/>
+            <a:off x="5889624" y="5310187"/>
+            <a:ext cx="698499" cy="404812"/>
           </a:xfrm>
           <a:prstGeom prst="roundRect">
             <a:avLst>
@@ -10318,8 +10280,8 @@
         </p:nvSpPr>
         <p:spPr>
           <a:xfrm>
-            <a:off x="6238874" y="5873749"/>
-            <a:ext cx="428624" cy="253999"/>
+            <a:off x="5968999" y="5341937"/>
+            <a:ext cx="539749" cy="341312"/>
           </a:xfrm>
           <a:prstGeom prst="rect">
             <a:avLst/>
@@ -10335,7 +10297,7 @@
           <a:p>
             <a:pPr algn="ctr" fontAlgn="base">
               <a:lnSpc>
-                <a:spcPts val="1734"/>
+                <a:spcPts val="2359"/>
               </a:lnSpc>
               <a:spcBef>
                 <a:spcPts val="0"/>
@@ -10343,7 +10305,7 @@
               <a:spcAft>
                 <a:spcPts val="0"/>
               </a:spcAft>
-              <a:defRPr sz="1187" b="1" i="0" lang="zh-CN" dirty="0">
+              <a:defRPr sz="1624" b="0" i="0" lang="zh-CN" dirty="0">
                 <a:solidFill>
                   <a:srgbClr val="27303A"/>
                 </a:solidFill>
@@ -10353,7 +10315,7 @@
               </a:defRPr>
             </a:pPr>
             <a:r>
-              <a:rPr sz="1187" b="1" i="0" lang="zh-CN" dirty="0">
+              <a:rPr sz="1624" b="0" i="0" lang="zh-CN" dirty="0">
                 <a:solidFill>
                   <a:srgbClr val="27303A"/>
                 </a:solidFill>
